--- a/downloads/presentations/modules/arc-220.pptx
+++ b/downloads/presentations/modules/arc-220.pptx
@@ -615,7 +615,8 @@
               <a:rPr lang="en-US" dirty="0"/>
               <a:t>Core Concepts
 API. An API allows one system to request data or services from another system. In AI workflows, APIs may support retrieval, task creation, status updates, or integration with systems of record. API access must be governed by permissions, authentication, rate limits, logging, and intended use.
-Implementation guide. An implementation guide specifies how a standard should be used for a particular purpose. Public health implementation guides help reduce ambiguity by defining required data elements, profiles, value sets, and exchange expectations.</a:t>
+Implementation guide. An implementation guide specifies how a standard should be used for a particular purpose. Public health implementation guides help reduce ambiguity by defining required data elements, profiles, value sets, and exchange expectations.
+Application guidance: Connect the concept to public health purpose, responsible use, required safeguards, documentation, and the next action a department should take.</a:t>
             </a:r>
             <a:endParaRPr lang="en-US" dirty="0"/>
           </a:p>
@@ -705,7 +706,8 @@
               <a:rPr lang="en-US" dirty="0"/>
               <a:t>Public Health Example
 An immunization information system may receive HL7 v2 VXU messages from providers and pharmacies. If an AI tool is used to identify vaccination gaps or generate reminder lists, it depends on correctly parsed vaccine codes, patient matching, dates, dose validity, and provider information. Interoperability failures can look like epidemiologic gaps even when the problem is actually message quality.
-A public health agency exploring AI-supported case summaries from EHR data may need to understand whether the data arrive as CDA documents, FHIR resources, or extracted fields in a surveillance system. Each option affects what the AI can access, how source traceability is preserved, and how errors are corrected. Standards knowledge helps staff evaluate the feasibility and safety of the proposed workflow.</a:t>
+A public health agency exploring AI-supported case summaries from EHR data may need to understand whether the data arrive as CDA documents, FHIR resources, or extracted fields in a surveillance system. Each option affects what the AI can access, how source traceability is preserved, and how errors are corrected. Standards knowledge helps staff evaluate the feasibility and safety of the proposed workflow.
+Application guidance: Connect the concept to public health purpose, responsible use, required safeguards, documentation, and the next action a department should take.</a:t>
             </a:r>
             <a:endParaRPr lang="en-US" dirty="0"/>
           </a:p>
@@ -796,7 +798,8 @@
               <a:t>Technical Deep Dive
 Interoperability review starts by identifying the sending system, receiving system, exchange standard, data elements, and intended use. Staff should ask whether the workflow uses messages, documents, resources, files, or manual entry. They should also identify required terminology systems, such as LOINC, SNOMED CT, CVX, ICD-10-CM, UCUM, or local codes.
 Validation is a central part of interoperability. A message or API response may be syntactically valid but still not fit for a public health use case. For example, a lab result may include a test code but not the specimen source, or an immunization message may include a vaccine code but not enough information to evaluate dose validity. AI readiness requires validation against the intended public health workflow, not only technical message acceptance.
-Interoperability requirements should be explicit in AI procurement and implementation. Requirements may include supported standards, required fields, value sets, error handling, data provenance, access controls, audit logs, test scenarios, implementation guide conformance, and documentation. These details help prevent expensive custom workarounds and unsafe manual data movement.</a:t>
+Interoperability requirements should be explicit in AI procurement and implementation. Requirements may include supported standards, required fields, value sets, error handling, data provenance, access controls, audit logs, test scenarios, implementation guide conformance, and documentation. These details help prevent expensive custom workarounds and unsafe manual data movement.
+Application guidance: Connect the concept to public health purpose, responsible use, required safeguards, documentation, and the next action a department should take.</a:t>
             </a:r>
             <a:endParaRPr lang="en-US" dirty="0"/>
           </a:p>
@@ -887,7 +890,8 @@
               <a:t>Risks, Failure Modes, and Guardrails
 Vague standards claims. Vendors may claim standards support without demonstrating required profiles, data elements, or workflows. Guardrails include conformance testing, test messages, implementation guide references, and acceptance criteria.
 Manual workarounds. Weak interoperability can lead to copying and pasting sensitive data into AI tools. Guardrails include approved interfaces, secure environments, and prohibitions on unapproved data movement.
-Terminology mismatch. Codes may be missing, local, outdated, or mapped incorrectly. Guardrails include terminology governance, value-set review, and data quality monitoring.</a:t>
+Terminology mismatch. Codes may be missing, local, outdated, or mapped incorrectly. Guardrails include terminology governance, value-set review, and data quality monitoring.
+Application guidance: Identify what could go wrong, who could be affected, what safeguards are needed, and what evidence should be reviewed before use expands.</a:t>
             </a:r>
             <a:endParaRPr lang="en-US" dirty="0"/>
           </a:p>
@@ -976,7 +980,8 @@
             <a:r>
               <a:rPr lang="en-US" dirty="0"/>
               <a:t>Risks, Failure Modes, and Guardrails
-Over-reliance on structured data. Structured exchange may omit context found in notes or local fields. Guardrails include source review, workflow validation, and documentation of known data gaps.</a:t>
+Over-reliance on structured data. Structured exchange may omit context found in notes or local fields. Guardrails include source review, workflow validation, and documentation of known data gaps.
+Application guidance: Identify what could go wrong, who could be affected, what safeguards are needed, and what evidence should be reviewed before use expands.</a:t>
             </a:r>
             <a:endParaRPr lang="en-US" dirty="0"/>
           </a:p>
@@ -1065,7 +1070,8 @@
             <a:r>
               <a:rPr lang="en-US" dirty="0"/>
               <a:t>Application to AI-Supported Workflows
-Generative AI may summarize structured and narrative data received through interoperable exchange, but it must preserve source traceability. Predictive analytics may depend on standardized fields and terminology, so interoperability gaps can affect model validity. RAG tools may retrieve implementation guides or agency protocols, but document governance is needed to avoid stale guidance. Agentic AI may use APIs to take actions, making permissions, audit logs, and write-back controls essential.</a:t>
+Generative AI may summarize structured and narrative data received through interoperable exchange, but it must preserve source traceability. Predictive analytics may depend on standardized fields and terminology, so interoperability gaps can affect model validity. RAG tools may retrieve implementation guides or agency protocols, but document governance is needed to avoid stale guidance. Agentic AI may use APIs to take actions, making permissions, audit logs, and write-back controls essential.
+Application guidance: Use the concept to clarify workflow changes, dependencies, staffing, procurement requirements, training needs, and implementation checkpoints.</a:t>
             </a:r>
             <a:endParaRPr lang="en-US" dirty="0"/>
           </a:p>
@@ -1156,7 +1162,8 @@
               <a:t>Reflection Questions
 Which standards are used in your agency’s major data exchange workflows?
 Which workflows still depend on manual uploads or copy-paste processes?
-What vendor claims would need to be tested before implementation?</a:t>
+What vendor claims would need to be tested before implementation?
+Application guidance: Connect the concept to public health purpose, responsible use, required safeguards, documentation, and the next action a department should take.</a:t>
             </a:r>
             <a:endParaRPr lang="en-US" dirty="0"/>
           </a:p>
@@ -1246,7 +1253,8 @@
               <a:rPr lang="en-US" dirty="0"/>
               <a:t>Reflection Questions
 Which terminology standards are required for the workflow?
-How would interoperability gaps affect AI outputs or equity?</a:t>
+How would interoperability gaps affect AI outputs or equity?
+Application guidance: Connect the concept to public health purpose, responsible use, required safeguards, documentation, and the next action a department should take.</a:t>
             </a:r>
             <a:endParaRPr lang="en-US" dirty="0"/>
           </a:p>
@@ -1336,7 +1344,8 @@
               <a:rPr lang="en-US" dirty="0"/>
               <a:t>Practical Exercise
 Create an interoperability review checklist for one proposed AI-supported workflow. Identify the sending and receiving systems, exchange standard, required data elements, terminology standards, validation tests, error handling, security controls, audit logs, and vendor questions.
-Include at least one test scenario that would show whether the exchange supports the public health use case.</a:t>
+Include at least one test scenario that would show whether the exchange supports the public health use case.
+Application guidance: Use the assignment to test whether you can explain the concept, apply it to a realistic public health situation, and identify what would need review before the work moves forward.</a:t>
             </a:r>
             <a:endParaRPr lang="en-US" dirty="0"/>
           </a:p>
@@ -1427,7 +1436,8 @@
               <a:t>Expected Artifact or Evidence
 Interoperability checklist
 Data exchange diagram
-Vendor questions</a:t>
+Vendor questions
+Application guidance: Connect the concept to public health purpose, responsible use, required safeguards, documentation, and the next action a department should take.</a:t>
             </a:r>
             <a:endParaRPr lang="en-US" dirty="0"/>
           </a:p>
@@ -1608,7 +1618,8 @@
             <a:r>
               <a:rPr lang="en-US" dirty="0"/>
               <a:t>Expected Artifact or Evidence
-Test scenario and acceptance criteria</a:t>
+Test scenario and acceptance criteria
+Application guidance: Connect the concept to public health purpose, responsible use, required safeguards, documentation, and the next action a department should take.</a:t>
             </a:r>
             <a:endParaRPr lang="en-US" dirty="0"/>
           </a:p>
@@ -1700,7 +1711,8 @@
 Interoperability checklist
 Data exchange diagram
 Vendor questions
-Test scenario and acceptance criteria</a:t>
+Test scenario and acceptance criteria
+Application guidance: Use the assignment to test whether you can explain the concept, apply it to a realistic public health situation, and identify what would need review before the work moves forward.</a:t>
             </a:r>
             <a:endParaRPr lang="en-US" dirty="0"/>
           </a:p>
@@ -1793,7 +1805,8 @@
 2. What is FHIR commonly used for?
 3. What is an implementation guide?
 4. Which question should be asked during AI vendor review?
-5. What is strong completion evidence for this module?</a:t>
+5. What is strong completion evidence for this module?
+Application guidance: Use the assignment to test whether you can explain the concept, apply it to a realistic public health situation, and identify what would need review before the work moves forward.</a:t>
             </a:r>
             <a:endParaRPr lang="en-US" dirty="0"/>
           </a:p>
@@ -1886,7 +1899,8 @@
 HL7 US Core Implementation Guide: https://build.fhir.org/ig/HL7/US-Core/
 ONC USCDI resources: https://isp.healthit.gov/united-states-core-data-interoperability-uscdi
 CDC Public Health Data Strategy: https://www.cdc.gov/public-health-data-strategy/php/about/index.html
-Public health implementation guides for eCR, ELR, IIS, and syndromic surveillance</a:t>
+Public health implementation guides for eCR, ELR, IIS, and syndromic surveillance
+Application guidance: Connect the concept to public health purpose, responsible use, required safeguards, documentation, and the next action a department should take.</a:t>
             </a:r>
             <a:endParaRPr lang="en-US" dirty="0"/>
           </a:p>
@@ -2165,7 +2179,8 @@
 Distinguish among HL7 v2 messages, CDA documents, FHIR resources, and APIs.
 Identify where interoperability standards appear in public health workflows.
 Explain the purpose of implementation guides and terminology standards.
-Develop interoperability requirements and vendor questions for AI-supported workflows.</a:t>
+Develop interoperability requirements and vendor questions for AI-supported workflows.
+Application guidance: Use the assignment to test whether you can explain the concept, apply it to a realistic public health situation, and identify what would need review before the work moves forward.</a:t>
             </a:r>
             <a:endParaRPr lang="en-US" dirty="0"/>
           </a:p>
@@ -2254,7 +2269,8 @@
             <a:r>
               <a:rPr lang="en-US" dirty="0"/>
               <a:t>Module Overview
-Public health AI depends on the ability of systems to exchange and interpret data. Interoperability is the discipline that makes this exchange possible across EHRs, laboratories, HIEs, IISs, surveillance systems, vital records systems, and public health platforms. This module introduces the major standards that public health staff encounter, including HL7 v2, CDA, FHIR, implementation guides, APIs, and terminology standards.</a:t>
+Public health AI depends on the ability of systems to exchange and interpret data. Interoperability is the discipline that makes this exchange possible across EHRs, laboratories, HIEs, IISs, surveillance systems, vital records systems, and public health platforms. This module introduces the major standards that public health staff encounter, including HL7 v2, CDA, FHIR, implementation guides, APIs, and terminology standards.
+Application guidance: Connect the concept to public health purpose, responsible use, required safeguards, documentation, and the next action a department should take.</a:t>
             </a:r>
             <a:endParaRPr lang="en-US" dirty="0"/>
           </a:p>
@@ -2343,7 +2359,8 @@
             <a:r>
               <a:rPr lang="en-US" dirty="0"/>
               <a:t>Jurisdiction and Agency Policy Note
-This national-level module is intended for training and planning purposes. It does not replace legal, privacy, procurement, civil rights, records, or agency policy review. Learners should confirm applicable requirements in their own jurisdiction and organization before implementing AI-supported workflows.</a:t>
+This national-level module is intended for training and planning purposes. It does not replace legal, privacy, procurement, civil rights, records, or agency policy review. Learners should confirm applicable requirements in their own jurisdiction and organization before implementing AI-supported workflows.
+Application guidance: Translate this concept into clear decision rights, review steps, documentation expectations, and escalation paths before an AI-supported workflow is approved.</a:t>
             </a:r>
             <a:endParaRPr lang="en-US" dirty="0"/>
           </a:p>
@@ -2434,7 +2451,8 @@
               <a:t>Why This Topic Matters for Public Health AI
 Interoperability matters because AI tools cannot safely use data they cannot access, parse, or interpret. A public health agency may receive data from hundreds or thousands of healthcare and laboratory partners. Without consistent standards, data exchange becomes a patchwork of custom interfaces, manual uploads, local workarounds, and incomplete fields. AI tools built on top of that environment may appear sophisticated while depending on fragile inputs.
 Standards also affect equity and efficiency. When data exchange is inconsistent, some providers or communities may be represented more completely than others. AI-supported surveillance, prioritization, or outreach may then reflect uneven reporting infrastructure rather than true public health need. Interoperability review helps identify these gaps before outputs are used operationally.
-For procurement and implementation, interoperability knowledge helps public health staff move beyond broad vendor claims. A vendor statement that a product supports FHIR or APIs is not enough. Staff need to know which resources, profiles, data elements, security controls, terminology mappings, validation methods, and workflows are supported.</a:t>
+For procurement and implementation, interoperability knowledge helps public health staff move beyond broad vendor claims. A vendor statement that a product supports FHIR or APIs is not enough. Staff need to know which resources, profiles, data elements, security controls, terminology mappings, validation methods, and workflows are supported.
+Application guidance: Connect the concept to public health purpose, responsible use, required safeguards, documentation, and the next action a department should take.</a:t>
             </a:r>
             <a:endParaRPr lang="en-US" dirty="0"/>
           </a:p>
@@ -2525,7 +2543,8 @@
               <a:t>Core Concepts
 HL7 v2. HL7 v2 is a widely used message-based standard in healthcare and public health. It is common in laboratory reporting, immunization messaging, admission-discharge-transfer notifications, and other interfaces. HL7 v2 is mature and widely deployed, but messages can vary by implementation, making validation and local onboarding important.
 CDA. Clinical Document Architecture is a document-based standard used to represent structured clinical documents. CDA has been used in public health reporting contexts, including case reporting. CDA documents can include structured sections and narrative text, which can be useful but also require careful parsing and interpretation.
-FHIR. FHIR, or Fast Healthcare Interoperability Resources, represents health information as modular resources and commonly supports API-based exchange. FHIR can make specific data easier to request and reuse, but FHIR compatibility does not guarantee that required public health data are complete or available.</a:t>
+FHIR. FHIR, or Fast Healthcare Interoperability Resources, represents health information as modular resources and commonly supports API-based exchange. FHIR can make specific data easier to request and reuse, but FHIR compatibility does not guarantee that required public health data are complete or available.
+Application guidance: Connect the concept to public health purpose, responsible use, required safeguards, documentation, and the next action a department should take.</a:t>
             </a:r>
             <a:endParaRPr lang="en-US" dirty="0"/>
           </a:p>
@@ -3296,8 +3315,8 @@
         </p:nvSpPr>
         <p:spPr>
           <a:xfrm>
-            <a:off x="9966960" y="6537960"/>
-            <a:ext cx="1645920" cy="201168"/>
+            <a:off x="9646920" y="6537960"/>
+            <a:ext cx="1965960" cy="201168"/>
           </a:xfrm>
           <a:prstGeom prst="rect">
             <a:avLst/>
@@ -3321,7 +3340,7 @@
                 <a:ea typeface="Aptos" pitchFamily="34" charset="-122"/>
                 <a:cs typeface="Aptos" pitchFamily="34" charset="-120"/>
               </a:rPr>
-              <a:t>Â© Paula Soper</a:t>
+              <a:t>Copyright Paula Soper</a:t>
             </a:r>
             <a:endParaRPr lang="en-US" sz="800" dirty="0"/>
           </a:p>
@@ -3416,7 +3435,7 @@
         <p:spPr>
           <a:xfrm>
             <a:off x="868680" y="1508760"/>
-            <a:ext cx="6537960" cy="4160520"/>
+            <a:ext cx="6309360" cy="4160520"/>
           </a:xfrm>
           <a:prstGeom prst="rect">
             <a:avLst/>
@@ -3481,12 +3500,12 @@
         </p:nvSpPr>
         <p:spPr>
           <a:xfrm>
-            <a:off x="7909560" y="1417320"/>
-            <a:ext cx="3154680" cy="1828800"/>
+            <a:off x="7635240" y="1325880"/>
+            <a:ext cx="3474720" cy="1325880"/>
           </a:xfrm>
           <a:prstGeom prst="roundRect">
             <a:avLst>
-              <a:gd name="adj" fmla="val 6000"/>
+              <a:gd name="adj" fmla="val 8276"/>
             </a:avLst>
           </a:prstGeom>
           <a:solidFill>
@@ -3508,8 +3527,8 @@
         </p:nvSpPr>
         <p:spPr>
           <a:xfrm>
-            <a:off x="8074152" y="1563624"/>
-            <a:ext cx="2825496" cy="256032"/>
+            <a:off x="7799832" y="1472184"/>
+            <a:ext cx="3145536" cy="256032"/>
           </a:xfrm>
           <a:prstGeom prst="rect">
             <a:avLst/>
@@ -3533,7 +3552,7 @@
                 <a:ea typeface="Aptos" pitchFamily="34" charset="-122"/>
                 <a:cs typeface="Aptos" pitchFamily="34" charset="-120"/>
               </a:rPr>
-              <a:t>Key idea</a:t>
+              <a:t>Core concept</a:t>
             </a:r>
             <a:endParaRPr lang="en-US" sz="1300" dirty="0"/>
           </a:p>
@@ -3547,8 +3566,8 @@
         </p:nvSpPr>
         <p:spPr>
           <a:xfrm>
-            <a:off x="8074152" y="1920240"/>
-            <a:ext cx="2825496" cy="1188720"/>
+            <a:off x="7799832" y="1828800"/>
+            <a:ext cx="3145536" cy="685800"/>
           </a:xfrm>
           <a:prstGeom prst="rect">
             <a:avLst/>
@@ -3588,12 +3607,153 @@
         </p:nvSpPr>
         <p:spPr>
           <a:xfrm>
-            <a:off x="7909560" y="3520440"/>
-            <a:ext cx="3154680" cy="1737360"/>
+            <a:off x="7635240" y="2788920"/>
+            <a:ext cx="3474720" cy="1536192"/>
           </a:xfrm>
           <a:prstGeom prst="roundRect">
             <a:avLst>
-              <a:gd name="adj" fmla="val 6316"/>
+              <a:gd name="adj" fmla="val 7143"/>
+            </a:avLst>
+          </a:prstGeom>
+          <a:solidFill>
+            <a:srgbClr val="FFFFFF">
+              <a:alpha val="88000"/>
+            </a:srgbClr>
+          </a:solidFill>
+          <a:ln w="12700">
+            <a:solidFill>
+              <a:srgbClr val="D6E8F2"/>
+            </a:solidFill>
+            <a:prstDash val="solid"/>
+          </a:ln>
+        </p:spPr>
+      </p:sp>
+      <p:sp>
+        <p:nvSpPr>
+          <p:cNvPr id="14" name="Shape 12"/>
+          <p:cNvSpPr/>
+          <p:nvPr/>
+        </p:nvSpPr>
+        <p:spPr>
+          <a:xfrm>
+            <a:off x="8074152" y="3291840"/>
+            <a:ext cx="2596896" cy="749808"/>
+          </a:xfrm>
+          <a:prstGeom prst="rect">
+            <a:avLst/>
+          </a:prstGeom>
+          <a:solidFill>
+            <a:srgbClr val="EAF6F8"/>
+          </a:solidFill>
+          <a:ln w="12700">
+            <a:solidFill>
+              <a:srgbClr val="8ABBD8"/>
+            </a:solidFill>
+            <a:prstDash val="solid"/>
+          </a:ln>
+        </p:spPr>
+      </p:sp>
+      <p:sp>
+        <p:nvSpPr>
+          <p:cNvPr id="15" name="Shape 13"/>
+          <p:cNvSpPr/>
+          <p:nvPr/>
+        </p:nvSpPr>
+        <p:spPr>
+          <a:xfrm>
+            <a:off x="8202168" y="3721608"/>
+            <a:ext cx="2340864" cy="0"/>
+          </a:xfrm>
+          <a:prstGeom prst="line">
+            <a:avLst/>
+          </a:prstGeom>
+          <a:noFill/>
+          <a:ln w="19050">
+            <a:solidFill>
+              <a:srgbClr val="0068B7"/>
+            </a:solidFill>
+            <a:prstDash val="solid"/>
+          </a:ln>
+        </p:spPr>
+      </p:sp>
+      <p:sp>
+        <p:nvSpPr>
+          <p:cNvPr id="16" name="Shape 14"/>
+          <p:cNvSpPr/>
+          <p:nvPr/>
+        </p:nvSpPr>
+        <p:spPr>
+          <a:xfrm>
+            <a:off x="9198864" y="4206240"/>
+            <a:ext cx="347472" cy="347472"/>
+          </a:xfrm>
+          <a:prstGeom prst="ellipse">
+            <a:avLst/>
+          </a:prstGeom>
+          <a:solidFill>
+            <a:srgbClr val="2F8A28"/>
+          </a:solidFill>
+          <a:ln w="12700">
+            <a:solidFill>
+              <a:srgbClr val="2F8A28"/>
+            </a:solidFill>
+            <a:prstDash val="solid"/>
+          </a:ln>
+        </p:spPr>
+      </p:sp>
+      <p:sp>
+        <p:nvSpPr>
+          <p:cNvPr id="17" name="Text 15"/>
+          <p:cNvSpPr/>
+          <p:nvPr/>
+        </p:nvSpPr>
+        <p:spPr>
+          <a:xfrm>
+            <a:off x="7909560" y="3977640"/>
+            <a:ext cx="2926080" cy="182880"/>
+          </a:xfrm>
+          <a:prstGeom prst="rect">
+            <a:avLst/>
+          </a:prstGeom>
+          <a:noFill/>
+          <a:ln/>
+        </p:spPr>
+        <p:txBody>
+          <a:bodyPr wrap="square" lIns="0" tIns="0" rIns="0" bIns="0" rtlCol="0" anchor="ctr"/>
+          <a:lstStyle/>
+          <a:p>
+            <a:pPr algn="ctr" indent="0" marL="0">
+              <a:buNone/>
+            </a:pPr>
+            <a:r>
+              <a:rPr lang="en-US" sz="1000" dirty="0">
+                <a:solidFill>
+                  <a:srgbClr val="003A63"/>
+                </a:solidFill>
+                <a:latin typeface="Aptos" pitchFamily="34" charset="0"/>
+                <a:ea typeface="Aptos" pitchFamily="34" charset="-122"/>
+                <a:cs typeface="Aptos" pitchFamily="34" charset="-120"/>
+              </a:rPr>
+              <a:t>Concept to action</a:t>
+            </a:r>
+            <a:endParaRPr lang="en-US" sz="1000" dirty="0"/>
+          </a:p>
+        </p:txBody>
+      </p:sp>
+      <p:sp>
+        <p:nvSpPr>
+          <p:cNvPr id="18" name="Shape 16"/>
+          <p:cNvSpPr/>
+          <p:nvPr/>
+        </p:nvSpPr>
+        <p:spPr>
+          <a:xfrm>
+            <a:off x="7635240" y="4498848"/>
+            <a:ext cx="3474720" cy="1143000"/>
+          </a:xfrm>
+          <a:prstGeom prst="roundRect">
+            <a:avLst>
+              <a:gd name="adj" fmla="val 9600"/>
             </a:avLst>
           </a:prstGeom>
           <a:solidFill>
@@ -3609,14 +3769,14 @@
       </p:sp>
       <p:sp>
         <p:nvSpPr>
-          <p:cNvPr id="14" name="Text 12"/>
-          <p:cNvSpPr/>
-          <p:nvPr/>
-        </p:nvSpPr>
-        <p:spPr>
-          <a:xfrm>
-            <a:off x="8074152" y="3666744"/>
-            <a:ext cx="2825496" cy="256032"/>
+          <p:cNvPr id="19" name="Text 17"/>
+          <p:cNvSpPr/>
+          <p:nvPr/>
+        </p:nvSpPr>
+        <p:spPr>
+          <a:xfrm>
+            <a:off x="7799832" y="4645152"/>
+            <a:ext cx="3145536" cy="256032"/>
           </a:xfrm>
           <a:prstGeom prst="rect">
             <a:avLst/>
@@ -3640,7 +3800,7 @@
                 <a:ea typeface="Aptos" pitchFamily="34" charset="-122"/>
                 <a:cs typeface="Aptos" pitchFamily="34" charset="-120"/>
               </a:rPr>
-              <a:t>Use this for</a:t>
+              <a:t>Apply it</a:t>
             </a:r>
             <a:endParaRPr lang="en-US" sz="1300" dirty="0"/>
           </a:p>
@@ -3648,14 +3808,14 @@
       </p:sp>
       <p:sp>
         <p:nvSpPr>
-          <p:cNvPr id="15" name="Text 13"/>
-          <p:cNvSpPr/>
-          <p:nvPr/>
-        </p:nvSpPr>
-        <p:spPr>
-          <a:xfrm>
-            <a:off x="8074152" y="4023360"/>
-            <a:ext cx="2825496" cy="1097280"/>
+          <p:cNvPr id="20" name="Text 18"/>
+          <p:cNvSpPr/>
+          <p:nvPr/>
+        </p:nvSpPr>
+        <p:spPr>
+          <a:xfrm>
+            <a:off x="7799832" y="5001768"/>
+            <a:ext cx="3145536" cy="502920"/>
           </a:xfrm>
           <a:prstGeom prst="rect">
             <a:avLst/>
@@ -3681,7 +3841,7 @@
                 <a:ea typeface="Aptos" pitchFamily="34" charset="-122"/>
                 <a:cs typeface="Aptos" pitchFamily="34" charset="-120"/>
               </a:rPr>
-              <a:t>Connect the concept to public health decisions, safeguards, documentation, or implementation work.</a:t>
+              <a:t>Connect the concept to public health purpose, responsible use, required safeguards, documentation, and the next action a department should take.</a:t>
             </a:r>
             <a:endParaRPr lang="en-US" sz="1550" dirty="0"/>
           </a:p>
@@ -3855,8 +4015,8 @@
         </p:nvSpPr>
         <p:spPr>
           <a:xfrm>
-            <a:off x="9966960" y="6537960"/>
-            <a:ext cx="1645920" cy="201168"/>
+            <a:off x="9646920" y="6537960"/>
+            <a:ext cx="1965960" cy="201168"/>
           </a:xfrm>
           <a:prstGeom prst="rect">
             <a:avLst/>
@@ -3880,7 +4040,7 @@
                 <a:ea typeface="Aptos" pitchFamily="34" charset="-122"/>
                 <a:cs typeface="Aptos" pitchFamily="34" charset="-120"/>
               </a:rPr>
-              <a:t>Â© Paula Soper</a:t>
+              <a:t>Copyright Paula Soper</a:t>
             </a:r>
             <a:endParaRPr lang="en-US" sz="800" dirty="0"/>
           </a:p>
@@ -3927,77 +4087,13 @@
       </p:sp>
       <p:sp>
         <p:nvSpPr>
-          <p:cNvPr id="8" name="Shape 6"/>
+          <p:cNvPr id="8" name="Text 6"/>
           <p:cNvSpPr/>
           <p:nvPr/>
         </p:nvSpPr>
         <p:spPr>
           <a:xfrm>
             <a:off x="640080" y="658368"/>
-            <a:ext cx="420624" cy="420624"/>
-          </a:xfrm>
-          <a:prstGeom prst="ellipse">
-            <a:avLst/>
-          </a:prstGeom>
-          <a:solidFill>
-            <a:srgbClr val="0068B7"/>
-          </a:solidFill>
-          <a:ln w="12700">
-            <a:solidFill>
-              <a:srgbClr val="0068B7"/>
-            </a:solidFill>
-            <a:prstDash val="solid"/>
-          </a:ln>
-        </p:spPr>
-      </p:sp>
-      <p:sp>
-        <p:nvSpPr>
-          <p:cNvPr id="9" name="Text 7"/>
-          <p:cNvSpPr/>
-          <p:nvPr/>
-        </p:nvSpPr>
-        <p:spPr>
-          <a:xfrm>
-            <a:off x="640080" y="731520"/>
-            <a:ext cx="420624" cy="164592"/>
-          </a:xfrm>
-          <a:prstGeom prst="rect">
-            <a:avLst/>
-          </a:prstGeom>
-          <a:noFill/>
-          <a:ln/>
-        </p:spPr>
-        <p:txBody>
-          <a:bodyPr wrap="square" lIns="0" tIns="0" rIns="0" bIns="0" rtlCol="0" anchor="ctr"/>
-          <a:lstStyle/>
-          <a:p>
-            <a:pPr algn="ctr" indent="0" marL="0">
-              <a:buNone/>
-            </a:pPr>
-            <a:r>
-              <a:rPr lang="en-US" sz="1100" b="1" dirty="0">
-                <a:solidFill>
-                  <a:srgbClr val="FFFFFF"/>
-                </a:solidFill>
-                <a:latin typeface="Aptos" pitchFamily="34" charset="0"/>
-                <a:ea typeface="Aptos" pitchFamily="34" charset="-122"/>
-                <a:cs typeface="Aptos" pitchFamily="34" charset="-120"/>
-              </a:rPr>
-              <a:t>6</a:t>
-            </a:r>
-            <a:endParaRPr lang="en-US" sz="1100" dirty="0"/>
-          </a:p>
-        </p:txBody>
-      </p:sp>
-      <p:sp>
-        <p:nvSpPr>
-          <p:cNvPr id="10" name="Text 8"/>
-          <p:cNvSpPr/>
-          <p:nvPr/>
-        </p:nvSpPr>
-        <p:spPr>
-          <a:xfrm>
-            <a:off x="640080" y="621792"/>
             <a:ext cx="10881360" cy="713232"/>
           </a:xfrm>
           <a:prstGeom prst="rect">
@@ -4032,14 +4128,14 @@
       </p:sp>
       <p:sp>
         <p:nvSpPr>
-          <p:cNvPr id="11" name="Text 9"/>
+          <p:cNvPr id="9" name="Text 7"/>
           <p:cNvSpPr/>
           <p:nvPr/>
         </p:nvSpPr>
         <p:spPr>
           <a:xfrm>
             <a:off x="868680" y="1508760"/>
-            <a:ext cx="6537960" cy="4160520"/>
+            <a:ext cx="6309360" cy="4160520"/>
           </a:xfrm>
           <a:prstGeom prst="rect">
             <a:avLst/>
@@ -4098,18 +4194,18 @@
       </p:sp>
       <p:sp>
         <p:nvSpPr>
-          <p:cNvPr id="12" name="Shape 10"/>
-          <p:cNvSpPr/>
-          <p:nvPr/>
-        </p:nvSpPr>
-        <p:spPr>
-          <a:xfrm>
-            <a:off x="7909560" y="1417320"/>
-            <a:ext cx="3154680" cy="1828800"/>
+          <p:cNvPr id="10" name="Shape 8"/>
+          <p:cNvSpPr/>
+          <p:nvPr/>
+        </p:nvSpPr>
+        <p:spPr>
+          <a:xfrm>
+            <a:off x="7635240" y="1325880"/>
+            <a:ext cx="3474720" cy="1325880"/>
           </a:xfrm>
           <a:prstGeom prst="roundRect">
             <a:avLst>
-              <a:gd name="adj" fmla="val 6000"/>
+              <a:gd name="adj" fmla="val 8276"/>
             </a:avLst>
           </a:prstGeom>
           <a:solidFill>
@@ -4125,14 +4221,14 @@
       </p:sp>
       <p:sp>
         <p:nvSpPr>
-          <p:cNvPr id="13" name="Text 11"/>
-          <p:cNvSpPr/>
-          <p:nvPr/>
-        </p:nvSpPr>
-        <p:spPr>
-          <a:xfrm>
-            <a:off x="8074152" y="1563624"/>
-            <a:ext cx="2825496" cy="256032"/>
+          <p:cNvPr id="11" name="Text 9"/>
+          <p:cNvSpPr/>
+          <p:nvPr/>
+        </p:nvSpPr>
+        <p:spPr>
+          <a:xfrm>
+            <a:off x="7799832" y="1472184"/>
+            <a:ext cx="3145536" cy="256032"/>
           </a:xfrm>
           <a:prstGeom prst="rect">
             <a:avLst/>
@@ -4156,7 +4252,7 @@
                 <a:ea typeface="Aptos" pitchFamily="34" charset="-122"/>
                 <a:cs typeface="Aptos" pitchFamily="34" charset="-120"/>
               </a:rPr>
-              <a:t>Key idea</a:t>
+              <a:t>Core concept</a:t>
             </a:r>
             <a:endParaRPr lang="en-US" sz="1300" dirty="0"/>
           </a:p>
@@ -4164,14 +4260,14 @@
       </p:sp>
       <p:sp>
         <p:nvSpPr>
-          <p:cNvPr id="14" name="Text 12"/>
-          <p:cNvSpPr/>
-          <p:nvPr/>
-        </p:nvSpPr>
-        <p:spPr>
-          <a:xfrm>
-            <a:off x="8074152" y="1920240"/>
-            <a:ext cx="2825496" cy="1188720"/>
+          <p:cNvPr id="12" name="Text 10"/>
+          <p:cNvSpPr/>
+          <p:nvPr/>
+        </p:nvSpPr>
+        <p:spPr>
+          <a:xfrm>
+            <a:off x="7799832" y="1828800"/>
+            <a:ext cx="3145536" cy="685800"/>
           </a:xfrm>
           <a:prstGeom prst="rect">
             <a:avLst/>
@@ -4205,18 +4301,159 @@
       </p:sp>
       <p:sp>
         <p:nvSpPr>
-          <p:cNvPr id="15" name="Shape 13"/>
-          <p:cNvSpPr/>
-          <p:nvPr/>
-        </p:nvSpPr>
-        <p:spPr>
-          <a:xfrm>
-            <a:off x="7909560" y="3520440"/>
-            <a:ext cx="3154680" cy="1737360"/>
+          <p:cNvPr id="13" name="Shape 11"/>
+          <p:cNvSpPr/>
+          <p:nvPr/>
+        </p:nvSpPr>
+        <p:spPr>
+          <a:xfrm>
+            <a:off x="7635240" y="2788920"/>
+            <a:ext cx="3474720" cy="1536192"/>
           </a:xfrm>
           <a:prstGeom prst="roundRect">
             <a:avLst>
-              <a:gd name="adj" fmla="val 6316"/>
+              <a:gd name="adj" fmla="val 7143"/>
+            </a:avLst>
+          </a:prstGeom>
+          <a:solidFill>
+            <a:srgbClr val="FFFFFF">
+              <a:alpha val="88000"/>
+            </a:srgbClr>
+          </a:solidFill>
+          <a:ln w="12700">
+            <a:solidFill>
+              <a:srgbClr val="D6E8F2"/>
+            </a:solidFill>
+            <a:prstDash val="solid"/>
+          </a:ln>
+        </p:spPr>
+      </p:sp>
+      <p:sp>
+        <p:nvSpPr>
+          <p:cNvPr id="14" name="Shape 12"/>
+          <p:cNvSpPr/>
+          <p:nvPr/>
+        </p:nvSpPr>
+        <p:spPr>
+          <a:xfrm>
+            <a:off x="8074152" y="3291840"/>
+            <a:ext cx="2596896" cy="749808"/>
+          </a:xfrm>
+          <a:prstGeom prst="rect">
+            <a:avLst/>
+          </a:prstGeom>
+          <a:solidFill>
+            <a:srgbClr val="EAF6F8"/>
+          </a:solidFill>
+          <a:ln w="12700">
+            <a:solidFill>
+              <a:srgbClr val="8ABBD8"/>
+            </a:solidFill>
+            <a:prstDash val="solid"/>
+          </a:ln>
+        </p:spPr>
+      </p:sp>
+      <p:sp>
+        <p:nvSpPr>
+          <p:cNvPr id="15" name="Shape 13"/>
+          <p:cNvSpPr/>
+          <p:nvPr/>
+        </p:nvSpPr>
+        <p:spPr>
+          <a:xfrm>
+            <a:off x="8202168" y="3721608"/>
+            <a:ext cx="2340864" cy="0"/>
+          </a:xfrm>
+          <a:prstGeom prst="line">
+            <a:avLst/>
+          </a:prstGeom>
+          <a:noFill/>
+          <a:ln w="19050">
+            <a:solidFill>
+              <a:srgbClr val="0068B7"/>
+            </a:solidFill>
+            <a:prstDash val="solid"/>
+          </a:ln>
+        </p:spPr>
+      </p:sp>
+      <p:sp>
+        <p:nvSpPr>
+          <p:cNvPr id="16" name="Shape 14"/>
+          <p:cNvSpPr/>
+          <p:nvPr/>
+        </p:nvSpPr>
+        <p:spPr>
+          <a:xfrm>
+            <a:off x="9198864" y="4206240"/>
+            <a:ext cx="347472" cy="347472"/>
+          </a:xfrm>
+          <a:prstGeom prst="ellipse">
+            <a:avLst/>
+          </a:prstGeom>
+          <a:solidFill>
+            <a:srgbClr val="2F8A28"/>
+          </a:solidFill>
+          <a:ln w="12700">
+            <a:solidFill>
+              <a:srgbClr val="2F8A28"/>
+            </a:solidFill>
+            <a:prstDash val="solid"/>
+          </a:ln>
+        </p:spPr>
+      </p:sp>
+      <p:sp>
+        <p:nvSpPr>
+          <p:cNvPr id="17" name="Text 15"/>
+          <p:cNvSpPr/>
+          <p:nvPr/>
+        </p:nvSpPr>
+        <p:spPr>
+          <a:xfrm>
+            <a:off x="7909560" y="3977640"/>
+            <a:ext cx="2926080" cy="182880"/>
+          </a:xfrm>
+          <a:prstGeom prst="rect">
+            <a:avLst/>
+          </a:prstGeom>
+          <a:noFill/>
+          <a:ln/>
+        </p:spPr>
+        <p:txBody>
+          <a:bodyPr wrap="square" lIns="0" tIns="0" rIns="0" bIns="0" rtlCol="0" anchor="ctr"/>
+          <a:lstStyle/>
+          <a:p>
+            <a:pPr algn="ctr" indent="0" marL="0">
+              <a:buNone/>
+            </a:pPr>
+            <a:r>
+              <a:rPr lang="en-US" sz="1000" dirty="0">
+                <a:solidFill>
+                  <a:srgbClr val="003A63"/>
+                </a:solidFill>
+                <a:latin typeface="Aptos" pitchFamily="34" charset="0"/>
+                <a:ea typeface="Aptos" pitchFamily="34" charset="-122"/>
+                <a:cs typeface="Aptos" pitchFamily="34" charset="-120"/>
+              </a:rPr>
+              <a:t>Concept to action</a:t>
+            </a:r>
+            <a:endParaRPr lang="en-US" sz="1000" dirty="0"/>
+          </a:p>
+        </p:txBody>
+      </p:sp>
+      <p:sp>
+        <p:nvSpPr>
+          <p:cNvPr id="18" name="Shape 16"/>
+          <p:cNvSpPr/>
+          <p:nvPr/>
+        </p:nvSpPr>
+        <p:spPr>
+          <a:xfrm>
+            <a:off x="7635240" y="4498848"/>
+            <a:ext cx="3474720" cy="1143000"/>
+          </a:xfrm>
+          <a:prstGeom prst="roundRect">
+            <a:avLst>
+              <a:gd name="adj" fmla="val 9600"/>
             </a:avLst>
           </a:prstGeom>
           <a:solidFill>
@@ -4232,14 +4469,14 @@
       </p:sp>
       <p:sp>
         <p:nvSpPr>
-          <p:cNvPr id="16" name="Text 14"/>
-          <p:cNvSpPr/>
-          <p:nvPr/>
-        </p:nvSpPr>
-        <p:spPr>
-          <a:xfrm>
-            <a:off x="8074152" y="3666744"/>
-            <a:ext cx="2825496" cy="256032"/>
+          <p:cNvPr id="19" name="Text 17"/>
+          <p:cNvSpPr/>
+          <p:nvPr/>
+        </p:nvSpPr>
+        <p:spPr>
+          <a:xfrm>
+            <a:off x="7799832" y="4645152"/>
+            <a:ext cx="3145536" cy="256032"/>
           </a:xfrm>
           <a:prstGeom prst="rect">
             <a:avLst/>
@@ -4263,7 +4500,7 @@
                 <a:ea typeface="Aptos" pitchFamily="34" charset="-122"/>
                 <a:cs typeface="Aptos" pitchFamily="34" charset="-120"/>
               </a:rPr>
-              <a:t>Use this for</a:t>
+              <a:t>Apply it</a:t>
             </a:r>
             <a:endParaRPr lang="en-US" sz="1300" dirty="0"/>
           </a:p>
@@ -4271,14 +4508,14 @@
       </p:sp>
       <p:sp>
         <p:nvSpPr>
-          <p:cNvPr id="17" name="Text 15"/>
-          <p:cNvSpPr/>
-          <p:nvPr/>
-        </p:nvSpPr>
-        <p:spPr>
-          <a:xfrm>
-            <a:off x="8074152" y="4023360"/>
-            <a:ext cx="2825496" cy="1097280"/>
+          <p:cNvPr id="20" name="Text 18"/>
+          <p:cNvSpPr/>
+          <p:nvPr/>
+        </p:nvSpPr>
+        <p:spPr>
+          <a:xfrm>
+            <a:off x="7799832" y="5001768"/>
+            <a:ext cx="3145536" cy="502920"/>
           </a:xfrm>
           <a:prstGeom prst="rect">
             <a:avLst/>
@@ -4304,7 +4541,7 @@
                 <a:ea typeface="Aptos" pitchFamily="34" charset="-122"/>
                 <a:cs typeface="Aptos" pitchFamily="34" charset="-120"/>
               </a:rPr>
-              <a:t>Connect the concept to public health decisions, safeguards, documentation, or implementation work.</a:t>
+              <a:t>Connect the concept to public health purpose, responsible use, required safeguards, documentation, and the next action a department should take.</a:t>
             </a:r>
             <a:endParaRPr lang="en-US" sz="1550" dirty="0"/>
           </a:p>
@@ -4478,8 +4715,8 @@
         </p:nvSpPr>
         <p:spPr>
           <a:xfrm>
-            <a:off x="9966960" y="6537960"/>
-            <a:ext cx="1645920" cy="201168"/>
+            <a:off x="9646920" y="6537960"/>
+            <a:ext cx="1965960" cy="201168"/>
           </a:xfrm>
           <a:prstGeom prst="rect">
             <a:avLst/>
@@ -4503,7 +4740,7 @@
                 <a:ea typeface="Aptos" pitchFamily="34" charset="-122"/>
                 <a:cs typeface="Aptos" pitchFamily="34" charset="-120"/>
               </a:rPr>
-              <a:t>Â© Paula Soper</a:t>
+              <a:t>Copyright Paula Soper</a:t>
             </a:r>
             <a:endParaRPr lang="en-US" sz="800" dirty="0"/>
           </a:p>
@@ -4550,77 +4787,13 @@
       </p:sp>
       <p:sp>
         <p:nvSpPr>
-          <p:cNvPr id="8" name="Shape 6"/>
+          <p:cNvPr id="8" name="Text 6"/>
           <p:cNvSpPr/>
           <p:nvPr/>
         </p:nvSpPr>
         <p:spPr>
           <a:xfrm>
             <a:off x="640080" y="658368"/>
-            <a:ext cx="420624" cy="420624"/>
-          </a:xfrm>
-          <a:prstGeom prst="ellipse">
-            <a:avLst/>
-          </a:prstGeom>
-          <a:solidFill>
-            <a:srgbClr val="0068B7"/>
-          </a:solidFill>
-          <a:ln w="12700">
-            <a:solidFill>
-              <a:srgbClr val="0068B7"/>
-            </a:solidFill>
-            <a:prstDash val="solid"/>
-          </a:ln>
-        </p:spPr>
-      </p:sp>
-      <p:sp>
-        <p:nvSpPr>
-          <p:cNvPr id="9" name="Text 7"/>
-          <p:cNvSpPr/>
-          <p:nvPr/>
-        </p:nvSpPr>
-        <p:spPr>
-          <a:xfrm>
-            <a:off x="640080" y="731520"/>
-            <a:ext cx="420624" cy="164592"/>
-          </a:xfrm>
-          <a:prstGeom prst="rect">
-            <a:avLst/>
-          </a:prstGeom>
-          <a:noFill/>
-          <a:ln/>
-        </p:spPr>
-        <p:txBody>
-          <a:bodyPr wrap="square" lIns="0" tIns="0" rIns="0" bIns="0" rtlCol="0" anchor="ctr"/>
-          <a:lstStyle/>
-          <a:p>
-            <a:pPr algn="ctr" indent="0" marL="0">
-              <a:buNone/>
-            </a:pPr>
-            <a:r>
-              <a:rPr lang="en-US" sz="1100" b="1" dirty="0">
-                <a:solidFill>
-                  <a:srgbClr val="FFFFFF"/>
-                </a:solidFill>
-                <a:latin typeface="Aptos" pitchFamily="34" charset="0"/>
-                <a:ea typeface="Aptos" pitchFamily="34" charset="-122"/>
-                <a:cs typeface="Aptos" pitchFamily="34" charset="-120"/>
-              </a:rPr>
-              <a:t>7</a:t>
-            </a:r>
-            <a:endParaRPr lang="en-US" sz="1100" dirty="0"/>
-          </a:p>
-        </p:txBody>
-      </p:sp>
-      <p:sp>
-        <p:nvSpPr>
-          <p:cNvPr id="10" name="Text 8"/>
-          <p:cNvSpPr/>
-          <p:nvPr/>
-        </p:nvSpPr>
-        <p:spPr>
-          <a:xfrm>
-            <a:off x="640080" y="621792"/>
             <a:ext cx="10881360" cy="713232"/>
           </a:xfrm>
           <a:prstGeom prst="rect">
@@ -4655,14 +4828,14 @@
       </p:sp>
       <p:sp>
         <p:nvSpPr>
-          <p:cNvPr id="11" name="Text 9"/>
+          <p:cNvPr id="9" name="Text 7"/>
           <p:cNvSpPr/>
           <p:nvPr/>
         </p:nvSpPr>
         <p:spPr>
           <a:xfrm>
             <a:off x="868680" y="1508760"/>
-            <a:ext cx="6537960" cy="4160520"/>
+            <a:ext cx="6309360" cy="4160520"/>
           </a:xfrm>
           <a:prstGeom prst="rect">
             <a:avLst/>
@@ -4721,18 +4894,18 @@
       </p:sp>
       <p:sp>
         <p:nvSpPr>
-          <p:cNvPr id="12" name="Shape 10"/>
-          <p:cNvSpPr/>
-          <p:nvPr/>
-        </p:nvSpPr>
-        <p:spPr>
-          <a:xfrm>
-            <a:off x="7909560" y="1417320"/>
-            <a:ext cx="3154680" cy="1828800"/>
+          <p:cNvPr id="10" name="Shape 8"/>
+          <p:cNvSpPr/>
+          <p:nvPr/>
+        </p:nvSpPr>
+        <p:spPr>
+          <a:xfrm>
+            <a:off x="7635240" y="1325880"/>
+            <a:ext cx="3474720" cy="1325880"/>
           </a:xfrm>
           <a:prstGeom prst="roundRect">
             <a:avLst>
-              <a:gd name="adj" fmla="val 6000"/>
+              <a:gd name="adj" fmla="val 8276"/>
             </a:avLst>
           </a:prstGeom>
           <a:solidFill>
@@ -4748,14 +4921,14 @@
       </p:sp>
       <p:sp>
         <p:nvSpPr>
-          <p:cNvPr id="13" name="Text 11"/>
-          <p:cNvSpPr/>
-          <p:nvPr/>
-        </p:nvSpPr>
-        <p:spPr>
-          <a:xfrm>
-            <a:off x="8074152" y="1563624"/>
-            <a:ext cx="2825496" cy="256032"/>
+          <p:cNvPr id="11" name="Text 9"/>
+          <p:cNvSpPr/>
+          <p:nvPr/>
+        </p:nvSpPr>
+        <p:spPr>
+          <a:xfrm>
+            <a:off x="7799832" y="1472184"/>
+            <a:ext cx="3145536" cy="256032"/>
           </a:xfrm>
           <a:prstGeom prst="rect">
             <a:avLst/>
@@ -4779,7 +4952,7 @@
                 <a:ea typeface="Aptos" pitchFamily="34" charset="-122"/>
                 <a:cs typeface="Aptos" pitchFamily="34" charset="-120"/>
               </a:rPr>
-              <a:t>Key idea</a:t>
+              <a:t>Core concept</a:t>
             </a:r>
             <a:endParaRPr lang="en-US" sz="1300" dirty="0"/>
           </a:p>
@@ -4787,14 +4960,14 @@
       </p:sp>
       <p:sp>
         <p:nvSpPr>
-          <p:cNvPr id="14" name="Text 12"/>
-          <p:cNvSpPr/>
-          <p:nvPr/>
-        </p:nvSpPr>
-        <p:spPr>
-          <a:xfrm>
-            <a:off x="8074152" y="1920240"/>
-            <a:ext cx="2825496" cy="1188720"/>
+          <p:cNvPr id="12" name="Text 10"/>
+          <p:cNvSpPr/>
+          <p:nvPr/>
+        </p:nvSpPr>
+        <p:spPr>
+          <a:xfrm>
+            <a:off x="7799832" y="1828800"/>
+            <a:ext cx="3145536" cy="685800"/>
           </a:xfrm>
           <a:prstGeom prst="rect">
             <a:avLst/>
@@ -4828,18 +5001,159 @@
       </p:sp>
       <p:sp>
         <p:nvSpPr>
-          <p:cNvPr id="15" name="Shape 13"/>
-          <p:cNvSpPr/>
-          <p:nvPr/>
-        </p:nvSpPr>
-        <p:spPr>
-          <a:xfrm>
-            <a:off x="7909560" y="3520440"/>
-            <a:ext cx="3154680" cy="1737360"/>
+          <p:cNvPr id="13" name="Shape 11"/>
+          <p:cNvSpPr/>
+          <p:nvPr/>
+        </p:nvSpPr>
+        <p:spPr>
+          <a:xfrm>
+            <a:off x="7635240" y="2788920"/>
+            <a:ext cx="3474720" cy="1536192"/>
           </a:xfrm>
           <a:prstGeom prst="roundRect">
             <a:avLst>
-              <a:gd name="adj" fmla="val 6316"/>
+              <a:gd name="adj" fmla="val 7143"/>
+            </a:avLst>
+          </a:prstGeom>
+          <a:solidFill>
+            <a:srgbClr val="FFFFFF">
+              <a:alpha val="88000"/>
+            </a:srgbClr>
+          </a:solidFill>
+          <a:ln w="12700">
+            <a:solidFill>
+              <a:srgbClr val="D6E8F2"/>
+            </a:solidFill>
+            <a:prstDash val="solid"/>
+          </a:ln>
+        </p:spPr>
+      </p:sp>
+      <p:sp>
+        <p:nvSpPr>
+          <p:cNvPr id="14" name="Shape 12"/>
+          <p:cNvSpPr/>
+          <p:nvPr/>
+        </p:nvSpPr>
+        <p:spPr>
+          <a:xfrm>
+            <a:off x="8074152" y="3291840"/>
+            <a:ext cx="2596896" cy="749808"/>
+          </a:xfrm>
+          <a:prstGeom prst="rect">
+            <a:avLst/>
+          </a:prstGeom>
+          <a:solidFill>
+            <a:srgbClr val="EAF6F8"/>
+          </a:solidFill>
+          <a:ln w="12700">
+            <a:solidFill>
+              <a:srgbClr val="8ABBD8"/>
+            </a:solidFill>
+            <a:prstDash val="solid"/>
+          </a:ln>
+        </p:spPr>
+      </p:sp>
+      <p:sp>
+        <p:nvSpPr>
+          <p:cNvPr id="15" name="Shape 13"/>
+          <p:cNvSpPr/>
+          <p:nvPr/>
+        </p:nvSpPr>
+        <p:spPr>
+          <a:xfrm>
+            <a:off x="8202168" y="3721608"/>
+            <a:ext cx="2340864" cy="0"/>
+          </a:xfrm>
+          <a:prstGeom prst="line">
+            <a:avLst/>
+          </a:prstGeom>
+          <a:noFill/>
+          <a:ln w="19050">
+            <a:solidFill>
+              <a:srgbClr val="0068B7"/>
+            </a:solidFill>
+            <a:prstDash val="solid"/>
+          </a:ln>
+        </p:spPr>
+      </p:sp>
+      <p:sp>
+        <p:nvSpPr>
+          <p:cNvPr id="16" name="Shape 14"/>
+          <p:cNvSpPr/>
+          <p:nvPr/>
+        </p:nvSpPr>
+        <p:spPr>
+          <a:xfrm>
+            <a:off x="9198864" y="4206240"/>
+            <a:ext cx="347472" cy="347472"/>
+          </a:xfrm>
+          <a:prstGeom prst="ellipse">
+            <a:avLst/>
+          </a:prstGeom>
+          <a:solidFill>
+            <a:srgbClr val="2F8A28"/>
+          </a:solidFill>
+          <a:ln w="12700">
+            <a:solidFill>
+              <a:srgbClr val="2F8A28"/>
+            </a:solidFill>
+            <a:prstDash val="solid"/>
+          </a:ln>
+        </p:spPr>
+      </p:sp>
+      <p:sp>
+        <p:nvSpPr>
+          <p:cNvPr id="17" name="Text 15"/>
+          <p:cNvSpPr/>
+          <p:nvPr/>
+        </p:nvSpPr>
+        <p:spPr>
+          <a:xfrm>
+            <a:off x="7909560" y="3977640"/>
+            <a:ext cx="2926080" cy="182880"/>
+          </a:xfrm>
+          <a:prstGeom prst="rect">
+            <a:avLst/>
+          </a:prstGeom>
+          <a:noFill/>
+          <a:ln/>
+        </p:spPr>
+        <p:txBody>
+          <a:bodyPr wrap="square" lIns="0" tIns="0" rIns="0" bIns="0" rtlCol="0" anchor="ctr"/>
+          <a:lstStyle/>
+          <a:p>
+            <a:pPr algn="ctr" indent="0" marL="0">
+              <a:buNone/>
+            </a:pPr>
+            <a:r>
+              <a:rPr lang="en-US" sz="1000" dirty="0">
+                <a:solidFill>
+                  <a:srgbClr val="003A63"/>
+                </a:solidFill>
+                <a:latin typeface="Aptos" pitchFamily="34" charset="0"/>
+                <a:ea typeface="Aptos" pitchFamily="34" charset="-122"/>
+                <a:cs typeface="Aptos" pitchFamily="34" charset="-120"/>
+              </a:rPr>
+              <a:t>Concept to action</a:t>
+            </a:r>
+            <a:endParaRPr lang="en-US" sz="1000" dirty="0"/>
+          </a:p>
+        </p:txBody>
+      </p:sp>
+      <p:sp>
+        <p:nvSpPr>
+          <p:cNvPr id="18" name="Shape 16"/>
+          <p:cNvSpPr/>
+          <p:nvPr/>
+        </p:nvSpPr>
+        <p:spPr>
+          <a:xfrm>
+            <a:off x="7635240" y="4498848"/>
+            <a:ext cx="3474720" cy="1143000"/>
+          </a:xfrm>
+          <a:prstGeom prst="roundRect">
+            <a:avLst>
+              <a:gd name="adj" fmla="val 9600"/>
             </a:avLst>
           </a:prstGeom>
           <a:solidFill>
@@ -4855,14 +5169,14 @@
       </p:sp>
       <p:sp>
         <p:nvSpPr>
-          <p:cNvPr id="16" name="Text 14"/>
-          <p:cNvSpPr/>
-          <p:nvPr/>
-        </p:nvSpPr>
-        <p:spPr>
-          <a:xfrm>
-            <a:off x="8074152" y="3666744"/>
-            <a:ext cx="2825496" cy="256032"/>
+          <p:cNvPr id="19" name="Text 17"/>
+          <p:cNvSpPr/>
+          <p:nvPr/>
+        </p:nvSpPr>
+        <p:spPr>
+          <a:xfrm>
+            <a:off x="7799832" y="4645152"/>
+            <a:ext cx="3145536" cy="256032"/>
           </a:xfrm>
           <a:prstGeom prst="rect">
             <a:avLst/>
@@ -4886,7 +5200,7 @@
                 <a:ea typeface="Aptos" pitchFamily="34" charset="-122"/>
                 <a:cs typeface="Aptos" pitchFamily="34" charset="-120"/>
               </a:rPr>
-              <a:t>Use this for</a:t>
+              <a:t>Apply it</a:t>
             </a:r>
             <a:endParaRPr lang="en-US" sz="1300" dirty="0"/>
           </a:p>
@@ -4894,14 +5208,14 @@
       </p:sp>
       <p:sp>
         <p:nvSpPr>
-          <p:cNvPr id="17" name="Text 15"/>
-          <p:cNvSpPr/>
-          <p:nvPr/>
-        </p:nvSpPr>
-        <p:spPr>
-          <a:xfrm>
-            <a:off x="8074152" y="4023360"/>
-            <a:ext cx="2825496" cy="1097280"/>
+          <p:cNvPr id="20" name="Text 18"/>
+          <p:cNvSpPr/>
+          <p:nvPr/>
+        </p:nvSpPr>
+        <p:spPr>
+          <a:xfrm>
+            <a:off x="7799832" y="5001768"/>
+            <a:ext cx="3145536" cy="502920"/>
           </a:xfrm>
           <a:prstGeom prst="rect">
             <a:avLst/>
@@ -4927,7 +5241,7 @@
                 <a:ea typeface="Aptos" pitchFamily="34" charset="-122"/>
                 <a:cs typeface="Aptos" pitchFamily="34" charset="-120"/>
               </a:rPr>
-              <a:t>Connect the concept to public health decisions, safeguards, documentation, or implementation work.</a:t>
+              <a:t>Connect the concept to public health purpose, responsible use, required safeguards, documentation, and the next action a department should take.</a:t>
             </a:r>
             <a:endParaRPr lang="en-US" sz="1550" dirty="0"/>
           </a:p>
@@ -5101,8 +5415,8 @@
         </p:nvSpPr>
         <p:spPr>
           <a:xfrm>
-            <a:off x="9966960" y="6537960"/>
-            <a:ext cx="1645920" cy="201168"/>
+            <a:off x="9646920" y="6537960"/>
+            <a:ext cx="1965960" cy="201168"/>
           </a:xfrm>
           <a:prstGeom prst="rect">
             <a:avLst/>
@@ -5126,7 +5440,7 @@
                 <a:ea typeface="Aptos" pitchFamily="34" charset="-122"/>
                 <a:cs typeface="Aptos" pitchFamily="34" charset="-120"/>
               </a:rPr>
-              <a:t>Â© Paula Soper</a:t>
+              <a:t>Copyright Paula Soper</a:t>
             </a:r>
             <a:endParaRPr lang="en-US" sz="800" dirty="0"/>
           </a:p>
@@ -5173,77 +5487,13 @@
       </p:sp>
       <p:sp>
         <p:nvSpPr>
-          <p:cNvPr id="8" name="Shape 6"/>
+          <p:cNvPr id="8" name="Text 6"/>
           <p:cNvSpPr/>
           <p:nvPr/>
         </p:nvSpPr>
         <p:spPr>
           <a:xfrm>
             <a:off x="640080" y="658368"/>
-            <a:ext cx="420624" cy="420624"/>
-          </a:xfrm>
-          <a:prstGeom prst="ellipse">
-            <a:avLst/>
-          </a:prstGeom>
-          <a:solidFill>
-            <a:srgbClr val="0068B7"/>
-          </a:solidFill>
-          <a:ln w="12700">
-            <a:solidFill>
-              <a:srgbClr val="0068B7"/>
-            </a:solidFill>
-            <a:prstDash val="solid"/>
-          </a:ln>
-        </p:spPr>
-      </p:sp>
-      <p:sp>
-        <p:nvSpPr>
-          <p:cNvPr id="9" name="Text 7"/>
-          <p:cNvSpPr/>
-          <p:nvPr/>
-        </p:nvSpPr>
-        <p:spPr>
-          <a:xfrm>
-            <a:off x="640080" y="731520"/>
-            <a:ext cx="420624" cy="164592"/>
-          </a:xfrm>
-          <a:prstGeom prst="rect">
-            <a:avLst/>
-          </a:prstGeom>
-          <a:noFill/>
-          <a:ln/>
-        </p:spPr>
-        <p:txBody>
-          <a:bodyPr wrap="square" lIns="0" tIns="0" rIns="0" bIns="0" rtlCol="0" anchor="ctr"/>
-          <a:lstStyle/>
-          <a:p>
-            <a:pPr algn="ctr" indent="0" marL="0">
-              <a:buNone/>
-            </a:pPr>
-            <a:r>
-              <a:rPr lang="en-US" sz="1100" b="1" dirty="0">
-                <a:solidFill>
-                  <a:srgbClr val="FFFFFF"/>
-                </a:solidFill>
-                <a:latin typeface="Aptos" pitchFamily="34" charset="0"/>
-                <a:ea typeface="Aptos" pitchFamily="34" charset="-122"/>
-                <a:cs typeface="Aptos" pitchFamily="34" charset="-120"/>
-              </a:rPr>
-              <a:t>8</a:t>
-            </a:r>
-            <a:endParaRPr lang="en-US" sz="1100" dirty="0"/>
-          </a:p>
-        </p:txBody>
-      </p:sp>
-      <p:sp>
-        <p:nvSpPr>
-          <p:cNvPr id="10" name="Text 8"/>
-          <p:cNvSpPr/>
-          <p:nvPr/>
-        </p:nvSpPr>
-        <p:spPr>
-          <a:xfrm>
-            <a:off x="640080" y="621792"/>
             <a:ext cx="10881360" cy="713232"/>
           </a:xfrm>
           <a:prstGeom prst="rect">
@@ -5278,14 +5528,14 @@
       </p:sp>
       <p:sp>
         <p:nvSpPr>
-          <p:cNvPr id="11" name="Text 9"/>
+          <p:cNvPr id="9" name="Text 7"/>
           <p:cNvSpPr/>
           <p:nvPr/>
         </p:nvSpPr>
         <p:spPr>
           <a:xfrm>
             <a:off x="868680" y="1508760"/>
-            <a:ext cx="6537960" cy="4160520"/>
+            <a:ext cx="6309360" cy="4160520"/>
           </a:xfrm>
           <a:prstGeom prst="rect">
             <a:avLst/>
@@ -5344,18 +5594,18 @@
       </p:sp>
       <p:sp>
         <p:nvSpPr>
-          <p:cNvPr id="12" name="Shape 10"/>
-          <p:cNvSpPr/>
-          <p:nvPr/>
-        </p:nvSpPr>
-        <p:spPr>
-          <a:xfrm>
-            <a:off x="7909560" y="1417320"/>
-            <a:ext cx="3154680" cy="1828800"/>
+          <p:cNvPr id="10" name="Shape 8"/>
+          <p:cNvSpPr/>
+          <p:nvPr/>
+        </p:nvSpPr>
+        <p:spPr>
+          <a:xfrm>
+            <a:off x="7635240" y="1325880"/>
+            <a:ext cx="3474720" cy="1325880"/>
           </a:xfrm>
           <a:prstGeom prst="roundRect">
             <a:avLst>
-              <a:gd name="adj" fmla="val 6000"/>
+              <a:gd name="adj" fmla="val 8276"/>
             </a:avLst>
           </a:prstGeom>
           <a:solidFill>
@@ -5371,14 +5621,14 @@
       </p:sp>
       <p:sp>
         <p:nvSpPr>
-          <p:cNvPr id="13" name="Text 11"/>
-          <p:cNvSpPr/>
-          <p:nvPr/>
-        </p:nvSpPr>
-        <p:spPr>
-          <a:xfrm>
-            <a:off x="8074152" y="1563624"/>
-            <a:ext cx="2825496" cy="256032"/>
+          <p:cNvPr id="11" name="Text 9"/>
+          <p:cNvSpPr/>
+          <p:nvPr/>
+        </p:nvSpPr>
+        <p:spPr>
+          <a:xfrm>
+            <a:off x="7799832" y="1472184"/>
+            <a:ext cx="3145536" cy="256032"/>
           </a:xfrm>
           <a:prstGeom prst="rect">
             <a:avLst/>
@@ -5402,7 +5652,7 @@
                 <a:ea typeface="Aptos" pitchFamily="34" charset="-122"/>
                 <a:cs typeface="Aptos" pitchFamily="34" charset="-120"/>
               </a:rPr>
-              <a:t>Key idea</a:t>
+              <a:t>Risk check</a:t>
             </a:r>
             <a:endParaRPr lang="en-US" sz="1300" dirty="0"/>
           </a:p>
@@ -5410,14 +5660,14 @@
       </p:sp>
       <p:sp>
         <p:nvSpPr>
-          <p:cNvPr id="14" name="Text 12"/>
-          <p:cNvSpPr/>
-          <p:nvPr/>
-        </p:nvSpPr>
-        <p:spPr>
-          <a:xfrm>
-            <a:off x="8074152" y="1920240"/>
-            <a:ext cx="2825496" cy="1188720"/>
+          <p:cNvPr id="12" name="Text 10"/>
+          <p:cNvSpPr/>
+          <p:nvPr/>
+        </p:nvSpPr>
+        <p:spPr>
+          <a:xfrm>
+            <a:off x="7799832" y="1828800"/>
+            <a:ext cx="3145536" cy="685800"/>
           </a:xfrm>
           <a:prstGeom prst="rect">
             <a:avLst/>
@@ -5451,18 +5701,171 @@
       </p:sp>
       <p:sp>
         <p:nvSpPr>
-          <p:cNvPr id="15" name="Shape 13"/>
-          <p:cNvSpPr/>
-          <p:nvPr/>
-        </p:nvSpPr>
-        <p:spPr>
-          <a:xfrm>
-            <a:off x="7909560" y="3520440"/>
-            <a:ext cx="3154680" cy="1737360"/>
+          <p:cNvPr id="13" name="Shape 11"/>
+          <p:cNvSpPr/>
+          <p:nvPr/>
+        </p:nvSpPr>
+        <p:spPr>
+          <a:xfrm>
+            <a:off x="7635240" y="2788920"/>
+            <a:ext cx="3474720" cy="1536192"/>
           </a:xfrm>
           <a:prstGeom prst="roundRect">
             <a:avLst>
-              <a:gd name="adj" fmla="val 6316"/>
+              <a:gd name="adj" fmla="val 7143"/>
+            </a:avLst>
+          </a:prstGeom>
+          <a:solidFill>
+            <a:srgbClr val="FFFFFF">
+              <a:alpha val="88000"/>
+            </a:srgbClr>
+          </a:solidFill>
+          <a:ln w="12700">
+            <a:solidFill>
+              <a:srgbClr val="D6E8F2"/>
+            </a:solidFill>
+            <a:prstDash val="solid"/>
+          </a:ln>
+        </p:spPr>
+      </p:sp>
+      <p:sp>
+        <p:nvSpPr>
+          <p:cNvPr id="14" name="Shape 12"/>
+          <p:cNvSpPr/>
+          <p:nvPr/>
+        </p:nvSpPr>
+        <p:spPr>
+          <a:xfrm>
+            <a:off x="8046720" y="3108960"/>
+            <a:ext cx="2651760" cy="896112"/>
+          </a:xfrm>
+          <a:prstGeom prst="arc">
+            <a:avLst/>
+          </a:prstGeom>
+          <a:noFill/>
+          <a:ln w="25400">
+            <a:solidFill>
+              <a:srgbClr val="0068B7"/>
+            </a:solidFill>
+            <a:prstDash val="solid"/>
+          </a:ln>
+        </p:spPr>
+      </p:sp>
+      <p:sp>
+        <p:nvSpPr>
+          <p:cNvPr id="15" name="Text 13"/>
+          <p:cNvSpPr/>
+          <p:nvPr/>
+        </p:nvSpPr>
+        <p:spPr>
+          <a:xfrm>
+            <a:off x="7909560" y="3099816"/>
+            <a:ext cx="2926080" cy="256032"/>
+          </a:xfrm>
+          <a:prstGeom prst="rect">
+            <a:avLst/>
+          </a:prstGeom>
+          <a:noFill/>
+          <a:ln/>
+        </p:spPr>
+        <p:txBody>
+          <a:bodyPr wrap="square" lIns="0" tIns="0" rIns="0" bIns="0" rtlCol="0" anchor="ctr"/>
+          <a:lstStyle/>
+          <a:p>
+            <a:pPr algn="ctr" indent="0" marL="0">
+              <a:buNone/>
+            </a:pPr>
+            <a:r>
+              <a:rPr lang="en-US" sz="1500" b="1" dirty="0">
+                <a:solidFill>
+                  <a:srgbClr val="003A63"/>
+                </a:solidFill>
+                <a:latin typeface="Aptos" pitchFamily="34" charset="0"/>
+                <a:ea typeface="Aptos" pitchFamily="34" charset="-122"/>
+                <a:cs typeface="Aptos" pitchFamily="34" charset="-120"/>
+              </a:rPr>
+              <a:t>Risk</a:t>
+            </a:r>
+            <a:endParaRPr lang="en-US" sz="1500" dirty="0"/>
+          </a:p>
+        </p:txBody>
+      </p:sp>
+      <p:sp>
+        <p:nvSpPr>
+          <p:cNvPr id="16" name="Shape 14"/>
+          <p:cNvSpPr/>
+          <p:nvPr/>
+        </p:nvSpPr>
+        <p:spPr>
+          <a:xfrm>
+            <a:off x="8366760" y="3639312"/>
+            <a:ext cx="2011680" cy="0"/>
+          </a:xfrm>
+          <a:prstGeom prst="line">
+            <a:avLst/>
+          </a:prstGeom>
+          <a:noFill/>
+          <a:ln w="63500">
+            <a:solidFill>
+              <a:srgbClr val="2F8A28"/>
+            </a:solidFill>
+            <a:prstDash val="solid"/>
+          </a:ln>
+        </p:spPr>
+      </p:sp>
+      <p:sp>
+        <p:nvSpPr>
+          <p:cNvPr id="17" name="Text 15"/>
+          <p:cNvSpPr/>
+          <p:nvPr/>
+        </p:nvSpPr>
+        <p:spPr>
+          <a:xfrm>
+            <a:off x="7909560" y="3849624"/>
+            <a:ext cx="2926080" cy="164592"/>
+          </a:xfrm>
+          <a:prstGeom prst="rect">
+            <a:avLst/>
+          </a:prstGeom>
+          <a:noFill/>
+          <a:ln/>
+        </p:spPr>
+        <p:txBody>
+          <a:bodyPr wrap="square" lIns="0" tIns="0" rIns="0" bIns="0" rtlCol="0" anchor="ctr"/>
+          <a:lstStyle/>
+          <a:p>
+            <a:pPr algn="ctr" indent="0" marL="0">
+              <a:buNone/>
+            </a:pPr>
+            <a:r>
+              <a:rPr lang="en-US" sz="900" dirty="0">
+                <a:solidFill>
+                  <a:srgbClr val="003A63"/>
+                </a:solidFill>
+                <a:latin typeface="Aptos" pitchFamily="34" charset="0"/>
+                <a:ea typeface="Aptos" pitchFamily="34" charset="-122"/>
+                <a:cs typeface="Aptos" pitchFamily="34" charset="-120"/>
+              </a:rPr>
+              <a:t>Human review</a:t>
+            </a:r>
+            <a:endParaRPr lang="en-US" sz="900" dirty="0"/>
+          </a:p>
+        </p:txBody>
+      </p:sp>
+      <p:sp>
+        <p:nvSpPr>
+          <p:cNvPr id="18" name="Shape 16"/>
+          <p:cNvSpPr/>
+          <p:nvPr/>
+        </p:nvSpPr>
+        <p:spPr>
+          <a:xfrm>
+            <a:off x="7635240" y="4498848"/>
+            <a:ext cx="3474720" cy="1143000"/>
+          </a:xfrm>
+          <a:prstGeom prst="roundRect">
+            <a:avLst>
+              <a:gd name="adj" fmla="val 9600"/>
             </a:avLst>
           </a:prstGeom>
           <a:solidFill>
@@ -5478,14 +5881,14 @@
       </p:sp>
       <p:sp>
         <p:nvSpPr>
-          <p:cNvPr id="16" name="Text 14"/>
-          <p:cNvSpPr/>
-          <p:nvPr/>
-        </p:nvSpPr>
-        <p:spPr>
-          <a:xfrm>
-            <a:off x="8074152" y="3666744"/>
-            <a:ext cx="2825496" cy="256032"/>
+          <p:cNvPr id="19" name="Text 17"/>
+          <p:cNvSpPr/>
+          <p:nvPr/>
+        </p:nvSpPr>
+        <p:spPr>
+          <a:xfrm>
+            <a:off x="7799832" y="4645152"/>
+            <a:ext cx="3145536" cy="256032"/>
           </a:xfrm>
           <a:prstGeom prst="rect">
             <a:avLst/>
@@ -5509,7 +5912,7 @@
                 <a:ea typeface="Aptos" pitchFamily="34" charset="-122"/>
                 <a:cs typeface="Aptos" pitchFamily="34" charset="-120"/>
               </a:rPr>
-              <a:t>Use this for</a:t>
+              <a:t>Safeguard to plan</a:t>
             </a:r>
             <a:endParaRPr lang="en-US" sz="1300" dirty="0"/>
           </a:p>
@@ -5517,14 +5920,14 @@
       </p:sp>
       <p:sp>
         <p:nvSpPr>
-          <p:cNvPr id="17" name="Text 15"/>
-          <p:cNvSpPr/>
-          <p:nvPr/>
-        </p:nvSpPr>
-        <p:spPr>
-          <a:xfrm>
-            <a:off x="8074152" y="4023360"/>
-            <a:ext cx="2825496" cy="1097280"/>
+          <p:cNvPr id="20" name="Text 18"/>
+          <p:cNvSpPr/>
+          <p:nvPr/>
+        </p:nvSpPr>
+        <p:spPr>
+          <a:xfrm>
+            <a:off x="7799832" y="5001768"/>
+            <a:ext cx="3145536" cy="502920"/>
           </a:xfrm>
           <a:prstGeom prst="rect">
             <a:avLst/>
@@ -5550,7 +5953,7 @@
                 <a:ea typeface="Aptos" pitchFamily="34" charset="-122"/>
                 <a:cs typeface="Aptos" pitchFamily="34" charset="-120"/>
               </a:rPr>
-              <a:t>Connect the concept to public health decisions, safeguards, documentation, or implementation work.</a:t>
+              <a:t>Identify what could go wrong, who could be affected, what safeguards are needed, and what evidence should be reviewed before use expands.</a:t>
             </a:r>
             <a:endParaRPr lang="en-US" sz="1550" dirty="0"/>
           </a:p>
@@ -5724,8 +6127,8 @@
         </p:nvSpPr>
         <p:spPr>
           <a:xfrm>
-            <a:off x="9966960" y="6537960"/>
-            <a:ext cx="1645920" cy="201168"/>
+            <a:off x="9646920" y="6537960"/>
+            <a:ext cx="1965960" cy="201168"/>
           </a:xfrm>
           <a:prstGeom prst="rect">
             <a:avLst/>
@@ -5749,7 +6152,7 @@
                 <a:ea typeface="Aptos" pitchFamily="34" charset="-122"/>
                 <a:cs typeface="Aptos" pitchFamily="34" charset="-120"/>
               </a:rPr>
-              <a:t>Â© Paula Soper</a:t>
+              <a:t>Copyright Paula Soper</a:t>
             </a:r>
             <a:endParaRPr lang="en-US" sz="800" dirty="0"/>
           </a:p>
@@ -5844,7 +6247,7 @@
         <p:spPr>
           <a:xfrm>
             <a:off x="868680" y="1508760"/>
-            <a:ext cx="6537960" cy="4160520"/>
+            <a:ext cx="6309360" cy="4160520"/>
           </a:xfrm>
           <a:prstGeom prst="rect">
             <a:avLst/>
@@ -5909,12 +6312,12 @@
         </p:nvSpPr>
         <p:spPr>
           <a:xfrm>
-            <a:off x="7909560" y="1417320"/>
-            <a:ext cx="3154680" cy="1828800"/>
+            <a:off x="7635240" y="1325880"/>
+            <a:ext cx="3474720" cy="1325880"/>
           </a:xfrm>
           <a:prstGeom prst="roundRect">
             <a:avLst>
-              <a:gd name="adj" fmla="val 6000"/>
+              <a:gd name="adj" fmla="val 8276"/>
             </a:avLst>
           </a:prstGeom>
           <a:solidFill>
@@ -5936,8 +6339,8 @@
         </p:nvSpPr>
         <p:spPr>
           <a:xfrm>
-            <a:off x="8074152" y="1563624"/>
-            <a:ext cx="2825496" cy="256032"/>
+            <a:off x="7799832" y="1472184"/>
+            <a:ext cx="3145536" cy="256032"/>
           </a:xfrm>
           <a:prstGeom prst="rect">
             <a:avLst/>
@@ -5961,7 +6364,7 @@
                 <a:ea typeface="Aptos" pitchFamily="34" charset="-122"/>
                 <a:cs typeface="Aptos" pitchFamily="34" charset="-120"/>
               </a:rPr>
-              <a:t>Key idea</a:t>
+              <a:t>Risk check</a:t>
             </a:r>
             <a:endParaRPr lang="en-US" sz="1300" dirty="0"/>
           </a:p>
@@ -5975,8 +6378,8 @@
         </p:nvSpPr>
         <p:spPr>
           <a:xfrm>
-            <a:off x="8074152" y="1920240"/>
-            <a:ext cx="2825496" cy="1188720"/>
+            <a:off x="7799832" y="1828800"/>
+            <a:ext cx="3145536" cy="685800"/>
           </a:xfrm>
           <a:prstGeom prst="rect">
             <a:avLst/>
@@ -6016,12 +6419,165 @@
         </p:nvSpPr>
         <p:spPr>
           <a:xfrm>
-            <a:off x="7909560" y="3520440"/>
-            <a:ext cx="3154680" cy="1737360"/>
+            <a:off x="7635240" y="2788920"/>
+            <a:ext cx="3474720" cy="1536192"/>
           </a:xfrm>
           <a:prstGeom prst="roundRect">
             <a:avLst>
-              <a:gd name="adj" fmla="val 6316"/>
+              <a:gd name="adj" fmla="val 7143"/>
+            </a:avLst>
+          </a:prstGeom>
+          <a:solidFill>
+            <a:srgbClr val="FFFFFF">
+              <a:alpha val="88000"/>
+            </a:srgbClr>
+          </a:solidFill>
+          <a:ln w="12700">
+            <a:solidFill>
+              <a:srgbClr val="D6E8F2"/>
+            </a:solidFill>
+            <a:prstDash val="solid"/>
+          </a:ln>
+        </p:spPr>
+      </p:sp>
+      <p:sp>
+        <p:nvSpPr>
+          <p:cNvPr id="14" name="Shape 12"/>
+          <p:cNvSpPr/>
+          <p:nvPr/>
+        </p:nvSpPr>
+        <p:spPr>
+          <a:xfrm>
+            <a:off x="8046720" y="3108960"/>
+            <a:ext cx="2651760" cy="896112"/>
+          </a:xfrm>
+          <a:prstGeom prst="arc">
+            <a:avLst/>
+          </a:prstGeom>
+          <a:noFill/>
+          <a:ln w="25400">
+            <a:solidFill>
+              <a:srgbClr val="0068B7"/>
+            </a:solidFill>
+            <a:prstDash val="solid"/>
+          </a:ln>
+        </p:spPr>
+      </p:sp>
+      <p:sp>
+        <p:nvSpPr>
+          <p:cNvPr id="15" name="Text 13"/>
+          <p:cNvSpPr/>
+          <p:nvPr/>
+        </p:nvSpPr>
+        <p:spPr>
+          <a:xfrm>
+            <a:off x="7909560" y="3099816"/>
+            <a:ext cx="2926080" cy="256032"/>
+          </a:xfrm>
+          <a:prstGeom prst="rect">
+            <a:avLst/>
+          </a:prstGeom>
+          <a:noFill/>
+          <a:ln/>
+        </p:spPr>
+        <p:txBody>
+          <a:bodyPr wrap="square" lIns="0" tIns="0" rIns="0" bIns="0" rtlCol="0" anchor="ctr"/>
+          <a:lstStyle/>
+          <a:p>
+            <a:pPr algn="ctr" indent="0" marL="0">
+              <a:buNone/>
+            </a:pPr>
+            <a:r>
+              <a:rPr lang="en-US" sz="1500" b="1" dirty="0">
+                <a:solidFill>
+                  <a:srgbClr val="003A63"/>
+                </a:solidFill>
+                <a:latin typeface="Aptos" pitchFamily="34" charset="0"/>
+                <a:ea typeface="Aptos" pitchFamily="34" charset="-122"/>
+                <a:cs typeface="Aptos" pitchFamily="34" charset="-120"/>
+              </a:rPr>
+              <a:t>Risk</a:t>
+            </a:r>
+            <a:endParaRPr lang="en-US" sz="1500" dirty="0"/>
+          </a:p>
+        </p:txBody>
+      </p:sp>
+      <p:sp>
+        <p:nvSpPr>
+          <p:cNvPr id="16" name="Shape 14"/>
+          <p:cNvSpPr/>
+          <p:nvPr/>
+        </p:nvSpPr>
+        <p:spPr>
+          <a:xfrm>
+            <a:off x="8366760" y="3639312"/>
+            <a:ext cx="2011680" cy="0"/>
+          </a:xfrm>
+          <a:prstGeom prst="line">
+            <a:avLst/>
+          </a:prstGeom>
+          <a:noFill/>
+          <a:ln w="63500">
+            <a:solidFill>
+              <a:srgbClr val="2F8A28"/>
+            </a:solidFill>
+            <a:prstDash val="solid"/>
+          </a:ln>
+        </p:spPr>
+      </p:sp>
+      <p:sp>
+        <p:nvSpPr>
+          <p:cNvPr id="17" name="Text 15"/>
+          <p:cNvSpPr/>
+          <p:nvPr/>
+        </p:nvSpPr>
+        <p:spPr>
+          <a:xfrm>
+            <a:off x="7909560" y="3849624"/>
+            <a:ext cx="2926080" cy="164592"/>
+          </a:xfrm>
+          <a:prstGeom prst="rect">
+            <a:avLst/>
+          </a:prstGeom>
+          <a:noFill/>
+          <a:ln/>
+        </p:spPr>
+        <p:txBody>
+          <a:bodyPr wrap="square" lIns="0" tIns="0" rIns="0" bIns="0" rtlCol="0" anchor="ctr"/>
+          <a:lstStyle/>
+          <a:p>
+            <a:pPr algn="ctr" indent="0" marL="0">
+              <a:buNone/>
+            </a:pPr>
+            <a:r>
+              <a:rPr lang="en-US" sz="900" dirty="0">
+                <a:solidFill>
+                  <a:srgbClr val="003A63"/>
+                </a:solidFill>
+                <a:latin typeface="Aptos" pitchFamily="34" charset="0"/>
+                <a:ea typeface="Aptos" pitchFamily="34" charset="-122"/>
+                <a:cs typeface="Aptos" pitchFamily="34" charset="-120"/>
+              </a:rPr>
+              <a:t>Human review</a:t>
+            </a:r>
+            <a:endParaRPr lang="en-US" sz="900" dirty="0"/>
+          </a:p>
+        </p:txBody>
+      </p:sp>
+      <p:sp>
+        <p:nvSpPr>
+          <p:cNvPr id="18" name="Shape 16"/>
+          <p:cNvSpPr/>
+          <p:nvPr/>
+        </p:nvSpPr>
+        <p:spPr>
+          <a:xfrm>
+            <a:off x="7635240" y="4498848"/>
+            <a:ext cx="3474720" cy="1143000"/>
+          </a:xfrm>
+          <a:prstGeom prst="roundRect">
+            <a:avLst>
+              <a:gd name="adj" fmla="val 9600"/>
             </a:avLst>
           </a:prstGeom>
           <a:solidFill>
@@ -6037,14 +6593,14 @@
       </p:sp>
       <p:sp>
         <p:nvSpPr>
-          <p:cNvPr id="14" name="Text 12"/>
-          <p:cNvSpPr/>
-          <p:nvPr/>
-        </p:nvSpPr>
-        <p:spPr>
-          <a:xfrm>
-            <a:off x="8074152" y="3666744"/>
-            <a:ext cx="2825496" cy="256032"/>
+          <p:cNvPr id="19" name="Text 17"/>
+          <p:cNvSpPr/>
+          <p:nvPr/>
+        </p:nvSpPr>
+        <p:spPr>
+          <a:xfrm>
+            <a:off x="7799832" y="4645152"/>
+            <a:ext cx="3145536" cy="256032"/>
           </a:xfrm>
           <a:prstGeom prst="rect">
             <a:avLst/>
@@ -6068,7 +6624,7 @@
                 <a:ea typeface="Aptos" pitchFamily="34" charset="-122"/>
                 <a:cs typeface="Aptos" pitchFamily="34" charset="-120"/>
               </a:rPr>
-              <a:t>Use this for</a:t>
+              <a:t>Safeguard to plan</a:t>
             </a:r>
             <a:endParaRPr lang="en-US" sz="1300" dirty="0"/>
           </a:p>
@@ -6076,14 +6632,14 @@
       </p:sp>
       <p:sp>
         <p:nvSpPr>
-          <p:cNvPr id="15" name="Text 13"/>
-          <p:cNvSpPr/>
-          <p:nvPr/>
-        </p:nvSpPr>
-        <p:spPr>
-          <a:xfrm>
-            <a:off x="8074152" y="4023360"/>
-            <a:ext cx="2825496" cy="1097280"/>
+          <p:cNvPr id="20" name="Text 18"/>
+          <p:cNvSpPr/>
+          <p:nvPr/>
+        </p:nvSpPr>
+        <p:spPr>
+          <a:xfrm>
+            <a:off x="7799832" y="5001768"/>
+            <a:ext cx="3145536" cy="502920"/>
           </a:xfrm>
           <a:prstGeom prst="rect">
             <a:avLst/>
@@ -6109,7 +6665,7 @@
                 <a:ea typeface="Aptos" pitchFamily="34" charset="-122"/>
                 <a:cs typeface="Aptos" pitchFamily="34" charset="-120"/>
               </a:rPr>
-              <a:t>Connect the concept to public health decisions, safeguards, documentation, or implementation work.</a:t>
+              <a:t>Identify what could go wrong, who could be affected, what safeguards are needed, and what evidence should be reviewed before use expands.</a:t>
             </a:r>
             <a:endParaRPr lang="en-US" sz="1550" dirty="0"/>
           </a:p>
@@ -6283,8 +6839,8 @@
         </p:nvSpPr>
         <p:spPr>
           <a:xfrm>
-            <a:off x="9966960" y="6537960"/>
-            <a:ext cx="1645920" cy="201168"/>
+            <a:off x="9646920" y="6537960"/>
+            <a:ext cx="1965960" cy="201168"/>
           </a:xfrm>
           <a:prstGeom prst="rect">
             <a:avLst/>
@@ -6308,7 +6864,7 @@
                 <a:ea typeface="Aptos" pitchFamily="34" charset="-122"/>
                 <a:cs typeface="Aptos" pitchFamily="34" charset="-120"/>
               </a:rPr>
-              <a:t>Â© Paula Soper</a:t>
+              <a:t>Copyright Paula Soper</a:t>
             </a:r>
             <a:endParaRPr lang="en-US" sz="800" dirty="0"/>
           </a:p>
@@ -6355,17 +6911,262 @@
       </p:sp>
       <p:sp>
         <p:nvSpPr>
-          <p:cNvPr id="8" name="Shape 6"/>
+          <p:cNvPr id="8" name="Text 6"/>
           <p:cNvSpPr/>
           <p:nvPr/>
         </p:nvSpPr>
         <p:spPr>
           <a:xfrm>
             <a:off x="640080" y="658368"/>
-            <a:ext cx="420624" cy="420624"/>
-          </a:xfrm>
-          <a:prstGeom prst="ellipse">
-            <a:avLst/>
+            <a:ext cx="10881360" cy="713232"/>
+          </a:xfrm>
+          <a:prstGeom prst="rect">
+            <a:avLst/>
+          </a:prstGeom>
+          <a:noFill/>
+          <a:ln/>
+        </p:spPr>
+        <p:txBody>
+          <a:bodyPr wrap="square" lIns="0" tIns="0" rIns="0" bIns="0" rtlCol="0" anchor="ctr">
+            <a:normAutofit/>
+          </a:bodyPr>
+          <a:lstStyle/>
+          <a:p>
+            <a:pPr indent="0" marL="0">
+              <a:buNone/>
+            </a:pPr>
+            <a:r>
+              <a:rPr lang="en-US" sz="3400" b="1" dirty="0">
+                <a:solidFill>
+                  <a:srgbClr val="003A63"/>
+                </a:solidFill>
+                <a:latin typeface="Aptos Display" pitchFamily="34" charset="0"/>
+                <a:ea typeface="Aptos Display" pitchFamily="34" charset="-122"/>
+                <a:cs typeface="Aptos Display" pitchFamily="34" charset="-120"/>
+              </a:rPr>
+              <a:t>Application to AI-Supported Workflows</a:t>
+            </a:r>
+            <a:endParaRPr lang="en-US" sz="3400" dirty="0"/>
+          </a:p>
+        </p:txBody>
+      </p:sp>
+      <p:sp>
+        <p:nvSpPr>
+          <p:cNvPr id="9" name="Text 7"/>
+          <p:cNvSpPr/>
+          <p:nvPr/>
+        </p:nvSpPr>
+        <p:spPr>
+          <a:xfrm>
+            <a:off x="868680" y="1508760"/>
+            <a:ext cx="6309360" cy="4160520"/>
+          </a:xfrm>
+          <a:prstGeom prst="rect">
+            <a:avLst/>
+          </a:prstGeom>
+          <a:noFill/>
+          <a:ln/>
+        </p:spPr>
+        <p:txBody>
+          <a:bodyPr wrap="square" lIns="635" tIns="635" rIns="635" bIns="635" rtlCol="0" anchor="t">
+            <a:normAutofit/>
+          </a:bodyPr>
+          <a:lstStyle/>
+          <a:p>
+            <a:r>
+              <a:rPr lang="en-US" sz="2100" dirty="0">
+                <a:solidFill>
+                  <a:srgbClr val="17364A"/>
+                </a:solidFill>
+                <a:latin typeface="Aptos" pitchFamily="34" charset="0"/>
+                <a:ea typeface="Aptos" pitchFamily="34" charset="-122"/>
+                <a:cs typeface="Aptos" pitchFamily="34" charset="-120"/>
+              </a:rPr>
+              <a:t>Generative AI may summarize structured and narrative data received through interoperable exchange, but.</a:t>
+            </a:r>
+            <a:endParaRPr lang="en-US" sz="2100" dirty="0"/>
+          </a:p>
+          <a:p>
+            <a:r>
+              <a:rPr lang="en-US" sz="2100" dirty="0">
+                <a:solidFill>
+                  <a:srgbClr val="17364A"/>
+                </a:solidFill>
+                <a:latin typeface="Aptos" pitchFamily="34" charset="0"/>
+                <a:ea typeface="Aptos" pitchFamily="34" charset="-122"/>
+                <a:cs typeface="Aptos" pitchFamily="34" charset="-120"/>
+              </a:rPr>
+              <a:t>Predictive analytics may depend on standardized fields and terminology, so interoperability gaps can.</a:t>
+            </a:r>
+            <a:endParaRPr lang="en-US" sz="2100" dirty="0"/>
+          </a:p>
+          <a:p>
+            <a:r>
+              <a:rPr lang="en-US" sz="2100" dirty="0">
+                <a:solidFill>
+                  <a:srgbClr val="17364A"/>
+                </a:solidFill>
+                <a:latin typeface="Aptos" pitchFamily="34" charset="0"/>
+                <a:ea typeface="Aptos" pitchFamily="34" charset="-122"/>
+                <a:cs typeface="Aptos" pitchFamily="34" charset="-120"/>
+              </a:rPr>
+              <a:t>RAG tools may retrieve implementation guides or agency protocols, but document governance is needed to.</a:t>
+            </a:r>
+            <a:endParaRPr lang="en-US" sz="2100" dirty="0"/>
+          </a:p>
+        </p:txBody>
+      </p:sp>
+      <p:sp>
+        <p:nvSpPr>
+          <p:cNvPr id="10" name="Shape 8"/>
+          <p:cNvSpPr/>
+          <p:nvPr/>
+        </p:nvSpPr>
+        <p:spPr>
+          <a:xfrm>
+            <a:off x="7635240" y="1325880"/>
+            <a:ext cx="3474720" cy="1325880"/>
+          </a:xfrm>
+          <a:prstGeom prst="roundRect">
+            <a:avLst>
+              <a:gd name="adj" fmla="val 8276"/>
+            </a:avLst>
+          </a:prstGeom>
+          <a:solidFill>
+            <a:srgbClr val="EEF8ED"/>
+          </a:solidFill>
+          <a:ln w="12700">
+            <a:solidFill>
+              <a:srgbClr val="B9D7E6"/>
+            </a:solidFill>
+            <a:prstDash val="solid"/>
+          </a:ln>
+        </p:spPr>
+      </p:sp>
+      <p:sp>
+        <p:nvSpPr>
+          <p:cNvPr id="11" name="Text 9"/>
+          <p:cNvSpPr/>
+          <p:nvPr/>
+        </p:nvSpPr>
+        <p:spPr>
+          <a:xfrm>
+            <a:off x="7799832" y="1472184"/>
+            <a:ext cx="3145536" cy="256032"/>
+          </a:xfrm>
+          <a:prstGeom prst="rect">
+            <a:avLst/>
+          </a:prstGeom>
+          <a:noFill/>
+          <a:ln/>
+        </p:spPr>
+        <p:txBody>
+          <a:bodyPr wrap="square" lIns="0" tIns="0" rIns="0" bIns="0" rtlCol="0" anchor="ctr"/>
+          <a:lstStyle/>
+          <a:p>
+            <a:pPr indent="0" marL="0">
+              <a:buNone/>
+            </a:pPr>
+            <a:r>
+              <a:rPr lang="en-US" sz="1300" b="1" dirty="0">
+                <a:solidFill>
+                  <a:srgbClr val="0068B7"/>
+                </a:solidFill>
+                <a:latin typeface="Aptos" pitchFamily="34" charset="0"/>
+                <a:ea typeface="Aptos" pitchFamily="34" charset="-122"/>
+                <a:cs typeface="Aptos" pitchFamily="34" charset="-120"/>
+              </a:rPr>
+              <a:t>Implementation cue</a:t>
+            </a:r>
+            <a:endParaRPr lang="en-US" sz="1300" dirty="0"/>
+          </a:p>
+        </p:txBody>
+      </p:sp>
+      <p:sp>
+        <p:nvSpPr>
+          <p:cNvPr id="12" name="Text 10"/>
+          <p:cNvSpPr/>
+          <p:nvPr/>
+        </p:nvSpPr>
+        <p:spPr>
+          <a:xfrm>
+            <a:off x="7799832" y="1828800"/>
+            <a:ext cx="3145536" cy="685800"/>
+          </a:xfrm>
+          <a:prstGeom prst="rect">
+            <a:avLst/>
+          </a:prstGeom>
+          <a:noFill/>
+          <a:ln/>
+        </p:spPr>
+        <p:txBody>
+          <a:bodyPr wrap="square" lIns="0" tIns="0" rIns="0" bIns="0" rtlCol="0" anchor="t">
+            <a:normAutofit/>
+          </a:bodyPr>
+          <a:lstStyle/>
+          <a:p>
+            <a:pPr indent="0" marL="0">
+              <a:buNone/>
+            </a:pPr>
+            <a:r>
+              <a:rPr lang="en-US" sz="1550" dirty="0">
+                <a:solidFill>
+                  <a:srgbClr val="17364A"/>
+                </a:solidFill>
+                <a:latin typeface="Aptos" pitchFamily="34" charset="0"/>
+                <a:ea typeface="Aptos" pitchFamily="34" charset="-122"/>
+                <a:cs typeface="Aptos" pitchFamily="34" charset="-120"/>
+              </a:rPr>
+              <a:t>Generative AI may summarize structured and narrative data received through interoperable exchange, but.</a:t>
+            </a:r>
+            <a:endParaRPr lang="en-US" sz="1550" dirty="0"/>
+          </a:p>
+        </p:txBody>
+      </p:sp>
+      <p:sp>
+        <p:nvSpPr>
+          <p:cNvPr id="13" name="Shape 11"/>
+          <p:cNvSpPr/>
+          <p:nvPr/>
+        </p:nvSpPr>
+        <p:spPr>
+          <a:xfrm>
+            <a:off x="7635240" y="2788920"/>
+            <a:ext cx="3474720" cy="1536192"/>
+          </a:xfrm>
+          <a:prstGeom prst="roundRect">
+            <a:avLst>
+              <a:gd name="adj" fmla="val 7143"/>
+            </a:avLst>
+          </a:prstGeom>
+          <a:solidFill>
+            <a:srgbClr val="FFFFFF">
+              <a:alpha val="88000"/>
+            </a:srgbClr>
+          </a:solidFill>
+          <a:ln w="12700">
+            <a:solidFill>
+              <a:srgbClr val="D6E8F2"/>
+            </a:solidFill>
+            <a:prstDash val="solid"/>
+          </a:ln>
+        </p:spPr>
+      </p:sp>
+      <p:sp>
+        <p:nvSpPr>
+          <p:cNvPr id="14" name="Shape 12"/>
+          <p:cNvSpPr/>
+          <p:nvPr/>
+        </p:nvSpPr>
+        <p:spPr>
+          <a:xfrm>
+            <a:off x="7927848" y="3319272"/>
+            <a:ext cx="792480" cy="749808"/>
+          </a:xfrm>
+          <a:prstGeom prst="roundRect">
+            <a:avLst>
+              <a:gd name="adj" fmla="val 14634"/>
+            </a:avLst>
           </a:prstGeom>
           <a:solidFill>
             <a:srgbClr val="0068B7"/>
@@ -6380,53 +7181,14 @@
       </p:sp>
       <p:sp>
         <p:nvSpPr>
-          <p:cNvPr id="9" name="Text 7"/>
-          <p:cNvSpPr/>
-          <p:nvPr/>
-        </p:nvSpPr>
-        <p:spPr>
-          <a:xfrm>
-            <a:off x="640080" y="731520"/>
-            <a:ext cx="420624" cy="164592"/>
-          </a:xfrm>
-          <a:prstGeom prst="rect">
-            <a:avLst/>
-          </a:prstGeom>
-          <a:noFill/>
-          <a:ln/>
-        </p:spPr>
-        <p:txBody>
-          <a:bodyPr wrap="square" lIns="0" tIns="0" rIns="0" bIns="0" rtlCol="0" anchor="ctr"/>
-          <a:lstStyle/>
-          <a:p>
-            <a:pPr algn="ctr" indent="0" marL="0">
-              <a:buNone/>
-            </a:pPr>
-            <a:r>
-              <a:rPr lang="en-US" sz="1100" b="1" dirty="0">
-                <a:solidFill>
-                  <a:srgbClr val="FFFFFF"/>
-                </a:solidFill>
-                <a:latin typeface="Aptos" pitchFamily="34" charset="0"/>
-                <a:ea typeface="Aptos" pitchFamily="34" charset="-122"/>
-                <a:cs typeface="Aptos" pitchFamily="34" charset="-120"/>
-              </a:rPr>
-              <a:t>9</a:t>
-            </a:r>
-            <a:endParaRPr lang="en-US" sz="1100" dirty="0"/>
-          </a:p>
-        </p:txBody>
-      </p:sp>
-      <p:sp>
-        <p:nvSpPr>
-          <p:cNvPr id="10" name="Text 8"/>
-          <p:cNvSpPr/>
-          <p:nvPr/>
-        </p:nvSpPr>
-        <p:spPr>
-          <a:xfrm>
-            <a:off x="640080" y="621792"/>
-            <a:ext cx="10881360" cy="713232"/>
+          <p:cNvPr id="15" name="Text 13"/>
+          <p:cNvSpPr/>
+          <p:nvPr/>
+        </p:nvSpPr>
+        <p:spPr>
+          <a:xfrm>
+            <a:off x="8001000" y="3511296"/>
+            <a:ext cx="646176" cy="310896"/>
           </a:xfrm>
           <a:prstGeom prst="rect">
             <a:avLst/>
@@ -6440,112 +7202,46 @@
           </a:bodyPr>
           <a:lstStyle/>
           <a:p>
-            <a:pPr indent="0" marL="0">
-              <a:buNone/>
-            </a:pPr>
-            <a:r>
-              <a:rPr lang="en-US" sz="3400" b="1" dirty="0">
-                <a:solidFill>
-                  <a:srgbClr val="003A63"/>
-                </a:solidFill>
-                <a:latin typeface="Aptos Display" pitchFamily="34" charset="0"/>
-                <a:ea typeface="Aptos Display" pitchFamily="34" charset="-122"/>
-                <a:cs typeface="Aptos Display" pitchFamily="34" charset="-120"/>
-              </a:rPr>
-              <a:t>Application to AI-Supported Workflows</a:t>
-            </a:r>
-            <a:endParaRPr lang="en-US" sz="3400" dirty="0"/>
-          </a:p>
-        </p:txBody>
-      </p:sp>
-      <p:sp>
-        <p:nvSpPr>
-          <p:cNvPr id="11" name="Text 9"/>
-          <p:cNvSpPr/>
-          <p:nvPr/>
-        </p:nvSpPr>
-        <p:spPr>
-          <a:xfrm>
-            <a:off x="868680" y="1508760"/>
-            <a:ext cx="6537960" cy="4160520"/>
-          </a:xfrm>
-          <a:prstGeom prst="rect">
-            <a:avLst/>
-          </a:prstGeom>
-          <a:noFill/>
-          <a:ln/>
-        </p:spPr>
-        <p:txBody>
-          <a:bodyPr wrap="square" lIns="635" tIns="635" rIns="635" bIns="635" rtlCol="0" anchor="t">
-            <a:normAutofit/>
-          </a:bodyPr>
-          <a:lstStyle/>
-          <a:p>
-            <a:r>
-              <a:rPr lang="en-US" sz="2100" dirty="0">
-                <a:solidFill>
-                  <a:srgbClr val="17364A"/>
-                </a:solidFill>
-                <a:latin typeface="Aptos" pitchFamily="34" charset="0"/>
-                <a:ea typeface="Aptos" pitchFamily="34" charset="-122"/>
-                <a:cs typeface="Aptos" pitchFamily="34" charset="-120"/>
-              </a:rPr>
-              <a:t>Generative AI may summarize structured and narrative data received through interoperable exchange, but.</a:t>
-            </a:r>
-            <a:endParaRPr lang="en-US" sz="2100" dirty="0"/>
-          </a:p>
-          <a:p>
-            <a:r>
-              <a:rPr lang="en-US" sz="2100" dirty="0">
-                <a:solidFill>
-                  <a:srgbClr val="17364A"/>
-                </a:solidFill>
-                <a:latin typeface="Aptos" pitchFamily="34" charset="0"/>
-                <a:ea typeface="Aptos" pitchFamily="34" charset="-122"/>
-                <a:cs typeface="Aptos" pitchFamily="34" charset="-120"/>
-              </a:rPr>
-              <a:t>Predictive analytics may depend on standardized fields and terminology, so interoperability gaps can.</a:t>
-            </a:r>
-            <a:endParaRPr lang="en-US" sz="2100" dirty="0"/>
-          </a:p>
-          <a:p>
-            <a:r>
-              <a:rPr lang="en-US" sz="2100" dirty="0">
-                <a:solidFill>
-                  <a:srgbClr val="17364A"/>
-                </a:solidFill>
-                <a:latin typeface="Aptos" pitchFamily="34" charset="0"/>
-                <a:ea typeface="Aptos" pitchFamily="34" charset="-122"/>
-                <a:cs typeface="Aptos" pitchFamily="34" charset="-120"/>
-              </a:rPr>
-              <a:t>RAG tools may retrieve implementation guides or agency protocols, but document governance is needed to.</a:t>
-            </a:r>
-            <a:endParaRPr lang="en-US" sz="2100" dirty="0"/>
-          </a:p>
-        </p:txBody>
-      </p:sp>
-      <p:sp>
-        <p:nvSpPr>
-          <p:cNvPr id="12" name="Shape 10"/>
-          <p:cNvSpPr/>
-          <p:nvPr/>
-        </p:nvSpPr>
-        <p:spPr>
-          <a:xfrm>
-            <a:off x="7909560" y="1417320"/>
-            <a:ext cx="3154680" cy="1828800"/>
+            <a:pPr algn="ctr" indent="0" marL="0">
+              <a:buNone/>
+            </a:pPr>
+            <a:r>
+              <a:rPr lang="en-US" sz="1500" b="1" dirty="0">
+                <a:solidFill>
+                  <a:srgbClr val="FFFFFF"/>
+                </a:solidFill>
+                <a:latin typeface="Aptos" pitchFamily="34" charset="0"/>
+                <a:ea typeface="Aptos" pitchFamily="34" charset="-122"/>
+                <a:cs typeface="Aptos" pitchFamily="34" charset="-120"/>
+              </a:rPr>
+              <a:t>Plan</a:t>
+            </a:r>
+            <a:endParaRPr lang="en-US" sz="1500" dirty="0"/>
+          </a:p>
+        </p:txBody>
+      </p:sp>
+      <p:sp>
+        <p:nvSpPr>
+          <p:cNvPr id="16" name="Shape 14"/>
+          <p:cNvSpPr/>
+          <p:nvPr/>
+        </p:nvSpPr>
+        <p:spPr>
+          <a:xfrm>
+            <a:off x="8976360" y="3319272"/>
+            <a:ext cx="792480" cy="749808"/>
           </a:xfrm>
           <a:prstGeom prst="roundRect">
             <a:avLst>
-              <a:gd name="adj" fmla="val 6000"/>
+              <a:gd name="adj" fmla="val 14634"/>
             </a:avLst>
           </a:prstGeom>
           <a:solidFill>
-            <a:srgbClr val="EEF8ED"/>
+            <a:srgbClr val="2F8A28"/>
           </a:solidFill>
           <a:ln w="12700">
             <a:solidFill>
-              <a:srgbClr val="B9D7E6"/>
+              <a:srgbClr val="2F8A28"/>
             </a:solidFill>
             <a:prstDash val="solid"/>
           </a:ln>
@@ -6553,98 +7249,189 @@
       </p:sp>
       <p:sp>
         <p:nvSpPr>
-          <p:cNvPr id="13" name="Text 11"/>
-          <p:cNvSpPr/>
-          <p:nvPr/>
-        </p:nvSpPr>
-        <p:spPr>
-          <a:xfrm>
-            <a:off x="8074152" y="1563624"/>
-            <a:ext cx="2825496" cy="256032"/>
-          </a:xfrm>
-          <a:prstGeom prst="rect">
-            <a:avLst/>
-          </a:prstGeom>
-          <a:noFill/>
-          <a:ln/>
-        </p:spPr>
-        <p:txBody>
-          <a:bodyPr wrap="square" lIns="0" tIns="0" rIns="0" bIns="0" rtlCol="0" anchor="ctr"/>
-          <a:lstStyle/>
-          <a:p>
-            <a:pPr indent="0" marL="0">
-              <a:buNone/>
-            </a:pPr>
-            <a:r>
-              <a:rPr lang="en-US" sz="1300" b="1" dirty="0">
-                <a:solidFill>
-                  <a:srgbClr val="0068B7"/>
-                </a:solidFill>
-                <a:latin typeface="Aptos" pitchFamily="34" charset="0"/>
-                <a:ea typeface="Aptos" pitchFamily="34" charset="-122"/>
-                <a:cs typeface="Aptos" pitchFamily="34" charset="-120"/>
-              </a:rPr>
-              <a:t>Key idea</a:t>
-            </a:r>
-            <a:endParaRPr lang="en-US" sz="1300" dirty="0"/>
-          </a:p>
-        </p:txBody>
-      </p:sp>
-      <p:sp>
-        <p:nvSpPr>
-          <p:cNvPr id="14" name="Text 12"/>
-          <p:cNvSpPr/>
-          <p:nvPr/>
-        </p:nvSpPr>
-        <p:spPr>
-          <a:xfrm>
-            <a:off x="8074152" y="1920240"/>
-            <a:ext cx="2825496" cy="1188720"/>
-          </a:xfrm>
-          <a:prstGeom prst="rect">
-            <a:avLst/>
-          </a:prstGeom>
-          <a:noFill/>
-          <a:ln/>
-        </p:spPr>
-        <p:txBody>
-          <a:bodyPr wrap="square" lIns="0" tIns="0" rIns="0" bIns="0" rtlCol="0" anchor="t">
+          <p:cNvPr id="17" name="Text 15"/>
+          <p:cNvSpPr/>
+          <p:nvPr/>
+        </p:nvSpPr>
+        <p:spPr>
+          <a:xfrm>
+            <a:off x="9049512" y="3511296"/>
+            <a:ext cx="646176" cy="310896"/>
+          </a:xfrm>
+          <a:prstGeom prst="rect">
+            <a:avLst/>
+          </a:prstGeom>
+          <a:noFill/>
+          <a:ln/>
+        </p:spPr>
+        <p:txBody>
+          <a:bodyPr wrap="square" lIns="0" tIns="0" rIns="0" bIns="0" rtlCol="0" anchor="ctr">
             <a:normAutofit/>
           </a:bodyPr>
           <a:lstStyle/>
           <a:p>
-            <a:pPr indent="0" marL="0">
-              <a:buNone/>
-            </a:pPr>
-            <a:r>
-              <a:rPr lang="en-US" sz="1550" dirty="0">
-                <a:solidFill>
-                  <a:srgbClr val="17364A"/>
-                </a:solidFill>
-                <a:latin typeface="Aptos" pitchFamily="34" charset="0"/>
-                <a:ea typeface="Aptos" pitchFamily="34" charset="-122"/>
-                <a:cs typeface="Aptos" pitchFamily="34" charset="-120"/>
-              </a:rPr>
-              <a:t>Generative AI may summarize structured and narrative data received through interoperable exchange, but.</a:t>
-            </a:r>
-            <a:endParaRPr lang="en-US" sz="1550" dirty="0"/>
-          </a:p>
-        </p:txBody>
-      </p:sp>
-      <p:sp>
-        <p:nvSpPr>
-          <p:cNvPr id="15" name="Shape 13"/>
-          <p:cNvSpPr/>
-          <p:nvPr/>
-        </p:nvSpPr>
-        <p:spPr>
-          <a:xfrm>
-            <a:off x="7909560" y="3520440"/>
-            <a:ext cx="3154680" cy="1737360"/>
+            <a:pPr algn="ctr" indent="0" marL="0">
+              <a:buNone/>
+            </a:pPr>
+            <a:r>
+              <a:rPr lang="en-US" sz="1500" b="1" dirty="0">
+                <a:solidFill>
+                  <a:srgbClr val="FFFFFF"/>
+                </a:solidFill>
+                <a:latin typeface="Aptos" pitchFamily="34" charset="0"/>
+                <a:ea typeface="Aptos" pitchFamily="34" charset="-122"/>
+                <a:cs typeface="Aptos" pitchFamily="34" charset="-120"/>
+              </a:rPr>
+              <a:t>Do</a:t>
+            </a:r>
+            <a:endParaRPr lang="en-US" sz="1500" dirty="0"/>
+          </a:p>
+        </p:txBody>
+      </p:sp>
+      <p:sp>
+        <p:nvSpPr>
+          <p:cNvPr id="18" name="Shape 16"/>
+          <p:cNvSpPr/>
+          <p:nvPr/>
+        </p:nvSpPr>
+        <p:spPr>
+          <a:xfrm>
+            <a:off x="10024872" y="3319272"/>
+            <a:ext cx="792480" cy="749808"/>
           </a:xfrm>
           <a:prstGeom prst="roundRect">
             <a:avLst>
-              <a:gd name="adj" fmla="val 6316"/>
+              <a:gd name="adj" fmla="val 14634"/>
+            </a:avLst>
+          </a:prstGeom>
+          <a:solidFill>
+            <a:srgbClr val="D69A2D"/>
+          </a:solidFill>
+          <a:ln w="12700">
+            <a:solidFill>
+              <a:srgbClr val="D69A2D"/>
+            </a:solidFill>
+            <a:prstDash val="solid"/>
+          </a:ln>
+        </p:spPr>
+      </p:sp>
+      <p:sp>
+        <p:nvSpPr>
+          <p:cNvPr id="19" name="Text 17"/>
+          <p:cNvSpPr/>
+          <p:nvPr/>
+        </p:nvSpPr>
+        <p:spPr>
+          <a:xfrm>
+            <a:off x="10098024" y="3511296"/>
+            <a:ext cx="646176" cy="310896"/>
+          </a:xfrm>
+          <a:prstGeom prst="rect">
+            <a:avLst/>
+          </a:prstGeom>
+          <a:noFill/>
+          <a:ln/>
+        </p:spPr>
+        <p:txBody>
+          <a:bodyPr wrap="square" lIns="0" tIns="0" rIns="0" bIns="0" rtlCol="0" anchor="ctr">
+            <a:normAutofit/>
+          </a:bodyPr>
+          <a:lstStyle/>
+          <a:p>
+            <a:pPr algn="ctr" indent="0" marL="0">
+              <a:buNone/>
+            </a:pPr>
+            <a:r>
+              <a:rPr lang="en-US" sz="1500" b="1" dirty="0">
+                <a:solidFill>
+                  <a:srgbClr val="FFFFFF"/>
+                </a:solidFill>
+                <a:latin typeface="Aptos" pitchFamily="34" charset="0"/>
+                <a:ea typeface="Aptos" pitchFamily="34" charset="-122"/>
+                <a:cs typeface="Aptos" pitchFamily="34" charset="-120"/>
+              </a:rPr>
+              <a:t>Review</a:t>
+            </a:r>
+            <a:endParaRPr lang="en-US" sz="1500" dirty="0"/>
+          </a:p>
+        </p:txBody>
+      </p:sp>
+      <p:sp>
+        <p:nvSpPr>
+          <p:cNvPr id="20" name="Shape 18"/>
+          <p:cNvSpPr/>
+          <p:nvPr/>
+        </p:nvSpPr>
+        <p:spPr>
+          <a:xfrm>
+            <a:off x="8293608" y="4389120"/>
+            <a:ext cx="2157984" cy="0"/>
+          </a:xfrm>
+          <a:prstGeom prst="line">
+            <a:avLst/>
+          </a:prstGeom>
+          <a:noFill/>
+          <a:ln w="25400">
+            <a:solidFill>
+              <a:srgbClr val="8ABBD8"/>
+            </a:solidFill>
+            <a:prstDash val="solid"/>
+          </a:ln>
+        </p:spPr>
+      </p:sp>
+      <p:sp>
+        <p:nvSpPr>
+          <p:cNvPr id="21" name="Text 19"/>
+          <p:cNvSpPr/>
+          <p:nvPr/>
+        </p:nvSpPr>
+        <p:spPr>
+          <a:xfrm>
+            <a:off x="7909560" y="3977640"/>
+            <a:ext cx="2926080" cy="182880"/>
+          </a:xfrm>
+          <a:prstGeom prst="rect">
+            <a:avLst/>
+          </a:prstGeom>
+          <a:noFill/>
+          <a:ln/>
+        </p:spPr>
+        <p:txBody>
+          <a:bodyPr wrap="square" lIns="0" tIns="0" rIns="0" bIns="0" rtlCol="0" anchor="ctr"/>
+          <a:lstStyle/>
+          <a:p>
+            <a:pPr algn="ctr" indent="0" marL="0">
+              <a:buNone/>
+            </a:pPr>
+            <a:r>
+              <a:rPr lang="en-US" sz="1000" dirty="0">
+                <a:solidFill>
+                  <a:srgbClr val="003A63"/>
+                </a:solidFill>
+                <a:latin typeface="Aptos" pitchFamily="34" charset="0"/>
+                <a:ea typeface="Aptos" pitchFamily="34" charset="-122"/>
+                <a:cs typeface="Aptos" pitchFamily="34" charset="-120"/>
+              </a:rPr>
+              <a:t>Dependencies visible</a:t>
+            </a:r>
+            <a:endParaRPr lang="en-US" sz="1000" dirty="0"/>
+          </a:p>
+        </p:txBody>
+      </p:sp>
+      <p:sp>
+        <p:nvSpPr>
+          <p:cNvPr id="22" name="Shape 20"/>
+          <p:cNvSpPr/>
+          <p:nvPr/>
+        </p:nvSpPr>
+        <p:spPr>
+          <a:xfrm>
+            <a:off x="7635240" y="4498848"/>
+            <a:ext cx="3474720" cy="1143000"/>
+          </a:xfrm>
+          <a:prstGeom prst="roundRect">
+            <a:avLst>
+              <a:gd name="adj" fmla="val 9600"/>
             </a:avLst>
           </a:prstGeom>
           <a:solidFill>
@@ -6660,14 +7447,14 @@
       </p:sp>
       <p:sp>
         <p:nvSpPr>
-          <p:cNvPr id="16" name="Text 14"/>
-          <p:cNvSpPr/>
-          <p:nvPr/>
-        </p:nvSpPr>
-        <p:spPr>
-          <a:xfrm>
-            <a:off x="8074152" y="3666744"/>
-            <a:ext cx="2825496" cy="256032"/>
+          <p:cNvPr id="23" name="Text 21"/>
+          <p:cNvSpPr/>
+          <p:nvPr/>
+        </p:nvSpPr>
+        <p:spPr>
+          <a:xfrm>
+            <a:off x="7799832" y="4645152"/>
+            <a:ext cx="3145536" cy="256032"/>
           </a:xfrm>
           <a:prstGeom prst="rect">
             <a:avLst/>
@@ -6691,7 +7478,7 @@
                 <a:ea typeface="Aptos" pitchFamily="34" charset="-122"/>
                 <a:cs typeface="Aptos" pitchFamily="34" charset="-120"/>
               </a:rPr>
-              <a:t>Use this for</a:t>
+              <a:t>Next action</a:t>
             </a:r>
             <a:endParaRPr lang="en-US" sz="1300" dirty="0"/>
           </a:p>
@@ -6699,14 +7486,14 @@
       </p:sp>
       <p:sp>
         <p:nvSpPr>
-          <p:cNvPr id="17" name="Text 15"/>
-          <p:cNvSpPr/>
-          <p:nvPr/>
-        </p:nvSpPr>
-        <p:spPr>
-          <a:xfrm>
-            <a:off x="8074152" y="4023360"/>
-            <a:ext cx="2825496" cy="1097280"/>
+          <p:cNvPr id="24" name="Text 22"/>
+          <p:cNvSpPr/>
+          <p:nvPr/>
+        </p:nvSpPr>
+        <p:spPr>
+          <a:xfrm>
+            <a:off x="7799832" y="5001768"/>
+            <a:ext cx="3145536" cy="502920"/>
           </a:xfrm>
           <a:prstGeom prst="rect">
             <a:avLst/>
@@ -6732,7 +7519,7 @@
                 <a:ea typeface="Aptos" pitchFamily="34" charset="-122"/>
                 <a:cs typeface="Aptos" pitchFamily="34" charset="-120"/>
               </a:rPr>
-              <a:t>Connect the concept to public health decisions, safeguards, documentation, or implementation work.</a:t>
+              <a:t>Use the concept to clarify workflow changes, dependencies, staffing, procurement requirements, training needs, and implementation checkpoints.</a:t>
             </a:r>
             <a:endParaRPr lang="en-US" sz="1550" dirty="0"/>
           </a:p>
@@ -6906,8 +7693,8 @@
         </p:nvSpPr>
         <p:spPr>
           <a:xfrm>
-            <a:off x="9966960" y="6537960"/>
-            <a:ext cx="1645920" cy="201168"/>
+            <a:off x="9646920" y="6537960"/>
+            <a:ext cx="1965960" cy="201168"/>
           </a:xfrm>
           <a:prstGeom prst="rect">
             <a:avLst/>
@@ -6931,7 +7718,7 @@
                 <a:ea typeface="Aptos" pitchFamily="34" charset="-122"/>
                 <a:cs typeface="Aptos" pitchFamily="34" charset="-120"/>
               </a:rPr>
-              <a:t>Â© Paula Soper</a:t>
+              <a:t>Copyright Paula Soper</a:t>
             </a:r>
             <a:endParaRPr lang="en-US" sz="800" dirty="0"/>
           </a:p>
@@ -6978,77 +7765,13 @@
       </p:sp>
       <p:sp>
         <p:nvSpPr>
-          <p:cNvPr id="8" name="Shape 6"/>
+          <p:cNvPr id="8" name="Text 6"/>
           <p:cNvSpPr/>
           <p:nvPr/>
         </p:nvSpPr>
         <p:spPr>
           <a:xfrm>
             <a:off x="640080" y="658368"/>
-            <a:ext cx="420624" cy="420624"/>
-          </a:xfrm>
-          <a:prstGeom prst="ellipse">
-            <a:avLst/>
-          </a:prstGeom>
-          <a:solidFill>
-            <a:srgbClr val="0068B7"/>
-          </a:solidFill>
-          <a:ln w="12700">
-            <a:solidFill>
-              <a:srgbClr val="0068B7"/>
-            </a:solidFill>
-            <a:prstDash val="solid"/>
-          </a:ln>
-        </p:spPr>
-      </p:sp>
-      <p:sp>
-        <p:nvSpPr>
-          <p:cNvPr id="9" name="Text 7"/>
-          <p:cNvSpPr/>
-          <p:nvPr/>
-        </p:nvSpPr>
-        <p:spPr>
-          <a:xfrm>
-            <a:off x="640080" y="731520"/>
-            <a:ext cx="420624" cy="164592"/>
-          </a:xfrm>
-          <a:prstGeom prst="rect">
-            <a:avLst/>
-          </a:prstGeom>
-          <a:noFill/>
-          <a:ln/>
-        </p:spPr>
-        <p:txBody>
-          <a:bodyPr wrap="square" lIns="0" tIns="0" rIns="0" bIns="0" rtlCol="0" anchor="ctr"/>
-          <a:lstStyle/>
-          <a:p>
-            <a:pPr algn="ctr" indent="0" marL="0">
-              <a:buNone/>
-            </a:pPr>
-            <a:r>
-              <a:rPr lang="en-US" sz="1100" b="1" dirty="0">
-                <a:solidFill>
-                  <a:srgbClr val="FFFFFF"/>
-                </a:solidFill>
-                <a:latin typeface="Aptos" pitchFamily="34" charset="0"/>
-                <a:ea typeface="Aptos" pitchFamily="34" charset="-122"/>
-                <a:cs typeface="Aptos" pitchFamily="34" charset="-120"/>
-              </a:rPr>
-              <a:t>10</a:t>
-            </a:r>
-            <a:endParaRPr lang="en-US" sz="1100" dirty="0"/>
-          </a:p>
-        </p:txBody>
-      </p:sp>
-      <p:sp>
-        <p:nvSpPr>
-          <p:cNvPr id="10" name="Text 8"/>
-          <p:cNvSpPr/>
-          <p:nvPr/>
-        </p:nvSpPr>
-        <p:spPr>
-          <a:xfrm>
-            <a:off x="640080" y="621792"/>
             <a:ext cx="10881360" cy="713232"/>
           </a:xfrm>
           <a:prstGeom prst="rect">
@@ -7083,14 +7806,14 @@
       </p:sp>
       <p:sp>
         <p:nvSpPr>
-          <p:cNvPr id="11" name="Text 9"/>
+          <p:cNvPr id="9" name="Text 7"/>
           <p:cNvSpPr/>
           <p:nvPr/>
         </p:nvSpPr>
         <p:spPr>
           <a:xfrm>
             <a:off x="868680" y="1508760"/>
-            <a:ext cx="6537960" cy="4160520"/>
+            <a:ext cx="6309360" cy="4160520"/>
           </a:xfrm>
           <a:prstGeom prst="rect">
             <a:avLst/>
@@ -7149,18 +7872,18 @@
       </p:sp>
       <p:sp>
         <p:nvSpPr>
-          <p:cNvPr id="12" name="Shape 10"/>
-          <p:cNvSpPr/>
-          <p:nvPr/>
-        </p:nvSpPr>
-        <p:spPr>
-          <a:xfrm>
-            <a:off x="7909560" y="1417320"/>
-            <a:ext cx="3154680" cy="1828800"/>
+          <p:cNvPr id="10" name="Shape 8"/>
+          <p:cNvSpPr/>
+          <p:nvPr/>
+        </p:nvSpPr>
+        <p:spPr>
+          <a:xfrm>
+            <a:off x="7635240" y="1325880"/>
+            <a:ext cx="3474720" cy="1325880"/>
           </a:xfrm>
           <a:prstGeom prst="roundRect">
             <a:avLst>
-              <a:gd name="adj" fmla="val 6000"/>
+              <a:gd name="adj" fmla="val 8276"/>
             </a:avLst>
           </a:prstGeom>
           <a:solidFill>
@@ -7176,14 +7899,14 @@
       </p:sp>
       <p:sp>
         <p:nvSpPr>
-          <p:cNvPr id="13" name="Text 11"/>
-          <p:cNvSpPr/>
-          <p:nvPr/>
-        </p:nvSpPr>
-        <p:spPr>
-          <a:xfrm>
-            <a:off x="8074152" y="1563624"/>
-            <a:ext cx="2825496" cy="256032"/>
+          <p:cNvPr id="11" name="Text 9"/>
+          <p:cNvSpPr/>
+          <p:nvPr/>
+        </p:nvSpPr>
+        <p:spPr>
+          <a:xfrm>
+            <a:off x="7799832" y="1472184"/>
+            <a:ext cx="3145536" cy="256032"/>
           </a:xfrm>
           <a:prstGeom prst="rect">
             <a:avLst/>
@@ -7207,7 +7930,7 @@
                 <a:ea typeface="Aptos" pitchFamily="34" charset="-122"/>
                 <a:cs typeface="Aptos" pitchFamily="34" charset="-120"/>
               </a:rPr>
-              <a:t>Key idea</a:t>
+              <a:t>Core concept</a:t>
             </a:r>
             <a:endParaRPr lang="en-US" sz="1300" dirty="0"/>
           </a:p>
@@ -7215,14 +7938,14 @@
       </p:sp>
       <p:sp>
         <p:nvSpPr>
-          <p:cNvPr id="14" name="Text 12"/>
-          <p:cNvSpPr/>
-          <p:nvPr/>
-        </p:nvSpPr>
-        <p:spPr>
-          <a:xfrm>
-            <a:off x="8074152" y="1920240"/>
-            <a:ext cx="2825496" cy="1188720"/>
+          <p:cNvPr id="12" name="Text 10"/>
+          <p:cNvSpPr/>
+          <p:nvPr/>
+        </p:nvSpPr>
+        <p:spPr>
+          <a:xfrm>
+            <a:off x="7799832" y="1828800"/>
+            <a:ext cx="3145536" cy="685800"/>
           </a:xfrm>
           <a:prstGeom prst="rect">
             <a:avLst/>
@@ -7256,18 +7979,159 @@
       </p:sp>
       <p:sp>
         <p:nvSpPr>
-          <p:cNvPr id="15" name="Shape 13"/>
-          <p:cNvSpPr/>
-          <p:nvPr/>
-        </p:nvSpPr>
-        <p:spPr>
-          <a:xfrm>
-            <a:off x="7909560" y="3520440"/>
-            <a:ext cx="3154680" cy="1737360"/>
+          <p:cNvPr id="13" name="Shape 11"/>
+          <p:cNvSpPr/>
+          <p:nvPr/>
+        </p:nvSpPr>
+        <p:spPr>
+          <a:xfrm>
+            <a:off x="7635240" y="2788920"/>
+            <a:ext cx="3474720" cy="1536192"/>
           </a:xfrm>
           <a:prstGeom prst="roundRect">
             <a:avLst>
-              <a:gd name="adj" fmla="val 6316"/>
+              <a:gd name="adj" fmla="val 7143"/>
+            </a:avLst>
+          </a:prstGeom>
+          <a:solidFill>
+            <a:srgbClr val="FFFFFF">
+              <a:alpha val="88000"/>
+            </a:srgbClr>
+          </a:solidFill>
+          <a:ln w="12700">
+            <a:solidFill>
+              <a:srgbClr val="D6E8F2"/>
+            </a:solidFill>
+            <a:prstDash val="solid"/>
+          </a:ln>
+        </p:spPr>
+      </p:sp>
+      <p:sp>
+        <p:nvSpPr>
+          <p:cNvPr id="14" name="Shape 12"/>
+          <p:cNvSpPr/>
+          <p:nvPr/>
+        </p:nvSpPr>
+        <p:spPr>
+          <a:xfrm>
+            <a:off x="8074152" y="3291840"/>
+            <a:ext cx="2596896" cy="749808"/>
+          </a:xfrm>
+          <a:prstGeom prst="rect">
+            <a:avLst/>
+          </a:prstGeom>
+          <a:solidFill>
+            <a:srgbClr val="EAF6F8"/>
+          </a:solidFill>
+          <a:ln w="12700">
+            <a:solidFill>
+              <a:srgbClr val="8ABBD8"/>
+            </a:solidFill>
+            <a:prstDash val="solid"/>
+          </a:ln>
+        </p:spPr>
+      </p:sp>
+      <p:sp>
+        <p:nvSpPr>
+          <p:cNvPr id="15" name="Shape 13"/>
+          <p:cNvSpPr/>
+          <p:nvPr/>
+        </p:nvSpPr>
+        <p:spPr>
+          <a:xfrm>
+            <a:off x="8202168" y="3721608"/>
+            <a:ext cx="2340864" cy="0"/>
+          </a:xfrm>
+          <a:prstGeom prst="line">
+            <a:avLst/>
+          </a:prstGeom>
+          <a:noFill/>
+          <a:ln w="19050">
+            <a:solidFill>
+              <a:srgbClr val="0068B7"/>
+            </a:solidFill>
+            <a:prstDash val="solid"/>
+          </a:ln>
+        </p:spPr>
+      </p:sp>
+      <p:sp>
+        <p:nvSpPr>
+          <p:cNvPr id="16" name="Shape 14"/>
+          <p:cNvSpPr/>
+          <p:nvPr/>
+        </p:nvSpPr>
+        <p:spPr>
+          <a:xfrm>
+            <a:off x="9198864" y="4206240"/>
+            <a:ext cx="347472" cy="347472"/>
+          </a:xfrm>
+          <a:prstGeom prst="ellipse">
+            <a:avLst/>
+          </a:prstGeom>
+          <a:solidFill>
+            <a:srgbClr val="2F8A28"/>
+          </a:solidFill>
+          <a:ln w="12700">
+            <a:solidFill>
+              <a:srgbClr val="2F8A28"/>
+            </a:solidFill>
+            <a:prstDash val="solid"/>
+          </a:ln>
+        </p:spPr>
+      </p:sp>
+      <p:sp>
+        <p:nvSpPr>
+          <p:cNvPr id="17" name="Text 15"/>
+          <p:cNvSpPr/>
+          <p:nvPr/>
+        </p:nvSpPr>
+        <p:spPr>
+          <a:xfrm>
+            <a:off x="7909560" y="3977640"/>
+            <a:ext cx="2926080" cy="182880"/>
+          </a:xfrm>
+          <a:prstGeom prst="rect">
+            <a:avLst/>
+          </a:prstGeom>
+          <a:noFill/>
+          <a:ln/>
+        </p:spPr>
+        <p:txBody>
+          <a:bodyPr wrap="square" lIns="0" tIns="0" rIns="0" bIns="0" rtlCol="0" anchor="ctr"/>
+          <a:lstStyle/>
+          <a:p>
+            <a:pPr algn="ctr" indent="0" marL="0">
+              <a:buNone/>
+            </a:pPr>
+            <a:r>
+              <a:rPr lang="en-US" sz="1000" dirty="0">
+                <a:solidFill>
+                  <a:srgbClr val="003A63"/>
+                </a:solidFill>
+                <a:latin typeface="Aptos" pitchFamily="34" charset="0"/>
+                <a:ea typeface="Aptos" pitchFamily="34" charset="-122"/>
+                <a:cs typeface="Aptos" pitchFamily="34" charset="-120"/>
+              </a:rPr>
+              <a:t>Concept to action</a:t>
+            </a:r>
+            <a:endParaRPr lang="en-US" sz="1000" dirty="0"/>
+          </a:p>
+        </p:txBody>
+      </p:sp>
+      <p:sp>
+        <p:nvSpPr>
+          <p:cNvPr id="18" name="Shape 16"/>
+          <p:cNvSpPr/>
+          <p:nvPr/>
+        </p:nvSpPr>
+        <p:spPr>
+          <a:xfrm>
+            <a:off x="7635240" y="4498848"/>
+            <a:ext cx="3474720" cy="1143000"/>
+          </a:xfrm>
+          <a:prstGeom prst="roundRect">
+            <a:avLst>
+              <a:gd name="adj" fmla="val 9600"/>
             </a:avLst>
           </a:prstGeom>
           <a:solidFill>
@@ -7283,14 +8147,14 @@
       </p:sp>
       <p:sp>
         <p:nvSpPr>
-          <p:cNvPr id="16" name="Text 14"/>
-          <p:cNvSpPr/>
-          <p:nvPr/>
-        </p:nvSpPr>
-        <p:spPr>
-          <a:xfrm>
-            <a:off x="8074152" y="3666744"/>
-            <a:ext cx="2825496" cy="256032"/>
+          <p:cNvPr id="19" name="Text 17"/>
+          <p:cNvSpPr/>
+          <p:nvPr/>
+        </p:nvSpPr>
+        <p:spPr>
+          <a:xfrm>
+            <a:off x="7799832" y="4645152"/>
+            <a:ext cx="3145536" cy="256032"/>
           </a:xfrm>
           <a:prstGeom prst="rect">
             <a:avLst/>
@@ -7314,7 +8178,7 @@
                 <a:ea typeface="Aptos" pitchFamily="34" charset="-122"/>
                 <a:cs typeface="Aptos" pitchFamily="34" charset="-120"/>
               </a:rPr>
-              <a:t>Use this for</a:t>
+              <a:t>Apply it</a:t>
             </a:r>
             <a:endParaRPr lang="en-US" sz="1300" dirty="0"/>
           </a:p>
@@ -7322,14 +8186,14 @@
       </p:sp>
       <p:sp>
         <p:nvSpPr>
-          <p:cNvPr id="17" name="Text 15"/>
-          <p:cNvSpPr/>
-          <p:nvPr/>
-        </p:nvSpPr>
-        <p:spPr>
-          <a:xfrm>
-            <a:off x="8074152" y="4023360"/>
-            <a:ext cx="2825496" cy="1097280"/>
+          <p:cNvPr id="20" name="Text 18"/>
+          <p:cNvSpPr/>
+          <p:nvPr/>
+        </p:nvSpPr>
+        <p:spPr>
+          <a:xfrm>
+            <a:off x="7799832" y="5001768"/>
+            <a:ext cx="3145536" cy="502920"/>
           </a:xfrm>
           <a:prstGeom prst="rect">
             <a:avLst/>
@@ -7355,7 +8219,7 @@
                 <a:ea typeface="Aptos" pitchFamily="34" charset="-122"/>
                 <a:cs typeface="Aptos" pitchFamily="34" charset="-120"/>
               </a:rPr>
-              <a:t>Connect the concept to public health decisions, safeguards, documentation, or implementation work.</a:t>
+              <a:t>Connect the concept to public health purpose, responsible use, required safeguards, documentation, and the next action a department should take.</a:t>
             </a:r>
             <a:endParaRPr lang="en-US" sz="1550" dirty="0"/>
           </a:p>
@@ -7529,8 +8393,8 @@
         </p:nvSpPr>
         <p:spPr>
           <a:xfrm>
-            <a:off x="9966960" y="6537960"/>
-            <a:ext cx="1645920" cy="201168"/>
+            <a:off x="9646920" y="6537960"/>
+            <a:ext cx="1965960" cy="201168"/>
           </a:xfrm>
           <a:prstGeom prst="rect">
             <a:avLst/>
@@ -7554,7 +8418,7 @@
                 <a:ea typeface="Aptos" pitchFamily="34" charset="-122"/>
                 <a:cs typeface="Aptos" pitchFamily="34" charset="-120"/>
               </a:rPr>
-              <a:t>Â© Paula Soper</a:t>
+              <a:t>Copyright Paula Soper</a:t>
             </a:r>
             <a:endParaRPr lang="en-US" sz="800" dirty="0"/>
           </a:p>
@@ -7649,7 +8513,7 @@
         <p:spPr>
           <a:xfrm>
             <a:off x="868680" y="1508760"/>
-            <a:ext cx="6537960" cy="4160520"/>
+            <a:ext cx="6309360" cy="4160520"/>
           </a:xfrm>
           <a:prstGeom prst="rect">
             <a:avLst/>
@@ -7700,12 +8564,12 @@
         </p:nvSpPr>
         <p:spPr>
           <a:xfrm>
-            <a:off x="7909560" y="1417320"/>
-            <a:ext cx="3154680" cy="1828800"/>
+            <a:off x="7635240" y="1325880"/>
+            <a:ext cx="3474720" cy="1325880"/>
           </a:xfrm>
           <a:prstGeom prst="roundRect">
             <a:avLst>
-              <a:gd name="adj" fmla="val 6000"/>
+              <a:gd name="adj" fmla="val 8276"/>
             </a:avLst>
           </a:prstGeom>
           <a:solidFill>
@@ -7727,8 +8591,8 @@
         </p:nvSpPr>
         <p:spPr>
           <a:xfrm>
-            <a:off x="8074152" y="1563624"/>
-            <a:ext cx="2825496" cy="256032"/>
+            <a:off x="7799832" y="1472184"/>
+            <a:ext cx="3145536" cy="256032"/>
           </a:xfrm>
           <a:prstGeom prst="rect">
             <a:avLst/>
@@ -7752,7 +8616,7 @@
                 <a:ea typeface="Aptos" pitchFamily="34" charset="-122"/>
                 <a:cs typeface="Aptos" pitchFamily="34" charset="-120"/>
               </a:rPr>
-              <a:t>Key idea</a:t>
+              <a:t>Core concept</a:t>
             </a:r>
             <a:endParaRPr lang="en-US" sz="1300" dirty="0"/>
           </a:p>
@@ -7766,8 +8630,8 @@
         </p:nvSpPr>
         <p:spPr>
           <a:xfrm>
-            <a:off x="8074152" y="1920240"/>
-            <a:ext cx="2825496" cy="1188720"/>
+            <a:off x="7799832" y="1828800"/>
+            <a:ext cx="3145536" cy="685800"/>
           </a:xfrm>
           <a:prstGeom prst="rect">
             <a:avLst/>
@@ -7807,12 +8671,153 @@
         </p:nvSpPr>
         <p:spPr>
           <a:xfrm>
-            <a:off x="7909560" y="3520440"/>
-            <a:ext cx="3154680" cy="1737360"/>
+            <a:off x="7635240" y="2788920"/>
+            <a:ext cx="3474720" cy="1536192"/>
           </a:xfrm>
           <a:prstGeom prst="roundRect">
             <a:avLst>
-              <a:gd name="adj" fmla="val 6316"/>
+              <a:gd name="adj" fmla="val 7143"/>
+            </a:avLst>
+          </a:prstGeom>
+          <a:solidFill>
+            <a:srgbClr val="FFFFFF">
+              <a:alpha val="88000"/>
+            </a:srgbClr>
+          </a:solidFill>
+          <a:ln w="12700">
+            <a:solidFill>
+              <a:srgbClr val="D6E8F2"/>
+            </a:solidFill>
+            <a:prstDash val="solid"/>
+          </a:ln>
+        </p:spPr>
+      </p:sp>
+      <p:sp>
+        <p:nvSpPr>
+          <p:cNvPr id="14" name="Shape 12"/>
+          <p:cNvSpPr/>
+          <p:nvPr/>
+        </p:nvSpPr>
+        <p:spPr>
+          <a:xfrm>
+            <a:off x="8074152" y="3291840"/>
+            <a:ext cx="2596896" cy="749808"/>
+          </a:xfrm>
+          <a:prstGeom prst="rect">
+            <a:avLst/>
+          </a:prstGeom>
+          <a:solidFill>
+            <a:srgbClr val="EAF6F8"/>
+          </a:solidFill>
+          <a:ln w="12700">
+            <a:solidFill>
+              <a:srgbClr val="8ABBD8"/>
+            </a:solidFill>
+            <a:prstDash val="solid"/>
+          </a:ln>
+        </p:spPr>
+      </p:sp>
+      <p:sp>
+        <p:nvSpPr>
+          <p:cNvPr id="15" name="Shape 13"/>
+          <p:cNvSpPr/>
+          <p:nvPr/>
+        </p:nvSpPr>
+        <p:spPr>
+          <a:xfrm>
+            <a:off x="8202168" y="3721608"/>
+            <a:ext cx="2340864" cy="0"/>
+          </a:xfrm>
+          <a:prstGeom prst="line">
+            <a:avLst/>
+          </a:prstGeom>
+          <a:noFill/>
+          <a:ln w="19050">
+            <a:solidFill>
+              <a:srgbClr val="0068B7"/>
+            </a:solidFill>
+            <a:prstDash val="solid"/>
+          </a:ln>
+        </p:spPr>
+      </p:sp>
+      <p:sp>
+        <p:nvSpPr>
+          <p:cNvPr id="16" name="Shape 14"/>
+          <p:cNvSpPr/>
+          <p:nvPr/>
+        </p:nvSpPr>
+        <p:spPr>
+          <a:xfrm>
+            <a:off x="9198864" y="4206240"/>
+            <a:ext cx="347472" cy="347472"/>
+          </a:xfrm>
+          <a:prstGeom prst="ellipse">
+            <a:avLst/>
+          </a:prstGeom>
+          <a:solidFill>
+            <a:srgbClr val="2F8A28"/>
+          </a:solidFill>
+          <a:ln w="12700">
+            <a:solidFill>
+              <a:srgbClr val="2F8A28"/>
+            </a:solidFill>
+            <a:prstDash val="solid"/>
+          </a:ln>
+        </p:spPr>
+      </p:sp>
+      <p:sp>
+        <p:nvSpPr>
+          <p:cNvPr id="17" name="Text 15"/>
+          <p:cNvSpPr/>
+          <p:nvPr/>
+        </p:nvSpPr>
+        <p:spPr>
+          <a:xfrm>
+            <a:off x="7909560" y="3977640"/>
+            <a:ext cx="2926080" cy="182880"/>
+          </a:xfrm>
+          <a:prstGeom prst="rect">
+            <a:avLst/>
+          </a:prstGeom>
+          <a:noFill/>
+          <a:ln/>
+        </p:spPr>
+        <p:txBody>
+          <a:bodyPr wrap="square" lIns="0" tIns="0" rIns="0" bIns="0" rtlCol="0" anchor="ctr"/>
+          <a:lstStyle/>
+          <a:p>
+            <a:pPr algn="ctr" indent="0" marL="0">
+              <a:buNone/>
+            </a:pPr>
+            <a:r>
+              <a:rPr lang="en-US" sz="1000" dirty="0">
+                <a:solidFill>
+                  <a:srgbClr val="003A63"/>
+                </a:solidFill>
+                <a:latin typeface="Aptos" pitchFamily="34" charset="0"/>
+                <a:ea typeface="Aptos" pitchFamily="34" charset="-122"/>
+                <a:cs typeface="Aptos" pitchFamily="34" charset="-120"/>
+              </a:rPr>
+              <a:t>Concept to action</a:t>
+            </a:r>
+            <a:endParaRPr lang="en-US" sz="1000" dirty="0"/>
+          </a:p>
+        </p:txBody>
+      </p:sp>
+      <p:sp>
+        <p:nvSpPr>
+          <p:cNvPr id="18" name="Shape 16"/>
+          <p:cNvSpPr/>
+          <p:nvPr/>
+        </p:nvSpPr>
+        <p:spPr>
+          <a:xfrm>
+            <a:off x="7635240" y="4498848"/>
+            <a:ext cx="3474720" cy="1143000"/>
+          </a:xfrm>
+          <a:prstGeom prst="roundRect">
+            <a:avLst>
+              <a:gd name="adj" fmla="val 9600"/>
             </a:avLst>
           </a:prstGeom>
           <a:solidFill>
@@ -7828,14 +8833,14 @@
       </p:sp>
       <p:sp>
         <p:nvSpPr>
-          <p:cNvPr id="14" name="Text 12"/>
-          <p:cNvSpPr/>
-          <p:nvPr/>
-        </p:nvSpPr>
-        <p:spPr>
-          <a:xfrm>
-            <a:off x="8074152" y="3666744"/>
-            <a:ext cx="2825496" cy="256032"/>
+          <p:cNvPr id="19" name="Text 17"/>
+          <p:cNvSpPr/>
+          <p:nvPr/>
+        </p:nvSpPr>
+        <p:spPr>
+          <a:xfrm>
+            <a:off x="7799832" y="4645152"/>
+            <a:ext cx="3145536" cy="256032"/>
           </a:xfrm>
           <a:prstGeom prst="rect">
             <a:avLst/>
@@ -7859,7 +8864,7 @@
                 <a:ea typeface="Aptos" pitchFamily="34" charset="-122"/>
                 <a:cs typeface="Aptos" pitchFamily="34" charset="-120"/>
               </a:rPr>
-              <a:t>Use this for</a:t>
+              <a:t>Apply it</a:t>
             </a:r>
             <a:endParaRPr lang="en-US" sz="1300" dirty="0"/>
           </a:p>
@@ -7867,14 +8872,14 @@
       </p:sp>
       <p:sp>
         <p:nvSpPr>
-          <p:cNvPr id="15" name="Text 13"/>
-          <p:cNvSpPr/>
-          <p:nvPr/>
-        </p:nvSpPr>
-        <p:spPr>
-          <a:xfrm>
-            <a:off x="8074152" y="4023360"/>
-            <a:ext cx="2825496" cy="1097280"/>
+          <p:cNvPr id="20" name="Text 18"/>
+          <p:cNvSpPr/>
+          <p:nvPr/>
+        </p:nvSpPr>
+        <p:spPr>
+          <a:xfrm>
+            <a:off x="7799832" y="5001768"/>
+            <a:ext cx="3145536" cy="502920"/>
           </a:xfrm>
           <a:prstGeom prst="rect">
             <a:avLst/>
@@ -7900,7 +8905,7 @@
                 <a:ea typeface="Aptos" pitchFamily="34" charset="-122"/>
                 <a:cs typeface="Aptos" pitchFamily="34" charset="-120"/>
               </a:rPr>
-              <a:t>Connect the concept to public health decisions, safeguards, documentation, or implementation work.</a:t>
+              <a:t>Connect the concept to public health purpose, responsible use, required safeguards, documentation, and the next action a department should take.</a:t>
             </a:r>
             <a:endParaRPr lang="en-US" sz="1550" dirty="0"/>
           </a:p>
@@ -8074,8 +9079,8 @@
         </p:nvSpPr>
         <p:spPr>
           <a:xfrm>
-            <a:off x="9966960" y="6537960"/>
-            <a:ext cx="1645920" cy="201168"/>
+            <a:off x="9646920" y="6537960"/>
+            <a:ext cx="1965960" cy="201168"/>
           </a:xfrm>
           <a:prstGeom prst="rect">
             <a:avLst/>
@@ -8099,7 +9104,7 @@
                 <a:ea typeface="Aptos" pitchFamily="34" charset="-122"/>
                 <a:cs typeface="Aptos" pitchFamily="34" charset="-120"/>
               </a:rPr>
-              <a:t>Â© Paula Soper</a:t>
+              <a:t>Copyright Paula Soper</a:t>
             </a:r>
             <a:endParaRPr lang="en-US" sz="800" dirty="0"/>
           </a:p>
@@ -8146,77 +9151,13 @@
       </p:sp>
       <p:sp>
         <p:nvSpPr>
-          <p:cNvPr id="8" name="Shape 6"/>
+          <p:cNvPr id="8" name="Text 6"/>
           <p:cNvSpPr/>
           <p:nvPr/>
         </p:nvSpPr>
         <p:spPr>
           <a:xfrm>
             <a:off x="640080" y="658368"/>
-            <a:ext cx="420624" cy="420624"/>
-          </a:xfrm>
-          <a:prstGeom prst="ellipse">
-            <a:avLst/>
-          </a:prstGeom>
-          <a:solidFill>
-            <a:srgbClr val="0068B7"/>
-          </a:solidFill>
-          <a:ln w="12700">
-            <a:solidFill>
-              <a:srgbClr val="0068B7"/>
-            </a:solidFill>
-            <a:prstDash val="solid"/>
-          </a:ln>
-        </p:spPr>
-      </p:sp>
-      <p:sp>
-        <p:nvSpPr>
-          <p:cNvPr id="9" name="Text 7"/>
-          <p:cNvSpPr/>
-          <p:nvPr/>
-        </p:nvSpPr>
-        <p:spPr>
-          <a:xfrm>
-            <a:off x="640080" y="731520"/>
-            <a:ext cx="420624" cy="164592"/>
-          </a:xfrm>
-          <a:prstGeom prst="rect">
-            <a:avLst/>
-          </a:prstGeom>
-          <a:noFill/>
-          <a:ln/>
-        </p:spPr>
-        <p:txBody>
-          <a:bodyPr wrap="square" lIns="0" tIns="0" rIns="0" bIns="0" rtlCol="0" anchor="ctr"/>
-          <a:lstStyle/>
-          <a:p>
-            <a:pPr algn="ctr" indent="0" marL="0">
-              <a:buNone/>
-            </a:pPr>
-            <a:r>
-              <a:rPr lang="en-US" sz="1100" b="1" dirty="0">
-                <a:solidFill>
-                  <a:srgbClr val="FFFFFF"/>
-                </a:solidFill>
-                <a:latin typeface="Aptos" pitchFamily="34" charset="0"/>
-                <a:ea typeface="Aptos" pitchFamily="34" charset="-122"/>
-                <a:cs typeface="Aptos" pitchFamily="34" charset="-120"/>
-              </a:rPr>
-              <a:t>11</a:t>
-            </a:r>
-            <a:endParaRPr lang="en-US" sz="1100" dirty="0"/>
-          </a:p>
-        </p:txBody>
-      </p:sp>
-      <p:sp>
-        <p:nvSpPr>
-          <p:cNvPr id="10" name="Text 8"/>
-          <p:cNvSpPr/>
-          <p:nvPr/>
-        </p:nvSpPr>
-        <p:spPr>
-          <a:xfrm>
-            <a:off x="640080" y="621792"/>
             <a:ext cx="10881360" cy="713232"/>
           </a:xfrm>
           <a:prstGeom prst="rect">
@@ -8251,14 +9192,14 @@
       </p:sp>
       <p:sp>
         <p:nvSpPr>
-          <p:cNvPr id="11" name="Text 9"/>
+          <p:cNvPr id="9" name="Text 7"/>
           <p:cNvSpPr/>
           <p:nvPr/>
         </p:nvSpPr>
         <p:spPr>
           <a:xfrm>
             <a:off x="868680" y="1508760"/>
-            <a:ext cx="6537960" cy="4160520"/>
+            <a:ext cx="6309360" cy="4160520"/>
           </a:xfrm>
           <a:prstGeom prst="rect">
             <a:avLst/>
@@ -8317,18 +9258,18 @@
       </p:sp>
       <p:sp>
         <p:nvSpPr>
-          <p:cNvPr id="12" name="Shape 10"/>
-          <p:cNvSpPr/>
-          <p:nvPr/>
-        </p:nvSpPr>
-        <p:spPr>
-          <a:xfrm>
-            <a:off x="7909560" y="1417320"/>
-            <a:ext cx="3154680" cy="1828800"/>
+          <p:cNvPr id="10" name="Shape 8"/>
+          <p:cNvSpPr/>
+          <p:nvPr/>
+        </p:nvSpPr>
+        <p:spPr>
+          <a:xfrm>
+            <a:off x="7635240" y="1325880"/>
+            <a:ext cx="3474720" cy="1325880"/>
           </a:xfrm>
           <a:prstGeom prst="roundRect">
             <a:avLst>
-              <a:gd name="adj" fmla="val 6000"/>
+              <a:gd name="adj" fmla="val 8276"/>
             </a:avLst>
           </a:prstGeom>
           <a:solidFill>
@@ -8344,14 +9285,14 @@
       </p:sp>
       <p:sp>
         <p:nvSpPr>
-          <p:cNvPr id="13" name="Text 11"/>
-          <p:cNvSpPr/>
-          <p:nvPr/>
-        </p:nvSpPr>
-        <p:spPr>
-          <a:xfrm>
-            <a:off x="8074152" y="1563624"/>
-            <a:ext cx="2825496" cy="256032"/>
+          <p:cNvPr id="11" name="Text 9"/>
+          <p:cNvSpPr/>
+          <p:nvPr/>
+        </p:nvSpPr>
+        <p:spPr>
+          <a:xfrm>
+            <a:off x="7799832" y="1472184"/>
+            <a:ext cx="3145536" cy="256032"/>
           </a:xfrm>
           <a:prstGeom prst="rect">
             <a:avLst/>
@@ -8375,7 +9316,7 @@
                 <a:ea typeface="Aptos" pitchFamily="34" charset="-122"/>
                 <a:cs typeface="Aptos" pitchFamily="34" charset="-120"/>
               </a:rPr>
-              <a:t>Key idea</a:t>
+              <a:t>Practice focus</a:t>
             </a:r>
             <a:endParaRPr lang="en-US" sz="1300" dirty="0"/>
           </a:p>
@@ -8383,14 +9324,14 @@
       </p:sp>
       <p:sp>
         <p:nvSpPr>
-          <p:cNvPr id="14" name="Text 12"/>
-          <p:cNvSpPr/>
-          <p:nvPr/>
-        </p:nvSpPr>
-        <p:spPr>
-          <a:xfrm>
-            <a:off x="8074152" y="1920240"/>
-            <a:ext cx="2825496" cy="1188720"/>
+          <p:cNvPr id="12" name="Text 10"/>
+          <p:cNvSpPr/>
+          <p:nvPr/>
+        </p:nvSpPr>
+        <p:spPr>
+          <a:xfrm>
+            <a:off x="7799832" y="1828800"/>
+            <a:ext cx="3145536" cy="685800"/>
           </a:xfrm>
           <a:prstGeom prst="rect">
             <a:avLst/>
@@ -8424,18 +9365,159 @@
       </p:sp>
       <p:sp>
         <p:nvSpPr>
-          <p:cNvPr id="15" name="Shape 13"/>
-          <p:cNvSpPr/>
-          <p:nvPr/>
-        </p:nvSpPr>
-        <p:spPr>
-          <a:xfrm>
-            <a:off x="7909560" y="3520440"/>
-            <a:ext cx="3154680" cy="1737360"/>
+          <p:cNvPr id="13" name="Shape 11"/>
+          <p:cNvSpPr/>
+          <p:nvPr/>
+        </p:nvSpPr>
+        <p:spPr>
+          <a:xfrm>
+            <a:off x="7635240" y="2788920"/>
+            <a:ext cx="3474720" cy="1536192"/>
           </a:xfrm>
           <a:prstGeom prst="roundRect">
             <a:avLst>
-              <a:gd name="adj" fmla="val 6316"/>
+              <a:gd name="adj" fmla="val 7143"/>
+            </a:avLst>
+          </a:prstGeom>
+          <a:solidFill>
+            <a:srgbClr val="FFFFFF">
+              <a:alpha val="88000"/>
+            </a:srgbClr>
+          </a:solidFill>
+          <a:ln w="12700">
+            <a:solidFill>
+              <a:srgbClr val="D6E8F2"/>
+            </a:solidFill>
+            <a:prstDash val="solid"/>
+          </a:ln>
+        </p:spPr>
+      </p:sp>
+      <p:sp>
+        <p:nvSpPr>
+          <p:cNvPr id="14" name="Shape 12"/>
+          <p:cNvSpPr/>
+          <p:nvPr/>
+        </p:nvSpPr>
+        <p:spPr>
+          <a:xfrm>
+            <a:off x="8074152" y="3291840"/>
+            <a:ext cx="2596896" cy="749808"/>
+          </a:xfrm>
+          <a:prstGeom prst="rect">
+            <a:avLst/>
+          </a:prstGeom>
+          <a:solidFill>
+            <a:srgbClr val="EAF6F8"/>
+          </a:solidFill>
+          <a:ln w="12700">
+            <a:solidFill>
+              <a:srgbClr val="8ABBD8"/>
+            </a:solidFill>
+            <a:prstDash val="solid"/>
+          </a:ln>
+        </p:spPr>
+      </p:sp>
+      <p:sp>
+        <p:nvSpPr>
+          <p:cNvPr id="15" name="Shape 13"/>
+          <p:cNvSpPr/>
+          <p:nvPr/>
+        </p:nvSpPr>
+        <p:spPr>
+          <a:xfrm>
+            <a:off x="8202168" y="3721608"/>
+            <a:ext cx="2340864" cy="0"/>
+          </a:xfrm>
+          <a:prstGeom prst="line">
+            <a:avLst/>
+          </a:prstGeom>
+          <a:noFill/>
+          <a:ln w="19050">
+            <a:solidFill>
+              <a:srgbClr val="0068B7"/>
+            </a:solidFill>
+            <a:prstDash val="solid"/>
+          </a:ln>
+        </p:spPr>
+      </p:sp>
+      <p:sp>
+        <p:nvSpPr>
+          <p:cNvPr id="16" name="Shape 14"/>
+          <p:cNvSpPr/>
+          <p:nvPr/>
+        </p:nvSpPr>
+        <p:spPr>
+          <a:xfrm>
+            <a:off x="9198864" y="4206240"/>
+            <a:ext cx="347472" cy="347472"/>
+          </a:xfrm>
+          <a:prstGeom prst="ellipse">
+            <a:avLst/>
+          </a:prstGeom>
+          <a:solidFill>
+            <a:srgbClr val="2F8A28"/>
+          </a:solidFill>
+          <a:ln w="12700">
+            <a:solidFill>
+              <a:srgbClr val="2F8A28"/>
+            </a:solidFill>
+            <a:prstDash val="solid"/>
+          </a:ln>
+        </p:spPr>
+      </p:sp>
+      <p:sp>
+        <p:nvSpPr>
+          <p:cNvPr id="17" name="Text 15"/>
+          <p:cNvSpPr/>
+          <p:nvPr/>
+        </p:nvSpPr>
+        <p:spPr>
+          <a:xfrm>
+            <a:off x="7909560" y="3977640"/>
+            <a:ext cx="2926080" cy="182880"/>
+          </a:xfrm>
+          <a:prstGeom prst="rect">
+            <a:avLst/>
+          </a:prstGeom>
+          <a:noFill/>
+          <a:ln/>
+        </p:spPr>
+        <p:txBody>
+          <a:bodyPr wrap="square" lIns="0" tIns="0" rIns="0" bIns="0" rtlCol="0" anchor="ctr"/>
+          <a:lstStyle/>
+          <a:p>
+            <a:pPr algn="ctr" indent="0" marL="0">
+              <a:buNone/>
+            </a:pPr>
+            <a:r>
+              <a:rPr lang="en-US" sz="1000" dirty="0">
+                <a:solidFill>
+                  <a:srgbClr val="003A63"/>
+                </a:solidFill>
+                <a:latin typeface="Aptos" pitchFamily="34" charset="0"/>
+                <a:ea typeface="Aptos" pitchFamily="34" charset="-122"/>
+                <a:cs typeface="Aptos" pitchFamily="34" charset="-120"/>
+              </a:rPr>
+              <a:t>Concept to action</a:t>
+            </a:r>
+            <a:endParaRPr lang="en-US" sz="1000" dirty="0"/>
+          </a:p>
+        </p:txBody>
+      </p:sp>
+      <p:sp>
+        <p:nvSpPr>
+          <p:cNvPr id="18" name="Shape 16"/>
+          <p:cNvSpPr/>
+          <p:nvPr/>
+        </p:nvSpPr>
+        <p:spPr>
+          <a:xfrm>
+            <a:off x="7635240" y="4498848"/>
+            <a:ext cx="3474720" cy="1143000"/>
+          </a:xfrm>
+          <a:prstGeom prst="roundRect">
+            <a:avLst>
+              <a:gd name="adj" fmla="val 9600"/>
             </a:avLst>
           </a:prstGeom>
           <a:solidFill>
@@ -8451,14 +9533,14 @@
       </p:sp>
       <p:sp>
         <p:nvSpPr>
-          <p:cNvPr id="16" name="Text 14"/>
-          <p:cNvSpPr/>
-          <p:nvPr/>
-        </p:nvSpPr>
-        <p:spPr>
-          <a:xfrm>
-            <a:off x="8074152" y="3666744"/>
-            <a:ext cx="2825496" cy="256032"/>
+          <p:cNvPr id="19" name="Text 17"/>
+          <p:cNvSpPr/>
+          <p:nvPr/>
+        </p:nvSpPr>
+        <p:spPr>
+          <a:xfrm>
+            <a:off x="7799832" y="4645152"/>
+            <a:ext cx="3145536" cy="256032"/>
           </a:xfrm>
           <a:prstGeom prst="rect">
             <a:avLst/>
@@ -8482,7 +9564,7 @@
                 <a:ea typeface="Aptos" pitchFamily="34" charset="-122"/>
                 <a:cs typeface="Aptos" pitchFamily="34" charset="-120"/>
               </a:rPr>
-              <a:t>Use this for</a:t>
+              <a:t>What to produce</a:t>
             </a:r>
             <a:endParaRPr lang="en-US" sz="1300" dirty="0"/>
           </a:p>
@@ -8490,14 +9572,14 @@
       </p:sp>
       <p:sp>
         <p:nvSpPr>
-          <p:cNvPr id="17" name="Text 15"/>
-          <p:cNvSpPr/>
-          <p:nvPr/>
-        </p:nvSpPr>
-        <p:spPr>
-          <a:xfrm>
-            <a:off x="8074152" y="4023360"/>
-            <a:ext cx="2825496" cy="1097280"/>
+          <p:cNvPr id="20" name="Text 18"/>
+          <p:cNvSpPr/>
+          <p:nvPr/>
+        </p:nvSpPr>
+        <p:spPr>
+          <a:xfrm>
+            <a:off x="7799832" y="5001768"/>
+            <a:ext cx="3145536" cy="502920"/>
           </a:xfrm>
           <a:prstGeom prst="rect">
             <a:avLst/>
@@ -8523,7 +9605,7 @@
                 <a:ea typeface="Aptos" pitchFamily="34" charset="-122"/>
                 <a:cs typeface="Aptos" pitchFamily="34" charset="-120"/>
               </a:rPr>
-              <a:t>Connect the concept to public health decisions, safeguards, documentation, or implementation work.</a:t>
+              <a:t>Use the assignment to test whether you can explain the concept, apply it to a realistic public health situation, and identify what would need review before the work moves forward.</a:t>
             </a:r>
             <a:endParaRPr lang="en-US" sz="1550" dirty="0"/>
           </a:p>
@@ -8697,8 +9779,8 @@
         </p:nvSpPr>
         <p:spPr>
           <a:xfrm>
-            <a:off x="9966960" y="6537960"/>
-            <a:ext cx="1645920" cy="201168"/>
+            <a:off x="9646920" y="6537960"/>
+            <a:ext cx="1965960" cy="201168"/>
           </a:xfrm>
           <a:prstGeom prst="rect">
             <a:avLst/>
@@ -8722,7 +9804,7 @@
                 <a:ea typeface="Aptos" pitchFamily="34" charset="-122"/>
                 <a:cs typeface="Aptos" pitchFamily="34" charset="-120"/>
               </a:rPr>
-              <a:t>Â© Paula Soper</a:t>
+              <a:t>Copyright Paula Soper</a:t>
             </a:r>
             <a:endParaRPr lang="en-US" sz="800" dirty="0"/>
           </a:p>
@@ -8769,77 +9851,13 @@
       </p:sp>
       <p:sp>
         <p:nvSpPr>
-          <p:cNvPr id="8" name="Shape 6"/>
+          <p:cNvPr id="8" name="Text 6"/>
           <p:cNvSpPr/>
           <p:nvPr/>
         </p:nvSpPr>
         <p:spPr>
           <a:xfrm>
             <a:off x="640080" y="658368"/>
-            <a:ext cx="420624" cy="420624"/>
-          </a:xfrm>
-          <a:prstGeom prst="ellipse">
-            <a:avLst/>
-          </a:prstGeom>
-          <a:solidFill>
-            <a:srgbClr val="0068B7"/>
-          </a:solidFill>
-          <a:ln w="12700">
-            <a:solidFill>
-              <a:srgbClr val="0068B7"/>
-            </a:solidFill>
-            <a:prstDash val="solid"/>
-          </a:ln>
-        </p:spPr>
-      </p:sp>
-      <p:sp>
-        <p:nvSpPr>
-          <p:cNvPr id="9" name="Text 7"/>
-          <p:cNvSpPr/>
-          <p:nvPr/>
-        </p:nvSpPr>
-        <p:spPr>
-          <a:xfrm>
-            <a:off x="640080" y="731520"/>
-            <a:ext cx="420624" cy="164592"/>
-          </a:xfrm>
-          <a:prstGeom prst="rect">
-            <a:avLst/>
-          </a:prstGeom>
-          <a:noFill/>
-          <a:ln/>
-        </p:spPr>
-        <p:txBody>
-          <a:bodyPr wrap="square" lIns="0" tIns="0" rIns="0" bIns="0" rtlCol="0" anchor="ctr"/>
-          <a:lstStyle/>
-          <a:p>
-            <a:pPr algn="ctr" indent="0" marL="0">
-              <a:buNone/>
-            </a:pPr>
-            <a:r>
-              <a:rPr lang="en-US" sz="1100" b="1" dirty="0">
-                <a:solidFill>
-                  <a:srgbClr val="FFFFFF"/>
-                </a:solidFill>
-                <a:latin typeface="Aptos" pitchFamily="34" charset="0"/>
-                <a:ea typeface="Aptos" pitchFamily="34" charset="-122"/>
-                <a:cs typeface="Aptos" pitchFamily="34" charset="-120"/>
-              </a:rPr>
-              <a:t>12</a:t>
-            </a:r>
-            <a:endParaRPr lang="en-US" sz="1100" dirty="0"/>
-          </a:p>
-        </p:txBody>
-      </p:sp>
-      <p:sp>
-        <p:nvSpPr>
-          <p:cNvPr id="10" name="Text 8"/>
-          <p:cNvSpPr/>
-          <p:nvPr/>
-        </p:nvSpPr>
-        <p:spPr>
-          <a:xfrm>
-            <a:off x="640080" y="621792"/>
             <a:ext cx="10881360" cy="713232"/>
           </a:xfrm>
           <a:prstGeom prst="rect">
@@ -8874,14 +9892,14 @@
       </p:sp>
       <p:sp>
         <p:nvSpPr>
-          <p:cNvPr id="11" name="Text 9"/>
+          <p:cNvPr id="9" name="Text 7"/>
           <p:cNvSpPr/>
           <p:nvPr/>
         </p:nvSpPr>
         <p:spPr>
           <a:xfrm>
             <a:off x="868680" y="1508760"/>
-            <a:ext cx="6537960" cy="4160520"/>
+            <a:ext cx="6309360" cy="4160520"/>
           </a:xfrm>
           <a:prstGeom prst="rect">
             <a:avLst/>
@@ -8940,18 +9958,18 @@
       </p:sp>
       <p:sp>
         <p:nvSpPr>
-          <p:cNvPr id="12" name="Shape 10"/>
-          <p:cNvSpPr/>
-          <p:nvPr/>
-        </p:nvSpPr>
-        <p:spPr>
-          <a:xfrm>
-            <a:off x="7909560" y="1417320"/>
-            <a:ext cx="3154680" cy="1828800"/>
+          <p:cNvPr id="10" name="Shape 8"/>
+          <p:cNvSpPr/>
+          <p:nvPr/>
+        </p:nvSpPr>
+        <p:spPr>
+          <a:xfrm>
+            <a:off x="7635240" y="1325880"/>
+            <a:ext cx="3474720" cy="1325880"/>
           </a:xfrm>
           <a:prstGeom prst="roundRect">
             <a:avLst>
-              <a:gd name="adj" fmla="val 6000"/>
+              <a:gd name="adj" fmla="val 8276"/>
             </a:avLst>
           </a:prstGeom>
           <a:solidFill>
@@ -8967,14 +9985,14 @@
       </p:sp>
       <p:sp>
         <p:nvSpPr>
-          <p:cNvPr id="13" name="Text 11"/>
-          <p:cNvSpPr/>
-          <p:nvPr/>
-        </p:nvSpPr>
-        <p:spPr>
-          <a:xfrm>
-            <a:off x="8074152" y="1563624"/>
-            <a:ext cx="2825496" cy="256032"/>
+          <p:cNvPr id="11" name="Text 9"/>
+          <p:cNvSpPr/>
+          <p:nvPr/>
+        </p:nvSpPr>
+        <p:spPr>
+          <a:xfrm>
+            <a:off x="7799832" y="1472184"/>
+            <a:ext cx="3145536" cy="256032"/>
           </a:xfrm>
           <a:prstGeom prst="rect">
             <a:avLst/>
@@ -8998,7 +10016,7 @@
                 <a:ea typeface="Aptos" pitchFamily="34" charset="-122"/>
                 <a:cs typeface="Aptos" pitchFamily="34" charset="-120"/>
               </a:rPr>
-              <a:t>Key idea</a:t>
+              <a:t>Core concept</a:t>
             </a:r>
             <a:endParaRPr lang="en-US" sz="1300" dirty="0"/>
           </a:p>
@@ -9006,14 +10024,14 @@
       </p:sp>
       <p:sp>
         <p:nvSpPr>
-          <p:cNvPr id="14" name="Text 12"/>
-          <p:cNvSpPr/>
-          <p:nvPr/>
-        </p:nvSpPr>
-        <p:spPr>
-          <a:xfrm>
-            <a:off x="8074152" y="1920240"/>
-            <a:ext cx="2825496" cy="1188720"/>
+          <p:cNvPr id="12" name="Text 10"/>
+          <p:cNvSpPr/>
+          <p:nvPr/>
+        </p:nvSpPr>
+        <p:spPr>
+          <a:xfrm>
+            <a:off x="7799832" y="1828800"/>
+            <a:ext cx="3145536" cy="685800"/>
           </a:xfrm>
           <a:prstGeom prst="rect">
             <a:avLst/>
@@ -9047,18 +10065,159 @@
       </p:sp>
       <p:sp>
         <p:nvSpPr>
-          <p:cNvPr id="15" name="Shape 13"/>
-          <p:cNvSpPr/>
-          <p:nvPr/>
-        </p:nvSpPr>
-        <p:spPr>
-          <a:xfrm>
-            <a:off x="7909560" y="3520440"/>
-            <a:ext cx="3154680" cy="1737360"/>
+          <p:cNvPr id="13" name="Shape 11"/>
+          <p:cNvSpPr/>
+          <p:nvPr/>
+        </p:nvSpPr>
+        <p:spPr>
+          <a:xfrm>
+            <a:off x="7635240" y="2788920"/>
+            <a:ext cx="3474720" cy="1536192"/>
           </a:xfrm>
           <a:prstGeom prst="roundRect">
             <a:avLst>
-              <a:gd name="adj" fmla="val 6316"/>
+              <a:gd name="adj" fmla="val 7143"/>
+            </a:avLst>
+          </a:prstGeom>
+          <a:solidFill>
+            <a:srgbClr val="FFFFFF">
+              <a:alpha val="88000"/>
+            </a:srgbClr>
+          </a:solidFill>
+          <a:ln w="12700">
+            <a:solidFill>
+              <a:srgbClr val="D6E8F2"/>
+            </a:solidFill>
+            <a:prstDash val="solid"/>
+          </a:ln>
+        </p:spPr>
+      </p:sp>
+      <p:sp>
+        <p:nvSpPr>
+          <p:cNvPr id="14" name="Shape 12"/>
+          <p:cNvSpPr/>
+          <p:nvPr/>
+        </p:nvSpPr>
+        <p:spPr>
+          <a:xfrm>
+            <a:off x="8074152" y="3291840"/>
+            <a:ext cx="2596896" cy="749808"/>
+          </a:xfrm>
+          <a:prstGeom prst="rect">
+            <a:avLst/>
+          </a:prstGeom>
+          <a:solidFill>
+            <a:srgbClr val="EAF6F8"/>
+          </a:solidFill>
+          <a:ln w="12700">
+            <a:solidFill>
+              <a:srgbClr val="8ABBD8"/>
+            </a:solidFill>
+            <a:prstDash val="solid"/>
+          </a:ln>
+        </p:spPr>
+      </p:sp>
+      <p:sp>
+        <p:nvSpPr>
+          <p:cNvPr id="15" name="Shape 13"/>
+          <p:cNvSpPr/>
+          <p:nvPr/>
+        </p:nvSpPr>
+        <p:spPr>
+          <a:xfrm>
+            <a:off x="8202168" y="3721608"/>
+            <a:ext cx="2340864" cy="0"/>
+          </a:xfrm>
+          <a:prstGeom prst="line">
+            <a:avLst/>
+          </a:prstGeom>
+          <a:noFill/>
+          <a:ln w="19050">
+            <a:solidFill>
+              <a:srgbClr val="0068B7"/>
+            </a:solidFill>
+            <a:prstDash val="solid"/>
+          </a:ln>
+        </p:spPr>
+      </p:sp>
+      <p:sp>
+        <p:nvSpPr>
+          <p:cNvPr id="16" name="Shape 14"/>
+          <p:cNvSpPr/>
+          <p:nvPr/>
+        </p:nvSpPr>
+        <p:spPr>
+          <a:xfrm>
+            <a:off x="9198864" y="4206240"/>
+            <a:ext cx="347472" cy="347472"/>
+          </a:xfrm>
+          <a:prstGeom prst="ellipse">
+            <a:avLst/>
+          </a:prstGeom>
+          <a:solidFill>
+            <a:srgbClr val="2F8A28"/>
+          </a:solidFill>
+          <a:ln w="12700">
+            <a:solidFill>
+              <a:srgbClr val="2F8A28"/>
+            </a:solidFill>
+            <a:prstDash val="solid"/>
+          </a:ln>
+        </p:spPr>
+      </p:sp>
+      <p:sp>
+        <p:nvSpPr>
+          <p:cNvPr id="17" name="Text 15"/>
+          <p:cNvSpPr/>
+          <p:nvPr/>
+        </p:nvSpPr>
+        <p:spPr>
+          <a:xfrm>
+            <a:off x="7909560" y="3977640"/>
+            <a:ext cx="2926080" cy="182880"/>
+          </a:xfrm>
+          <a:prstGeom prst="rect">
+            <a:avLst/>
+          </a:prstGeom>
+          <a:noFill/>
+          <a:ln/>
+        </p:spPr>
+        <p:txBody>
+          <a:bodyPr wrap="square" lIns="0" tIns="0" rIns="0" bIns="0" rtlCol="0" anchor="ctr"/>
+          <a:lstStyle/>
+          <a:p>
+            <a:pPr algn="ctr" indent="0" marL="0">
+              <a:buNone/>
+            </a:pPr>
+            <a:r>
+              <a:rPr lang="en-US" sz="1000" dirty="0">
+                <a:solidFill>
+                  <a:srgbClr val="003A63"/>
+                </a:solidFill>
+                <a:latin typeface="Aptos" pitchFamily="34" charset="0"/>
+                <a:ea typeface="Aptos" pitchFamily="34" charset="-122"/>
+                <a:cs typeface="Aptos" pitchFamily="34" charset="-120"/>
+              </a:rPr>
+              <a:t>Concept to action</a:t>
+            </a:r>
+            <a:endParaRPr lang="en-US" sz="1000" dirty="0"/>
+          </a:p>
+        </p:txBody>
+      </p:sp>
+      <p:sp>
+        <p:nvSpPr>
+          <p:cNvPr id="18" name="Shape 16"/>
+          <p:cNvSpPr/>
+          <p:nvPr/>
+        </p:nvSpPr>
+        <p:spPr>
+          <a:xfrm>
+            <a:off x="7635240" y="4498848"/>
+            <a:ext cx="3474720" cy="1143000"/>
+          </a:xfrm>
+          <a:prstGeom prst="roundRect">
+            <a:avLst>
+              <a:gd name="adj" fmla="val 9600"/>
             </a:avLst>
           </a:prstGeom>
           <a:solidFill>
@@ -9074,14 +10233,14 @@
       </p:sp>
       <p:sp>
         <p:nvSpPr>
-          <p:cNvPr id="16" name="Text 14"/>
-          <p:cNvSpPr/>
-          <p:nvPr/>
-        </p:nvSpPr>
-        <p:spPr>
-          <a:xfrm>
-            <a:off x="8074152" y="3666744"/>
-            <a:ext cx="2825496" cy="256032"/>
+          <p:cNvPr id="19" name="Text 17"/>
+          <p:cNvSpPr/>
+          <p:nvPr/>
+        </p:nvSpPr>
+        <p:spPr>
+          <a:xfrm>
+            <a:off x="7799832" y="4645152"/>
+            <a:ext cx="3145536" cy="256032"/>
           </a:xfrm>
           <a:prstGeom prst="rect">
             <a:avLst/>
@@ -9105,7 +10264,7 @@
                 <a:ea typeface="Aptos" pitchFamily="34" charset="-122"/>
                 <a:cs typeface="Aptos" pitchFamily="34" charset="-120"/>
               </a:rPr>
-              <a:t>Use this for</a:t>
+              <a:t>Apply it</a:t>
             </a:r>
             <a:endParaRPr lang="en-US" sz="1300" dirty="0"/>
           </a:p>
@@ -9113,14 +10272,14 @@
       </p:sp>
       <p:sp>
         <p:nvSpPr>
-          <p:cNvPr id="17" name="Text 15"/>
-          <p:cNvSpPr/>
-          <p:nvPr/>
-        </p:nvSpPr>
-        <p:spPr>
-          <a:xfrm>
-            <a:off x="8074152" y="4023360"/>
-            <a:ext cx="2825496" cy="1097280"/>
+          <p:cNvPr id="20" name="Text 18"/>
+          <p:cNvSpPr/>
+          <p:nvPr/>
+        </p:nvSpPr>
+        <p:spPr>
+          <a:xfrm>
+            <a:off x="7799832" y="5001768"/>
+            <a:ext cx="3145536" cy="502920"/>
           </a:xfrm>
           <a:prstGeom prst="rect">
             <a:avLst/>
@@ -9146,7 +10305,7 @@
                 <a:ea typeface="Aptos" pitchFamily="34" charset="-122"/>
                 <a:cs typeface="Aptos" pitchFamily="34" charset="-120"/>
               </a:rPr>
-              <a:t>Connect the concept to public health decisions, safeguards, documentation, or implementation work.</a:t>
+              <a:t>Connect the concept to public health purpose, responsible use, required safeguards, documentation, and the next action a department should take.</a:t>
             </a:r>
             <a:endParaRPr lang="en-US" sz="1550" dirty="0"/>
           </a:p>
@@ -9320,8 +10479,8 @@
         </p:nvSpPr>
         <p:spPr>
           <a:xfrm>
-            <a:off x="9966960" y="6537960"/>
-            <a:ext cx="1645920" cy="201168"/>
+            <a:off x="9646920" y="6537960"/>
+            <a:ext cx="1965960" cy="201168"/>
           </a:xfrm>
           <a:prstGeom prst="rect">
             <a:avLst/>
@@ -9345,7 +10504,7 @@
                 <a:ea typeface="Aptos" pitchFamily="34" charset="-122"/>
                 <a:cs typeface="Aptos" pitchFamily="34" charset="-120"/>
               </a:rPr>
-              <a:t>Â© Paula Soper</a:t>
+              <a:t>Copyright Paula Soper</a:t>
             </a:r>
             <a:endParaRPr lang="en-US" sz="800" dirty="0"/>
           </a:p>
@@ -9708,46 +10867,7 @@
       </p:sp>
       <p:sp>
         <p:nvSpPr>
-          <p:cNvPr id="15" name="Text 13"/>
-          <p:cNvSpPr/>
-          <p:nvPr/>
-        </p:nvSpPr>
-        <p:spPr>
-          <a:xfrm>
-            <a:off x="8695944" y="3941064"/>
-            <a:ext cx="201168" cy="256032"/>
-          </a:xfrm>
-          <a:prstGeom prst="rect">
-            <a:avLst/>
-          </a:prstGeom>
-          <a:noFill/>
-          <a:ln/>
-        </p:spPr>
-        <p:txBody>
-          <a:bodyPr wrap="square" lIns="0" tIns="0" rIns="0" bIns="0" rtlCol="0" anchor="ctr"/>
-          <a:lstStyle/>
-          <a:p>
-            <a:pPr algn="ctr" indent="0" marL="0">
-              <a:buNone/>
-            </a:pPr>
-            <a:r>
-              <a:rPr lang="en-US" sz="1800" b="1" dirty="0">
-                <a:solidFill>
-                  <a:srgbClr val="0068B7"/>
-                </a:solidFill>
-                <a:latin typeface="Aptos" pitchFamily="34" charset="0"/>
-                <a:ea typeface="Aptos" pitchFamily="34" charset="-122"/>
-                <a:cs typeface="Aptos" pitchFamily="34" charset="-120"/>
-              </a:rPr>
-              <a:t>â†’</a:t>
-            </a:r>
-            <a:endParaRPr lang="en-US" sz="1800" dirty="0"/>
-          </a:p>
-        </p:txBody>
-      </p:sp>
-      <p:sp>
-        <p:nvSpPr>
-          <p:cNvPr id="16" name="Shape 14"/>
+          <p:cNvPr id="15" name="Shape 13"/>
           <p:cNvSpPr/>
           <p:nvPr/>
         </p:nvSpPr>
@@ -9774,7 +10894,7 @@
       </p:sp>
       <p:sp>
         <p:nvSpPr>
-          <p:cNvPr id="17" name="Text 15"/>
+          <p:cNvPr id="16" name="Text 14"/>
           <p:cNvSpPr/>
           <p:nvPr/>
         </p:nvSpPr>
@@ -9815,46 +10935,7 @@
       </p:sp>
       <p:sp>
         <p:nvSpPr>
-          <p:cNvPr id="18" name="Text 16"/>
-          <p:cNvSpPr/>
-          <p:nvPr/>
-        </p:nvSpPr>
-        <p:spPr>
-          <a:xfrm>
-            <a:off x="9985248" y="3941064"/>
-            <a:ext cx="201168" cy="256032"/>
-          </a:xfrm>
-          <a:prstGeom prst="rect">
-            <a:avLst/>
-          </a:prstGeom>
-          <a:noFill/>
-          <a:ln/>
-        </p:spPr>
-        <p:txBody>
-          <a:bodyPr wrap="square" lIns="0" tIns="0" rIns="0" bIns="0" rtlCol="0" anchor="ctr"/>
-          <a:lstStyle/>
-          <a:p>
-            <a:pPr algn="ctr" indent="0" marL="0">
-              <a:buNone/>
-            </a:pPr>
-            <a:r>
-              <a:rPr lang="en-US" sz="1800" b="1" dirty="0">
-                <a:solidFill>
-                  <a:srgbClr val="0068B7"/>
-                </a:solidFill>
-                <a:latin typeface="Aptos" pitchFamily="34" charset="0"/>
-                <a:ea typeface="Aptos" pitchFamily="34" charset="-122"/>
-                <a:cs typeface="Aptos" pitchFamily="34" charset="-120"/>
-              </a:rPr>
-              <a:t>â†’</a:t>
-            </a:r>
-            <a:endParaRPr lang="en-US" sz="1800" dirty="0"/>
-          </a:p>
-        </p:txBody>
-      </p:sp>
-      <p:sp>
-        <p:nvSpPr>
-          <p:cNvPr id="19" name="Shape 17"/>
+          <p:cNvPr id="17" name="Shape 15"/>
           <p:cNvSpPr/>
           <p:nvPr/>
         </p:nvSpPr>
@@ -9881,7 +10962,7 @@
       </p:sp>
       <p:sp>
         <p:nvSpPr>
-          <p:cNvPr id="20" name="Text 18"/>
+          <p:cNvPr id="18" name="Text 16"/>
           <p:cNvSpPr/>
           <p:nvPr/>
         </p:nvSpPr>
@@ -10088,8 +11169,8 @@
         </p:nvSpPr>
         <p:spPr>
           <a:xfrm>
-            <a:off x="9966960" y="6537960"/>
-            <a:ext cx="1645920" cy="201168"/>
+            <a:off x="9646920" y="6537960"/>
+            <a:ext cx="1965960" cy="201168"/>
           </a:xfrm>
           <a:prstGeom prst="rect">
             <a:avLst/>
@@ -10113,7 +11194,7 @@
                 <a:ea typeface="Aptos" pitchFamily="34" charset="-122"/>
                 <a:cs typeface="Aptos" pitchFamily="34" charset="-120"/>
               </a:rPr>
-              <a:t>Â© Paula Soper</a:t>
+              <a:t>Copyright Paula Soper</a:t>
             </a:r>
             <a:endParaRPr lang="en-US" sz="800" dirty="0"/>
           </a:p>
@@ -10208,7 +11289,7 @@
         <p:spPr>
           <a:xfrm>
             <a:off x="868680" y="1508760"/>
-            <a:ext cx="6537960" cy="4160520"/>
+            <a:ext cx="6309360" cy="4160520"/>
           </a:xfrm>
           <a:prstGeom prst="rect">
             <a:avLst/>
@@ -10245,12 +11326,12 @@
         </p:nvSpPr>
         <p:spPr>
           <a:xfrm>
-            <a:off x="7909560" y="1417320"/>
-            <a:ext cx="3154680" cy="1828800"/>
+            <a:off x="7635240" y="1325880"/>
+            <a:ext cx="3474720" cy="1325880"/>
           </a:xfrm>
           <a:prstGeom prst="roundRect">
             <a:avLst>
-              <a:gd name="adj" fmla="val 6000"/>
+              <a:gd name="adj" fmla="val 8276"/>
             </a:avLst>
           </a:prstGeom>
           <a:solidFill>
@@ -10272,8 +11353,8 @@
         </p:nvSpPr>
         <p:spPr>
           <a:xfrm>
-            <a:off x="8074152" y="1563624"/>
-            <a:ext cx="2825496" cy="256032"/>
+            <a:off x="7799832" y="1472184"/>
+            <a:ext cx="3145536" cy="256032"/>
           </a:xfrm>
           <a:prstGeom prst="rect">
             <a:avLst/>
@@ -10297,7 +11378,7 @@
                 <a:ea typeface="Aptos" pitchFamily="34" charset="-122"/>
                 <a:cs typeface="Aptos" pitchFamily="34" charset="-120"/>
               </a:rPr>
-              <a:t>Key idea</a:t>
+              <a:t>Core concept</a:t>
             </a:r>
             <a:endParaRPr lang="en-US" sz="1300" dirty="0"/>
           </a:p>
@@ -10311,8 +11392,8 @@
         </p:nvSpPr>
         <p:spPr>
           <a:xfrm>
-            <a:off x="8074152" y="1920240"/>
-            <a:ext cx="2825496" cy="1188720"/>
+            <a:off x="7799832" y="1828800"/>
+            <a:ext cx="3145536" cy="685800"/>
           </a:xfrm>
           <a:prstGeom prst="rect">
             <a:avLst/>
@@ -10352,12 +11433,153 @@
         </p:nvSpPr>
         <p:spPr>
           <a:xfrm>
-            <a:off x="7909560" y="3520440"/>
-            <a:ext cx="3154680" cy="1737360"/>
+            <a:off x="7635240" y="2788920"/>
+            <a:ext cx="3474720" cy="1536192"/>
           </a:xfrm>
           <a:prstGeom prst="roundRect">
             <a:avLst>
-              <a:gd name="adj" fmla="val 6316"/>
+              <a:gd name="adj" fmla="val 7143"/>
+            </a:avLst>
+          </a:prstGeom>
+          <a:solidFill>
+            <a:srgbClr val="FFFFFF">
+              <a:alpha val="88000"/>
+            </a:srgbClr>
+          </a:solidFill>
+          <a:ln w="12700">
+            <a:solidFill>
+              <a:srgbClr val="D6E8F2"/>
+            </a:solidFill>
+            <a:prstDash val="solid"/>
+          </a:ln>
+        </p:spPr>
+      </p:sp>
+      <p:sp>
+        <p:nvSpPr>
+          <p:cNvPr id="14" name="Shape 12"/>
+          <p:cNvSpPr/>
+          <p:nvPr/>
+        </p:nvSpPr>
+        <p:spPr>
+          <a:xfrm>
+            <a:off x="8074152" y="3291840"/>
+            <a:ext cx="2596896" cy="749808"/>
+          </a:xfrm>
+          <a:prstGeom prst="rect">
+            <a:avLst/>
+          </a:prstGeom>
+          <a:solidFill>
+            <a:srgbClr val="EAF6F8"/>
+          </a:solidFill>
+          <a:ln w="12700">
+            <a:solidFill>
+              <a:srgbClr val="8ABBD8"/>
+            </a:solidFill>
+            <a:prstDash val="solid"/>
+          </a:ln>
+        </p:spPr>
+      </p:sp>
+      <p:sp>
+        <p:nvSpPr>
+          <p:cNvPr id="15" name="Shape 13"/>
+          <p:cNvSpPr/>
+          <p:nvPr/>
+        </p:nvSpPr>
+        <p:spPr>
+          <a:xfrm>
+            <a:off x="8202168" y="3721608"/>
+            <a:ext cx="2340864" cy="0"/>
+          </a:xfrm>
+          <a:prstGeom prst="line">
+            <a:avLst/>
+          </a:prstGeom>
+          <a:noFill/>
+          <a:ln w="19050">
+            <a:solidFill>
+              <a:srgbClr val="0068B7"/>
+            </a:solidFill>
+            <a:prstDash val="solid"/>
+          </a:ln>
+        </p:spPr>
+      </p:sp>
+      <p:sp>
+        <p:nvSpPr>
+          <p:cNvPr id="16" name="Shape 14"/>
+          <p:cNvSpPr/>
+          <p:nvPr/>
+        </p:nvSpPr>
+        <p:spPr>
+          <a:xfrm>
+            <a:off x="9198864" y="4206240"/>
+            <a:ext cx="347472" cy="347472"/>
+          </a:xfrm>
+          <a:prstGeom prst="ellipse">
+            <a:avLst/>
+          </a:prstGeom>
+          <a:solidFill>
+            <a:srgbClr val="2F8A28"/>
+          </a:solidFill>
+          <a:ln w="12700">
+            <a:solidFill>
+              <a:srgbClr val="2F8A28"/>
+            </a:solidFill>
+            <a:prstDash val="solid"/>
+          </a:ln>
+        </p:spPr>
+      </p:sp>
+      <p:sp>
+        <p:nvSpPr>
+          <p:cNvPr id="17" name="Text 15"/>
+          <p:cNvSpPr/>
+          <p:nvPr/>
+        </p:nvSpPr>
+        <p:spPr>
+          <a:xfrm>
+            <a:off x="7909560" y="3977640"/>
+            <a:ext cx="2926080" cy="182880"/>
+          </a:xfrm>
+          <a:prstGeom prst="rect">
+            <a:avLst/>
+          </a:prstGeom>
+          <a:noFill/>
+          <a:ln/>
+        </p:spPr>
+        <p:txBody>
+          <a:bodyPr wrap="square" lIns="0" tIns="0" rIns="0" bIns="0" rtlCol="0" anchor="ctr"/>
+          <a:lstStyle/>
+          <a:p>
+            <a:pPr algn="ctr" indent="0" marL="0">
+              <a:buNone/>
+            </a:pPr>
+            <a:r>
+              <a:rPr lang="en-US" sz="1000" dirty="0">
+                <a:solidFill>
+                  <a:srgbClr val="003A63"/>
+                </a:solidFill>
+                <a:latin typeface="Aptos" pitchFamily="34" charset="0"/>
+                <a:ea typeface="Aptos" pitchFamily="34" charset="-122"/>
+                <a:cs typeface="Aptos" pitchFamily="34" charset="-120"/>
+              </a:rPr>
+              <a:t>Concept to action</a:t>
+            </a:r>
+            <a:endParaRPr lang="en-US" sz="1000" dirty="0"/>
+          </a:p>
+        </p:txBody>
+      </p:sp>
+      <p:sp>
+        <p:nvSpPr>
+          <p:cNvPr id="18" name="Shape 16"/>
+          <p:cNvSpPr/>
+          <p:nvPr/>
+        </p:nvSpPr>
+        <p:spPr>
+          <a:xfrm>
+            <a:off x="7635240" y="4498848"/>
+            <a:ext cx="3474720" cy="1143000"/>
+          </a:xfrm>
+          <a:prstGeom prst="roundRect">
+            <a:avLst>
+              <a:gd name="adj" fmla="val 9600"/>
             </a:avLst>
           </a:prstGeom>
           <a:solidFill>
@@ -10373,14 +11595,14 @@
       </p:sp>
       <p:sp>
         <p:nvSpPr>
-          <p:cNvPr id="14" name="Text 12"/>
-          <p:cNvSpPr/>
-          <p:nvPr/>
-        </p:nvSpPr>
-        <p:spPr>
-          <a:xfrm>
-            <a:off x="8074152" y="3666744"/>
-            <a:ext cx="2825496" cy="256032"/>
+          <p:cNvPr id="19" name="Text 17"/>
+          <p:cNvSpPr/>
+          <p:nvPr/>
+        </p:nvSpPr>
+        <p:spPr>
+          <a:xfrm>
+            <a:off x="7799832" y="4645152"/>
+            <a:ext cx="3145536" cy="256032"/>
           </a:xfrm>
           <a:prstGeom prst="rect">
             <a:avLst/>
@@ -10404,7 +11626,7 @@
                 <a:ea typeface="Aptos" pitchFamily="34" charset="-122"/>
                 <a:cs typeface="Aptos" pitchFamily="34" charset="-120"/>
               </a:rPr>
-              <a:t>Use this for</a:t>
+              <a:t>Apply it</a:t>
             </a:r>
             <a:endParaRPr lang="en-US" sz="1300" dirty="0"/>
           </a:p>
@@ -10412,14 +11634,14 @@
       </p:sp>
       <p:sp>
         <p:nvSpPr>
-          <p:cNvPr id="15" name="Text 13"/>
-          <p:cNvSpPr/>
-          <p:nvPr/>
-        </p:nvSpPr>
-        <p:spPr>
-          <a:xfrm>
-            <a:off x="8074152" y="4023360"/>
-            <a:ext cx="2825496" cy="1097280"/>
+          <p:cNvPr id="20" name="Text 18"/>
+          <p:cNvSpPr/>
+          <p:nvPr/>
+        </p:nvSpPr>
+        <p:spPr>
+          <a:xfrm>
+            <a:off x="7799832" y="5001768"/>
+            <a:ext cx="3145536" cy="502920"/>
           </a:xfrm>
           <a:prstGeom prst="rect">
             <a:avLst/>
@@ -10445,7 +11667,7 @@
                 <a:ea typeface="Aptos" pitchFamily="34" charset="-122"/>
                 <a:cs typeface="Aptos" pitchFamily="34" charset="-120"/>
               </a:rPr>
-              <a:t>Connect the concept to public health decisions, safeguards, documentation, or implementation work.</a:t>
+              <a:t>Connect the concept to public health purpose, responsible use, required safeguards, documentation, and the next action a department should take.</a:t>
             </a:r>
             <a:endParaRPr lang="en-US" sz="1550" dirty="0"/>
           </a:p>
@@ -10619,8 +11841,8 @@
         </p:nvSpPr>
         <p:spPr>
           <a:xfrm>
-            <a:off x="9966960" y="6537960"/>
-            <a:ext cx="1645920" cy="201168"/>
+            <a:off x="9646920" y="6537960"/>
+            <a:ext cx="1965960" cy="201168"/>
           </a:xfrm>
           <a:prstGeom prst="rect">
             <a:avLst/>
@@ -10644,7 +11866,7 @@
                 <a:ea typeface="Aptos" pitchFamily="34" charset="-122"/>
                 <a:cs typeface="Aptos" pitchFamily="34" charset="-120"/>
               </a:rPr>
-              <a:t>Â© Paula Soper</a:t>
+              <a:t>Copyright Paula Soper</a:t>
             </a:r>
             <a:endParaRPr lang="en-US" sz="800" dirty="0"/>
           </a:p>
@@ -10691,77 +11913,13 @@
       </p:sp>
       <p:sp>
         <p:nvSpPr>
-          <p:cNvPr id="8" name="Shape 6"/>
+          <p:cNvPr id="8" name="Text 6"/>
           <p:cNvSpPr/>
           <p:nvPr/>
         </p:nvSpPr>
         <p:spPr>
           <a:xfrm>
             <a:off x="640080" y="658368"/>
-            <a:ext cx="420624" cy="420624"/>
-          </a:xfrm>
-          <a:prstGeom prst="ellipse">
-            <a:avLst/>
-          </a:prstGeom>
-          <a:solidFill>
-            <a:srgbClr val="0068B7"/>
-          </a:solidFill>
-          <a:ln w="12700">
-            <a:solidFill>
-              <a:srgbClr val="0068B7"/>
-            </a:solidFill>
-            <a:prstDash val="solid"/>
-          </a:ln>
-        </p:spPr>
-      </p:sp>
-      <p:sp>
-        <p:nvSpPr>
-          <p:cNvPr id="9" name="Text 7"/>
-          <p:cNvSpPr/>
-          <p:nvPr/>
-        </p:nvSpPr>
-        <p:spPr>
-          <a:xfrm>
-            <a:off x="640080" y="731520"/>
-            <a:ext cx="420624" cy="164592"/>
-          </a:xfrm>
-          <a:prstGeom prst="rect">
-            <a:avLst/>
-          </a:prstGeom>
-          <a:noFill/>
-          <a:ln/>
-        </p:spPr>
-        <p:txBody>
-          <a:bodyPr wrap="square" lIns="0" tIns="0" rIns="0" bIns="0" rtlCol="0" anchor="ctr"/>
-          <a:lstStyle/>
-          <a:p>
-            <a:pPr algn="ctr" indent="0" marL="0">
-              <a:buNone/>
-            </a:pPr>
-            <a:r>
-              <a:rPr lang="en-US" sz="1100" b="1" dirty="0">
-                <a:solidFill>
-                  <a:srgbClr val="FFFFFF"/>
-                </a:solidFill>
-                <a:latin typeface="Aptos" pitchFamily="34" charset="0"/>
-                <a:ea typeface="Aptos" pitchFamily="34" charset="-122"/>
-                <a:cs typeface="Aptos" pitchFamily="34" charset="-120"/>
-              </a:rPr>
-              <a:t>13</a:t>
-            </a:r>
-            <a:endParaRPr lang="en-US" sz="1100" dirty="0"/>
-          </a:p>
-        </p:txBody>
-      </p:sp>
-      <p:sp>
-        <p:nvSpPr>
-          <p:cNvPr id="10" name="Text 8"/>
-          <p:cNvSpPr/>
-          <p:nvPr/>
-        </p:nvSpPr>
-        <p:spPr>
-          <a:xfrm>
-            <a:off x="640080" y="621792"/>
             <a:ext cx="10881360" cy="713232"/>
           </a:xfrm>
           <a:prstGeom prst="rect">
@@ -10796,14 +11954,14 @@
       </p:sp>
       <p:sp>
         <p:nvSpPr>
-          <p:cNvPr id="11" name="Text 9"/>
+          <p:cNvPr id="9" name="Text 7"/>
           <p:cNvSpPr/>
           <p:nvPr/>
         </p:nvSpPr>
         <p:spPr>
           <a:xfrm>
             <a:off x="868680" y="1508760"/>
-            <a:ext cx="6537960" cy="4160520"/>
+            <a:ext cx="6309360" cy="4160520"/>
           </a:xfrm>
           <a:prstGeom prst="rect">
             <a:avLst/>
@@ -10862,18 +12020,18 @@
       </p:sp>
       <p:sp>
         <p:nvSpPr>
-          <p:cNvPr id="12" name="Shape 10"/>
-          <p:cNvSpPr/>
-          <p:nvPr/>
-        </p:nvSpPr>
-        <p:spPr>
-          <a:xfrm>
-            <a:off x="7909560" y="1417320"/>
-            <a:ext cx="3154680" cy="1828800"/>
+          <p:cNvPr id="10" name="Shape 8"/>
+          <p:cNvSpPr/>
+          <p:nvPr/>
+        </p:nvSpPr>
+        <p:spPr>
+          <a:xfrm>
+            <a:off x="7635240" y="1325880"/>
+            <a:ext cx="3474720" cy="1325880"/>
           </a:xfrm>
           <a:prstGeom prst="roundRect">
             <a:avLst>
-              <a:gd name="adj" fmla="val 6000"/>
+              <a:gd name="adj" fmla="val 8276"/>
             </a:avLst>
           </a:prstGeom>
           <a:solidFill>
@@ -10889,14 +12047,14 @@
       </p:sp>
       <p:sp>
         <p:nvSpPr>
-          <p:cNvPr id="13" name="Text 11"/>
-          <p:cNvSpPr/>
-          <p:nvPr/>
-        </p:nvSpPr>
-        <p:spPr>
-          <a:xfrm>
-            <a:off x="8074152" y="1563624"/>
-            <a:ext cx="2825496" cy="256032"/>
+          <p:cNvPr id="11" name="Text 9"/>
+          <p:cNvSpPr/>
+          <p:nvPr/>
+        </p:nvSpPr>
+        <p:spPr>
+          <a:xfrm>
+            <a:off x="7799832" y="1472184"/>
+            <a:ext cx="3145536" cy="256032"/>
           </a:xfrm>
           <a:prstGeom prst="rect">
             <a:avLst/>
@@ -10920,7 +12078,7 @@
                 <a:ea typeface="Aptos" pitchFamily="34" charset="-122"/>
                 <a:cs typeface="Aptos" pitchFamily="34" charset="-120"/>
               </a:rPr>
-              <a:t>Key idea</a:t>
+              <a:t>Practice focus</a:t>
             </a:r>
             <a:endParaRPr lang="en-US" sz="1300" dirty="0"/>
           </a:p>
@@ -10928,14 +12086,14 @@
       </p:sp>
       <p:sp>
         <p:nvSpPr>
-          <p:cNvPr id="14" name="Text 12"/>
-          <p:cNvSpPr/>
-          <p:nvPr/>
-        </p:nvSpPr>
-        <p:spPr>
-          <a:xfrm>
-            <a:off x="8074152" y="1920240"/>
-            <a:ext cx="2825496" cy="1188720"/>
+          <p:cNvPr id="12" name="Text 10"/>
+          <p:cNvSpPr/>
+          <p:nvPr/>
+        </p:nvSpPr>
+        <p:spPr>
+          <a:xfrm>
+            <a:off x="7799832" y="1828800"/>
+            <a:ext cx="3145536" cy="685800"/>
           </a:xfrm>
           <a:prstGeom prst="rect">
             <a:avLst/>
@@ -10969,18 +12127,159 @@
       </p:sp>
       <p:sp>
         <p:nvSpPr>
-          <p:cNvPr id="15" name="Shape 13"/>
-          <p:cNvSpPr/>
-          <p:nvPr/>
-        </p:nvSpPr>
-        <p:spPr>
-          <a:xfrm>
-            <a:off x="7909560" y="3520440"/>
-            <a:ext cx="3154680" cy="1737360"/>
+          <p:cNvPr id="13" name="Shape 11"/>
+          <p:cNvSpPr/>
+          <p:nvPr/>
+        </p:nvSpPr>
+        <p:spPr>
+          <a:xfrm>
+            <a:off x="7635240" y="2788920"/>
+            <a:ext cx="3474720" cy="1536192"/>
           </a:xfrm>
           <a:prstGeom prst="roundRect">
             <a:avLst>
-              <a:gd name="adj" fmla="val 6316"/>
+              <a:gd name="adj" fmla="val 7143"/>
+            </a:avLst>
+          </a:prstGeom>
+          <a:solidFill>
+            <a:srgbClr val="FFFFFF">
+              <a:alpha val="88000"/>
+            </a:srgbClr>
+          </a:solidFill>
+          <a:ln w="12700">
+            <a:solidFill>
+              <a:srgbClr val="D6E8F2"/>
+            </a:solidFill>
+            <a:prstDash val="solid"/>
+          </a:ln>
+        </p:spPr>
+      </p:sp>
+      <p:sp>
+        <p:nvSpPr>
+          <p:cNvPr id="14" name="Shape 12"/>
+          <p:cNvSpPr/>
+          <p:nvPr/>
+        </p:nvSpPr>
+        <p:spPr>
+          <a:xfrm>
+            <a:off x="8074152" y="3291840"/>
+            <a:ext cx="2596896" cy="749808"/>
+          </a:xfrm>
+          <a:prstGeom prst="rect">
+            <a:avLst/>
+          </a:prstGeom>
+          <a:solidFill>
+            <a:srgbClr val="EAF6F8"/>
+          </a:solidFill>
+          <a:ln w="12700">
+            <a:solidFill>
+              <a:srgbClr val="8ABBD8"/>
+            </a:solidFill>
+            <a:prstDash val="solid"/>
+          </a:ln>
+        </p:spPr>
+      </p:sp>
+      <p:sp>
+        <p:nvSpPr>
+          <p:cNvPr id="15" name="Shape 13"/>
+          <p:cNvSpPr/>
+          <p:nvPr/>
+        </p:nvSpPr>
+        <p:spPr>
+          <a:xfrm>
+            <a:off x="8202168" y="3721608"/>
+            <a:ext cx="2340864" cy="0"/>
+          </a:xfrm>
+          <a:prstGeom prst="line">
+            <a:avLst/>
+          </a:prstGeom>
+          <a:noFill/>
+          <a:ln w="19050">
+            <a:solidFill>
+              <a:srgbClr val="0068B7"/>
+            </a:solidFill>
+            <a:prstDash val="solid"/>
+          </a:ln>
+        </p:spPr>
+      </p:sp>
+      <p:sp>
+        <p:nvSpPr>
+          <p:cNvPr id="16" name="Shape 14"/>
+          <p:cNvSpPr/>
+          <p:nvPr/>
+        </p:nvSpPr>
+        <p:spPr>
+          <a:xfrm>
+            <a:off x="9198864" y="4206240"/>
+            <a:ext cx="347472" cy="347472"/>
+          </a:xfrm>
+          <a:prstGeom prst="ellipse">
+            <a:avLst/>
+          </a:prstGeom>
+          <a:solidFill>
+            <a:srgbClr val="2F8A28"/>
+          </a:solidFill>
+          <a:ln w="12700">
+            <a:solidFill>
+              <a:srgbClr val="2F8A28"/>
+            </a:solidFill>
+            <a:prstDash val="solid"/>
+          </a:ln>
+        </p:spPr>
+      </p:sp>
+      <p:sp>
+        <p:nvSpPr>
+          <p:cNvPr id="17" name="Text 15"/>
+          <p:cNvSpPr/>
+          <p:nvPr/>
+        </p:nvSpPr>
+        <p:spPr>
+          <a:xfrm>
+            <a:off x="7909560" y="3977640"/>
+            <a:ext cx="2926080" cy="182880"/>
+          </a:xfrm>
+          <a:prstGeom prst="rect">
+            <a:avLst/>
+          </a:prstGeom>
+          <a:noFill/>
+          <a:ln/>
+        </p:spPr>
+        <p:txBody>
+          <a:bodyPr wrap="square" lIns="0" tIns="0" rIns="0" bIns="0" rtlCol="0" anchor="ctr"/>
+          <a:lstStyle/>
+          <a:p>
+            <a:pPr algn="ctr" indent="0" marL="0">
+              <a:buNone/>
+            </a:pPr>
+            <a:r>
+              <a:rPr lang="en-US" sz="1000" dirty="0">
+                <a:solidFill>
+                  <a:srgbClr val="003A63"/>
+                </a:solidFill>
+                <a:latin typeface="Aptos" pitchFamily="34" charset="0"/>
+                <a:ea typeface="Aptos" pitchFamily="34" charset="-122"/>
+                <a:cs typeface="Aptos" pitchFamily="34" charset="-120"/>
+              </a:rPr>
+              <a:t>Concept to action</a:t>
+            </a:r>
+            <a:endParaRPr lang="en-US" sz="1000" dirty="0"/>
+          </a:p>
+        </p:txBody>
+      </p:sp>
+      <p:sp>
+        <p:nvSpPr>
+          <p:cNvPr id="18" name="Shape 16"/>
+          <p:cNvSpPr/>
+          <p:nvPr/>
+        </p:nvSpPr>
+        <p:spPr>
+          <a:xfrm>
+            <a:off x="7635240" y="4498848"/>
+            <a:ext cx="3474720" cy="1143000"/>
+          </a:xfrm>
+          <a:prstGeom prst="roundRect">
+            <a:avLst>
+              <a:gd name="adj" fmla="val 9600"/>
             </a:avLst>
           </a:prstGeom>
           <a:solidFill>
@@ -10996,14 +12295,14 @@
       </p:sp>
       <p:sp>
         <p:nvSpPr>
-          <p:cNvPr id="16" name="Text 14"/>
-          <p:cNvSpPr/>
-          <p:nvPr/>
-        </p:nvSpPr>
-        <p:spPr>
-          <a:xfrm>
-            <a:off x="8074152" y="3666744"/>
-            <a:ext cx="2825496" cy="256032"/>
+          <p:cNvPr id="19" name="Text 17"/>
+          <p:cNvSpPr/>
+          <p:nvPr/>
+        </p:nvSpPr>
+        <p:spPr>
+          <a:xfrm>
+            <a:off x="7799832" y="4645152"/>
+            <a:ext cx="3145536" cy="256032"/>
           </a:xfrm>
           <a:prstGeom prst="rect">
             <a:avLst/>
@@ -11027,7 +12326,7 @@
                 <a:ea typeface="Aptos" pitchFamily="34" charset="-122"/>
                 <a:cs typeface="Aptos" pitchFamily="34" charset="-120"/>
               </a:rPr>
-              <a:t>Use this for</a:t>
+              <a:t>What to produce</a:t>
             </a:r>
             <a:endParaRPr lang="en-US" sz="1300" dirty="0"/>
           </a:p>
@@ -11035,14 +12334,14 @@
       </p:sp>
       <p:sp>
         <p:nvSpPr>
-          <p:cNvPr id="17" name="Text 15"/>
-          <p:cNvSpPr/>
-          <p:nvPr/>
-        </p:nvSpPr>
-        <p:spPr>
-          <a:xfrm>
-            <a:off x="8074152" y="4023360"/>
-            <a:ext cx="2825496" cy="1097280"/>
+          <p:cNvPr id="20" name="Text 18"/>
+          <p:cNvSpPr/>
+          <p:nvPr/>
+        </p:nvSpPr>
+        <p:spPr>
+          <a:xfrm>
+            <a:off x="7799832" y="5001768"/>
+            <a:ext cx="3145536" cy="502920"/>
           </a:xfrm>
           <a:prstGeom prst="rect">
             <a:avLst/>
@@ -11068,7 +12367,7 @@
                 <a:ea typeface="Aptos" pitchFamily="34" charset="-122"/>
                 <a:cs typeface="Aptos" pitchFamily="34" charset="-120"/>
               </a:rPr>
-              <a:t>Connect the concept to public health decisions, safeguards, documentation, or implementation work.</a:t>
+              <a:t>Use the assignment to test whether you can explain the concept, apply it to a realistic public health situation, and identify what would need review before the work moves forward.</a:t>
             </a:r>
             <a:endParaRPr lang="en-US" sz="1550" dirty="0"/>
           </a:p>
@@ -11242,8 +12541,8 @@
         </p:nvSpPr>
         <p:spPr>
           <a:xfrm>
-            <a:off x="9966960" y="6537960"/>
-            <a:ext cx="1645920" cy="201168"/>
+            <a:off x="9646920" y="6537960"/>
+            <a:ext cx="1965960" cy="201168"/>
           </a:xfrm>
           <a:prstGeom prst="rect">
             <a:avLst/>
@@ -11267,7 +12566,7 @@
                 <a:ea typeface="Aptos" pitchFamily="34" charset="-122"/>
                 <a:cs typeface="Aptos" pitchFamily="34" charset="-120"/>
               </a:rPr>
-              <a:t>Â© Paula Soper</a:t>
+              <a:t>Copyright Paula Soper</a:t>
             </a:r>
             <a:endParaRPr lang="en-US" sz="800" dirty="0"/>
           </a:p>
@@ -11314,77 +12613,13 @@
       </p:sp>
       <p:sp>
         <p:nvSpPr>
-          <p:cNvPr id="8" name="Shape 6"/>
+          <p:cNvPr id="8" name="Text 6"/>
           <p:cNvSpPr/>
           <p:nvPr/>
         </p:nvSpPr>
         <p:spPr>
           <a:xfrm>
             <a:off x="640080" y="658368"/>
-            <a:ext cx="420624" cy="420624"/>
-          </a:xfrm>
-          <a:prstGeom prst="ellipse">
-            <a:avLst/>
-          </a:prstGeom>
-          <a:solidFill>
-            <a:srgbClr val="0068B7"/>
-          </a:solidFill>
-          <a:ln w="12700">
-            <a:solidFill>
-              <a:srgbClr val="0068B7"/>
-            </a:solidFill>
-            <a:prstDash val="solid"/>
-          </a:ln>
-        </p:spPr>
-      </p:sp>
-      <p:sp>
-        <p:nvSpPr>
-          <p:cNvPr id="9" name="Text 7"/>
-          <p:cNvSpPr/>
-          <p:nvPr/>
-        </p:nvSpPr>
-        <p:spPr>
-          <a:xfrm>
-            <a:off x="640080" y="731520"/>
-            <a:ext cx="420624" cy="164592"/>
-          </a:xfrm>
-          <a:prstGeom prst="rect">
-            <a:avLst/>
-          </a:prstGeom>
-          <a:noFill/>
-          <a:ln/>
-        </p:spPr>
-        <p:txBody>
-          <a:bodyPr wrap="square" lIns="0" tIns="0" rIns="0" bIns="0" rtlCol="0" anchor="ctr"/>
-          <a:lstStyle/>
-          <a:p>
-            <a:pPr algn="ctr" indent="0" marL="0">
-              <a:buNone/>
-            </a:pPr>
-            <a:r>
-              <a:rPr lang="en-US" sz="1100" b="1" dirty="0">
-                <a:solidFill>
-                  <a:srgbClr val="FFFFFF"/>
-                </a:solidFill>
-                <a:latin typeface="Aptos" pitchFamily="34" charset="0"/>
-                <a:ea typeface="Aptos" pitchFamily="34" charset="-122"/>
-                <a:cs typeface="Aptos" pitchFamily="34" charset="-120"/>
-              </a:rPr>
-              <a:t>14</a:t>
-            </a:r>
-            <a:endParaRPr lang="en-US" sz="1100" dirty="0"/>
-          </a:p>
-        </p:txBody>
-      </p:sp>
-      <p:sp>
-        <p:nvSpPr>
-          <p:cNvPr id="10" name="Text 8"/>
-          <p:cNvSpPr/>
-          <p:nvPr/>
-        </p:nvSpPr>
-        <p:spPr>
-          <a:xfrm>
-            <a:off x="640080" y="621792"/>
             <a:ext cx="10881360" cy="713232"/>
           </a:xfrm>
           <a:prstGeom prst="rect">
@@ -11419,14 +12654,14 @@
       </p:sp>
       <p:sp>
         <p:nvSpPr>
-          <p:cNvPr id="11" name="Text 9"/>
+          <p:cNvPr id="9" name="Text 7"/>
           <p:cNvSpPr/>
           <p:nvPr/>
         </p:nvSpPr>
         <p:spPr>
           <a:xfrm>
             <a:off x="868680" y="1508760"/>
-            <a:ext cx="6537960" cy="4160520"/>
+            <a:ext cx="6309360" cy="4160520"/>
           </a:xfrm>
           <a:prstGeom prst="rect">
             <a:avLst/>
@@ -11485,18 +12720,18 @@
       </p:sp>
       <p:sp>
         <p:nvSpPr>
-          <p:cNvPr id="12" name="Shape 10"/>
-          <p:cNvSpPr/>
-          <p:nvPr/>
-        </p:nvSpPr>
-        <p:spPr>
-          <a:xfrm>
-            <a:off x="7909560" y="1417320"/>
-            <a:ext cx="3154680" cy="1828800"/>
+          <p:cNvPr id="10" name="Shape 8"/>
+          <p:cNvSpPr/>
+          <p:nvPr/>
+        </p:nvSpPr>
+        <p:spPr>
+          <a:xfrm>
+            <a:off x="7635240" y="1325880"/>
+            <a:ext cx="3474720" cy="1325880"/>
           </a:xfrm>
           <a:prstGeom prst="roundRect">
             <a:avLst>
-              <a:gd name="adj" fmla="val 6000"/>
+              <a:gd name="adj" fmla="val 8276"/>
             </a:avLst>
           </a:prstGeom>
           <a:solidFill>
@@ -11512,14 +12747,14 @@
       </p:sp>
       <p:sp>
         <p:nvSpPr>
-          <p:cNvPr id="13" name="Text 11"/>
-          <p:cNvSpPr/>
-          <p:nvPr/>
-        </p:nvSpPr>
-        <p:spPr>
-          <a:xfrm>
-            <a:off x="8074152" y="1563624"/>
-            <a:ext cx="2825496" cy="256032"/>
+          <p:cNvPr id="11" name="Text 9"/>
+          <p:cNvSpPr/>
+          <p:nvPr/>
+        </p:nvSpPr>
+        <p:spPr>
+          <a:xfrm>
+            <a:off x="7799832" y="1472184"/>
+            <a:ext cx="3145536" cy="256032"/>
           </a:xfrm>
           <a:prstGeom prst="rect">
             <a:avLst/>
@@ -11543,7 +12778,7 @@
                 <a:ea typeface="Aptos" pitchFamily="34" charset="-122"/>
                 <a:cs typeface="Aptos" pitchFamily="34" charset="-120"/>
               </a:rPr>
-              <a:t>Key idea</a:t>
+              <a:t>Practice focus</a:t>
             </a:r>
             <a:endParaRPr lang="en-US" sz="1300" dirty="0"/>
           </a:p>
@@ -11551,14 +12786,14 @@
       </p:sp>
       <p:sp>
         <p:nvSpPr>
-          <p:cNvPr id="14" name="Text 12"/>
-          <p:cNvSpPr/>
-          <p:nvPr/>
-        </p:nvSpPr>
-        <p:spPr>
-          <a:xfrm>
-            <a:off x="8074152" y="1920240"/>
-            <a:ext cx="2825496" cy="1188720"/>
+          <p:cNvPr id="12" name="Text 10"/>
+          <p:cNvSpPr/>
+          <p:nvPr/>
+        </p:nvSpPr>
+        <p:spPr>
+          <a:xfrm>
+            <a:off x="7799832" y="1828800"/>
+            <a:ext cx="3145536" cy="685800"/>
           </a:xfrm>
           <a:prstGeom prst="rect">
             <a:avLst/>
@@ -11592,18 +12827,159 @@
       </p:sp>
       <p:sp>
         <p:nvSpPr>
-          <p:cNvPr id="15" name="Shape 13"/>
-          <p:cNvSpPr/>
-          <p:nvPr/>
-        </p:nvSpPr>
-        <p:spPr>
-          <a:xfrm>
-            <a:off x="7909560" y="3520440"/>
-            <a:ext cx="3154680" cy="1737360"/>
+          <p:cNvPr id="13" name="Shape 11"/>
+          <p:cNvSpPr/>
+          <p:nvPr/>
+        </p:nvSpPr>
+        <p:spPr>
+          <a:xfrm>
+            <a:off x="7635240" y="2788920"/>
+            <a:ext cx="3474720" cy="1536192"/>
           </a:xfrm>
           <a:prstGeom prst="roundRect">
             <a:avLst>
-              <a:gd name="adj" fmla="val 6316"/>
+              <a:gd name="adj" fmla="val 7143"/>
+            </a:avLst>
+          </a:prstGeom>
+          <a:solidFill>
+            <a:srgbClr val="FFFFFF">
+              <a:alpha val="88000"/>
+            </a:srgbClr>
+          </a:solidFill>
+          <a:ln w="12700">
+            <a:solidFill>
+              <a:srgbClr val="D6E8F2"/>
+            </a:solidFill>
+            <a:prstDash val="solid"/>
+          </a:ln>
+        </p:spPr>
+      </p:sp>
+      <p:sp>
+        <p:nvSpPr>
+          <p:cNvPr id="14" name="Shape 12"/>
+          <p:cNvSpPr/>
+          <p:nvPr/>
+        </p:nvSpPr>
+        <p:spPr>
+          <a:xfrm>
+            <a:off x="8074152" y="3291840"/>
+            <a:ext cx="2596896" cy="749808"/>
+          </a:xfrm>
+          <a:prstGeom prst="rect">
+            <a:avLst/>
+          </a:prstGeom>
+          <a:solidFill>
+            <a:srgbClr val="EAF6F8"/>
+          </a:solidFill>
+          <a:ln w="12700">
+            <a:solidFill>
+              <a:srgbClr val="8ABBD8"/>
+            </a:solidFill>
+            <a:prstDash val="solid"/>
+          </a:ln>
+        </p:spPr>
+      </p:sp>
+      <p:sp>
+        <p:nvSpPr>
+          <p:cNvPr id="15" name="Shape 13"/>
+          <p:cNvSpPr/>
+          <p:nvPr/>
+        </p:nvSpPr>
+        <p:spPr>
+          <a:xfrm>
+            <a:off x="8202168" y="3721608"/>
+            <a:ext cx="2340864" cy="0"/>
+          </a:xfrm>
+          <a:prstGeom prst="line">
+            <a:avLst/>
+          </a:prstGeom>
+          <a:noFill/>
+          <a:ln w="19050">
+            <a:solidFill>
+              <a:srgbClr val="0068B7"/>
+            </a:solidFill>
+            <a:prstDash val="solid"/>
+          </a:ln>
+        </p:spPr>
+      </p:sp>
+      <p:sp>
+        <p:nvSpPr>
+          <p:cNvPr id="16" name="Shape 14"/>
+          <p:cNvSpPr/>
+          <p:nvPr/>
+        </p:nvSpPr>
+        <p:spPr>
+          <a:xfrm>
+            <a:off x="9198864" y="4206240"/>
+            <a:ext cx="347472" cy="347472"/>
+          </a:xfrm>
+          <a:prstGeom prst="ellipse">
+            <a:avLst/>
+          </a:prstGeom>
+          <a:solidFill>
+            <a:srgbClr val="2F8A28"/>
+          </a:solidFill>
+          <a:ln w="12700">
+            <a:solidFill>
+              <a:srgbClr val="2F8A28"/>
+            </a:solidFill>
+            <a:prstDash val="solid"/>
+          </a:ln>
+        </p:spPr>
+      </p:sp>
+      <p:sp>
+        <p:nvSpPr>
+          <p:cNvPr id="17" name="Text 15"/>
+          <p:cNvSpPr/>
+          <p:nvPr/>
+        </p:nvSpPr>
+        <p:spPr>
+          <a:xfrm>
+            <a:off x="7909560" y="3977640"/>
+            <a:ext cx="2926080" cy="182880"/>
+          </a:xfrm>
+          <a:prstGeom prst="rect">
+            <a:avLst/>
+          </a:prstGeom>
+          <a:noFill/>
+          <a:ln/>
+        </p:spPr>
+        <p:txBody>
+          <a:bodyPr wrap="square" lIns="0" tIns="0" rIns="0" bIns="0" rtlCol="0" anchor="ctr"/>
+          <a:lstStyle/>
+          <a:p>
+            <a:pPr algn="ctr" indent="0" marL="0">
+              <a:buNone/>
+            </a:pPr>
+            <a:r>
+              <a:rPr lang="en-US" sz="1000" dirty="0">
+                <a:solidFill>
+                  <a:srgbClr val="003A63"/>
+                </a:solidFill>
+                <a:latin typeface="Aptos" pitchFamily="34" charset="0"/>
+                <a:ea typeface="Aptos" pitchFamily="34" charset="-122"/>
+                <a:cs typeface="Aptos" pitchFamily="34" charset="-120"/>
+              </a:rPr>
+              <a:t>Concept to action</a:t>
+            </a:r>
+            <a:endParaRPr lang="en-US" sz="1000" dirty="0"/>
+          </a:p>
+        </p:txBody>
+      </p:sp>
+      <p:sp>
+        <p:nvSpPr>
+          <p:cNvPr id="18" name="Shape 16"/>
+          <p:cNvSpPr/>
+          <p:nvPr/>
+        </p:nvSpPr>
+        <p:spPr>
+          <a:xfrm>
+            <a:off x="7635240" y="4498848"/>
+            <a:ext cx="3474720" cy="1143000"/>
+          </a:xfrm>
+          <a:prstGeom prst="roundRect">
+            <a:avLst>
+              <a:gd name="adj" fmla="val 9600"/>
             </a:avLst>
           </a:prstGeom>
           <a:solidFill>
@@ -11619,14 +12995,14 @@
       </p:sp>
       <p:sp>
         <p:nvSpPr>
-          <p:cNvPr id="16" name="Text 14"/>
-          <p:cNvSpPr/>
-          <p:nvPr/>
-        </p:nvSpPr>
-        <p:spPr>
-          <a:xfrm>
-            <a:off x="8074152" y="3666744"/>
-            <a:ext cx="2825496" cy="256032"/>
+          <p:cNvPr id="19" name="Text 17"/>
+          <p:cNvSpPr/>
+          <p:nvPr/>
+        </p:nvSpPr>
+        <p:spPr>
+          <a:xfrm>
+            <a:off x="7799832" y="4645152"/>
+            <a:ext cx="3145536" cy="256032"/>
           </a:xfrm>
           <a:prstGeom prst="rect">
             <a:avLst/>
@@ -11650,7 +13026,7 @@
                 <a:ea typeface="Aptos" pitchFamily="34" charset="-122"/>
                 <a:cs typeface="Aptos" pitchFamily="34" charset="-120"/>
               </a:rPr>
-              <a:t>Use this for</a:t>
+              <a:t>What to produce</a:t>
             </a:r>
             <a:endParaRPr lang="en-US" sz="1300" dirty="0"/>
           </a:p>
@@ -11658,14 +13034,14 @@
       </p:sp>
       <p:sp>
         <p:nvSpPr>
-          <p:cNvPr id="17" name="Text 15"/>
-          <p:cNvSpPr/>
-          <p:nvPr/>
-        </p:nvSpPr>
-        <p:spPr>
-          <a:xfrm>
-            <a:off x="8074152" y="4023360"/>
-            <a:ext cx="2825496" cy="1097280"/>
+          <p:cNvPr id="20" name="Text 18"/>
+          <p:cNvSpPr/>
+          <p:nvPr/>
+        </p:nvSpPr>
+        <p:spPr>
+          <a:xfrm>
+            <a:off x="7799832" y="5001768"/>
+            <a:ext cx="3145536" cy="502920"/>
           </a:xfrm>
           <a:prstGeom prst="rect">
             <a:avLst/>
@@ -11691,7 +13067,7 @@
                 <a:ea typeface="Aptos" pitchFamily="34" charset="-122"/>
                 <a:cs typeface="Aptos" pitchFamily="34" charset="-120"/>
               </a:rPr>
-              <a:t>Connect the concept to public health decisions, safeguards, documentation, or implementation work.</a:t>
+              <a:t>Use the assignment to test whether you can explain the concept, apply it to a realistic public health situation, and identify what would need review before the work moves forward.</a:t>
             </a:r>
             <a:endParaRPr lang="en-US" sz="1550" dirty="0"/>
           </a:p>
@@ -11865,8 +13241,8 @@
         </p:nvSpPr>
         <p:spPr>
           <a:xfrm>
-            <a:off x="9966960" y="6537960"/>
-            <a:ext cx="1645920" cy="201168"/>
+            <a:off x="9646920" y="6537960"/>
+            <a:ext cx="1965960" cy="201168"/>
           </a:xfrm>
           <a:prstGeom prst="rect">
             <a:avLst/>
@@ -11890,7 +13266,7 @@
                 <a:ea typeface="Aptos" pitchFamily="34" charset="-122"/>
                 <a:cs typeface="Aptos" pitchFamily="34" charset="-120"/>
               </a:rPr>
-              <a:t>Â© Paula Soper</a:t>
+              <a:t>Copyright Paula Soper</a:t>
             </a:r>
             <a:endParaRPr lang="en-US" sz="800" dirty="0"/>
           </a:p>
@@ -11937,77 +13313,13 @@
       </p:sp>
       <p:sp>
         <p:nvSpPr>
-          <p:cNvPr id="8" name="Shape 6"/>
+          <p:cNvPr id="8" name="Text 6"/>
           <p:cNvSpPr/>
           <p:nvPr/>
         </p:nvSpPr>
         <p:spPr>
           <a:xfrm>
             <a:off x="640080" y="658368"/>
-            <a:ext cx="420624" cy="420624"/>
-          </a:xfrm>
-          <a:prstGeom prst="ellipse">
-            <a:avLst/>
-          </a:prstGeom>
-          <a:solidFill>
-            <a:srgbClr val="0068B7"/>
-          </a:solidFill>
-          <a:ln w="12700">
-            <a:solidFill>
-              <a:srgbClr val="0068B7"/>
-            </a:solidFill>
-            <a:prstDash val="solid"/>
-          </a:ln>
-        </p:spPr>
-      </p:sp>
-      <p:sp>
-        <p:nvSpPr>
-          <p:cNvPr id="9" name="Text 7"/>
-          <p:cNvSpPr/>
-          <p:nvPr/>
-        </p:nvSpPr>
-        <p:spPr>
-          <a:xfrm>
-            <a:off x="640080" y="731520"/>
-            <a:ext cx="420624" cy="164592"/>
-          </a:xfrm>
-          <a:prstGeom prst="rect">
-            <a:avLst/>
-          </a:prstGeom>
-          <a:noFill/>
-          <a:ln/>
-        </p:spPr>
-        <p:txBody>
-          <a:bodyPr wrap="square" lIns="0" tIns="0" rIns="0" bIns="0" rtlCol="0" anchor="ctr"/>
-          <a:lstStyle/>
-          <a:p>
-            <a:pPr algn="ctr" indent="0" marL="0">
-              <a:buNone/>
-            </a:pPr>
-            <a:r>
-              <a:rPr lang="en-US" sz="1100" b="1" dirty="0">
-                <a:solidFill>
-                  <a:srgbClr val="FFFFFF"/>
-                </a:solidFill>
-                <a:latin typeface="Aptos" pitchFamily="34" charset="0"/>
-                <a:ea typeface="Aptos" pitchFamily="34" charset="-122"/>
-                <a:cs typeface="Aptos" pitchFamily="34" charset="-120"/>
-              </a:rPr>
-              <a:t>15</a:t>
-            </a:r>
-            <a:endParaRPr lang="en-US" sz="1100" dirty="0"/>
-          </a:p>
-        </p:txBody>
-      </p:sp>
-      <p:sp>
-        <p:nvSpPr>
-          <p:cNvPr id="10" name="Text 8"/>
-          <p:cNvSpPr/>
-          <p:nvPr/>
-        </p:nvSpPr>
-        <p:spPr>
-          <a:xfrm>
-            <a:off x="640080" y="621792"/>
             <a:ext cx="10881360" cy="713232"/>
           </a:xfrm>
           <a:prstGeom prst="rect">
@@ -12042,14 +13354,14 @@
       </p:sp>
       <p:sp>
         <p:nvSpPr>
-          <p:cNvPr id="11" name="Text 9"/>
+          <p:cNvPr id="9" name="Text 7"/>
           <p:cNvSpPr/>
           <p:nvPr/>
         </p:nvSpPr>
         <p:spPr>
           <a:xfrm>
             <a:off x="868680" y="1508760"/>
-            <a:ext cx="6537960" cy="4160520"/>
+            <a:ext cx="6309360" cy="4160520"/>
           </a:xfrm>
           <a:prstGeom prst="rect">
             <a:avLst/>
@@ -12108,18 +13420,18 @@
       </p:sp>
       <p:sp>
         <p:nvSpPr>
-          <p:cNvPr id="12" name="Shape 10"/>
-          <p:cNvSpPr/>
-          <p:nvPr/>
-        </p:nvSpPr>
-        <p:spPr>
-          <a:xfrm>
-            <a:off x="7909560" y="1417320"/>
-            <a:ext cx="3154680" cy="1828800"/>
+          <p:cNvPr id="10" name="Shape 8"/>
+          <p:cNvSpPr/>
+          <p:nvPr/>
+        </p:nvSpPr>
+        <p:spPr>
+          <a:xfrm>
+            <a:off x="7635240" y="1325880"/>
+            <a:ext cx="3474720" cy="1325880"/>
           </a:xfrm>
           <a:prstGeom prst="roundRect">
             <a:avLst>
-              <a:gd name="adj" fmla="val 6000"/>
+              <a:gd name="adj" fmla="val 8276"/>
             </a:avLst>
           </a:prstGeom>
           <a:solidFill>
@@ -12135,14 +13447,14 @@
       </p:sp>
       <p:sp>
         <p:nvSpPr>
-          <p:cNvPr id="13" name="Text 11"/>
-          <p:cNvSpPr/>
-          <p:nvPr/>
-        </p:nvSpPr>
-        <p:spPr>
-          <a:xfrm>
-            <a:off x="8074152" y="1563624"/>
-            <a:ext cx="2825496" cy="256032"/>
+          <p:cNvPr id="11" name="Text 9"/>
+          <p:cNvSpPr/>
+          <p:nvPr/>
+        </p:nvSpPr>
+        <p:spPr>
+          <a:xfrm>
+            <a:off x="7799832" y="1472184"/>
+            <a:ext cx="3145536" cy="256032"/>
           </a:xfrm>
           <a:prstGeom prst="rect">
             <a:avLst/>
@@ -12166,7 +13478,7 @@
                 <a:ea typeface="Aptos" pitchFamily="34" charset="-122"/>
                 <a:cs typeface="Aptos" pitchFamily="34" charset="-120"/>
               </a:rPr>
-              <a:t>Key idea</a:t>
+              <a:t>Core concept</a:t>
             </a:r>
             <a:endParaRPr lang="en-US" sz="1300" dirty="0"/>
           </a:p>
@@ -12174,14 +13486,14 @@
       </p:sp>
       <p:sp>
         <p:nvSpPr>
-          <p:cNvPr id="14" name="Text 12"/>
-          <p:cNvSpPr/>
-          <p:nvPr/>
-        </p:nvSpPr>
-        <p:spPr>
-          <a:xfrm>
-            <a:off x="8074152" y="1920240"/>
-            <a:ext cx="2825496" cy="1188720"/>
+          <p:cNvPr id="12" name="Text 10"/>
+          <p:cNvSpPr/>
+          <p:nvPr/>
+        </p:nvSpPr>
+        <p:spPr>
+          <a:xfrm>
+            <a:off x="7799832" y="1828800"/>
+            <a:ext cx="3145536" cy="685800"/>
           </a:xfrm>
           <a:prstGeom prst="rect">
             <a:avLst/>
@@ -12215,18 +13527,159 @@
       </p:sp>
       <p:sp>
         <p:nvSpPr>
-          <p:cNvPr id="15" name="Shape 13"/>
-          <p:cNvSpPr/>
-          <p:nvPr/>
-        </p:nvSpPr>
-        <p:spPr>
-          <a:xfrm>
-            <a:off x="7909560" y="3520440"/>
-            <a:ext cx="3154680" cy="1737360"/>
+          <p:cNvPr id="13" name="Shape 11"/>
+          <p:cNvSpPr/>
+          <p:nvPr/>
+        </p:nvSpPr>
+        <p:spPr>
+          <a:xfrm>
+            <a:off x="7635240" y="2788920"/>
+            <a:ext cx="3474720" cy="1536192"/>
           </a:xfrm>
           <a:prstGeom prst="roundRect">
             <a:avLst>
-              <a:gd name="adj" fmla="val 6316"/>
+              <a:gd name="adj" fmla="val 7143"/>
+            </a:avLst>
+          </a:prstGeom>
+          <a:solidFill>
+            <a:srgbClr val="FFFFFF">
+              <a:alpha val="88000"/>
+            </a:srgbClr>
+          </a:solidFill>
+          <a:ln w="12700">
+            <a:solidFill>
+              <a:srgbClr val="D6E8F2"/>
+            </a:solidFill>
+            <a:prstDash val="solid"/>
+          </a:ln>
+        </p:spPr>
+      </p:sp>
+      <p:sp>
+        <p:nvSpPr>
+          <p:cNvPr id="14" name="Shape 12"/>
+          <p:cNvSpPr/>
+          <p:nvPr/>
+        </p:nvSpPr>
+        <p:spPr>
+          <a:xfrm>
+            <a:off x="8074152" y="3291840"/>
+            <a:ext cx="2596896" cy="749808"/>
+          </a:xfrm>
+          <a:prstGeom prst="rect">
+            <a:avLst/>
+          </a:prstGeom>
+          <a:solidFill>
+            <a:srgbClr val="EAF6F8"/>
+          </a:solidFill>
+          <a:ln w="12700">
+            <a:solidFill>
+              <a:srgbClr val="8ABBD8"/>
+            </a:solidFill>
+            <a:prstDash val="solid"/>
+          </a:ln>
+        </p:spPr>
+      </p:sp>
+      <p:sp>
+        <p:nvSpPr>
+          <p:cNvPr id="15" name="Shape 13"/>
+          <p:cNvSpPr/>
+          <p:nvPr/>
+        </p:nvSpPr>
+        <p:spPr>
+          <a:xfrm>
+            <a:off x="8202168" y="3721608"/>
+            <a:ext cx="2340864" cy="0"/>
+          </a:xfrm>
+          <a:prstGeom prst="line">
+            <a:avLst/>
+          </a:prstGeom>
+          <a:noFill/>
+          <a:ln w="19050">
+            <a:solidFill>
+              <a:srgbClr val="0068B7"/>
+            </a:solidFill>
+            <a:prstDash val="solid"/>
+          </a:ln>
+        </p:spPr>
+      </p:sp>
+      <p:sp>
+        <p:nvSpPr>
+          <p:cNvPr id="16" name="Shape 14"/>
+          <p:cNvSpPr/>
+          <p:nvPr/>
+        </p:nvSpPr>
+        <p:spPr>
+          <a:xfrm>
+            <a:off x="9198864" y="4206240"/>
+            <a:ext cx="347472" cy="347472"/>
+          </a:xfrm>
+          <a:prstGeom prst="ellipse">
+            <a:avLst/>
+          </a:prstGeom>
+          <a:solidFill>
+            <a:srgbClr val="2F8A28"/>
+          </a:solidFill>
+          <a:ln w="12700">
+            <a:solidFill>
+              <a:srgbClr val="2F8A28"/>
+            </a:solidFill>
+            <a:prstDash val="solid"/>
+          </a:ln>
+        </p:spPr>
+      </p:sp>
+      <p:sp>
+        <p:nvSpPr>
+          <p:cNvPr id="17" name="Text 15"/>
+          <p:cNvSpPr/>
+          <p:nvPr/>
+        </p:nvSpPr>
+        <p:spPr>
+          <a:xfrm>
+            <a:off x="7909560" y="3977640"/>
+            <a:ext cx="2926080" cy="182880"/>
+          </a:xfrm>
+          <a:prstGeom prst="rect">
+            <a:avLst/>
+          </a:prstGeom>
+          <a:noFill/>
+          <a:ln/>
+        </p:spPr>
+        <p:txBody>
+          <a:bodyPr wrap="square" lIns="0" tIns="0" rIns="0" bIns="0" rtlCol="0" anchor="ctr"/>
+          <a:lstStyle/>
+          <a:p>
+            <a:pPr algn="ctr" indent="0" marL="0">
+              <a:buNone/>
+            </a:pPr>
+            <a:r>
+              <a:rPr lang="en-US" sz="1000" dirty="0">
+                <a:solidFill>
+                  <a:srgbClr val="003A63"/>
+                </a:solidFill>
+                <a:latin typeface="Aptos" pitchFamily="34" charset="0"/>
+                <a:ea typeface="Aptos" pitchFamily="34" charset="-122"/>
+                <a:cs typeface="Aptos" pitchFamily="34" charset="-120"/>
+              </a:rPr>
+              <a:t>Concept to action</a:t>
+            </a:r>
+            <a:endParaRPr lang="en-US" sz="1000" dirty="0"/>
+          </a:p>
+        </p:txBody>
+      </p:sp>
+      <p:sp>
+        <p:nvSpPr>
+          <p:cNvPr id="18" name="Shape 16"/>
+          <p:cNvSpPr/>
+          <p:nvPr/>
+        </p:nvSpPr>
+        <p:spPr>
+          <a:xfrm>
+            <a:off x="7635240" y="4498848"/>
+            <a:ext cx="3474720" cy="1143000"/>
+          </a:xfrm>
+          <a:prstGeom prst="roundRect">
+            <a:avLst>
+              <a:gd name="adj" fmla="val 9600"/>
             </a:avLst>
           </a:prstGeom>
           <a:solidFill>
@@ -12242,14 +13695,14 @@
       </p:sp>
       <p:sp>
         <p:nvSpPr>
-          <p:cNvPr id="16" name="Text 14"/>
-          <p:cNvSpPr/>
-          <p:nvPr/>
-        </p:nvSpPr>
-        <p:spPr>
-          <a:xfrm>
-            <a:off x="8074152" y="3666744"/>
-            <a:ext cx="2825496" cy="256032"/>
+          <p:cNvPr id="19" name="Text 17"/>
+          <p:cNvSpPr/>
+          <p:nvPr/>
+        </p:nvSpPr>
+        <p:spPr>
+          <a:xfrm>
+            <a:off x="7799832" y="4645152"/>
+            <a:ext cx="3145536" cy="256032"/>
           </a:xfrm>
           <a:prstGeom prst="rect">
             <a:avLst/>
@@ -12273,7 +13726,7 @@
                 <a:ea typeface="Aptos" pitchFamily="34" charset="-122"/>
                 <a:cs typeface="Aptos" pitchFamily="34" charset="-120"/>
               </a:rPr>
-              <a:t>Use this for</a:t>
+              <a:t>Apply it</a:t>
             </a:r>
             <a:endParaRPr lang="en-US" sz="1300" dirty="0"/>
           </a:p>
@@ -12281,14 +13734,14 @@
       </p:sp>
       <p:sp>
         <p:nvSpPr>
-          <p:cNvPr id="17" name="Text 15"/>
-          <p:cNvSpPr/>
-          <p:nvPr/>
-        </p:nvSpPr>
-        <p:spPr>
-          <a:xfrm>
-            <a:off x="8074152" y="4023360"/>
-            <a:ext cx="2825496" cy="1097280"/>
+          <p:cNvPr id="20" name="Text 18"/>
+          <p:cNvSpPr/>
+          <p:nvPr/>
+        </p:nvSpPr>
+        <p:spPr>
+          <a:xfrm>
+            <a:off x="7799832" y="5001768"/>
+            <a:ext cx="3145536" cy="502920"/>
           </a:xfrm>
           <a:prstGeom prst="rect">
             <a:avLst/>
@@ -12314,7 +13767,7 @@
                 <a:ea typeface="Aptos" pitchFamily="34" charset="-122"/>
                 <a:cs typeface="Aptos" pitchFamily="34" charset="-120"/>
               </a:rPr>
-              <a:t>Connect the concept to public health decisions, safeguards, documentation, or implementation work.</a:t>
+              <a:t>Connect the concept to public health purpose, responsible use, required safeguards, documentation, and the next action a department should take.</a:t>
             </a:r>
             <a:endParaRPr lang="en-US" sz="1550" dirty="0"/>
           </a:p>
@@ -12488,8 +13941,8 @@
         </p:nvSpPr>
         <p:spPr>
           <a:xfrm>
-            <a:off x="9966960" y="6537960"/>
-            <a:ext cx="1645920" cy="201168"/>
+            <a:off x="9646920" y="6537960"/>
+            <a:ext cx="1965960" cy="201168"/>
           </a:xfrm>
           <a:prstGeom prst="rect">
             <a:avLst/>
@@ -12513,7 +13966,7 @@
                 <a:ea typeface="Aptos" pitchFamily="34" charset="-122"/>
                 <a:cs typeface="Aptos" pitchFamily="34" charset="-120"/>
               </a:rPr>
-              <a:t>Â© Paula Soper</a:t>
+              <a:t>Copyright Paula Soper</a:t>
             </a:r>
             <a:endParaRPr lang="en-US" sz="800" dirty="0"/>
           </a:p>
@@ -12856,46 +14309,7 @@
       </p:sp>
       <p:sp>
         <p:nvSpPr>
-          <p:cNvPr id="15" name="Text 13"/>
-          <p:cNvSpPr/>
-          <p:nvPr/>
-        </p:nvSpPr>
-        <p:spPr>
-          <a:xfrm>
-            <a:off x="8817864" y="4187952"/>
-            <a:ext cx="201168" cy="256032"/>
-          </a:xfrm>
-          <a:prstGeom prst="rect">
-            <a:avLst/>
-          </a:prstGeom>
-          <a:noFill/>
-          <a:ln/>
-        </p:spPr>
-        <p:txBody>
-          <a:bodyPr wrap="square" lIns="0" tIns="0" rIns="0" bIns="0" rtlCol="0" anchor="ctr"/>
-          <a:lstStyle/>
-          <a:p>
-            <a:pPr algn="ctr" indent="0" marL="0">
-              <a:buNone/>
-            </a:pPr>
-            <a:r>
-              <a:rPr lang="en-US" sz="1800" b="1" dirty="0">
-                <a:solidFill>
-                  <a:srgbClr val="0068B7"/>
-                </a:solidFill>
-                <a:latin typeface="Aptos" pitchFamily="34" charset="0"/>
-                <a:ea typeface="Aptos" pitchFamily="34" charset="-122"/>
-                <a:cs typeface="Aptos" pitchFamily="34" charset="-120"/>
-              </a:rPr>
-              <a:t>â†’</a:t>
-            </a:r>
-            <a:endParaRPr lang="en-US" sz="1800" dirty="0"/>
-          </a:p>
-        </p:txBody>
-      </p:sp>
-      <p:sp>
-        <p:nvSpPr>
-          <p:cNvPr id="16" name="Shape 14"/>
+          <p:cNvPr id="15" name="Shape 13"/>
           <p:cNvSpPr/>
           <p:nvPr/>
         </p:nvSpPr>
@@ -12922,7 +14336,7 @@
       </p:sp>
       <p:sp>
         <p:nvSpPr>
-          <p:cNvPr id="17" name="Text 15"/>
+          <p:cNvPr id="16" name="Text 14"/>
           <p:cNvSpPr/>
           <p:nvPr/>
         </p:nvSpPr>
@@ -12963,46 +14377,7 @@
       </p:sp>
       <p:sp>
         <p:nvSpPr>
-          <p:cNvPr id="18" name="Text 16"/>
-          <p:cNvSpPr/>
-          <p:nvPr/>
-        </p:nvSpPr>
-        <p:spPr>
-          <a:xfrm>
-            <a:off x="10046208" y="4187952"/>
-            <a:ext cx="201168" cy="256032"/>
-          </a:xfrm>
-          <a:prstGeom prst="rect">
-            <a:avLst/>
-          </a:prstGeom>
-          <a:noFill/>
-          <a:ln/>
-        </p:spPr>
-        <p:txBody>
-          <a:bodyPr wrap="square" lIns="0" tIns="0" rIns="0" bIns="0" rtlCol="0" anchor="ctr"/>
-          <a:lstStyle/>
-          <a:p>
-            <a:pPr algn="ctr" indent="0" marL="0">
-              <a:buNone/>
-            </a:pPr>
-            <a:r>
-              <a:rPr lang="en-US" sz="1800" b="1" dirty="0">
-                <a:solidFill>
-                  <a:srgbClr val="0068B7"/>
-                </a:solidFill>
-                <a:latin typeface="Aptos" pitchFamily="34" charset="0"/>
-                <a:ea typeface="Aptos" pitchFamily="34" charset="-122"/>
-                <a:cs typeface="Aptos" pitchFamily="34" charset="-120"/>
-              </a:rPr>
-              <a:t>â†’</a:t>
-            </a:r>
-            <a:endParaRPr lang="en-US" sz="1800" dirty="0"/>
-          </a:p>
-        </p:txBody>
-      </p:sp>
-      <p:sp>
-        <p:nvSpPr>
-          <p:cNvPr id="19" name="Shape 17"/>
+          <p:cNvPr id="17" name="Shape 15"/>
           <p:cNvSpPr/>
           <p:nvPr/>
         </p:nvSpPr>
@@ -13029,7 +14404,7 @@
       </p:sp>
       <p:sp>
         <p:nvSpPr>
-          <p:cNvPr id="20" name="Text 18"/>
+          <p:cNvPr id="18" name="Text 16"/>
           <p:cNvSpPr/>
           <p:nvPr/>
         </p:nvSpPr>
@@ -13236,8 +14611,8 @@
         </p:nvSpPr>
         <p:spPr>
           <a:xfrm>
-            <a:off x="9966960" y="6537960"/>
-            <a:ext cx="1645920" cy="201168"/>
+            <a:off x="9646920" y="6537960"/>
+            <a:ext cx="1965960" cy="201168"/>
           </a:xfrm>
           <a:prstGeom prst="rect">
             <a:avLst/>
@@ -13261,7 +14636,7 @@
                 <a:ea typeface="Aptos" pitchFamily="34" charset="-122"/>
                 <a:cs typeface="Aptos" pitchFamily="34" charset="-120"/>
               </a:rPr>
-              <a:t>Â© Paula Soper</a:t>
+              <a:t>Copyright Paula Soper</a:t>
             </a:r>
             <a:endParaRPr lang="en-US" sz="800" dirty="0"/>
           </a:p>
@@ -13604,46 +14979,7 @@
       </p:sp>
       <p:sp>
         <p:nvSpPr>
-          <p:cNvPr id="15" name="Text 13"/>
-          <p:cNvSpPr/>
-          <p:nvPr/>
-        </p:nvSpPr>
-        <p:spPr>
-          <a:xfrm>
-            <a:off x="8817864" y="4187952"/>
-            <a:ext cx="201168" cy="256032"/>
-          </a:xfrm>
-          <a:prstGeom prst="rect">
-            <a:avLst/>
-          </a:prstGeom>
-          <a:noFill/>
-          <a:ln/>
-        </p:spPr>
-        <p:txBody>
-          <a:bodyPr wrap="square" lIns="0" tIns="0" rIns="0" bIns="0" rtlCol="0" anchor="ctr"/>
-          <a:lstStyle/>
-          <a:p>
-            <a:pPr algn="ctr" indent="0" marL="0">
-              <a:buNone/>
-            </a:pPr>
-            <a:r>
-              <a:rPr lang="en-US" sz="1800" b="1" dirty="0">
-                <a:solidFill>
-                  <a:srgbClr val="0068B7"/>
-                </a:solidFill>
-                <a:latin typeface="Aptos" pitchFamily="34" charset="0"/>
-                <a:ea typeface="Aptos" pitchFamily="34" charset="-122"/>
-                <a:cs typeface="Aptos" pitchFamily="34" charset="-120"/>
-              </a:rPr>
-              <a:t>â†’</a:t>
-            </a:r>
-            <a:endParaRPr lang="en-US" sz="1800" dirty="0"/>
-          </a:p>
-        </p:txBody>
-      </p:sp>
-      <p:sp>
-        <p:nvSpPr>
-          <p:cNvPr id="16" name="Shape 14"/>
+          <p:cNvPr id="15" name="Shape 13"/>
           <p:cNvSpPr/>
           <p:nvPr/>
         </p:nvSpPr>
@@ -13670,7 +15006,7 @@
       </p:sp>
       <p:sp>
         <p:nvSpPr>
-          <p:cNvPr id="17" name="Text 15"/>
+          <p:cNvPr id="16" name="Text 14"/>
           <p:cNvSpPr/>
           <p:nvPr/>
         </p:nvSpPr>
@@ -13711,46 +15047,7 @@
       </p:sp>
       <p:sp>
         <p:nvSpPr>
-          <p:cNvPr id="18" name="Text 16"/>
-          <p:cNvSpPr/>
-          <p:nvPr/>
-        </p:nvSpPr>
-        <p:spPr>
-          <a:xfrm>
-            <a:off x="10046208" y="4187952"/>
-            <a:ext cx="201168" cy="256032"/>
-          </a:xfrm>
-          <a:prstGeom prst="rect">
-            <a:avLst/>
-          </a:prstGeom>
-          <a:noFill/>
-          <a:ln/>
-        </p:spPr>
-        <p:txBody>
-          <a:bodyPr wrap="square" lIns="0" tIns="0" rIns="0" bIns="0" rtlCol="0" anchor="ctr"/>
-          <a:lstStyle/>
-          <a:p>
-            <a:pPr algn="ctr" indent="0" marL="0">
-              <a:buNone/>
-            </a:pPr>
-            <a:r>
-              <a:rPr lang="en-US" sz="1800" b="1" dirty="0">
-                <a:solidFill>
-                  <a:srgbClr val="0068B7"/>
-                </a:solidFill>
-                <a:latin typeface="Aptos" pitchFamily="34" charset="0"/>
-                <a:ea typeface="Aptos" pitchFamily="34" charset="-122"/>
-                <a:cs typeface="Aptos" pitchFamily="34" charset="-120"/>
-              </a:rPr>
-              <a:t>â†’</a:t>
-            </a:r>
-            <a:endParaRPr lang="en-US" sz="1800" dirty="0"/>
-          </a:p>
-        </p:txBody>
-      </p:sp>
-      <p:sp>
-        <p:nvSpPr>
-          <p:cNvPr id="19" name="Shape 17"/>
+          <p:cNvPr id="17" name="Shape 15"/>
           <p:cNvSpPr/>
           <p:nvPr/>
         </p:nvSpPr>
@@ -13777,7 +15074,7 @@
       </p:sp>
       <p:sp>
         <p:nvSpPr>
-          <p:cNvPr id="20" name="Text 18"/>
+          <p:cNvPr id="18" name="Text 16"/>
           <p:cNvSpPr/>
           <p:nvPr/>
         </p:nvSpPr>
@@ -13984,8 +15281,8 @@
         </p:nvSpPr>
         <p:spPr>
           <a:xfrm>
-            <a:off x="9966960" y="6537960"/>
-            <a:ext cx="1645920" cy="201168"/>
+            <a:off x="9646920" y="6537960"/>
+            <a:ext cx="1965960" cy="201168"/>
           </a:xfrm>
           <a:prstGeom prst="rect">
             <a:avLst/>
@@ -14009,7 +15306,7 @@
                 <a:ea typeface="Aptos" pitchFamily="34" charset="-122"/>
                 <a:cs typeface="Aptos" pitchFamily="34" charset="-120"/>
               </a:rPr>
-              <a:t>Â© Paula Soper</a:t>
+              <a:t>Copyright Paula Soper</a:t>
             </a:r>
             <a:endParaRPr lang="en-US" sz="800" dirty="0"/>
           </a:p>
@@ -14056,77 +15353,13 @@
       </p:sp>
       <p:sp>
         <p:nvSpPr>
-          <p:cNvPr id="8" name="Shape 6"/>
+          <p:cNvPr id="8" name="Text 6"/>
           <p:cNvSpPr/>
           <p:nvPr/>
         </p:nvSpPr>
         <p:spPr>
           <a:xfrm>
             <a:off x="640080" y="658368"/>
-            <a:ext cx="420624" cy="420624"/>
-          </a:xfrm>
-          <a:prstGeom prst="ellipse">
-            <a:avLst/>
-          </a:prstGeom>
-          <a:solidFill>
-            <a:srgbClr val="0068B7"/>
-          </a:solidFill>
-          <a:ln w="12700">
-            <a:solidFill>
-              <a:srgbClr val="0068B7"/>
-            </a:solidFill>
-            <a:prstDash val="solid"/>
-          </a:ln>
-        </p:spPr>
-      </p:sp>
-      <p:sp>
-        <p:nvSpPr>
-          <p:cNvPr id="9" name="Text 7"/>
-          <p:cNvSpPr/>
-          <p:nvPr/>
-        </p:nvSpPr>
-        <p:spPr>
-          <a:xfrm>
-            <a:off x="640080" y="731520"/>
-            <a:ext cx="420624" cy="164592"/>
-          </a:xfrm>
-          <a:prstGeom prst="rect">
-            <a:avLst/>
-          </a:prstGeom>
-          <a:noFill/>
-          <a:ln/>
-        </p:spPr>
-        <p:txBody>
-          <a:bodyPr wrap="square" lIns="0" tIns="0" rIns="0" bIns="0" rtlCol="0" anchor="ctr"/>
-          <a:lstStyle/>
-          <a:p>
-            <a:pPr algn="ctr" indent="0" marL="0">
-              <a:buNone/>
-            </a:pPr>
-            <a:r>
-              <a:rPr lang="en-US" sz="1100" b="1" dirty="0">
-                <a:solidFill>
-                  <a:srgbClr val="FFFFFF"/>
-                </a:solidFill>
-                <a:latin typeface="Aptos" pitchFamily="34" charset="0"/>
-                <a:ea typeface="Aptos" pitchFamily="34" charset="-122"/>
-                <a:cs typeface="Aptos" pitchFamily="34" charset="-120"/>
-              </a:rPr>
-              <a:t>1</a:t>
-            </a:r>
-            <a:endParaRPr lang="en-US" sz="1100" dirty="0"/>
-          </a:p>
-        </p:txBody>
-      </p:sp>
-      <p:sp>
-        <p:nvSpPr>
-          <p:cNvPr id="10" name="Text 8"/>
-          <p:cNvSpPr/>
-          <p:nvPr/>
-        </p:nvSpPr>
-        <p:spPr>
-          <a:xfrm>
-            <a:off x="640080" y="621792"/>
             <a:ext cx="10881360" cy="713232"/>
           </a:xfrm>
           <a:prstGeom prst="rect">
@@ -14161,14 +15394,14 @@
       </p:sp>
       <p:sp>
         <p:nvSpPr>
-          <p:cNvPr id="11" name="Text 9"/>
+          <p:cNvPr id="9" name="Text 7"/>
           <p:cNvSpPr/>
           <p:nvPr/>
         </p:nvSpPr>
         <p:spPr>
           <a:xfrm>
             <a:off x="868680" y="1508760"/>
-            <a:ext cx="6537960" cy="4160520"/>
+            <a:ext cx="6309360" cy="4160520"/>
           </a:xfrm>
           <a:prstGeom prst="rect">
             <a:avLst/>
@@ -14227,18 +15460,18 @@
       </p:sp>
       <p:sp>
         <p:nvSpPr>
-          <p:cNvPr id="12" name="Shape 10"/>
-          <p:cNvSpPr/>
-          <p:nvPr/>
-        </p:nvSpPr>
-        <p:spPr>
-          <a:xfrm>
-            <a:off x="7909560" y="1417320"/>
-            <a:ext cx="3154680" cy="1828800"/>
+          <p:cNvPr id="10" name="Shape 8"/>
+          <p:cNvSpPr/>
+          <p:nvPr/>
+        </p:nvSpPr>
+        <p:spPr>
+          <a:xfrm>
+            <a:off x="7635240" y="1325880"/>
+            <a:ext cx="3474720" cy="1325880"/>
           </a:xfrm>
           <a:prstGeom prst="roundRect">
             <a:avLst>
-              <a:gd name="adj" fmla="val 6000"/>
+              <a:gd name="adj" fmla="val 8276"/>
             </a:avLst>
           </a:prstGeom>
           <a:solidFill>
@@ -14254,14 +15487,14 @@
       </p:sp>
       <p:sp>
         <p:nvSpPr>
-          <p:cNvPr id="13" name="Text 11"/>
-          <p:cNvSpPr/>
-          <p:nvPr/>
-        </p:nvSpPr>
-        <p:spPr>
-          <a:xfrm>
-            <a:off x="8074152" y="1563624"/>
-            <a:ext cx="2825496" cy="256032"/>
+          <p:cNvPr id="11" name="Text 9"/>
+          <p:cNvSpPr/>
+          <p:nvPr/>
+        </p:nvSpPr>
+        <p:spPr>
+          <a:xfrm>
+            <a:off x="7799832" y="1472184"/>
+            <a:ext cx="3145536" cy="256032"/>
           </a:xfrm>
           <a:prstGeom prst="rect">
             <a:avLst/>
@@ -14285,7 +15518,7 @@
                 <a:ea typeface="Aptos" pitchFamily="34" charset="-122"/>
                 <a:cs typeface="Aptos" pitchFamily="34" charset="-120"/>
               </a:rPr>
-              <a:t>Key idea</a:t>
+              <a:t>Practice focus</a:t>
             </a:r>
             <a:endParaRPr lang="en-US" sz="1300" dirty="0"/>
           </a:p>
@@ -14293,14 +15526,14 @@
       </p:sp>
       <p:sp>
         <p:nvSpPr>
-          <p:cNvPr id="14" name="Text 12"/>
-          <p:cNvSpPr/>
-          <p:nvPr/>
-        </p:nvSpPr>
-        <p:spPr>
-          <a:xfrm>
-            <a:off x="8074152" y="1920240"/>
-            <a:ext cx="2825496" cy="1188720"/>
+          <p:cNvPr id="12" name="Text 10"/>
+          <p:cNvSpPr/>
+          <p:nvPr/>
+        </p:nvSpPr>
+        <p:spPr>
+          <a:xfrm>
+            <a:off x="7799832" y="1828800"/>
+            <a:ext cx="3145536" cy="685800"/>
           </a:xfrm>
           <a:prstGeom prst="rect">
             <a:avLst/>
@@ -14334,18 +15567,159 @@
       </p:sp>
       <p:sp>
         <p:nvSpPr>
-          <p:cNvPr id="15" name="Shape 13"/>
-          <p:cNvSpPr/>
-          <p:nvPr/>
-        </p:nvSpPr>
-        <p:spPr>
-          <a:xfrm>
-            <a:off x="7909560" y="3520440"/>
-            <a:ext cx="3154680" cy="1737360"/>
+          <p:cNvPr id="13" name="Shape 11"/>
+          <p:cNvSpPr/>
+          <p:nvPr/>
+        </p:nvSpPr>
+        <p:spPr>
+          <a:xfrm>
+            <a:off x="7635240" y="2788920"/>
+            <a:ext cx="3474720" cy="1536192"/>
           </a:xfrm>
           <a:prstGeom prst="roundRect">
             <a:avLst>
-              <a:gd name="adj" fmla="val 6316"/>
+              <a:gd name="adj" fmla="val 7143"/>
+            </a:avLst>
+          </a:prstGeom>
+          <a:solidFill>
+            <a:srgbClr val="FFFFFF">
+              <a:alpha val="88000"/>
+            </a:srgbClr>
+          </a:solidFill>
+          <a:ln w="12700">
+            <a:solidFill>
+              <a:srgbClr val="D6E8F2"/>
+            </a:solidFill>
+            <a:prstDash val="solid"/>
+          </a:ln>
+        </p:spPr>
+      </p:sp>
+      <p:sp>
+        <p:nvSpPr>
+          <p:cNvPr id="14" name="Shape 12"/>
+          <p:cNvSpPr/>
+          <p:nvPr/>
+        </p:nvSpPr>
+        <p:spPr>
+          <a:xfrm>
+            <a:off x="8074152" y="3291840"/>
+            <a:ext cx="2596896" cy="749808"/>
+          </a:xfrm>
+          <a:prstGeom prst="rect">
+            <a:avLst/>
+          </a:prstGeom>
+          <a:solidFill>
+            <a:srgbClr val="EAF6F8"/>
+          </a:solidFill>
+          <a:ln w="12700">
+            <a:solidFill>
+              <a:srgbClr val="8ABBD8"/>
+            </a:solidFill>
+            <a:prstDash val="solid"/>
+          </a:ln>
+        </p:spPr>
+      </p:sp>
+      <p:sp>
+        <p:nvSpPr>
+          <p:cNvPr id="15" name="Shape 13"/>
+          <p:cNvSpPr/>
+          <p:nvPr/>
+        </p:nvSpPr>
+        <p:spPr>
+          <a:xfrm>
+            <a:off x="8202168" y="3721608"/>
+            <a:ext cx="2340864" cy="0"/>
+          </a:xfrm>
+          <a:prstGeom prst="line">
+            <a:avLst/>
+          </a:prstGeom>
+          <a:noFill/>
+          <a:ln w="19050">
+            <a:solidFill>
+              <a:srgbClr val="0068B7"/>
+            </a:solidFill>
+            <a:prstDash val="solid"/>
+          </a:ln>
+        </p:spPr>
+      </p:sp>
+      <p:sp>
+        <p:nvSpPr>
+          <p:cNvPr id="16" name="Shape 14"/>
+          <p:cNvSpPr/>
+          <p:nvPr/>
+        </p:nvSpPr>
+        <p:spPr>
+          <a:xfrm>
+            <a:off x="9198864" y="4206240"/>
+            <a:ext cx="347472" cy="347472"/>
+          </a:xfrm>
+          <a:prstGeom prst="ellipse">
+            <a:avLst/>
+          </a:prstGeom>
+          <a:solidFill>
+            <a:srgbClr val="2F8A28"/>
+          </a:solidFill>
+          <a:ln w="12700">
+            <a:solidFill>
+              <a:srgbClr val="2F8A28"/>
+            </a:solidFill>
+            <a:prstDash val="solid"/>
+          </a:ln>
+        </p:spPr>
+      </p:sp>
+      <p:sp>
+        <p:nvSpPr>
+          <p:cNvPr id="17" name="Text 15"/>
+          <p:cNvSpPr/>
+          <p:nvPr/>
+        </p:nvSpPr>
+        <p:spPr>
+          <a:xfrm>
+            <a:off x="7909560" y="3977640"/>
+            <a:ext cx="2926080" cy="182880"/>
+          </a:xfrm>
+          <a:prstGeom prst="rect">
+            <a:avLst/>
+          </a:prstGeom>
+          <a:noFill/>
+          <a:ln/>
+        </p:spPr>
+        <p:txBody>
+          <a:bodyPr wrap="square" lIns="0" tIns="0" rIns="0" bIns="0" rtlCol="0" anchor="ctr"/>
+          <a:lstStyle/>
+          <a:p>
+            <a:pPr algn="ctr" indent="0" marL="0">
+              <a:buNone/>
+            </a:pPr>
+            <a:r>
+              <a:rPr lang="en-US" sz="1000" dirty="0">
+                <a:solidFill>
+                  <a:srgbClr val="003A63"/>
+                </a:solidFill>
+                <a:latin typeface="Aptos" pitchFamily="34" charset="0"/>
+                <a:ea typeface="Aptos" pitchFamily="34" charset="-122"/>
+                <a:cs typeface="Aptos" pitchFamily="34" charset="-120"/>
+              </a:rPr>
+              <a:t>Concept to action</a:t>
+            </a:r>
+            <a:endParaRPr lang="en-US" sz="1000" dirty="0"/>
+          </a:p>
+        </p:txBody>
+      </p:sp>
+      <p:sp>
+        <p:nvSpPr>
+          <p:cNvPr id="18" name="Shape 16"/>
+          <p:cNvSpPr/>
+          <p:nvPr/>
+        </p:nvSpPr>
+        <p:spPr>
+          <a:xfrm>
+            <a:off x="7635240" y="4498848"/>
+            <a:ext cx="3474720" cy="1143000"/>
+          </a:xfrm>
+          <a:prstGeom prst="roundRect">
+            <a:avLst>
+              <a:gd name="adj" fmla="val 9600"/>
             </a:avLst>
           </a:prstGeom>
           <a:solidFill>
@@ -14361,14 +15735,14 @@
       </p:sp>
       <p:sp>
         <p:nvSpPr>
-          <p:cNvPr id="16" name="Text 14"/>
-          <p:cNvSpPr/>
-          <p:nvPr/>
-        </p:nvSpPr>
-        <p:spPr>
-          <a:xfrm>
-            <a:off x="8074152" y="3666744"/>
-            <a:ext cx="2825496" cy="256032"/>
+          <p:cNvPr id="19" name="Text 17"/>
+          <p:cNvSpPr/>
+          <p:nvPr/>
+        </p:nvSpPr>
+        <p:spPr>
+          <a:xfrm>
+            <a:off x="7799832" y="4645152"/>
+            <a:ext cx="3145536" cy="256032"/>
           </a:xfrm>
           <a:prstGeom prst="rect">
             <a:avLst/>
@@ -14392,7 +15766,7 @@
                 <a:ea typeface="Aptos" pitchFamily="34" charset="-122"/>
                 <a:cs typeface="Aptos" pitchFamily="34" charset="-120"/>
               </a:rPr>
-              <a:t>Use this for</a:t>
+              <a:t>What to produce</a:t>
             </a:r>
             <a:endParaRPr lang="en-US" sz="1300" dirty="0"/>
           </a:p>
@@ -14400,14 +15774,14 @@
       </p:sp>
       <p:sp>
         <p:nvSpPr>
-          <p:cNvPr id="17" name="Text 15"/>
-          <p:cNvSpPr/>
-          <p:nvPr/>
-        </p:nvSpPr>
-        <p:spPr>
-          <a:xfrm>
-            <a:off x="8074152" y="4023360"/>
-            <a:ext cx="2825496" cy="1097280"/>
+          <p:cNvPr id="20" name="Text 18"/>
+          <p:cNvSpPr/>
+          <p:nvPr/>
+        </p:nvSpPr>
+        <p:spPr>
+          <a:xfrm>
+            <a:off x="7799832" y="5001768"/>
+            <a:ext cx="3145536" cy="502920"/>
           </a:xfrm>
           <a:prstGeom prst="rect">
             <a:avLst/>
@@ -14433,7 +15807,7 @@
                 <a:ea typeface="Aptos" pitchFamily="34" charset="-122"/>
                 <a:cs typeface="Aptos" pitchFamily="34" charset="-120"/>
               </a:rPr>
-              <a:t>Connect the concept to public health decisions, safeguards, documentation, or implementation work.</a:t>
+              <a:t>Use the assignment to test whether you can explain the concept, apply it to a realistic public health situation, and identify what would need review before the work moves forward.</a:t>
             </a:r>
             <a:endParaRPr lang="en-US" sz="1550" dirty="0"/>
           </a:p>
@@ -14607,8 +15981,8 @@
         </p:nvSpPr>
         <p:spPr>
           <a:xfrm>
-            <a:off x="9966960" y="6537960"/>
-            <a:ext cx="1645920" cy="201168"/>
+            <a:off x="9646920" y="6537960"/>
+            <a:ext cx="1965960" cy="201168"/>
           </a:xfrm>
           <a:prstGeom prst="rect">
             <a:avLst/>
@@ -14632,7 +16006,7 @@
                 <a:ea typeface="Aptos" pitchFamily="34" charset="-122"/>
                 <a:cs typeface="Aptos" pitchFamily="34" charset="-120"/>
               </a:rPr>
-              <a:t>Â© Paula Soper</a:t>
+              <a:t>Copyright Paula Soper</a:t>
             </a:r>
             <a:endParaRPr lang="en-US" sz="800" dirty="0"/>
           </a:p>
@@ -14679,77 +16053,13 @@
       </p:sp>
       <p:sp>
         <p:nvSpPr>
-          <p:cNvPr id="8" name="Shape 6"/>
+          <p:cNvPr id="8" name="Text 6"/>
           <p:cNvSpPr/>
           <p:nvPr/>
         </p:nvSpPr>
         <p:spPr>
           <a:xfrm>
             <a:off x="640080" y="658368"/>
-            <a:ext cx="420624" cy="420624"/>
-          </a:xfrm>
-          <a:prstGeom prst="ellipse">
-            <a:avLst/>
-          </a:prstGeom>
-          <a:solidFill>
-            <a:srgbClr val="0068B7"/>
-          </a:solidFill>
-          <a:ln w="12700">
-            <a:solidFill>
-              <a:srgbClr val="0068B7"/>
-            </a:solidFill>
-            <a:prstDash val="solid"/>
-          </a:ln>
-        </p:spPr>
-      </p:sp>
-      <p:sp>
-        <p:nvSpPr>
-          <p:cNvPr id="9" name="Text 7"/>
-          <p:cNvSpPr/>
-          <p:nvPr/>
-        </p:nvSpPr>
-        <p:spPr>
-          <a:xfrm>
-            <a:off x="640080" y="731520"/>
-            <a:ext cx="420624" cy="164592"/>
-          </a:xfrm>
-          <a:prstGeom prst="rect">
-            <a:avLst/>
-          </a:prstGeom>
-          <a:noFill/>
-          <a:ln/>
-        </p:spPr>
-        <p:txBody>
-          <a:bodyPr wrap="square" lIns="0" tIns="0" rIns="0" bIns="0" rtlCol="0" anchor="ctr"/>
-          <a:lstStyle/>
-          <a:p>
-            <a:pPr algn="ctr" indent="0" marL="0">
-              <a:buNone/>
-            </a:pPr>
-            <a:r>
-              <a:rPr lang="en-US" sz="1100" b="1" dirty="0">
-                <a:solidFill>
-                  <a:srgbClr val="FFFFFF"/>
-                </a:solidFill>
-                <a:latin typeface="Aptos" pitchFamily="34" charset="0"/>
-                <a:ea typeface="Aptos" pitchFamily="34" charset="-122"/>
-                <a:cs typeface="Aptos" pitchFamily="34" charset="-120"/>
-              </a:rPr>
-              <a:t>2</a:t>
-            </a:r>
-            <a:endParaRPr lang="en-US" sz="1100" dirty="0"/>
-          </a:p>
-        </p:txBody>
-      </p:sp>
-      <p:sp>
-        <p:nvSpPr>
-          <p:cNvPr id="10" name="Text 8"/>
-          <p:cNvSpPr/>
-          <p:nvPr/>
-        </p:nvSpPr>
-        <p:spPr>
-          <a:xfrm>
-            <a:off x="640080" y="621792"/>
             <a:ext cx="10881360" cy="713232"/>
           </a:xfrm>
           <a:prstGeom prst="rect">
@@ -14784,14 +16094,14 @@
       </p:sp>
       <p:sp>
         <p:nvSpPr>
-          <p:cNvPr id="11" name="Text 9"/>
+          <p:cNvPr id="9" name="Text 7"/>
           <p:cNvSpPr/>
           <p:nvPr/>
         </p:nvSpPr>
         <p:spPr>
           <a:xfrm>
             <a:off x="868680" y="1508760"/>
-            <a:ext cx="6537960" cy="4160520"/>
+            <a:ext cx="6309360" cy="4160520"/>
           </a:xfrm>
           <a:prstGeom prst="rect">
             <a:avLst/>
@@ -14850,18 +16160,18 @@
       </p:sp>
       <p:sp>
         <p:nvSpPr>
-          <p:cNvPr id="12" name="Shape 10"/>
-          <p:cNvSpPr/>
-          <p:nvPr/>
-        </p:nvSpPr>
-        <p:spPr>
-          <a:xfrm>
-            <a:off x="7909560" y="1417320"/>
-            <a:ext cx="3154680" cy="1828800"/>
+          <p:cNvPr id="10" name="Shape 8"/>
+          <p:cNvSpPr/>
+          <p:nvPr/>
+        </p:nvSpPr>
+        <p:spPr>
+          <a:xfrm>
+            <a:off x="7635240" y="1325880"/>
+            <a:ext cx="3474720" cy="1325880"/>
           </a:xfrm>
           <a:prstGeom prst="roundRect">
             <a:avLst>
-              <a:gd name="adj" fmla="val 6000"/>
+              <a:gd name="adj" fmla="val 8276"/>
             </a:avLst>
           </a:prstGeom>
           <a:solidFill>
@@ -14877,14 +16187,14 @@
       </p:sp>
       <p:sp>
         <p:nvSpPr>
-          <p:cNvPr id="13" name="Text 11"/>
-          <p:cNvSpPr/>
-          <p:nvPr/>
-        </p:nvSpPr>
-        <p:spPr>
-          <a:xfrm>
-            <a:off x="8074152" y="1563624"/>
-            <a:ext cx="2825496" cy="256032"/>
+          <p:cNvPr id="11" name="Text 9"/>
+          <p:cNvSpPr/>
+          <p:nvPr/>
+        </p:nvSpPr>
+        <p:spPr>
+          <a:xfrm>
+            <a:off x="7799832" y="1472184"/>
+            <a:ext cx="3145536" cy="256032"/>
           </a:xfrm>
           <a:prstGeom prst="rect">
             <a:avLst/>
@@ -14908,7 +16218,7 @@
                 <a:ea typeface="Aptos" pitchFamily="34" charset="-122"/>
                 <a:cs typeface="Aptos" pitchFamily="34" charset="-120"/>
               </a:rPr>
-              <a:t>Key idea</a:t>
+              <a:t>Core concept</a:t>
             </a:r>
             <a:endParaRPr lang="en-US" sz="1300" dirty="0"/>
           </a:p>
@@ -14916,14 +16226,14 @@
       </p:sp>
       <p:sp>
         <p:nvSpPr>
-          <p:cNvPr id="14" name="Text 12"/>
-          <p:cNvSpPr/>
-          <p:nvPr/>
-        </p:nvSpPr>
-        <p:spPr>
-          <a:xfrm>
-            <a:off x="8074152" y="1920240"/>
-            <a:ext cx="2825496" cy="1188720"/>
+          <p:cNvPr id="12" name="Text 10"/>
+          <p:cNvSpPr/>
+          <p:nvPr/>
+        </p:nvSpPr>
+        <p:spPr>
+          <a:xfrm>
+            <a:off x="7799832" y="1828800"/>
+            <a:ext cx="3145536" cy="685800"/>
           </a:xfrm>
           <a:prstGeom prst="rect">
             <a:avLst/>
@@ -14957,18 +16267,159 @@
       </p:sp>
       <p:sp>
         <p:nvSpPr>
-          <p:cNvPr id="15" name="Shape 13"/>
-          <p:cNvSpPr/>
-          <p:nvPr/>
-        </p:nvSpPr>
-        <p:spPr>
-          <a:xfrm>
-            <a:off x="7909560" y="3520440"/>
-            <a:ext cx="3154680" cy="1737360"/>
+          <p:cNvPr id="13" name="Shape 11"/>
+          <p:cNvSpPr/>
+          <p:nvPr/>
+        </p:nvSpPr>
+        <p:spPr>
+          <a:xfrm>
+            <a:off x="7635240" y="2788920"/>
+            <a:ext cx="3474720" cy="1536192"/>
           </a:xfrm>
           <a:prstGeom prst="roundRect">
             <a:avLst>
-              <a:gd name="adj" fmla="val 6316"/>
+              <a:gd name="adj" fmla="val 7143"/>
+            </a:avLst>
+          </a:prstGeom>
+          <a:solidFill>
+            <a:srgbClr val="FFFFFF">
+              <a:alpha val="88000"/>
+            </a:srgbClr>
+          </a:solidFill>
+          <a:ln w="12700">
+            <a:solidFill>
+              <a:srgbClr val="D6E8F2"/>
+            </a:solidFill>
+            <a:prstDash val="solid"/>
+          </a:ln>
+        </p:spPr>
+      </p:sp>
+      <p:sp>
+        <p:nvSpPr>
+          <p:cNvPr id="14" name="Shape 12"/>
+          <p:cNvSpPr/>
+          <p:nvPr/>
+        </p:nvSpPr>
+        <p:spPr>
+          <a:xfrm>
+            <a:off x="8074152" y="3291840"/>
+            <a:ext cx="2596896" cy="749808"/>
+          </a:xfrm>
+          <a:prstGeom prst="rect">
+            <a:avLst/>
+          </a:prstGeom>
+          <a:solidFill>
+            <a:srgbClr val="EAF6F8"/>
+          </a:solidFill>
+          <a:ln w="12700">
+            <a:solidFill>
+              <a:srgbClr val="8ABBD8"/>
+            </a:solidFill>
+            <a:prstDash val="solid"/>
+          </a:ln>
+        </p:spPr>
+      </p:sp>
+      <p:sp>
+        <p:nvSpPr>
+          <p:cNvPr id="15" name="Shape 13"/>
+          <p:cNvSpPr/>
+          <p:nvPr/>
+        </p:nvSpPr>
+        <p:spPr>
+          <a:xfrm>
+            <a:off x="8202168" y="3721608"/>
+            <a:ext cx="2340864" cy="0"/>
+          </a:xfrm>
+          <a:prstGeom prst="line">
+            <a:avLst/>
+          </a:prstGeom>
+          <a:noFill/>
+          <a:ln w="19050">
+            <a:solidFill>
+              <a:srgbClr val="0068B7"/>
+            </a:solidFill>
+            <a:prstDash val="solid"/>
+          </a:ln>
+        </p:spPr>
+      </p:sp>
+      <p:sp>
+        <p:nvSpPr>
+          <p:cNvPr id="16" name="Shape 14"/>
+          <p:cNvSpPr/>
+          <p:nvPr/>
+        </p:nvSpPr>
+        <p:spPr>
+          <a:xfrm>
+            <a:off x="9198864" y="4206240"/>
+            <a:ext cx="347472" cy="347472"/>
+          </a:xfrm>
+          <a:prstGeom prst="ellipse">
+            <a:avLst/>
+          </a:prstGeom>
+          <a:solidFill>
+            <a:srgbClr val="2F8A28"/>
+          </a:solidFill>
+          <a:ln w="12700">
+            <a:solidFill>
+              <a:srgbClr val="2F8A28"/>
+            </a:solidFill>
+            <a:prstDash val="solid"/>
+          </a:ln>
+        </p:spPr>
+      </p:sp>
+      <p:sp>
+        <p:nvSpPr>
+          <p:cNvPr id="17" name="Text 15"/>
+          <p:cNvSpPr/>
+          <p:nvPr/>
+        </p:nvSpPr>
+        <p:spPr>
+          <a:xfrm>
+            <a:off x="7909560" y="3977640"/>
+            <a:ext cx="2926080" cy="182880"/>
+          </a:xfrm>
+          <a:prstGeom prst="rect">
+            <a:avLst/>
+          </a:prstGeom>
+          <a:noFill/>
+          <a:ln/>
+        </p:spPr>
+        <p:txBody>
+          <a:bodyPr wrap="square" lIns="0" tIns="0" rIns="0" bIns="0" rtlCol="0" anchor="ctr"/>
+          <a:lstStyle/>
+          <a:p>
+            <a:pPr algn="ctr" indent="0" marL="0">
+              <a:buNone/>
+            </a:pPr>
+            <a:r>
+              <a:rPr lang="en-US" sz="1000" dirty="0">
+                <a:solidFill>
+                  <a:srgbClr val="003A63"/>
+                </a:solidFill>
+                <a:latin typeface="Aptos" pitchFamily="34" charset="0"/>
+                <a:ea typeface="Aptos" pitchFamily="34" charset="-122"/>
+                <a:cs typeface="Aptos" pitchFamily="34" charset="-120"/>
+              </a:rPr>
+              <a:t>Concept to action</a:t>
+            </a:r>
+            <a:endParaRPr lang="en-US" sz="1000" dirty="0"/>
+          </a:p>
+        </p:txBody>
+      </p:sp>
+      <p:sp>
+        <p:nvSpPr>
+          <p:cNvPr id="18" name="Shape 16"/>
+          <p:cNvSpPr/>
+          <p:nvPr/>
+        </p:nvSpPr>
+        <p:spPr>
+          <a:xfrm>
+            <a:off x="7635240" y="4498848"/>
+            <a:ext cx="3474720" cy="1143000"/>
+          </a:xfrm>
+          <a:prstGeom prst="roundRect">
+            <a:avLst>
+              <a:gd name="adj" fmla="val 9600"/>
             </a:avLst>
           </a:prstGeom>
           <a:solidFill>
@@ -14984,14 +16435,14 @@
       </p:sp>
       <p:sp>
         <p:nvSpPr>
-          <p:cNvPr id="16" name="Text 14"/>
-          <p:cNvSpPr/>
-          <p:nvPr/>
-        </p:nvSpPr>
-        <p:spPr>
-          <a:xfrm>
-            <a:off x="8074152" y="3666744"/>
-            <a:ext cx="2825496" cy="256032"/>
+          <p:cNvPr id="19" name="Text 17"/>
+          <p:cNvSpPr/>
+          <p:nvPr/>
+        </p:nvSpPr>
+        <p:spPr>
+          <a:xfrm>
+            <a:off x="7799832" y="4645152"/>
+            <a:ext cx="3145536" cy="256032"/>
           </a:xfrm>
           <a:prstGeom prst="rect">
             <a:avLst/>
@@ -15015,7 +16466,7 @@
                 <a:ea typeface="Aptos" pitchFamily="34" charset="-122"/>
                 <a:cs typeface="Aptos" pitchFamily="34" charset="-120"/>
               </a:rPr>
-              <a:t>Use this for</a:t>
+              <a:t>Apply it</a:t>
             </a:r>
             <a:endParaRPr lang="en-US" sz="1300" dirty="0"/>
           </a:p>
@@ -15023,14 +16474,14 @@
       </p:sp>
       <p:sp>
         <p:nvSpPr>
-          <p:cNvPr id="17" name="Text 15"/>
-          <p:cNvSpPr/>
-          <p:nvPr/>
-        </p:nvSpPr>
-        <p:spPr>
-          <a:xfrm>
-            <a:off x="8074152" y="4023360"/>
-            <a:ext cx="2825496" cy="1097280"/>
+          <p:cNvPr id="20" name="Text 18"/>
+          <p:cNvSpPr/>
+          <p:nvPr/>
+        </p:nvSpPr>
+        <p:spPr>
+          <a:xfrm>
+            <a:off x="7799832" y="5001768"/>
+            <a:ext cx="3145536" cy="502920"/>
           </a:xfrm>
           <a:prstGeom prst="rect">
             <a:avLst/>
@@ -15056,7 +16507,7 @@
                 <a:ea typeface="Aptos" pitchFamily="34" charset="-122"/>
                 <a:cs typeface="Aptos" pitchFamily="34" charset="-120"/>
               </a:rPr>
-              <a:t>Connect the concept to public health decisions, safeguards, documentation, or implementation work.</a:t>
+              <a:t>Connect the concept to public health purpose, responsible use, required safeguards, documentation, and the next action a department should take.</a:t>
             </a:r>
             <a:endParaRPr lang="en-US" sz="1550" dirty="0"/>
           </a:p>
@@ -15230,8 +16681,8 @@
         </p:nvSpPr>
         <p:spPr>
           <a:xfrm>
-            <a:off x="9966960" y="6537960"/>
-            <a:ext cx="1645920" cy="201168"/>
+            <a:off x="9646920" y="6537960"/>
+            <a:ext cx="1965960" cy="201168"/>
           </a:xfrm>
           <a:prstGeom prst="rect">
             <a:avLst/>
@@ -15255,7 +16706,7 @@
                 <a:ea typeface="Aptos" pitchFamily="34" charset="-122"/>
                 <a:cs typeface="Aptos" pitchFamily="34" charset="-120"/>
               </a:rPr>
-              <a:t>Â© Paula Soper</a:t>
+              <a:t>Copyright Paula Soper</a:t>
             </a:r>
             <a:endParaRPr lang="en-US" sz="800" dirty="0"/>
           </a:p>
@@ -15302,14 +16753,257 @@
       </p:sp>
       <p:sp>
         <p:nvSpPr>
-          <p:cNvPr id="8" name="Shape 6"/>
+          <p:cNvPr id="8" name="Text 6"/>
           <p:cNvSpPr/>
           <p:nvPr/>
         </p:nvSpPr>
         <p:spPr>
           <a:xfrm>
             <a:off x="640080" y="658368"/>
-            <a:ext cx="420624" cy="420624"/>
+            <a:ext cx="10881360" cy="713232"/>
+          </a:xfrm>
+          <a:prstGeom prst="rect">
+            <a:avLst/>
+          </a:prstGeom>
+          <a:noFill/>
+          <a:ln/>
+        </p:spPr>
+        <p:txBody>
+          <a:bodyPr wrap="square" lIns="0" tIns="0" rIns="0" bIns="0" rtlCol="0" anchor="ctr">
+            <a:normAutofit/>
+          </a:bodyPr>
+          <a:lstStyle/>
+          <a:p>
+            <a:pPr indent="0" marL="0">
+              <a:buNone/>
+            </a:pPr>
+            <a:r>
+              <a:rPr lang="en-US" sz="3400" b="1" dirty="0">
+                <a:solidFill>
+                  <a:srgbClr val="003A63"/>
+                </a:solidFill>
+                <a:latin typeface="Aptos Display" pitchFamily="34" charset="0"/>
+                <a:ea typeface="Aptos Display" pitchFamily="34" charset="-122"/>
+                <a:cs typeface="Aptos Display" pitchFamily="34" charset="-120"/>
+              </a:rPr>
+              <a:t>Jurisdiction and Agency Policy Note</a:t>
+            </a:r>
+            <a:endParaRPr lang="en-US" sz="3400" dirty="0"/>
+          </a:p>
+        </p:txBody>
+      </p:sp>
+      <p:sp>
+        <p:nvSpPr>
+          <p:cNvPr id="9" name="Text 7"/>
+          <p:cNvSpPr/>
+          <p:nvPr/>
+        </p:nvSpPr>
+        <p:spPr>
+          <a:xfrm>
+            <a:off x="868680" y="1508760"/>
+            <a:ext cx="6309360" cy="4160520"/>
+          </a:xfrm>
+          <a:prstGeom prst="rect">
+            <a:avLst/>
+          </a:prstGeom>
+          <a:noFill/>
+          <a:ln/>
+        </p:spPr>
+        <p:txBody>
+          <a:bodyPr wrap="square" lIns="635" tIns="635" rIns="635" bIns="635" rtlCol="0" anchor="t">
+            <a:normAutofit/>
+          </a:bodyPr>
+          <a:lstStyle/>
+          <a:p>
+            <a:r>
+              <a:rPr lang="en-US" sz="2100" dirty="0">
+                <a:solidFill>
+                  <a:srgbClr val="17364A"/>
+                </a:solidFill>
+                <a:latin typeface="Aptos" pitchFamily="34" charset="0"/>
+                <a:ea typeface="Aptos" pitchFamily="34" charset="-122"/>
+                <a:cs typeface="Aptos" pitchFamily="34" charset="-120"/>
+              </a:rPr>
+              <a:t>This national-level module is intended for training and planning purposes.</a:t>
+            </a:r>
+            <a:endParaRPr lang="en-US" sz="2100" dirty="0"/>
+          </a:p>
+          <a:p>
+            <a:r>
+              <a:rPr lang="en-US" sz="2100" dirty="0">
+                <a:solidFill>
+                  <a:srgbClr val="17364A"/>
+                </a:solidFill>
+                <a:latin typeface="Aptos" pitchFamily="34" charset="0"/>
+                <a:ea typeface="Aptos" pitchFamily="34" charset="-122"/>
+                <a:cs typeface="Aptos" pitchFamily="34" charset="-120"/>
+              </a:rPr>
+              <a:t>It does not replace legal, privacy, procurement, civil rights, records, or agency policy review.</a:t>
+            </a:r>
+            <a:endParaRPr lang="en-US" sz="2100" dirty="0"/>
+          </a:p>
+          <a:p>
+            <a:r>
+              <a:rPr lang="en-US" sz="2100" dirty="0">
+                <a:solidFill>
+                  <a:srgbClr val="17364A"/>
+                </a:solidFill>
+                <a:latin typeface="Aptos" pitchFamily="34" charset="0"/>
+                <a:ea typeface="Aptos" pitchFamily="34" charset="-122"/>
+                <a:cs typeface="Aptos" pitchFamily="34" charset="-120"/>
+              </a:rPr>
+              <a:t>Learners should confirm applicable requirements in their own jurisdiction and organization before.</a:t>
+            </a:r>
+            <a:endParaRPr lang="en-US" sz="2100" dirty="0"/>
+          </a:p>
+        </p:txBody>
+      </p:sp>
+      <p:sp>
+        <p:nvSpPr>
+          <p:cNvPr id="10" name="Shape 8"/>
+          <p:cNvSpPr/>
+          <p:nvPr/>
+        </p:nvSpPr>
+        <p:spPr>
+          <a:xfrm>
+            <a:off x="7635240" y="1325880"/>
+            <a:ext cx="3474720" cy="1325880"/>
+          </a:xfrm>
+          <a:prstGeom prst="roundRect">
+            <a:avLst>
+              <a:gd name="adj" fmla="val 8276"/>
+            </a:avLst>
+          </a:prstGeom>
+          <a:solidFill>
+            <a:srgbClr val="EEF8ED"/>
+          </a:solidFill>
+          <a:ln w="12700">
+            <a:solidFill>
+              <a:srgbClr val="B9D7E6"/>
+            </a:solidFill>
+            <a:prstDash val="solid"/>
+          </a:ln>
+        </p:spPr>
+      </p:sp>
+      <p:sp>
+        <p:nvSpPr>
+          <p:cNvPr id="11" name="Text 9"/>
+          <p:cNvSpPr/>
+          <p:nvPr/>
+        </p:nvSpPr>
+        <p:spPr>
+          <a:xfrm>
+            <a:off x="7799832" y="1472184"/>
+            <a:ext cx="3145536" cy="256032"/>
+          </a:xfrm>
+          <a:prstGeom prst="rect">
+            <a:avLst/>
+          </a:prstGeom>
+          <a:noFill/>
+          <a:ln/>
+        </p:spPr>
+        <p:txBody>
+          <a:bodyPr wrap="square" lIns="0" tIns="0" rIns="0" bIns="0" rtlCol="0" anchor="ctr"/>
+          <a:lstStyle/>
+          <a:p>
+            <a:pPr indent="0" marL="0">
+              <a:buNone/>
+            </a:pPr>
+            <a:r>
+              <a:rPr lang="en-US" sz="1300" b="1" dirty="0">
+                <a:solidFill>
+                  <a:srgbClr val="0068B7"/>
+                </a:solidFill>
+                <a:latin typeface="Aptos" pitchFamily="34" charset="0"/>
+                <a:ea typeface="Aptos" pitchFamily="34" charset="-122"/>
+                <a:cs typeface="Aptos" pitchFamily="34" charset="-120"/>
+              </a:rPr>
+              <a:t>Governance lens</a:t>
+            </a:r>
+            <a:endParaRPr lang="en-US" sz="1300" dirty="0"/>
+          </a:p>
+        </p:txBody>
+      </p:sp>
+      <p:sp>
+        <p:nvSpPr>
+          <p:cNvPr id="12" name="Text 10"/>
+          <p:cNvSpPr/>
+          <p:nvPr/>
+        </p:nvSpPr>
+        <p:spPr>
+          <a:xfrm>
+            <a:off x="7799832" y="1828800"/>
+            <a:ext cx="3145536" cy="685800"/>
+          </a:xfrm>
+          <a:prstGeom prst="rect">
+            <a:avLst/>
+          </a:prstGeom>
+          <a:noFill/>
+          <a:ln/>
+        </p:spPr>
+        <p:txBody>
+          <a:bodyPr wrap="square" lIns="0" tIns="0" rIns="0" bIns="0" rtlCol="0" anchor="t">
+            <a:normAutofit/>
+          </a:bodyPr>
+          <a:lstStyle/>
+          <a:p>
+            <a:pPr indent="0" marL="0">
+              <a:buNone/>
+            </a:pPr>
+            <a:r>
+              <a:rPr lang="en-US" sz="1550" dirty="0">
+                <a:solidFill>
+                  <a:srgbClr val="17364A"/>
+                </a:solidFill>
+                <a:latin typeface="Aptos" pitchFamily="34" charset="0"/>
+                <a:ea typeface="Aptos" pitchFamily="34" charset="-122"/>
+                <a:cs typeface="Aptos" pitchFamily="34" charset="-120"/>
+              </a:rPr>
+              <a:t>This national-level module is intended for training and planning purposes.</a:t>
+            </a:r>
+            <a:endParaRPr lang="en-US" sz="1550" dirty="0"/>
+          </a:p>
+        </p:txBody>
+      </p:sp>
+      <p:sp>
+        <p:nvSpPr>
+          <p:cNvPr id="13" name="Shape 11"/>
+          <p:cNvSpPr/>
+          <p:nvPr/>
+        </p:nvSpPr>
+        <p:spPr>
+          <a:xfrm>
+            <a:off x="7635240" y="2788920"/>
+            <a:ext cx="3474720" cy="1536192"/>
+          </a:xfrm>
+          <a:prstGeom prst="roundRect">
+            <a:avLst>
+              <a:gd name="adj" fmla="val 7143"/>
+            </a:avLst>
+          </a:prstGeom>
+          <a:solidFill>
+            <a:srgbClr val="FFFFFF">
+              <a:alpha val="88000"/>
+            </a:srgbClr>
+          </a:solidFill>
+          <a:ln w="12700">
+            <a:solidFill>
+              <a:srgbClr val="D6E8F2"/>
+            </a:solidFill>
+            <a:prstDash val="solid"/>
+          </a:ln>
+        </p:spPr>
+      </p:sp>
+      <p:sp>
+        <p:nvSpPr>
+          <p:cNvPr id="14" name="Shape 12"/>
+          <p:cNvSpPr/>
+          <p:nvPr/>
+        </p:nvSpPr>
+        <p:spPr>
+          <a:xfrm>
+            <a:off x="7891272" y="3108960"/>
+            <a:ext cx="566928" cy="566928"/>
           </a:xfrm>
           <a:prstGeom prst="ellipse">
             <a:avLst/>
@@ -15327,172 +17021,24 @@
       </p:sp>
       <p:sp>
         <p:nvSpPr>
-          <p:cNvPr id="9" name="Text 7"/>
-          <p:cNvSpPr/>
-          <p:nvPr/>
-        </p:nvSpPr>
-        <p:spPr>
-          <a:xfrm>
-            <a:off x="640080" y="731520"/>
-            <a:ext cx="420624" cy="164592"/>
-          </a:xfrm>
-          <a:prstGeom prst="rect">
-            <a:avLst/>
-          </a:prstGeom>
-          <a:noFill/>
-          <a:ln/>
-        </p:spPr>
-        <p:txBody>
-          <a:bodyPr wrap="square" lIns="0" tIns="0" rIns="0" bIns="0" rtlCol="0" anchor="ctr"/>
-          <a:lstStyle/>
-          <a:p>
-            <a:pPr algn="ctr" indent="0" marL="0">
-              <a:buNone/>
-            </a:pPr>
-            <a:r>
-              <a:rPr lang="en-US" sz="1100" b="1" dirty="0">
-                <a:solidFill>
-                  <a:srgbClr val="FFFFFF"/>
-                </a:solidFill>
-                <a:latin typeface="Aptos" pitchFamily="34" charset="0"/>
-                <a:ea typeface="Aptos" pitchFamily="34" charset="-122"/>
-                <a:cs typeface="Aptos" pitchFamily="34" charset="-120"/>
-              </a:rPr>
-              <a:t>3</a:t>
-            </a:r>
-            <a:endParaRPr lang="en-US" sz="1100" dirty="0"/>
-          </a:p>
-        </p:txBody>
-      </p:sp>
-      <p:sp>
-        <p:nvSpPr>
-          <p:cNvPr id="10" name="Text 8"/>
-          <p:cNvSpPr/>
-          <p:nvPr/>
-        </p:nvSpPr>
-        <p:spPr>
-          <a:xfrm>
-            <a:off x="640080" y="621792"/>
-            <a:ext cx="10881360" cy="713232"/>
-          </a:xfrm>
-          <a:prstGeom prst="rect">
-            <a:avLst/>
-          </a:prstGeom>
-          <a:noFill/>
-          <a:ln/>
-        </p:spPr>
-        <p:txBody>
-          <a:bodyPr wrap="square" lIns="0" tIns="0" rIns="0" bIns="0" rtlCol="0" anchor="ctr">
-            <a:normAutofit/>
-          </a:bodyPr>
-          <a:lstStyle/>
-          <a:p>
-            <a:pPr indent="0" marL="0">
-              <a:buNone/>
-            </a:pPr>
-            <a:r>
-              <a:rPr lang="en-US" sz="3400" b="1" dirty="0">
-                <a:solidFill>
-                  <a:srgbClr val="003A63"/>
-                </a:solidFill>
-                <a:latin typeface="Aptos Display" pitchFamily="34" charset="0"/>
-                <a:ea typeface="Aptos Display" pitchFamily="34" charset="-122"/>
-                <a:cs typeface="Aptos Display" pitchFamily="34" charset="-120"/>
-              </a:rPr>
-              <a:t>Jurisdiction and Agency Policy Note</a:t>
-            </a:r>
-            <a:endParaRPr lang="en-US" sz="3400" dirty="0"/>
-          </a:p>
-        </p:txBody>
-      </p:sp>
-      <p:sp>
-        <p:nvSpPr>
-          <p:cNvPr id="11" name="Text 9"/>
-          <p:cNvSpPr/>
-          <p:nvPr/>
-        </p:nvSpPr>
-        <p:spPr>
-          <a:xfrm>
-            <a:off x="868680" y="1508760"/>
-            <a:ext cx="6537960" cy="4160520"/>
-          </a:xfrm>
-          <a:prstGeom prst="rect">
-            <a:avLst/>
-          </a:prstGeom>
-          <a:noFill/>
-          <a:ln/>
-        </p:spPr>
-        <p:txBody>
-          <a:bodyPr wrap="square" lIns="635" tIns="635" rIns="635" bIns="635" rtlCol="0" anchor="t">
-            <a:normAutofit/>
-          </a:bodyPr>
-          <a:lstStyle/>
-          <a:p>
-            <a:r>
-              <a:rPr lang="en-US" sz="2100" dirty="0">
-                <a:solidFill>
-                  <a:srgbClr val="17364A"/>
-                </a:solidFill>
-                <a:latin typeface="Aptos" pitchFamily="34" charset="0"/>
-                <a:ea typeface="Aptos" pitchFamily="34" charset="-122"/>
-                <a:cs typeface="Aptos" pitchFamily="34" charset="-120"/>
-              </a:rPr>
-              <a:t>This national-level module is intended for training and planning purposes.</a:t>
-            </a:r>
-            <a:endParaRPr lang="en-US" sz="2100" dirty="0"/>
-          </a:p>
-          <a:p>
-            <a:r>
-              <a:rPr lang="en-US" sz="2100" dirty="0">
-                <a:solidFill>
-                  <a:srgbClr val="17364A"/>
-                </a:solidFill>
-                <a:latin typeface="Aptos" pitchFamily="34" charset="0"/>
-                <a:ea typeface="Aptos" pitchFamily="34" charset="-122"/>
-                <a:cs typeface="Aptos" pitchFamily="34" charset="-120"/>
-              </a:rPr>
-              <a:t>It does not replace legal, privacy, procurement, civil rights, records, or agency policy review.</a:t>
-            </a:r>
-            <a:endParaRPr lang="en-US" sz="2100" dirty="0"/>
-          </a:p>
-          <a:p>
-            <a:r>
-              <a:rPr lang="en-US" sz="2100" dirty="0">
-                <a:solidFill>
-                  <a:srgbClr val="17364A"/>
-                </a:solidFill>
-                <a:latin typeface="Aptos" pitchFamily="34" charset="0"/>
-                <a:ea typeface="Aptos" pitchFamily="34" charset="-122"/>
-                <a:cs typeface="Aptos" pitchFamily="34" charset="-120"/>
-              </a:rPr>
-              <a:t>Learners should confirm applicable requirements in their own jurisdiction and organization before.</a:t>
-            </a:r>
-            <a:endParaRPr lang="en-US" sz="2100" dirty="0"/>
-          </a:p>
-        </p:txBody>
-      </p:sp>
-      <p:sp>
-        <p:nvSpPr>
-          <p:cNvPr id="12" name="Shape 10"/>
-          <p:cNvSpPr/>
-          <p:nvPr/>
-        </p:nvSpPr>
-        <p:spPr>
-          <a:xfrm>
-            <a:off x="7909560" y="1417320"/>
-            <a:ext cx="3154680" cy="1828800"/>
-          </a:xfrm>
-          <a:prstGeom prst="roundRect">
-            <a:avLst>
-              <a:gd name="adj" fmla="val 6000"/>
-            </a:avLst>
+          <p:cNvPr id="15" name="Shape 13"/>
+          <p:cNvSpPr/>
+          <p:nvPr/>
+        </p:nvSpPr>
+        <p:spPr>
+          <a:xfrm>
+            <a:off x="10287000" y="3108960"/>
+            <a:ext cx="566928" cy="566928"/>
+          </a:xfrm>
+          <a:prstGeom prst="ellipse">
+            <a:avLst/>
           </a:prstGeom>
           <a:solidFill>
-            <a:srgbClr val="EEF8ED"/>
+            <a:srgbClr val="2F8A28"/>
           </a:solidFill>
           <a:ln w="12700">
             <a:solidFill>
-              <a:srgbClr val="B9D7E6"/>
+              <a:srgbClr val="2F8A28"/>
             </a:solidFill>
             <a:prstDash val="solid"/>
           </a:ln>
@@ -15500,14 +17046,108 @@
       </p:sp>
       <p:sp>
         <p:nvSpPr>
-          <p:cNvPr id="13" name="Text 11"/>
-          <p:cNvSpPr/>
-          <p:nvPr/>
-        </p:nvSpPr>
-        <p:spPr>
-          <a:xfrm>
-            <a:off x="8074152" y="1563624"/>
-            <a:ext cx="2825496" cy="256032"/>
+          <p:cNvPr id="16" name="Shape 14"/>
+          <p:cNvSpPr/>
+          <p:nvPr/>
+        </p:nvSpPr>
+        <p:spPr>
+          <a:xfrm>
+            <a:off x="9089136" y="3456432"/>
+            <a:ext cx="566928" cy="566928"/>
+          </a:xfrm>
+          <a:prstGeom prst="ellipse">
+            <a:avLst/>
+          </a:prstGeom>
+          <a:solidFill>
+            <a:srgbClr val="6A4CA3"/>
+          </a:solidFill>
+          <a:ln w="12700">
+            <a:solidFill>
+              <a:srgbClr val="6A4CA3"/>
+            </a:solidFill>
+            <a:prstDash val="solid"/>
+          </a:ln>
+        </p:spPr>
+      </p:sp>
+      <p:sp>
+        <p:nvSpPr>
+          <p:cNvPr id="17" name="Shape 15"/>
+          <p:cNvSpPr/>
+          <p:nvPr/>
+        </p:nvSpPr>
+        <p:spPr>
+          <a:xfrm>
+            <a:off x="8385048" y="3419856"/>
+            <a:ext cx="1975104" cy="0"/>
+          </a:xfrm>
+          <a:prstGeom prst="line">
+            <a:avLst/>
+          </a:prstGeom>
+          <a:noFill/>
+          <a:ln w="25400">
+            <a:solidFill>
+              <a:srgbClr val="8ABBD8"/>
+            </a:solidFill>
+            <a:prstDash val="solid"/>
+          </a:ln>
+        </p:spPr>
+      </p:sp>
+      <p:sp>
+        <p:nvSpPr>
+          <p:cNvPr id="18" name="Shape 16"/>
+          <p:cNvSpPr/>
+          <p:nvPr/>
+        </p:nvSpPr>
+        <p:spPr>
+          <a:xfrm>
+            <a:off x="8202168" y="3630168"/>
+            <a:ext cx="1170432" cy="118872"/>
+          </a:xfrm>
+          <a:prstGeom prst="line">
+            <a:avLst/>
+          </a:prstGeom>
+          <a:noFill/>
+          <a:ln w="25400">
+            <a:solidFill>
+              <a:srgbClr val="8ABBD8"/>
+            </a:solidFill>
+            <a:prstDash val="solid"/>
+          </a:ln>
+        </p:spPr>
+      </p:sp>
+      <p:sp>
+        <p:nvSpPr>
+          <p:cNvPr id="19" name="Shape 17"/>
+          <p:cNvSpPr/>
+          <p:nvPr/>
+        </p:nvSpPr>
+        <p:spPr>
+          <a:xfrm>
+            <a:off x="10543032" y="3630168"/>
+            <a:ext cx="-1170432" cy="118872"/>
+          </a:xfrm>
+          <a:prstGeom prst="line">
+            <a:avLst/>
+          </a:prstGeom>
+          <a:noFill/>
+          <a:ln w="25400">
+            <a:solidFill>
+              <a:srgbClr val="8ABBD8"/>
+            </a:solidFill>
+            <a:prstDash val="solid"/>
+          </a:ln>
+        </p:spPr>
+      </p:sp>
+      <p:sp>
+        <p:nvSpPr>
+          <p:cNvPr id="20" name="Text 18"/>
+          <p:cNvSpPr/>
+          <p:nvPr/>
+        </p:nvSpPr>
+        <p:spPr>
+          <a:xfrm>
+            <a:off x="7863840" y="4069080"/>
+            <a:ext cx="3017520" cy="164592"/>
           </a:xfrm>
           <a:prstGeom prst="rect">
             <a:avLst/>
@@ -15519,79 +17159,38 @@
           <a:bodyPr wrap="square" lIns="0" tIns="0" rIns="0" bIns="0" rtlCol="0" anchor="ctr"/>
           <a:lstStyle/>
           <a:p>
-            <a:pPr indent="0" marL="0">
-              <a:buNone/>
-            </a:pPr>
-            <a:r>
-              <a:rPr lang="en-US" sz="1300" b="1" dirty="0">
-                <a:solidFill>
-                  <a:srgbClr val="0068B7"/>
-                </a:solidFill>
-                <a:latin typeface="Aptos" pitchFamily="34" charset="0"/>
-                <a:ea typeface="Aptos" pitchFamily="34" charset="-122"/>
-                <a:cs typeface="Aptos" pitchFamily="34" charset="-120"/>
-              </a:rPr>
-              <a:t>Key idea</a:t>
-            </a:r>
-            <a:endParaRPr lang="en-US" sz="1300" dirty="0"/>
-          </a:p>
-        </p:txBody>
-      </p:sp>
-      <p:sp>
-        <p:nvSpPr>
-          <p:cNvPr id="14" name="Text 12"/>
-          <p:cNvSpPr/>
-          <p:nvPr/>
-        </p:nvSpPr>
-        <p:spPr>
-          <a:xfrm>
-            <a:off x="8074152" y="1920240"/>
-            <a:ext cx="2825496" cy="1188720"/>
-          </a:xfrm>
-          <a:prstGeom prst="rect">
-            <a:avLst/>
-          </a:prstGeom>
-          <a:noFill/>
-          <a:ln/>
-        </p:spPr>
-        <p:txBody>
-          <a:bodyPr wrap="square" lIns="0" tIns="0" rIns="0" bIns="0" rtlCol="0" anchor="t">
-            <a:normAutofit/>
-          </a:bodyPr>
-          <a:lstStyle/>
-          <a:p>
-            <a:pPr indent="0" marL="0">
-              <a:buNone/>
-            </a:pPr>
-            <a:r>
-              <a:rPr lang="en-US" sz="1550" dirty="0">
-                <a:solidFill>
-                  <a:srgbClr val="17364A"/>
-                </a:solidFill>
-                <a:latin typeface="Aptos" pitchFamily="34" charset="0"/>
-                <a:ea typeface="Aptos" pitchFamily="34" charset="-122"/>
-                <a:cs typeface="Aptos" pitchFamily="34" charset="-120"/>
-              </a:rPr>
-              <a:t>This national-level module is intended for training and planning purposes.</a:t>
-            </a:r>
-            <a:endParaRPr lang="en-US" sz="1550" dirty="0"/>
-          </a:p>
-        </p:txBody>
-      </p:sp>
-      <p:sp>
-        <p:nvSpPr>
-          <p:cNvPr id="15" name="Shape 13"/>
-          <p:cNvSpPr/>
-          <p:nvPr/>
-        </p:nvSpPr>
-        <p:spPr>
-          <a:xfrm>
-            <a:off x="7909560" y="3520440"/>
-            <a:ext cx="3154680" cy="1737360"/>
+            <a:pPr algn="ctr" indent="0" marL="0">
+              <a:buNone/>
+            </a:pPr>
+            <a:r>
+              <a:rPr lang="en-US" sz="900" b="1" dirty="0">
+                <a:solidFill>
+                  <a:srgbClr val="003A63"/>
+                </a:solidFill>
+                <a:latin typeface="Aptos" pitchFamily="34" charset="0"/>
+                <a:ea typeface="Aptos" pitchFamily="34" charset="-122"/>
+                <a:cs typeface="Aptos" pitchFamily="34" charset="-120"/>
+              </a:rPr>
+              <a:t>Decision rights</a:t>
+            </a:r>
+            <a:endParaRPr lang="en-US" sz="900" dirty="0"/>
+          </a:p>
+        </p:txBody>
+      </p:sp>
+      <p:sp>
+        <p:nvSpPr>
+          <p:cNvPr id="21" name="Shape 19"/>
+          <p:cNvSpPr/>
+          <p:nvPr/>
+        </p:nvSpPr>
+        <p:spPr>
+          <a:xfrm>
+            <a:off x="7635240" y="4498848"/>
+            <a:ext cx="3474720" cy="1143000"/>
           </a:xfrm>
           <a:prstGeom prst="roundRect">
             <a:avLst>
-              <a:gd name="adj" fmla="val 6316"/>
+              <a:gd name="adj" fmla="val 9600"/>
             </a:avLst>
           </a:prstGeom>
           <a:solidFill>
@@ -15607,14 +17206,14 @@
       </p:sp>
       <p:sp>
         <p:nvSpPr>
-          <p:cNvPr id="16" name="Text 14"/>
-          <p:cNvSpPr/>
-          <p:nvPr/>
-        </p:nvSpPr>
-        <p:spPr>
-          <a:xfrm>
-            <a:off x="8074152" y="3666744"/>
-            <a:ext cx="2825496" cy="256032"/>
+          <p:cNvPr id="22" name="Text 20"/>
+          <p:cNvSpPr/>
+          <p:nvPr/>
+        </p:nvSpPr>
+        <p:spPr>
+          <a:xfrm>
+            <a:off x="7799832" y="4645152"/>
+            <a:ext cx="3145536" cy="256032"/>
           </a:xfrm>
           <a:prstGeom prst="rect">
             <a:avLst/>
@@ -15638,7 +17237,7 @@
                 <a:ea typeface="Aptos" pitchFamily="34" charset="-122"/>
                 <a:cs typeface="Aptos" pitchFamily="34" charset="-120"/>
               </a:rPr>
-              <a:t>Use this for</a:t>
+              <a:t>What to document</a:t>
             </a:r>
             <a:endParaRPr lang="en-US" sz="1300" dirty="0"/>
           </a:p>
@@ -15646,14 +17245,14 @@
       </p:sp>
       <p:sp>
         <p:nvSpPr>
-          <p:cNvPr id="17" name="Text 15"/>
-          <p:cNvSpPr/>
-          <p:nvPr/>
-        </p:nvSpPr>
-        <p:spPr>
-          <a:xfrm>
-            <a:off x="8074152" y="4023360"/>
-            <a:ext cx="2825496" cy="1097280"/>
+          <p:cNvPr id="23" name="Text 21"/>
+          <p:cNvSpPr/>
+          <p:nvPr/>
+        </p:nvSpPr>
+        <p:spPr>
+          <a:xfrm>
+            <a:off x="7799832" y="5001768"/>
+            <a:ext cx="3145536" cy="502920"/>
           </a:xfrm>
           <a:prstGeom prst="rect">
             <a:avLst/>
@@ -15679,7 +17278,7 @@
                 <a:ea typeface="Aptos" pitchFamily="34" charset="-122"/>
                 <a:cs typeface="Aptos" pitchFamily="34" charset="-120"/>
               </a:rPr>
-              <a:t>Connect the concept to public health decisions, safeguards, documentation, or implementation work.</a:t>
+              <a:t>Translate this concept into clear decision rights, review steps, documentation expectations, and escalation paths before an AI-supported workflow is approved.</a:t>
             </a:r>
             <a:endParaRPr lang="en-US" sz="1550" dirty="0"/>
           </a:p>
@@ -15853,8 +17452,8 @@
         </p:nvSpPr>
         <p:spPr>
           <a:xfrm>
-            <a:off x="9966960" y="6537960"/>
-            <a:ext cx="1645920" cy="201168"/>
+            <a:off x="9646920" y="6537960"/>
+            <a:ext cx="1965960" cy="201168"/>
           </a:xfrm>
           <a:prstGeom prst="rect">
             <a:avLst/>
@@ -15878,7 +17477,7 @@
                 <a:ea typeface="Aptos" pitchFamily="34" charset="-122"/>
                 <a:cs typeface="Aptos" pitchFamily="34" charset="-120"/>
               </a:rPr>
-              <a:t>Â© Paula Soper</a:t>
+              <a:t>Copyright Paula Soper</a:t>
             </a:r>
             <a:endParaRPr lang="en-US" sz="800" dirty="0"/>
           </a:p>
@@ -15925,77 +17524,13 @@
       </p:sp>
       <p:sp>
         <p:nvSpPr>
-          <p:cNvPr id="8" name="Shape 6"/>
+          <p:cNvPr id="8" name="Text 6"/>
           <p:cNvSpPr/>
           <p:nvPr/>
         </p:nvSpPr>
         <p:spPr>
           <a:xfrm>
             <a:off x="640080" y="658368"/>
-            <a:ext cx="420624" cy="420624"/>
-          </a:xfrm>
-          <a:prstGeom prst="ellipse">
-            <a:avLst/>
-          </a:prstGeom>
-          <a:solidFill>
-            <a:srgbClr val="0068B7"/>
-          </a:solidFill>
-          <a:ln w="12700">
-            <a:solidFill>
-              <a:srgbClr val="0068B7"/>
-            </a:solidFill>
-            <a:prstDash val="solid"/>
-          </a:ln>
-        </p:spPr>
-      </p:sp>
-      <p:sp>
-        <p:nvSpPr>
-          <p:cNvPr id="9" name="Text 7"/>
-          <p:cNvSpPr/>
-          <p:nvPr/>
-        </p:nvSpPr>
-        <p:spPr>
-          <a:xfrm>
-            <a:off x="640080" y="731520"/>
-            <a:ext cx="420624" cy="164592"/>
-          </a:xfrm>
-          <a:prstGeom prst="rect">
-            <a:avLst/>
-          </a:prstGeom>
-          <a:noFill/>
-          <a:ln/>
-        </p:spPr>
-        <p:txBody>
-          <a:bodyPr wrap="square" lIns="0" tIns="0" rIns="0" bIns="0" rtlCol="0" anchor="ctr"/>
-          <a:lstStyle/>
-          <a:p>
-            <a:pPr algn="ctr" indent="0" marL="0">
-              <a:buNone/>
-            </a:pPr>
-            <a:r>
-              <a:rPr lang="en-US" sz="1100" b="1" dirty="0">
-                <a:solidFill>
-                  <a:srgbClr val="FFFFFF"/>
-                </a:solidFill>
-                <a:latin typeface="Aptos" pitchFamily="34" charset="0"/>
-                <a:ea typeface="Aptos" pitchFamily="34" charset="-122"/>
-                <a:cs typeface="Aptos" pitchFamily="34" charset="-120"/>
-              </a:rPr>
-              <a:t>4</a:t>
-            </a:r>
-            <a:endParaRPr lang="en-US" sz="1100" dirty="0"/>
-          </a:p>
-        </p:txBody>
-      </p:sp>
-      <p:sp>
-        <p:nvSpPr>
-          <p:cNvPr id="10" name="Text 8"/>
-          <p:cNvSpPr/>
-          <p:nvPr/>
-        </p:nvSpPr>
-        <p:spPr>
-          <a:xfrm>
-            <a:off x="640080" y="621792"/>
             <a:ext cx="10881360" cy="713232"/>
           </a:xfrm>
           <a:prstGeom prst="rect">
@@ -16030,14 +17565,14 @@
       </p:sp>
       <p:sp>
         <p:nvSpPr>
-          <p:cNvPr id="11" name="Text 9"/>
+          <p:cNvPr id="9" name="Text 7"/>
           <p:cNvSpPr/>
           <p:nvPr/>
         </p:nvSpPr>
         <p:spPr>
           <a:xfrm>
             <a:off x="868680" y="1508760"/>
-            <a:ext cx="6537960" cy="4160520"/>
+            <a:ext cx="6309360" cy="4160520"/>
           </a:xfrm>
           <a:prstGeom prst="rect">
             <a:avLst/>
@@ -16096,18 +17631,18 @@
       </p:sp>
       <p:sp>
         <p:nvSpPr>
-          <p:cNvPr id="12" name="Shape 10"/>
-          <p:cNvSpPr/>
-          <p:nvPr/>
-        </p:nvSpPr>
-        <p:spPr>
-          <a:xfrm>
-            <a:off x="7909560" y="1417320"/>
-            <a:ext cx="3154680" cy="1828800"/>
+          <p:cNvPr id="10" name="Shape 8"/>
+          <p:cNvSpPr/>
+          <p:nvPr/>
+        </p:nvSpPr>
+        <p:spPr>
+          <a:xfrm>
+            <a:off x="7635240" y="1325880"/>
+            <a:ext cx="3474720" cy="1325880"/>
           </a:xfrm>
           <a:prstGeom prst="roundRect">
             <a:avLst>
-              <a:gd name="adj" fmla="val 6000"/>
+              <a:gd name="adj" fmla="val 8276"/>
             </a:avLst>
           </a:prstGeom>
           <a:solidFill>
@@ -16123,14 +17658,14 @@
       </p:sp>
       <p:sp>
         <p:nvSpPr>
-          <p:cNvPr id="13" name="Text 11"/>
-          <p:cNvSpPr/>
-          <p:nvPr/>
-        </p:nvSpPr>
-        <p:spPr>
-          <a:xfrm>
-            <a:off x="8074152" y="1563624"/>
-            <a:ext cx="2825496" cy="256032"/>
+          <p:cNvPr id="11" name="Text 9"/>
+          <p:cNvSpPr/>
+          <p:nvPr/>
+        </p:nvSpPr>
+        <p:spPr>
+          <a:xfrm>
+            <a:off x="7799832" y="1472184"/>
+            <a:ext cx="3145536" cy="256032"/>
           </a:xfrm>
           <a:prstGeom prst="rect">
             <a:avLst/>
@@ -16154,7 +17689,7 @@
                 <a:ea typeface="Aptos" pitchFamily="34" charset="-122"/>
                 <a:cs typeface="Aptos" pitchFamily="34" charset="-120"/>
               </a:rPr>
-              <a:t>Key idea</a:t>
+              <a:t>Core concept</a:t>
             </a:r>
             <a:endParaRPr lang="en-US" sz="1300" dirty="0"/>
           </a:p>
@@ -16162,14 +17697,14 @@
       </p:sp>
       <p:sp>
         <p:nvSpPr>
-          <p:cNvPr id="14" name="Text 12"/>
-          <p:cNvSpPr/>
-          <p:nvPr/>
-        </p:nvSpPr>
-        <p:spPr>
-          <a:xfrm>
-            <a:off x="8074152" y="1920240"/>
-            <a:ext cx="2825496" cy="1188720"/>
+          <p:cNvPr id="12" name="Text 10"/>
+          <p:cNvSpPr/>
+          <p:nvPr/>
+        </p:nvSpPr>
+        <p:spPr>
+          <a:xfrm>
+            <a:off x="7799832" y="1828800"/>
+            <a:ext cx="3145536" cy="685800"/>
           </a:xfrm>
           <a:prstGeom prst="rect">
             <a:avLst/>
@@ -16203,18 +17738,159 @@
       </p:sp>
       <p:sp>
         <p:nvSpPr>
-          <p:cNvPr id="15" name="Shape 13"/>
-          <p:cNvSpPr/>
-          <p:nvPr/>
-        </p:nvSpPr>
-        <p:spPr>
-          <a:xfrm>
-            <a:off x="7909560" y="3520440"/>
-            <a:ext cx="3154680" cy="1737360"/>
+          <p:cNvPr id="13" name="Shape 11"/>
+          <p:cNvSpPr/>
+          <p:nvPr/>
+        </p:nvSpPr>
+        <p:spPr>
+          <a:xfrm>
+            <a:off x="7635240" y="2788920"/>
+            <a:ext cx="3474720" cy="1536192"/>
           </a:xfrm>
           <a:prstGeom prst="roundRect">
             <a:avLst>
-              <a:gd name="adj" fmla="val 6316"/>
+              <a:gd name="adj" fmla="val 7143"/>
+            </a:avLst>
+          </a:prstGeom>
+          <a:solidFill>
+            <a:srgbClr val="FFFFFF">
+              <a:alpha val="88000"/>
+            </a:srgbClr>
+          </a:solidFill>
+          <a:ln w="12700">
+            <a:solidFill>
+              <a:srgbClr val="D6E8F2"/>
+            </a:solidFill>
+            <a:prstDash val="solid"/>
+          </a:ln>
+        </p:spPr>
+      </p:sp>
+      <p:sp>
+        <p:nvSpPr>
+          <p:cNvPr id="14" name="Shape 12"/>
+          <p:cNvSpPr/>
+          <p:nvPr/>
+        </p:nvSpPr>
+        <p:spPr>
+          <a:xfrm>
+            <a:off x="8074152" y="3291840"/>
+            <a:ext cx="2596896" cy="749808"/>
+          </a:xfrm>
+          <a:prstGeom prst="rect">
+            <a:avLst/>
+          </a:prstGeom>
+          <a:solidFill>
+            <a:srgbClr val="EAF6F8"/>
+          </a:solidFill>
+          <a:ln w="12700">
+            <a:solidFill>
+              <a:srgbClr val="8ABBD8"/>
+            </a:solidFill>
+            <a:prstDash val="solid"/>
+          </a:ln>
+        </p:spPr>
+      </p:sp>
+      <p:sp>
+        <p:nvSpPr>
+          <p:cNvPr id="15" name="Shape 13"/>
+          <p:cNvSpPr/>
+          <p:nvPr/>
+        </p:nvSpPr>
+        <p:spPr>
+          <a:xfrm>
+            <a:off x="8202168" y="3721608"/>
+            <a:ext cx="2340864" cy="0"/>
+          </a:xfrm>
+          <a:prstGeom prst="line">
+            <a:avLst/>
+          </a:prstGeom>
+          <a:noFill/>
+          <a:ln w="19050">
+            <a:solidFill>
+              <a:srgbClr val="0068B7"/>
+            </a:solidFill>
+            <a:prstDash val="solid"/>
+          </a:ln>
+        </p:spPr>
+      </p:sp>
+      <p:sp>
+        <p:nvSpPr>
+          <p:cNvPr id="16" name="Shape 14"/>
+          <p:cNvSpPr/>
+          <p:nvPr/>
+        </p:nvSpPr>
+        <p:spPr>
+          <a:xfrm>
+            <a:off x="9198864" y="4206240"/>
+            <a:ext cx="347472" cy="347472"/>
+          </a:xfrm>
+          <a:prstGeom prst="ellipse">
+            <a:avLst/>
+          </a:prstGeom>
+          <a:solidFill>
+            <a:srgbClr val="2F8A28"/>
+          </a:solidFill>
+          <a:ln w="12700">
+            <a:solidFill>
+              <a:srgbClr val="2F8A28"/>
+            </a:solidFill>
+            <a:prstDash val="solid"/>
+          </a:ln>
+        </p:spPr>
+      </p:sp>
+      <p:sp>
+        <p:nvSpPr>
+          <p:cNvPr id="17" name="Text 15"/>
+          <p:cNvSpPr/>
+          <p:nvPr/>
+        </p:nvSpPr>
+        <p:spPr>
+          <a:xfrm>
+            <a:off x="7909560" y="3977640"/>
+            <a:ext cx="2926080" cy="182880"/>
+          </a:xfrm>
+          <a:prstGeom prst="rect">
+            <a:avLst/>
+          </a:prstGeom>
+          <a:noFill/>
+          <a:ln/>
+        </p:spPr>
+        <p:txBody>
+          <a:bodyPr wrap="square" lIns="0" tIns="0" rIns="0" bIns="0" rtlCol="0" anchor="ctr"/>
+          <a:lstStyle/>
+          <a:p>
+            <a:pPr algn="ctr" indent="0" marL="0">
+              <a:buNone/>
+            </a:pPr>
+            <a:r>
+              <a:rPr lang="en-US" sz="1000" dirty="0">
+                <a:solidFill>
+                  <a:srgbClr val="003A63"/>
+                </a:solidFill>
+                <a:latin typeface="Aptos" pitchFamily="34" charset="0"/>
+                <a:ea typeface="Aptos" pitchFamily="34" charset="-122"/>
+                <a:cs typeface="Aptos" pitchFamily="34" charset="-120"/>
+              </a:rPr>
+              <a:t>Concept to action</a:t>
+            </a:r>
+            <a:endParaRPr lang="en-US" sz="1000" dirty="0"/>
+          </a:p>
+        </p:txBody>
+      </p:sp>
+      <p:sp>
+        <p:nvSpPr>
+          <p:cNvPr id="18" name="Shape 16"/>
+          <p:cNvSpPr/>
+          <p:nvPr/>
+        </p:nvSpPr>
+        <p:spPr>
+          <a:xfrm>
+            <a:off x="7635240" y="4498848"/>
+            <a:ext cx="3474720" cy="1143000"/>
+          </a:xfrm>
+          <a:prstGeom prst="roundRect">
+            <a:avLst>
+              <a:gd name="adj" fmla="val 9600"/>
             </a:avLst>
           </a:prstGeom>
           <a:solidFill>
@@ -16230,14 +17906,14 @@
       </p:sp>
       <p:sp>
         <p:nvSpPr>
-          <p:cNvPr id="16" name="Text 14"/>
-          <p:cNvSpPr/>
-          <p:nvPr/>
-        </p:nvSpPr>
-        <p:spPr>
-          <a:xfrm>
-            <a:off x="8074152" y="3666744"/>
-            <a:ext cx="2825496" cy="256032"/>
+          <p:cNvPr id="19" name="Text 17"/>
+          <p:cNvSpPr/>
+          <p:nvPr/>
+        </p:nvSpPr>
+        <p:spPr>
+          <a:xfrm>
+            <a:off x="7799832" y="4645152"/>
+            <a:ext cx="3145536" cy="256032"/>
           </a:xfrm>
           <a:prstGeom prst="rect">
             <a:avLst/>
@@ -16261,7 +17937,7 @@
                 <a:ea typeface="Aptos" pitchFamily="34" charset="-122"/>
                 <a:cs typeface="Aptos" pitchFamily="34" charset="-120"/>
               </a:rPr>
-              <a:t>Use this for</a:t>
+              <a:t>Apply it</a:t>
             </a:r>
             <a:endParaRPr lang="en-US" sz="1300" dirty="0"/>
           </a:p>
@@ -16269,14 +17945,14 @@
       </p:sp>
       <p:sp>
         <p:nvSpPr>
-          <p:cNvPr id="17" name="Text 15"/>
-          <p:cNvSpPr/>
-          <p:nvPr/>
-        </p:nvSpPr>
-        <p:spPr>
-          <a:xfrm>
-            <a:off x="8074152" y="4023360"/>
-            <a:ext cx="2825496" cy="1097280"/>
+          <p:cNvPr id="20" name="Text 18"/>
+          <p:cNvSpPr/>
+          <p:nvPr/>
+        </p:nvSpPr>
+        <p:spPr>
+          <a:xfrm>
+            <a:off x="7799832" y="5001768"/>
+            <a:ext cx="3145536" cy="502920"/>
           </a:xfrm>
           <a:prstGeom prst="rect">
             <a:avLst/>
@@ -16302,7 +17978,7 @@
                 <a:ea typeface="Aptos" pitchFamily="34" charset="-122"/>
                 <a:cs typeface="Aptos" pitchFamily="34" charset="-120"/>
               </a:rPr>
-              <a:t>Connect the concept to public health decisions, safeguards, documentation, or implementation work.</a:t>
+              <a:t>Connect the concept to public health purpose, responsible use, required safeguards, documentation, and the next action a department should take.</a:t>
             </a:r>
             <a:endParaRPr lang="en-US" sz="1550" dirty="0"/>
           </a:p>
@@ -16476,8 +18152,8 @@
         </p:nvSpPr>
         <p:spPr>
           <a:xfrm>
-            <a:off x="9966960" y="6537960"/>
-            <a:ext cx="1645920" cy="201168"/>
+            <a:off x="9646920" y="6537960"/>
+            <a:ext cx="1965960" cy="201168"/>
           </a:xfrm>
           <a:prstGeom prst="rect">
             <a:avLst/>
@@ -16501,7 +18177,7 @@
                 <a:ea typeface="Aptos" pitchFamily="34" charset="-122"/>
                 <a:cs typeface="Aptos" pitchFamily="34" charset="-120"/>
               </a:rPr>
-              <a:t>Â© Paula Soper</a:t>
+              <a:t>Copyright Paula Soper</a:t>
             </a:r>
             <a:endParaRPr lang="en-US" sz="800" dirty="0"/>
           </a:p>
@@ -16548,77 +18224,13 @@
       </p:sp>
       <p:sp>
         <p:nvSpPr>
-          <p:cNvPr id="8" name="Shape 6"/>
+          <p:cNvPr id="8" name="Text 6"/>
           <p:cNvSpPr/>
           <p:nvPr/>
         </p:nvSpPr>
         <p:spPr>
           <a:xfrm>
             <a:off x="640080" y="658368"/>
-            <a:ext cx="420624" cy="420624"/>
-          </a:xfrm>
-          <a:prstGeom prst="ellipse">
-            <a:avLst/>
-          </a:prstGeom>
-          <a:solidFill>
-            <a:srgbClr val="0068B7"/>
-          </a:solidFill>
-          <a:ln w="12700">
-            <a:solidFill>
-              <a:srgbClr val="0068B7"/>
-            </a:solidFill>
-            <a:prstDash val="solid"/>
-          </a:ln>
-        </p:spPr>
-      </p:sp>
-      <p:sp>
-        <p:nvSpPr>
-          <p:cNvPr id="9" name="Text 7"/>
-          <p:cNvSpPr/>
-          <p:nvPr/>
-        </p:nvSpPr>
-        <p:spPr>
-          <a:xfrm>
-            <a:off x="640080" y="731520"/>
-            <a:ext cx="420624" cy="164592"/>
-          </a:xfrm>
-          <a:prstGeom prst="rect">
-            <a:avLst/>
-          </a:prstGeom>
-          <a:noFill/>
-          <a:ln/>
-        </p:spPr>
-        <p:txBody>
-          <a:bodyPr wrap="square" lIns="0" tIns="0" rIns="0" bIns="0" rtlCol="0" anchor="ctr"/>
-          <a:lstStyle/>
-          <a:p>
-            <a:pPr algn="ctr" indent="0" marL="0">
-              <a:buNone/>
-            </a:pPr>
-            <a:r>
-              <a:rPr lang="en-US" sz="1100" b="1" dirty="0">
-                <a:solidFill>
-                  <a:srgbClr val="FFFFFF"/>
-                </a:solidFill>
-                <a:latin typeface="Aptos" pitchFamily="34" charset="0"/>
-                <a:ea typeface="Aptos" pitchFamily="34" charset="-122"/>
-                <a:cs typeface="Aptos" pitchFamily="34" charset="-120"/>
-              </a:rPr>
-              <a:t>5</a:t>
-            </a:r>
-            <a:endParaRPr lang="en-US" sz="1100" dirty="0"/>
-          </a:p>
-        </p:txBody>
-      </p:sp>
-      <p:sp>
-        <p:nvSpPr>
-          <p:cNvPr id="10" name="Text 8"/>
-          <p:cNvSpPr/>
-          <p:nvPr/>
-        </p:nvSpPr>
-        <p:spPr>
-          <a:xfrm>
-            <a:off x="640080" y="621792"/>
             <a:ext cx="10881360" cy="713232"/>
           </a:xfrm>
           <a:prstGeom prst="rect">
@@ -16653,14 +18265,14 @@
       </p:sp>
       <p:sp>
         <p:nvSpPr>
-          <p:cNvPr id="11" name="Text 9"/>
+          <p:cNvPr id="9" name="Text 7"/>
           <p:cNvSpPr/>
           <p:nvPr/>
         </p:nvSpPr>
         <p:spPr>
           <a:xfrm>
             <a:off x="868680" y="1508760"/>
-            <a:ext cx="6537960" cy="4160520"/>
+            <a:ext cx="6309360" cy="4160520"/>
           </a:xfrm>
           <a:prstGeom prst="rect">
             <a:avLst/>
@@ -16719,18 +18331,18 @@
       </p:sp>
       <p:sp>
         <p:nvSpPr>
-          <p:cNvPr id="12" name="Shape 10"/>
-          <p:cNvSpPr/>
-          <p:nvPr/>
-        </p:nvSpPr>
-        <p:spPr>
-          <a:xfrm>
-            <a:off x="7909560" y="1417320"/>
-            <a:ext cx="3154680" cy="1828800"/>
+          <p:cNvPr id="10" name="Shape 8"/>
+          <p:cNvSpPr/>
+          <p:nvPr/>
+        </p:nvSpPr>
+        <p:spPr>
+          <a:xfrm>
+            <a:off x="7635240" y="1325880"/>
+            <a:ext cx="3474720" cy="1325880"/>
           </a:xfrm>
           <a:prstGeom prst="roundRect">
             <a:avLst>
-              <a:gd name="adj" fmla="val 6000"/>
+              <a:gd name="adj" fmla="val 8276"/>
             </a:avLst>
           </a:prstGeom>
           <a:solidFill>
@@ -16746,14 +18358,14 @@
       </p:sp>
       <p:sp>
         <p:nvSpPr>
-          <p:cNvPr id="13" name="Text 11"/>
-          <p:cNvSpPr/>
-          <p:nvPr/>
-        </p:nvSpPr>
-        <p:spPr>
-          <a:xfrm>
-            <a:off x="8074152" y="1563624"/>
-            <a:ext cx="2825496" cy="256032"/>
+          <p:cNvPr id="11" name="Text 9"/>
+          <p:cNvSpPr/>
+          <p:nvPr/>
+        </p:nvSpPr>
+        <p:spPr>
+          <a:xfrm>
+            <a:off x="7799832" y="1472184"/>
+            <a:ext cx="3145536" cy="256032"/>
           </a:xfrm>
           <a:prstGeom prst="rect">
             <a:avLst/>
@@ -16777,7 +18389,7 @@
                 <a:ea typeface="Aptos" pitchFamily="34" charset="-122"/>
                 <a:cs typeface="Aptos" pitchFamily="34" charset="-120"/>
               </a:rPr>
-              <a:t>Key idea</a:t>
+              <a:t>Core concept</a:t>
             </a:r>
             <a:endParaRPr lang="en-US" sz="1300" dirty="0"/>
           </a:p>
@@ -16785,14 +18397,14 @@
       </p:sp>
       <p:sp>
         <p:nvSpPr>
-          <p:cNvPr id="14" name="Text 12"/>
-          <p:cNvSpPr/>
-          <p:nvPr/>
-        </p:nvSpPr>
-        <p:spPr>
-          <a:xfrm>
-            <a:off x="8074152" y="1920240"/>
-            <a:ext cx="2825496" cy="1188720"/>
+          <p:cNvPr id="12" name="Text 10"/>
+          <p:cNvSpPr/>
+          <p:nvPr/>
+        </p:nvSpPr>
+        <p:spPr>
+          <a:xfrm>
+            <a:off x="7799832" y="1828800"/>
+            <a:ext cx="3145536" cy="685800"/>
           </a:xfrm>
           <a:prstGeom prst="rect">
             <a:avLst/>
@@ -16826,18 +18438,159 @@
       </p:sp>
       <p:sp>
         <p:nvSpPr>
-          <p:cNvPr id="15" name="Shape 13"/>
-          <p:cNvSpPr/>
-          <p:nvPr/>
-        </p:nvSpPr>
-        <p:spPr>
-          <a:xfrm>
-            <a:off x="7909560" y="3520440"/>
-            <a:ext cx="3154680" cy="1737360"/>
+          <p:cNvPr id="13" name="Shape 11"/>
+          <p:cNvSpPr/>
+          <p:nvPr/>
+        </p:nvSpPr>
+        <p:spPr>
+          <a:xfrm>
+            <a:off x="7635240" y="2788920"/>
+            <a:ext cx="3474720" cy="1536192"/>
           </a:xfrm>
           <a:prstGeom prst="roundRect">
             <a:avLst>
-              <a:gd name="adj" fmla="val 6316"/>
+              <a:gd name="adj" fmla="val 7143"/>
+            </a:avLst>
+          </a:prstGeom>
+          <a:solidFill>
+            <a:srgbClr val="FFFFFF">
+              <a:alpha val="88000"/>
+            </a:srgbClr>
+          </a:solidFill>
+          <a:ln w="12700">
+            <a:solidFill>
+              <a:srgbClr val="D6E8F2"/>
+            </a:solidFill>
+            <a:prstDash val="solid"/>
+          </a:ln>
+        </p:spPr>
+      </p:sp>
+      <p:sp>
+        <p:nvSpPr>
+          <p:cNvPr id="14" name="Shape 12"/>
+          <p:cNvSpPr/>
+          <p:nvPr/>
+        </p:nvSpPr>
+        <p:spPr>
+          <a:xfrm>
+            <a:off x="8074152" y="3291840"/>
+            <a:ext cx="2596896" cy="749808"/>
+          </a:xfrm>
+          <a:prstGeom prst="rect">
+            <a:avLst/>
+          </a:prstGeom>
+          <a:solidFill>
+            <a:srgbClr val="EAF6F8"/>
+          </a:solidFill>
+          <a:ln w="12700">
+            <a:solidFill>
+              <a:srgbClr val="8ABBD8"/>
+            </a:solidFill>
+            <a:prstDash val="solid"/>
+          </a:ln>
+        </p:spPr>
+      </p:sp>
+      <p:sp>
+        <p:nvSpPr>
+          <p:cNvPr id="15" name="Shape 13"/>
+          <p:cNvSpPr/>
+          <p:nvPr/>
+        </p:nvSpPr>
+        <p:spPr>
+          <a:xfrm>
+            <a:off x="8202168" y="3721608"/>
+            <a:ext cx="2340864" cy="0"/>
+          </a:xfrm>
+          <a:prstGeom prst="line">
+            <a:avLst/>
+          </a:prstGeom>
+          <a:noFill/>
+          <a:ln w="19050">
+            <a:solidFill>
+              <a:srgbClr val="0068B7"/>
+            </a:solidFill>
+            <a:prstDash val="solid"/>
+          </a:ln>
+        </p:spPr>
+      </p:sp>
+      <p:sp>
+        <p:nvSpPr>
+          <p:cNvPr id="16" name="Shape 14"/>
+          <p:cNvSpPr/>
+          <p:nvPr/>
+        </p:nvSpPr>
+        <p:spPr>
+          <a:xfrm>
+            <a:off x="9198864" y="4206240"/>
+            <a:ext cx="347472" cy="347472"/>
+          </a:xfrm>
+          <a:prstGeom prst="ellipse">
+            <a:avLst/>
+          </a:prstGeom>
+          <a:solidFill>
+            <a:srgbClr val="2F8A28"/>
+          </a:solidFill>
+          <a:ln w="12700">
+            <a:solidFill>
+              <a:srgbClr val="2F8A28"/>
+            </a:solidFill>
+            <a:prstDash val="solid"/>
+          </a:ln>
+        </p:spPr>
+      </p:sp>
+      <p:sp>
+        <p:nvSpPr>
+          <p:cNvPr id="17" name="Text 15"/>
+          <p:cNvSpPr/>
+          <p:nvPr/>
+        </p:nvSpPr>
+        <p:spPr>
+          <a:xfrm>
+            <a:off x="7909560" y="3977640"/>
+            <a:ext cx="2926080" cy="182880"/>
+          </a:xfrm>
+          <a:prstGeom prst="rect">
+            <a:avLst/>
+          </a:prstGeom>
+          <a:noFill/>
+          <a:ln/>
+        </p:spPr>
+        <p:txBody>
+          <a:bodyPr wrap="square" lIns="0" tIns="0" rIns="0" bIns="0" rtlCol="0" anchor="ctr"/>
+          <a:lstStyle/>
+          <a:p>
+            <a:pPr algn="ctr" indent="0" marL="0">
+              <a:buNone/>
+            </a:pPr>
+            <a:r>
+              <a:rPr lang="en-US" sz="1000" dirty="0">
+                <a:solidFill>
+                  <a:srgbClr val="003A63"/>
+                </a:solidFill>
+                <a:latin typeface="Aptos" pitchFamily="34" charset="0"/>
+                <a:ea typeface="Aptos" pitchFamily="34" charset="-122"/>
+                <a:cs typeface="Aptos" pitchFamily="34" charset="-120"/>
+              </a:rPr>
+              <a:t>Concept to action</a:t>
+            </a:r>
+            <a:endParaRPr lang="en-US" sz="1000" dirty="0"/>
+          </a:p>
+        </p:txBody>
+      </p:sp>
+      <p:sp>
+        <p:nvSpPr>
+          <p:cNvPr id="18" name="Shape 16"/>
+          <p:cNvSpPr/>
+          <p:nvPr/>
+        </p:nvSpPr>
+        <p:spPr>
+          <a:xfrm>
+            <a:off x="7635240" y="4498848"/>
+            <a:ext cx="3474720" cy="1143000"/>
+          </a:xfrm>
+          <a:prstGeom prst="roundRect">
+            <a:avLst>
+              <a:gd name="adj" fmla="val 9600"/>
             </a:avLst>
           </a:prstGeom>
           <a:solidFill>
@@ -16853,14 +18606,14 @@
       </p:sp>
       <p:sp>
         <p:nvSpPr>
-          <p:cNvPr id="16" name="Text 14"/>
-          <p:cNvSpPr/>
-          <p:nvPr/>
-        </p:nvSpPr>
-        <p:spPr>
-          <a:xfrm>
-            <a:off x="8074152" y="3666744"/>
-            <a:ext cx="2825496" cy="256032"/>
+          <p:cNvPr id="19" name="Text 17"/>
+          <p:cNvSpPr/>
+          <p:nvPr/>
+        </p:nvSpPr>
+        <p:spPr>
+          <a:xfrm>
+            <a:off x="7799832" y="4645152"/>
+            <a:ext cx="3145536" cy="256032"/>
           </a:xfrm>
           <a:prstGeom prst="rect">
             <a:avLst/>
@@ -16884,7 +18637,7 @@
                 <a:ea typeface="Aptos" pitchFamily="34" charset="-122"/>
                 <a:cs typeface="Aptos" pitchFamily="34" charset="-120"/>
               </a:rPr>
-              <a:t>Use this for</a:t>
+              <a:t>Apply it</a:t>
             </a:r>
             <a:endParaRPr lang="en-US" sz="1300" dirty="0"/>
           </a:p>
@@ -16892,14 +18645,14 @@
       </p:sp>
       <p:sp>
         <p:nvSpPr>
-          <p:cNvPr id="17" name="Text 15"/>
-          <p:cNvSpPr/>
-          <p:nvPr/>
-        </p:nvSpPr>
-        <p:spPr>
-          <a:xfrm>
-            <a:off x="8074152" y="4023360"/>
-            <a:ext cx="2825496" cy="1097280"/>
+          <p:cNvPr id="20" name="Text 18"/>
+          <p:cNvSpPr/>
+          <p:nvPr/>
+        </p:nvSpPr>
+        <p:spPr>
+          <a:xfrm>
+            <a:off x="7799832" y="5001768"/>
+            <a:ext cx="3145536" cy="502920"/>
           </a:xfrm>
           <a:prstGeom prst="rect">
             <a:avLst/>
@@ -16925,7 +18678,7 @@
                 <a:ea typeface="Aptos" pitchFamily="34" charset="-122"/>
                 <a:cs typeface="Aptos" pitchFamily="34" charset="-120"/>
               </a:rPr>
-              <a:t>Connect the concept to public health decisions, safeguards, documentation, or implementation work.</a:t>
+              <a:t>Connect the concept to public health purpose, responsible use, required safeguards, documentation, and the next action a department should take.</a:t>
             </a:r>
             <a:endParaRPr lang="en-US" sz="1550" dirty="0"/>
           </a:p>

--- a/downloads/presentations/modules/arc-220.pptx
+++ b/downloads/presentations/modules/arc-220.pptx
@@ -3616,13 +3616,11 @@
             </a:avLst>
           </a:prstGeom>
           <a:solidFill>
-            <a:srgbClr val="FFFFFF">
-              <a:alpha val="88000"/>
-            </a:srgbClr>
+            <a:srgbClr val="FFFFFF"/>
           </a:solidFill>
           <a:ln w="12700">
             <a:solidFill>
-              <a:srgbClr val="D6E8F2"/>
+              <a:srgbClr val="B9D7E6"/>
             </a:solidFill>
             <a:prstDash val="solid"/>
           </a:ln>
@@ -3630,119 +3628,112 @@
       </p:sp>
       <p:sp>
         <p:nvSpPr>
-          <p:cNvPr id="14" name="Shape 12"/>
-          <p:cNvSpPr/>
-          <p:nvPr/>
-        </p:nvSpPr>
-        <p:spPr>
-          <a:xfrm>
-            <a:off x="8074152" y="3291840"/>
-            <a:ext cx="2596896" cy="749808"/>
-          </a:xfrm>
-          <a:prstGeom prst="rect">
-            <a:avLst/>
-          </a:prstGeom>
-          <a:solidFill>
-            <a:srgbClr val="EAF6F8"/>
-          </a:solidFill>
-          <a:ln w="12700">
-            <a:solidFill>
-              <a:srgbClr val="8ABBD8"/>
-            </a:solidFill>
-            <a:prstDash val="solid"/>
-          </a:ln>
-        </p:spPr>
-      </p:sp>
-      <p:sp>
-        <p:nvSpPr>
-          <p:cNvPr id="15" name="Shape 13"/>
-          <p:cNvSpPr/>
-          <p:nvPr/>
-        </p:nvSpPr>
-        <p:spPr>
-          <a:xfrm>
-            <a:off x="8202168" y="3721608"/>
-            <a:ext cx="2340864" cy="0"/>
-          </a:xfrm>
-          <a:prstGeom prst="line">
-            <a:avLst/>
-          </a:prstGeom>
-          <a:noFill/>
-          <a:ln w="19050">
-            <a:solidFill>
-              <a:srgbClr val="0068B7"/>
-            </a:solidFill>
-            <a:prstDash val="solid"/>
-          </a:ln>
-        </p:spPr>
+          <p:cNvPr id="14" name="Text 12"/>
+          <p:cNvSpPr/>
+          <p:nvPr/>
+        </p:nvSpPr>
+        <p:spPr>
+          <a:xfrm>
+            <a:off x="7799832" y="2935224"/>
+            <a:ext cx="3145536" cy="256032"/>
+          </a:xfrm>
+          <a:prstGeom prst="rect">
+            <a:avLst/>
+          </a:prstGeom>
+          <a:noFill/>
+          <a:ln/>
+        </p:spPr>
+        <p:txBody>
+          <a:bodyPr wrap="square" lIns="0" tIns="0" rIns="0" bIns="0" rtlCol="0" anchor="ctr"/>
+          <a:lstStyle/>
+          <a:p>
+            <a:pPr indent="0" marL="0">
+              <a:buNone/>
+            </a:pPr>
+            <a:r>
+              <a:rPr lang="en-US" sz="1300" b="1" dirty="0">
+                <a:solidFill>
+                  <a:srgbClr val="0068B7"/>
+                </a:solidFill>
+                <a:latin typeface="Aptos" pitchFamily="34" charset="0"/>
+                <a:ea typeface="Aptos" pitchFamily="34" charset="-122"/>
+                <a:cs typeface="Aptos" pitchFamily="34" charset="-120"/>
+              </a:rPr>
+              <a:t>Concept checkpoints</a:t>
+            </a:r>
+            <a:endParaRPr lang="en-US" sz="1300" dirty="0"/>
+          </a:p>
+        </p:txBody>
+      </p:sp>
+      <p:sp>
+        <p:nvSpPr>
+          <p:cNvPr id="15" name="Text 13"/>
+          <p:cNvSpPr/>
+          <p:nvPr/>
+        </p:nvSpPr>
+        <p:spPr>
+          <a:xfrm>
+            <a:off x="7818120" y="3300984"/>
+            <a:ext cx="3090672" cy="877824"/>
+          </a:xfrm>
+          <a:prstGeom prst="rect">
+            <a:avLst/>
+          </a:prstGeom>
+          <a:noFill/>
+          <a:ln/>
+        </p:spPr>
+        <p:txBody>
+          <a:bodyPr wrap="square" lIns="254" tIns="254" rIns="254" bIns="254" rtlCol="0" anchor="t">
+            <a:normAutofit/>
+          </a:bodyPr>
+          <a:lstStyle/>
+          <a:p>
+            <a:r>
+              <a:rPr lang="en-US" sz="1380" dirty="0">
+                <a:solidFill>
+                  <a:srgbClr val="17364A"/>
+                </a:solidFill>
+                <a:latin typeface="Aptos" pitchFamily="34" charset="0"/>
+                <a:ea typeface="Aptos" pitchFamily="34" charset="-122"/>
+                <a:cs typeface="Aptos" pitchFamily="34" charset="-120"/>
+              </a:rPr>
+              <a:t>In AI workflows, APIs may support retrieval, task creation, status updates, or integration.</a:t>
+            </a:r>
+            <a:endParaRPr lang="en-US" sz="1380" dirty="0"/>
+          </a:p>
+          <a:p>
+            <a:r>
+              <a:rPr lang="en-US" sz="1380" dirty="0">
+                <a:solidFill>
+                  <a:srgbClr val="17364A"/>
+                </a:solidFill>
+                <a:latin typeface="Aptos" pitchFamily="34" charset="0"/>
+                <a:ea typeface="Aptos" pitchFamily="34" charset="-122"/>
+                <a:cs typeface="Aptos" pitchFamily="34" charset="-120"/>
+              </a:rPr>
+              <a:t>API access must be governed by permissions, authentication, rate limits, logging, and.</a:t>
+            </a:r>
+            <a:endParaRPr lang="en-US" sz="1380" dirty="0"/>
+          </a:p>
+          <a:p>
+            <a:r>
+              <a:rPr lang="en-US" sz="1380" dirty="0">
+                <a:solidFill>
+                  <a:srgbClr val="17364A"/>
+                </a:solidFill>
+                <a:latin typeface="Aptos" pitchFamily="34" charset="0"/>
+                <a:ea typeface="Aptos" pitchFamily="34" charset="-122"/>
+                <a:cs typeface="Aptos" pitchFamily="34" charset="-120"/>
+              </a:rPr>
+              <a:t>Implementation guide.</a:t>
+            </a:r>
+            <a:endParaRPr lang="en-US" sz="1380" dirty="0"/>
+          </a:p>
+        </p:txBody>
       </p:sp>
       <p:sp>
         <p:nvSpPr>
           <p:cNvPr id="16" name="Shape 14"/>
-          <p:cNvSpPr/>
-          <p:nvPr/>
-        </p:nvSpPr>
-        <p:spPr>
-          <a:xfrm>
-            <a:off x="9198864" y="4206240"/>
-            <a:ext cx="347472" cy="347472"/>
-          </a:xfrm>
-          <a:prstGeom prst="ellipse">
-            <a:avLst/>
-          </a:prstGeom>
-          <a:solidFill>
-            <a:srgbClr val="2F8A28"/>
-          </a:solidFill>
-          <a:ln w="12700">
-            <a:solidFill>
-              <a:srgbClr val="2F8A28"/>
-            </a:solidFill>
-            <a:prstDash val="solid"/>
-          </a:ln>
-        </p:spPr>
-      </p:sp>
-      <p:sp>
-        <p:nvSpPr>
-          <p:cNvPr id="17" name="Text 15"/>
-          <p:cNvSpPr/>
-          <p:nvPr/>
-        </p:nvSpPr>
-        <p:spPr>
-          <a:xfrm>
-            <a:off x="7909560" y="3977640"/>
-            <a:ext cx="2926080" cy="182880"/>
-          </a:xfrm>
-          <a:prstGeom prst="rect">
-            <a:avLst/>
-          </a:prstGeom>
-          <a:noFill/>
-          <a:ln/>
-        </p:spPr>
-        <p:txBody>
-          <a:bodyPr wrap="square" lIns="0" tIns="0" rIns="0" bIns="0" rtlCol="0" anchor="ctr"/>
-          <a:lstStyle/>
-          <a:p>
-            <a:pPr algn="ctr" indent="0" marL="0">
-              <a:buNone/>
-            </a:pPr>
-            <a:r>
-              <a:rPr lang="en-US" sz="1000" dirty="0">
-                <a:solidFill>
-                  <a:srgbClr val="003A63"/>
-                </a:solidFill>
-                <a:latin typeface="Aptos" pitchFamily="34" charset="0"/>
-                <a:ea typeface="Aptos" pitchFamily="34" charset="-122"/>
-                <a:cs typeface="Aptos" pitchFamily="34" charset="-120"/>
-              </a:rPr>
-              <a:t>Concept to action</a:t>
-            </a:r>
-            <a:endParaRPr lang="en-US" sz="1000" dirty="0"/>
-          </a:p>
-        </p:txBody>
-      </p:sp>
-      <p:sp>
-        <p:nvSpPr>
-          <p:cNvPr id="18" name="Shape 16"/>
           <p:cNvSpPr/>
           <p:nvPr/>
         </p:nvSpPr>
@@ -3769,7 +3760,7 @@
       </p:sp>
       <p:sp>
         <p:nvSpPr>
-          <p:cNvPr id="19" name="Text 17"/>
+          <p:cNvPr id="17" name="Text 15"/>
           <p:cNvSpPr/>
           <p:nvPr/>
         </p:nvSpPr>
@@ -3808,7 +3799,7 @@
       </p:sp>
       <p:sp>
         <p:nvSpPr>
-          <p:cNvPr id="20" name="Text 18"/>
+          <p:cNvPr id="18" name="Text 16"/>
           <p:cNvSpPr/>
           <p:nvPr/>
         </p:nvSpPr>
@@ -4316,13 +4307,11 @@
             </a:avLst>
           </a:prstGeom>
           <a:solidFill>
-            <a:srgbClr val="FFFFFF">
-              <a:alpha val="88000"/>
-            </a:srgbClr>
+            <a:srgbClr val="FFFFFF"/>
           </a:solidFill>
           <a:ln w="12700">
             <a:solidFill>
-              <a:srgbClr val="D6E8F2"/>
+              <a:srgbClr val="B9D7E6"/>
             </a:solidFill>
             <a:prstDash val="solid"/>
           </a:ln>
@@ -4330,119 +4319,112 @@
       </p:sp>
       <p:sp>
         <p:nvSpPr>
-          <p:cNvPr id="14" name="Shape 12"/>
-          <p:cNvSpPr/>
-          <p:nvPr/>
-        </p:nvSpPr>
-        <p:spPr>
-          <a:xfrm>
-            <a:off x="8074152" y="3291840"/>
-            <a:ext cx="2596896" cy="749808"/>
-          </a:xfrm>
-          <a:prstGeom prst="rect">
-            <a:avLst/>
-          </a:prstGeom>
-          <a:solidFill>
-            <a:srgbClr val="EAF6F8"/>
-          </a:solidFill>
-          <a:ln w="12700">
-            <a:solidFill>
-              <a:srgbClr val="8ABBD8"/>
-            </a:solidFill>
-            <a:prstDash val="solid"/>
-          </a:ln>
-        </p:spPr>
-      </p:sp>
-      <p:sp>
-        <p:nvSpPr>
-          <p:cNvPr id="15" name="Shape 13"/>
-          <p:cNvSpPr/>
-          <p:nvPr/>
-        </p:nvSpPr>
-        <p:spPr>
-          <a:xfrm>
-            <a:off x="8202168" y="3721608"/>
-            <a:ext cx="2340864" cy="0"/>
-          </a:xfrm>
-          <a:prstGeom prst="line">
-            <a:avLst/>
-          </a:prstGeom>
-          <a:noFill/>
-          <a:ln w="19050">
-            <a:solidFill>
-              <a:srgbClr val="0068B7"/>
-            </a:solidFill>
-            <a:prstDash val="solid"/>
-          </a:ln>
-        </p:spPr>
+          <p:cNvPr id="14" name="Text 12"/>
+          <p:cNvSpPr/>
+          <p:nvPr/>
+        </p:nvSpPr>
+        <p:spPr>
+          <a:xfrm>
+            <a:off x="7799832" y="2935224"/>
+            <a:ext cx="3145536" cy="256032"/>
+          </a:xfrm>
+          <a:prstGeom prst="rect">
+            <a:avLst/>
+          </a:prstGeom>
+          <a:noFill/>
+          <a:ln/>
+        </p:spPr>
+        <p:txBody>
+          <a:bodyPr wrap="square" lIns="0" tIns="0" rIns="0" bIns="0" rtlCol="0" anchor="ctr"/>
+          <a:lstStyle/>
+          <a:p>
+            <a:pPr indent="0" marL="0">
+              <a:buNone/>
+            </a:pPr>
+            <a:r>
+              <a:rPr lang="en-US" sz="1300" b="1" dirty="0">
+                <a:solidFill>
+                  <a:srgbClr val="0068B7"/>
+                </a:solidFill>
+                <a:latin typeface="Aptos" pitchFamily="34" charset="0"/>
+                <a:ea typeface="Aptos" pitchFamily="34" charset="-122"/>
+                <a:cs typeface="Aptos" pitchFamily="34" charset="-120"/>
+              </a:rPr>
+              <a:t>Concept checkpoints</a:t>
+            </a:r>
+            <a:endParaRPr lang="en-US" sz="1300" dirty="0"/>
+          </a:p>
+        </p:txBody>
+      </p:sp>
+      <p:sp>
+        <p:nvSpPr>
+          <p:cNvPr id="15" name="Text 13"/>
+          <p:cNvSpPr/>
+          <p:nvPr/>
+        </p:nvSpPr>
+        <p:spPr>
+          <a:xfrm>
+            <a:off x="7818120" y="3300984"/>
+            <a:ext cx="3090672" cy="877824"/>
+          </a:xfrm>
+          <a:prstGeom prst="rect">
+            <a:avLst/>
+          </a:prstGeom>
+          <a:noFill/>
+          <a:ln/>
+        </p:spPr>
+        <p:txBody>
+          <a:bodyPr wrap="square" lIns="254" tIns="254" rIns="254" bIns="254" rtlCol="0" anchor="t">
+            <a:normAutofit/>
+          </a:bodyPr>
+          <a:lstStyle/>
+          <a:p>
+            <a:r>
+              <a:rPr lang="en-US" sz="1380" dirty="0">
+                <a:solidFill>
+                  <a:srgbClr val="17364A"/>
+                </a:solidFill>
+                <a:latin typeface="Aptos" pitchFamily="34" charset="0"/>
+                <a:ea typeface="Aptos" pitchFamily="34" charset="-122"/>
+                <a:cs typeface="Aptos" pitchFamily="34" charset="-120"/>
+              </a:rPr>
+              <a:t>If an AI tool is used to identify vaccination gaps or generate reminder lists, it depends.</a:t>
+            </a:r>
+            <a:endParaRPr lang="en-US" sz="1380" dirty="0"/>
+          </a:p>
+          <a:p>
+            <a:r>
+              <a:rPr lang="en-US" sz="1380" dirty="0">
+                <a:solidFill>
+                  <a:srgbClr val="17364A"/>
+                </a:solidFill>
+                <a:latin typeface="Aptos" pitchFamily="34" charset="0"/>
+                <a:ea typeface="Aptos" pitchFamily="34" charset="-122"/>
+                <a:cs typeface="Aptos" pitchFamily="34" charset="-120"/>
+              </a:rPr>
+              <a:t>Interoperability failures can look like epidemiologic gaps even when the problem is.</a:t>
+            </a:r>
+            <a:endParaRPr lang="en-US" sz="1380" dirty="0"/>
+          </a:p>
+          <a:p>
+            <a:r>
+              <a:rPr lang="en-US" sz="1380" dirty="0">
+                <a:solidFill>
+                  <a:srgbClr val="17364A"/>
+                </a:solidFill>
+                <a:latin typeface="Aptos" pitchFamily="34" charset="0"/>
+                <a:ea typeface="Aptos" pitchFamily="34" charset="-122"/>
+                <a:cs typeface="Aptos" pitchFamily="34" charset="-120"/>
+              </a:rPr>
+              <a:t>A public health agency exploring AI-supported case summaries from EHR data may need to.</a:t>
+            </a:r>
+            <a:endParaRPr lang="en-US" sz="1380" dirty="0"/>
+          </a:p>
+        </p:txBody>
       </p:sp>
       <p:sp>
         <p:nvSpPr>
           <p:cNvPr id="16" name="Shape 14"/>
-          <p:cNvSpPr/>
-          <p:nvPr/>
-        </p:nvSpPr>
-        <p:spPr>
-          <a:xfrm>
-            <a:off x="9198864" y="4206240"/>
-            <a:ext cx="347472" cy="347472"/>
-          </a:xfrm>
-          <a:prstGeom prst="ellipse">
-            <a:avLst/>
-          </a:prstGeom>
-          <a:solidFill>
-            <a:srgbClr val="2F8A28"/>
-          </a:solidFill>
-          <a:ln w="12700">
-            <a:solidFill>
-              <a:srgbClr val="2F8A28"/>
-            </a:solidFill>
-            <a:prstDash val="solid"/>
-          </a:ln>
-        </p:spPr>
-      </p:sp>
-      <p:sp>
-        <p:nvSpPr>
-          <p:cNvPr id="17" name="Text 15"/>
-          <p:cNvSpPr/>
-          <p:nvPr/>
-        </p:nvSpPr>
-        <p:spPr>
-          <a:xfrm>
-            <a:off x="7909560" y="3977640"/>
-            <a:ext cx="2926080" cy="182880"/>
-          </a:xfrm>
-          <a:prstGeom prst="rect">
-            <a:avLst/>
-          </a:prstGeom>
-          <a:noFill/>
-          <a:ln/>
-        </p:spPr>
-        <p:txBody>
-          <a:bodyPr wrap="square" lIns="0" tIns="0" rIns="0" bIns="0" rtlCol="0" anchor="ctr"/>
-          <a:lstStyle/>
-          <a:p>
-            <a:pPr algn="ctr" indent="0" marL="0">
-              <a:buNone/>
-            </a:pPr>
-            <a:r>
-              <a:rPr lang="en-US" sz="1000" dirty="0">
-                <a:solidFill>
-                  <a:srgbClr val="003A63"/>
-                </a:solidFill>
-                <a:latin typeface="Aptos" pitchFamily="34" charset="0"/>
-                <a:ea typeface="Aptos" pitchFamily="34" charset="-122"/>
-                <a:cs typeface="Aptos" pitchFamily="34" charset="-120"/>
-              </a:rPr>
-              <a:t>Concept to action</a:t>
-            </a:r>
-            <a:endParaRPr lang="en-US" sz="1000" dirty="0"/>
-          </a:p>
-        </p:txBody>
-      </p:sp>
-      <p:sp>
-        <p:nvSpPr>
-          <p:cNvPr id="18" name="Shape 16"/>
           <p:cNvSpPr/>
           <p:nvPr/>
         </p:nvSpPr>
@@ -4469,7 +4451,7 @@
       </p:sp>
       <p:sp>
         <p:nvSpPr>
-          <p:cNvPr id="19" name="Text 17"/>
+          <p:cNvPr id="17" name="Text 15"/>
           <p:cNvSpPr/>
           <p:nvPr/>
         </p:nvSpPr>
@@ -4508,7 +4490,7 @@
       </p:sp>
       <p:sp>
         <p:nvSpPr>
-          <p:cNvPr id="20" name="Text 18"/>
+          <p:cNvPr id="18" name="Text 16"/>
           <p:cNvSpPr/>
           <p:nvPr/>
         </p:nvSpPr>
@@ -5016,13 +4998,11 @@
             </a:avLst>
           </a:prstGeom>
           <a:solidFill>
-            <a:srgbClr val="FFFFFF">
-              <a:alpha val="88000"/>
-            </a:srgbClr>
+            <a:srgbClr val="FFFFFF"/>
           </a:solidFill>
           <a:ln w="12700">
             <a:solidFill>
-              <a:srgbClr val="D6E8F2"/>
+              <a:srgbClr val="B9D7E6"/>
             </a:solidFill>
             <a:prstDash val="solid"/>
           </a:ln>
@@ -5030,119 +5010,112 @@
       </p:sp>
       <p:sp>
         <p:nvSpPr>
-          <p:cNvPr id="14" name="Shape 12"/>
-          <p:cNvSpPr/>
-          <p:nvPr/>
-        </p:nvSpPr>
-        <p:spPr>
-          <a:xfrm>
-            <a:off x="8074152" y="3291840"/>
-            <a:ext cx="2596896" cy="749808"/>
-          </a:xfrm>
-          <a:prstGeom prst="rect">
-            <a:avLst/>
-          </a:prstGeom>
-          <a:solidFill>
-            <a:srgbClr val="EAF6F8"/>
-          </a:solidFill>
-          <a:ln w="12700">
-            <a:solidFill>
-              <a:srgbClr val="8ABBD8"/>
-            </a:solidFill>
-            <a:prstDash val="solid"/>
-          </a:ln>
-        </p:spPr>
-      </p:sp>
-      <p:sp>
-        <p:nvSpPr>
-          <p:cNvPr id="15" name="Shape 13"/>
-          <p:cNvSpPr/>
-          <p:nvPr/>
-        </p:nvSpPr>
-        <p:spPr>
-          <a:xfrm>
-            <a:off x="8202168" y="3721608"/>
-            <a:ext cx="2340864" cy="0"/>
-          </a:xfrm>
-          <a:prstGeom prst="line">
-            <a:avLst/>
-          </a:prstGeom>
-          <a:noFill/>
-          <a:ln w="19050">
-            <a:solidFill>
-              <a:srgbClr val="0068B7"/>
-            </a:solidFill>
-            <a:prstDash val="solid"/>
-          </a:ln>
-        </p:spPr>
+          <p:cNvPr id="14" name="Text 12"/>
+          <p:cNvSpPr/>
+          <p:nvPr/>
+        </p:nvSpPr>
+        <p:spPr>
+          <a:xfrm>
+            <a:off x="7799832" y="2935224"/>
+            <a:ext cx="3145536" cy="256032"/>
+          </a:xfrm>
+          <a:prstGeom prst="rect">
+            <a:avLst/>
+          </a:prstGeom>
+          <a:noFill/>
+          <a:ln/>
+        </p:spPr>
+        <p:txBody>
+          <a:bodyPr wrap="square" lIns="0" tIns="0" rIns="0" bIns="0" rtlCol="0" anchor="ctr"/>
+          <a:lstStyle/>
+          <a:p>
+            <a:pPr indent="0" marL="0">
+              <a:buNone/>
+            </a:pPr>
+            <a:r>
+              <a:rPr lang="en-US" sz="1300" b="1" dirty="0">
+                <a:solidFill>
+                  <a:srgbClr val="0068B7"/>
+                </a:solidFill>
+                <a:latin typeface="Aptos" pitchFamily="34" charset="0"/>
+                <a:ea typeface="Aptos" pitchFamily="34" charset="-122"/>
+                <a:cs typeface="Aptos" pitchFamily="34" charset="-120"/>
+              </a:rPr>
+              <a:t>Concept checkpoints</a:t>
+            </a:r>
+            <a:endParaRPr lang="en-US" sz="1300" dirty="0"/>
+          </a:p>
+        </p:txBody>
+      </p:sp>
+      <p:sp>
+        <p:nvSpPr>
+          <p:cNvPr id="15" name="Text 13"/>
+          <p:cNvSpPr/>
+          <p:nvPr/>
+        </p:nvSpPr>
+        <p:spPr>
+          <a:xfrm>
+            <a:off x="7818120" y="3300984"/>
+            <a:ext cx="3090672" cy="877824"/>
+          </a:xfrm>
+          <a:prstGeom prst="rect">
+            <a:avLst/>
+          </a:prstGeom>
+          <a:noFill/>
+          <a:ln/>
+        </p:spPr>
+        <p:txBody>
+          <a:bodyPr wrap="square" lIns="254" tIns="254" rIns="254" bIns="254" rtlCol="0" anchor="t">
+            <a:normAutofit/>
+          </a:bodyPr>
+          <a:lstStyle/>
+          <a:p>
+            <a:r>
+              <a:rPr lang="en-US" sz="1380" dirty="0">
+                <a:solidFill>
+                  <a:srgbClr val="17364A"/>
+                </a:solidFill>
+                <a:latin typeface="Aptos" pitchFamily="34" charset="0"/>
+                <a:ea typeface="Aptos" pitchFamily="34" charset="-122"/>
+                <a:cs typeface="Aptos" pitchFamily="34" charset="-120"/>
+              </a:rPr>
+              <a:t>Interoperability review starts by identifying the sending system, receiving system,.</a:t>
+            </a:r>
+            <a:endParaRPr lang="en-US" sz="1380" dirty="0"/>
+          </a:p>
+          <a:p>
+            <a:r>
+              <a:rPr lang="en-US" sz="1380" dirty="0">
+                <a:solidFill>
+                  <a:srgbClr val="17364A"/>
+                </a:solidFill>
+                <a:latin typeface="Aptos" pitchFamily="34" charset="0"/>
+                <a:ea typeface="Aptos" pitchFamily="34" charset="-122"/>
+                <a:cs typeface="Aptos" pitchFamily="34" charset="-120"/>
+              </a:rPr>
+              <a:t>They should also identify required terminology systems, such as LOINC, SNOMED CT, CVX,.</a:t>
+            </a:r>
+            <a:endParaRPr lang="en-US" sz="1380" dirty="0"/>
+          </a:p>
+          <a:p>
+            <a:r>
+              <a:rPr lang="en-US" sz="1380" dirty="0">
+                <a:solidFill>
+                  <a:srgbClr val="17364A"/>
+                </a:solidFill>
+                <a:latin typeface="Aptos" pitchFamily="34" charset="0"/>
+                <a:ea typeface="Aptos" pitchFamily="34" charset="-122"/>
+                <a:cs typeface="Aptos" pitchFamily="34" charset="-120"/>
+              </a:rPr>
+              <a:t>Validation is a central part of interoperability.</a:t>
+            </a:r>
+            <a:endParaRPr lang="en-US" sz="1380" dirty="0"/>
+          </a:p>
+        </p:txBody>
       </p:sp>
       <p:sp>
         <p:nvSpPr>
           <p:cNvPr id="16" name="Shape 14"/>
-          <p:cNvSpPr/>
-          <p:nvPr/>
-        </p:nvSpPr>
-        <p:spPr>
-          <a:xfrm>
-            <a:off x="9198864" y="4206240"/>
-            <a:ext cx="347472" cy="347472"/>
-          </a:xfrm>
-          <a:prstGeom prst="ellipse">
-            <a:avLst/>
-          </a:prstGeom>
-          <a:solidFill>
-            <a:srgbClr val="2F8A28"/>
-          </a:solidFill>
-          <a:ln w="12700">
-            <a:solidFill>
-              <a:srgbClr val="2F8A28"/>
-            </a:solidFill>
-            <a:prstDash val="solid"/>
-          </a:ln>
-        </p:spPr>
-      </p:sp>
-      <p:sp>
-        <p:nvSpPr>
-          <p:cNvPr id="17" name="Text 15"/>
-          <p:cNvSpPr/>
-          <p:nvPr/>
-        </p:nvSpPr>
-        <p:spPr>
-          <a:xfrm>
-            <a:off x="7909560" y="3977640"/>
-            <a:ext cx="2926080" cy="182880"/>
-          </a:xfrm>
-          <a:prstGeom prst="rect">
-            <a:avLst/>
-          </a:prstGeom>
-          <a:noFill/>
-          <a:ln/>
-        </p:spPr>
-        <p:txBody>
-          <a:bodyPr wrap="square" lIns="0" tIns="0" rIns="0" bIns="0" rtlCol="0" anchor="ctr"/>
-          <a:lstStyle/>
-          <a:p>
-            <a:pPr algn="ctr" indent="0" marL="0">
-              <a:buNone/>
-            </a:pPr>
-            <a:r>
-              <a:rPr lang="en-US" sz="1000" dirty="0">
-                <a:solidFill>
-                  <a:srgbClr val="003A63"/>
-                </a:solidFill>
-                <a:latin typeface="Aptos" pitchFamily="34" charset="0"/>
-                <a:ea typeface="Aptos" pitchFamily="34" charset="-122"/>
-                <a:cs typeface="Aptos" pitchFamily="34" charset="-120"/>
-              </a:rPr>
-              <a:t>Concept to action</a:t>
-            </a:r>
-            <a:endParaRPr lang="en-US" sz="1000" dirty="0"/>
-          </a:p>
-        </p:txBody>
-      </p:sp>
-      <p:sp>
-        <p:nvSpPr>
-          <p:cNvPr id="18" name="Shape 16"/>
           <p:cNvSpPr/>
           <p:nvPr/>
         </p:nvSpPr>
@@ -5169,7 +5142,7 @@
       </p:sp>
       <p:sp>
         <p:nvSpPr>
-          <p:cNvPr id="19" name="Text 17"/>
+          <p:cNvPr id="17" name="Text 15"/>
           <p:cNvSpPr/>
           <p:nvPr/>
         </p:nvSpPr>
@@ -5208,7 +5181,7 @@
       </p:sp>
       <p:sp>
         <p:nvSpPr>
-          <p:cNvPr id="20" name="Text 18"/>
+          <p:cNvPr id="18" name="Text 16"/>
           <p:cNvSpPr/>
           <p:nvPr/>
         </p:nvSpPr>
@@ -5716,13 +5689,11 @@
             </a:avLst>
           </a:prstGeom>
           <a:solidFill>
-            <a:srgbClr val="FFFFFF">
-              <a:alpha val="88000"/>
-            </a:srgbClr>
+            <a:srgbClr val="FFFFFF"/>
           </a:solidFill>
           <a:ln w="12700">
             <a:solidFill>
-              <a:srgbClr val="D6E8F2"/>
+              <a:srgbClr val="B9D7E6"/>
             </a:solidFill>
             <a:prstDash val="solid"/>
           </a:ln>
@@ -5730,26 +5701,42 @@
       </p:sp>
       <p:sp>
         <p:nvSpPr>
-          <p:cNvPr id="14" name="Shape 12"/>
-          <p:cNvSpPr/>
-          <p:nvPr/>
-        </p:nvSpPr>
-        <p:spPr>
-          <a:xfrm>
-            <a:off x="8046720" y="3108960"/>
-            <a:ext cx="2651760" cy="896112"/>
-          </a:xfrm>
-          <a:prstGeom prst="arc">
-            <a:avLst/>
-          </a:prstGeom>
-          <a:noFill/>
-          <a:ln w="25400">
-            <a:solidFill>
-              <a:srgbClr val="0068B7"/>
-            </a:solidFill>
-            <a:prstDash val="solid"/>
-          </a:ln>
-        </p:spPr>
+          <p:cNvPr id="14" name="Text 12"/>
+          <p:cNvSpPr/>
+          <p:nvPr/>
+        </p:nvSpPr>
+        <p:spPr>
+          <a:xfrm>
+            <a:off x="7799832" y="2935224"/>
+            <a:ext cx="3145536" cy="256032"/>
+          </a:xfrm>
+          <a:prstGeom prst="rect">
+            <a:avLst/>
+          </a:prstGeom>
+          <a:noFill/>
+          <a:ln/>
+        </p:spPr>
+        <p:txBody>
+          <a:bodyPr wrap="square" lIns="0" tIns="0" rIns="0" bIns="0" rtlCol="0" anchor="ctr"/>
+          <a:lstStyle/>
+          <a:p>
+            <a:pPr indent="0" marL="0">
+              <a:buNone/>
+            </a:pPr>
+            <a:r>
+              <a:rPr lang="en-US" sz="1300" b="1" dirty="0">
+                <a:solidFill>
+                  <a:srgbClr val="0068B7"/>
+                </a:solidFill>
+                <a:latin typeface="Aptos" pitchFamily="34" charset="0"/>
+                <a:ea typeface="Aptos" pitchFamily="34" charset="-122"/>
+                <a:cs typeface="Aptos" pitchFamily="34" charset="-120"/>
+              </a:rPr>
+              <a:t>Concept checkpoints</a:t>
+            </a:r>
+            <a:endParaRPr lang="en-US" sz="1300" dirty="0"/>
+          </a:p>
+        </p:txBody>
       </p:sp>
       <p:sp>
         <p:nvSpPr>
@@ -5759,102 +5746,67 @@
         </p:nvSpPr>
         <p:spPr>
           <a:xfrm>
-            <a:off x="7909560" y="3099816"/>
-            <a:ext cx="2926080" cy="256032"/>
-          </a:xfrm>
-          <a:prstGeom prst="rect">
-            <a:avLst/>
-          </a:prstGeom>
-          <a:noFill/>
-          <a:ln/>
-        </p:spPr>
-        <p:txBody>
-          <a:bodyPr wrap="square" lIns="0" tIns="0" rIns="0" bIns="0" rtlCol="0" anchor="ctr"/>
-          <a:lstStyle/>
-          <a:p>
-            <a:pPr algn="ctr" indent="0" marL="0">
-              <a:buNone/>
-            </a:pPr>
-            <a:r>
-              <a:rPr lang="en-US" sz="1500" b="1" dirty="0">
-                <a:solidFill>
-                  <a:srgbClr val="003A63"/>
-                </a:solidFill>
-                <a:latin typeface="Aptos" pitchFamily="34" charset="0"/>
-                <a:ea typeface="Aptos" pitchFamily="34" charset="-122"/>
-                <a:cs typeface="Aptos" pitchFamily="34" charset="-120"/>
-              </a:rPr>
-              <a:t>Risk</a:t>
-            </a:r>
-            <a:endParaRPr lang="en-US" sz="1500" dirty="0"/>
+            <a:off x="7818120" y="3300984"/>
+            <a:ext cx="3090672" cy="877824"/>
+          </a:xfrm>
+          <a:prstGeom prst="rect">
+            <a:avLst/>
+          </a:prstGeom>
+          <a:noFill/>
+          <a:ln/>
+        </p:spPr>
+        <p:txBody>
+          <a:bodyPr wrap="square" lIns="254" tIns="254" rIns="254" bIns="254" rtlCol="0" anchor="t">
+            <a:normAutofit/>
+          </a:bodyPr>
+          <a:lstStyle/>
+          <a:p>
+            <a:r>
+              <a:rPr lang="en-US" sz="1380" dirty="0">
+                <a:solidFill>
+                  <a:srgbClr val="17364A"/>
+                </a:solidFill>
+                <a:latin typeface="Aptos" pitchFamily="34" charset="0"/>
+                <a:ea typeface="Aptos" pitchFamily="34" charset="-122"/>
+                <a:cs typeface="Aptos" pitchFamily="34" charset="-120"/>
+              </a:rPr>
+              <a:t>Guardrails include conformance testing, test messages, implementation guide references,.</a:t>
+            </a:r>
+            <a:endParaRPr lang="en-US" sz="1380" dirty="0"/>
+          </a:p>
+          <a:p>
+            <a:r>
+              <a:rPr lang="en-US" sz="1380" dirty="0">
+                <a:solidFill>
+                  <a:srgbClr val="17364A"/>
+                </a:solidFill>
+                <a:latin typeface="Aptos" pitchFamily="34" charset="0"/>
+                <a:ea typeface="Aptos" pitchFamily="34" charset="-122"/>
+                <a:cs typeface="Aptos" pitchFamily="34" charset="-120"/>
+              </a:rPr>
+              <a:t>Manual workarounds.</a:t>
+            </a:r>
+            <a:endParaRPr lang="en-US" sz="1380" dirty="0"/>
+          </a:p>
+          <a:p>
+            <a:r>
+              <a:rPr lang="en-US" sz="1380" dirty="0">
+                <a:solidFill>
+                  <a:srgbClr val="17364A"/>
+                </a:solidFill>
+                <a:latin typeface="Aptos" pitchFamily="34" charset="0"/>
+                <a:ea typeface="Aptos" pitchFamily="34" charset="-122"/>
+                <a:cs typeface="Aptos" pitchFamily="34" charset="-120"/>
+              </a:rPr>
+              <a:t>Weak interoperability can lead to copying and pasting sensitive data into AI tools.</a:t>
+            </a:r>
+            <a:endParaRPr lang="en-US" sz="1380" dirty="0"/>
           </a:p>
         </p:txBody>
       </p:sp>
       <p:sp>
         <p:nvSpPr>
           <p:cNvPr id="16" name="Shape 14"/>
-          <p:cNvSpPr/>
-          <p:nvPr/>
-        </p:nvSpPr>
-        <p:spPr>
-          <a:xfrm>
-            <a:off x="8366760" y="3639312"/>
-            <a:ext cx="2011680" cy="0"/>
-          </a:xfrm>
-          <a:prstGeom prst="line">
-            <a:avLst/>
-          </a:prstGeom>
-          <a:noFill/>
-          <a:ln w="63500">
-            <a:solidFill>
-              <a:srgbClr val="2F8A28"/>
-            </a:solidFill>
-            <a:prstDash val="solid"/>
-          </a:ln>
-        </p:spPr>
-      </p:sp>
-      <p:sp>
-        <p:nvSpPr>
-          <p:cNvPr id="17" name="Text 15"/>
-          <p:cNvSpPr/>
-          <p:nvPr/>
-        </p:nvSpPr>
-        <p:spPr>
-          <a:xfrm>
-            <a:off x="7909560" y="3849624"/>
-            <a:ext cx="2926080" cy="164592"/>
-          </a:xfrm>
-          <a:prstGeom prst="rect">
-            <a:avLst/>
-          </a:prstGeom>
-          <a:noFill/>
-          <a:ln/>
-        </p:spPr>
-        <p:txBody>
-          <a:bodyPr wrap="square" lIns="0" tIns="0" rIns="0" bIns="0" rtlCol="0" anchor="ctr"/>
-          <a:lstStyle/>
-          <a:p>
-            <a:pPr algn="ctr" indent="0" marL="0">
-              <a:buNone/>
-            </a:pPr>
-            <a:r>
-              <a:rPr lang="en-US" sz="900" dirty="0">
-                <a:solidFill>
-                  <a:srgbClr val="003A63"/>
-                </a:solidFill>
-                <a:latin typeface="Aptos" pitchFamily="34" charset="0"/>
-                <a:ea typeface="Aptos" pitchFamily="34" charset="-122"/>
-                <a:cs typeface="Aptos" pitchFamily="34" charset="-120"/>
-              </a:rPr>
-              <a:t>Human review</a:t>
-            </a:r>
-            <a:endParaRPr lang="en-US" sz="900" dirty="0"/>
-          </a:p>
-        </p:txBody>
-      </p:sp>
-      <p:sp>
-        <p:nvSpPr>
-          <p:cNvPr id="18" name="Shape 16"/>
           <p:cNvSpPr/>
           <p:nvPr/>
         </p:nvSpPr>
@@ -5881,7 +5833,7 @@
       </p:sp>
       <p:sp>
         <p:nvSpPr>
-          <p:cNvPr id="19" name="Text 17"/>
+          <p:cNvPr id="17" name="Text 15"/>
           <p:cNvSpPr/>
           <p:nvPr/>
         </p:nvSpPr>
@@ -5920,7 +5872,7 @@
       </p:sp>
       <p:sp>
         <p:nvSpPr>
-          <p:cNvPr id="20" name="Text 18"/>
+          <p:cNvPr id="18" name="Text 16"/>
           <p:cNvSpPr/>
           <p:nvPr/>
         </p:nvSpPr>
@@ -6428,13 +6380,11 @@
             </a:avLst>
           </a:prstGeom>
           <a:solidFill>
-            <a:srgbClr val="FFFFFF">
-              <a:alpha val="88000"/>
-            </a:srgbClr>
+            <a:srgbClr val="FFFFFF"/>
           </a:solidFill>
           <a:ln w="12700">
             <a:solidFill>
-              <a:srgbClr val="D6E8F2"/>
+              <a:srgbClr val="B9D7E6"/>
             </a:solidFill>
             <a:prstDash val="solid"/>
           </a:ln>
@@ -6442,26 +6392,42 @@
       </p:sp>
       <p:sp>
         <p:nvSpPr>
-          <p:cNvPr id="14" name="Shape 12"/>
-          <p:cNvSpPr/>
-          <p:nvPr/>
-        </p:nvSpPr>
-        <p:spPr>
-          <a:xfrm>
-            <a:off x="8046720" y="3108960"/>
-            <a:ext cx="2651760" cy="896112"/>
-          </a:xfrm>
-          <a:prstGeom prst="arc">
-            <a:avLst/>
-          </a:prstGeom>
-          <a:noFill/>
-          <a:ln w="25400">
-            <a:solidFill>
-              <a:srgbClr val="0068B7"/>
-            </a:solidFill>
-            <a:prstDash val="solid"/>
-          </a:ln>
-        </p:spPr>
+          <p:cNvPr id="14" name="Text 12"/>
+          <p:cNvSpPr/>
+          <p:nvPr/>
+        </p:nvSpPr>
+        <p:spPr>
+          <a:xfrm>
+            <a:off x="7799832" y="2935224"/>
+            <a:ext cx="3145536" cy="256032"/>
+          </a:xfrm>
+          <a:prstGeom prst="rect">
+            <a:avLst/>
+          </a:prstGeom>
+          <a:noFill/>
+          <a:ln/>
+        </p:spPr>
+        <p:txBody>
+          <a:bodyPr wrap="square" lIns="0" tIns="0" rIns="0" bIns="0" rtlCol="0" anchor="ctr"/>
+          <a:lstStyle/>
+          <a:p>
+            <a:pPr indent="0" marL="0">
+              <a:buNone/>
+            </a:pPr>
+            <a:r>
+              <a:rPr lang="en-US" sz="1300" b="1" dirty="0">
+                <a:solidFill>
+                  <a:srgbClr val="0068B7"/>
+                </a:solidFill>
+                <a:latin typeface="Aptos" pitchFamily="34" charset="0"/>
+                <a:ea typeface="Aptos" pitchFamily="34" charset="-122"/>
+                <a:cs typeface="Aptos" pitchFamily="34" charset="-120"/>
+              </a:rPr>
+              <a:t>Concept checkpoints</a:t>
+            </a:r>
+            <a:endParaRPr lang="en-US" sz="1300" dirty="0"/>
+          </a:p>
+        </p:txBody>
       </p:sp>
       <p:sp>
         <p:nvSpPr>
@@ -6471,102 +6437,67 @@
         </p:nvSpPr>
         <p:spPr>
           <a:xfrm>
-            <a:off x="7909560" y="3099816"/>
-            <a:ext cx="2926080" cy="256032"/>
-          </a:xfrm>
-          <a:prstGeom prst="rect">
-            <a:avLst/>
-          </a:prstGeom>
-          <a:noFill/>
-          <a:ln/>
-        </p:spPr>
-        <p:txBody>
-          <a:bodyPr wrap="square" lIns="0" tIns="0" rIns="0" bIns="0" rtlCol="0" anchor="ctr"/>
-          <a:lstStyle/>
-          <a:p>
-            <a:pPr algn="ctr" indent="0" marL="0">
-              <a:buNone/>
-            </a:pPr>
-            <a:r>
-              <a:rPr lang="en-US" sz="1500" b="1" dirty="0">
-                <a:solidFill>
-                  <a:srgbClr val="003A63"/>
-                </a:solidFill>
-                <a:latin typeface="Aptos" pitchFamily="34" charset="0"/>
-                <a:ea typeface="Aptos" pitchFamily="34" charset="-122"/>
-                <a:cs typeface="Aptos" pitchFamily="34" charset="-120"/>
-              </a:rPr>
-              <a:t>Risk</a:t>
-            </a:r>
-            <a:endParaRPr lang="en-US" sz="1500" dirty="0"/>
+            <a:off x="7818120" y="3300984"/>
+            <a:ext cx="3090672" cy="877824"/>
+          </a:xfrm>
+          <a:prstGeom prst="rect">
+            <a:avLst/>
+          </a:prstGeom>
+          <a:noFill/>
+          <a:ln/>
+        </p:spPr>
+        <p:txBody>
+          <a:bodyPr wrap="square" lIns="254" tIns="254" rIns="254" bIns="254" rtlCol="0" anchor="t">
+            <a:normAutofit/>
+          </a:bodyPr>
+          <a:lstStyle/>
+          <a:p>
+            <a:r>
+              <a:rPr lang="en-US" sz="1380" dirty="0">
+                <a:solidFill>
+                  <a:srgbClr val="17364A"/>
+                </a:solidFill>
+                <a:latin typeface="Aptos" pitchFamily="34" charset="0"/>
+                <a:ea typeface="Aptos" pitchFamily="34" charset="-122"/>
+                <a:cs typeface="Aptos" pitchFamily="34" charset="-120"/>
+              </a:rPr>
+              <a:t>Over-reliance on structured data.</a:t>
+            </a:r>
+            <a:endParaRPr lang="en-US" sz="1380" dirty="0"/>
+          </a:p>
+          <a:p>
+            <a:r>
+              <a:rPr lang="en-US" sz="1380" dirty="0">
+                <a:solidFill>
+                  <a:srgbClr val="17364A"/>
+                </a:solidFill>
+                <a:latin typeface="Aptos" pitchFamily="34" charset="0"/>
+                <a:ea typeface="Aptos" pitchFamily="34" charset="-122"/>
+                <a:cs typeface="Aptos" pitchFamily="34" charset="-120"/>
+              </a:rPr>
+              <a:t>Structured exchange may omit context found in notes or local fields.</a:t>
+            </a:r>
+            <a:endParaRPr lang="en-US" sz="1380" dirty="0"/>
+          </a:p>
+          <a:p>
+            <a:r>
+              <a:rPr lang="en-US" sz="1380" dirty="0">
+                <a:solidFill>
+                  <a:srgbClr val="17364A"/>
+                </a:solidFill>
+                <a:latin typeface="Aptos" pitchFamily="34" charset="0"/>
+                <a:ea typeface="Aptos" pitchFamily="34" charset="-122"/>
+                <a:cs typeface="Aptos" pitchFamily="34" charset="-120"/>
+              </a:rPr>
+              <a:t>Guardrails include source review, workflow validation, and documentation of known data gaps.</a:t>
+            </a:r>
+            <a:endParaRPr lang="en-US" sz="1380" dirty="0"/>
           </a:p>
         </p:txBody>
       </p:sp>
       <p:sp>
         <p:nvSpPr>
           <p:cNvPr id="16" name="Shape 14"/>
-          <p:cNvSpPr/>
-          <p:nvPr/>
-        </p:nvSpPr>
-        <p:spPr>
-          <a:xfrm>
-            <a:off x="8366760" y="3639312"/>
-            <a:ext cx="2011680" cy="0"/>
-          </a:xfrm>
-          <a:prstGeom prst="line">
-            <a:avLst/>
-          </a:prstGeom>
-          <a:noFill/>
-          <a:ln w="63500">
-            <a:solidFill>
-              <a:srgbClr val="2F8A28"/>
-            </a:solidFill>
-            <a:prstDash val="solid"/>
-          </a:ln>
-        </p:spPr>
-      </p:sp>
-      <p:sp>
-        <p:nvSpPr>
-          <p:cNvPr id="17" name="Text 15"/>
-          <p:cNvSpPr/>
-          <p:nvPr/>
-        </p:nvSpPr>
-        <p:spPr>
-          <a:xfrm>
-            <a:off x="7909560" y="3849624"/>
-            <a:ext cx="2926080" cy="164592"/>
-          </a:xfrm>
-          <a:prstGeom prst="rect">
-            <a:avLst/>
-          </a:prstGeom>
-          <a:noFill/>
-          <a:ln/>
-        </p:spPr>
-        <p:txBody>
-          <a:bodyPr wrap="square" lIns="0" tIns="0" rIns="0" bIns="0" rtlCol="0" anchor="ctr"/>
-          <a:lstStyle/>
-          <a:p>
-            <a:pPr algn="ctr" indent="0" marL="0">
-              <a:buNone/>
-            </a:pPr>
-            <a:r>
-              <a:rPr lang="en-US" sz="900" dirty="0">
-                <a:solidFill>
-                  <a:srgbClr val="003A63"/>
-                </a:solidFill>
-                <a:latin typeface="Aptos" pitchFamily="34" charset="0"/>
-                <a:ea typeface="Aptos" pitchFamily="34" charset="-122"/>
-                <a:cs typeface="Aptos" pitchFamily="34" charset="-120"/>
-              </a:rPr>
-              <a:t>Human review</a:t>
-            </a:r>
-            <a:endParaRPr lang="en-US" sz="900" dirty="0"/>
-          </a:p>
-        </p:txBody>
-      </p:sp>
-      <p:sp>
-        <p:nvSpPr>
-          <p:cNvPr id="18" name="Shape 16"/>
           <p:cNvSpPr/>
           <p:nvPr/>
         </p:nvSpPr>
@@ -6593,7 +6524,7 @@
       </p:sp>
       <p:sp>
         <p:nvSpPr>
-          <p:cNvPr id="19" name="Text 17"/>
+          <p:cNvPr id="17" name="Text 15"/>
           <p:cNvSpPr/>
           <p:nvPr/>
         </p:nvSpPr>
@@ -6632,7 +6563,7 @@
       </p:sp>
       <p:sp>
         <p:nvSpPr>
-          <p:cNvPr id="20" name="Text 18"/>
+          <p:cNvPr id="18" name="Text 16"/>
           <p:cNvSpPr/>
           <p:nvPr/>
         </p:nvSpPr>
@@ -7140,13 +7071,11 @@
             </a:avLst>
           </a:prstGeom>
           <a:solidFill>
-            <a:srgbClr val="FFFFFF">
-              <a:alpha val="88000"/>
-            </a:srgbClr>
+            <a:srgbClr val="FFFFFF"/>
           </a:solidFill>
           <a:ln w="12700">
             <a:solidFill>
-              <a:srgbClr val="D6E8F2"/>
+              <a:srgbClr val="B9D7E6"/>
             </a:solidFill>
             <a:prstDash val="solid"/>
           </a:ln>
@@ -7154,30 +7083,42 @@
       </p:sp>
       <p:sp>
         <p:nvSpPr>
-          <p:cNvPr id="14" name="Shape 12"/>
-          <p:cNvSpPr/>
-          <p:nvPr/>
-        </p:nvSpPr>
-        <p:spPr>
-          <a:xfrm>
-            <a:off x="7927848" y="3319272"/>
-            <a:ext cx="792480" cy="749808"/>
-          </a:xfrm>
-          <a:prstGeom prst="roundRect">
-            <a:avLst>
-              <a:gd name="adj" fmla="val 14634"/>
-            </a:avLst>
-          </a:prstGeom>
-          <a:solidFill>
-            <a:srgbClr val="0068B7"/>
-          </a:solidFill>
-          <a:ln w="12700">
-            <a:solidFill>
-              <a:srgbClr val="0068B7"/>
-            </a:solidFill>
-            <a:prstDash val="solid"/>
-          </a:ln>
-        </p:spPr>
+          <p:cNvPr id="14" name="Text 12"/>
+          <p:cNvSpPr/>
+          <p:nvPr/>
+        </p:nvSpPr>
+        <p:spPr>
+          <a:xfrm>
+            <a:off x="7799832" y="2935224"/>
+            <a:ext cx="3145536" cy="256032"/>
+          </a:xfrm>
+          <a:prstGeom prst="rect">
+            <a:avLst/>
+          </a:prstGeom>
+          <a:noFill/>
+          <a:ln/>
+        </p:spPr>
+        <p:txBody>
+          <a:bodyPr wrap="square" lIns="0" tIns="0" rIns="0" bIns="0" rtlCol="0" anchor="ctr"/>
+          <a:lstStyle/>
+          <a:p>
+            <a:pPr indent="0" marL="0">
+              <a:buNone/>
+            </a:pPr>
+            <a:r>
+              <a:rPr lang="en-US" sz="1300" b="1" dirty="0">
+                <a:solidFill>
+                  <a:srgbClr val="0068B7"/>
+                </a:solidFill>
+                <a:latin typeface="Aptos" pitchFamily="34" charset="0"/>
+                <a:ea typeface="Aptos" pitchFamily="34" charset="-122"/>
+                <a:cs typeface="Aptos" pitchFamily="34" charset="-120"/>
+              </a:rPr>
+              <a:t>Concept checkpoints</a:t>
+            </a:r>
+            <a:endParaRPr lang="en-US" sz="1300" dirty="0"/>
+          </a:p>
+        </p:txBody>
       </p:sp>
       <p:sp>
         <p:nvSpPr>
@@ -7187,240 +7128,67 @@
         </p:nvSpPr>
         <p:spPr>
           <a:xfrm>
-            <a:off x="8001000" y="3511296"/>
-            <a:ext cx="646176" cy="310896"/>
-          </a:xfrm>
-          <a:prstGeom prst="rect">
-            <a:avLst/>
-          </a:prstGeom>
-          <a:noFill/>
-          <a:ln/>
-        </p:spPr>
-        <p:txBody>
-          <a:bodyPr wrap="square" lIns="0" tIns="0" rIns="0" bIns="0" rtlCol="0" anchor="ctr">
+            <a:off x="7818120" y="3300984"/>
+            <a:ext cx="3090672" cy="877824"/>
+          </a:xfrm>
+          <a:prstGeom prst="rect">
+            <a:avLst/>
+          </a:prstGeom>
+          <a:noFill/>
+          <a:ln/>
+        </p:spPr>
+        <p:txBody>
+          <a:bodyPr wrap="square" lIns="254" tIns="254" rIns="254" bIns="254" rtlCol="0" anchor="t">
             <a:normAutofit/>
           </a:bodyPr>
           <a:lstStyle/>
           <a:p>
-            <a:pPr algn="ctr" indent="0" marL="0">
-              <a:buNone/>
-            </a:pPr>
-            <a:r>
-              <a:rPr lang="en-US" sz="1500" b="1" dirty="0">
-                <a:solidFill>
-                  <a:srgbClr val="FFFFFF"/>
-                </a:solidFill>
-                <a:latin typeface="Aptos" pitchFamily="34" charset="0"/>
-                <a:ea typeface="Aptos" pitchFamily="34" charset="-122"/>
-                <a:cs typeface="Aptos" pitchFamily="34" charset="-120"/>
-              </a:rPr>
-              <a:t>Plan</a:t>
-            </a:r>
-            <a:endParaRPr lang="en-US" sz="1500" dirty="0"/>
+            <a:r>
+              <a:rPr lang="en-US" sz="1380" dirty="0">
+                <a:solidFill>
+                  <a:srgbClr val="17364A"/>
+                </a:solidFill>
+                <a:latin typeface="Aptos" pitchFamily="34" charset="0"/>
+                <a:ea typeface="Aptos" pitchFamily="34" charset="-122"/>
+                <a:cs typeface="Aptos" pitchFamily="34" charset="-120"/>
+              </a:rPr>
+              <a:t>Generative AI may summarize structured and narrative data received through interoperable.</a:t>
+            </a:r>
+            <a:endParaRPr lang="en-US" sz="1380" dirty="0"/>
+          </a:p>
+          <a:p>
+            <a:r>
+              <a:rPr lang="en-US" sz="1380" dirty="0">
+                <a:solidFill>
+                  <a:srgbClr val="17364A"/>
+                </a:solidFill>
+                <a:latin typeface="Aptos" pitchFamily="34" charset="0"/>
+                <a:ea typeface="Aptos" pitchFamily="34" charset="-122"/>
+                <a:cs typeface="Aptos" pitchFamily="34" charset="-120"/>
+              </a:rPr>
+              <a:t>Predictive analytics may depend on standardized fields and terminology, so.</a:t>
+            </a:r>
+            <a:endParaRPr lang="en-US" sz="1380" dirty="0"/>
+          </a:p>
+          <a:p>
+            <a:r>
+              <a:rPr lang="en-US" sz="1380" dirty="0">
+                <a:solidFill>
+                  <a:srgbClr val="17364A"/>
+                </a:solidFill>
+                <a:latin typeface="Aptos" pitchFamily="34" charset="0"/>
+                <a:ea typeface="Aptos" pitchFamily="34" charset="-122"/>
+                <a:cs typeface="Aptos" pitchFamily="34" charset="-120"/>
+              </a:rPr>
+              <a:t>RAG tools may retrieve implementation guides or agency protocols, but document governance.</a:t>
+            </a:r>
+            <a:endParaRPr lang="en-US" sz="1380" dirty="0"/>
           </a:p>
         </p:txBody>
       </p:sp>
       <p:sp>
         <p:nvSpPr>
           <p:cNvPr id="16" name="Shape 14"/>
-          <p:cNvSpPr/>
-          <p:nvPr/>
-        </p:nvSpPr>
-        <p:spPr>
-          <a:xfrm>
-            <a:off x="8976360" y="3319272"/>
-            <a:ext cx="792480" cy="749808"/>
-          </a:xfrm>
-          <a:prstGeom prst="roundRect">
-            <a:avLst>
-              <a:gd name="adj" fmla="val 14634"/>
-            </a:avLst>
-          </a:prstGeom>
-          <a:solidFill>
-            <a:srgbClr val="2F8A28"/>
-          </a:solidFill>
-          <a:ln w="12700">
-            <a:solidFill>
-              <a:srgbClr val="2F8A28"/>
-            </a:solidFill>
-            <a:prstDash val="solid"/>
-          </a:ln>
-        </p:spPr>
-      </p:sp>
-      <p:sp>
-        <p:nvSpPr>
-          <p:cNvPr id="17" name="Text 15"/>
-          <p:cNvSpPr/>
-          <p:nvPr/>
-        </p:nvSpPr>
-        <p:spPr>
-          <a:xfrm>
-            <a:off x="9049512" y="3511296"/>
-            <a:ext cx="646176" cy="310896"/>
-          </a:xfrm>
-          <a:prstGeom prst="rect">
-            <a:avLst/>
-          </a:prstGeom>
-          <a:noFill/>
-          <a:ln/>
-        </p:spPr>
-        <p:txBody>
-          <a:bodyPr wrap="square" lIns="0" tIns="0" rIns="0" bIns="0" rtlCol="0" anchor="ctr">
-            <a:normAutofit/>
-          </a:bodyPr>
-          <a:lstStyle/>
-          <a:p>
-            <a:pPr algn="ctr" indent="0" marL="0">
-              <a:buNone/>
-            </a:pPr>
-            <a:r>
-              <a:rPr lang="en-US" sz="1500" b="1" dirty="0">
-                <a:solidFill>
-                  <a:srgbClr val="FFFFFF"/>
-                </a:solidFill>
-                <a:latin typeface="Aptos" pitchFamily="34" charset="0"/>
-                <a:ea typeface="Aptos" pitchFamily="34" charset="-122"/>
-                <a:cs typeface="Aptos" pitchFamily="34" charset="-120"/>
-              </a:rPr>
-              <a:t>Do</a:t>
-            </a:r>
-            <a:endParaRPr lang="en-US" sz="1500" dirty="0"/>
-          </a:p>
-        </p:txBody>
-      </p:sp>
-      <p:sp>
-        <p:nvSpPr>
-          <p:cNvPr id="18" name="Shape 16"/>
-          <p:cNvSpPr/>
-          <p:nvPr/>
-        </p:nvSpPr>
-        <p:spPr>
-          <a:xfrm>
-            <a:off x="10024872" y="3319272"/>
-            <a:ext cx="792480" cy="749808"/>
-          </a:xfrm>
-          <a:prstGeom prst="roundRect">
-            <a:avLst>
-              <a:gd name="adj" fmla="val 14634"/>
-            </a:avLst>
-          </a:prstGeom>
-          <a:solidFill>
-            <a:srgbClr val="D69A2D"/>
-          </a:solidFill>
-          <a:ln w="12700">
-            <a:solidFill>
-              <a:srgbClr val="D69A2D"/>
-            </a:solidFill>
-            <a:prstDash val="solid"/>
-          </a:ln>
-        </p:spPr>
-      </p:sp>
-      <p:sp>
-        <p:nvSpPr>
-          <p:cNvPr id="19" name="Text 17"/>
-          <p:cNvSpPr/>
-          <p:nvPr/>
-        </p:nvSpPr>
-        <p:spPr>
-          <a:xfrm>
-            <a:off x="10098024" y="3511296"/>
-            <a:ext cx="646176" cy="310896"/>
-          </a:xfrm>
-          <a:prstGeom prst="rect">
-            <a:avLst/>
-          </a:prstGeom>
-          <a:noFill/>
-          <a:ln/>
-        </p:spPr>
-        <p:txBody>
-          <a:bodyPr wrap="square" lIns="0" tIns="0" rIns="0" bIns="0" rtlCol="0" anchor="ctr">
-            <a:normAutofit/>
-          </a:bodyPr>
-          <a:lstStyle/>
-          <a:p>
-            <a:pPr algn="ctr" indent="0" marL="0">
-              <a:buNone/>
-            </a:pPr>
-            <a:r>
-              <a:rPr lang="en-US" sz="1500" b="1" dirty="0">
-                <a:solidFill>
-                  <a:srgbClr val="FFFFFF"/>
-                </a:solidFill>
-                <a:latin typeface="Aptos" pitchFamily="34" charset="0"/>
-                <a:ea typeface="Aptos" pitchFamily="34" charset="-122"/>
-                <a:cs typeface="Aptos" pitchFamily="34" charset="-120"/>
-              </a:rPr>
-              <a:t>Review</a:t>
-            </a:r>
-            <a:endParaRPr lang="en-US" sz="1500" dirty="0"/>
-          </a:p>
-        </p:txBody>
-      </p:sp>
-      <p:sp>
-        <p:nvSpPr>
-          <p:cNvPr id="20" name="Shape 18"/>
-          <p:cNvSpPr/>
-          <p:nvPr/>
-        </p:nvSpPr>
-        <p:spPr>
-          <a:xfrm>
-            <a:off x="8293608" y="4389120"/>
-            <a:ext cx="2157984" cy="0"/>
-          </a:xfrm>
-          <a:prstGeom prst="line">
-            <a:avLst/>
-          </a:prstGeom>
-          <a:noFill/>
-          <a:ln w="25400">
-            <a:solidFill>
-              <a:srgbClr val="8ABBD8"/>
-            </a:solidFill>
-            <a:prstDash val="solid"/>
-          </a:ln>
-        </p:spPr>
-      </p:sp>
-      <p:sp>
-        <p:nvSpPr>
-          <p:cNvPr id="21" name="Text 19"/>
-          <p:cNvSpPr/>
-          <p:nvPr/>
-        </p:nvSpPr>
-        <p:spPr>
-          <a:xfrm>
-            <a:off x="7909560" y="3977640"/>
-            <a:ext cx="2926080" cy="182880"/>
-          </a:xfrm>
-          <a:prstGeom prst="rect">
-            <a:avLst/>
-          </a:prstGeom>
-          <a:noFill/>
-          <a:ln/>
-        </p:spPr>
-        <p:txBody>
-          <a:bodyPr wrap="square" lIns="0" tIns="0" rIns="0" bIns="0" rtlCol="0" anchor="ctr"/>
-          <a:lstStyle/>
-          <a:p>
-            <a:pPr algn="ctr" indent="0" marL="0">
-              <a:buNone/>
-            </a:pPr>
-            <a:r>
-              <a:rPr lang="en-US" sz="1000" dirty="0">
-                <a:solidFill>
-                  <a:srgbClr val="003A63"/>
-                </a:solidFill>
-                <a:latin typeface="Aptos" pitchFamily="34" charset="0"/>
-                <a:ea typeface="Aptos" pitchFamily="34" charset="-122"/>
-                <a:cs typeface="Aptos" pitchFamily="34" charset="-120"/>
-              </a:rPr>
-              <a:t>Dependencies visible</a:t>
-            </a:r>
-            <a:endParaRPr lang="en-US" sz="1000" dirty="0"/>
-          </a:p>
-        </p:txBody>
-      </p:sp>
-      <p:sp>
-        <p:nvSpPr>
-          <p:cNvPr id="22" name="Shape 20"/>
           <p:cNvSpPr/>
           <p:nvPr/>
         </p:nvSpPr>
@@ -7447,7 +7215,7 @@
       </p:sp>
       <p:sp>
         <p:nvSpPr>
-          <p:cNvPr id="23" name="Text 21"/>
+          <p:cNvPr id="17" name="Text 15"/>
           <p:cNvSpPr/>
           <p:nvPr/>
         </p:nvSpPr>
@@ -7486,7 +7254,7 @@
       </p:sp>
       <p:sp>
         <p:nvSpPr>
-          <p:cNvPr id="24" name="Text 22"/>
+          <p:cNvPr id="18" name="Text 16"/>
           <p:cNvSpPr/>
           <p:nvPr/>
         </p:nvSpPr>
@@ -7994,13 +7762,11 @@
             </a:avLst>
           </a:prstGeom>
           <a:solidFill>
-            <a:srgbClr val="FFFFFF">
-              <a:alpha val="88000"/>
-            </a:srgbClr>
+            <a:srgbClr val="FFFFFF"/>
           </a:solidFill>
           <a:ln w="12700">
             <a:solidFill>
-              <a:srgbClr val="D6E8F2"/>
+              <a:srgbClr val="B9D7E6"/>
             </a:solidFill>
             <a:prstDash val="solid"/>
           </a:ln>
@@ -8008,119 +7774,112 @@
       </p:sp>
       <p:sp>
         <p:nvSpPr>
-          <p:cNvPr id="14" name="Shape 12"/>
-          <p:cNvSpPr/>
-          <p:nvPr/>
-        </p:nvSpPr>
-        <p:spPr>
-          <a:xfrm>
-            <a:off x="8074152" y="3291840"/>
-            <a:ext cx="2596896" cy="749808"/>
-          </a:xfrm>
-          <a:prstGeom prst="rect">
-            <a:avLst/>
-          </a:prstGeom>
-          <a:solidFill>
-            <a:srgbClr val="EAF6F8"/>
-          </a:solidFill>
-          <a:ln w="12700">
-            <a:solidFill>
-              <a:srgbClr val="8ABBD8"/>
-            </a:solidFill>
-            <a:prstDash val="solid"/>
-          </a:ln>
-        </p:spPr>
-      </p:sp>
-      <p:sp>
-        <p:nvSpPr>
-          <p:cNvPr id="15" name="Shape 13"/>
-          <p:cNvSpPr/>
-          <p:nvPr/>
-        </p:nvSpPr>
-        <p:spPr>
-          <a:xfrm>
-            <a:off x="8202168" y="3721608"/>
-            <a:ext cx="2340864" cy="0"/>
-          </a:xfrm>
-          <a:prstGeom prst="line">
-            <a:avLst/>
-          </a:prstGeom>
-          <a:noFill/>
-          <a:ln w="19050">
-            <a:solidFill>
-              <a:srgbClr val="0068B7"/>
-            </a:solidFill>
-            <a:prstDash val="solid"/>
-          </a:ln>
-        </p:spPr>
+          <p:cNvPr id="14" name="Text 12"/>
+          <p:cNvSpPr/>
+          <p:nvPr/>
+        </p:nvSpPr>
+        <p:spPr>
+          <a:xfrm>
+            <a:off x="7799832" y="2935224"/>
+            <a:ext cx="3145536" cy="256032"/>
+          </a:xfrm>
+          <a:prstGeom prst="rect">
+            <a:avLst/>
+          </a:prstGeom>
+          <a:noFill/>
+          <a:ln/>
+        </p:spPr>
+        <p:txBody>
+          <a:bodyPr wrap="square" lIns="0" tIns="0" rIns="0" bIns="0" rtlCol="0" anchor="ctr"/>
+          <a:lstStyle/>
+          <a:p>
+            <a:pPr indent="0" marL="0">
+              <a:buNone/>
+            </a:pPr>
+            <a:r>
+              <a:rPr lang="en-US" sz="1300" b="1" dirty="0">
+                <a:solidFill>
+                  <a:srgbClr val="0068B7"/>
+                </a:solidFill>
+                <a:latin typeface="Aptos" pitchFamily="34" charset="0"/>
+                <a:ea typeface="Aptos" pitchFamily="34" charset="-122"/>
+                <a:cs typeface="Aptos" pitchFamily="34" charset="-120"/>
+              </a:rPr>
+              <a:t>Concept checkpoints</a:t>
+            </a:r>
+            <a:endParaRPr lang="en-US" sz="1300" dirty="0"/>
+          </a:p>
+        </p:txBody>
+      </p:sp>
+      <p:sp>
+        <p:nvSpPr>
+          <p:cNvPr id="15" name="Text 13"/>
+          <p:cNvSpPr/>
+          <p:nvPr/>
+        </p:nvSpPr>
+        <p:spPr>
+          <a:xfrm>
+            <a:off x="7818120" y="3300984"/>
+            <a:ext cx="3090672" cy="877824"/>
+          </a:xfrm>
+          <a:prstGeom prst="rect">
+            <a:avLst/>
+          </a:prstGeom>
+          <a:noFill/>
+          <a:ln/>
+        </p:spPr>
+        <p:txBody>
+          <a:bodyPr wrap="square" lIns="254" tIns="254" rIns="254" bIns="254" rtlCol="0" anchor="t">
+            <a:normAutofit/>
+          </a:bodyPr>
+          <a:lstStyle/>
+          <a:p>
+            <a:r>
+              <a:rPr lang="en-US" sz="1380" dirty="0">
+                <a:solidFill>
+                  <a:srgbClr val="17364A"/>
+                </a:solidFill>
+                <a:latin typeface="Aptos" pitchFamily="34" charset="0"/>
+                <a:ea typeface="Aptos" pitchFamily="34" charset="-122"/>
+                <a:cs typeface="Aptos" pitchFamily="34" charset="-120"/>
+              </a:rPr>
+              <a:t>Which standards are used in your agency’s major data exchange workflows?</a:t>
+            </a:r>
+            <a:endParaRPr lang="en-US" sz="1380" dirty="0"/>
+          </a:p>
+          <a:p>
+            <a:r>
+              <a:rPr lang="en-US" sz="1380" dirty="0">
+                <a:solidFill>
+                  <a:srgbClr val="17364A"/>
+                </a:solidFill>
+                <a:latin typeface="Aptos" pitchFamily="34" charset="0"/>
+                <a:ea typeface="Aptos" pitchFamily="34" charset="-122"/>
+                <a:cs typeface="Aptos" pitchFamily="34" charset="-120"/>
+              </a:rPr>
+              <a:t>Which workflows still depend on manual uploads or copy-paste processes?</a:t>
+            </a:r>
+            <a:endParaRPr lang="en-US" sz="1380" dirty="0"/>
+          </a:p>
+          <a:p>
+            <a:r>
+              <a:rPr lang="en-US" sz="1380" dirty="0">
+                <a:solidFill>
+                  <a:srgbClr val="17364A"/>
+                </a:solidFill>
+                <a:latin typeface="Aptos" pitchFamily="34" charset="0"/>
+                <a:ea typeface="Aptos" pitchFamily="34" charset="-122"/>
+                <a:cs typeface="Aptos" pitchFamily="34" charset="-120"/>
+              </a:rPr>
+              <a:t>What vendor claims would need to be tested before implementation?</a:t>
+            </a:r>
+            <a:endParaRPr lang="en-US" sz="1380" dirty="0"/>
+          </a:p>
+        </p:txBody>
       </p:sp>
       <p:sp>
         <p:nvSpPr>
           <p:cNvPr id="16" name="Shape 14"/>
-          <p:cNvSpPr/>
-          <p:nvPr/>
-        </p:nvSpPr>
-        <p:spPr>
-          <a:xfrm>
-            <a:off x="9198864" y="4206240"/>
-            <a:ext cx="347472" cy="347472"/>
-          </a:xfrm>
-          <a:prstGeom prst="ellipse">
-            <a:avLst/>
-          </a:prstGeom>
-          <a:solidFill>
-            <a:srgbClr val="2F8A28"/>
-          </a:solidFill>
-          <a:ln w="12700">
-            <a:solidFill>
-              <a:srgbClr val="2F8A28"/>
-            </a:solidFill>
-            <a:prstDash val="solid"/>
-          </a:ln>
-        </p:spPr>
-      </p:sp>
-      <p:sp>
-        <p:nvSpPr>
-          <p:cNvPr id="17" name="Text 15"/>
-          <p:cNvSpPr/>
-          <p:nvPr/>
-        </p:nvSpPr>
-        <p:spPr>
-          <a:xfrm>
-            <a:off x="7909560" y="3977640"/>
-            <a:ext cx="2926080" cy="182880"/>
-          </a:xfrm>
-          <a:prstGeom prst="rect">
-            <a:avLst/>
-          </a:prstGeom>
-          <a:noFill/>
-          <a:ln/>
-        </p:spPr>
-        <p:txBody>
-          <a:bodyPr wrap="square" lIns="0" tIns="0" rIns="0" bIns="0" rtlCol="0" anchor="ctr"/>
-          <a:lstStyle/>
-          <a:p>
-            <a:pPr algn="ctr" indent="0" marL="0">
-              <a:buNone/>
-            </a:pPr>
-            <a:r>
-              <a:rPr lang="en-US" sz="1000" dirty="0">
-                <a:solidFill>
-                  <a:srgbClr val="003A63"/>
-                </a:solidFill>
-                <a:latin typeface="Aptos" pitchFamily="34" charset="0"/>
-                <a:ea typeface="Aptos" pitchFamily="34" charset="-122"/>
-                <a:cs typeface="Aptos" pitchFamily="34" charset="-120"/>
-              </a:rPr>
-              <a:t>Concept to action</a:t>
-            </a:r>
-            <a:endParaRPr lang="en-US" sz="1000" dirty="0"/>
-          </a:p>
-        </p:txBody>
-      </p:sp>
-      <p:sp>
-        <p:nvSpPr>
-          <p:cNvPr id="18" name="Shape 16"/>
           <p:cNvSpPr/>
           <p:nvPr/>
         </p:nvSpPr>
@@ -8147,7 +7906,7 @@
       </p:sp>
       <p:sp>
         <p:nvSpPr>
-          <p:cNvPr id="19" name="Text 17"/>
+          <p:cNvPr id="17" name="Text 15"/>
           <p:cNvSpPr/>
           <p:nvPr/>
         </p:nvSpPr>
@@ -8186,7 +7945,7 @@
       </p:sp>
       <p:sp>
         <p:nvSpPr>
-          <p:cNvPr id="20" name="Text 18"/>
+          <p:cNvPr id="18" name="Text 16"/>
           <p:cNvSpPr/>
           <p:nvPr/>
         </p:nvSpPr>
@@ -8680,13 +8439,11 @@
             </a:avLst>
           </a:prstGeom>
           <a:solidFill>
-            <a:srgbClr val="FFFFFF">
-              <a:alpha val="88000"/>
-            </a:srgbClr>
+            <a:srgbClr val="FFFFFF"/>
           </a:solidFill>
           <a:ln w="12700">
             <a:solidFill>
-              <a:srgbClr val="D6E8F2"/>
+              <a:srgbClr val="B9D7E6"/>
             </a:solidFill>
             <a:prstDash val="solid"/>
           </a:ln>
@@ -8694,119 +8451,98 @@
       </p:sp>
       <p:sp>
         <p:nvSpPr>
-          <p:cNvPr id="14" name="Shape 12"/>
-          <p:cNvSpPr/>
-          <p:nvPr/>
-        </p:nvSpPr>
-        <p:spPr>
-          <a:xfrm>
-            <a:off x="8074152" y="3291840"/>
-            <a:ext cx="2596896" cy="749808"/>
-          </a:xfrm>
-          <a:prstGeom prst="rect">
-            <a:avLst/>
-          </a:prstGeom>
-          <a:solidFill>
-            <a:srgbClr val="EAF6F8"/>
-          </a:solidFill>
-          <a:ln w="12700">
-            <a:solidFill>
-              <a:srgbClr val="8ABBD8"/>
-            </a:solidFill>
-            <a:prstDash val="solid"/>
-          </a:ln>
-        </p:spPr>
-      </p:sp>
-      <p:sp>
-        <p:nvSpPr>
-          <p:cNvPr id="15" name="Shape 13"/>
-          <p:cNvSpPr/>
-          <p:nvPr/>
-        </p:nvSpPr>
-        <p:spPr>
-          <a:xfrm>
-            <a:off x="8202168" y="3721608"/>
-            <a:ext cx="2340864" cy="0"/>
-          </a:xfrm>
-          <a:prstGeom prst="line">
-            <a:avLst/>
-          </a:prstGeom>
-          <a:noFill/>
-          <a:ln w="19050">
-            <a:solidFill>
-              <a:srgbClr val="0068B7"/>
-            </a:solidFill>
-            <a:prstDash val="solid"/>
-          </a:ln>
-        </p:spPr>
+          <p:cNvPr id="14" name="Text 12"/>
+          <p:cNvSpPr/>
+          <p:nvPr/>
+        </p:nvSpPr>
+        <p:spPr>
+          <a:xfrm>
+            <a:off x="7799832" y="2935224"/>
+            <a:ext cx="3145536" cy="256032"/>
+          </a:xfrm>
+          <a:prstGeom prst="rect">
+            <a:avLst/>
+          </a:prstGeom>
+          <a:noFill/>
+          <a:ln/>
+        </p:spPr>
+        <p:txBody>
+          <a:bodyPr wrap="square" lIns="0" tIns="0" rIns="0" bIns="0" rtlCol="0" anchor="ctr"/>
+          <a:lstStyle/>
+          <a:p>
+            <a:pPr indent="0" marL="0">
+              <a:buNone/>
+            </a:pPr>
+            <a:r>
+              <a:rPr lang="en-US" sz="1300" b="1" dirty="0">
+                <a:solidFill>
+                  <a:srgbClr val="0068B7"/>
+                </a:solidFill>
+                <a:latin typeface="Aptos" pitchFamily="34" charset="0"/>
+                <a:ea typeface="Aptos" pitchFamily="34" charset="-122"/>
+                <a:cs typeface="Aptos" pitchFamily="34" charset="-120"/>
+              </a:rPr>
+              <a:t>Concept checkpoints</a:t>
+            </a:r>
+            <a:endParaRPr lang="en-US" sz="1300" dirty="0"/>
+          </a:p>
+        </p:txBody>
+      </p:sp>
+      <p:sp>
+        <p:nvSpPr>
+          <p:cNvPr id="15" name="Text 13"/>
+          <p:cNvSpPr/>
+          <p:nvPr/>
+        </p:nvSpPr>
+        <p:spPr>
+          <a:xfrm>
+            <a:off x="7818120" y="3300984"/>
+            <a:ext cx="3090672" cy="877824"/>
+          </a:xfrm>
+          <a:prstGeom prst="rect">
+            <a:avLst/>
+          </a:prstGeom>
+          <a:noFill/>
+          <a:ln/>
+        </p:spPr>
+        <p:txBody>
+          <a:bodyPr wrap="square" lIns="254" tIns="254" rIns="254" bIns="254" rtlCol="0" anchor="t">
+            <a:normAutofit/>
+          </a:bodyPr>
+          <a:lstStyle/>
+          <a:p>
+            <a:r>
+              <a:rPr lang="en-US" sz="1380" dirty="0">
+                <a:solidFill>
+                  <a:srgbClr val="17364A"/>
+                </a:solidFill>
+                <a:latin typeface="Aptos" pitchFamily="34" charset="0"/>
+                <a:ea typeface="Aptos" pitchFamily="34" charset="-122"/>
+                <a:cs typeface="Aptos" pitchFamily="34" charset="-120"/>
+              </a:rPr>
+              <a:t>Which terminology standards are required for the workflow?</a:t>
+            </a:r>
+            <a:endParaRPr lang="en-US" sz="1380" dirty="0"/>
+          </a:p>
+          <a:p>
+            <a:r>
+              <a:rPr lang="en-US" sz="1380" dirty="0">
+                <a:solidFill>
+                  <a:srgbClr val="17364A"/>
+                </a:solidFill>
+                <a:latin typeface="Aptos" pitchFamily="34" charset="0"/>
+                <a:ea typeface="Aptos" pitchFamily="34" charset="-122"/>
+                <a:cs typeface="Aptos" pitchFamily="34" charset="-120"/>
+              </a:rPr>
+              <a:t>How would interoperability gaps affect AI outputs or equity?</a:t>
+            </a:r>
+            <a:endParaRPr lang="en-US" sz="1380" dirty="0"/>
+          </a:p>
+        </p:txBody>
       </p:sp>
       <p:sp>
         <p:nvSpPr>
           <p:cNvPr id="16" name="Shape 14"/>
-          <p:cNvSpPr/>
-          <p:nvPr/>
-        </p:nvSpPr>
-        <p:spPr>
-          <a:xfrm>
-            <a:off x="9198864" y="4206240"/>
-            <a:ext cx="347472" cy="347472"/>
-          </a:xfrm>
-          <a:prstGeom prst="ellipse">
-            <a:avLst/>
-          </a:prstGeom>
-          <a:solidFill>
-            <a:srgbClr val="2F8A28"/>
-          </a:solidFill>
-          <a:ln w="12700">
-            <a:solidFill>
-              <a:srgbClr val="2F8A28"/>
-            </a:solidFill>
-            <a:prstDash val="solid"/>
-          </a:ln>
-        </p:spPr>
-      </p:sp>
-      <p:sp>
-        <p:nvSpPr>
-          <p:cNvPr id="17" name="Text 15"/>
-          <p:cNvSpPr/>
-          <p:nvPr/>
-        </p:nvSpPr>
-        <p:spPr>
-          <a:xfrm>
-            <a:off x="7909560" y="3977640"/>
-            <a:ext cx="2926080" cy="182880"/>
-          </a:xfrm>
-          <a:prstGeom prst="rect">
-            <a:avLst/>
-          </a:prstGeom>
-          <a:noFill/>
-          <a:ln/>
-        </p:spPr>
-        <p:txBody>
-          <a:bodyPr wrap="square" lIns="0" tIns="0" rIns="0" bIns="0" rtlCol="0" anchor="ctr"/>
-          <a:lstStyle/>
-          <a:p>
-            <a:pPr algn="ctr" indent="0" marL="0">
-              <a:buNone/>
-            </a:pPr>
-            <a:r>
-              <a:rPr lang="en-US" sz="1000" dirty="0">
-                <a:solidFill>
-                  <a:srgbClr val="003A63"/>
-                </a:solidFill>
-                <a:latin typeface="Aptos" pitchFamily="34" charset="0"/>
-                <a:ea typeface="Aptos" pitchFamily="34" charset="-122"/>
-                <a:cs typeface="Aptos" pitchFamily="34" charset="-120"/>
-              </a:rPr>
-              <a:t>Concept to action</a:t>
-            </a:r>
-            <a:endParaRPr lang="en-US" sz="1000" dirty="0"/>
-          </a:p>
-        </p:txBody>
-      </p:sp>
-      <p:sp>
-        <p:nvSpPr>
-          <p:cNvPr id="18" name="Shape 16"/>
           <p:cNvSpPr/>
           <p:nvPr/>
         </p:nvSpPr>
@@ -8833,7 +8569,7 @@
       </p:sp>
       <p:sp>
         <p:nvSpPr>
-          <p:cNvPr id="19" name="Text 17"/>
+          <p:cNvPr id="17" name="Text 15"/>
           <p:cNvSpPr/>
           <p:nvPr/>
         </p:nvSpPr>
@@ -8872,7 +8608,7 @@
       </p:sp>
       <p:sp>
         <p:nvSpPr>
-          <p:cNvPr id="20" name="Text 18"/>
+          <p:cNvPr id="18" name="Text 16"/>
           <p:cNvSpPr/>
           <p:nvPr/>
         </p:nvSpPr>
@@ -9380,13 +9116,11 @@
             </a:avLst>
           </a:prstGeom>
           <a:solidFill>
-            <a:srgbClr val="FFFFFF">
-              <a:alpha val="88000"/>
-            </a:srgbClr>
+            <a:srgbClr val="FFFFFF"/>
           </a:solidFill>
           <a:ln w="12700">
             <a:solidFill>
-              <a:srgbClr val="D6E8F2"/>
+              <a:srgbClr val="B9D7E6"/>
             </a:solidFill>
             <a:prstDash val="solid"/>
           </a:ln>
@@ -9394,119 +9128,98 @@
       </p:sp>
       <p:sp>
         <p:nvSpPr>
-          <p:cNvPr id="14" name="Shape 12"/>
-          <p:cNvSpPr/>
-          <p:nvPr/>
-        </p:nvSpPr>
-        <p:spPr>
-          <a:xfrm>
-            <a:off x="8074152" y="3291840"/>
-            <a:ext cx="2596896" cy="749808"/>
-          </a:xfrm>
-          <a:prstGeom prst="rect">
-            <a:avLst/>
-          </a:prstGeom>
-          <a:solidFill>
-            <a:srgbClr val="EAF6F8"/>
-          </a:solidFill>
-          <a:ln w="12700">
-            <a:solidFill>
-              <a:srgbClr val="8ABBD8"/>
-            </a:solidFill>
-            <a:prstDash val="solid"/>
-          </a:ln>
-        </p:spPr>
-      </p:sp>
-      <p:sp>
-        <p:nvSpPr>
-          <p:cNvPr id="15" name="Shape 13"/>
-          <p:cNvSpPr/>
-          <p:nvPr/>
-        </p:nvSpPr>
-        <p:spPr>
-          <a:xfrm>
-            <a:off x="8202168" y="3721608"/>
-            <a:ext cx="2340864" cy="0"/>
-          </a:xfrm>
-          <a:prstGeom prst="line">
-            <a:avLst/>
-          </a:prstGeom>
-          <a:noFill/>
-          <a:ln w="19050">
-            <a:solidFill>
-              <a:srgbClr val="0068B7"/>
-            </a:solidFill>
-            <a:prstDash val="solid"/>
-          </a:ln>
-        </p:spPr>
+          <p:cNvPr id="14" name="Text 12"/>
+          <p:cNvSpPr/>
+          <p:nvPr/>
+        </p:nvSpPr>
+        <p:spPr>
+          <a:xfrm>
+            <a:off x="7799832" y="2935224"/>
+            <a:ext cx="3145536" cy="256032"/>
+          </a:xfrm>
+          <a:prstGeom prst="rect">
+            <a:avLst/>
+          </a:prstGeom>
+          <a:noFill/>
+          <a:ln/>
+        </p:spPr>
+        <p:txBody>
+          <a:bodyPr wrap="square" lIns="0" tIns="0" rIns="0" bIns="0" rtlCol="0" anchor="ctr"/>
+          <a:lstStyle/>
+          <a:p>
+            <a:pPr indent="0" marL="0">
+              <a:buNone/>
+            </a:pPr>
+            <a:r>
+              <a:rPr lang="en-US" sz="1300" b="1" dirty="0">
+                <a:solidFill>
+                  <a:srgbClr val="0068B7"/>
+                </a:solidFill>
+                <a:latin typeface="Aptos" pitchFamily="34" charset="0"/>
+                <a:ea typeface="Aptos" pitchFamily="34" charset="-122"/>
+                <a:cs typeface="Aptos" pitchFamily="34" charset="-120"/>
+              </a:rPr>
+              <a:t>Concept checkpoints</a:t>
+            </a:r>
+            <a:endParaRPr lang="en-US" sz="1300" dirty="0"/>
+          </a:p>
+        </p:txBody>
+      </p:sp>
+      <p:sp>
+        <p:nvSpPr>
+          <p:cNvPr id="15" name="Text 13"/>
+          <p:cNvSpPr/>
+          <p:nvPr/>
+        </p:nvSpPr>
+        <p:spPr>
+          <a:xfrm>
+            <a:off x="7818120" y="3300984"/>
+            <a:ext cx="3090672" cy="877824"/>
+          </a:xfrm>
+          <a:prstGeom prst="rect">
+            <a:avLst/>
+          </a:prstGeom>
+          <a:noFill/>
+          <a:ln/>
+        </p:spPr>
+        <p:txBody>
+          <a:bodyPr wrap="square" lIns="254" tIns="254" rIns="254" bIns="254" rtlCol="0" anchor="t">
+            <a:normAutofit/>
+          </a:bodyPr>
+          <a:lstStyle/>
+          <a:p>
+            <a:r>
+              <a:rPr lang="en-US" sz="1380" dirty="0">
+                <a:solidFill>
+                  <a:srgbClr val="17364A"/>
+                </a:solidFill>
+                <a:latin typeface="Aptos" pitchFamily="34" charset="0"/>
+                <a:ea typeface="Aptos" pitchFamily="34" charset="-122"/>
+                <a:cs typeface="Aptos" pitchFamily="34" charset="-120"/>
+              </a:rPr>
+              <a:t>Identify the sending and receiving systems, exchange standard, required data elements,.</a:t>
+            </a:r>
+            <a:endParaRPr lang="en-US" sz="1380" dirty="0"/>
+          </a:p>
+          <a:p>
+            <a:r>
+              <a:rPr lang="en-US" sz="1380" dirty="0">
+                <a:solidFill>
+                  <a:srgbClr val="17364A"/>
+                </a:solidFill>
+                <a:latin typeface="Aptos" pitchFamily="34" charset="0"/>
+                <a:ea typeface="Aptos" pitchFamily="34" charset="-122"/>
+                <a:cs typeface="Aptos" pitchFamily="34" charset="-120"/>
+              </a:rPr>
+              <a:t>Include at least one test scenario that would show whether the exchange supports the.</a:t>
+            </a:r>
+            <a:endParaRPr lang="en-US" sz="1380" dirty="0"/>
+          </a:p>
+        </p:txBody>
       </p:sp>
       <p:sp>
         <p:nvSpPr>
           <p:cNvPr id="16" name="Shape 14"/>
-          <p:cNvSpPr/>
-          <p:nvPr/>
-        </p:nvSpPr>
-        <p:spPr>
-          <a:xfrm>
-            <a:off x="9198864" y="4206240"/>
-            <a:ext cx="347472" cy="347472"/>
-          </a:xfrm>
-          <a:prstGeom prst="ellipse">
-            <a:avLst/>
-          </a:prstGeom>
-          <a:solidFill>
-            <a:srgbClr val="2F8A28"/>
-          </a:solidFill>
-          <a:ln w="12700">
-            <a:solidFill>
-              <a:srgbClr val="2F8A28"/>
-            </a:solidFill>
-            <a:prstDash val="solid"/>
-          </a:ln>
-        </p:spPr>
-      </p:sp>
-      <p:sp>
-        <p:nvSpPr>
-          <p:cNvPr id="17" name="Text 15"/>
-          <p:cNvSpPr/>
-          <p:nvPr/>
-        </p:nvSpPr>
-        <p:spPr>
-          <a:xfrm>
-            <a:off x="7909560" y="3977640"/>
-            <a:ext cx="2926080" cy="182880"/>
-          </a:xfrm>
-          <a:prstGeom prst="rect">
-            <a:avLst/>
-          </a:prstGeom>
-          <a:noFill/>
-          <a:ln/>
-        </p:spPr>
-        <p:txBody>
-          <a:bodyPr wrap="square" lIns="0" tIns="0" rIns="0" bIns="0" rtlCol="0" anchor="ctr"/>
-          <a:lstStyle/>
-          <a:p>
-            <a:pPr algn="ctr" indent="0" marL="0">
-              <a:buNone/>
-            </a:pPr>
-            <a:r>
-              <a:rPr lang="en-US" sz="1000" dirty="0">
-                <a:solidFill>
-                  <a:srgbClr val="003A63"/>
-                </a:solidFill>
-                <a:latin typeface="Aptos" pitchFamily="34" charset="0"/>
-                <a:ea typeface="Aptos" pitchFamily="34" charset="-122"/>
-                <a:cs typeface="Aptos" pitchFamily="34" charset="-120"/>
-              </a:rPr>
-              <a:t>Concept to action</a:t>
-            </a:r>
-            <a:endParaRPr lang="en-US" sz="1000" dirty="0"/>
-          </a:p>
-        </p:txBody>
-      </p:sp>
-      <p:sp>
-        <p:nvSpPr>
-          <p:cNvPr id="18" name="Shape 16"/>
           <p:cNvSpPr/>
           <p:nvPr/>
         </p:nvSpPr>
@@ -9533,7 +9246,7 @@
       </p:sp>
       <p:sp>
         <p:nvSpPr>
-          <p:cNvPr id="19" name="Text 17"/>
+          <p:cNvPr id="17" name="Text 15"/>
           <p:cNvSpPr/>
           <p:nvPr/>
         </p:nvSpPr>
@@ -9572,7 +9285,7 @@
       </p:sp>
       <p:sp>
         <p:nvSpPr>
-          <p:cNvPr id="20" name="Text 18"/>
+          <p:cNvPr id="18" name="Text 16"/>
           <p:cNvSpPr/>
           <p:nvPr/>
         </p:nvSpPr>
@@ -10080,13 +9793,11 @@
             </a:avLst>
           </a:prstGeom>
           <a:solidFill>
-            <a:srgbClr val="FFFFFF">
-              <a:alpha val="88000"/>
-            </a:srgbClr>
+            <a:srgbClr val="FFFFFF"/>
           </a:solidFill>
           <a:ln w="12700">
             <a:solidFill>
-              <a:srgbClr val="D6E8F2"/>
+              <a:srgbClr val="B9D7E6"/>
             </a:solidFill>
             <a:prstDash val="solid"/>
           </a:ln>
@@ -10094,119 +9805,112 @@
       </p:sp>
       <p:sp>
         <p:nvSpPr>
-          <p:cNvPr id="14" name="Shape 12"/>
-          <p:cNvSpPr/>
-          <p:nvPr/>
-        </p:nvSpPr>
-        <p:spPr>
-          <a:xfrm>
-            <a:off x="8074152" y="3291840"/>
-            <a:ext cx="2596896" cy="749808"/>
-          </a:xfrm>
-          <a:prstGeom prst="rect">
-            <a:avLst/>
-          </a:prstGeom>
-          <a:solidFill>
-            <a:srgbClr val="EAF6F8"/>
-          </a:solidFill>
-          <a:ln w="12700">
-            <a:solidFill>
-              <a:srgbClr val="8ABBD8"/>
-            </a:solidFill>
-            <a:prstDash val="solid"/>
-          </a:ln>
-        </p:spPr>
-      </p:sp>
-      <p:sp>
-        <p:nvSpPr>
-          <p:cNvPr id="15" name="Shape 13"/>
-          <p:cNvSpPr/>
-          <p:nvPr/>
-        </p:nvSpPr>
-        <p:spPr>
-          <a:xfrm>
-            <a:off x="8202168" y="3721608"/>
-            <a:ext cx="2340864" cy="0"/>
-          </a:xfrm>
-          <a:prstGeom prst="line">
-            <a:avLst/>
-          </a:prstGeom>
-          <a:noFill/>
-          <a:ln w="19050">
-            <a:solidFill>
-              <a:srgbClr val="0068B7"/>
-            </a:solidFill>
-            <a:prstDash val="solid"/>
-          </a:ln>
-        </p:spPr>
+          <p:cNvPr id="14" name="Text 12"/>
+          <p:cNvSpPr/>
+          <p:nvPr/>
+        </p:nvSpPr>
+        <p:spPr>
+          <a:xfrm>
+            <a:off x="7799832" y="2935224"/>
+            <a:ext cx="3145536" cy="256032"/>
+          </a:xfrm>
+          <a:prstGeom prst="rect">
+            <a:avLst/>
+          </a:prstGeom>
+          <a:noFill/>
+          <a:ln/>
+        </p:spPr>
+        <p:txBody>
+          <a:bodyPr wrap="square" lIns="0" tIns="0" rIns="0" bIns="0" rtlCol="0" anchor="ctr"/>
+          <a:lstStyle/>
+          <a:p>
+            <a:pPr indent="0" marL="0">
+              <a:buNone/>
+            </a:pPr>
+            <a:r>
+              <a:rPr lang="en-US" sz="1300" b="1" dirty="0">
+                <a:solidFill>
+                  <a:srgbClr val="0068B7"/>
+                </a:solidFill>
+                <a:latin typeface="Aptos" pitchFamily="34" charset="0"/>
+                <a:ea typeface="Aptos" pitchFamily="34" charset="-122"/>
+                <a:cs typeface="Aptos" pitchFamily="34" charset="-120"/>
+              </a:rPr>
+              <a:t>Concept checkpoints</a:t>
+            </a:r>
+            <a:endParaRPr lang="en-US" sz="1300" dirty="0"/>
+          </a:p>
+        </p:txBody>
+      </p:sp>
+      <p:sp>
+        <p:nvSpPr>
+          <p:cNvPr id="15" name="Text 13"/>
+          <p:cNvSpPr/>
+          <p:nvPr/>
+        </p:nvSpPr>
+        <p:spPr>
+          <a:xfrm>
+            <a:off x="7818120" y="3300984"/>
+            <a:ext cx="3090672" cy="877824"/>
+          </a:xfrm>
+          <a:prstGeom prst="rect">
+            <a:avLst/>
+          </a:prstGeom>
+          <a:noFill/>
+          <a:ln/>
+        </p:spPr>
+        <p:txBody>
+          <a:bodyPr wrap="square" lIns="254" tIns="254" rIns="254" bIns="254" rtlCol="0" anchor="t">
+            <a:normAutofit/>
+          </a:bodyPr>
+          <a:lstStyle/>
+          <a:p>
+            <a:r>
+              <a:rPr lang="en-US" sz="1380" dirty="0">
+                <a:solidFill>
+                  <a:srgbClr val="17364A"/>
+                </a:solidFill>
+                <a:latin typeface="Aptos" pitchFamily="34" charset="0"/>
+                <a:ea typeface="Aptos" pitchFamily="34" charset="-122"/>
+                <a:cs typeface="Aptos" pitchFamily="34" charset="-120"/>
+              </a:rPr>
+              <a:t>Interoperability checklist</a:t>
+            </a:r>
+            <a:endParaRPr lang="en-US" sz="1380" dirty="0"/>
+          </a:p>
+          <a:p>
+            <a:r>
+              <a:rPr lang="en-US" sz="1380" dirty="0">
+                <a:solidFill>
+                  <a:srgbClr val="17364A"/>
+                </a:solidFill>
+                <a:latin typeface="Aptos" pitchFamily="34" charset="0"/>
+                <a:ea typeface="Aptos" pitchFamily="34" charset="-122"/>
+                <a:cs typeface="Aptos" pitchFamily="34" charset="-120"/>
+              </a:rPr>
+              <a:t>Data exchange diagram</a:t>
+            </a:r>
+            <a:endParaRPr lang="en-US" sz="1380" dirty="0"/>
+          </a:p>
+          <a:p>
+            <a:r>
+              <a:rPr lang="en-US" sz="1380" dirty="0">
+                <a:solidFill>
+                  <a:srgbClr val="17364A"/>
+                </a:solidFill>
+                <a:latin typeface="Aptos" pitchFamily="34" charset="0"/>
+                <a:ea typeface="Aptos" pitchFamily="34" charset="-122"/>
+                <a:cs typeface="Aptos" pitchFamily="34" charset="-120"/>
+              </a:rPr>
+              <a:t>Vendor questions</a:t>
+            </a:r>
+            <a:endParaRPr lang="en-US" sz="1380" dirty="0"/>
+          </a:p>
+        </p:txBody>
       </p:sp>
       <p:sp>
         <p:nvSpPr>
           <p:cNvPr id="16" name="Shape 14"/>
-          <p:cNvSpPr/>
-          <p:nvPr/>
-        </p:nvSpPr>
-        <p:spPr>
-          <a:xfrm>
-            <a:off x="9198864" y="4206240"/>
-            <a:ext cx="347472" cy="347472"/>
-          </a:xfrm>
-          <a:prstGeom prst="ellipse">
-            <a:avLst/>
-          </a:prstGeom>
-          <a:solidFill>
-            <a:srgbClr val="2F8A28"/>
-          </a:solidFill>
-          <a:ln w="12700">
-            <a:solidFill>
-              <a:srgbClr val="2F8A28"/>
-            </a:solidFill>
-            <a:prstDash val="solid"/>
-          </a:ln>
-        </p:spPr>
-      </p:sp>
-      <p:sp>
-        <p:nvSpPr>
-          <p:cNvPr id="17" name="Text 15"/>
-          <p:cNvSpPr/>
-          <p:nvPr/>
-        </p:nvSpPr>
-        <p:spPr>
-          <a:xfrm>
-            <a:off x="7909560" y="3977640"/>
-            <a:ext cx="2926080" cy="182880"/>
-          </a:xfrm>
-          <a:prstGeom prst="rect">
-            <a:avLst/>
-          </a:prstGeom>
-          <a:noFill/>
-          <a:ln/>
-        </p:spPr>
-        <p:txBody>
-          <a:bodyPr wrap="square" lIns="0" tIns="0" rIns="0" bIns="0" rtlCol="0" anchor="ctr"/>
-          <a:lstStyle/>
-          <a:p>
-            <a:pPr algn="ctr" indent="0" marL="0">
-              <a:buNone/>
-            </a:pPr>
-            <a:r>
-              <a:rPr lang="en-US" sz="1000" dirty="0">
-                <a:solidFill>
-                  <a:srgbClr val="003A63"/>
-                </a:solidFill>
-                <a:latin typeface="Aptos" pitchFamily="34" charset="0"/>
-                <a:ea typeface="Aptos" pitchFamily="34" charset="-122"/>
-                <a:cs typeface="Aptos" pitchFamily="34" charset="-120"/>
-              </a:rPr>
-              <a:t>Concept to action</a:t>
-            </a:r>
-            <a:endParaRPr lang="en-US" sz="1000" dirty="0"/>
-          </a:p>
-        </p:txBody>
-      </p:sp>
-      <p:sp>
-        <p:nvSpPr>
-          <p:cNvPr id="18" name="Shape 16"/>
           <p:cNvSpPr/>
           <p:nvPr/>
         </p:nvSpPr>
@@ -10233,7 +9937,7 @@
       </p:sp>
       <p:sp>
         <p:nvSpPr>
-          <p:cNvPr id="19" name="Text 17"/>
+          <p:cNvPr id="17" name="Text 15"/>
           <p:cNvSpPr/>
           <p:nvPr/>
         </p:nvSpPr>
@@ -10272,7 +9976,7 @@
       </p:sp>
       <p:sp>
         <p:nvSpPr>
-          <p:cNvPr id="20" name="Text 18"/>
+          <p:cNvPr id="18" name="Text 16"/>
           <p:cNvSpPr/>
           <p:nvPr/>
         </p:nvSpPr>
@@ -10805,20 +10509,20 @@
         </p:nvSpPr>
         <p:spPr>
           <a:xfrm>
-            <a:off x="7635240" y="3730752"/>
-            <a:ext cx="1033272" cy="749808"/>
+            <a:off x="7909560" y="3675888"/>
+            <a:ext cx="3154680" cy="1691640"/>
           </a:xfrm>
           <a:prstGeom prst="roundRect">
             <a:avLst>
-              <a:gd name="adj" fmla="val 14634"/>
+              <a:gd name="adj" fmla="val 6486"/>
             </a:avLst>
           </a:prstGeom>
           <a:solidFill>
-            <a:srgbClr val="0068B7"/>
+            <a:srgbClr val="FFFFFF"/>
           </a:solidFill>
           <a:ln w="12700">
             <a:solidFill>
-              <a:srgbClr val="0068B7"/>
+              <a:srgbClr val="B9D7E6"/>
             </a:solidFill>
             <a:prstDash val="solid"/>
           </a:ln>
@@ -10832,172 +10536,100 @@
         </p:nvSpPr>
         <p:spPr>
           <a:xfrm>
-            <a:off x="7708392" y="3922776"/>
-            <a:ext cx="886968" cy="310896"/>
-          </a:xfrm>
-          <a:prstGeom prst="rect">
-            <a:avLst/>
-          </a:prstGeom>
-          <a:noFill/>
-          <a:ln/>
-        </p:spPr>
-        <p:txBody>
-          <a:bodyPr wrap="square" lIns="0" tIns="0" rIns="0" bIns="0" rtlCol="0" anchor="ctr">
+            <a:off x="8074152" y="3822192"/>
+            <a:ext cx="2825496" cy="256032"/>
+          </a:xfrm>
+          <a:prstGeom prst="rect">
+            <a:avLst/>
+          </a:prstGeom>
+          <a:noFill/>
+          <a:ln/>
+        </p:spPr>
+        <p:txBody>
+          <a:bodyPr wrap="square" lIns="0" tIns="0" rIns="0" bIns="0" rtlCol="0" anchor="ctr"/>
+          <a:lstStyle/>
+          <a:p>
+            <a:pPr indent="0" marL="0">
+              <a:buNone/>
+            </a:pPr>
+            <a:r>
+              <a:rPr lang="en-US" sz="1300" b="1" dirty="0">
+                <a:solidFill>
+                  <a:srgbClr val="0068B7"/>
+                </a:solidFill>
+                <a:latin typeface="Aptos" pitchFamily="34" charset="0"/>
+                <a:ea typeface="Aptos" pitchFamily="34" charset="-122"/>
+                <a:cs typeface="Aptos" pitchFamily="34" charset="-120"/>
+              </a:rPr>
+              <a:t>Learning sequence</a:t>
+            </a:r>
+            <a:endParaRPr lang="en-US" sz="1300" dirty="0"/>
+          </a:p>
+        </p:txBody>
+      </p:sp>
+      <p:sp>
+        <p:nvSpPr>
+          <p:cNvPr id="15" name="Text 13"/>
+          <p:cNvSpPr/>
+          <p:nvPr/>
+        </p:nvSpPr>
+        <p:spPr>
+          <a:xfrm>
+            <a:off x="8092440" y="4187952"/>
+            <a:ext cx="2770632" cy="1033272"/>
+          </a:xfrm>
+          <a:prstGeom prst="rect">
+            <a:avLst/>
+          </a:prstGeom>
+          <a:noFill/>
+          <a:ln/>
+        </p:spPr>
+        <p:txBody>
+          <a:bodyPr wrap="square" lIns="254" tIns="254" rIns="254" bIns="254" rtlCol="0" anchor="t">
             <a:normAutofit/>
           </a:bodyPr>
           <a:lstStyle/>
           <a:p>
-            <a:pPr algn="ctr" indent="0" marL="0">
-              <a:buNone/>
-            </a:pPr>
-            <a:r>
-              <a:rPr lang="en-US" sz="1500" b="1" dirty="0">
-                <a:solidFill>
-                  <a:srgbClr val="FFFFFF"/>
-                </a:solidFill>
-                <a:latin typeface="Aptos" pitchFamily="34" charset="0"/>
-                <a:ea typeface="Aptos" pitchFamily="34" charset="-122"/>
-                <a:cs typeface="Aptos" pitchFamily="34" charset="-120"/>
-              </a:rPr>
-              <a:t>Learn</a:t>
-            </a:r>
-            <a:endParaRPr lang="en-US" sz="1500" dirty="0"/>
-          </a:p>
-        </p:txBody>
-      </p:sp>
-      <p:sp>
-        <p:nvSpPr>
-          <p:cNvPr id="15" name="Shape 13"/>
-          <p:cNvSpPr/>
-          <p:nvPr/>
-        </p:nvSpPr>
-        <p:spPr>
-          <a:xfrm>
-            <a:off x="8924544" y="3730752"/>
-            <a:ext cx="1033272" cy="749808"/>
-          </a:xfrm>
-          <a:prstGeom prst="roundRect">
-            <a:avLst>
-              <a:gd name="adj" fmla="val 14634"/>
-            </a:avLst>
-          </a:prstGeom>
-          <a:solidFill>
-            <a:srgbClr val="2F8A28"/>
-          </a:solidFill>
-          <a:ln w="12700">
-            <a:solidFill>
-              <a:srgbClr val="2F8A28"/>
-            </a:solidFill>
-            <a:prstDash val="solid"/>
-          </a:ln>
-        </p:spPr>
-      </p:sp>
-      <p:sp>
-        <p:nvSpPr>
-          <p:cNvPr id="16" name="Text 14"/>
-          <p:cNvSpPr/>
-          <p:nvPr/>
-        </p:nvSpPr>
-        <p:spPr>
-          <a:xfrm>
-            <a:off x="8997696" y="3922776"/>
-            <a:ext cx="886968" cy="310896"/>
-          </a:xfrm>
-          <a:prstGeom prst="rect">
-            <a:avLst/>
-          </a:prstGeom>
-          <a:noFill/>
-          <a:ln/>
-        </p:spPr>
-        <p:txBody>
-          <a:bodyPr wrap="square" lIns="0" tIns="0" rIns="0" bIns="0" rtlCol="0" anchor="ctr">
-            <a:normAutofit/>
-          </a:bodyPr>
-          <a:lstStyle/>
-          <a:p>
-            <a:pPr algn="ctr" indent="0" marL="0">
-              <a:buNone/>
-            </a:pPr>
-            <a:r>
-              <a:rPr lang="en-US" sz="1500" b="1" dirty="0">
-                <a:solidFill>
-                  <a:srgbClr val="FFFFFF"/>
-                </a:solidFill>
-                <a:latin typeface="Aptos" pitchFamily="34" charset="0"/>
-                <a:ea typeface="Aptos" pitchFamily="34" charset="-122"/>
-                <a:cs typeface="Aptos" pitchFamily="34" charset="-120"/>
-              </a:rPr>
-              <a:t>Apply</a:t>
-            </a:r>
-            <a:endParaRPr lang="en-US" sz="1500" dirty="0"/>
-          </a:p>
-        </p:txBody>
-      </p:sp>
-      <p:sp>
-        <p:nvSpPr>
-          <p:cNvPr id="17" name="Shape 15"/>
-          <p:cNvSpPr/>
-          <p:nvPr/>
-        </p:nvSpPr>
-        <p:spPr>
-          <a:xfrm>
-            <a:off x="10213848" y="3730752"/>
-            <a:ext cx="1033272" cy="749808"/>
-          </a:xfrm>
-          <a:prstGeom prst="roundRect">
-            <a:avLst>
-              <a:gd name="adj" fmla="val 14634"/>
-            </a:avLst>
-          </a:prstGeom>
-          <a:solidFill>
-            <a:srgbClr val="6A4CA3"/>
-          </a:solidFill>
-          <a:ln w="12700">
-            <a:solidFill>
-              <a:srgbClr val="6A4CA3"/>
-            </a:solidFill>
-            <a:prstDash val="solid"/>
-          </a:ln>
-        </p:spPr>
-      </p:sp>
-      <p:sp>
-        <p:nvSpPr>
-          <p:cNvPr id="18" name="Text 16"/>
-          <p:cNvSpPr/>
-          <p:nvPr/>
-        </p:nvSpPr>
-        <p:spPr>
-          <a:xfrm>
-            <a:off x="10287000" y="3922776"/>
-            <a:ext cx="886968" cy="310896"/>
-          </a:xfrm>
-          <a:prstGeom prst="rect">
-            <a:avLst/>
-          </a:prstGeom>
-          <a:noFill/>
-          <a:ln/>
-        </p:spPr>
-        <p:txBody>
-          <a:bodyPr wrap="square" lIns="0" tIns="0" rIns="0" bIns="0" rtlCol="0" anchor="ctr">
-            <a:normAutofit/>
-          </a:bodyPr>
-          <a:lstStyle/>
-          <a:p>
-            <a:pPr algn="ctr" indent="0" marL="0">
-              <a:buNone/>
-            </a:pPr>
-            <a:r>
-              <a:rPr lang="en-US" sz="1500" b="1" dirty="0">
-                <a:solidFill>
-                  <a:srgbClr val="FFFFFF"/>
-                </a:solidFill>
-                <a:latin typeface="Aptos" pitchFamily="34" charset="0"/>
-                <a:ea typeface="Aptos" pitchFamily="34" charset="-122"/>
-                <a:cs typeface="Aptos" pitchFamily="34" charset="-120"/>
-              </a:rPr>
-              <a:t>Document</a:t>
-            </a:r>
-            <a:endParaRPr lang="en-US" sz="1500" dirty="0"/>
+            <a:r>
+              <a:rPr lang="en-US" sz="1380" dirty="0">
+                <a:solidFill>
+                  <a:srgbClr val="17364A"/>
+                </a:solidFill>
+                <a:latin typeface="Aptos" pitchFamily="34" charset="0"/>
+                <a:ea typeface="Aptos" pitchFamily="34" charset="-122"/>
+                <a:cs typeface="Aptos" pitchFamily="34" charset="-120"/>
+              </a:rPr>
+              <a:t>Read the module for shared vocabulary and context.</a:t>
+            </a:r>
+            <a:endParaRPr lang="en-US" sz="1380" dirty="0"/>
+          </a:p>
+          <a:p>
+            <a:r>
+              <a:rPr lang="en-US" sz="1380" dirty="0">
+                <a:solidFill>
+                  <a:srgbClr val="17364A"/>
+                </a:solidFill>
+                <a:latin typeface="Aptos" pitchFamily="34" charset="0"/>
+                <a:ea typeface="Aptos" pitchFamily="34" charset="-122"/>
+                <a:cs typeface="Aptos" pitchFamily="34" charset="-120"/>
+              </a:rPr>
+              <a:t>Complete the practical exercise to apply the concept.</a:t>
+            </a:r>
+            <a:endParaRPr lang="en-US" sz="1380" dirty="0"/>
+          </a:p>
+          <a:p>
+            <a:r>
+              <a:rPr lang="en-US" sz="1380" dirty="0">
+                <a:solidFill>
+                  <a:srgbClr val="17364A"/>
+                </a:solidFill>
+                <a:latin typeface="Aptos" pitchFamily="34" charset="0"/>
+                <a:ea typeface="Aptos" pitchFamily="34" charset="-122"/>
+                <a:cs typeface="Aptos" pitchFamily="34" charset="-120"/>
+              </a:rPr>
+              <a:t>Use the notes and references for deeper review.</a:t>
+            </a:r>
+            <a:endParaRPr lang="en-US" sz="1380" dirty="0"/>
           </a:p>
         </p:txBody>
       </p:sp>
@@ -11442,13 +11074,11 @@
             </a:avLst>
           </a:prstGeom>
           <a:solidFill>
-            <a:srgbClr val="FFFFFF">
-              <a:alpha val="88000"/>
-            </a:srgbClr>
+            <a:srgbClr val="FFFFFF"/>
           </a:solidFill>
           <a:ln w="12700">
             <a:solidFill>
-              <a:srgbClr val="D6E8F2"/>
+              <a:srgbClr val="B9D7E6"/>
             </a:solidFill>
             <a:prstDash val="solid"/>
           </a:ln>
@@ -11456,119 +11086,84 @@
       </p:sp>
       <p:sp>
         <p:nvSpPr>
-          <p:cNvPr id="14" name="Shape 12"/>
-          <p:cNvSpPr/>
-          <p:nvPr/>
-        </p:nvSpPr>
-        <p:spPr>
-          <a:xfrm>
-            <a:off x="8074152" y="3291840"/>
-            <a:ext cx="2596896" cy="749808"/>
-          </a:xfrm>
-          <a:prstGeom prst="rect">
-            <a:avLst/>
-          </a:prstGeom>
-          <a:solidFill>
-            <a:srgbClr val="EAF6F8"/>
-          </a:solidFill>
-          <a:ln w="12700">
-            <a:solidFill>
-              <a:srgbClr val="8ABBD8"/>
-            </a:solidFill>
-            <a:prstDash val="solid"/>
-          </a:ln>
-        </p:spPr>
-      </p:sp>
-      <p:sp>
-        <p:nvSpPr>
-          <p:cNvPr id="15" name="Shape 13"/>
-          <p:cNvSpPr/>
-          <p:nvPr/>
-        </p:nvSpPr>
-        <p:spPr>
-          <a:xfrm>
-            <a:off x="8202168" y="3721608"/>
-            <a:ext cx="2340864" cy="0"/>
-          </a:xfrm>
-          <a:prstGeom prst="line">
-            <a:avLst/>
-          </a:prstGeom>
-          <a:noFill/>
-          <a:ln w="19050">
-            <a:solidFill>
-              <a:srgbClr val="0068B7"/>
-            </a:solidFill>
-            <a:prstDash val="solid"/>
-          </a:ln>
-        </p:spPr>
+          <p:cNvPr id="14" name="Text 12"/>
+          <p:cNvSpPr/>
+          <p:nvPr/>
+        </p:nvSpPr>
+        <p:spPr>
+          <a:xfrm>
+            <a:off x="7799832" y="2935224"/>
+            <a:ext cx="3145536" cy="256032"/>
+          </a:xfrm>
+          <a:prstGeom prst="rect">
+            <a:avLst/>
+          </a:prstGeom>
+          <a:noFill/>
+          <a:ln/>
+        </p:spPr>
+        <p:txBody>
+          <a:bodyPr wrap="square" lIns="0" tIns="0" rIns="0" bIns="0" rtlCol="0" anchor="ctr"/>
+          <a:lstStyle/>
+          <a:p>
+            <a:pPr indent="0" marL="0">
+              <a:buNone/>
+            </a:pPr>
+            <a:r>
+              <a:rPr lang="en-US" sz="1300" b="1" dirty="0">
+                <a:solidFill>
+                  <a:srgbClr val="0068B7"/>
+                </a:solidFill>
+                <a:latin typeface="Aptos" pitchFamily="34" charset="0"/>
+                <a:ea typeface="Aptos" pitchFamily="34" charset="-122"/>
+                <a:cs typeface="Aptos" pitchFamily="34" charset="-120"/>
+              </a:rPr>
+              <a:t>Concept checkpoints</a:t>
+            </a:r>
+            <a:endParaRPr lang="en-US" sz="1300" dirty="0"/>
+          </a:p>
+        </p:txBody>
+      </p:sp>
+      <p:sp>
+        <p:nvSpPr>
+          <p:cNvPr id="15" name="Text 13"/>
+          <p:cNvSpPr/>
+          <p:nvPr/>
+        </p:nvSpPr>
+        <p:spPr>
+          <a:xfrm>
+            <a:off x="7818120" y="3300984"/>
+            <a:ext cx="3090672" cy="877824"/>
+          </a:xfrm>
+          <a:prstGeom prst="rect">
+            <a:avLst/>
+          </a:prstGeom>
+          <a:noFill/>
+          <a:ln/>
+        </p:spPr>
+        <p:txBody>
+          <a:bodyPr wrap="square" lIns="254" tIns="254" rIns="254" bIns="254" rtlCol="0" anchor="t">
+            <a:normAutofit/>
+          </a:bodyPr>
+          <a:lstStyle/>
+          <a:p>
+            <a:r>
+              <a:rPr lang="en-US" sz="1380" dirty="0">
+                <a:solidFill>
+                  <a:srgbClr val="17364A"/>
+                </a:solidFill>
+                <a:latin typeface="Aptos" pitchFamily="34" charset="0"/>
+                <a:ea typeface="Aptos" pitchFamily="34" charset="-122"/>
+                <a:cs typeface="Aptos" pitchFamily="34" charset="-120"/>
+              </a:rPr>
+              <a:t>Test scenario and acceptance criteria</a:t>
+            </a:r>
+            <a:endParaRPr lang="en-US" sz="1380" dirty="0"/>
+          </a:p>
+        </p:txBody>
       </p:sp>
       <p:sp>
         <p:nvSpPr>
           <p:cNvPr id="16" name="Shape 14"/>
-          <p:cNvSpPr/>
-          <p:nvPr/>
-        </p:nvSpPr>
-        <p:spPr>
-          <a:xfrm>
-            <a:off x="9198864" y="4206240"/>
-            <a:ext cx="347472" cy="347472"/>
-          </a:xfrm>
-          <a:prstGeom prst="ellipse">
-            <a:avLst/>
-          </a:prstGeom>
-          <a:solidFill>
-            <a:srgbClr val="2F8A28"/>
-          </a:solidFill>
-          <a:ln w="12700">
-            <a:solidFill>
-              <a:srgbClr val="2F8A28"/>
-            </a:solidFill>
-            <a:prstDash val="solid"/>
-          </a:ln>
-        </p:spPr>
-      </p:sp>
-      <p:sp>
-        <p:nvSpPr>
-          <p:cNvPr id="17" name="Text 15"/>
-          <p:cNvSpPr/>
-          <p:nvPr/>
-        </p:nvSpPr>
-        <p:spPr>
-          <a:xfrm>
-            <a:off x="7909560" y="3977640"/>
-            <a:ext cx="2926080" cy="182880"/>
-          </a:xfrm>
-          <a:prstGeom prst="rect">
-            <a:avLst/>
-          </a:prstGeom>
-          <a:noFill/>
-          <a:ln/>
-        </p:spPr>
-        <p:txBody>
-          <a:bodyPr wrap="square" lIns="0" tIns="0" rIns="0" bIns="0" rtlCol="0" anchor="ctr"/>
-          <a:lstStyle/>
-          <a:p>
-            <a:pPr algn="ctr" indent="0" marL="0">
-              <a:buNone/>
-            </a:pPr>
-            <a:r>
-              <a:rPr lang="en-US" sz="1000" dirty="0">
-                <a:solidFill>
-                  <a:srgbClr val="003A63"/>
-                </a:solidFill>
-                <a:latin typeface="Aptos" pitchFamily="34" charset="0"/>
-                <a:ea typeface="Aptos" pitchFamily="34" charset="-122"/>
-                <a:cs typeface="Aptos" pitchFamily="34" charset="-120"/>
-              </a:rPr>
-              <a:t>Concept to action</a:t>
-            </a:r>
-            <a:endParaRPr lang="en-US" sz="1000" dirty="0"/>
-          </a:p>
-        </p:txBody>
-      </p:sp>
-      <p:sp>
-        <p:nvSpPr>
-          <p:cNvPr id="18" name="Shape 16"/>
           <p:cNvSpPr/>
           <p:nvPr/>
         </p:nvSpPr>
@@ -11595,7 +11190,7 @@
       </p:sp>
       <p:sp>
         <p:nvSpPr>
-          <p:cNvPr id="19" name="Text 17"/>
+          <p:cNvPr id="17" name="Text 15"/>
           <p:cNvSpPr/>
           <p:nvPr/>
         </p:nvSpPr>
@@ -11634,7 +11229,7 @@
       </p:sp>
       <p:sp>
         <p:nvSpPr>
-          <p:cNvPr id="20" name="Text 18"/>
+          <p:cNvPr id="18" name="Text 16"/>
           <p:cNvSpPr/>
           <p:nvPr/>
         </p:nvSpPr>
@@ -12142,13 +11737,11 @@
             </a:avLst>
           </a:prstGeom>
           <a:solidFill>
-            <a:srgbClr val="FFFFFF">
-              <a:alpha val="88000"/>
-            </a:srgbClr>
+            <a:srgbClr val="FFFFFF"/>
           </a:solidFill>
           <a:ln w="12700">
             <a:solidFill>
-              <a:srgbClr val="D6E8F2"/>
+              <a:srgbClr val="B9D7E6"/>
             </a:solidFill>
             <a:prstDash val="solid"/>
           </a:ln>
@@ -12156,119 +11749,112 @@
       </p:sp>
       <p:sp>
         <p:nvSpPr>
-          <p:cNvPr id="14" name="Shape 12"/>
-          <p:cNvSpPr/>
-          <p:nvPr/>
-        </p:nvSpPr>
-        <p:spPr>
-          <a:xfrm>
-            <a:off x="8074152" y="3291840"/>
-            <a:ext cx="2596896" cy="749808"/>
-          </a:xfrm>
-          <a:prstGeom prst="rect">
-            <a:avLst/>
-          </a:prstGeom>
-          <a:solidFill>
-            <a:srgbClr val="EAF6F8"/>
-          </a:solidFill>
-          <a:ln w="12700">
-            <a:solidFill>
-              <a:srgbClr val="8ABBD8"/>
-            </a:solidFill>
-            <a:prstDash val="solid"/>
-          </a:ln>
-        </p:spPr>
-      </p:sp>
-      <p:sp>
-        <p:nvSpPr>
-          <p:cNvPr id="15" name="Shape 13"/>
-          <p:cNvSpPr/>
-          <p:nvPr/>
-        </p:nvSpPr>
-        <p:spPr>
-          <a:xfrm>
-            <a:off x="8202168" y="3721608"/>
-            <a:ext cx="2340864" cy="0"/>
-          </a:xfrm>
-          <a:prstGeom prst="line">
-            <a:avLst/>
-          </a:prstGeom>
-          <a:noFill/>
-          <a:ln w="19050">
-            <a:solidFill>
-              <a:srgbClr val="0068B7"/>
-            </a:solidFill>
-            <a:prstDash val="solid"/>
-          </a:ln>
-        </p:spPr>
+          <p:cNvPr id="14" name="Text 12"/>
+          <p:cNvSpPr/>
+          <p:nvPr/>
+        </p:nvSpPr>
+        <p:spPr>
+          <a:xfrm>
+            <a:off x="7799832" y="2935224"/>
+            <a:ext cx="3145536" cy="256032"/>
+          </a:xfrm>
+          <a:prstGeom prst="rect">
+            <a:avLst/>
+          </a:prstGeom>
+          <a:noFill/>
+          <a:ln/>
+        </p:spPr>
+        <p:txBody>
+          <a:bodyPr wrap="square" lIns="0" tIns="0" rIns="0" bIns="0" rtlCol="0" anchor="ctr"/>
+          <a:lstStyle/>
+          <a:p>
+            <a:pPr indent="0" marL="0">
+              <a:buNone/>
+            </a:pPr>
+            <a:r>
+              <a:rPr lang="en-US" sz="1300" b="1" dirty="0">
+                <a:solidFill>
+                  <a:srgbClr val="0068B7"/>
+                </a:solidFill>
+                <a:latin typeface="Aptos" pitchFamily="34" charset="0"/>
+                <a:ea typeface="Aptos" pitchFamily="34" charset="-122"/>
+                <a:cs typeface="Aptos" pitchFamily="34" charset="-120"/>
+              </a:rPr>
+              <a:t>Concept checkpoints</a:t>
+            </a:r>
+            <a:endParaRPr lang="en-US" sz="1300" dirty="0"/>
+          </a:p>
+        </p:txBody>
+      </p:sp>
+      <p:sp>
+        <p:nvSpPr>
+          <p:cNvPr id="15" name="Text 13"/>
+          <p:cNvSpPr/>
+          <p:nvPr/>
+        </p:nvSpPr>
+        <p:spPr>
+          <a:xfrm>
+            <a:off x="7818120" y="3300984"/>
+            <a:ext cx="3090672" cy="877824"/>
+          </a:xfrm>
+          <a:prstGeom prst="rect">
+            <a:avLst/>
+          </a:prstGeom>
+          <a:noFill/>
+          <a:ln/>
+        </p:spPr>
+        <p:txBody>
+          <a:bodyPr wrap="square" lIns="254" tIns="254" rIns="254" bIns="254" rtlCol="0" anchor="t">
+            <a:normAutofit/>
+          </a:bodyPr>
+          <a:lstStyle/>
+          <a:p>
+            <a:r>
+              <a:rPr lang="en-US" sz="1380" dirty="0">
+                <a:solidFill>
+                  <a:srgbClr val="17364A"/>
+                </a:solidFill>
+                <a:latin typeface="Aptos" pitchFamily="34" charset="0"/>
+                <a:ea typeface="Aptos" pitchFamily="34" charset="-122"/>
+                <a:cs typeface="Aptos" pitchFamily="34" charset="-120"/>
+              </a:rPr>
+              <a:t>Interoperability checklist</a:t>
+            </a:r>
+            <a:endParaRPr lang="en-US" sz="1380" dirty="0"/>
+          </a:p>
+          <a:p>
+            <a:r>
+              <a:rPr lang="en-US" sz="1380" dirty="0">
+                <a:solidFill>
+                  <a:srgbClr val="17364A"/>
+                </a:solidFill>
+                <a:latin typeface="Aptos" pitchFamily="34" charset="0"/>
+                <a:ea typeface="Aptos" pitchFamily="34" charset="-122"/>
+                <a:cs typeface="Aptos" pitchFamily="34" charset="-120"/>
+              </a:rPr>
+              <a:t>Data exchange diagram</a:t>
+            </a:r>
+            <a:endParaRPr lang="en-US" sz="1380" dirty="0"/>
+          </a:p>
+          <a:p>
+            <a:r>
+              <a:rPr lang="en-US" sz="1380" dirty="0">
+                <a:solidFill>
+                  <a:srgbClr val="17364A"/>
+                </a:solidFill>
+                <a:latin typeface="Aptos" pitchFamily="34" charset="0"/>
+                <a:ea typeface="Aptos" pitchFamily="34" charset="-122"/>
+                <a:cs typeface="Aptos" pitchFamily="34" charset="-120"/>
+              </a:rPr>
+              <a:t>Vendor questions</a:t>
+            </a:r>
+            <a:endParaRPr lang="en-US" sz="1380" dirty="0"/>
+          </a:p>
+        </p:txBody>
       </p:sp>
       <p:sp>
         <p:nvSpPr>
           <p:cNvPr id="16" name="Shape 14"/>
-          <p:cNvSpPr/>
-          <p:nvPr/>
-        </p:nvSpPr>
-        <p:spPr>
-          <a:xfrm>
-            <a:off x="9198864" y="4206240"/>
-            <a:ext cx="347472" cy="347472"/>
-          </a:xfrm>
-          <a:prstGeom prst="ellipse">
-            <a:avLst/>
-          </a:prstGeom>
-          <a:solidFill>
-            <a:srgbClr val="2F8A28"/>
-          </a:solidFill>
-          <a:ln w="12700">
-            <a:solidFill>
-              <a:srgbClr val="2F8A28"/>
-            </a:solidFill>
-            <a:prstDash val="solid"/>
-          </a:ln>
-        </p:spPr>
-      </p:sp>
-      <p:sp>
-        <p:nvSpPr>
-          <p:cNvPr id="17" name="Text 15"/>
-          <p:cNvSpPr/>
-          <p:nvPr/>
-        </p:nvSpPr>
-        <p:spPr>
-          <a:xfrm>
-            <a:off x="7909560" y="3977640"/>
-            <a:ext cx="2926080" cy="182880"/>
-          </a:xfrm>
-          <a:prstGeom prst="rect">
-            <a:avLst/>
-          </a:prstGeom>
-          <a:noFill/>
-          <a:ln/>
-        </p:spPr>
-        <p:txBody>
-          <a:bodyPr wrap="square" lIns="0" tIns="0" rIns="0" bIns="0" rtlCol="0" anchor="ctr"/>
-          <a:lstStyle/>
-          <a:p>
-            <a:pPr algn="ctr" indent="0" marL="0">
-              <a:buNone/>
-            </a:pPr>
-            <a:r>
-              <a:rPr lang="en-US" sz="1000" dirty="0">
-                <a:solidFill>
-                  <a:srgbClr val="003A63"/>
-                </a:solidFill>
-                <a:latin typeface="Aptos" pitchFamily="34" charset="0"/>
-                <a:ea typeface="Aptos" pitchFamily="34" charset="-122"/>
-                <a:cs typeface="Aptos" pitchFamily="34" charset="-120"/>
-              </a:rPr>
-              <a:t>Concept to action</a:t>
-            </a:r>
-            <a:endParaRPr lang="en-US" sz="1000" dirty="0"/>
-          </a:p>
-        </p:txBody>
-      </p:sp>
-      <p:sp>
-        <p:nvSpPr>
-          <p:cNvPr id="18" name="Shape 16"/>
           <p:cNvSpPr/>
           <p:nvPr/>
         </p:nvSpPr>
@@ -12295,7 +11881,7 @@
       </p:sp>
       <p:sp>
         <p:nvSpPr>
-          <p:cNvPr id="19" name="Text 17"/>
+          <p:cNvPr id="17" name="Text 15"/>
           <p:cNvSpPr/>
           <p:nvPr/>
         </p:nvSpPr>
@@ -12334,7 +11920,7 @@
       </p:sp>
       <p:sp>
         <p:nvSpPr>
-          <p:cNvPr id="20" name="Text 18"/>
+          <p:cNvPr id="18" name="Text 16"/>
           <p:cNvSpPr/>
           <p:nvPr/>
         </p:nvSpPr>
@@ -12842,13 +12428,11 @@
             </a:avLst>
           </a:prstGeom>
           <a:solidFill>
-            <a:srgbClr val="FFFFFF">
-              <a:alpha val="88000"/>
-            </a:srgbClr>
+            <a:srgbClr val="FFFFFF"/>
           </a:solidFill>
           <a:ln w="12700">
             <a:solidFill>
-              <a:srgbClr val="D6E8F2"/>
+              <a:srgbClr val="B9D7E6"/>
             </a:solidFill>
             <a:prstDash val="solid"/>
           </a:ln>
@@ -12856,119 +12440,112 @@
       </p:sp>
       <p:sp>
         <p:nvSpPr>
-          <p:cNvPr id="14" name="Shape 12"/>
-          <p:cNvSpPr/>
-          <p:nvPr/>
-        </p:nvSpPr>
-        <p:spPr>
-          <a:xfrm>
-            <a:off x="8074152" y="3291840"/>
-            <a:ext cx="2596896" cy="749808"/>
-          </a:xfrm>
-          <a:prstGeom prst="rect">
-            <a:avLst/>
-          </a:prstGeom>
-          <a:solidFill>
-            <a:srgbClr val="EAF6F8"/>
-          </a:solidFill>
-          <a:ln w="12700">
-            <a:solidFill>
-              <a:srgbClr val="8ABBD8"/>
-            </a:solidFill>
-            <a:prstDash val="solid"/>
-          </a:ln>
-        </p:spPr>
-      </p:sp>
-      <p:sp>
-        <p:nvSpPr>
-          <p:cNvPr id="15" name="Shape 13"/>
-          <p:cNvSpPr/>
-          <p:nvPr/>
-        </p:nvSpPr>
-        <p:spPr>
-          <a:xfrm>
-            <a:off x="8202168" y="3721608"/>
-            <a:ext cx="2340864" cy="0"/>
-          </a:xfrm>
-          <a:prstGeom prst="line">
-            <a:avLst/>
-          </a:prstGeom>
-          <a:noFill/>
-          <a:ln w="19050">
-            <a:solidFill>
-              <a:srgbClr val="0068B7"/>
-            </a:solidFill>
-            <a:prstDash val="solid"/>
-          </a:ln>
-        </p:spPr>
+          <p:cNvPr id="14" name="Text 12"/>
+          <p:cNvSpPr/>
+          <p:nvPr/>
+        </p:nvSpPr>
+        <p:spPr>
+          <a:xfrm>
+            <a:off x="7799832" y="2935224"/>
+            <a:ext cx="3145536" cy="256032"/>
+          </a:xfrm>
+          <a:prstGeom prst="rect">
+            <a:avLst/>
+          </a:prstGeom>
+          <a:noFill/>
+          <a:ln/>
+        </p:spPr>
+        <p:txBody>
+          <a:bodyPr wrap="square" lIns="0" tIns="0" rIns="0" bIns="0" rtlCol="0" anchor="ctr"/>
+          <a:lstStyle/>
+          <a:p>
+            <a:pPr indent="0" marL="0">
+              <a:buNone/>
+            </a:pPr>
+            <a:r>
+              <a:rPr lang="en-US" sz="1300" b="1" dirty="0">
+                <a:solidFill>
+                  <a:srgbClr val="0068B7"/>
+                </a:solidFill>
+                <a:latin typeface="Aptos" pitchFamily="34" charset="0"/>
+                <a:ea typeface="Aptos" pitchFamily="34" charset="-122"/>
+                <a:cs typeface="Aptos" pitchFamily="34" charset="-120"/>
+              </a:rPr>
+              <a:t>Concept checkpoints</a:t>
+            </a:r>
+            <a:endParaRPr lang="en-US" sz="1300" dirty="0"/>
+          </a:p>
+        </p:txBody>
+      </p:sp>
+      <p:sp>
+        <p:nvSpPr>
+          <p:cNvPr id="15" name="Text 13"/>
+          <p:cNvSpPr/>
+          <p:nvPr/>
+        </p:nvSpPr>
+        <p:spPr>
+          <a:xfrm>
+            <a:off x="7818120" y="3300984"/>
+            <a:ext cx="3090672" cy="877824"/>
+          </a:xfrm>
+          <a:prstGeom prst="rect">
+            <a:avLst/>
+          </a:prstGeom>
+          <a:noFill/>
+          <a:ln/>
+        </p:spPr>
+        <p:txBody>
+          <a:bodyPr wrap="square" lIns="254" tIns="254" rIns="254" bIns="254" rtlCol="0" anchor="t">
+            <a:normAutofit/>
+          </a:bodyPr>
+          <a:lstStyle/>
+          <a:p>
+            <a:r>
+              <a:rPr lang="en-US" sz="1380" dirty="0">
+                <a:solidFill>
+                  <a:srgbClr val="17364A"/>
+                </a:solidFill>
+                <a:latin typeface="Aptos" pitchFamily="34" charset="0"/>
+                <a:ea typeface="Aptos" pitchFamily="34" charset="-122"/>
+                <a:cs typeface="Aptos" pitchFamily="34" charset="-120"/>
+              </a:rPr>
+              <a:t>1.</a:t>
+            </a:r>
+            <a:endParaRPr lang="en-US" sz="1380" dirty="0"/>
+          </a:p>
+          <a:p>
+            <a:r>
+              <a:rPr lang="en-US" sz="1380" dirty="0">
+                <a:solidFill>
+                  <a:srgbClr val="17364A"/>
+                </a:solidFill>
+                <a:latin typeface="Aptos" pitchFamily="34" charset="0"/>
+                <a:ea typeface="Aptos" pitchFamily="34" charset="-122"/>
+                <a:cs typeface="Aptos" pitchFamily="34" charset="-120"/>
+              </a:rPr>
+              <a:t>Why does interoperability matter for AI-supported public health workflows?</a:t>
+            </a:r>
+            <a:endParaRPr lang="en-US" sz="1380" dirty="0"/>
+          </a:p>
+          <a:p>
+            <a:r>
+              <a:rPr lang="en-US" sz="1380" dirty="0">
+                <a:solidFill>
+                  <a:srgbClr val="17364A"/>
+                </a:solidFill>
+                <a:latin typeface="Aptos" pitchFamily="34" charset="0"/>
+                <a:ea typeface="Aptos" pitchFamily="34" charset="-122"/>
+                <a:cs typeface="Aptos" pitchFamily="34" charset="-120"/>
+              </a:rPr>
+              <a:t>2.</a:t>
+            </a:r>
+            <a:endParaRPr lang="en-US" sz="1380" dirty="0"/>
+          </a:p>
+        </p:txBody>
       </p:sp>
       <p:sp>
         <p:nvSpPr>
           <p:cNvPr id="16" name="Shape 14"/>
-          <p:cNvSpPr/>
-          <p:nvPr/>
-        </p:nvSpPr>
-        <p:spPr>
-          <a:xfrm>
-            <a:off x="9198864" y="4206240"/>
-            <a:ext cx="347472" cy="347472"/>
-          </a:xfrm>
-          <a:prstGeom prst="ellipse">
-            <a:avLst/>
-          </a:prstGeom>
-          <a:solidFill>
-            <a:srgbClr val="2F8A28"/>
-          </a:solidFill>
-          <a:ln w="12700">
-            <a:solidFill>
-              <a:srgbClr val="2F8A28"/>
-            </a:solidFill>
-            <a:prstDash val="solid"/>
-          </a:ln>
-        </p:spPr>
-      </p:sp>
-      <p:sp>
-        <p:nvSpPr>
-          <p:cNvPr id="17" name="Text 15"/>
-          <p:cNvSpPr/>
-          <p:nvPr/>
-        </p:nvSpPr>
-        <p:spPr>
-          <a:xfrm>
-            <a:off x="7909560" y="3977640"/>
-            <a:ext cx="2926080" cy="182880"/>
-          </a:xfrm>
-          <a:prstGeom prst="rect">
-            <a:avLst/>
-          </a:prstGeom>
-          <a:noFill/>
-          <a:ln/>
-        </p:spPr>
-        <p:txBody>
-          <a:bodyPr wrap="square" lIns="0" tIns="0" rIns="0" bIns="0" rtlCol="0" anchor="ctr"/>
-          <a:lstStyle/>
-          <a:p>
-            <a:pPr algn="ctr" indent="0" marL="0">
-              <a:buNone/>
-            </a:pPr>
-            <a:r>
-              <a:rPr lang="en-US" sz="1000" dirty="0">
-                <a:solidFill>
-                  <a:srgbClr val="003A63"/>
-                </a:solidFill>
-                <a:latin typeface="Aptos" pitchFamily="34" charset="0"/>
-                <a:ea typeface="Aptos" pitchFamily="34" charset="-122"/>
-                <a:cs typeface="Aptos" pitchFamily="34" charset="-120"/>
-              </a:rPr>
-              <a:t>Concept to action</a:t>
-            </a:r>
-            <a:endParaRPr lang="en-US" sz="1000" dirty="0"/>
-          </a:p>
-        </p:txBody>
-      </p:sp>
-      <p:sp>
-        <p:nvSpPr>
-          <p:cNvPr id="18" name="Shape 16"/>
           <p:cNvSpPr/>
           <p:nvPr/>
         </p:nvSpPr>
@@ -12995,7 +12572,7 @@
       </p:sp>
       <p:sp>
         <p:nvSpPr>
-          <p:cNvPr id="19" name="Text 17"/>
+          <p:cNvPr id="17" name="Text 15"/>
           <p:cNvSpPr/>
           <p:nvPr/>
         </p:nvSpPr>
@@ -13034,7 +12611,7 @@
       </p:sp>
       <p:sp>
         <p:nvSpPr>
-          <p:cNvPr id="20" name="Text 18"/>
+          <p:cNvPr id="18" name="Text 16"/>
           <p:cNvSpPr/>
           <p:nvPr/>
         </p:nvSpPr>
@@ -13542,13 +13119,11 @@
             </a:avLst>
           </a:prstGeom>
           <a:solidFill>
-            <a:srgbClr val="FFFFFF">
-              <a:alpha val="88000"/>
-            </a:srgbClr>
+            <a:srgbClr val="FFFFFF"/>
           </a:solidFill>
           <a:ln w="12700">
             <a:solidFill>
-              <a:srgbClr val="D6E8F2"/>
+              <a:srgbClr val="B9D7E6"/>
             </a:solidFill>
             <a:prstDash val="solid"/>
           </a:ln>
@@ -13556,119 +13131,98 @@
       </p:sp>
       <p:sp>
         <p:nvSpPr>
-          <p:cNvPr id="14" name="Shape 12"/>
-          <p:cNvSpPr/>
-          <p:nvPr/>
-        </p:nvSpPr>
-        <p:spPr>
-          <a:xfrm>
-            <a:off x="8074152" y="3291840"/>
-            <a:ext cx="2596896" cy="749808"/>
-          </a:xfrm>
-          <a:prstGeom prst="rect">
-            <a:avLst/>
-          </a:prstGeom>
-          <a:solidFill>
-            <a:srgbClr val="EAF6F8"/>
-          </a:solidFill>
-          <a:ln w="12700">
-            <a:solidFill>
-              <a:srgbClr val="8ABBD8"/>
-            </a:solidFill>
-            <a:prstDash val="solid"/>
-          </a:ln>
-        </p:spPr>
-      </p:sp>
-      <p:sp>
-        <p:nvSpPr>
-          <p:cNvPr id="15" name="Shape 13"/>
-          <p:cNvSpPr/>
-          <p:nvPr/>
-        </p:nvSpPr>
-        <p:spPr>
-          <a:xfrm>
-            <a:off x="8202168" y="3721608"/>
-            <a:ext cx="2340864" cy="0"/>
-          </a:xfrm>
-          <a:prstGeom prst="line">
-            <a:avLst/>
-          </a:prstGeom>
-          <a:noFill/>
-          <a:ln w="19050">
-            <a:solidFill>
-              <a:srgbClr val="0068B7"/>
-            </a:solidFill>
-            <a:prstDash val="solid"/>
-          </a:ln>
-        </p:spPr>
+          <p:cNvPr id="14" name="Text 12"/>
+          <p:cNvSpPr/>
+          <p:nvPr/>
+        </p:nvSpPr>
+        <p:spPr>
+          <a:xfrm>
+            <a:off x="7799832" y="2935224"/>
+            <a:ext cx="3145536" cy="256032"/>
+          </a:xfrm>
+          <a:prstGeom prst="rect">
+            <a:avLst/>
+          </a:prstGeom>
+          <a:noFill/>
+          <a:ln/>
+        </p:spPr>
+        <p:txBody>
+          <a:bodyPr wrap="square" lIns="0" tIns="0" rIns="0" bIns="0" rtlCol="0" anchor="ctr"/>
+          <a:lstStyle/>
+          <a:p>
+            <a:pPr indent="0" marL="0">
+              <a:buNone/>
+            </a:pPr>
+            <a:r>
+              <a:rPr lang="en-US" sz="1300" b="1" dirty="0">
+                <a:solidFill>
+                  <a:srgbClr val="0068B7"/>
+                </a:solidFill>
+                <a:latin typeface="Aptos" pitchFamily="34" charset="0"/>
+                <a:ea typeface="Aptos" pitchFamily="34" charset="-122"/>
+                <a:cs typeface="Aptos" pitchFamily="34" charset="-120"/>
+              </a:rPr>
+              <a:t>Concept checkpoints</a:t>
+            </a:r>
+            <a:endParaRPr lang="en-US" sz="1300" dirty="0"/>
+          </a:p>
+        </p:txBody>
+      </p:sp>
+      <p:sp>
+        <p:nvSpPr>
+          <p:cNvPr id="15" name="Text 13"/>
+          <p:cNvSpPr/>
+          <p:nvPr/>
+        </p:nvSpPr>
+        <p:spPr>
+          <a:xfrm>
+            <a:off x="7818120" y="3300984"/>
+            <a:ext cx="3090672" cy="877824"/>
+          </a:xfrm>
+          <a:prstGeom prst="rect">
+            <a:avLst/>
+          </a:prstGeom>
+          <a:noFill/>
+          <a:ln/>
+        </p:spPr>
+        <p:txBody>
+          <a:bodyPr wrap="square" lIns="254" tIns="254" rIns="254" bIns="254" rtlCol="0" anchor="t">
+            <a:normAutofit/>
+          </a:bodyPr>
+          <a:lstStyle/>
+          <a:p>
+            <a:r>
+              <a:rPr lang="en-US" sz="1380" dirty="0">
+                <a:solidFill>
+                  <a:srgbClr val="17364A"/>
+                </a:solidFill>
+                <a:latin typeface="Aptos" pitchFamily="34" charset="0"/>
+                <a:ea typeface="Aptos" pitchFamily="34" charset="-122"/>
+                <a:cs typeface="Aptos" pitchFamily="34" charset="-120"/>
+              </a:rPr>
+              <a:t>CDC Public Health Data Strategy:.</a:t>
+            </a:r>
+            <a:endParaRPr lang="en-US" sz="1380" dirty="0"/>
+          </a:p>
+          <a:p>
+            <a:r>
+              <a:rPr lang="en-US" sz="1380" dirty="0">
+                <a:solidFill>
+                  <a:srgbClr val="17364A"/>
+                </a:solidFill>
+                <a:latin typeface="Aptos" pitchFamily="34" charset="0"/>
+                <a:ea typeface="Aptos" pitchFamily="34" charset="-122"/>
+                <a:cs typeface="Aptos" pitchFamily="34" charset="-120"/>
+              </a:rPr>
+              <a:t>Public health implementation guides for eCR, ELR, IIS, and syndromic surveillance</a:t>
+            </a:r>
+            <a:endParaRPr lang="en-US" sz="1380" dirty="0"/>
+          </a:p>
+        </p:txBody>
       </p:sp>
       <p:sp>
         <p:nvSpPr>
           <p:cNvPr id="16" name="Shape 14"/>
-          <p:cNvSpPr/>
-          <p:nvPr/>
-        </p:nvSpPr>
-        <p:spPr>
-          <a:xfrm>
-            <a:off x="9198864" y="4206240"/>
-            <a:ext cx="347472" cy="347472"/>
-          </a:xfrm>
-          <a:prstGeom prst="ellipse">
-            <a:avLst/>
-          </a:prstGeom>
-          <a:solidFill>
-            <a:srgbClr val="2F8A28"/>
-          </a:solidFill>
-          <a:ln w="12700">
-            <a:solidFill>
-              <a:srgbClr val="2F8A28"/>
-            </a:solidFill>
-            <a:prstDash val="solid"/>
-          </a:ln>
-        </p:spPr>
-      </p:sp>
-      <p:sp>
-        <p:nvSpPr>
-          <p:cNvPr id="17" name="Text 15"/>
-          <p:cNvSpPr/>
-          <p:nvPr/>
-        </p:nvSpPr>
-        <p:spPr>
-          <a:xfrm>
-            <a:off x="7909560" y="3977640"/>
-            <a:ext cx="2926080" cy="182880"/>
-          </a:xfrm>
-          <a:prstGeom prst="rect">
-            <a:avLst/>
-          </a:prstGeom>
-          <a:noFill/>
-          <a:ln/>
-        </p:spPr>
-        <p:txBody>
-          <a:bodyPr wrap="square" lIns="0" tIns="0" rIns="0" bIns="0" rtlCol="0" anchor="ctr"/>
-          <a:lstStyle/>
-          <a:p>
-            <a:pPr algn="ctr" indent="0" marL="0">
-              <a:buNone/>
-            </a:pPr>
-            <a:r>
-              <a:rPr lang="en-US" sz="1000" dirty="0">
-                <a:solidFill>
-                  <a:srgbClr val="003A63"/>
-                </a:solidFill>
-                <a:latin typeface="Aptos" pitchFamily="34" charset="0"/>
-                <a:ea typeface="Aptos" pitchFamily="34" charset="-122"/>
-                <a:cs typeface="Aptos" pitchFamily="34" charset="-120"/>
-              </a:rPr>
-              <a:t>Concept to action</a:t>
-            </a:r>
-            <a:endParaRPr lang="en-US" sz="1000" dirty="0"/>
-          </a:p>
-        </p:txBody>
-      </p:sp>
-      <p:sp>
-        <p:nvSpPr>
-          <p:cNvPr id="18" name="Shape 16"/>
           <p:cNvSpPr/>
           <p:nvPr/>
         </p:nvSpPr>
@@ -13695,7 +13249,7 @@
       </p:sp>
       <p:sp>
         <p:nvSpPr>
-          <p:cNvPr id="19" name="Text 17"/>
+          <p:cNvPr id="17" name="Text 15"/>
           <p:cNvSpPr/>
           <p:nvPr/>
         </p:nvSpPr>
@@ -13734,7 +13288,7 @@
       </p:sp>
       <p:sp>
         <p:nvSpPr>
-          <p:cNvPr id="20" name="Text 18"/>
+          <p:cNvPr id="18" name="Text 16"/>
           <p:cNvSpPr/>
           <p:nvPr/>
         </p:nvSpPr>
@@ -14247,20 +13801,20 @@
         </p:nvSpPr>
         <p:spPr>
           <a:xfrm>
-            <a:off x="7818120" y="3977640"/>
-            <a:ext cx="972312" cy="749808"/>
+            <a:off x="8046720" y="3794760"/>
+            <a:ext cx="3063240" cy="1600200"/>
           </a:xfrm>
           <a:prstGeom prst="roundRect">
             <a:avLst>
-              <a:gd name="adj" fmla="val 14634"/>
+              <a:gd name="adj" fmla="val 6857"/>
             </a:avLst>
           </a:prstGeom>
           <a:solidFill>
-            <a:srgbClr val="0068B7"/>
+            <a:srgbClr val="FFFFFF"/>
           </a:solidFill>
           <a:ln w="12700">
             <a:solidFill>
-              <a:srgbClr val="0068B7"/>
+              <a:srgbClr val="B9D7E6"/>
             </a:solidFill>
             <a:prstDash val="solid"/>
           </a:ln>
@@ -14274,172 +13828,100 @@
         </p:nvSpPr>
         <p:spPr>
           <a:xfrm>
-            <a:off x="7891272" y="4169664"/>
-            <a:ext cx="826008" cy="310896"/>
-          </a:xfrm>
-          <a:prstGeom prst="rect">
-            <a:avLst/>
-          </a:prstGeom>
-          <a:noFill/>
-          <a:ln/>
-        </p:spPr>
-        <p:txBody>
-          <a:bodyPr wrap="square" lIns="0" tIns="0" rIns="0" bIns="0" rtlCol="0" anchor="ctr">
+            <a:off x="8211312" y="3941064"/>
+            <a:ext cx="2734056" cy="256032"/>
+          </a:xfrm>
+          <a:prstGeom prst="rect">
+            <a:avLst/>
+          </a:prstGeom>
+          <a:noFill/>
+          <a:ln/>
+        </p:spPr>
+        <p:txBody>
+          <a:bodyPr wrap="square" lIns="0" tIns="0" rIns="0" bIns="0" rtlCol="0" anchor="ctr"/>
+          <a:lstStyle/>
+          <a:p>
+            <a:pPr indent="0" marL="0">
+              <a:buNone/>
+            </a:pPr>
+            <a:r>
+              <a:rPr lang="en-US" sz="1300" b="1" dirty="0">
+                <a:solidFill>
+                  <a:srgbClr val="0068B7"/>
+                </a:solidFill>
+                <a:latin typeface="Aptos" pitchFamily="34" charset="0"/>
+                <a:ea typeface="Aptos" pitchFamily="34" charset="-122"/>
+                <a:cs typeface="Aptos" pitchFamily="34" charset="-120"/>
+              </a:rPr>
+              <a:t>Use the play links to</a:t>
+            </a:r>
+            <a:endParaRPr lang="en-US" sz="1300" dirty="0"/>
+          </a:p>
+        </p:txBody>
+      </p:sp>
+      <p:sp>
+        <p:nvSpPr>
+          <p:cNvPr id="15" name="Text 13"/>
+          <p:cNvSpPr/>
+          <p:nvPr/>
+        </p:nvSpPr>
+        <p:spPr>
+          <a:xfrm>
+            <a:off x="8229600" y="4306824"/>
+            <a:ext cx="2679192" cy="941832"/>
+          </a:xfrm>
+          <a:prstGeom prst="rect">
+            <a:avLst/>
+          </a:prstGeom>
+          <a:noFill/>
+          <a:ln/>
+        </p:spPr>
+        <p:txBody>
+          <a:bodyPr wrap="square" lIns="254" tIns="254" rIns="254" bIns="254" rtlCol="0" anchor="t">
             <a:normAutofit/>
           </a:bodyPr>
           <a:lstStyle/>
           <a:p>
-            <a:pPr algn="ctr" indent="0" marL="0">
-              <a:buNone/>
-            </a:pPr>
-            <a:r>
-              <a:rPr lang="en-US" sz="1500" b="1" dirty="0">
-                <a:solidFill>
-                  <a:srgbClr val="FFFFFF"/>
-                </a:solidFill>
-                <a:latin typeface="Aptos" pitchFamily="34" charset="0"/>
-                <a:ea typeface="Aptos" pitchFamily="34" charset="-122"/>
-                <a:cs typeface="Aptos" pitchFamily="34" charset="-120"/>
-              </a:rPr>
-              <a:t>Lesson</a:t>
-            </a:r>
-            <a:endParaRPr lang="en-US" sz="1500" dirty="0"/>
-          </a:p>
-        </p:txBody>
-      </p:sp>
-      <p:sp>
-        <p:nvSpPr>
-          <p:cNvPr id="15" name="Shape 13"/>
-          <p:cNvSpPr/>
-          <p:nvPr/>
-        </p:nvSpPr>
-        <p:spPr>
-          <a:xfrm>
-            <a:off x="9046464" y="3977640"/>
-            <a:ext cx="972312" cy="749808"/>
-          </a:xfrm>
-          <a:prstGeom prst="roundRect">
-            <a:avLst>
-              <a:gd name="adj" fmla="val 14634"/>
-            </a:avLst>
-          </a:prstGeom>
-          <a:solidFill>
-            <a:srgbClr val="2F8A28"/>
-          </a:solidFill>
-          <a:ln w="12700">
-            <a:solidFill>
-              <a:srgbClr val="2F8A28"/>
-            </a:solidFill>
-            <a:prstDash val="solid"/>
-          </a:ln>
-        </p:spPr>
-      </p:sp>
-      <p:sp>
-        <p:nvSpPr>
-          <p:cNvPr id="16" name="Text 14"/>
-          <p:cNvSpPr/>
-          <p:nvPr/>
-        </p:nvSpPr>
-        <p:spPr>
-          <a:xfrm>
-            <a:off x="9119616" y="4169664"/>
-            <a:ext cx="826008" cy="310896"/>
-          </a:xfrm>
-          <a:prstGeom prst="rect">
-            <a:avLst/>
-          </a:prstGeom>
-          <a:noFill/>
-          <a:ln/>
-        </p:spPr>
-        <p:txBody>
-          <a:bodyPr wrap="square" lIns="0" tIns="0" rIns="0" bIns="0" rtlCol="0" anchor="ctr">
-            <a:normAutofit/>
-          </a:bodyPr>
-          <a:lstStyle/>
-          <a:p>
-            <a:pPr algn="ctr" indent="0" marL="0">
-              <a:buNone/>
-            </a:pPr>
-            <a:r>
-              <a:rPr lang="en-US" sz="1500" b="1" dirty="0">
-                <a:solidFill>
-                  <a:srgbClr val="FFFFFF"/>
-                </a:solidFill>
-                <a:latin typeface="Aptos" pitchFamily="34" charset="0"/>
-                <a:ea typeface="Aptos" pitchFamily="34" charset="-122"/>
-                <a:cs typeface="Aptos" pitchFamily="34" charset="-120"/>
-              </a:rPr>
-              <a:t>Plays</a:t>
-            </a:r>
-            <a:endParaRPr lang="en-US" sz="1500" dirty="0"/>
-          </a:p>
-        </p:txBody>
-      </p:sp>
-      <p:sp>
-        <p:nvSpPr>
-          <p:cNvPr id="17" name="Shape 15"/>
-          <p:cNvSpPr/>
-          <p:nvPr/>
-        </p:nvSpPr>
-        <p:spPr>
-          <a:xfrm>
-            <a:off x="10274808" y="3977640"/>
-            <a:ext cx="972312" cy="749808"/>
-          </a:xfrm>
-          <a:prstGeom prst="roundRect">
-            <a:avLst>
-              <a:gd name="adj" fmla="val 14634"/>
-            </a:avLst>
-          </a:prstGeom>
-          <a:solidFill>
-            <a:srgbClr val="6A4CA3"/>
-          </a:solidFill>
-          <a:ln w="12700">
-            <a:solidFill>
-              <a:srgbClr val="6A4CA3"/>
-            </a:solidFill>
-            <a:prstDash val="solid"/>
-          </a:ln>
-        </p:spPr>
-      </p:sp>
-      <p:sp>
-        <p:nvSpPr>
-          <p:cNvPr id="18" name="Text 16"/>
-          <p:cNvSpPr/>
-          <p:nvPr/>
-        </p:nvSpPr>
-        <p:spPr>
-          <a:xfrm>
-            <a:off x="10347960" y="4169664"/>
-            <a:ext cx="826008" cy="310896"/>
-          </a:xfrm>
-          <a:prstGeom prst="rect">
-            <a:avLst/>
-          </a:prstGeom>
-          <a:noFill/>
-          <a:ln/>
-        </p:spPr>
-        <p:txBody>
-          <a:bodyPr wrap="square" lIns="0" tIns="0" rIns="0" bIns="0" rtlCol="0" anchor="ctr">
-            <a:normAutofit/>
-          </a:bodyPr>
-          <a:lstStyle/>
-          <a:p>
-            <a:pPr algn="ctr" indent="0" marL="0">
-              <a:buNone/>
-            </a:pPr>
-            <a:r>
-              <a:rPr lang="en-US" sz="1500" b="1" dirty="0">
-                <a:solidFill>
-                  <a:srgbClr val="FFFFFF"/>
-                </a:solidFill>
-                <a:latin typeface="Aptos" pitchFamily="34" charset="0"/>
-                <a:ea typeface="Aptos" pitchFamily="34" charset="-122"/>
-                <a:cs typeface="Aptos" pitchFamily="34" charset="-120"/>
-              </a:rPr>
-              <a:t>Action</a:t>
-            </a:r>
-            <a:endParaRPr lang="en-US" sz="1500" dirty="0"/>
+            <a:r>
+              <a:rPr lang="en-US" sz="1380" dirty="0">
+                <a:solidFill>
+                  <a:srgbClr val="17364A"/>
+                </a:solidFill>
+                <a:latin typeface="Aptos" pitchFamily="34" charset="0"/>
+                <a:ea typeface="Aptos" pitchFamily="34" charset="-122"/>
+                <a:cs typeface="Aptos" pitchFamily="34" charset="-120"/>
+              </a:rPr>
+              <a:t>Locate the decision point in the playbook sequence.</a:t>
+            </a:r>
+            <a:endParaRPr lang="en-US" sz="1380" dirty="0"/>
+          </a:p>
+          <a:p>
+            <a:r>
+              <a:rPr lang="en-US" sz="1380" dirty="0">
+                <a:solidFill>
+                  <a:srgbClr val="17364A"/>
+                </a:solidFill>
+                <a:latin typeface="Aptos" pitchFamily="34" charset="0"/>
+                <a:ea typeface="Aptos" pitchFamily="34" charset="-122"/>
+                <a:cs typeface="Aptos" pitchFamily="34" charset="-120"/>
+              </a:rPr>
+              <a:t>Identify who should participate in the work.</a:t>
+            </a:r>
+            <a:endParaRPr lang="en-US" sz="1380" dirty="0"/>
+          </a:p>
+          <a:p>
+            <a:r>
+              <a:rPr lang="en-US" sz="1380" dirty="0">
+                <a:solidFill>
+                  <a:srgbClr val="17364A"/>
+                </a:solidFill>
+                <a:latin typeface="Aptos" pitchFamily="34" charset="0"/>
+                <a:ea typeface="Aptos" pitchFamily="34" charset="-122"/>
+                <a:cs typeface="Aptos" pitchFamily="34" charset="-120"/>
+              </a:rPr>
+              <a:t>Document the review, approval, or implementation step.</a:t>
+            </a:r>
+            <a:endParaRPr lang="en-US" sz="1380" dirty="0"/>
           </a:p>
         </p:txBody>
       </p:sp>
@@ -14917,20 +14399,20 @@
         </p:nvSpPr>
         <p:spPr>
           <a:xfrm>
-            <a:off x="7818120" y="3977640"/>
-            <a:ext cx="972312" cy="749808"/>
+            <a:off x="8046720" y="3794760"/>
+            <a:ext cx="3063240" cy="1600200"/>
           </a:xfrm>
           <a:prstGeom prst="roundRect">
             <a:avLst>
-              <a:gd name="adj" fmla="val 14634"/>
+              <a:gd name="adj" fmla="val 6857"/>
             </a:avLst>
           </a:prstGeom>
           <a:solidFill>
-            <a:srgbClr val="0068B7"/>
+            <a:srgbClr val="FFFFFF"/>
           </a:solidFill>
           <a:ln w="12700">
             <a:solidFill>
-              <a:srgbClr val="0068B7"/>
+              <a:srgbClr val="B9D7E6"/>
             </a:solidFill>
             <a:prstDash val="solid"/>
           </a:ln>
@@ -14944,172 +14426,100 @@
         </p:nvSpPr>
         <p:spPr>
           <a:xfrm>
-            <a:off x="7891272" y="4169664"/>
-            <a:ext cx="826008" cy="310896"/>
-          </a:xfrm>
-          <a:prstGeom prst="rect">
-            <a:avLst/>
-          </a:prstGeom>
-          <a:noFill/>
-          <a:ln/>
-        </p:spPr>
-        <p:txBody>
-          <a:bodyPr wrap="square" lIns="0" tIns="0" rIns="0" bIns="0" rtlCol="0" anchor="ctr">
+            <a:off x="8211312" y="3941064"/>
+            <a:ext cx="2734056" cy="256032"/>
+          </a:xfrm>
+          <a:prstGeom prst="rect">
+            <a:avLst/>
+          </a:prstGeom>
+          <a:noFill/>
+          <a:ln/>
+        </p:spPr>
+        <p:txBody>
+          <a:bodyPr wrap="square" lIns="0" tIns="0" rIns="0" bIns="0" rtlCol="0" anchor="ctr"/>
+          <a:lstStyle/>
+          <a:p>
+            <a:pPr indent="0" marL="0">
+              <a:buNone/>
+            </a:pPr>
+            <a:r>
+              <a:rPr lang="en-US" sz="1300" b="1" dirty="0">
+                <a:solidFill>
+                  <a:srgbClr val="0068B7"/>
+                </a:solidFill>
+                <a:latin typeface="Aptos" pitchFamily="34" charset="0"/>
+                <a:ea typeface="Aptos" pitchFamily="34" charset="-122"/>
+                <a:cs typeface="Aptos" pitchFamily="34" charset="-120"/>
+              </a:rPr>
+              <a:t>Tool selection cues</a:t>
+            </a:r>
+            <a:endParaRPr lang="en-US" sz="1300" dirty="0"/>
+          </a:p>
+        </p:txBody>
+      </p:sp>
+      <p:sp>
+        <p:nvSpPr>
+          <p:cNvPr id="15" name="Text 13"/>
+          <p:cNvSpPr/>
+          <p:nvPr/>
+        </p:nvSpPr>
+        <p:spPr>
+          <a:xfrm>
+            <a:off x="8229600" y="4306824"/>
+            <a:ext cx="2679192" cy="941832"/>
+          </a:xfrm>
+          <a:prstGeom prst="rect">
+            <a:avLst/>
+          </a:prstGeom>
+          <a:noFill/>
+          <a:ln/>
+        </p:spPr>
+        <p:txBody>
+          <a:bodyPr wrap="square" lIns="254" tIns="254" rIns="254" bIns="254" rtlCol="0" anchor="t">
             <a:normAutofit/>
           </a:bodyPr>
           <a:lstStyle/>
           <a:p>
-            <a:pPr algn="ctr" indent="0" marL="0">
-              <a:buNone/>
-            </a:pPr>
-            <a:r>
-              <a:rPr lang="en-US" sz="1500" b="1" dirty="0">
-                <a:solidFill>
-                  <a:srgbClr val="FFFFFF"/>
-                </a:solidFill>
-                <a:latin typeface="Aptos" pitchFamily="34" charset="0"/>
-                <a:ea typeface="Aptos" pitchFamily="34" charset="-122"/>
-                <a:cs typeface="Aptos" pitchFamily="34" charset="-120"/>
-              </a:rPr>
-              <a:t>Concept</a:t>
-            </a:r>
-            <a:endParaRPr lang="en-US" sz="1500" dirty="0"/>
-          </a:p>
-        </p:txBody>
-      </p:sp>
-      <p:sp>
-        <p:nvSpPr>
-          <p:cNvPr id="15" name="Shape 13"/>
-          <p:cNvSpPr/>
-          <p:nvPr/>
-        </p:nvSpPr>
-        <p:spPr>
-          <a:xfrm>
-            <a:off x="9046464" y="3977640"/>
-            <a:ext cx="972312" cy="749808"/>
-          </a:xfrm>
-          <a:prstGeom prst="roundRect">
-            <a:avLst>
-              <a:gd name="adj" fmla="val 14634"/>
-            </a:avLst>
-          </a:prstGeom>
-          <a:solidFill>
-            <a:srgbClr val="2F8A28"/>
-          </a:solidFill>
-          <a:ln w="12700">
-            <a:solidFill>
-              <a:srgbClr val="2F8A28"/>
-            </a:solidFill>
-            <a:prstDash val="solid"/>
-          </a:ln>
-        </p:spPr>
-      </p:sp>
-      <p:sp>
-        <p:nvSpPr>
-          <p:cNvPr id="16" name="Text 14"/>
-          <p:cNvSpPr/>
-          <p:nvPr/>
-        </p:nvSpPr>
-        <p:spPr>
-          <a:xfrm>
-            <a:off x="9119616" y="4169664"/>
-            <a:ext cx="826008" cy="310896"/>
-          </a:xfrm>
-          <a:prstGeom prst="rect">
-            <a:avLst/>
-          </a:prstGeom>
-          <a:noFill/>
-          <a:ln/>
-        </p:spPr>
-        <p:txBody>
-          <a:bodyPr wrap="square" lIns="0" tIns="0" rIns="0" bIns="0" rtlCol="0" anchor="ctr">
-            <a:normAutofit/>
-          </a:bodyPr>
-          <a:lstStyle/>
-          <a:p>
-            <a:pPr algn="ctr" indent="0" marL="0">
-              <a:buNone/>
-            </a:pPr>
-            <a:r>
-              <a:rPr lang="en-US" sz="1500" b="1" dirty="0">
-                <a:solidFill>
-                  <a:srgbClr val="FFFFFF"/>
-                </a:solidFill>
-                <a:latin typeface="Aptos" pitchFamily="34" charset="0"/>
-                <a:ea typeface="Aptos" pitchFamily="34" charset="-122"/>
-                <a:cs typeface="Aptos" pitchFamily="34" charset="-120"/>
-              </a:rPr>
-              <a:t>Tool</a:t>
-            </a:r>
-            <a:endParaRPr lang="en-US" sz="1500" dirty="0"/>
-          </a:p>
-        </p:txBody>
-      </p:sp>
-      <p:sp>
-        <p:nvSpPr>
-          <p:cNvPr id="17" name="Shape 15"/>
-          <p:cNvSpPr/>
-          <p:nvPr/>
-        </p:nvSpPr>
-        <p:spPr>
-          <a:xfrm>
-            <a:off x="10274808" y="3977640"/>
-            <a:ext cx="972312" cy="749808"/>
-          </a:xfrm>
-          <a:prstGeom prst="roundRect">
-            <a:avLst>
-              <a:gd name="adj" fmla="val 14634"/>
-            </a:avLst>
-          </a:prstGeom>
-          <a:solidFill>
-            <a:srgbClr val="D69A2D"/>
-          </a:solidFill>
-          <a:ln w="12700">
-            <a:solidFill>
-              <a:srgbClr val="D69A2D"/>
-            </a:solidFill>
-            <a:prstDash val="solid"/>
-          </a:ln>
-        </p:spPr>
-      </p:sp>
-      <p:sp>
-        <p:nvSpPr>
-          <p:cNvPr id="18" name="Text 16"/>
-          <p:cNvSpPr/>
-          <p:nvPr/>
-        </p:nvSpPr>
-        <p:spPr>
-          <a:xfrm>
-            <a:off x="10347960" y="4169664"/>
-            <a:ext cx="826008" cy="310896"/>
-          </a:xfrm>
-          <a:prstGeom prst="rect">
-            <a:avLst/>
-          </a:prstGeom>
-          <a:noFill/>
-          <a:ln/>
-        </p:spPr>
-        <p:txBody>
-          <a:bodyPr wrap="square" lIns="0" tIns="0" rIns="0" bIns="0" rtlCol="0" anchor="ctr">
-            <a:normAutofit/>
-          </a:bodyPr>
-          <a:lstStyle/>
-          <a:p>
-            <a:pPr algn="ctr" indent="0" marL="0">
-              <a:buNone/>
-            </a:pPr>
-            <a:r>
-              <a:rPr lang="en-US" sz="1500" b="1" dirty="0">
-                <a:solidFill>
-                  <a:srgbClr val="FFFFFF"/>
-                </a:solidFill>
-                <a:latin typeface="Aptos" pitchFamily="34" charset="0"/>
-                <a:ea typeface="Aptos" pitchFamily="34" charset="-122"/>
-                <a:cs typeface="Aptos" pitchFamily="34" charset="-120"/>
-              </a:rPr>
-              <a:t>Artifact</a:t>
-            </a:r>
-            <a:endParaRPr lang="en-US" sz="1500" dirty="0"/>
+            <a:r>
+              <a:rPr lang="en-US" sz="1380" dirty="0">
+                <a:solidFill>
+                  <a:srgbClr val="17364A"/>
+                </a:solidFill>
+                <a:latin typeface="Aptos" pitchFamily="34" charset="0"/>
+                <a:ea typeface="Aptos" pitchFamily="34" charset="-122"/>
+                <a:cs typeface="Aptos" pitchFamily="34" charset="-120"/>
+              </a:rPr>
+              <a:t>Use a tool when no comparable local process exists.</a:t>
+            </a:r>
+            <a:endParaRPr lang="en-US" sz="1380" dirty="0"/>
+          </a:p>
+          <a:p>
+            <a:r>
+              <a:rPr lang="en-US" sz="1380" dirty="0">
+                <a:solidFill>
+                  <a:srgbClr val="17364A"/>
+                </a:solidFill>
+                <a:latin typeface="Aptos" pitchFamily="34" charset="0"/>
+                <a:ea typeface="Aptos" pitchFamily="34" charset="-122"/>
+                <a:cs typeface="Aptos" pitchFamily="34" charset="-120"/>
+              </a:rPr>
+              <a:t>Adapt existing department templates when they already fit the purpose.</a:t>
+            </a:r>
+            <a:endParaRPr lang="en-US" sz="1380" dirty="0"/>
+          </a:p>
+          <a:p>
+            <a:r>
+              <a:rPr lang="en-US" sz="1380" dirty="0">
+                <a:solidFill>
+                  <a:srgbClr val="17364A"/>
+                </a:solidFill>
+                <a:latin typeface="Aptos" pitchFamily="34" charset="0"/>
+                <a:ea typeface="Aptos" pitchFamily="34" charset="-122"/>
+                <a:cs typeface="Aptos" pitchFamily="34" charset="-120"/>
+              </a:rPr>
+              <a:t>Save the completed artifact as evidence of the decision.</a:t>
+            </a:r>
+            <a:endParaRPr lang="en-US" sz="1380" dirty="0"/>
           </a:p>
         </p:txBody>
       </p:sp>
@@ -15582,13 +14992,11 @@
             </a:avLst>
           </a:prstGeom>
           <a:solidFill>
-            <a:srgbClr val="FFFFFF">
-              <a:alpha val="88000"/>
-            </a:srgbClr>
+            <a:srgbClr val="FFFFFF"/>
           </a:solidFill>
           <a:ln w="12700">
             <a:solidFill>
-              <a:srgbClr val="D6E8F2"/>
+              <a:srgbClr val="B9D7E6"/>
             </a:solidFill>
             <a:prstDash val="solid"/>
           </a:ln>
@@ -15596,119 +15004,98 @@
       </p:sp>
       <p:sp>
         <p:nvSpPr>
-          <p:cNvPr id="14" name="Shape 12"/>
-          <p:cNvSpPr/>
-          <p:nvPr/>
-        </p:nvSpPr>
-        <p:spPr>
-          <a:xfrm>
-            <a:off x="8074152" y="3291840"/>
-            <a:ext cx="2596896" cy="749808"/>
-          </a:xfrm>
-          <a:prstGeom prst="rect">
-            <a:avLst/>
-          </a:prstGeom>
-          <a:solidFill>
-            <a:srgbClr val="EAF6F8"/>
-          </a:solidFill>
-          <a:ln w="12700">
-            <a:solidFill>
-              <a:srgbClr val="8ABBD8"/>
-            </a:solidFill>
-            <a:prstDash val="solid"/>
-          </a:ln>
-        </p:spPr>
-      </p:sp>
-      <p:sp>
-        <p:nvSpPr>
-          <p:cNvPr id="15" name="Shape 13"/>
-          <p:cNvSpPr/>
-          <p:nvPr/>
-        </p:nvSpPr>
-        <p:spPr>
-          <a:xfrm>
-            <a:off x="8202168" y="3721608"/>
-            <a:ext cx="2340864" cy="0"/>
-          </a:xfrm>
-          <a:prstGeom prst="line">
-            <a:avLst/>
-          </a:prstGeom>
-          <a:noFill/>
-          <a:ln w="19050">
-            <a:solidFill>
-              <a:srgbClr val="0068B7"/>
-            </a:solidFill>
-            <a:prstDash val="solid"/>
-          </a:ln>
-        </p:spPr>
+          <p:cNvPr id="14" name="Text 12"/>
+          <p:cNvSpPr/>
+          <p:nvPr/>
+        </p:nvSpPr>
+        <p:spPr>
+          <a:xfrm>
+            <a:off x="7799832" y="2935224"/>
+            <a:ext cx="3145536" cy="256032"/>
+          </a:xfrm>
+          <a:prstGeom prst="rect">
+            <a:avLst/>
+          </a:prstGeom>
+          <a:noFill/>
+          <a:ln/>
+        </p:spPr>
+        <p:txBody>
+          <a:bodyPr wrap="square" lIns="0" tIns="0" rIns="0" bIns="0" rtlCol="0" anchor="ctr"/>
+          <a:lstStyle/>
+          <a:p>
+            <a:pPr indent="0" marL="0">
+              <a:buNone/>
+            </a:pPr>
+            <a:r>
+              <a:rPr lang="en-US" sz="1300" b="1" dirty="0">
+                <a:solidFill>
+                  <a:srgbClr val="0068B7"/>
+                </a:solidFill>
+                <a:latin typeface="Aptos" pitchFamily="34" charset="0"/>
+                <a:ea typeface="Aptos" pitchFamily="34" charset="-122"/>
+                <a:cs typeface="Aptos" pitchFamily="34" charset="-120"/>
+              </a:rPr>
+              <a:t>Concept checkpoints</a:t>
+            </a:r>
+            <a:endParaRPr lang="en-US" sz="1300" dirty="0"/>
+          </a:p>
+        </p:txBody>
+      </p:sp>
+      <p:sp>
+        <p:nvSpPr>
+          <p:cNvPr id="15" name="Text 13"/>
+          <p:cNvSpPr/>
+          <p:nvPr/>
+        </p:nvSpPr>
+        <p:spPr>
+          <a:xfrm>
+            <a:off x="7818120" y="3300984"/>
+            <a:ext cx="3090672" cy="877824"/>
+          </a:xfrm>
+          <a:prstGeom prst="rect">
+            <a:avLst/>
+          </a:prstGeom>
+          <a:noFill/>
+          <a:ln/>
+        </p:spPr>
+        <p:txBody>
+          <a:bodyPr wrap="square" lIns="254" tIns="254" rIns="254" bIns="254" rtlCol="0" anchor="t">
+            <a:normAutofit/>
+          </a:bodyPr>
+          <a:lstStyle/>
+          <a:p>
+            <a:r>
+              <a:rPr lang="en-US" sz="1380" dirty="0">
+                <a:solidFill>
+                  <a:srgbClr val="17364A"/>
+                </a:solidFill>
+                <a:latin typeface="Aptos" pitchFamily="34" charset="0"/>
+                <a:ea typeface="Aptos" pitchFamily="34" charset="-122"/>
+                <a:cs typeface="Aptos" pitchFamily="34" charset="-120"/>
+              </a:rPr>
+              <a:t>Explain the purpose of implementation guides and terminology standards.</a:t>
+            </a:r>
+            <a:endParaRPr lang="en-US" sz="1380" dirty="0"/>
+          </a:p>
+          <a:p>
+            <a:r>
+              <a:rPr lang="en-US" sz="1380" dirty="0">
+                <a:solidFill>
+                  <a:srgbClr val="17364A"/>
+                </a:solidFill>
+                <a:latin typeface="Aptos" pitchFamily="34" charset="0"/>
+                <a:ea typeface="Aptos" pitchFamily="34" charset="-122"/>
+                <a:cs typeface="Aptos" pitchFamily="34" charset="-120"/>
+              </a:rPr>
+              <a:t>Develop interoperability requirements and vendor questions for AI-supported workflows.</a:t>
+            </a:r>
+            <a:endParaRPr lang="en-US" sz="1380" dirty="0"/>
+          </a:p>
+        </p:txBody>
       </p:sp>
       <p:sp>
         <p:nvSpPr>
           <p:cNvPr id="16" name="Shape 14"/>
-          <p:cNvSpPr/>
-          <p:nvPr/>
-        </p:nvSpPr>
-        <p:spPr>
-          <a:xfrm>
-            <a:off x="9198864" y="4206240"/>
-            <a:ext cx="347472" cy="347472"/>
-          </a:xfrm>
-          <a:prstGeom prst="ellipse">
-            <a:avLst/>
-          </a:prstGeom>
-          <a:solidFill>
-            <a:srgbClr val="2F8A28"/>
-          </a:solidFill>
-          <a:ln w="12700">
-            <a:solidFill>
-              <a:srgbClr val="2F8A28"/>
-            </a:solidFill>
-            <a:prstDash val="solid"/>
-          </a:ln>
-        </p:spPr>
-      </p:sp>
-      <p:sp>
-        <p:nvSpPr>
-          <p:cNvPr id="17" name="Text 15"/>
-          <p:cNvSpPr/>
-          <p:nvPr/>
-        </p:nvSpPr>
-        <p:spPr>
-          <a:xfrm>
-            <a:off x="7909560" y="3977640"/>
-            <a:ext cx="2926080" cy="182880"/>
-          </a:xfrm>
-          <a:prstGeom prst="rect">
-            <a:avLst/>
-          </a:prstGeom>
-          <a:noFill/>
-          <a:ln/>
-        </p:spPr>
-        <p:txBody>
-          <a:bodyPr wrap="square" lIns="0" tIns="0" rIns="0" bIns="0" rtlCol="0" anchor="ctr"/>
-          <a:lstStyle/>
-          <a:p>
-            <a:pPr algn="ctr" indent="0" marL="0">
-              <a:buNone/>
-            </a:pPr>
-            <a:r>
-              <a:rPr lang="en-US" sz="1000" dirty="0">
-                <a:solidFill>
-                  <a:srgbClr val="003A63"/>
-                </a:solidFill>
-                <a:latin typeface="Aptos" pitchFamily="34" charset="0"/>
-                <a:ea typeface="Aptos" pitchFamily="34" charset="-122"/>
-                <a:cs typeface="Aptos" pitchFamily="34" charset="-120"/>
-              </a:rPr>
-              <a:t>Concept to action</a:t>
-            </a:r>
-            <a:endParaRPr lang="en-US" sz="1000" dirty="0"/>
-          </a:p>
-        </p:txBody>
-      </p:sp>
-      <p:sp>
-        <p:nvSpPr>
-          <p:cNvPr id="18" name="Shape 16"/>
           <p:cNvSpPr/>
           <p:nvPr/>
         </p:nvSpPr>
@@ -15735,7 +15122,7 @@
       </p:sp>
       <p:sp>
         <p:nvSpPr>
-          <p:cNvPr id="19" name="Text 17"/>
+          <p:cNvPr id="17" name="Text 15"/>
           <p:cNvSpPr/>
           <p:nvPr/>
         </p:nvSpPr>
@@ -15774,7 +15161,7 @@
       </p:sp>
       <p:sp>
         <p:nvSpPr>
-          <p:cNvPr id="20" name="Text 18"/>
+          <p:cNvPr id="18" name="Text 16"/>
           <p:cNvSpPr/>
           <p:nvPr/>
         </p:nvSpPr>
@@ -16282,13 +15669,11 @@
             </a:avLst>
           </a:prstGeom>
           <a:solidFill>
-            <a:srgbClr val="FFFFFF">
-              <a:alpha val="88000"/>
-            </a:srgbClr>
+            <a:srgbClr val="FFFFFF"/>
           </a:solidFill>
           <a:ln w="12700">
             <a:solidFill>
-              <a:srgbClr val="D6E8F2"/>
+              <a:srgbClr val="B9D7E6"/>
             </a:solidFill>
             <a:prstDash val="solid"/>
           </a:ln>
@@ -16296,119 +15681,98 @@
       </p:sp>
       <p:sp>
         <p:nvSpPr>
-          <p:cNvPr id="14" name="Shape 12"/>
-          <p:cNvSpPr/>
-          <p:nvPr/>
-        </p:nvSpPr>
-        <p:spPr>
-          <a:xfrm>
-            <a:off x="8074152" y="3291840"/>
-            <a:ext cx="2596896" cy="749808"/>
-          </a:xfrm>
-          <a:prstGeom prst="rect">
-            <a:avLst/>
-          </a:prstGeom>
-          <a:solidFill>
-            <a:srgbClr val="EAF6F8"/>
-          </a:solidFill>
-          <a:ln w="12700">
-            <a:solidFill>
-              <a:srgbClr val="8ABBD8"/>
-            </a:solidFill>
-            <a:prstDash val="solid"/>
-          </a:ln>
-        </p:spPr>
-      </p:sp>
-      <p:sp>
-        <p:nvSpPr>
-          <p:cNvPr id="15" name="Shape 13"/>
-          <p:cNvSpPr/>
-          <p:nvPr/>
-        </p:nvSpPr>
-        <p:spPr>
-          <a:xfrm>
-            <a:off x="8202168" y="3721608"/>
-            <a:ext cx="2340864" cy="0"/>
-          </a:xfrm>
-          <a:prstGeom prst="line">
-            <a:avLst/>
-          </a:prstGeom>
-          <a:noFill/>
-          <a:ln w="19050">
-            <a:solidFill>
-              <a:srgbClr val="0068B7"/>
-            </a:solidFill>
-            <a:prstDash val="solid"/>
-          </a:ln>
-        </p:spPr>
+          <p:cNvPr id="14" name="Text 12"/>
+          <p:cNvSpPr/>
+          <p:nvPr/>
+        </p:nvSpPr>
+        <p:spPr>
+          <a:xfrm>
+            <a:off x="7799832" y="2935224"/>
+            <a:ext cx="3145536" cy="256032"/>
+          </a:xfrm>
+          <a:prstGeom prst="rect">
+            <a:avLst/>
+          </a:prstGeom>
+          <a:noFill/>
+          <a:ln/>
+        </p:spPr>
+        <p:txBody>
+          <a:bodyPr wrap="square" lIns="0" tIns="0" rIns="0" bIns="0" rtlCol="0" anchor="ctr"/>
+          <a:lstStyle/>
+          <a:p>
+            <a:pPr indent="0" marL="0">
+              <a:buNone/>
+            </a:pPr>
+            <a:r>
+              <a:rPr lang="en-US" sz="1300" b="1" dirty="0">
+                <a:solidFill>
+                  <a:srgbClr val="0068B7"/>
+                </a:solidFill>
+                <a:latin typeface="Aptos" pitchFamily="34" charset="0"/>
+                <a:ea typeface="Aptos" pitchFamily="34" charset="-122"/>
+                <a:cs typeface="Aptos" pitchFamily="34" charset="-120"/>
+              </a:rPr>
+              <a:t>Concept checkpoints</a:t>
+            </a:r>
+            <a:endParaRPr lang="en-US" sz="1300" dirty="0"/>
+          </a:p>
+        </p:txBody>
+      </p:sp>
+      <p:sp>
+        <p:nvSpPr>
+          <p:cNvPr id="15" name="Text 13"/>
+          <p:cNvSpPr/>
+          <p:nvPr/>
+        </p:nvSpPr>
+        <p:spPr>
+          <a:xfrm>
+            <a:off x="7818120" y="3300984"/>
+            <a:ext cx="3090672" cy="877824"/>
+          </a:xfrm>
+          <a:prstGeom prst="rect">
+            <a:avLst/>
+          </a:prstGeom>
+          <a:noFill/>
+          <a:ln/>
+        </p:spPr>
+        <p:txBody>
+          <a:bodyPr wrap="square" lIns="254" tIns="254" rIns="254" bIns="254" rtlCol="0" anchor="t">
+            <a:normAutofit/>
+          </a:bodyPr>
+          <a:lstStyle/>
+          <a:p>
+            <a:r>
+              <a:rPr lang="en-US" sz="1380" dirty="0">
+                <a:solidFill>
+                  <a:srgbClr val="17364A"/>
+                </a:solidFill>
+                <a:latin typeface="Aptos" pitchFamily="34" charset="0"/>
+                <a:ea typeface="Aptos" pitchFamily="34" charset="-122"/>
+                <a:cs typeface="Aptos" pitchFamily="34" charset="-120"/>
+              </a:rPr>
+              <a:t>Interoperability is the discipline that makes this exchange possible across EHRs,.</a:t>
+            </a:r>
+            <a:endParaRPr lang="en-US" sz="1380" dirty="0"/>
+          </a:p>
+          <a:p>
+            <a:r>
+              <a:rPr lang="en-US" sz="1380" dirty="0">
+                <a:solidFill>
+                  <a:srgbClr val="17364A"/>
+                </a:solidFill>
+                <a:latin typeface="Aptos" pitchFamily="34" charset="0"/>
+                <a:ea typeface="Aptos" pitchFamily="34" charset="-122"/>
+                <a:cs typeface="Aptos" pitchFamily="34" charset="-120"/>
+              </a:rPr>
+              <a:t>This module introduces the major standards that public health staff encounter, including.</a:t>
+            </a:r>
+            <a:endParaRPr lang="en-US" sz="1380" dirty="0"/>
+          </a:p>
+        </p:txBody>
       </p:sp>
       <p:sp>
         <p:nvSpPr>
           <p:cNvPr id="16" name="Shape 14"/>
-          <p:cNvSpPr/>
-          <p:nvPr/>
-        </p:nvSpPr>
-        <p:spPr>
-          <a:xfrm>
-            <a:off x="9198864" y="4206240"/>
-            <a:ext cx="347472" cy="347472"/>
-          </a:xfrm>
-          <a:prstGeom prst="ellipse">
-            <a:avLst/>
-          </a:prstGeom>
-          <a:solidFill>
-            <a:srgbClr val="2F8A28"/>
-          </a:solidFill>
-          <a:ln w="12700">
-            <a:solidFill>
-              <a:srgbClr val="2F8A28"/>
-            </a:solidFill>
-            <a:prstDash val="solid"/>
-          </a:ln>
-        </p:spPr>
-      </p:sp>
-      <p:sp>
-        <p:nvSpPr>
-          <p:cNvPr id="17" name="Text 15"/>
-          <p:cNvSpPr/>
-          <p:nvPr/>
-        </p:nvSpPr>
-        <p:spPr>
-          <a:xfrm>
-            <a:off x="7909560" y="3977640"/>
-            <a:ext cx="2926080" cy="182880"/>
-          </a:xfrm>
-          <a:prstGeom prst="rect">
-            <a:avLst/>
-          </a:prstGeom>
-          <a:noFill/>
-          <a:ln/>
-        </p:spPr>
-        <p:txBody>
-          <a:bodyPr wrap="square" lIns="0" tIns="0" rIns="0" bIns="0" rtlCol="0" anchor="ctr"/>
-          <a:lstStyle/>
-          <a:p>
-            <a:pPr algn="ctr" indent="0" marL="0">
-              <a:buNone/>
-            </a:pPr>
-            <a:r>
-              <a:rPr lang="en-US" sz="1000" dirty="0">
-                <a:solidFill>
-                  <a:srgbClr val="003A63"/>
-                </a:solidFill>
-                <a:latin typeface="Aptos" pitchFamily="34" charset="0"/>
-                <a:ea typeface="Aptos" pitchFamily="34" charset="-122"/>
-                <a:cs typeface="Aptos" pitchFamily="34" charset="-120"/>
-              </a:rPr>
-              <a:t>Concept to action</a:t>
-            </a:r>
-            <a:endParaRPr lang="en-US" sz="1000" dirty="0"/>
-          </a:p>
-        </p:txBody>
-      </p:sp>
-      <p:sp>
-        <p:nvSpPr>
-          <p:cNvPr id="18" name="Shape 16"/>
           <p:cNvSpPr/>
           <p:nvPr/>
         </p:nvSpPr>
@@ -16435,7 +15799,7 @@
       </p:sp>
       <p:sp>
         <p:nvSpPr>
-          <p:cNvPr id="19" name="Text 17"/>
+          <p:cNvPr id="17" name="Text 15"/>
           <p:cNvSpPr/>
           <p:nvPr/>
         </p:nvSpPr>
@@ -16474,7 +15838,7 @@
       </p:sp>
       <p:sp>
         <p:nvSpPr>
-          <p:cNvPr id="20" name="Text 18"/>
+          <p:cNvPr id="18" name="Text 16"/>
           <p:cNvSpPr/>
           <p:nvPr/>
         </p:nvSpPr>
@@ -16982,13 +16346,11 @@
             </a:avLst>
           </a:prstGeom>
           <a:solidFill>
-            <a:srgbClr val="FFFFFF">
-              <a:alpha val="88000"/>
-            </a:srgbClr>
+            <a:srgbClr val="FFFFFF"/>
           </a:solidFill>
           <a:ln w="12700">
             <a:solidFill>
-              <a:srgbClr val="D6E8F2"/>
+              <a:srgbClr val="B9D7E6"/>
             </a:solidFill>
             <a:prstDash val="solid"/>
           </a:ln>
@@ -16996,190 +16358,112 @@
       </p:sp>
       <p:sp>
         <p:nvSpPr>
-          <p:cNvPr id="14" name="Shape 12"/>
-          <p:cNvSpPr/>
-          <p:nvPr/>
-        </p:nvSpPr>
-        <p:spPr>
-          <a:xfrm>
-            <a:off x="7891272" y="3108960"/>
-            <a:ext cx="566928" cy="566928"/>
-          </a:xfrm>
-          <a:prstGeom prst="ellipse">
-            <a:avLst/>
-          </a:prstGeom>
-          <a:solidFill>
-            <a:srgbClr val="0068B7"/>
-          </a:solidFill>
-          <a:ln w="12700">
-            <a:solidFill>
-              <a:srgbClr val="0068B7"/>
-            </a:solidFill>
-            <a:prstDash val="solid"/>
-          </a:ln>
-        </p:spPr>
-      </p:sp>
-      <p:sp>
-        <p:nvSpPr>
-          <p:cNvPr id="15" name="Shape 13"/>
-          <p:cNvSpPr/>
-          <p:nvPr/>
-        </p:nvSpPr>
-        <p:spPr>
-          <a:xfrm>
-            <a:off x="10287000" y="3108960"/>
-            <a:ext cx="566928" cy="566928"/>
-          </a:xfrm>
-          <a:prstGeom prst="ellipse">
-            <a:avLst/>
-          </a:prstGeom>
-          <a:solidFill>
-            <a:srgbClr val="2F8A28"/>
-          </a:solidFill>
-          <a:ln w="12700">
-            <a:solidFill>
-              <a:srgbClr val="2F8A28"/>
-            </a:solidFill>
-            <a:prstDash val="solid"/>
-          </a:ln>
-        </p:spPr>
+          <p:cNvPr id="14" name="Text 12"/>
+          <p:cNvSpPr/>
+          <p:nvPr/>
+        </p:nvSpPr>
+        <p:spPr>
+          <a:xfrm>
+            <a:off x="7799832" y="2935224"/>
+            <a:ext cx="3145536" cy="256032"/>
+          </a:xfrm>
+          <a:prstGeom prst="rect">
+            <a:avLst/>
+          </a:prstGeom>
+          <a:noFill/>
+          <a:ln/>
+        </p:spPr>
+        <p:txBody>
+          <a:bodyPr wrap="square" lIns="0" tIns="0" rIns="0" bIns="0" rtlCol="0" anchor="ctr"/>
+          <a:lstStyle/>
+          <a:p>
+            <a:pPr indent="0" marL="0">
+              <a:buNone/>
+            </a:pPr>
+            <a:r>
+              <a:rPr lang="en-US" sz="1300" b="1" dirty="0">
+                <a:solidFill>
+                  <a:srgbClr val="0068B7"/>
+                </a:solidFill>
+                <a:latin typeface="Aptos" pitchFamily="34" charset="0"/>
+                <a:ea typeface="Aptos" pitchFamily="34" charset="-122"/>
+                <a:cs typeface="Aptos" pitchFamily="34" charset="-120"/>
+              </a:rPr>
+              <a:t>Concept checkpoints</a:t>
+            </a:r>
+            <a:endParaRPr lang="en-US" sz="1300" dirty="0"/>
+          </a:p>
+        </p:txBody>
+      </p:sp>
+      <p:sp>
+        <p:nvSpPr>
+          <p:cNvPr id="15" name="Text 13"/>
+          <p:cNvSpPr/>
+          <p:nvPr/>
+        </p:nvSpPr>
+        <p:spPr>
+          <a:xfrm>
+            <a:off x="7818120" y="3300984"/>
+            <a:ext cx="3090672" cy="877824"/>
+          </a:xfrm>
+          <a:prstGeom prst="rect">
+            <a:avLst/>
+          </a:prstGeom>
+          <a:noFill/>
+          <a:ln/>
+        </p:spPr>
+        <p:txBody>
+          <a:bodyPr wrap="square" lIns="254" tIns="254" rIns="254" bIns="254" rtlCol="0" anchor="t">
+            <a:normAutofit/>
+          </a:bodyPr>
+          <a:lstStyle/>
+          <a:p>
+            <a:r>
+              <a:rPr lang="en-US" sz="1380" dirty="0">
+                <a:solidFill>
+                  <a:srgbClr val="17364A"/>
+                </a:solidFill>
+                <a:latin typeface="Aptos" pitchFamily="34" charset="0"/>
+                <a:ea typeface="Aptos" pitchFamily="34" charset="-122"/>
+                <a:cs typeface="Aptos" pitchFamily="34" charset="-120"/>
+              </a:rPr>
+              <a:t>This national-level module is intended for training and planning purposes.</a:t>
+            </a:r>
+            <a:endParaRPr lang="en-US" sz="1380" dirty="0"/>
+          </a:p>
+          <a:p>
+            <a:r>
+              <a:rPr lang="en-US" sz="1380" dirty="0">
+                <a:solidFill>
+                  <a:srgbClr val="17364A"/>
+                </a:solidFill>
+                <a:latin typeface="Aptos" pitchFamily="34" charset="0"/>
+                <a:ea typeface="Aptos" pitchFamily="34" charset="-122"/>
+                <a:cs typeface="Aptos" pitchFamily="34" charset="-120"/>
+              </a:rPr>
+              <a:t>It does not replace legal, privacy, procurement, civil rights, records, or agency policy.</a:t>
+            </a:r>
+            <a:endParaRPr lang="en-US" sz="1380" dirty="0"/>
+          </a:p>
+          <a:p>
+            <a:r>
+              <a:rPr lang="en-US" sz="1380" dirty="0">
+                <a:solidFill>
+                  <a:srgbClr val="17364A"/>
+                </a:solidFill>
+                <a:latin typeface="Aptos" pitchFamily="34" charset="0"/>
+                <a:ea typeface="Aptos" pitchFamily="34" charset="-122"/>
+                <a:cs typeface="Aptos" pitchFamily="34" charset="-120"/>
+              </a:rPr>
+              <a:t>Learners should confirm applicable requirements in their own jurisdiction and organization.</a:t>
+            </a:r>
+            <a:endParaRPr lang="en-US" sz="1380" dirty="0"/>
+          </a:p>
+        </p:txBody>
       </p:sp>
       <p:sp>
         <p:nvSpPr>
           <p:cNvPr id="16" name="Shape 14"/>
-          <p:cNvSpPr/>
-          <p:nvPr/>
-        </p:nvSpPr>
-        <p:spPr>
-          <a:xfrm>
-            <a:off x="9089136" y="3456432"/>
-            <a:ext cx="566928" cy="566928"/>
-          </a:xfrm>
-          <a:prstGeom prst="ellipse">
-            <a:avLst/>
-          </a:prstGeom>
-          <a:solidFill>
-            <a:srgbClr val="6A4CA3"/>
-          </a:solidFill>
-          <a:ln w="12700">
-            <a:solidFill>
-              <a:srgbClr val="6A4CA3"/>
-            </a:solidFill>
-            <a:prstDash val="solid"/>
-          </a:ln>
-        </p:spPr>
-      </p:sp>
-      <p:sp>
-        <p:nvSpPr>
-          <p:cNvPr id="17" name="Shape 15"/>
-          <p:cNvSpPr/>
-          <p:nvPr/>
-        </p:nvSpPr>
-        <p:spPr>
-          <a:xfrm>
-            <a:off x="8385048" y="3419856"/>
-            <a:ext cx="1975104" cy="0"/>
-          </a:xfrm>
-          <a:prstGeom prst="line">
-            <a:avLst/>
-          </a:prstGeom>
-          <a:noFill/>
-          <a:ln w="25400">
-            <a:solidFill>
-              <a:srgbClr val="8ABBD8"/>
-            </a:solidFill>
-            <a:prstDash val="solid"/>
-          </a:ln>
-        </p:spPr>
-      </p:sp>
-      <p:sp>
-        <p:nvSpPr>
-          <p:cNvPr id="18" name="Shape 16"/>
-          <p:cNvSpPr/>
-          <p:nvPr/>
-        </p:nvSpPr>
-        <p:spPr>
-          <a:xfrm>
-            <a:off x="8202168" y="3630168"/>
-            <a:ext cx="1170432" cy="118872"/>
-          </a:xfrm>
-          <a:prstGeom prst="line">
-            <a:avLst/>
-          </a:prstGeom>
-          <a:noFill/>
-          <a:ln w="25400">
-            <a:solidFill>
-              <a:srgbClr val="8ABBD8"/>
-            </a:solidFill>
-            <a:prstDash val="solid"/>
-          </a:ln>
-        </p:spPr>
-      </p:sp>
-      <p:sp>
-        <p:nvSpPr>
-          <p:cNvPr id="19" name="Shape 17"/>
-          <p:cNvSpPr/>
-          <p:nvPr/>
-        </p:nvSpPr>
-        <p:spPr>
-          <a:xfrm>
-            <a:off x="10543032" y="3630168"/>
-            <a:ext cx="-1170432" cy="118872"/>
-          </a:xfrm>
-          <a:prstGeom prst="line">
-            <a:avLst/>
-          </a:prstGeom>
-          <a:noFill/>
-          <a:ln w="25400">
-            <a:solidFill>
-              <a:srgbClr val="8ABBD8"/>
-            </a:solidFill>
-            <a:prstDash val="solid"/>
-          </a:ln>
-        </p:spPr>
-      </p:sp>
-      <p:sp>
-        <p:nvSpPr>
-          <p:cNvPr id="20" name="Text 18"/>
-          <p:cNvSpPr/>
-          <p:nvPr/>
-        </p:nvSpPr>
-        <p:spPr>
-          <a:xfrm>
-            <a:off x="7863840" y="4069080"/>
-            <a:ext cx="3017520" cy="164592"/>
-          </a:xfrm>
-          <a:prstGeom prst="rect">
-            <a:avLst/>
-          </a:prstGeom>
-          <a:noFill/>
-          <a:ln/>
-        </p:spPr>
-        <p:txBody>
-          <a:bodyPr wrap="square" lIns="0" tIns="0" rIns="0" bIns="0" rtlCol="0" anchor="ctr"/>
-          <a:lstStyle/>
-          <a:p>
-            <a:pPr algn="ctr" indent="0" marL="0">
-              <a:buNone/>
-            </a:pPr>
-            <a:r>
-              <a:rPr lang="en-US" sz="900" b="1" dirty="0">
-                <a:solidFill>
-                  <a:srgbClr val="003A63"/>
-                </a:solidFill>
-                <a:latin typeface="Aptos" pitchFamily="34" charset="0"/>
-                <a:ea typeface="Aptos" pitchFamily="34" charset="-122"/>
-                <a:cs typeface="Aptos" pitchFamily="34" charset="-120"/>
-              </a:rPr>
-              <a:t>Decision rights</a:t>
-            </a:r>
-            <a:endParaRPr lang="en-US" sz="900" dirty="0"/>
-          </a:p>
-        </p:txBody>
-      </p:sp>
-      <p:sp>
-        <p:nvSpPr>
-          <p:cNvPr id="21" name="Shape 19"/>
           <p:cNvSpPr/>
           <p:nvPr/>
         </p:nvSpPr>
@@ -17206,7 +16490,7 @@
       </p:sp>
       <p:sp>
         <p:nvSpPr>
-          <p:cNvPr id="22" name="Text 20"/>
+          <p:cNvPr id="17" name="Text 15"/>
           <p:cNvSpPr/>
           <p:nvPr/>
         </p:nvSpPr>
@@ -17245,7 +16529,7 @@
       </p:sp>
       <p:sp>
         <p:nvSpPr>
-          <p:cNvPr id="23" name="Text 21"/>
+          <p:cNvPr id="18" name="Text 16"/>
           <p:cNvSpPr/>
           <p:nvPr/>
         </p:nvSpPr>
@@ -17753,13 +17037,11 @@
             </a:avLst>
           </a:prstGeom>
           <a:solidFill>
-            <a:srgbClr val="FFFFFF">
-              <a:alpha val="88000"/>
-            </a:srgbClr>
+            <a:srgbClr val="FFFFFF"/>
           </a:solidFill>
           <a:ln w="12700">
             <a:solidFill>
-              <a:srgbClr val="D6E8F2"/>
+              <a:srgbClr val="B9D7E6"/>
             </a:solidFill>
             <a:prstDash val="solid"/>
           </a:ln>
@@ -17767,119 +17049,112 @@
       </p:sp>
       <p:sp>
         <p:nvSpPr>
-          <p:cNvPr id="14" name="Shape 12"/>
-          <p:cNvSpPr/>
-          <p:nvPr/>
-        </p:nvSpPr>
-        <p:spPr>
-          <a:xfrm>
-            <a:off x="8074152" y="3291840"/>
-            <a:ext cx="2596896" cy="749808"/>
-          </a:xfrm>
-          <a:prstGeom prst="rect">
-            <a:avLst/>
-          </a:prstGeom>
-          <a:solidFill>
-            <a:srgbClr val="EAF6F8"/>
-          </a:solidFill>
-          <a:ln w="12700">
-            <a:solidFill>
-              <a:srgbClr val="8ABBD8"/>
-            </a:solidFill>
-            <a:prstDash val="solid"/>
-          </a:ln>
-        </p:spPr>
-      </p:sp>
-      <p:sp>
-        <p:nvSpPr>
-          <p:cNvPr id="15" name="Shape 13"/>
-          <p:cNvSpPr/>
-          <p:nvPr/>
-        </p:nvSpPr>
-        <p:spPr>
-          <a:xfrm>
-            <a:off x="8202168" y="3721608"/>
-            <a:ext cx="2340864" cy="0"/>
-          </a:xfrm>
-          <a:prstGeom prst="line">
-            <a:avLst/>
-          </a:prstGeom>
-          <a:noFill/>
-          <a:ln w="19050">
-            <a:solidFill>
-              <a:srgbClr val="0068B7"/>
-            </a:solidFill>
-            <a:prstDash val="solid"/>
-          </a:ln>
-        </p:spPr>
+          <p:cNvPr id="14" name="Text 12"/>
+          <p:cNvSpPr/>
+          <p:nvPr/>
+        </p:nvSpPr>
+        <p:spPr>
+          <a:xfrm>
+            <a:off x="7799832" y="2935224"/>
+            <a:ext cx="3145536" cy="256032"/>
+          </a:xfrm>
+          <a:prstGeom prst="rect">
+            <a:avLst/>
+          </a:prstGeom>
+          <a:noFill/>
+          <a:ln/>
+        </p:spPr>
+        <p:txBody>
+          <a:bodyPr wrap="square" lIns="0" tIns="0" rIns="0" bIns="0" rtlCol="0" anchor="ctr"/>
+          <a:lstStyle/>
+          <a:p>
+            <a:pPr indent="0" marL="0">
+              <a:buNone/>
+            </a:pPr>
+            <a:r>
+              <a:rPr lang="en-US" sz="1300" b="1" dirty="0">
+                <a:solidFill>
+                  <a:srgbClr val="0068B7"/>
+                </a:solidFill>
+                <a:latin typeface="Aptos" pitchFamily="34" charset="0"/>
+                <a:ea typeface="Aptos" pitchFamily="34" charset="-122"/>
+                <a:cs typeface="Aptos" pitchFamily="34" charset="-120"/>
+              </a:rPr>
+              <a:t>Concept checkpoints</a:t>
+            </a:r>
+            <a:endParaRPr lang="en-US" sz="1300" dirty="0"/>
+          </a:p>
+        </p:txBody>
+      </p:sp>
+      <p:sp>
+        <p:nvSpPr>
+          <p:cNvPr id="15" name="Text 13"/>
+          <p:cNvSpPr/>
+          <p:nvPr/>
+        </p:nvSpPr>
+        <p:spPr>
+          <a:xfrm>
+            <a:off x="7818120" y="3300984"/>
+            <a:ext cx="3090672" cy="877824"/>
+          </a:xfrm>
+          <a:prstGeom prst="rect">
+            <a:avLst/>
+          </a:prstGeom>
+          <a:noFill/>
+          <a:ln/>
+        </p:spPr>
+        <p:txBody>
+          <a:bodyPr wrap="square" lIns="254" tIns="254" rIns="254" bIns="254" rtlCol="0" anchor="t">
+            <a:normAutofit/>
+          </a:bodyPr>
+          <a:lstStyle/>
+          <a:p>
+            <a:r>
+              <a:rPr lang="en-US" sz="1380" dirty="0">
+                <a:solidFill>
+                  <a:srgbClr val="17364A"/>
+                </a:solidFill>
+                <a:latin typeface="Aptos" pitchFamily="34" charset="0"/>
+                <a:ea typeface="Aptos" pitchFamily="34" charset="-122"/>
+                <a:cs typeface="Aptos" pitchFamily="34" charset="-120"/>
+              </a:rPr>
+              <a:t>Without consistent standards, data exchange becomes a patchwork of custom interfaces,.</a:t>
+            </a:r>
+            <a:endParaRPr lang="en-US" sz="1380" dirty="0"/>
+          </a:p>
+          <a:p>
+            <a:r>
+              <a:rPr lang="en-US" sz="1380" dirty="0">
+                <a:solidFill>
+                  <a:srgbClr val="17364A"/>
+                </a:solidFill>
+                <a:latin typeface="Aptos" pitchFamily="34" charset="0"/>
+                <a:ea typeface="Aptos" pitchFamily="34" charset="-122"/>
+                <a:cs typeface="Aptos" pitchFamily="34" charset="-120"/>
+              </a:rPr>
+              <a:t>AI tools built on top of that environment may appear sophisticated while depending on.</a:t>
+            </a:r>
+            <a:endParaRPr lang="en-US" sz="1380" dirty="0"/>
+          </a:p>
+          <a:p>
+            <a:r>
+              <a:rPr lang="en-US" sz="1380" dirty="0">
+                <a:solidFill>
+                  <a:srgbClr val="17364A"/>
+                </a:solidFill>
+                <a:latin typeface="Aptos" pitchFamily="34" charset="0"/>
+                <a:ea typeface="Aptos" pitchFamily="34" charset="-122"/>
+                <a:cs typeface="Aptos" pitchFamily="34" charset="-120"/>
+              </a:rPr>
+              <a:t>Standards also affect equity and efficiency.</a:t>
+            </a:r>
+            <a:endParaRPr lang="en-US" sz="1380" dirty="0"/>
+          </a:p>
+        </p:txBody>
       </p:sp>
       <p:sp>
         <p:nvSpPr>
           <p:cNvPr id="16" name="Shape 14"/>
-          <p:cNvSpPr/>
-          <p:nvPr/>
-        </p:nvSpPr>
-        <p:spPr>
-          <a:xfrm>
-            <a:off x="9198864" y="4206240"/>
-            <a:ext cx="347472" cy="347472"/>
-          </a:xfrm>
-          <a:prstGeom prst="ellipse">
-            <a:avLst/>
-          </a:prstGeom>
-          <a:solidFill>
-            <a:srgbClr val="2F8A28"/>
-          </a:solidFill>
-          <a:ln w="12700">
-            <a:solidFill>
-              <a:srgbClr val="2F8A28"/>
-            </a:solidFill>
-            <a:prstDash val="solid"/>
-          </a:ln>
-        </p:spPr>
-      </p:sp>
-      <p:sp>
-        <p:nvSpPr>
-          <p:cNvPr id="17" name="Text 15"/>
-          <p:cNvSpPr/>
-          <p:nvPr/>
-        </p:nvSpPr>
-        <p:spPr>
-          <a:xfrm>
-            <a:off x="7909560" y="3977640"/>
-            <a:ext cx="2926080" cy="182880"/>
-          </a:xfrm>
-          <a:prstGeom prst="rect">
-            <a:avLst/>
-          </a:prstGeom>
-          <a:noFill/>
-          <a:ln/>
-        </p:spPr>
-        <p:txBody>
-          <a:bodyPr wrap="square" lIns="0" tIns="0" rIns="0" bIns="0" rtlCol="0" anchor="ctr"/>
-          <a:lstStyle/>
-          <a:p>
-            <a:pPr algn="ctr" indent="0" marL="0">
-              <a:buNone/>
-            </a:pPr>
-            <a:r>
-              <a:rPr lang="en-US" sz="1000" dirty="0">
-                <a:solidFill>
-                  <a:srgbClr val="003A63"/>
-                </a:solidFill>
-                <a:latin typeface="Aptos" pitchFamily="34" charset="0"/>
-                <a:ea typeface="Aptos" pitchFamily="34" charset="-122"/>
-                <a:cs typeface="Aptos" pitchFamily="34" charset="-120"/>
-              </a:rPr>
-              <a:t>Concept to action</a:t>
-            </a:r>
-            <a:endParaRPr lang="en-US" sz="1000" dirty="0"/>
-          </a:p>
-        </p:txBody>
-      </p:sp>
-      <p:sp>
-        <p:nvSpPr>
-          <p:cNvPr id="18" name="Shape 16"/>
           <p:cNvSpPr/>
           <p:nvPr/>
         </p:nvSpPr>
@@ -17906,7 +17181,7 @@
       </p:sp>
       <p:sp>
         <p:nvSpPr>
-          <p:cNvPr id="19" name="Text 17"/>
+          <p:cNvPr id="17" name="Text 15"/>
           <p:cNvSpPr/>
           <p:nvPr/>
         </p:nvSpPr>
@@ -17945,7 +17220,7 @@
       </p:sp>
       <p:sp>
         <p:nvSpPr>
-          <p:cNvPr id="20" name="Text 18"/>
+          <p:cNvPr id="18" name="Text 16"/>
           <p:cNvSpPr/>
           <p:nvPr/>
         </p:nvSpPr>
@@ -18453,13 +17728,11 @@
             </a:avLst>
           </a:prstGeom>
           <a:solidFill>
-            <a:srgbClr val="FFFFFF">
-              <a:alpha val="88000"/>
-            </a:srgbClr>
+            <a:srgbClr val="FFFFFF"/>
           </a:solidFill>
           <a:ln w="12700">
             <a:solidFill>
-              <a:srgbClr val="D6E8F2"/>
+              <a:srgbClr val="B9D7E6"/>
             </a:solidFill>
             <a:prstDash val="solid"/>
           </a:ln>
@@ -18467,119 +17740,112 @@
       </p:sp>
       <p:sp>
         <p:nvSpPr>
-          <p:cNvPr id="14" name="Shape 12"/>
-          <p:cNvSpPr/>
-          <p:nvPr/>
-        </p:nvSpPr>
-        <p:spPr>
-          <a:xfrm>
-            <a:off x="8074152" y="3291840"/>
-            <a:ext cx="2596896" cy="749808"/>
-          </a:xfrm>
-          <a:prstGeom prst="rect">
-            <a:avLst/>
-          </a:prstGeom>
-          <a:solidFill>
-            <a:srgbClr val="EAF6F8"/>
-          </a:solidFill>
-          <a:ln w="12700">
-            <a:solidFill>
-              <a:srgbClr val="8ABBD8"/>
-            </a:solidFill>
-            <a:prstDash val="solid"/>
-          </a:ln>
-        </p:spPr>
-      </p:sp>
-      <p:sp>
-        <p:nvSpPr>
-          <p:cNvPr id="15" name="Shape 13"/>
-          <p:cNvSpPr/>
-          <p:nvPr/>
-        </p:nvSpPr>
-        <p:spPr>
-          <a:xfrm>
-            <a:off x="8202168" y="3721608"/>
-            <a:ext cx="2340864" cy="0"/>
-          </a:xfrm>
-          <a:prstGeom prst="line">
-            <a:avLst/>
-          </a:prstGeom>
-          <a:noFill/>
-          <a:ln w="19050">
-            <a:solidFill>
-              <a:srgbClr val="0068B7"/>
-            </a:solidFill>
-            <a:prstDash val="solid"/>
-          </a:ln>
-        </p:spPr>
+          <p:cNvPr id="14" name="Text 12"/>
+          <p:cNvSpPr/>
+          <p:nvPr/>
+        </p:nvSpPr>
+        <p:spPr>
+          <a:xfrm>
+            <a:off x="7799832" y="2935224"/>
+            <a:ext cx="3145536" cy="256032"/>
+          </a:xfrm>
+          <a:prstGeom prst="rect">
+            <a:avLst/>
+          </a:prstGeom>
+          <a:noFill/>
+          <a:ln/>
+        </p:spPr>
+        <p:txBody>
+          <a:bodyPr wrap="square" lIns="0" tIns="0" rIns="0" bIns="0" rtlCol="0" anchor="ctr"/>
+          <a:lstStyle/>
+          <a:p>
+            <a:pPr indent="0" marL="0">
+              <a:buNone/>
+            </a:pPr>
+            <a:r>
+              <a:rPr lang="en-US" sz="1300" b="1" dirty="0">
+                <a:solidFill>
+                  <a:srgbClr val="0068B7"/>
+                </a:solidFill>
+                <a:latin typeface="Aptos" pitchFamily="34" charset="0"/>
+                <a:ea typeface="Aptos" pitchFamily="34" charset="-122"/>
+                <a:cs typeface="Aptos" pitchFamily="34" charset="-120"/>
+              </a:rPr>
+              <a:t>Concept checkpoints</a:t>
+            </a:r>
+            <a:endParaRPr lang="en-US" sz="1300" dirty="0"/>
+          </a:p>
+        </p:txBody>
+      </p:sp>
+      <p:sp>
+        <p:nvSpPr>
+          <p:cNvPr id="15" name="Text 13"/>
+          <p:cNvSpPr/>
+          <p:nvPr/>
+        </p:nvSpPr>
+        <p:spPr>
+          <a:xfrm>
+            <a:off x="7818120" y="3300984"/>
+            <a:ext cx="3090672" cy="877824"/>
+          </a:xfrm>
+          <a:prstGeom prst="rect">
+            <a:avLst/>
+          </a:prstGeom>
+          <a:noFill/>
+          <a:ln/>
+        </p:spPr>
+        <p:txBody>
+          <a:bodyPr wrap="square" lIns="254" tIns="254" rIns="254" bIns="254" rtlCol="0" anchor="t">
+            <a:normAutofit/>
+          </a:bodyPr>
+          <a:lstStyle/>
+          <a:p>
+            <a:r>
+              <a:rPr lang="en-US" sz="1380" dirty="0">
+                <a:solidFill>
+                  <a:srgbClr val="17364A"/>
+                </a:solidFill>
+                <a:latin typeface="Aptos" pitchFamily="34" charset="0"/>
+                <a:ea typeface="Aptos" pitchFamily="34" charset="-122"/>
+                <a:cs typeface="Aptos" pitchFamily="34" charset="-120"/>
+              </a:rPr>
+              <a:t>It is common in laboratory reporting, immunization messaging, admission-discharge-transfer.</a:t>
+            </a:r>
+            <a:endParaRPr lang="en-US" sz="1380" dirty="0"/>
+          </a:p>
+          <a:p>
+            <a:r>
+              <a:rPr lang="en-US" sz="1380" dirty="0">
+                <a:solidFill>
+                  <a:srgbClr val="17364A"/>
+                </a:solidFill>
+                <a:latin typeface="Aptos" pitchFamily="34" charset="0"/>
+                <a:ea typeface="Aptos" pitchFamily="34" charset="-122"/>
+                <a:cs typeface="Aptos" pitchFamily="34" charset="-120"/>
+              </a:rPr>
+              <a:t>HL7 v2 is mature and widely deployed, but messages can vary by implementation, making.</a:t>
+            </a:r>
+            <a:endParaRPr lang="en-US" sz="1380" dirty="0"/>
+          </a:p>
+          <a:p>
+            <a:r>
+              <a:rPr lang="en-US" sz="1380" dirty="0">
+                <a:solidFill>
+                  <a:srgbClr val="17364A"/>
+                </a:solidFill>
+                <a:latin typeface="Aptos" pitchFamily="34" charset="0"/>
+                <a:ea typeface="Aptos" pitchFamily="34" charset="-122"/>
+                <a:cs typeface="Aptos" pitchFamily="34" charset="-120"/>
+              </a:rPr>
+              <a:t>CDA.</a:t>
+            </a:r>
+            <a:endParaRPr lang="en-US" sz="1380" dirty="0"/>
+          </a:p>
+        </p:txBody>
       </p:sp>
       <p:sp>
         <p:nvSpPr>
           <p:cNvPr id="16" name="Shape 14"/>
-          <p:cNvSpPr/>
-          <p:nvPr/>
-        </p:nvSpPr>
-        <p:spPr>
-          <a:xfrm>
-            <a:off x="9198864" y="4206240"/>
-            <a:ext cx="347472" cy="347472"/>
-          </a:xfrm>
-          <a:prstGeom prst="ellipse">
-            <a:avLst/>
-          </a:prstGeom>
-          <a:solidFill>
-            <a:srgbClr val="2F8A28"/>
-          </a:solidFill>
-          <a:ln w="12700">
-            <a:solidFill>
-              <a:srgbClr val="2F8A28"/>
-            </a:solidFill>
-            <a:prstDash val="solid"/>
-          </a:ln>
-        </p:spPr>
-      </p:sp>
-      <p:sp>
-        <p:nvSpPr>
-          <p:cNvPr id="17" name="Text 15"/>
-          <p:cNvSpPr/>
-          <p:nvPr/>
-        </p:nvSpPr>
-        <p:spPr>
-          <a:xfrm>
-            <a:off x="7909560" y="3977640"/>
-            <a:ext cx="2926080" cy="182880"/>
-          </a:xfrm>
-          <a:prstGeom prst="rect">
-            <a:avLst/>
-          </a:prstGeom>
-          <a:noFill/>
-          <a:ln/>
-        </p:spPr>
-        <p:txBody>
-          <a:bodyPr wrap="square" lIns="0" tIns="0" rIns="0" bIns="0" rtlCol="0" anchor="ctr"/>
-          <a:lstStyle/>
-          <a:p>
-            <a:pPr algn="ctr" indent="0" marL="0">
-              <a:buNone/>
-            </a:pPr>
-            <a:r>
-              <a:rPr lang="en-US" sz="1000" dirty="0">
-                <a:solidFill>
-                  <a:srgbClr val="003A63"/>
-                </a:solidFill>
-                <a:latin typeface="Aptos" pitchFamily="34" charset="0"/>
-                <a:ea typeface="Aptos" pitchFamily="34" charset="-122"/>
-                <a:cs typeface="Aptos" pitchFamily="34" charset="-120"/>
-              </a:rPr>
-              <a:t>Concept to action</a:t>
-            </a:r>
-            <a:endParaRPr lang="en-US" sz="1000" dirty="0"/>
-          </a:p>
-        </p:txBody>
-      </p:sp>
-      <p:sp>
-        <p:nvSpPr>
-          <p:cNvPr id="18" name="Shape 16"/>
           <p:cNvSpPr/>
           <p:nvPr/>
         </p:nvSpPr>
@@ -18606,7 +17872,7 @@
       </p:sp>
       <p:sp>
         <p:nvSpPr>
-          <p:cNvPr id="19" name="Text 17"/>
+          <p:cNvPr id="17" name="Text 15"/>
           <p:cNvSpPr/>
           <p:nvPr/>
         </p:nvSpPr>
@@ -18645,7 +17911,7 @@
       </p:sp>
       <p:sp>
         <p:nvSpPr>
-          <p:cNvPr id="20" name="Text 18"/>
+          <p:cNvPr id="18" name="Text 16"/>
           <p:cNvSpPr/>
           <p:nvPr/>
         </p:nvSpPr>

--- a/downloads/presentations/modules/arc-220.pptx
+++ b/downloads/presentations/modules/arc-220.pptx
@@ -3444,49 +3444,58 @@
           <a:ln/>
         </p:spPr>
         <p:txBody>
-          <a:bodyPr wrap="square" lIns="635" tIns="635" rIns="635" bIns="635" rtlCol="0" anchor="t">
+          <a:bodyPr wrap="square" lIns="1016" tIns="1016" rIns="1016" bIns="1016" rtlCol="0" anchor="t">
             <a:normAutofit/>
           </a:bodyPr>
           <a:lstStyle/>
           <a:p>
+            <a:pPr indent="0" marL="0">
+              <a:buNone/>
+            </a:pPr>
             <a:r>
               <a:rPr lang="en-US" sz="2100" dirty="0">
                 <a:solidFill>
-                  <a:srgbClr val="17364A"/>
-                </a:solidFill>
-                <a:latin typeface="Aptos" pitchFamily="34" charset="0"/>
-                <a:ea typeface="Aptos" pitchFamily="34" charset="-122"/>
-                <a:cs typeface="Aptos" pitchFamily="34" charset="-120"/>
-              </a:rPr>
-              <a:t>API.</a:t>
+                  <a:srgbClr val="003A63"/>
+                </a:solidFill>
+                <a:latin typeface="Aptos" pitchFamily="34" charset="0"/>
+                <a:ea typeface="Aptos" pitchFamily="34" charset="-122"/>
+                <a:cs typeface="Aptos" pitchFamily="34" charset="-120"/>
+              </a:rPr>
+              <a:t>• API.</a:t>
             </a:r>
             <a:endParaRPr lang="en-US" sz="2100" dirty="0"/>
           </a:p>
           <a:p>
+            <a:pPr indent="0" marL="0">
+              <a:buNone/>
+            </a:pPr>
             <a:r>
               <a:rPr lang="en-US" sz="2100" dirty="0">
                 <a:solidFill>
-                  <a:srgbClr val="17364A"/>
-                </a:solidFill>
-                <a:latin typeface="Aptos" pitchFamily="34" charset="0"/>
-                <a:ea typeface="Aptos" pitchFamily="34" charset="-122"/>
-                <a:cs typeface="Aptos" pitchFamily="34" charset="-120"/>
-              </a:rPr>
-              <a:t>An API allows one system to request data or services from another system.</a:t>
+                  <a:srgbClr val="003A63"/>
+                </a:solidFill>
+                <a:latin typeface="Aptos" pitchFamily="34" charset="0"/>
+                <a:ea typeface="Aptos" pitchFamily="34" charset="-122"/>
+                <a:cs typeface="Aptos" pitchFamily="34" charset="-120"/>
+              </a:rPr>
+              <a:t>• An API allows one system to request data or services from another system.</a:t>
             </a:r>
             <a:endParaRPr lang="en-US" sz="2100" dirty="0"/>
           </a:p>
           <a:p>
+            <a:pPr indent="0" marL="0">
+              <a:buNone/>
+            </a:pPr>
             <a:r>
               <a:rPr lang="en-US" sz="2100" dirty="0">
                 <a:solidFill>
-                  <a:srgbClr val="17364A"/>
-                </a:solidFill>
-                <a:latin typeface="Aptos" pitchFamily="34" charset="0"/>
-                <a:ea typeface="Aptos" pitchFamily="34" charset="-122"/>
-                <a:cs typeface="Aptos" pitchFamily="34" charset="-120"/>
-              </a:rPr>
-              <a:t>In AI workflows, APIs may support retrieval, task creation, status updates, or integration with systems.</a:t>
+                  <a:srgbClr val="003A63"/>
+                </a:solidFill>
+                <a:latin typeface="Aptos" pitchFamily="34" charset="0"/>
+                <a:ea typeface="Aptos" pitchFamily="34" charset="-122"/>
+                <a:cs typeface="Aptos" pitchFamily="34" charset="-120"/>
+              </a:rPr>
+              <a:t>• In AI workflows, APIs may support retrieval, task creation, status updates, or integration.</a:t>
             </a:r>
             <a:endParaRPr lang="en-US" sz="2100" dirty="0"/>
           </a:p>
@@ -3566,17 +3575,17 @@
         </p:nvSpPr>
         <p:spPr>
           <a:xfrm>
-            <a:off x="7799832" y="1828800"/>
-            <a:ext cx="3145536" cy="685800"/>
-          </a:xfrm>
-          <a:prstGeom prst="rect">
-            <a:avLst/>
-          </a:prstGeom>
-          <a:noFill/>
-          <a:ln/>
-        </p:spPr>
-        <p:txBody>
-          <a:bodyPr wrap="square" lIns="0" tIns="0" rIns="0" bIns="0" rtlCol="0" anchor="t">
+            <a:off x="7799832" y="1801368"/>
+            <a:ext cx="3145536" cy="758952"/>
+          </a:xfrm>
+          <a:prstGeom prst="rect">
+            <a:avLst/>
+          </a:prstGeom>
+          <a:noFill/>
+          <a:ln/>
+        </p:spPr>
+        <p:txBody>
+          <a:bodyPr wrap="square" lIns="254" tIns="254" rIns="254" bIns="254" rtlCol="0" anchor="t">
             <a:normAutofit/>
           </a:bodyPr>
           <a:lstStyle/>
@@ -3585,7 +3594,7 @@
               <a:buNone/>
             </a:pPr>
             <a:r>
-              <a:rPr lang="en-US" sz="1550" dirty="0">
+              <a:rPr lang="en-US" sz="1320" dirty="0">
                 <a:solidFill>
                   <a:srgbClr val="17364A"/>
                 </a:solidFill>
@@ -3595,7 +3604,7 @@
               </a:rPr>
               <a:t>API.</a:t>
             </a:r>
-            <a:endParaRPr lang="en-US" sz="1550" dirty="0"/>
+            <a:endParaRPr lang="en-US" sz="1320" dirty="0"/>
           </a:p>
         </p:txBody>
       </p:sp>
@@ -3683,13 +3692,16 @@
           <a:ln/>
         </p:spPr>
         <p:txBody>
-          <a:bodyPr wrap="square" lIns="254" tIns="254" rIns="254" bIns="254" rtlCol="0" anchor="t">
+          <a:bodyPr wrap="square" lIns="508" tIns="508" rIns="508" bIns="508" rtlCol="0" anchor="t">
             <a:normAutofit/>
           </a:bodyPr>
           <a:lstStyle/>
           <a:p>
-            <a:r>
-              <a:rPr lang="en-US" sz="1380" dirty="0">
+            <a:pPr indent="0" marL="0">
+              <a:buNone/>
+            </a:pPr>
+            <a:r>
+              <a:rPr lang="en-US" sz="1220" dirty="0">
                 <a:solidFill>
                   <a:srgbClr val="17364A"/>
                 </a:solidFill>
@@ -3697,13 +3709,16 @@
                 <a:ea typeface="Aptos" pitchFamily="34" charset="-122"/>
                 <a:cs typeface="Aptos" pitchFamily="34" charset="-120"/>
               </a:rPr>
-              <a:t>In AI workflows, APIs may support retrieval, task creation, status updates, or integration.</a:t>
-            </a:r>
-            <a:endParaRPr lang="en-US" sz="1380" dirty="0"/>
-          </a:p>
-          <a:p>
-            <a:r>
-              <a:rPr lang="en-US" sz="1380" dirty="0">
+              <a:t>In AI workflows, APIs may support retrieval, task creation, status.</a:t>
+            </a:r>
+            <a:endParaRPr lang="en-US" sz="1220" dirty="0"/>
+          </a:p>
+          <a:p>
+            <a:pPr indent="0" marL="0">
+              <a:buNone/>
+            </a:pPr>
+            <a:r>
+              <a:rPr lang="en-US" sz="1220" dirty="0">
                 <a:solidFill>
                   <a:srgbClr val="17364A"/>
                 </a:solidFill>
@@ -3711,13 +3726,16 @@
                 <a:ea typeface="Aptos" pitchFamily="34" charset="-122"/>
                 <a:cs typeface="Aptos" pitchFamily="34" charset="-120"/>
               </a:rPr>
-              <a:t>API access must be governed by permissions, authentication, rate limits, logging, and.</a:t>
-            </a:r>
-            <a:endParaRPr lang="en-US" sz="1380" dirty="0"/>
-          </a:p>
-          <a:p>
-            <a:r>
-              <a:rPr lang="en-US" sz="1380" dirty="0">
+              <a:t>API access must be governed by permissions, authentication, rate.</a:t>
+            </a:r>
+            <a:endParaRPr lang="en-US" sz="1220" dirty="0"/>
+          </a:p>
+          <a:p>
+            <a:pPr indent="0" marL="0">
+              <a:buNone/>
+            </a:pPr>
+            <a:r>
+              <a:rPr lang="en-US" sz="1220" dirty="0">
                 <a:solidFill>
                   <a:srgbClr val="17364A"/>
                 </a:solidFill>
@@ -3727,7 +3745,7 @@
               </a:rPr>
               <a:t>Implementation guide.</a:t>
             </a:r>
-            <a:endParaRPr lang="en-US" sz="1380" dirty="0"/>
+            <a:endParaRPr lang="en-US" sz="1220" dirty="0"/>
           </a:p>
         </p:txBody>
       </p:sp>
@@ -3805,17 +3823,17 @@
         </p:nvSpPr>
         <p:spPr>
           <a:xfrm>
-            <a:off x="7799832" y="5001768"/>
-            <a:ext cx="3145536" cy="502920"/>
-          </a:xfrm>
-          <a:prstGeom prst="rect">
-            <a:avLst/>
-          </a:prstGeom>
-          <a:noFill/>
-          <a:ln/>
-        </p:spPr>
-        <p:txBody>
-          <a:bodyPr wrap="square" lIns="0" tIns="0" rIns="0" bIns="0" rtlCol="0" anchor="t">
+            <a:off x="7799832" y="4974336"/>
+            <a:ext cx="3145536" cy="576072"/>
+          </a:xfrm>
+          <a:prstGeom prst="rect">
+            <a:avLst/>
+          </a:prstGeom>
+          <a:noFill/>
+          <a:ln/>
+        </p:spPr>
+        <p:txBody>
+          <a:bodyPr wrap="square" lIns="254" tIns="254" rIns="254" bIns="254" rtlCol="0" anchor="t">
             <a:normAutofit/>
           </a:bodyPr>
           <a:lstStyle/>
@@ -3824,7 +3842,7 @@
               <a:buNone/>
             </a:pPr>
             <a:r>
-              <a:rPr lang="en-US" sz="1550" dirty="0">
+              <a:rPr lang="en-US" sz="1320" dirty="0">
                 <a:solidFill>
                   <a:srgbClr val="17364A"/>
                 </a:solidFill>
@@ -3832,9 +3850,9 @@
                 <a:ea typeface="Aptos" pitchFamily="34" charset="-122"/>
                 <a:cs typeface="Aptos" pitchFamily="34" charset="-120"/>
               </a:rPr>
-              <a:t>Connect the concept to public health purpose, responsible use, required safeguards, documentation, and the next action a department should take.</a:t>
-            </a:r>
-            <a:endParaRPr lang="en-US" sz="1550" dirty="0"/>
+              <a:t>Connect the concept to public health purpose, responsible use, required safeguards, documentation, and the next action a.</a:t>
+            </a:r>
+            <a:endParaRPr lang="en-US" sz="1320" dirty="0"/>
           </a:p>
         </p:txBody>
       </p:sp>
@@ -4135,49 +4153,58 @@
           <a:ln/>
         </p:spPr>
         <p:txBody>
-          <a:bodyPr wrap="square" lIns="635" tIns="635" rIns="635" bIns="635" rtlCol="0" anchor="t">
+          <a:bodyPr wrap="square" lIns="1016" tIns="1016" rIns="1016" bIns="1016" rtlCol="0" anchor="t">
             <a:normAutofit/>
           </a:bodyPr>
           <a:lstStyle/>
           <a:p>
+            <a:pPr indent="0" marL="0">
+              <a:buNone/>
+            </a:pPr>
             <a:r>
               <a:rPr lang="en-US" sz="2100" dirty="0">
                 <a:solidFill>
-                  <a:srgbClr val="17364A"/>
-                </a:solidFill>
-                <a:latin typeface="Aptos" pitchFamily="34" charset="0"/>
-                <a:ea typeface="Aptos" pitchFamily="34" charset="-122"/>
-                <a:cs typeface="Aptos" pitchFamily="34" charset="-120"/>
-              </a:rPr>
-              <a:t>An immunization information system may receive HL7 v2 VXU messages from providers and pharmacies.</a:t>
+                  <a:srgbClr val="003A63"/>
+                </a:solidFill>
+                <a:latin typeface="Aptos" pitchFamily="34" charset="0"/>
+                <a:ea typeface="Aptos" pitchFamily="34" charset="-122"/>
+                <a:cs typeface="Aptos" pitchFamily="34" charset="-120"/>
+              </a:rPr>
+              <a:t>• An immunization information system may receive HL7 v2 VXU messages from providers and.</a:t>
             </a:r>
             <a:endParaRPr lang="en-US" sz="2100" dirty="0"/>
           </a:p>
           <a:p>
+            <a:pPr indent="0" marL="0">
+              <a:buNone/>
+            </a:pPr>
             <a:r>
               <a:rPr lang="en-US" sz="2100" dirty="0">
                 <a:solidFill>
-                  <a:srgbClr val="17364A"/>
-                </a:solidFill>
-                <a:latin typeface="Aptos" pitchFamily="34" charset="0"/>
-                <a:ea typeface="Aptos" pitchFamily="34" charset="-122"/>
-                <a:cs typeface="Aptos" pitchFamily="34" charset="-120"/>
-              </a:rPr>
-              <a:t>If an AI tool is used to identify vaccination gaps or generate reminder lists, it depends on correctly.</a:t>
+                  <a:srgbClr val="003A63"/>
+                </a:solidFill>
+                <a:latin typeface="Aptos" pitchFamily="34" charset="0"/>
+                <a:ea typeface="Aptos" pitchFamily="34" charset="-122"/>
+                <a:cs typeface="Aptos" pitchFamily="34" charset="-120"/>
+              </a:rPr>
+              <a:t>• If an AI tool is used to identify vaccination gaps or generate reminder lists, it depends on.</a:t>
             </a:r>
             <a:endParaRPr lang="en-US" sz="2100" dirty="0"/>
           </a:p>
           <a:p>
+            <a:pPr indent="0" marL="0">
+              <a:buNone/>
+            </a:pPr>
             <a:r>
               <a:rPr lang="en-US" sz="2100" dirty="0">
                 <a:solidFill>
-                  <a:srgbClr val="17364A"/>
-                </a:solidFill>
-                <a:latin typeface="Aptos" pitchFamily="34" charset="0"/>
-                <a:ea typeface="Aptos" pitchFamily="34" charset="-122"/>
-                <a:cs typeface="Aptos" pitchFamily="34" charset="-120"/>
-              </a:rPr>
-              <a:t>Interoperability failures can look like epidemiologic gaps even when the problem is actually message.</a:t>
+                  <a:srgbClr val="003A63"/>
+                </a:solidFill>
+                <a:latin typeface="Aptos" pitchFamily="34" charset="0"/>
+                <a:ea typeface="Aptos" pitchFamily="34" charset="-122"/>
+                <a:cs typeface="Aptos" pitchFamily="34" charset="-120"/>
+              </a:rPr>
+              <a:t>• Interoperability failures can look like epidemiologic gaps even when the problem is actually.</a:t>
             </a:r>
             <a:endParaRPr lang="en-US" sz="2100" dirty="0"/>
           </a:p>
@@ -4257,17 +4284,17 @@
         </p:nvSpPr>
         <p:spPr>
           <a:xfrm>
-            <a:off x="7799832" y="1828800"/>
-            <a:ext cx="3145536" cy="685800"/>
-          </a:xfrm>
-          <a:prstGeom prst="rect">
-            <a:avLst/>
-          </a:prstGeom>
-          <a:noFill/>
-          <a:ln/>
-        </p:spPr>
-        <p:txBody>
-          <a:bodyPr wrap="square" lIns="0" tIns="0" rIns="0" bIns="0" rtlCol="0" anchor="t">
+            <a:off x="7799832" y="1801368"/>
+            <a:ext cx="3145536" cy="758952"/>
+          </a:xfrm>
+          <a:prstGeom prst="rect">
+            <a:avLst/>
+          </a:prstGeom>
+          <a:noFill/>
+          <a:ln/>
+        </p:spPr>
+        <p:txBody>
+          <a:bodyPr wrap="square" lIns="254" tIns="254" rIns="254" bIns="254" rtlCol="0" anchor="t">
             <a:normAutofit/>
           </a:bodyPr>
           <a:lstStyle/>
@@ -4276,7 +4303,7 @@
               <a:buNone/>
             </a:pPr>
             <a:r>
-              <a:rPr lang="en-US" sz="1550" dirty="0">
+              <a:rPr lang="en-US" sz="1320" dirty="0">
                 <a:solidFill>
                   <a:srgbClr val="17364A"/>
                 </a:solidFill>
@@ -4286,7 +4313,7 @@
               </a:rPr>
               <a:t>An immunization information system may receive HL7 v2 VXU messages from providers and pharmacies.</a:t>
             </a:r>
-            <a:endParaRPr lang="en-US" sz="1550" dirty="0"/>
+            <a:endParaRPr lang="en-US" sz="1320" dirty="0"/>
           </a:p>
         </p:txBody>
       </p:sp>
@@ -4374,13 +4401,16 @@
           <a:ln/>
         </p:spPr>
         <p:txBody>
-          <a:bodyPr wrap="square" lIns="254" tIns="254" rIns="254" bIns="254" rtlCol="0" anchor="t">
+          <a:bodyPr wrap="square" lIns="508" tIns="508" rIns="508" bIns="508" rtlCol="0" anchor="t">
             <a:normAutofit/>
           </a:bodyPr>
           <a:lstStyle/>
           <a:p>
-            <a:r>
-              <a:rPr lang="en-US" sz="1380" dirty="0">
+            <a:pPr indent="0" marL="0">
+              <a:buNone/>
+            </a:pPr>
+            <a:r>
+              <a:rPr lang="en-US" sz="1220" dirty="0">
                 <a:solidFill>
                   <a:srgbClr val="17364A"/>
                 </a:solidFill>
@@ -4388,13 +4418,16 @@
                 <a:ea typeface="Aptos" pitchFamily="34" charset="-122"/>
                 <a:cs typeface="Aptos" pitchFamily="34" charset="-120"/>
               </a:rPr>
-              <a:t>If an AI tool is used to identify vaccination gaps or generate reminder lists, it depends.</a:t>
-            </a:r>
-            <a:endParaRPr lang="en-US" sz="1380" dirty="0"/>
-          </a:p>
-          <a:p>
-            <a:r>
-              <a:rPr lang="en-US" sz="1380" dirty="0">
+              <a:t>If an AI tool is used to identify vaccination gaps or generate.</a:t>
+            </a:r>
+            <a:endParaRPr lang="en-US" sz="1220" dirty="0"/>
+          </a:p>
+          <a:p>
+            <a:pPr indent="0" marL="0">
+              <a:buNone/>
+            </a:pPr>
+            <a:r>
+              <a:rPr lang="en-US" sz="1220" dirty="0">
                 <a:solidFill>
                   <a:srgbClr val="17364A"/>
                 </a:solidFill>
@@ -4402,13 +4435,16 @@
                 <a:ea typeface="Aptos" pitchFamily="34" charset="-122"/>
                 <a:cs typeface="Aptos" pitchFamily="34" charset="-120"/>
               </a:rPr>
-              <a:t>Interoperability failures can look like epidemiologic gaps even when the problem is.</a:t>
-            </a:r>
-            <a:endParaRPr lang="en-US" sz="1380" dirty="0"/>
-          </a:p>
-          <a:p>
-            <a:r>
-              <a:rPr lang="en-US" sz="1380" dirty="0">
+              <a:t>Interoperability failures can look like epidemiologic gaps even.</a:t>
+            </a:r>
+            <a:endParaRPr lang="en-US" sz="1220" dirty="0"/>
+          </a:p>
+          <a:p>
+            <a:pPr indent="0" marL="0">
+              <a:buNone/>
+            </a:pPr>
+            <a:r>
+              <a:rPr lang="en-US" sz="1220" dirty="0">
                 <a:solidFill>
                   <a:srgbClr val="17364A"/>
                 </a:solidFill>
@@ -4416,9 +4452,9 @@
                 <a:ea typeface="Aptos" pitchFamily="34" charset="-122"/>
                 <a:cs typeface="Aptos" pitchFamily="34" charset="-120"/>
               </a:rPr>
-              <a:t>A public health agency exploring AI-supported case summaries from EHR data may need to.</a:t>
-            </a:r>
-            <a:endParaRPr lang="en-US" sz="1380" dirty="0"/>
+              <a:t>A public health agency exploring AI-supported case summaries from.</a:t>
+            </a:r>
+            <a:endParaRPr lang="en-US" sz="1220" dirty="0"/>
           </a:p>
         </p:txBody>
       </p:sp>
@@ -4496,17 +4532,17 @@
         </p:nvSpPr>
         <p:spPr>
           <a:xfrm>
-            <a:off x="7799832" y="5001768"/>
-            <a:ext cx="3145536" cy="502920"/>
-          </a:xfrm>
-          <a:prstGeom prst="rect">
-            <a:avLst/>
-          </a:prstGeom>
-          <a:noFill/>
-          <a:ln/>
-        </p:spPr>
-        <p:txBody>
-          <a:bodyPr wrap="square" lIns="0" tIns="0" rIns="0" bIns="0" rtlCol="0" anchor="t">
+            <a:off x="7799832" y="4974336"/>
+            <a:ext cx="3145536" cy="576072"/>
+          </a:xfrm>
+          <a:prstGeom prst="rect">
+            <a:avLst/>
+          </a:prstGeom>
+          <a:noFill/>
+          <a:ln/>
+        </p:spPr>
+        <p:txBody>
+          <a:bodyPr wrap="square" lIns="254" tIns="254" rIns="254" bIns="254" rtlCol="0" anchor="t">
             <a:normAutofit/>
           </a:bodyPr>
           <a:lstStyle/>
@@ -4515,7 +4551,7 @@
               <a:buNone/>
             </a:pPr>
             <a:r>
-              <a:rPr lang="en-US" sz="1550" dirty="0">
+              <a:rPr lang="en-US" sz="1320" dirty="0">
                 <a:solidFill>
                   <a:srgbClr val="17364A"/>
                 </a:solidFill>
@@ -4523,9 +4559,9 @@
                 <a:ea typeface="Aptos" pitchFamily="34" charset="-122"/>
                 <a:cs typeface="Aptos" pitchFamily="34" charset="-120"/>
               </a:rPr>
-              <a:t>Connect the concept to public health purpose, responsible use, required safeguards, documentation, and the next action a department should take.</a:t>
-            </a:r>
-            <a:endParaRPr lang="en-US" sz="1550" dirty="0"/>
+              <a:t>Connect the concept to public health purpose, responsible use, required safeguards, documentation, and the next action a.</a:t>
+            </a:r>
+            <a:endParaRPr lang="en-US" sz="1320" dirty="0"/>
           </a:p>
         </p:txBody>
       </p:sp>
@@ -4826,49 +4862,58 @@
           <a:ln/>
         </p:spPr>
         <p:txBody>
-          <a:bodyPr wrap="square" lIns="635" tIns="635" rIns="635" bIns="635" rtlCol="0" anchor="t">
+          <a:bodyPr wrap="square" lIns="1016" tIns="1016" rIns="1016" bIns="1016" rtlCol="0" anchor="t">
             <a:normAutofit/>
           </a:bodyPr>
           <a:lstStyle/>
           <a:p>
+            <a:pPr indent="0" marL="0">
+              <a:buNone/>
+            </a:pPr>
             <a:r>
               <a:rPr lang="en-US" sz="2100" dirty="0">
                 <a:solidFill>
-                  <a:srgbClr val="17364A"/>
-                </a:solidFill>
-                <a:latin typeface="Aptos" pitchFamily="34" charset="0"/>
-                <a:ea typeface="Aptos" pitchFamily="34" charset="-122"/>
-                <a:cs typeface="Aptos" pitchFamily="34" charset="-120"/>
-              </a:rPr>
-              <a:t>Interoperability review starts by identifying the sending system, receiving system, exchange standard,.</a:t>
+                  <a:srgbClr val="003A63"/>
+                </a:solidFill>
+                <a:latin typeface="Aptos" pitchFamily="34" charset="0"/>
+                <a:ea typeface="Aptos" pitchFamily="34" charset="-122"/>
+                <a:cs typeface="Aptos" pitchFamily="34" charset="-120"/>
+              </a:rPr>
+              <a:t>• Interoperability review starts by identifying the sending system, receiving system, exchange.</a:t>
             </a:r>
             <a:endParaRPr lang="en-US" sz="2100" dirty="0"/>
           </a:p>
           <a:p>
+            <a:pPr indent="0" marL="0">
+              <a:buNone/>
+            </a:pPr>
             <a:r>
               <a:rPr lang="en-US" sz="2100" dirty="0">
                 <a:solidFill>
-                  <a:srgbClr val="17364A"/>
-                </a:solidFill>
-                <a:latin typeface="Aptos" pitchFamily="34" charset="0"/>
-                <a:ea typeface="Aptos" pitchFamily="34" charset="-122"/>
-                <a:cs typeface="Aptos" pitchFamily="34" charset="-120"/>
-              </a:rPr>
-              <a:t>Staff should ask whether the workflow uses messages, documents, resources, files, or manual entry.</a:t>
+                  <a:srgbClr val="003A63"/>
+                </a:solidFill>
+                <a:latin typeface="Aptos" pitchFamily="34" charset="0"/>
+                <a:ea typeface="Aptos" pitchFamily="34" charset="-122"/>
+                <a:cs typeface="Aptos" pitchFamily="34" charset="-120"/>
+              </a:rPr>
+              <a:t>• Staff should ask whether the workflow uses messages, documents, resources, files, or manual.</a:t>
             </a:r>
             <a:endParaRPr lang="en-US" sz="2100" dirty="0"/>
           </a:p>
           <a:p>
+            <a:pPr indent="0" marL="0">
+              <a:buNone/>
+            </a:pPr>
             <a:r>
               <a:rPr lang="en-US" sz="2100" dirty="0">
                 <a:solidFill>
-                  <a:srgbClr val="17364A"/>
-                </a:solidFill>
-                <a:latin typeface="Aptos" pitchFamily="34" charset="0"/>
-                <a:ea typeface="Aptos" pitchFamily="34" charset="-122"/>
-                <a:cs typeface="Aptos" pitchFamily="34" charset="-120"/>
-              </a:rPr>
-              <a:t>They should also identify required terminology systems, such as LOINC, SNOMED CT, CVX, ICD-10-CM, UCUM,.</a:t>
+                  <a:srgbClr val="003A63"/>
+                </a:solidFill>
+                <a:latin typeface="Aptos" pitchFamily="34" charset="0"/>
+                <a:ea typeface="Aptos" pitchFamily="34" charset="-122"/>
+                <a:cs typeface="Aptos" pitchFamily="34" charset="-120"/>
+              </a:rPr>
+              <a:t>• They should also identify required terminology systems, such as LOINC, SNOMED CT, CVX,.</a:t>
             </a:r>
             <a:endParaRPr lang="en-US" sz="2100" dirty="0"/>
           </a:p>
@@ -4948,17 +4993,17 @@
         </p:nvSpPr>
         <p:spPr>
           <a:xfrm>
-            <a:off x="7799832" y="1828800"/>
-            <a:ext cx="3145536" cy="685800"/>
-          </a:xfrm>
-          <a:prstGeom prst="rect">
-            <a:avLst/>
-          </a:prstGeom>
-          <a:noFill/>
-          <a:ln/>
-        </p:spPr>
-        <p:txBody>
-          <a:bodyPr wrap="square" lIns="0" tIns="0" rIns="0" bIns="0" rtlCol="0" anchor="t">
+            <a:off x="7799832" y="1801368"/>
+            <a:ext cx="3145536" cy="758952"/>
+          </a:xfrm>
+          <a:prstGeom prst="rect">
+            <a:avLst/>
+          </a:prstGeom>
+          <a:noFill/>
+          <a:ln/>
+        </p:spPr>
+        <p:txBody>
+          <a:bodyPr wrap="square" lIns="254" tIns="254" rIns="254" bIns="254" rtlCol="0" anchor="t">
             <a:normAutofit/>
           </a:bodyPr>
           <a:lstStyle/>
@@ -4967,7 +5012,7 @@
               <a:buNone/>
             </a:pPr>
             <a:r>
-              <a:rPr lang="en-US" sz="1550" dirty="0">
+              <a:rPr lang="en-US" sz="1320" dirty="0">
                 <a:solidFill>
                   <a:srgbClr val="17364A"/>
                 </a:solidFill>
@@ -4977,7 +5022,7 @@
               </a:rPr>
               <a:t>Interoperability review starts by identifying the sending system, receiving system, exchange standard,.</a:t>
             </a:r>
-            <a:endParaRPr lang="en-US" sz="1550" dirty="0"/>
+            <a:endParaRPr lang="en-US" sz="1320" dirty="0"/>
           </a:p>
         </p:txBody>
       </p:sp>
@@ -5065,13 +5110,16 @@
           <a:ln/>
         </p:spPr>
         <p:txBody>
-          <a:bodyPr wrap="square" lIns="254" tIns="254" rIns="254" bIns="254" rtlCol="0" anchor="t">
+          <a:bodyPr wrap="square" lIns="508" tIns="508" rIns="508" bIns="508" rtlCol="0" anchor="t">
             <a:normAutofit/>
           </a:bodyPr>
           <a:lstStyle/>
           <a:p>
-            <a:r>
-              <a:rPr lang="en-US" sz="1380" dirty="0">
+            <a:pPr indent="0" marL="0">
+              <a:buNone/>
+            </a:pPr>
+            <a:r>
+              <a:rPr lang="en-US" sz="1220" dirty="0">
                 <a:solidFill>
                   <a:srgbClr val="17364A"/>
                 </a:solidFill>
@@ -5079,13 +5127,16 @@
                 <a:ea typeface="Aptos" pitchFamily="34" charset="-122"/>
                 <a:cs typeface="Aptos" pitchFamily="34" charset="-120"/>
               </a:rPr>
-              <a:t>Interoperability review starts by identifying the sending system, receiving system,.</a:t>
-            </a:r>
-            <a:endParaRPr lang="en-US" sz="1380" dirty="0"/>
-          </a:p>
-          <a:p>
-            <a:r>
-              <a:rPr lang="en-US" sz="1380" dirty="0">
+              <a:t>Interoperability review starts by identifying the sending system,.</a:t>
+            </a:r>
+            <a:endParaRPr lang="en-US" sz="1220" dirty="0"/>
+          </a:p>
+          <a:p>
+            <a:pPr indent="0" marL="0">
+              <a:buNone/>
+            </a:pPr>
+            <a:r>
+              <a:rPr lang="en-US" sz="1220" dirty="0">
                 <a:solidFill>
                   <a:srgbClr val="17364A"/>
                 </a:solidFill>
@@ -5093,13 +5144,16 @@
                 <a:ea typeface="Aptos" pitchFamily="34" charset="-122"/>
                 <a:cs typeface="Aptos" pitchFamily="34" charset="-120"/>
               </a:rPr>
-              <a:t>They should also identify required terminology systems, such as LOINC, SNOMED CT, CVX,.</a:t>
-            </a:r>
-            <a:endParaRPr lang="en-US" sz="1380" dirty="0"/>
-          </a:p>
-          <a:p>
-            <a:r>
-              <a:rPr lang="en-US" sz="1380" dirty="0">
+              <a:t>They should also identify required terminology systems, such as.</a:t>
+            </a:r>
+            <a:endParaRPr lang="en-US" sz="1220" dirty="0"/>
+          </a:p>
+          <a:p>
+            <a:pPr indent="0" marL="0">
+              <a:buNone/>
+            </a:pPr>
+            <a:r>
+              <a:rPr lang="en-US" sz="1220" dirty="0">
                 <a:solidFill>
                   <a:srgbClr val="17364A"/>
                 </a:solidFill>
@@ -5109,7 +5163,7 @@
               </a:rPr>
               <a:t>Validation is a central part of interoperability.</a:t>
             </a:r>
-            <a:endParaRPr lang="en-US" sz="1380" dirty="0"/>
+            <a:endParaRPr lang="en-US" sz="1220" dirty="0"/>
           </a:p>
         </p:txBody>
       </p:sp>
@@ -5187,17 +5241,17 @@
         </p:nvSpPr>
         <p:spPr>
           <a:xfrm>
-            <a:off x="7799832" y="5001768"/>
-            <a:ext cx="3145536" cy="502920"/>
-          </a:xfrm>
-          <a:prstGeom prst="rect">
-            <a:avLst/>
-          </a:prstGeom>
-          <a:noFill/>
-          <a:ln/>
-        </p:spPr>
-        <p:txBody>
-          <a:bodyPr wrap="square" lIns="0" tIns="0" rIns="0" bIns="0" rtlCol="0" anchor="t">
+            <a:off x="7799832" y="4974336"/>
+            <a:ext cx="3145536" cy="576072"/>
+          </a:xfrm>
+          <a:prstGeom prst="rect">
+            <a:avLst/>
+          </a:prstGeom>
+          <a:noFill/>
+          <a:ln/>
+        </p:spPr>
+        <p:txBody>
+          <a:bodyPr wrap="square" lIns="254" tIns="254" rIns="254" bIns="254" rtlCol="0" anchor="t">
             <a:normAutofit/>
           </a:bodyPr>
           <a:lstStyle/>
@@ -5206,7 +5260,7 @@
               <a:buNone/>
             </a:pPr>
             <a:r>
-              <a:rPr lang="en-US" sz="1550" dirty="0">
+              <a:rPr lang="en-US" sz="1320" dirty="0">
                 <a:solidFill>
                   <a:srgbClr val="17364A"/>
                 </a:solidFill>
@@ -5214,9 +5268,9 @@
                 <a:ea typeface="Aptos" pitchFamily="34" charset="-122"/>
                 <a:cs typeface="Aptos" pitchFamily="34" charset="-120"/>
               </a:rPr>
-              <a:t>Connect the concept to public health purpose, responsible use, required safeguards, documentation, and the next action a department should take.</a:t>
-            </a:r>
-            <a:endParaRPr lang="en-US" sz="1550" dirty="0"/>
+              <a:t>Connect the concept to public health purpose, responsible use, required safeguards, documentation, and the next action a.</a:t>
+            </a:r>
+            <a:endParaRPr lang="en-US" sz="1320" dirty="0"/>
           </a:p>
         </p:txBody>
       </p:sp>
@@ -5517,49 +5571,58 @@
           <a:ln/>
         </p:spPr>
         <p:txBody>
-          <a:bodyPr wrap="square" lIns="635" tIns="635" rIns="635" bIns="635" rtlCol="0" anchor="t">
+          <a:bodyPr wrap="square" lIns="1016" tIns="1016" rIns="1016" bIns="1016" rtlCol="0" anchor="t">
             <a:normAutofit/>
           </a:bodyPr>
           <a:lstStyle/>
           <a:p>
+            <a:pPr indent="0" marL="0">
+              <a:buNone/>
+            </a:pPr>
             <a:r>
               <a:rPr lang="en-US" sz="2100" dirty="0">
                 <a:solidFill>
-                  <a:srgbClr val="17364A"/>
-                </a:solidFill>
-                <a:latin typeface="Aptos" pitchFamily="34" charset="0"/>
-                <a:ea typeface="Aptos" pitchFamily="34" charset="-122"/>
-                <a:cs typeface="Aptos" pitchFamily="34" charset="-120"/>
-              </a:rPr>
-              <a:t>Vague standards claims.</a:t>
+                  <a:srgbClr val="003A63"/>
+                </a:solidFill>
+                <a:latin typeface="Aptos" pitchFamily="34" charset="0"/>
+                <a:ea typeface="Aptos" pitchFamily="34" charset="-122"/>
+                <a:cs typeface="Aptos" pitchFamily="34" charset="-120"/>
+              </a:rPr>
+              <a:t>• Vague standards claims.</a:t>
             </a:r>
             <a:endParaRPr lang="en-US" sz="2100" dirty="0"/>
           </a:p>
           <a:p>
+            <a:pPr indent="0" marL="0">
+              <a:buNone/>
+            </a:pPr>
             <a:r>
               <a:rPr lang="en-US" sz="2100" dirty="0">
                 <a:solidFill>
-                  <a:srgbClr val="17364A"/>
-                </a:solidFill>
-                <a:latin typeface="Aptos" pitchFamily="34" charset="0"/>
-                <a:ea typeface="Aptos" pitchFamily="34" charset="-122"/>
-                <a:cs typeface="Aptos" pitchFamily="34" charset="-120"/>
-              </a:rPr>
-              <a:t>Vendors may claim standards support without demonstrating required profiles, data elements, or workflows.</a:t>
+                  <a:srgbClr val="003A63"/>
+                </a:solidFill>
+                <a:latin typeface="Aptos" pitchFamily="34" charset="0"/>
+                <a:ea typeface="Aptos" pitchFamily="34" charset="-122"/>
+                <a:cs typeface="Aptos" pitchFamily="34" charset="-120"/>
+              </a:rPr>
+              <a:t>• Vendors may claim standards support without demonstrating required profiles, data elements, or.</a:t>
             </a:r>
             <a:endParaRPr lang="en-US" sz="2100" dirty="0"/>
           </a:p>
           <a:p>
+            <a:pPr indent="0" marL="0">
+              <a:buNone/>
+            </a:pPr>
             <a:r>
               <a:rPr lang="en-US" sz="2100" dirty="0">
                 <a:solidFill>
-                  <a:srgbClr val="17364A"/>
-                </a:solidFill>
-                <a:latin typeface="Aptos" pitchFamily="34" charset="0"/>
-                <a:ea typeface="Aptos" pitchFamily="34" charset="-122"/>
-                <a:cs typeface="Aptos" pitchFamily="34" charset="-120"/>
-              </a:rPr>
-              <a:t>Guardrails include conformance testing, test messages, implementation guide references, and acceptance.</a:t>
+                  <a:srgbClr val="003A63"/>
+                </a:solidFill>
+                <a:latin typeface="Aptos" pitchFamily="34" charset="0"/>
+                <a:ea typeface="Aptos" pitchFamily="34" charset="-122"/>
+                <a:cs typeface="Aptos" pitchFamily="34" charset="-120"/>
+              </a:rPr>
+              <a:t>• Guardrails include conformance testing, test messages, implementation guide references, and.</a:t>
             </a:r>
             <a:endParaRPr lang="en-US" sz="2100" dirty="0"/>
           </a:p>
@@ -5639,17 +5702,17 @@
         </p:nvSpPr>
         <p:spPr>
           <a:xfrm>
-            <a:off x="7799832" y="1828800"/>
-            <a:ext cx="3145536" cy="685800"/>
-          </a:xfrm>
-          <a:prstGeom prst="rect">
-            <a:avLst/>
-          </a:prstGeom>
-          <a:noFill/>
-          <a:ln/>
-        </p:spPr>
-        <p:txBody>
-          <a:bodyPr wrap="square" lIns="0" tIns="0" rIns="0" bIns="0" rtlCol="0" anchor="t">
+            <a:off x="7799832" y="1801368"/>
+            <a:ext cx="3145536" cy="758952"/>
+          </a:xfrm>
+          <a:prstGeom prst="rect">
+            <a:avLst/>
+          </a:prstGeom>
+          <a:noFill/>
+          <a:ln/>
+        </p:spPr>
+        <p:txBody>
+          <a:bodyPr wrap="square" lIns="254" tIns="254" rIns="254" bIns="254" rtlCol="0" anchor="t">
             <a:normAutofit/>
           </a:bodyPr>
           <a:lstStyle/>
@@ -5658,7 +5721,7 @@
               <a:buNone/>
             </a:pPr>
             <a:r>
-              <a:rPr lang="en-US" sz="1550" dirty="0">
+              <a:rPr lang="en-US" sz="1320" dirty="0">
                 <a:solidFill>
                   <a:srgbClr val="17364A"/>
                 </a:solidFill>
@@ -5668,7 +5731,7 @@
               </a:rPr>
               <a:t>Vague standards claims.</a:t>
             </a:r>
-            <a:endParaRPr lang="en-US" sz="1550" dirty="0"/>
+            <a:endParaRPr lang="en-US" sz="1320" dirty="0"/>
           </a:p>
         </p:txBody>
       </p:sp>
@@ -5756,13 +5819,16 @@
           <a:ln/>
         </p:spPr>
         <p:txBody>
-          <a:bodyPr wrap="square" lIns="254" tIns="254" rIns="254" bIns="254" rtlCol="0" anchor="t">
+          <a:bodyPr wrap="square" lIns="508" tIns="508" rIns="508" bIns="508" rtlCol="0" anchor="t">
             <a:normAutofit/>
           </a:bodyPr>
           <a:lstStyle/>
           <a:p>
-            <a:r>
-              <a:rPr lang="en-US" sz="1380" dirty="0">
+            <a:pPr indent="0" marL="0">
+              <a:buNone/>
+            </a:pPr>
+            <a:r>
+              <a:rPr lang="en-US" sz="1220" dirty="0">
                 <a:solidFill>
                   <a:srgbClr val="17364A"/>
                 </a:solidFill>
@@ -5770,13 +5836,16 @@
                 <a:ea typeface="Aptos" pitchFamily="34" charset="-122"/>
                 <a:cs typeface="Aptos" pitchFamily="34" charset="-120"/>
               </a:rPr>
-              <a:t>Guardrails include conformance testing, test messages, implementation guide references,.</a:t>
-            </a:r>
-            <a:endParaRPr lang="en-US" sz="1380" dirty="0"/>
-          </a:p>
-          <a:p>
-            <a:r>
-              <a:rPr lang="en-US" sz="1380" dirty="0">
+              <a:t>Guardrails include conformance testing, test messages,.</a:t>
+            </a:r>
+            <a:endParaRPr lang="en-US" sz="1220" dirty="0"/>
+          </a:p>
+          <a:p>
+            <a:pPr indent="0" marL="0">
+              <a:buNone/>
+            </a:pPr>
+            <a:r>
+              <a:rPr lang="en-US" sz="1220" dirty="0">
                 <a:solidFill>
                   <a:srgbClr val="17364A"/>
                 </a:solidFill>
@@ -5786,11 +5855,14 @@
               </a:rPr>
               <a:t>Manual workarounds.</a:t>
             </a:r>
-            <a:endParaRPr lang="en-US" sz="1380" dirty="0"/>
-          </a:p>
-          <a:p>
-            <a:r>
-              <a:rPr lang="en-US" sz="1380" dirty="0">
+            <a:endParaRPr lang="en-US" sz="1220" dirty="0"/>
+          </a:p>
+          <a:p>
+            <a:pPr indent="0" marL="0">
+              <a:buNone/>
+            </a:pPr>
+            <a:r>
+              <a:rPr lang="en-US" sz="1220" dirty="0">
                 <a:solidFill>
                   <a:srgbClr val="17364A"/>
                 </a:solidFill>
@@ -5798,9 +5870,9 @@
                 <a:ea typeface="Aptos" pitchFamily="34" charset="-122"/>
                 <a:cs typeface="Aptos" pitchFamily="34" charset="-120"/>
               </a:rPr>
-              <a:t>Weak interoperability can lead to copying and pasting sensitive data into AI tools.</a:t>
-            </a:r>
-            <a:endParaRPr lang="en-US" sz="1380" dirty="0"/>
+              <a:t>Weak interoperability can lead to copying and pasting sensitive.</a:t>
+            </a:r>
+            <a:endParaRPr lang="en-US" sz="1220" dirty="0"/>
           </a:p>
         </p:txBody>
       </p:sp>
@@ -5878,17 +5950,17 @@
         </p:nvSpPr>
         <p:spPr>
           <a:xfrm>
-            <a:off x="7799832" y="5001768"/>
-            <a:ext cx="3145536" cy="502920"/>
-          </a:xfrm>
-          <a:prstGeom prst="rect">
-            <a:avLst/>
-          </a:prstGeom>
-          <a:noFill/>
-          <a:ln/>
-        </p:spPr>
-        <p:txBody>
-          <a:bodyPr wrap="square" lIns="0" tIns="0" rIns="0" bIns="0" rtlCol="0" anchor="t">
+            <a:off x="7799832" y="4974336"/>
+            <a:ext cx="3145536" cy="576072"/>
+          </a:xfrm>
+          <a:prstGeom prst="rect">
+            <a:avLst/>
+          </a:prstGeom>
+          <a:noFill/>
+          <a:ln/>
+        </p:spPr>
+        <p:txBody>
+          <a:bodyPr wrap="square" lIns="254" tIns="254" rIns="254" bIns="254" rtlCol="0" anchor="t">
             <a:normAutofit/>
           </a:bodyPr>
           <a:lstStyle/>
@@ -5897,7 +5969,7 @@
               <a:buNone/>
             </a:pPr>
             <a:r>
-              <a:rPr lang="en-US" sz="1550" dirty="0">
+              <a:rPr lang="en-US" sz="1320" dirty="0">
                 <a:solidFill>
                   <a:srgbClr val="17364A"/>
                 </a:solidFill>
@@ -5905,9 +5977,9 @@
                 <a:ea typeface="Aptos" pitchFamily="34" charset="-122"/>
                 <a:cs typeface="Aptos" pitchFamily="34" charset="-120"/>
               </a:rPr>
-              <a:t>Identify what could go wrong, who could be affected, what safeguards are needed, and what evidence should be reviewed before use expands.</a:t>
-            </a:r>
-            <a:endParaRPr lang="en-US" sz="1550" dirty="0"/>
+              <a:t>Identify what could go wrong, who could be affected, what safeguards are needed, and what evidence should be reviewed.</a:t>
+            </a:r>
+            <a:endParaRPr lang="en-US" sz="1320" dirty="0"/>
           </a:p>
         </p:txBody>
       </p:sp>
@@ -6208,49 +6280,58 @@
           <a:ln/>
         </p:spPr>
         <p:txBody>
-          <a:bodyPr wrap="square" lIns="635" tIns="635" rIns="635" bIns="635" rtlCol="0" anchor="t">
+          <a:bodyPr wrap="square" lIns="1016" tIns="1016" rIns="1016" bIns="1016" rtlCol="0" anchor="t">
             <a:normAutofit/>
           </a:bodyPr>
           <a:lstStyle/>
           <a:p>
+            <a:pPr indent="0" marL="0">
+              <a:buNone/>
+            </a:pPr>
             <a:r>
               <a:rPr lang="en-US" sz="2100" dirty="0">
                 <a:solidFill>
-                  <a:srgbClr val="17364A"/>
-                </a:solidFill>
-                <a:latin typeface="Aptos" pitchFamily="34" charset="0"/>
-                <a:ea typeface="Aptos" pitchFamily="34" charset="-122"/>
-                <a:cs typeface="Aptos" pitchFamily="34" charset="-120"/>
-              </a:rPr>
-              <a:t>Over-reliance on structured data.</a:t>
+                  <a:srgbClr val="003A63"/>
+                </a:solidFill>
+                <a:latin typeface="Aptos" pitchFamily="34" charset="0"/>
+                <a:ea typeface="Aptos" pitchFamily="34" charset="-122"/>
+                <a:cs typeface="Aptos" pitchFamily="34" charset="-120"/>
+              </a:rPr>
+              <a:t>• Over-reliance on structured data.</a:t>
             </a:r>
             <a:endParaRPr lang="en-US" sz="2100" dirty="0"/>
           </a:p>
           <a:p>
+            <a:pPr indent="0" marL="0">
+              <a:buNone/>
+            </a:pPr>
             <a:r>
               <a:rPr lang="en-US" sz="2100" dirty="0">
                 <a:solidFill>
-                  <a:srgbClr val="17364A"/>
-                </a:solidFill>
-                <a:latin typeface="Aptos" pitchFamily="34" charset="0"/>
-                <a:ea typeface="Aptos" pitchFamily="34" charset="-122"/>
-                <a:cs typeface="Aptos" pitchFamily="34" charset="-120"/>
-              </a:rPr>
-              <a:t>Structured exchange may omit context found in notes or local fields.</a:t>
+                  <a:srgbClr val="003A63"/>
+                </a:solidFill>
+                <a:latin typeface="Aptos" pitchFamily="34" charset="0"/>
+                <a:ea typeface="Aptos" pitchFamily="34" charset="-122"/>
+                <a:cs typeface="Aptos" pitchFamily="34" charset="-120"/>
+              </a:rPr>
+              <a:t>• Structured exchange may omit context found in notes or local fields.</a:t>
             </a:r>
             <a:endParaRPr lang="en-US" sz="2100" dirty="0"/>
           </a:p>
           <a:p>
+            <a:pPr indent="0" marL="0">
+              <a:buNone/>
+            </a:pPr>
             <a:r>
               <a:rPr lang="en-US" sz="2100" dirty="0">
                 <a:solidFill>
-                  <a:srgbClr val="17364A"/>
-                </a:solidFill>
-                <a:latin typeface="Aptos" pitchFamily="34" charset="0"/>
-                <a:ea typeface="Aptos" pitchFamily="34" charset="-122"/>
-                <a:cs typeface="Aptos" pitchFamily="34" charset="-120"/>
-              </a:rPr>
-              <a:t>Guardrails include source review, workflow validation, and documentation of known data gaps.</a:t>
+                  <a:srgbClr val="003A63"/>
+                </a:solidFill>
+                <a:latin typeface="Aptos" pitchFamily="34" charset="0"/>
+                <a:ea typeface="Aptos" pitchFamily="34" charset="-122"/>
+                <a:cs typeface="Aptos" pitchFamily="34" charset="-120"/>
+              </a:rPr>
+              <a:t>• Guardrails include source review, workflow validation, and documentation of known data gaps.</a:t>
             </a:r>
             <a:endParaRPr lang="en-US" sz="2100" dirty="0"/>
           </a:p>
@@ -6330,17 +6411,17 @@
         </p:nvSpPr>
         <p:spPr>
           <a:xfrm>
-            <a:off x="7799832" y="1828800"/>
-            <a:ext cx="3145536" cy="685800"/>
-          </a:xfrm>
-          <a:prstGeom prst="rect">
-            <a:avLst/>
-          </a:prstGeom>
-          <a:noFill/>
-          <a:ln/>
-        </p:spPr>
-        <p:txBody>
-          <a:bodyPr wrap="square" lIns="0" tIns="0" rIns="0" bIns="0" rtlCol="0" anchor="t">
+            <a:off x="7799832" y="1801368"/>
+            <a:ext cx="3145536" cy="758952"/>
+          </a:xfrm>
+          <a:prstGeom prst="rect">
+            <a:avLst/>
+          </a:prstGeom>
+          <a:noFill/>
+          <a:ln/>
+        </p:spPr>
+        <p:txBody>
+          <a:bodyPr wrap="square" lIns="254" tIns="254" rIns="254" bIns="254" rtlCol="0" anchor="t">
             <a:normAutofit/>
           </a:bodyPr>
           <a:lstStyle/>
@@ -6349,7 +6430,7 @@
               <a:buNone/>
             </a:pPr>
             <a:r>
-              <a:rPr lang="en-US" sz="1550" dirty="0">
+              <a:rPr lang="en-US" sz="1320" dirty="0">
                 <a:solidFill>
                   <a:srgbClr val="17364A"/>
                 </a:solidFill>
@@ -6359,7 +6440,7 @@
               </a:rPr>
               <a:t>Over-reliance on structured data.</a:t>
             </a:r>
-            <a:endParaRPr lang="en-US" sz="1550" dirty="0"/>
+            <a:endParaRPr lang="en-US" sz="1320" dirty="0"/>
           </a:p>
         </p:txBody>
       </p:sp>
@@ -6447,13 +6528,16 @@
           <a:ln/>
         </p:spPr>
         <p:txBody>
-          <a:bodyPr wrap="square" lIns="254" tIns="254" rIns="254" bIns="254" rtlCol="0" anchor="t">
+          <a:bodyPr wrap="square" lIns="508" tIns="508" rIns="508" bIns="508" rtlCol="0" anchor="t">
             <a:normAutofit/>
           </a:bodyPr>
           <a:lstStyle/>
           <a:p>
-            <a:r>
-              <a:rPr lang="en-US" sz="1380" dirty="0">
+            <a:pPr indent="0" marL="0">
+              <a:buNone/>
+            </a:pPr>
+            <a:r>
+              <a:rPr lang="en-US" sz="1220" dirty="0">
                 <a:solidFill>
                   <a:srgbClr val="17364A"/>
                 </a:solidFill>
@@ -6463,11 +6547,14 @@
               </a:rPr>
               <a:t>Over-reliance on structured data.</a:t>
             </a:r>
-            <a:endParaRPr lang="en-US" sz="1380" dirty="0"/>
-          </a:p>
-          <a:p>
-            <a:r>
-              <a:rPr lang="en-US" sz="1380" dirty="0">
+            <a:endParaRPr lang="en-US" sz="1220" dirty="0"/>
+          </a:p>
+          <a:p>
+            <a:pPr indent="0" marL="0">
+              <a:buNone/>
+            </a:pPr>
+            <a:r>
+              <a:rPr lang="en-US" sz="1220" dirty="0">
                 <a:solidFill>
                   <a:srgbClr val="17364A"/>
                 </a:solidFill>
@@ -6477,11 +6564,14 @@
               </a:rPr>
               <a:t>Structured exchange may omit context found in notes or local fields.</a:t>
             </a:r>
-            <a:endParaRPr lang="en-US" sz="1380" dirty="0"/>
-          </a:p>
-          <a:p>
-            <a:r>
-              <a:rPr lang="en-US" sz="1380" dirty="0">
+            <a:endParaRPr lang="en-US" sz="1220" dirty="0"/>
+          </a:p>
+          <a:p>
+            <a:pPr indent="0" marL="0">
+              <a:buNone/>
+            </a:pPr>
+            <a:r>
+              <a:rPr lang="en-US" sz="1220" dirty="0">
                 <a:solidFill>
                   <a:srgbClr val="17364A"/>
                 </a:solidFill>
@@ -6489,9 +6579,9 @@
                 <a:ea typeface="Aptos" pitchFamily="34" charset="-122"/>
                 <a:cs typeface="Aptos" pitchFamily="34" charset="-120"/>
               </a:rPr>
-              <a:t>Guardrails include source review, workflow validation, and documentation of known data gaps.</a:t>
-            </a:r>
-            <a:endParaRPr lang="en-US" sz="1380" dirty="0"/>
+              <a:t>Guardrails include source review, workflow validation, and.</a:t>
+            </a:r>
+            <a:endParaRPr lang="en-US" sz="1220" dirty="0"/>
           </a:p>
         </p:txBody>
       </p:sp>
@@ -6569,17 +6659,17 @@
         </p:nvSpPr>
         <p:spPr>
           <a:xfrm>
-            <a:off x="7799832" y="5001768"/>
-            <a:ext cx="3145536" cy="502920"/>
-          </a:xfrm>
-          <a:prstGeom prst="rect">
-            <a:avLst/>
-          </a:prstGeom>
-          <a:noFill/>
-          <a:ln/>
-        </p:spPr>
-        <p:txBody>
-          <a:bodyPr wrap="square" lIns="0" tIns="0" rIns="0" bIns="0" rtlCol="0" anchor="t">
+            <a:off x="7799832" y="4974336"/>
+            <a:ext cx="3145536" cy="576072"/>
+          </a:xfrm>
+          <a:prstGeom prst="rect">
+            <a:avLst/>
+          </a:prstGeom>
+          <a:noFill/>
+          <a:ln/>
+        </p:spPr>
+        <p:txBody>
+          <a:bodyPr wrap="square" lIns="254" tIns="254" rIns="254" bIns="254" rtlCol="0" anchor="t">
             <a:normAutofit/>
           </a:bodyPr>
           <a:lstStyle/>
@@ -6588,7 +6678,7 @@
               <a:buNone/>
             </a:pPr>
             <a:r>
-              <a:rPr lang="en-US" sz="1550" dirty="0">
+              <a:rPr lang="en-US" sz="1320" dirty="0">
                 <a:solidFill>
                   <a:srgbClr val="17364A"/>
                 </a:solidFill>
@@ -6596,9 +6686,9 @@
                 <a:ea typeface="Aptos" pitchFamily="34" charset="-122"/>
                 <a:cs typeface="Aptos" pitchFamily="34" charset="-120"/>
               </a:rPr>
-              <a:t>Identify what could go wrong, who could be affected, what safeguards are needed, and what evidence should be reviewed before use expands.</a:t>
-            </a:r>
-            <a:endParaRPr lang="en-US" sz="1550" dirty="0"/>
+              <a:t>Identify what could go wrong, who could be affected, what safeguards are needed, and what evidence should be reviewed.</a:t>
+            </a:r>
+            <a:endParaRPr lang="en-US" sz="1320" dirty="0"/>
           </a:p>
         </p:txBody>
       </p:sp>
@@ -6899,49 +6989,58 @@
           <a:ln/>
         </p:spPr>
         <p:txBody>
-          <a:bodyPr wrap="square" lIns="635" tIns="635" rIns="635" bIns="635" rtlCol="0" anchor="t">
+          <a:bodyPr wrap="square" lIns="1016" tIns="1016" rIns="1016" bIns="1016" rtlCol="0" anchor="t">
             <a:normAutofit/>
           </a:bodyPr>
           <a:lstStyle/>
           <a:p>
+            <a:pPr indent="0" marL="0">
+              <a:buNone/>
+            </a:pPr>
             <a:r>
               <a:rPr lang="en-US" sz="2100" dirty="0">
                 <a:solidFill>
-                  <a:srgbClr val="17364A"/>
-                </a:solidFill>
-                <a:latin typeface="Aptos" pitchFamily="34" charset="0"/>
-                <a:ea typeface="Aptos" pitchFamily="34" charset="-122"/>
-                <a:cs typeface="Aptos" pitchFamily="34" charset="-120"/>
-              </a:rPr>
-              <a:t>Generative AI may summarize structured and narrative data received through interoperable exchange, but.</a:t>
+                  <a:srgbClr val="003A63"/>
+                </a:solidFill>
+                <a:latin typeface="Aptos" pitchFamily="34" charset="0"/>
+                <a:ea typeface="Aptos" pitchFamily="34" charset="-122"/>
+                <a:cs typeface="Aptos" pitchFamily="34" charset="-120"/>
+              </a:rPr>
+              <a:t>• Generative AI may summarize structured and narrative data received through interoperable.</a:t>
             </a:r>
             <a:endParaRPr lang="en-US" sz="2100" dirty="0"/>
           </a:p>
           <a:p>
+            <a:pPr indent="0" marL="0">
+              <a:buNone/>
+            </a:pPr>
             <a:r>
               <a:rPr lang="en-US" sz="2100" dirty="0">
                 <a:solidFill>
-                  <a:srgbClr val="17364A"/>
-                </a:solidFill>
-                <a:latin typeface="Aptos" pitchFamily="34" charset="0"/>
-                <a:ea typeface="Aptos" pitchFamily="34" charset="-122"/>
-                <a:cs typeface="Aptos" pitchFamily="34" charset="-120"/>
-              </a:rPr>
-              <a:t>Predictive analytics may depend on standardized fields and terminology, so interoperability gaps can.</a:t>
+                  <a:srgbClr val="003A63"/>
+                </a:solidFill>
+                <a:latin typeface="Aptos" pitchFamily="34" charset="0"/>
+                <a:ea typeface="Aptos" pitchFamily="34" charset="-122"/>
+                <a:cs typeface="Aptos" pitchFamily="34" charset="-120"/>
+              </a:rPr>
+              <a:t>• Predictive analytics may depend on standardized fields and terminology, so interoperability.</a:t>
             </a:r>
             <a:endParaRPr lang="en-US" sz="2100" dirty="0"/>
           </a:p>
           <a:p>
+            <a:pPr indent="0" marL="0">
+              <a:buNone/>
+            </a:pPr>
             <a:r>
               <a:rPr lang="en-US" sz="2100" dirty="0">
                 <a:solidFill>
-                  <a:srgbClr val="17364A"/>
-                </a:solidFill>
-                <a:latin typeface="Aptos" pitchFamily="34" charset="0"/>
-                <a:ea typeface="Aptos" pitchFamily="34" charset="-122"/>
-                <a:cs typeface="Aptos" pitchFamily="34" charset="-120"/>
-              </a:rPr>
-              <a:t>RAG tools may retrieve implementation guides or agency protocols, but document governance is needed to.</a:t>
+                  <a:srgbClr val="003A63"/>
+                </a:solidFill>
+                <a:latin typeface="Aptos" pitchFamily="34" charset="0"/>
+                <a:ea typeface="Aptos" pitchFamily="34" charset="-122"/>
+                <a:cs typeface="Aptos" pitchFamily="34" charset="-120"/>
+              </a:rPr>
+              <a:t>• RAG tools may retrieve implementation guides or agency protocols, but document governance is.</a:t>
             </a:r>
             <a:endParaRPr lang="en-US" sz="2100" dirty="0"/>
           </a:p>
@@ -7021,17 +7120,17 @@
         </p:nvSpPr>
         <p:spPr>
           <a:xfrm>
-            <a:off x="7799832" y="1828800"/>
-            <a:ext cx="3145536" cy="685800"/>
-          </a:xfrm>
-          <a:prstGeom prst="rect">
-            <a:avLst/>
-          </a:prstGeom>
-          <a:noFill/>
-          <a:ln/>
-        </p:spPr>
-        <p:txBody>
-          <a:bodyPr wrap="square" lIns="0" tIns="0" rIns="0" bIns="0" rtlCol="0" anchor="t">
+            <a:off x="7799832" y="1801368"/>
+            <a:ext cx="3145536" cy="758952"/>
+          </a:xfrm>
+          <a:prstGeom prst="rect">
+            <a:avLst/>
+          </a:prstGeom>
+          <a:noFill/>
+          <a:ln/>
+        </p:spPr>
+        <p:txBody>
+          <a:bodyPr wrap="square" lIns="254" tIns="254" rIns="254" bIns="254" rtlCol="0" anchor="t">
             <a:normAutofit/>
           </a:bodyPr>
           <a:lstStyle/>
@@ -7040,7 +7139,7 @@
               <a:buNone/>
             </a:pPr>
             <a:r>
-              <a:rPr lang="en-US" sz="1550" dirty="0">
+              <a:rPr lang="en-US" sz="1320" dirty="0">
                 <a:solidFill>
                   <a:srgbClr val="17364A"/>
                 </a:solidFill>
@@ -7050,7 +7149,7 @@
               </a:rPr>
               <a:t>Generative AI may summarize structured and narrative data received through interoperable exchange, but.</a:t>
             </a:r>
-            <a:endParaRPr lang="en-US" sz="1550" dirty="0"/>
+            <a:endParaRPr lang="en-US" sz="1320" dirty="0"/>
           </a:p>
         </p:txBody>
       </p:sp>
@@ -7138,13 +7237,16 @@
           <a:ln/>
         </p:spPr>
         <p:txBody>
-          <a:bodyPr wrap="square" lIns="254" tIns="254" rIns="254" bIns="254" rtlCol="0" anchor="t">
+          <a:bodyPr wrap="square" lIns="508" tIns="508" rIns="508" bIns="508" rtlCol="0" anchor="t">
             <a:normAutofit/>
           </a:bodyPr>
           <a:lstStyle/>
           <a:p>
-            <a:r>
-              <a:rPr lang="en-US" sz="1380" dirty="0">
+            <a:pPr indent="0" marL="0">
+              <a:buNone/>
+            </a:pPr>
+            <a:r>
+              <a:rPr lang="en-US" sz="1220" dirty="0">
                 <a:solidFill>
                   <a:srgbClr val="17364A"/>
                 </a:solidFill>
@@ -7152,13 +7254,16 @@
                 <a:ea typeface="Aptos" pitchFamily="34" charset="-122"/>
                 <a:cs typeface="Aptos" pitchFamily="34" charset="-120"/>
               </a:rPr>
-              <a:t>Generative AI may summarize structured and narrative data received through interoperable.</a:t>
-            </a:r>
-            <a:endParaRPr lang="en-US" sz="1380" dirty="0"/>
-          </a:p>
-          <a:p>
-            <a:r>
-              <a:rPr lang="en-US" sz="1380" dirty="0">
+              <a:t>Generative AI may summarize structured and narrative data received.</a:t>
+            </a:r>
+            <a:endParaRPr lang="en-US" sz="1220" dirty="0"/>
+          </a:p>
+          <a:p>
+            <a:pPr indent="0" marL="0">
+              <a:buNone/>
+            </a:pPr>
+            <a:r>
+              <a:rPr lang="en-US" sz="1220" dirty="0">
                 <a:solidFill>
                   <a:srgbClr val="17364A"/>
                 </a:solidFill>
@@ -7166,13 +7271,16 @@
                 <a:ea typeface="Aptos" pitchFamily="34" charset="-122"/>
                 <a:cs typeface="Aptos" pitchFamily="34" charset="-120"/>
               </a:rPr>
-              <a:t>Predictive analytics may depend on standardized fields and terminology, so.</a:t>
-            </a:r>
-            <a:endParaRPr lang="en-US" sz="1380" dirty="0"/>
-          </a:p>
-          <a:p>
-            <a:r>
-              <a:rPr lang="en-US" sz="1380" dirty="0">
+              <a:t>Predictive analytics may depend on standardized fields and.</a:t>
+            </a:r>
+            <a:endParaRPr lang="en-US" sz="1220" dirty="0"/>
+          </a:p>
+          <a:p>
+            <a:pPr indent="0" marL="0">
+              <a:buNone/>
+            </a:pPr>
+            <a:r>
+              <a:rPr lang="en-US" sz="1220" dirty="0">
                 <a:solidFill>
                   <a:srgbClr val="17364A"/>
                 </a:solidFill>
@@ -7180,9 +7288,9 @@
                 <a:ea typeface="Aptos" pitchFamily="34" charset="-122"/>
                 <a:cs typeface="Aptos" pitchFamily="34" charset="-120"/>
               </a:rPr>
-              <a:t>RAG tools may retrieve implementation guides or agency protocols, but document governance.</a:t>
-            </a:r>
-            <a:endParaRPr lang="en-US" sz="1380" dirty="0"/>
+              <a:t>RAG tools may retrieve implementation guides or agency protocols,.</a:t>
+            </a:r>
+            <a:endParaRPr lang="en-US" sz="1220" dirty="0"/>
           </a:p>
         </p:txBody>
       </p:sp>
@@ -7260,17 +7368,17 @@
         </p:nvSpPr>
         <p:spPr>
           <a:xfrm>
-            <a:off x="7799832" y="5001768"/>
-            <a:ext cx="3145536" cy="502920"/>
-          </a:xfrm>
-          <a:prstGeom prst="rect">
-            <a:avLst/>
-          </a:prstGeom>
-          <a:noFill/>
-          <a:ln/>
-        </p:spPr>
-        <p:txBody>
-          <a:bodyPr wrap="square" lIns="0" tIns="0" rIns="0" bIns="0" rtlCol="0" anchor="t">
+            <a:off x="7799832" y="4974336"/>
+            <a:ext cx="3145536" cy="576072"/>
+          </a:xfrm>
+          <a:prstGeom prst="rect">
+            <a:avLst/>
+          </a:prstGeom>
+          <a:noFill/>
+          <a:ln/>
+        </p:spPr>
+        <p:txBody>
+          <a:bodyPr wrap="square" lIns="254" tIns="254" rIns="254" bIns="254" rtlCol="0" anchor="t">
             <a:normAutofit/>
           </a:bodyPr>
           <a:lstStyle/>
@@ -7279,7 +7387,7 @@
               <a:buNone/>
             </a:pPr>
             <a:r>
-              <a:rPr lang="en-US" sz="1550" dirty="0">
+              <a:rPr lang="en-US" sz="1320" dirty="0">
                 <a:solidFill>
                   <a:srgbClr val="17364A"/>
                 </a:solidFill>
@@ -7287,9 +7395,9 @@
                 <a:ea typeface="Aptos" pitchFamily="34" charset="-122"/>
                 <a:cs typeface="Aptos" pitchFamily="34" charset="-120"/>
               </a:rPr>
-              <a:t>Use the concept to clarify workflow changes, dependencies, staffing, procurement requirements, training needs, and implementation checkpoints.</a:t>
-            </a:r>
-            <a:endParaRPr lang="en-US" sz="1550" dirty="0"/>
+              <a:t>Use the concept to clarify workflow changes, dependencies, staffing, procurement requirements, training needs, and.</a:t>
+            </a:r>
+            <a:endParaRPr lang="en-US" sz="1320" dirty="0"/>
           </a:p>
         </p:txBody>
       </p:sp>
@@ -7590,49 +7698,58 @@
           <a:ln/>
         </p:spPr>
         <p:txBody>
-          <a:bodyPr wrap="square" lIns="635" tIns="635" rIns="635" bIns="635" rtlCol="0" anchor="t">
+          <a:bodyPr wrap="square" lIns="1016" tIns="1016" rIns="1016" bIns="1016" rtlCol="0" anchor="t">
             <a:normAutofit/>
           </a:bodyPr>
           <a:lstStyle/>
           <a:p>
+            <a:pPr indent="0" marL="0">
+              <a:buNone/>
+            </a:pPr>
             <a:r>
               <a:rPr lang="en-US" sz="2100" dirty="0">
                 <a:solidFill>
-                  <a:srgbClr val="17364A"/>
-                </a:solidFill>
-                <a:latin typeface="Aptos" pitchFamily="34" charset="0"/>
-                <a:ea typeface="Aptos" pitchFamily="34" charset="-122"/>
-                <a:cs typeface="Aptos" pitchFamily="34" charset="-120"/>
-              </a:rPr>
-              <a:t>Which standards are used in your agency’s major data exchange workflows?</a:t>
+                  <a:srgbClr val="003A63"/>
+                </a:solidFill>
+                <a:latin typeface="Aptos" pitchFamily="34" charset="0"/>
+                <a:ea typeface="Aptos" pitchFamily="34" charset="-122"/>
+                <a:cs typeface="Aptos" pitchFamily="34" charset="-120"/>
+              </a:rPr>
+              <a:t>• Which standards are used in your agency’s major data exchange workflows?</a:t>
             </a:r>
             <a:endParaRPr lang="en-US" sz="2100" dirty="0"/>
           </a:p>
           <a:p>
+            <a:pPr indent="0" marL="0">
+              <a:buNone/>
+            </a:pPr>
             <a:r>
               <a:rPr lang="en-US" sz="2100" dirty="0">
                 <a:solidFill>
-                  <a:srgbClr val="17364A"/>
-                </a:solidFill>
-                <a:latin typeface="Aptos" pitchFamily="34" charset="0"/>
-                <a:ea typeface="Aptos" pitchFamily="34" charset="-122"/>
-                <a:cs typeface="Aptos" pitchFamily="34" charset="-120"/>
-              </a:rPr>
-              <a:t>Which workflows still depend on manual uploads or copy-paste processes?</a:t>
+                  <a:srgbClr val="003A63"/>
+                </a:solidFill>
+                <a:latin typeface="Aptos" pitchFamily="34" charset="0"/>
+                <a:ea typeface="Aptos" pitchFamily="34" charset="-122"/>
+                <a:cs typeface="Aptos" pitchFamily="34" charset="-120"/>
+              </a:rPr>
+              <a:t>• Which workflows still depend on manual uploads or copy-paste processes?</a:t>
             </a:r>
             <a:endParaRPr lang="en-US" sz="2100" dirty="0"/>
           </a:p>
           <a:p>
+            <a:pPr indent="0" marL="0">
+              <a:buNone/>
+            </a:pPr>
             <a:r>
               <a:rPr lang="en-US" sz="2100" dirty="0">
                 <a:solidFill>
-                  <a:srgbClr val="17364A"/>
-                </a:solidFill>
-                <a:latin typeface="Aptos" pitchFamily="34" charset="0"/>
-                <a:ea typeface="Aptos" pitchFamily="34" charset="-122"/>
-                <a:cs typeface="Aptos" pitchFamily="34" charset="-120"/>
-              </a:rPr>
-              <a:t>What vendor claims would need to be tested before implementation?</a:t>
+                  <a:srgbClr val="003A63"/>
+                </a:solidFill>
+                <a:latin typeface="Aptos" pitchFamily="34" charset="0"/>
+                <a:ea typeface="Aptos" pitchFamily="34" charset="-122"/>
+                <a:cs typeface="Aptos" pitchFamily="34" charset="-120"/>
+              </a:rPr>
+              <a:t>• What vendor claims would need to be tested before implementation?</a:t>
             </a:r>
             <a:endParaRPr lang="en-US" sz="2100" dirty="0"/>
           </a:p>
@@ -7712,17 +7829,17 @@
         </p:nvSpPr>
         <p:spPr>
           <a:xfrm>
-            <a:off x="7799832" y="1828800"/>
-            <a:ext cx="3145536" cy="685800"/>
-          </a:xfrm>
-          <a:prstGeom prst="rect">
-            <a:avLst/>
-          </a:prstGeom>
-          <a:noFill/>
-          <a:ln/>
-        </p:spPr>
-        <p:txBody>
-          <a:bodyPr wrap="square" lIns="0" tIns="0" rIns="0" bIns="0" rtlCol="0" anchor="t">
+            <a:off x="7799832" y="1801368"/>
+            <a:ext cx="3145536" cy="758952"/>
+          </a:xfrm>
+          <a:prstGeom prst="rect">
+            <a:avLst/>
+          </a:prstGeom>
+          <a:noFill/>
+          <a:ln/>
+        </p:spPr>
+        <p:txBody>
+          <a:bodyPr wrap="square" lIns="254" tIns="254" rIns="254" bIns="254" rtlCol="0" anchor="t">
             <a:normAutofit/>
           </a:bodyPr>
           <a:lstStyle/>
@@ -7731,7 +7848,7 @@
               <a:buNone/>
             </a:pPr>
             <a:r>
-              <a:rPr lang="en-US" sz="1550" dirty="0">
+              <a:rPr lang="en-US" sz="1320" dirty="0">
                 <a:solidFill>
                   <a:srgbClr val="17364A"/>
                 </a:solidFill>
@@ -7741,7 +7858,7 @@
               </a:rPr>
               <a:t>Which standards are used in your agency’s major data exchange workflows?</a:t>
             </a:r>
-            <a:endParaRPr lang="en-US" sz="1550" dirty="0"/>
+            <a:endParaRPr lang="en-US" sz="1320" dirty="0"/>
           </a:p>
         </p:txBody>
       </p:sp>
@@ -7829,13 +7946,16 @@
           <a:ln/>
         </p:spPr>
         <p:txBody>
-          <a:bodyPr wrap="square" lIns="254" tIns="254" rIns="254" bIns="254" rtlCol="0" anchor="t">
+          <a:bodyPr wrap="square" lIns="508" tIns="508" rIns="508" bIns="508" rtlCol="0" anchor="t">
             <a:normAutofit/>
           </a:bodyPr>
           <a:lstStyle/>
           <a:p>
-            <a:r>
-              <a:rPr lang="en-US" sz="1380" dirty="0">
+            <a:pPr indent="0" marL="0">
+              <a:buNone/>
+            </a:pPr>
+            <a:r>
+              <a:rPr lang="en-US" sz="1220" dirty="0">
                 <a:solidFill>
                   <a:srgbClr val="17364A"/>
                 </a:solidFill>
@@ -7843,13 +7963,16 @@
                 <a:ea typeface="Aptos" pitchFamily="34" charset="-122"/>
                 <a:cs typeface="Aptos" pitchFamily="34" charset="-120"/>
               </a:rPr>
-              <a:t>Which standards are used in your agency’s major data exchange workflows?</a:t>
-            </a:r>
-            <a:endParaRPr lang="en-US" sz="1380" dirty="0"/>
-          </a:p>
-          <a:p>
-            <a:r>
-              <a:rPr lang="en-US" sz="1380" dirty="0">
+              <a:t>Which standards are used in your agency’s major data exchange.</a:t>
+            </a:r>
+            <a:endParaRPr lang="en-US" sz="1220" dirty="0"/>
+          </a:p>
+          <a:p>
+            <a:pPr indent="0" marL="0">
+              <a:buNone/>
+            </a:pPr>
+            <a:r>
+              <a:rPr lang="en-US" sz="1220" dirty="0">
                 <a:solidFill>
                   <a:srgbClr val="17364A"/>
                 </a:solidFill>
@@ -7857,13 +7980,16 @@
                 <a:ea typeface="Aptos" pitchFamily="34" charset="-122"/>
                 <a:cs typeface="Aptos" pitchFamily="34" charset="-120"/>
               </a:rPr>
-              <a:t>Which workflows still depend on manual uploads or copy-paste processes?</a:t>
-            </a:r>
-            <a:endParaRPr lang="en-US" sz="1380" dirty="0"/>
-          </a:p>
-          <a:p>
-            <a:r>
-              <a:rPr lang="en-US" sz="1380" dirty="0">
+              <a:t>Which workflows still depend on manual uploads or copy-paste.</a:t>
+            </a:r>
+            <a:endParaRPr lang="en-US" sz="1220" dirty="0"/>
+          </a:p>
+          <a:p>
+            <a:pPr indent="0" marL="0">
+              <a:buNone/>
+            </a:pPr>
+            <a:r>
+              <a:rPr lang="en-US" sz="1220" dirty="0">
                 <a:solidFill>
                   <a:srgbClr val="17364A"/>
                 </a:solidFill>
@@ -7873,7 +7999,7 @@
               </a:rPr>
               <a:t>What vendor claims would need to be tested before implementation?</a:t>
             </a:r>
-            <a:endParaRPr lang="en-US" sz="1380" dirty="0"/>
+            <a:endParaRPr lang="en-US" sz="1220" dirty="0"/>
           </a:p>
         </p:txBody>
       </p:sp>
@@ -7951,17 +8077,17 @@
         </p:nvSpPr>
         <p:spPr>
           <a:xfrm>
-            <a:off x="7799832" y="5001768"/>
-            <a:ext cx="3145536" cy="502920"/>
-          </a:xfrm>
-          <a:prstGeom prst="rect">
-            <a:avLst/>
-          </a:prstGeom>
-          <a:noFill/>
-          <a:ln/>
-        </p:spPr>
-        <p:txBody>
-          <a:bodyPr wrap="square" lIns="0" tIns="0" rIns="0" bIns="0" rtlCol="0" anchor="t">
+            <a:off x="7799832" y="4974336"/>
+            <a:ext cx="3145536" cy="576072"/>
+          </a:xfrm>
+          <a:prstGeom prst="rect">
+            <a:avLst/>
+          </a:prstGeom>
+          <a:noFill/>
+          <a:ln/>
+        </p:spPr>
+        <p:txBody>
+          <a:bodyPr wrap="square" lIns="254" tIns="254" rIns="254" bIns="254" rtlCol="0" anchor="t">
             <a:normAutofit/>
           </a:bodyPr>
           <a:lstStyle/>
@@ -7970,7 +8096,7 @@
               <a:buNone/>
             </a:pPr>
             <a:r>
-              <a:rPr lang="en-US" sz="1550" dirty="0">
+              <a:rPr lang="en-US" sz="1320" dirty="0">
                 <a:solidFill>
                   <a:srgbClr val="17364A"/>
                 </a:solidFill>
@@ -7978,9 +8104,9 @@
                 <a:ea typeface="Aptos" pitchFamily="34" charset="-122"/>
                 <a:cs typeface="Aptos" pitchFamily="34" charset="-120"/>
               </a:rPr>
-              <a:t>Connect the concept to public health purpose, responsible use, required safeguards, documentation, and the next action a department should take.</a:t>
-            </a:r>
-            <a:endParaRPr lang="en-US" sz="1550" dirty="0"/>
+              <a:t>Connect the concept to public health purpose, responsible use, required safeguards, documentation, and the next action a.</a:t>
+            </a:r>
+            <a:endParaRPr lang="en-US" sz="1320" dirty="0"/>
           </a:p>
         </p:txBody>
       </p:sp>
@@ -8281,35 +8407,41 @@
           <a:ln/>
         </p:spPr>
         <p:txBody>
-          <a:bodyPr wrap="square" lIns="635" tIns="635" rIns="635" bIns="635" rtlCol="0" anchor="t">
+          <a:bodyPr wrap="square" lIns="1016" tIns="1016" rIns="1016" bIns="1016" rtlCol="0" anchor="t">
             <a:normAutofit/>
           </a:bodyPr>
           <a:lstStyle/>
           <a:p>
+            <a:pPr indent="0" marL="0">
+              <a:buNone/>
+            </a:pPr>
             <a:r>
               <a:rPr lang="en-US" sz="2100" dirty="0">
                 <a:solidFill>
-                  <a:srgbClr val="17364A"/>
-                </a:solidFill>
-                <a:latin typeface="Aptos" pitchFamily="34" charset="0"/>
-                <a:ea typeface="Aptos" pitchFamily="34" charset="-122"/>
-                <a:cs typeface="Aptos" pitchFamily="34" charset="-120"/>
-              </a:rPr>
-              <a:t>Which terminology standards are required for the workflow?</a:t>
+                  <a:srgbClr val="003A63"/>
+                </a:solidFill>
+                <a:latin typeface="Aptos" pitchFamily="34" charset="0"/>
+                <a:ea typeface="Aptos" pitchFamily="34" charset="-122"/>
+                <a:cs typeface="Aptos" pitchFamily="34" charset="-120"/>
+              </a:rPr>
+              <a:t>• Which terminology standards are required for the workflow?</a:t>
             </a:r>
             <a:endParaRPr lang="en-US" sz="2100" dirty="0"/>
           </a:p>
           <a:p>
+            <a:pPr indent="0" marL="0">
+              <a:buNone/>
+            </a:pPr>
             <a:r>
               <a:rPr lang="en-US" sz="2100" dirty="0">
                 <a:solidFill>
-                  <a:srgbClr val="17364A"/>
-                </a:solidFill>
-                <a:latin typeface="Aptos" pitchFamily="34" charset="0"/>
-                <a:ea typeface="Aptos" pitchFamily="34" charset="-122"/>
-                <a:cs typeface="Aptos" pitchFamily="34" charset="-120"/>
-              </a:rPr>
-              <a:t>How would interoperability gaps affect AI outputs or equity?</a:t>
+                  <a:srgbClr val="003A63"/>
+                </a:solidFill>
+                <a:latin typeface="Aptos" pitchFamily="34" charset="0"/>
+                <a:ea typeface="Aptos" pitchFamily="34" charset="-122"/>
+                <a:cs typeface="Aptos" pitchFamily="34" charset="-120"/>
+              </a:rPr>
+              <a:t>• How would interoperability gaps affect AI outputs or equity?</a:t>
             </a:r>
             <a:endParaRPr lang="en-US" sz="2100" dirty="0"/>
           </a:p>
@@ -8389,17 +8521,17 @@
         </p:nvSpPr>
         <p:spPr>
           <a:xfrm>
-            <a:off x="7799832" y="1828800"/>
-            <a:ext cx="3145536" cy="685800"/>
-          </a:xfrm>
-          <a:prstGeom prst="rect">
-            <a:avLst/>
-          </a:prstGeom>
-          <a:noFill/>
-          <a:ln/>
-        </p:spPr>
-        <p:txBody>
-          <a:bodyPr wrap="square" lIns="0" tIns="0" rIns="0" bIns="0" rtlCol="0" anchor="t">
+            <a:off x="7799832" y="1801368"/>
+            <a:ext cx="3145536" cy="758952"/>
+          </a:xfrm>
+          <a:prstGeom prst="rect">
+            <a:avLst/>
+          </a:prstGeom>
+          <a:noFill/>
+          <a:ln/>
+        </p:spPr>
+        <p:txBody>
+          <a:bodyPr wrap="square" lIns="254" tIns="254" rIns="254" bIns="254" rtlCol="0" anchor="t">
             <a:normAutofit/>
           </a:bodyPr>
           <a:lstStyle/>
@@ -8408,7 +8540,7 @@
               <a:buNone/>
             </a:pPr>
             <a:r>
-              <a:rPr lang="en-US" sz="1550" dirty="0">
+              <a:rPr lang="en-US" sz="1320" dirty="0">
                 <a:solidFill>
                   <a:srgbClr val="17364A"/>
                 </a:solidFill>
@@ -8418,7 +8550,7 @@
               </a:rPr>
               <a:t>Which terminology standards are required for the workflow?</a:t>
             </a:r>
-            <a:endParaRPr lang="en-US" sz="1550" dirty="0"/>
+            <a:endParaRPr lang="en-US" sz="1320" dirty="0"/>
           </a:p>
         </p:txBody>
       </p:sp>
@@ -8506,13 +8638,16 @@
           <a:ln/>
         </p:spPr>
         <p:txBody>
-          <a:bodyPr wrap="square" lIns="254" tIns="254" rIns="254" bIns="254" rtlCol="0" anchor="t">
+          <a:bodyPr wrap="square" lIns="508" tIns="508" rIns="508" bIns="508" rtlCol="0" anchor="t">
             <a:normAutofit/>
           </a:bodyPr>
           <a:lstStyle/>
           <a:p>
-            <a:r>
-              <a:rPr lang="en-US" sz="1380" dirty="0">
+            <a:pPr indent="0" marL="0">
+              <a:buNone/>
+            </a:pPr>
+            <a:r>
+              <a:rPr lang="en-US" sz="1220" dirty="0">
                 <a:solidFill>
                   <a:srgbClr val="17364A"/>
                 </a:solidFill>
@@ -8522,11 +8657,14 @@
               </a:rPr>
               <a:t>Which terminology standards are required for the workflow?</a:t>
             </a:r>
-            <a:endParaRPr lang="en-US" sz="1380" dirty="0"/>
-          </a:p>
-          <a:p>
-            <a:r>
-              <a:rPr lang="en-US" sz="1380" dirty="0">
+            <a:endParaRPr lang="en-US" sz="1220" dirty="0"/>
+          </a:p>
+          <a:p>
+            <a:pPr indent="0" marL="0">
+              <a:buNone/>
+            </a:pPr>
+            <a:r>
+              <a:rPr lang="en-US" sz="1220" dirty="0">
                 <a:solidFill>
                   <a:srgbClr val="17364A"/>
                 </a:solidFill>
@@ -8536,7 +8674,7 @@
               </a:rPr>
               <a:t>How would interoperability gaps affect AI outputs or equity?</a:t>
             </a:r>
-            <a:endParaRPr lang="en-US" sz="1380" dirty="0"/>
+            <a:endParaRPr lang="en-US" sz="1220" dirty="0"/>
           </a:p>
         </p:txBody>
       </p:sp>
@@ -8614,17 +8752,17 @@
         </p:nvSpPr>
         <p:spPr>
           <a:xfrm>
-            <a:off x="7799832" y="5001768"/>
-            <a:ext cx="3145536" cy="502920"/>
-          </a:xfrm>
-          <a:prstGeom prst="rect">
-            <a:avLst/>
-          </a:prstGeom>
-          <a:noFill/>
-          <a:ln/>
-        </p:spPr>
-        <p:txBody>
-          <a:bodyPr wrap="square" lIns="0" tIns="0" rIns="0" bIns="0" rtlCol="0" anchor="t">
+            <a:off x="7799832" y="4974336"/>
+            <a:ext cx="3145536" cy="576072"/>
+          </a:xfrm>
+          <a:prstGeom prst="rect">
+            <a:avLst/>
+          </a:prstGeom>
+          <a:noFill/>
+          <a:ln/>
+        </p:spPr>
+        <p:txBody>
+          <a:bodyPr wrap="square" lIns="254" tIns="254" rIns="254" bIns="254" rtlCol="0" anchor="t">
             <a:normAutofit/>
           </a:bodyPr>
           <a:lstStyle/>
@@ -8633,7 +8771,7 @@
               <a:buNone/>
             </a:pPr>
             <a:r>
-              <a:rPr lang="en-US" sz="1550" dirty="0">
+              <a:rPr lang="en-US" sz="1320" dirty="0">
                 <a:solidFill>
                   <a:srgbClr val="17364A"/>
                 </a:solidFill>
@@ -8641,9 +8779,9 @@
                 <a:ea typeface="Aptos" pitchFamily="34" charset="-122"/>
                 <a:cs typeface="Aptos" pitchFamily="34" charset="-120"/>
               </a:rPr>
-              <a:t>Connect the concept to public health purpose, responsible use, required safeguards, documentation, and the next action a department should take.</a:t>
-            </a:r>
-            <a:endParaRPr lang="en-US" sz="1550" dirty="0"/>
+              <a:t>Connect the concept to public health purpose, responsible use, required safeguards, documentation, and the next action a.</a:t>
+            </a:r>
+            <a:endParaRPr lang="en-US" sz="1320" dirty="0"/>
           </a:p>
         </p:txBody>
       </p:sp>
@@ -8944,49 +9082,58 @@
           <a:ln/>
         </p:spPr>
         <p:txBody>
-          <a:bodyPr wrap="square" lIns="635" tIns="635" rIns="635" bIns="635" rtlCol="0" anchor="t">
+          <a:bodyPr wrap="square" lIns="1016" tIns="1016" rIns="1016" bIns="1016" rtlCol="0" anchor="t">
             <a:normAutofit/>
           </a:bodyPr>
           <a:lstStyle/>
           <a:p>
+            <a:pPr indent="0" marL="0">
+              <a:buNone/>
+            </a:pPr>
             <a:r>
               <a:rPr lang="en-US" sz="2100" dirty="0">
                 <a:solidFill>
-                  <a:srgbClr val="17364A"/>
-                </a:solidFill>
-                <a:latin typeface="Aptos" pitchFamily="34" charset="0"/>
-                <a:ea typeface="Aptos" pitchFamily="34" charset="-122"/>
-                <a:cs typeface="Aptos" pitchFamily="34" charset="-120"/>
-              </a:rPr>
-              <a:t>Create an interoperability review checklist for one proposed AI-supported workflow.</a:t>
+                  <a:srgbClr val="003A63"/>
+                </a:solidFill>
+                <a:latin typeface="Aptos" pitchFamily="34" charset="0"/>
+                <a:ea typeface="Aptos" pitchFamily="34" charset="-122"/>
+                <a:cs typeface="Aptos" pitchFamily="34" charset="-120"/>
+              </a:rPr>
+              <a:t>• Create an interoperability review checklist for one proposed AI-supported workflow.</a:t>
             </a:r>
             <a:endParaRPr lang="en-US" sz="2100" dirty="0"/>
           </a:p>
           <a:p>
+            <a:pPr indent="0" marL="0">
+              <a:buNone/>
+            </a:pPr>
             <a:r>
               <a:rPr lang="en-US" sz="2100" dirty="0">
                 <a:solidFill>
-                  <a:srgbClr val="17364A"/>
-                </a:solidFill>
-                <a:latin typeface="Aptos" pitchFamily="34" charset="0"/>
-                <a:ea typeface="Aptos" pitchFamily="34" charset="-122"/>
-                <a:cs typeface="Aptos" pitchFamily="34" charset="-120"/>
-              </a:rPr>
-              <a:t>Identify the sending and receiving systems, exchange standard, required data elements, terminology.</a:t>
+                  <a:srgbClr val="003A63"/>
+                </a:solidFill>
+                <a:latin typeface="Aptos" pitchFamily="34" charset="0"/>
+                <a:ea typeface="Aptos" pitchFamily="34" charset="-122"/>
+                <a:cs typeface="Aptos" pitchFamily="34" charset="-120"/>
+              </a:rPr>
+              <a:t>• Identify the sending and receiving systems, exchange standard, required data elements,.</a:t>
             </a:r>
             <a:endParaRPr lang="en-US" sz="2100" dirty="0"/>
           </a:p>
           <a:p>
+            <a:pPr indent="0" marL="0">
+              <a:buNone/>
+            </a:pPr>
             <a:r>
               <a:rPr lang="en-US" sz="2100" dirty="0">
                 <a:solidFill>
-                  <a:srgbClr val="17364A"/>
-                </a:solidFill>
-                <a:latin typeface="Aptos" pitchFamily="34" charset="0"/>
-                <a:ea typeface="Aptos" pitchFamily="34" charset="-122"/>
-                <a:cs typeface="Aptos" pitchFamily="34" charset="-120"/>
-              </a:rPr>
-              <a:t>Include at least one test scenario that would show whether the exchange supports the public health use.</a:t>
+                  <a:srgbClr val="003A63"/>
+                </a:solidFill>
+                <a:latin typeface="Aptos" pitchFamily="34" charset="0"/>
+                <a:ea typeface="Aptos" pitchFamily="34" charset="-122"/>
+                <a:cs typeface="Aptos" pitchFamily="34" charset="-120"/>
+              </a:rPr>
+              <a:t>• Include at least one test scenario that would show whether the exchange supports the public.</a:t>
             </a:r>
             <a:endParaRPr lang="en-US" sz="2100" dirty="0"/>
           </a:p>
@@ -9066,17 +9213,17 @@
         </p:nvSpPr>
         <p:spPr>
           <a:xfrm>
-            <a:off x="7799832" y="1828800"/>
-            <a:ext cx="3145536" cy="685800"/>
-          </a:xfrm>
-          <a:prstGeom prst="rect">
-            <a:avLst/>
-          </a:prstGeom>
-          <a:noFill/>
-          <a:ln/>
-        </p:spPr>
-        <p:txBody>
-          <a:bodyPr wrap="square" lIns="0" tIns="0" rIns="0" bIns="0" rtlCol="0" anchor="t">
+            <a:off x="7799832" y="1801368"/>
+            <a:ext cx="3145536" cy="758952"/>
+          </a:xfrm>
+          <a:prstGeom prst="rect">
+            <a:avLst/>
+          </a:prstGeom>
+          <a:noFill/>
+          <a:ln/>
+        </p:spPr>
+        <p:txBody>
+          <a:bodyPr wrap="square" lIns="254" tIns="254" rIns="254" bIns="254" rtlCol="0" anchor="t">
             <a:normAutofit/>
           </a:bodyPr>
           <a:lstStyle/>
@@ -9085,7 +9232,7 @@
               <a:buNone/>
             </a:pPr>
             <a:r>
-              <a:rPr lang="en-US" sz="1550" dirty="0">
+              <a:rPr lang="en-US" sz="1320" dirty="0">
                 <a:solidFill>
                   <a:srgbClr val="17364A"/>
                 </a:solidFill>
@@ -9095,7 +9242,7 @@
               </a:rPr>
               <a:t>Create an interoperability review checklist for one proposed AI-supported workflow.</a:t>
             </a:r>
-            <a:endParaRPr lang="en-US" sz="1550" dirty="0"/>
+            <a:endParaRPr lang="en-US" sz="1320" dirty="0"/>
           </a:p>
         </p:txBody>
       </p:sp>
@@ -9183,13 +9330,16 @@
           <a:ln/>
         </p:spPr>
         <p:txBody>
-          <a:bodyPr wrap="square" lIns="254" tIns="254" rIns="254" bIns="254" rtlCol="0" anchor="t">
+          <a:bodyPr wrap="square" lIns="508" tIns="508" rIns="508" bIns="508" rtlCol="0" anchor="t">
             <a:normAutofit/>
           </a:bodyPr>
           <a:lstStyle/>
           <a:p>
-            <a:r>
-              <a:rPr lang="en-US" sz="1380" dirty="0">
+            <a:pPr indent="0" marL="0">
+              <a:buNone/>
+            </a:pPr>
+            <a:r>
+              <a:rPr lang="en-US" sz="1220" dirty="0">
                 <a:solidFill>
                   <a:srgbClr val="17364A"/>
                 </a:solidFill>
@@ -9197,13 +9347,16 @@
                 <a:ea typeface="Aptos" pitchFamily="34" charset="-122"/>
                 <a:cs typeface="Aptos" pitchFamily="34" charset="-120"/>
               </a:rPr>
-              <a:t>Identify the sending and receiving systems, exchange standard, required data elements,.</a:t>
-            </a:r>
-            <a:endParaRPr lang="en-US" sz="1380" dirty="0"/>
-          </a:p>
-          <a:p>
-            <a:r>
-              <a:rPr lang="en-US" sz="1380" dirty="0">
+              <a:t>Identify the sending and receiving systems, exchange standard,.</a:t>
+            </a:r>
+            <a:endParaRPr lang="en-US" sz="1220" dirty="0"/>
+          </a:p>
+          <a:p>
+            <a:pPr indent="0" marL="0">
+              <a:buNone/>
+            </a:pPr>
+            <a:r>
+              <a:rPr lang="en-US" sz="1220" dirty="0">
                 <a:solidFill>
                   <a:srgbClr val="17364A"/>
                 </a:solidFill>
@@ -9211,9 +9364,9 @@
                 <a:ea typeface="Aptos" pitchFamily="34" charset="-122"/>
                 <a:cs typeface="Aptos" pitchFamily="34" charset="-120"/>
               </a:rPr>
-              <a:t>Include at least one test scenario that would show whether the exchange supports the.</a:t>
-            </a:r>
-            <a:endParaRPr lang="en-US" sz="1380" dirty="0"/>
+              <a:t>Include at least one test scenario that would show whether the.</a:t>
+            </a:r>
+            <a:endParaRPr lang="en-US" sz="1220" dirty="0"/>
           </a:p>
         </p:txBody>
       </p:sp>
@@ -9291,17 +9444,17 @@
         </p:nvSpPr>
         <p:spPr>
           <a:xfrm>
-            <a:off x="7799832" y="5001768"/>
-            <a:ext cx="3145536" cy="502920"/>
-          </a:xfrm>
-          <a:prstGeom prst="rect">
-            <a:avLst/>
-          </a:prstGeom>
-          <a:noFill/>
-          <a:ln/>
-        </p:spPr>
-        <p:txBody>
-          <a:bodyPr wrap="square" lIns="0" tIns="0" rIns="0" bIns="0" rtlCol="0" anchor="t">
+            <a:off x="7799832" y="4974336"/>
+            <a:ext cx="3145536" cy="576072"/>
+          </a:xfrm>
+          <a:prstGeom prst="rect">
+            <a:avLst/>
+          </a:prstGeom>
+          <a:noFill/>
+          <a:ln/>
+        </p:spPr>
+        <p:txBody>
+          <a:bodyPr wrap="square" lIns="254" tIns="254" rIns="254" bIns="254" rtlCol="0" anchor="t">
             <a:normAutofit/>
           </a:bodyPr>
           <a:lstStyle/>
@@ -9310,7 +9463,7 @@
               <a:buNone/>
             </a:pPr>
             <a:r>
-              <a:rPr lang="en-US" sz="1550" dirty="0">
+              <a:rPr lang="en-US" sz="1320" dirty="0">
                 <a:solidFill>
                   <a:srgbClr val="17364A"/>
                 </a:solidFill>
@@ -9318,9 +9471,9 @@
                 <a:ea typeface="Aptos" pitchFamily="34" charset="-122"/>
                 <a:cs typeface="Aptos" pitchFamily="34" charset="-120"/>
               </a:rPr>
-              <a:t>Use the assignment to test whether you can explain the concept, apply it to a realistic public health situation, and identify what would need review before the work moves forward.</a:t>
-            </a:r>
-            <a:endParaRPr lang="en-US" sz="1550" dirty="0"/>
+              <a:t>Use the assignment to test whether you can explain the concept, apply it to a realistic public health situation, and.</a:t>
+            </a:r>
+            <a:endParaRPr lang="en-US" sz="1320" dirty="0"/>
           </a:p>
         </p:txBody>
       </p:sp>
@@ -9621,49 +9774,58 @@
           <a:ln/>
         </p:spPr>
         <p:txBody>
-          <a:bodyPr wrap="square" lIns="635" tIns="635" rIns="635" bIns="635" rtlCol="0" anchor="t">
+          <a:bodyPr wrap="square" lIns="1016" tIns="1016" rIns="1016" bIns="1016" rtlCol="0" anchor="t">
             <a:normAutofit/>
           </a:bodyPr>
           <a:lstStyle/>
           <a:p>
+            <a:pPr indent="0" marL="0">
+              <a:buNone/>
+            </a:pPr>
             <a:r>
               <a:rPr lang="en-US" sz="2100" dirty="0">
                 <a:solidFill>
-                  <a:srgbClr val="17364A"/>
-                </a:solidFill>
-                <a:latin typeface="Aptos" pitchFamily="34" charset="0"/>
-                <a:ea typeface="Aptos" pitchFamily="34" charset="-122"/>
-                <a:cs typeface="Aptos" pitchFamily="34" charset="-120"/>
-              </a:rPr>
-              <a:t>Interoperability checklist</a:t>
+                  <a:srgbClr val="003A63"/>
+                </a:solidFill>
+                <a:latin typeface="Aptos" pitchFamily="34" charset="0"/>
+                <a:ea typeface="Aptos" pitchFamily="34" charset="-122"/>
+                <a:cs typeface="Aptos" pitchFamily="34" charset="-120"/>
+              </a:rPr>
+              <a:t>• Interoperability checklist</a:t>
             </a:r>
             <a:endParaRPr lang="en-US" sz="2100" dirty="0"/>
           </a:p>
           <a:p>
+            <a:pPr indent="0" marL="0">
+              <a:buNone/>
+            </a:pPr>
             <a:r>
               <a:rPr lang="en-US" sz="2100" dirty="0">
                 <a:solidFill>
-                  <a:srgbClr val="17364A"/>
-                </a:solidFill>
-                <a:latin typeface="Aptos" pitchFamily="34" charset="0"/>
-                <a:ea typeface="Aptos" pitchFamily="34" charset="-122"/>
-                <a:cs typeface="Aptos" pitchFamily="34" charset="-120"/>
-              </a:rPr>
-              <a:t>Data exchange diagram</a:t>
+                  <a:srgbClr val="003A63"/>
+                </a:solidFill>
+                <a:latin typeface="Aptos" pitchFamily="34" charset="0"/>
+                <a:ea typeface="Aptos" pitchFamily="34" charset="-122"/>
+                <a:cs typeface="Aptos" pitchFamily="34" charset="-120"/>
+              </a:rPr>
+              <a:t>• Data exchange diagram</a:t>
             </a:r>
             <a:endParaRPr lang="en-US" sz="2100" dirty="0"/>
           </a:p>
           <a:p>
+            <a:pPr indent="0" marL="0">
+              <a:buNone/>
+            </a:pPr>
             <a:r>
               <a:rPr lang="en-US" sz="2100" dirty="0">
                 <a:solidFill>
-                  <a:srgbClr val="17364A"/>
-                </a:solidFill>
-                <a:latin typeface="Aptos" pitchFamily="34" charset="0"/>
-                <a:ea typeface="Aptos" pitchFamily="34" charset="-122"/>
-                <a:cs typeface="Aptos" pitchFamily="34" charset="-120"/>
-              </a:rPr>
-              <a:t>Vendor questions</a:t>
+                  <a:srgbClr val="003A63"/>
+                </a:solidFill>
+                <a:latin typeface="Aptos" pitchFamily="34" charset="0"/>
+                <a:ea typeface="Aptos" pitchFamily="34" charset="-122"/>
+                <a:cs typeface="Aptos" pitchFamily="34" charset="-120"/>
+              </a:rPr>
+              <a:t>• Vendor questions</a:t>
             </a:r>
             <a:endParaRPr lang="en-US" sz="2100" dirty="0"/>
           </a:p>
@@ -9743,17 +9905,17 @@
         </p:nvSpPr>
         <p:spPr>
           <a:xfrm>
-            <a:off x="7799832" y="1828800"/>
-            <a:ext cx="3145536" cy="685800"/>
-          </a:xfrm>
-          <a:prstGeom prst="rect">
-            <a:avLst/>
-          </a:prstGeom>
-          <a:noFill/>
-          <a:ln/>
-        </p:spPr>
-        <p:txBody>
-          <a:bodyPr wrap="square" lIns="0" tIns="0" rIns="0" bIns="0" rtlCol="0" anchor="t">
+            <a:off x="7799832" y="1801368"/>
+            <a:ext cx="3145536" cy="758952"/>
+          </a:xfrm>
+          <a:prstGeom prst="rect">
+            <a:avLst/>
+          </a:prstGeom>
+          <a:noFill/>
+          <a:ln/>
+        </p:spPr>
+        <p:txBody>
+          <a:bodyPr wrap="square" lIns="254" tIns="254" rIns="254" bIns="254" rtlCol="0" anchor="t">
             <a:normAutofit/>
           </a:bodyPr>
           <a:lstStyle/>
@@ -9762,7 +9924,7 @@
               <a:buNone/>
             </a:pPr>
             <a:r>
-              <a:rPr lang="en-US" sz="1550" dirty="0">
+              <a:rPr lang="en-US" sz="1320" dirty="0">
                 <a:solidFill>
                   <a:srgbClr val="17364A"/>
                 </a:solidFill>
@@ -9772,7 +9934,7 @@
               </a:rPr>
               <a:t>Interoperability checklist</a:t>
             </a:r>
-            <a:endParaRPr lang="en-US" sz="1550" dirty="0"/>
+            <a:endParaRPr lang="en-US" sz="1320" dirty="0"/>
           </a:p>
         </p:txBody>
       </p:sp>
@@ -9860,13 +10022,16 @@
           <a:ln/>
         </p:spPr>
         <p:txBody>
-          <a:bodyPr wrap="square" lIns="254" tIns="254" rIns="254" bIns="254" rtlCol="0" anchor="t">
+          <a:bodyPr wrap="square" lIns="508" tIns="508" rIns="508" bIns="508" rtlCol="0" anchor="t">
             <a:normAutofit/>
           </a:bodyPr>
           <a:lstStyle/>
           <a:p>
-            <a:r>
-              <a:rPr lang="en-US" sz="1380" dirty="0">
+            <a:pPr indent="0" marL="0">
+              <a:buNone/>
+            </a:pPr>
+            <a:r>
+              <a:rPr lang="en-US" sz="1220" dirty="0">
                 <a:solidFill>
                   <a:srgbClr val="17364A"/>
                 </a:solidFill>
@@ -9876,11 +10041,14 @@
               </a:rPr>
               <a:t>Interoperability checklist</a:t>
             </a:r>
-            <a:endParaRPr lang="en-US" sz="1380" dirty="0"/>
-          </a:p>
-          <a:p>
-            <a:r>
-              <a:rPr lang="en-US" sz="1380" dirty="0">
+            <a:endParaRPr lang="en-US" sz="1220" dirty="0"/>
+          </a:p>
+          <a:p>
+            <a:pPr indent="0" marL="0">
+              <a:buNone/>
+            </a:pPr>
+            <a:r>
+              <a:rPr lang="en-US" sz="1220" dirty="0">
                 <a:solidFill>
                   <a:srgbClr val="17364A"/>
                 </a:solidFill>
@@ -9890,11 +10058,14 @@
               </a:rPr>
               <a:t>Data exchange diagram</a:t>
             </a:r>
-            <a:endParaRPr lang="en-US" sz="1380" dirty="0"/>
-          </a:p>
-          <a:p>
-            <a:r>
-              <a:rPr lang="en-US" sz="1380" dirty="0">
+            <a:endParaRPr lang="en-US" sz="1220" dirty="0"/>
+          </a:p>
+          <a:p>
+            <a:pPr indent="0" marL="0">
+              <a:buNone/>
+            </a:pPr>
+            <a:r>
+              <a:rPr lang="en-US" sz="1220" dirty="0">
                 <a:solidFill>
                   <a:srgbClr val="17364A"/>
                 </a:solidFill>
@@ -9904,7 +10075,7 @@
               </a:rPr>
               <a:t>Vendor questions</a:t>
             </a:r>
-            <a:endParaRPr lang="en-US" sz="1380" dirty="0"/>
+            <a:endParaRPr lang="en-US" sz="1220" dirty="0"/>
           </a:p>
         </p:txBody>
       </p:sp>
@@ -9982,17 +10153,17 @@
         </p:nvSpPr>
         <p:spPr>
           <a:xfrm>
-            <a:off x="7799832" y="5001768"/>
-            <a:ext cx="3145536" cy="502920"/>
-          </a:xfrm>
-          <a:prstGeom prst="rect">
-            <a:avLst/>
-          </a:prstGeom>
-          <a:noFill/>
-          <a:ln/>
-        </p:spPr>
-        <p:txBody>
-          <a:bodyPr wrap="square" lIns="0" tIns="0" rIns="0" bIns="0" rtlCol="0" anchor="t">
+            <a:off x="7799832" y="4974336"/>
+            <a:ext cx="3145536" cy="576072"/>
+          </a:xfrm>
+          <a:prstGeom prst="rect">
+            <a:avLst/>
+          </a:prstGeom>
+          <a:noFill/>
+          <a:ln/>
+        </p:spPr>
+        <p:txBody>
+          <a:bodyPr wrap="square" lIns="254" tIns="254" rIns="254" bIns="254" rtlCol="0" anchor="t">
             <a:normAutofit/>
           </a:bodyPr>
           <a:lstStyle/>
@@ -10001,7 +10172,7 @@
               <a:buNone/>
             </a:pPr>
             <a:r>
-              <a:rPr lang="en-US" sz="1550" dirty="0">
+              <a:rPr lang="en-US" sz="1320" dirty="0">
                 <a:solidFill>
                   <a:srgbClr val="17364A"/>
                 </a:solidFill>
@@ -10009,9 +10180,9 @@
                 <a:ea typeface="Aptos" pitchFamily="34" charset="-122"/>
                 <a:cs typeface="Aptos" pitchFamily="34" charset="-120"/>
               </a:rPr>
-              <a:t>Connect the concept to public health purpose, responsible use, required safeguards, documentation, and the next action a department should take.</a:t>
-            </a:r>
-            <a:endParaRPr lang="en-US" sz="1550" dirty="0"/>
+              <a:t>Connect the concept to public health purpose, responsible use, required safeguards, documentation, and the next action a.</a:t>
+            </a:r>
+            <a:endParaRPr lang="en-US" sz="1320" dirty="0"/>
           </a:p>
         </p:txBody>
       </p:sp>
@@ -10312,49 +10483,58 @@
           <a:ln/>
         </p:spPr>
         <p:txBody>
-          <a:bodyPr wrap="square" lIns="635" tIns="635" rIns="635" bIns="635" rtlCol="0" anchor="t">
+          <a:bodyPr wrap="square" lIns="1016" tIns="1016" rIns="1016" bIns="1016" rtlCol="0" anchor="t">
             <a:normAutofit/>
           </a:bodyPr>
           <a:lstStyle/>
           <a:p>
+            <a:pPr indent="0" marL="0">
+              <a:buNone/>
+            </a:pPr>
             <a:r>
               <a:rPr lang="en-US" sz="2100" dirty="0">
                 <a:solidFill>
-                  <a:srgbClr val="17364A"/>
-                </a:solidFill>
-                <a:latin typeface="Aptos" pitchFamily="34" charset="0"/>
-                <a:ea typeface="Aptos" pitchFamily="34" charset="-122"/>
-                <a:cs typeface="Aptos" pitchFamily="34" charset="-120"/>
-              </a:rPr>
-              <a:t>Public health AI depends on the ability of systems to exchange and interpret data.</a:t>
+                  <a:srgbClr val="003A63"/>
+                </a:solidFill>
+                <a:latin typeface="Aptos" pitchFamily="34" charset="0"/>
+                <a:ea typeface="Aptos" pitchFamily="34" charset="-122"/>
+                <a:cs typeface="Aptos" pitchFamily="34" charset="-120"/>
+              </a:rPr>
+              <a:t>• Public health AI depends on the ability of systems to exchange and interpret data.</a:t>
             </a:r>
             <a:endParaRPr lang="en-US" sz="2100" dirty="0"/>
           </a:p>
           <a:p>
+            <a:pPr indent="0" marL="0">
+              <a:buNone/>
+            </a:pPr>
             <a:r>
               <a:rPr lang="en-US" sz="2100" dirty="0">
                 <a:solidFill>
-                  <a:srgbClr val="17364A"/>
-                </a:solidFill>
-                <a:latin typeface="Aptos" pitchFamily="34" charset="0"/>
-                <a:ea typeface="Aptos" pitchFamily="34" charset="-122"/>
-                <a:cs typeface="Aptos" pitchFamily="34" charset="-120"/>
-              </a:rPr>
-              <a:t>Interoperability is the discipline that makes this exchange possible across EHRs, laboratories, HIEs, IISs,.</a:t>
+                  <a:srgbClr val="003A63"/>
+                </a:solidFill>
+                <a:latin typeface="Aptos" pitchFamily="34" charset="0"/>
+                <a:ea typeface="Aptos" pitchFamily="34" charset="-122"/>
+                <a:cs typeface="Aptos" pitchFamily="34" charset="-120"/>
+              </a:rPr>
+              <a:t>• Interoperability is the discipline that makes this exchange possible across EHRs,.</a:t>
             </a:r>
             <a:endParaRPr lang="en-US" sz="2100" dirty="0"/>
           </a:p>
           <a:p>
+            <a:pPr indent="0" marL="0">
+              <a:buNone/>
+            </a:pPr>
             <a:r>
               <a:rPr lang="en-US" sz="2100" dirty="0">
                 <a:solidFill>
-                  <a:srgbClr val="17364A"/>
-                </a:solidFill>
-                <a:latin typeface="Aptos" pitchFamily="34" charset="0"/>
-                <a:ea typeface="Aptos" pitchFamily="34" charset="-122"/>
-                <a:cs typeface="Aptos" pitchFamily="34" charset="-120"/>
-              </a:rPr>
-              <a:t>This module introduces the major standards that public health staff encounter, including HL7 v2, CDA, FHIR,.</a:t>
+                  <a:srgbClr val="003A63"/>
+                </a:solidFill>
+                <a:latin typeface="Aptos" pitchFamily="34" charset="0"/>
+                <a:ea typeface="Aptos" pitchFamily="34" charset="-122"/>
+                <a:cs typeface="Aptos" pitchFamily="34" charset="-120"/>
+              </a:rPr>
+              <a:t>• This module introduces the major standards that public health staff encounter, including HL7.</a:t>
             </a:r>
             <a:endParaRPr lang="en-US" sz="2100" dirty="0"/>
           </a:p>
@@ -10434,17 +10614,17 @@
         </p:nvSpPr>
         <p:spPr>
           <a:xfrm>
-            <a:off x="8074152" y="1920240"/>
-            <a:ext cx="2825496" cy="1280160"/>
-          </a:xfrm>
-          <a:prstGeom prst="rect">
-            <a:avLst/>
-          </a:prstGeom>
-          <a:noFill/>
-          <a:ln/>
-        </p:spPr>
-        <p:txBody>
-          <a:bodyPr wrap="square" lIns="0" tIns="0" rIns="0" bIns="0" rtlCol="0" anchor="t">
+            <a:off x="8074152" y="1892808"/>
+            <a:ext cx="2825496" cy="1353312"/>
+          </a:xfrm>
+          <a:prstGeom prst="rect">
+            <a:avLst/>
+          </a:prstGeom>
+          <a:noFill/>
+          <a:ln/>
+        </p:spPr>
+        <p:txBody>
+          <a:bodyPr wrap="square" lIns="254" tIns="254" rIns="254" bIns="254" rtlCol="0" anchor="t">
             <a:normAutofit/>
           </a:bodyPr>
           <a:lstStyle/>
@@ -10453,7 +10633,7 @@
               <a:buNone/>
             </a:pPr>
             <a:r>
-              <a:rPr lang="en-US" sz="1550" dirty="0">
+              <a:rPr lang="en-US" sz="1320" dirty="0">
                 <a:solidFill>
                   <a:srgbClr val="17364A"/>
                 </a:solidFill>
@@ -10461,43 +10641,9 @@
                 <a:ea typeface="Aptos" pitchFamily="34" charset="-122"/>
                 <a:cs typeface="Aptos" pitchFamily="34" charset="-120"/>
               </a:rPr>
-              <a:t>Level: applied/foundational</a:t>
-            </a:r>
-            <a:endParaRPr lang="en-US" sz="1550" dirty="0"/>
-          </a:p>
-          <a:p>
-            <a:pPr indent="0" marL="0">
-              <a:buNone/>
-            </a:pPr>
-            <a:r>
-              <a:rPr lang="en-US" sz="1550" dirty="0">
-                <a:solidFill>
-                  <a:srgbClr val="17364A"/>
-                </a:solidFill>
-                <a:latin typeface="Aptos" pitchFamily="34" charset="0"/>
-                <a:ea typeface="Aptos" pitchFamily="34" charset="-122"/>
-                <a:cs typeface="Aptos" pitchFamily="34" charset="-120"/>
-              </a:rPr>
-              <a:t>Primary track: Technical Architecture Track</a:t>
-            </a:r>
-            <a:endParaRPr lang="en-US" sz="1550" dirty="0"/>
-          </a:p>
-          <a:p>
-            <a:pPr indent="0" marL="0">
-              <a:buNone/>
-            </a:pPr>
-            <a:r>
-              <a:rPr lang="en-US" sz="1550" dirty="0">
-                <a:solidFill>
-                  <a:srgbClr val="17364A"/>
-                </a:solidFill>
-                <a:latin typeface="Aptos" pitchFamily="34" charset="0"/>
-                <a:ea typeface="Aptos" pitchFamily="34" charset="-122"/>
-                <a:cs typeface="Aptos" pitchFamily="34" charset="-120"/>
-              </a:rPr>
-              <a:t>Appears in tracks: technical-architecture</a:t>
-            </a:r>
-            <a:endParaRPr lang="en-US" sz="1550" dirty="0"/>
+              <a:t>Level: applied/foundational Primary track: Technical Architecture Track Appears in tracks: technical-architecture</a:t>
+            </a:r>
+            <a:endParaRPr lang="en-US" sz="1320" dirty="0"/>
           </a:p>
         </p:txBody>
       </p:sp>
@@ -10585,13 +10731,16 @@
           <a:ln/>
         </p:spPr>
         <p:txBody>
-          <a:bodyPr wrap="square" lIns="254" tIns="254" rIns="254" bIns="254" rtlCol="0" anchor="t">
+          <a:bodyPr wrap="square" lIns="508" tIns="508" rIns="508" bIns="508" rtlCol="0" anchor="t">
             <a:normAutofit/>
           </a:bodyPr>
           <a:lstStyle/>
           <a:p>
-            <a:r>
-              <a:rPr lang="en-US" sz="1380" dirty="0">
+            <a:pPr indent="0" marL="0">
+              <a:buNone/>
+            </a:pPr>
+            <a:r>
+              <a:rPr lang="en-US" sz="1220" dirty="0">
                 <a:solidFill>
                   <a:srgbClr val="17364A"/>
                 </a:solidFill>
@@ -10601,11 +10750,14 @@
               </a:rPr>
               <a:t>Read the module for shared vocabulary and context.</a:t>
             </a:r>
-            <a:endParaRPr lang="en-US" sz="1380" dirty="0"/>
-          </a:p>
-          <a:p>
-            <a:r>
-              <a:rPr lang="en-US" sz="1380" dirty="0">
+            <a:endParaRPr lang="en-US" sz="1220" dirty="0"/>
+          </a:p>
+          <a:p>
+            <a:pPr indent="0" marL="0">
+              <a:buNone/>
+            </a:pPr>
+            <a:r>
+              <a:rPr lang="en-US" sz="1220" dirty="0">
                 <a:solidFill>
                   <a:srgbClr val="17364A"/>
                 </a:solidFill>
@@ -10615,11 +10767,14 @@
               </a:rPr>
               <a:t>Complete the practical exercise to apply the concept.</a:t>
             </a:r>
-            <a:endParaRPr lang="en-US" sz="1380" dirty="0"/>
-          </a:p>
-          <a:p>
-            <a:r>
-              <a:rPr lang="en-US" sz="1380" dirty="0">
+            <a:endParaRPr lang="en-US" sz="1220" dirty="0"/>
+          </a:p>
+          <a:p>
+            <a:pPr indent="0" marL="0">
+              <a:buNone/>
+            </a:pPr>
+            <a:r>
+              <a:rPr lang="en-US" sz="1220" dirty="0">
                 <a:solidFill>
                   <a:srgbClr val="17364A"/>
                 </a:solidFill>
@@ -10629,7 +10784,7 @@
               </a:rPr>
               <a:t>Use the notes and references for deeper review.</a:t>
             </a:r>
-            <a:endParaRPr lang="en-US" sz="1380" dirty="0"/>
+            <a:endParaRPr lang="en-US" sz="1220" dirty="0"/>
           </a:p>
         </p:txBody>
       </p:sp>
@@ -10930,21 +11085,24 @@
           <a:ln/>
         </p:spPr>
         <p:txBody>
-          <a:bodyPr wrap="square" lIns="635" tIns="635" rIns="635" bIns="635" rtlCol="0" anchor="t">
+          <a:bodyPr wrap="square" lIns="1016" tIns="1016" rIns="1016" bIns="1016" rtlCol="0" anchor="t">
             <a:normAutofit/>
           </a:bodyPr>
           <a:lstStyle/>
           <a:p>
+            <a:pPr indent="0" marL="0">
+              <a:buNone/>
+            </a:pPr>
             <a:r>
               <a:rPr lang="en-US" sz="2100" dirty="0">
                 <a:solidFill>
-                  <a:srgbClr val="17364A"/>
-                </a:solidFill>
-                <a:latin typeface="Aptos" pitchFamily="34" charset="0"/>
-                <a:ea typeface="Aptos" pitchFamily="34" charset="-122"/>
-                <a:cs typeface="Aptos" pitchFamily="34" charset="-120"/>
-              </a:rPr>
-              <a:t>Test scenario and acceptance criteria</a:t>
+                  <a:srgbClr val="003A63"/>
+                </a:solidFill>
+                <a:latin typeface="Aptos" pitchFamily="34" charset="0"/>
+                <a:ea typeface="Aptos" pitchFamily="34" charset="-122"/>
+                <a:cs typeface="Aptos" pitchFamily="34" charset="-120"/>
+              </a:rPr>
+              <a:t>• Test scenario and acceptance criteria</a:t>
             </a:r>
             <a:endParaRPr lang="en-US" sz="2100" dirty="0"/>
           </a:p>
@@ -11024,17 +11182,17 @@
         </p:nvSpPr>
         <p:spPr>
           <a:xfrm>
-            <a:off x="7799832" y="1828800"/>
-            <a:ext cx="3145536" cy="685800"/>
-          </a:xfrm>
-          <a:prstGeom prst="rect">
-            <a:avLst/>
-          </a:prstGeom>
-          <a:noFill/>
-          <a:ln/>
-        </p:spPr>
-        <p:txBody>
-          <a:bodyPr wrap="square" lIns="0" tIns="0" rIns="0" bIns="0" rtlCol="0" anchor="t">
+            <a:off x="7799832" y="1801368"/>
+            <a:ext cx="3145536" cy="758952"/>
+          </a:xfrm>
+          <a:prstGeom prst="rect">
+            <a:avLst/>
+          </a:prstGeom>
+          <a:noFill/>
+          <a:ln/>
+        </p:spPr>
+        <p:txBody>
+          <a:bodyPr wrap="square" lIns="254" tIns="254" rIns="254" bIns="254" rtlCol="0" anchor="t">
             <a:normAutofit/>
           </a:bodyPr>
           <a:lstStyle/>
@@ -11043,7 +11201,7 @@
               <a:buNone/>
             </a:pPr>
             <a:r>
-              <a:rPr lang="en-US" sz="1550" dirty="0">
+              <a:rPr lang="en-US" sz="1320" dirty="0">
                 <a:solidFill>
                   <a:srgbClr val="17364A"/>
                 </a:solidFill>
@@ -11053,7 +11211,7 @@
               </a:rPr>
               <a:t>Test scenario and acceptance criteria</a:t>
             </a:r>
-            <a:endParaRPr lang="en-US" sz="1550" dirty="0"/>
+            <a:endParaRPr lang="en-US" sz="1320" dirty="0"/>
           </a:p>
         </p:txBody>
       </p:sp>
@@ -11141,13 +11299,16 @@
           <a:ln/>
         </p:spPr>
         <p:txBody>
-          <a:bodyPr wrap="square" lIns="254" tIns="254" rIns="254" bIns="254" rtlCol="0" anchor="t">
+          <a:bodyPr wrap="square" lIns="508" tIns="508" rIns="508" bIns="508" rtlCol="0" anchor="t">
             <a:normAutofit/>
           </a:bodyPr>
           <a:lstStyle/>
           <a:p>
-            <a:r>
-              <a:rPr lang="en-US" sz="1380" dirty="0">
+            <a:pPr indent="0" marL="0">
+              <a:buNone/>
+            </a:pPr>
+            <a:r>
+              <a:rPr lang="en-US" sz="1220" dirty="0">
                 <a:solidFill>
                   <a:srgbClr val="17364A"/>
                 </a:solidFill>
@@ -11157,7 +11318,7 @@
               </a:rPr>
               <a:t>Test scenario and acceptance criteria</a:t>
             </a:r>
-            <a:endParaRPr lang="en-US" sz="1380" dirty="0"/>
+            <a:endParaRPr lang="en-US" sz="1220" dirty="0"/>
           </a:p>
         </p:txBody>
       </p:sp>
@@ -11235,17 +11396,17 @@
         </p:nvSpPr>
         <p:spPr>
           <a:xfrm>
-            <a:off x="7799832" y="5001768"/>
-            <a:ext cx="3145536" cy="502920"/>
-          </a:xfrm>
-          <a:prstGeom prst="rect">
-            <a:avLst/>
-          </a:prstGeom>
-          <a:noFill/>
-          <a:ln/>
-        </p:spPr>
-        <p:txBody>
-          <a:bodyPr wrap="square" lIns="0" tIns="0" rIns="0" bIns="0" rtlCol="0" anchor="t">
+            <a:off x="7799832" y="4974336"/>
+            <a:ext cx="3145536" cy="576072"/>
+          </a:xfrm>
+          <a:prstGeom prst="rect">
+            <a:avLst/>
+          </a:prstGeom>
+          <a:noFill/>
+          <a:ln/>
+        </p:spPr>
+        <p:txBody>
+          <a:bodyPr wrap="square" lIns="254" tIns="254" rIns="254" bIns="254" rtlCol="0" anchor="t">
             <a:normAutofit/>
           </a:bodyPr>
           <a:lstStyle/>
@@ -11254,7 +11415,7 @@
               <a:buNone/>
             </a:pPr>
             <a:r>
-              <a:rPr lang="en-US" sz="1550" dirty="0">
+              <a:rPr lang="en-US" sz="1320" dirty="0">
                 <a:solidFill>
                   <a:srgbClr val="17364A"/>
                 </a:solidFill>
@@ -11262,9 +11423,9 @@
                 <a:ea typeface="Aptos" pitchFamily="34" charset="-122"/>
                 <a:cs typeface="Aptos" pitchFamily="34" charset="-120"/>
               </a:rPr>
-              <a:t>Connect the concept to public health purpose, responsible use, required safeguards, documentation, and the next action a department should take.</a:t>
-            </a:r>
-            <a:endParaRPr lang="en-US" sz="1550" dirty="0"/>
+              <a:t>Connect the concept to public health purpose, responsible use, required safeguards, documentation, and the next action a.</a:t>
+            </a:r>
+            <a:endParaRPr lang="en-US" sz="1320" dirty="0"/>
           </a:p>
         </p:txBody>
       </p:sp>
@@ -11565,49 +11726,58 @@
           <a:ln/>
         </p:spPr>
         <p:txBody>
-          <a:bodyPr wrap="square" lIns="635" tIns="635" rIns="635" bIns="635" rtlCol="0" anchor="t">
+          <a:bodyPr wrap="square" lIns="1016" tIns="1016" rIns="1016" bIns="1016" rtlCol="0" anchor="t">
             <a:normAutofit/>
           </a:bodyPr>
           <a:lstStyle/>
           <a:p>
+            <a:pPr indent="0" marL="0">
+              <a:buNone/>
+            </a:pPr>
             <a:r>
               <a:rPr lang="en-US" sz="2100" dirty="0">
                 <a:solidFill>
-                  <a:srgbClr val="17364A"/>
-                </a:solidFill>
-                <a:latin typeface="Aptos" pitchFamily="34" charset="0"/>
-                <a:ea typeface="Aptos" pitchFamily="34" charset="-122"/>
-                <a:cs typeface="Aptos" pitchFamily="34" charset="-120"/>
-              </a:rPr>
-              <a:t>Interoperability checklist</a:t>
+                  <a:srgbClr val="003A63"/>
+                </a:solidFill>
+                <a:latin typeface="Aptos" pitchFamily="34" charset="0"/>
+                <a:ea typeface="Aptos" pitchFamily="34" charset="-122"/>
+                <a:cs typeface="Aptos" pitchFamily="34" charset="-120"/>
+              </a:rPr>
+              <a:t>• Interoperability checklist</a:t>
             </a:r>
             <a:endParaRPr lang="en-US" sz="2100" dirty="0"/>
           </a:p>
           <a:p>
+            <a:pPr indent="0" marL="0">
+              <a:buNone/>
+            </a:pPr>
             <a:r>
               <a:rPr lang="en-US" sz="2100" dirty="0">
                 <a:solidFill>
-                  <a:srgbClr val="17364A"/>
-                </a:solidFill>
-                <a:latin typeface="Aptos" pitchFamily="34" charset="0"/>
-                <a:ea typeface="Aptos" pitchFamily="34" charset="-122"/>
-                <a:cs typeface="Aptos" pitchFamily="34" charset="-120"/>
-              </a:rPr>
-              <a:t>Data exchange diagram</a:t>
+                  <a:srgbClr val="003A63"/>
+                </a:solidFill>
+                <a:latin typeface="Aptos" pitchFamily="34" charset="0"/>
+                <a:ea typeface="Aptos" pitchFamily="34" charset="-122"/>
+                <a:cs typeface="Aptos" pitchFamily="34" charset="-120"/>
+              </a:rPr>
+              <a:t>• Data exchange diagram</a:t>
             </a:r>
             <a:endParaRPr lang="en-US" sz="2100" dirty="0"/>
           </a:p>
           <a:p>
+            <a:pPr indent="0" marL="0">
+              <a:buNone/>
+            </a:pPr>
             <a:r>
               <a:rPr lang="en-US" sz="2100" dirty="0">
                 <a:solidFill>
-                  <a:srgbClr val="17364A"/>
-                </a:solidFill>
-                <a:latin typeface="Aptos" pitchFamily="34" charset="0"/>
-                <a:ea typeface="Aptos" pitchFamily="34" charset="-122"/>
-                <a:cs typeface="Aptos" pitchFamily="34" charset="-120"/>
-              </a:rPr>
-              <a:t>Vendor questions</a:t>
+                  <a:srgbClr val="003A63"/>
+                </a:solidFill>
+                <a:latin typeface="Aptos" pitchFamily="34" charset="0"/>
+                <a:ea typeface="Aptos" pitchFamily="34" charset="-122"/>
+                <a:cs typeface="Aptos" pitchFamily="34" charset="-120"/>
+              </a:rPr>
+              <a:t>• Vendor questions</a:t>
             </a:r>
             <a:endParaRPr lang="en-US" sz="2100" dirty="0"/>
           </a:p>
@@ -11687,17 +11857,17 @@
         </p:nvSpPr>
         <p:spPr>
           <a:xfrm>
-            <a:off x="7799832" y="1828800"/>
-            <a:ext cx="3145536" cy="685800"/>
-          </a:xfrm>
-          <a:prstGeom prst="rect">
-            <a:avLst/>
-          </a:prstGeom>
-          <a:noFill/>
-          <a:ln/>
-        </p:spPr>
-        <p:txBody>
-          <a:bodyPr wrap="square" lIns="0" tIns="0" rIns="0" bIns="0" rtlCol="0" anchor="t">
+            <a:off x="7799832" y="1801368"/>
+            <a:ext cx="3145536" cy="758952"/>
+          </a:xfrm>
+          <a:prstGeom prst="rect">
+            <a:avLst/>
+          </a:prstGeom>
+          <a:noFill/>
+          <a:ln/>
+        </p:spPr>
+        <p:txBody>
+          <a:bodyPr wrap="square" lIns="254" tIns="254" rIns="254" bIns="254" rtlCol="0" anchor="t">
             <a:normAutofit/>
           </a:bodyPr>
           <a:lstStyle/>
@@ -11706,7 +11876,7 @@
               <a:buNone/>
             </a:pPr>
             <a:r>
-              <a:rPr lang="en-US" sz="1550" dirty="0">
+              <a:rPr lang="en-US" sz="1320" dirty="0">
                 <a:solidFill>
                   <a:srgbClr val="17364A"/>
                 </a:solidFill>
@@ -11716,7 +11886,7 @@
               </a:rPr>
               <a:t>Interoperability checklist</a:t>
             </a:r>
-            <a:endParaRPr lang="en-US" sz="1550" dirty="0"/>
+            <a:endParaRPr lang="en-US" sz="1320" dirty="0"/>
           </a:p>
         </p:txBody>
       </p:sp>
@@ -11804,13 +11974,16 @@
           <a:ln/>
         </p:spPr>
         <p:txBody>
-          <a:bodyPr wrap="square" lIns="254" tIns="254" rIns="254" bIns="254" rtlCol="0" anchor="t">
+          <a:bodyPr wrap="square" lIns="508" tIns="508" rIns="508" bIns="508" rtlCol="0" anchor="t">
             <a:normAutofit/>
           </a:bodyPr>
           <a:lstStyle/>
           <a:p>
-            <a:r>
-              <a:rPr lang="en-US" sz="1380" dirty="0">
+            <a:pPr indent="0" marL="0">
+              <a:buNone/>
+            </a:pPr>
+            <a:r>
+              <a:rPr lang="en-US" sz="1220" dirty="0">
                 <a:solidFill>
                   <a:srgbClr val="17364A"/>
                 </a:solidFill>
@@ -11820,11 +11993,14 @@
               </a:rPr>
               <a:t>Interoperability checklist</a:t>
             </a:r>
-            <a:endParaRPr lang="en-US" sz="1380" dirty="0"/>
-          </a:p>
-          <a:p>
-            <a:r>
-              <a:rPr lang="en-US" sz="1380" dirty="0">
+            <a:endParaRPr lang="en-US" sz="1220" dirty="0"/>
+          </a:p>
+          <a:p>
+            <a:pPr indent="0" marL="0">
+              <a:buNone/>
+            </a:pPr>
+            <a:r>
+              <a:rPr lang="en-US" sz="1220" dirty="0">
                 <a:solidFill>
                   <a:srgbClr val="17364A"/>
                 </a:solidFill>
@@ -11834,11 +12010,14 @@
               </a:rPr>
               <a:t>Data exchange diagram</a:t>
             </a:r>
-            <a:endParaRPr lang="en-US" sz="1380" dirty="0"/>
-          </a:p>
-          <a:p>
-            <a:r>
-              <a:rPr lang="en-US" sz="1380" dirty="0">
+            <a:endParaRPr lang="en-US" sz="1220" dirty="0"/>
+          </a:p>
+          <a:p>
+            <a:pPr indent="0" marL="0">
+              <a:buNone/>
+            </a:pPr>
+            <a:r>
+              <a:rPr lang="en-US" sz="1220" dirty="0">
                 <a:solidFill>
                   <a:srgbClr val="17364A"/>
                 </a:solidFill>
@@ -11848,7 +12027,7 @@
               </a:rPr>
               <a:t>Vendor questions</a:t>
             </a:r>
-            <a:endParaRPr lang="en-US" sz="1380" dirty="0"/>
+            <a:endParaRPr lang="en-US" sz="1220" dirty="0"/>
           </a:p>
         </p:txBody>
       </p:sp>
@@ -11926,17 +12105,17 @@
         </p:nvSpPr>
         <p:spPr>
           <a:xfrm>
-            <a:off x="7799832" y="5001768"/>
-            <a:ext cx="3145536" cy="502920"/>
-          </a:xfrm>
-          <a:prstGeom prst="rect">
-            <a:avLst/>
-          </a:prstGeom>
-          <a:noFill/>
-          <a:ln/>
-        </p:spPr>
-        <p:txBody>
-          <a:bodyPr wrap="square" lIns="0" tIns="0" rIns="0" bIns="0" rtlCol="0" anchor="t">
+            <a:off x="7799832" y="4974336"/>
+            <a:ext cx="3145536" cy="576072"/>
+          </a:xfrm>
+          <a:prstGeom prst="rect">
+            <a:avLst/>
+          </a:prstGeom>
+          <a:noFill/>
+          <a:ln/>
+        </p:spPr>
+        <p:txBody>
+          <a:bodyPr wrap="square" lIns="254" tIns="254" rIns="254" bIns="254" rtlCol="0" anchor="t">
             <a:normAutofit/>
           </a:bodyPr>
           <a:lstStyle/>
@@ -11945,7 +12124,7 @@
               <a:buNone/>
             </a:pPr>
             <a:r>
-              <a:rPr lang="en-US" sz="1550" dirty="0">
+              <a:rPr lang="en-US" sz="1320" dirty="0">
                 <a:solidFill>
                   <a:srgbClr val="17364A"/>
                 </a:solidFill>
@@ -11953,9 +12132,9 @@
                 <a:ea typeface="Aptos" pitchFamily="34" charset="-122"/>
                 <a:cs typeface="Aptos" pitchFamily="34" charset="-120"/>
               </a:rPr>
-              <a:t>Use the assignment to test whether you can explain the concept, apply it to a realistic public health situation, and identify what would need review before the work moves forward.</a:t>
-            </a:r>
-            <a:endParaRPr lang="en-US" sz="1550" dirty="0"/>
+              <a:t>Use the assignment to test whether you can explain the concept, apply it to a realistic public health situation, and.</a:t>
+            </a:r>
+            <a:endParaRPr lang="en-US" sz="1320" dirty="0"/>
           </a:p>
         </p:txBody>
       </p:sp>
@@ -12256,49 +12435,58 @@
           <a:ln/>
         </p:spPr>
         <p:txBody>
-          <a:bodyPr wrap="square" lIns="635" tIns="635" rIns="635" bIns="635" rtlCol="0" anchor="t">
+          <a:bodyPr wrap="square" lIns="1016" tIns="1016" rIns="1016" bIns="1016" rtlCol="0" anchor="t">
             <a:normAutofit/>
           </a:bodyPr>
           <a:lstStyle/>
           <a:p>
+            <a:pPr indent="0" marL="0">
+              <a:buNone/>
+            </a:pPr>
             <a:r>
               <a:rPr lang="en-US" sz="2100" dirty="0">
                 <a:solidFill>
-                  <a:srgbClr val="17364A"/>
-                </a:solidFill>
-                <a:latin typeface="Aptos" pitchFamily="34" charset="0"/>
-                <a:ea typeface="Aptos" pitchFamily="34" charset="-122"/>
-                <a:cs typeface="Aptos" pitchFamily="34" charset="-120"/>
-              </a:rPr>
-              <a:t>1. Why does interoperability matter for AI-supported public health workflows?</a:t>
+                  <a:srgbClr val="003A63"/>
+                </a:solidFill>
+                <a:latin typeface="Aptos" pitchFamily="34" charset="0"/>
+                <a:ea typeface="Aptos" pitchFamily="34" charset="-122"/>
+                <a:cs typeface="Aptos" pitchFamily="34" charset="-120"/>
+              </a:rPr>
+              <a:t>• 1. Why does interoperability matter for AI-supported public health workflows?</a:t>
             </a:r>
             <a:endParaRPr lang="en-US" sz="2100" dirty="0"/>
           </a:p>
           <a:p>
+            <a:pPr indent="0" marL="0">
+              <a:buNone/>
+            </a:pPr>
             <a:r>
               <a:rPr lang="en-US" sz="2100" dirty="0">
                 <a:solidFill>
-                  <a:srgbClr val="17364A"/>
-                </a:solidFill>
-                <a:latin typeface="Aptos" pitchFamily="34" charset="0"/>
-                <a:ea typeface="Aptos" pitchFamily="34" charset="-122"/>
-                <a:cs typeface="Aptos" pitchFamily="34" charset="-120"/>
-              </a:rPr>
-              <a:t>2. What is FHIR commonly used for?</a:t>
+                  <a:srgbClr val="003A63"/>
+                </a:solidFill>
+                <a:latin typeface="Aptos" pitchFamily="34" charset="0"/>
+                <a:ea typeface="Aptos" pitchFamily="34" charset="-122"/>
+                <a:cs typeface="Aptos" pitchFamily="34" charset="-120"/>
+              </a:rPr>
+              <a:t>• 2. What is FHIR commonly used for?</a:t>
             </a:r>
             <a:endParaRPr lang="en-US" sz="2100" dirty="0"/>
           </a:p>
           <a:p>
+            <a:pPr indent="0" marL="0">
+              <a:buNone/>
+            </a:pPr>
             <a:r>
               <a:rPr lang="en-US" sz="2100" dirty="0">
                 <a:solidFill>
-                  <a:srgbClr val="17364A"/>
-                </a:solidFill>
-                <a:latin typeface="Aptos" pitchFamily="34" charset="0"/>
-                <a:ea typeface="Aptos" pitchFamily="34" charset="-122"/>
-                <a:cs typeface="Aptos" pitchFamily="34" charset="-120"/>
-              </a:rPr>
-              <a:t>3. What is an implementation guide?</a:t>
+                  <a:srgbClr val="003A63"/>
+                </a:solidFill>
+                <a:latin typeface="Aptos" pitchFamily="34" charset="0"/>
+                <a:ea typeface="Aptos" pitchFamily="34" charset="-122"/>
+                <a:cs typeface="Aptos" pitchFamily="34" charset="-120"/>
+              </a:rPr>
+              <a:t>• 3. What is an implementation guide?</a:t>
             </a:r>
             <a:endParaRPr lang="en-US" sz="2100" dirty="0"/>
           </a:p>
@@ -12378,17 +12566,17 @@
         </p:nvSpPr>
         <p:spPr>
           <a:xfrm>
-            <a:off x="7799832" y="1828800"/>
-            <a:ext cx="3145536" cy="685800"/>
-          </a:xfrm>
-          <a:prstGeom prst="rect">
-            <a:avLst/>
-          </a:prstGeom>
-          <a:noFill/>
-          <a:ln/>
-        </p:spPr>
-        <p:txBody>
-          <a:bodyPr wrap="square" lIns="0" tIns="0" rIns="0" bIns="0" rtlCol="0" anchor="t">
+            <a:off x="7799832" y="1801368"/>
+            <a:ext cx="3145536" cy="758952"/>
+          </a:xfrm>
+          <a:prstGeom prst="rect">
+            <a:avLst/>
+          </a:prstGeom>
+          <a:noFill/>
+          <a:ln/>
+        </p:spPr>
+        <p:txBody>
+          <a:bodyPr wrap="square" lIns="254" tIns="254" rIns="254" bIns="254" rtlCol="0" anchor="t">
             <a:normAutofit/>
           </a:bodyPr>
           <a:lstStyle/>
@@ -12397,7 +12585,7 @@
               <a:buNone/>
             </a:pPr>
             <a:r>
-              <a:rPr lang="en-US" sz="1550" dirty="0">
+              <a:rPr lang="en-US" sz="1320" dirty="0">
                 <a:solidFill>
                   <a:srgbClr val="17364A"/>
                 </a:solidFill>
@@ -12407,7 +12595,7 @@
               </a:rPr>
               <a:t>1. Why does interoperability matter for AI-supported public health workflows?</a:t>
             </a:r>
-            <a:endParaRPr lang="en-US" sz="1550" dirty="0"/>
+            <a:endParaRPr lang="en-US" sz="1320" dirty="0"/>
           </a:p>
         </p:txBody>
       </p:sp>
@@ -12495,13 +12683,16 @@
           <a:ln/>
         </p:spPr>
         <p:txBody>
-          <a:bodyPr wrap="square" lIns="254" tIns="254" rIns="254" bIns="254" rtlCol="0" anchor="t">
+          <a:bodyPr wrap="square" lIns="508" tIns="508" rIns="508" bIns="508" rtlCol="0" anchor="t">
             <a:normAutofit/>
           </a:bodyPr>
           <a:lstStyle/>
           <a:p>
-            <a:r>
-              <a:rPr lang="en-US" sz="1380" dirty="0">
+            <a:pPr indent="0" marL="0">
+              <a:buNone/>
+            </a:pPr>
+            <a:r>
+              <a:rPr lang="en-US" sz="1220" dirty="0">
                 <a:solidFill>
                   <a:srgbClr val="17364A"/>
                 </a:solidFill>
@@ -12511,11 +12702,14 @@
               </a:rPr>
               <a:t>1.</a:t>
             </a:r>
-            <a:endParaRPr lang="en-US" sz="1380" dirty="0"/>
-          </a:p>
-          <a:p>
-            <a:r>
-              <a:rPr lang="en-US" sz="1380" dirty="0">
+            <a:endParaRPr lang="en-US" sz="1220" dirty="0"/>
+          </a:p>
+          <a:p>
+            <a:pPr indent="0" marL="0">
+              <a:buNone/>
+            </a:pPr>
+            <a:r>
+              <a:rPr lang="en-US" sz="1220" dirty="0">
                 <a:solidFill>
                   <a:srgbClr val="17364A"/>
                 </a:solidFill>
@@ -12523,13 +12717,16 @@
                 <a:ea typeface="Aptos" pitchFamily="34" charset="-122"/>
                 <a:cs typeface="Aptos" pitchFamily="34" charset="-120"/>
               </a:rPr>
-              <a:t>Why does interoperability matter for AI-supported public health workflows?</a:t>
-            </a:r>
-            <a:endParaRPr lang="en-US" sz="1380" dirty="0"/>
-          </a:p>
-          <a:p>
-            <a:r>
-              <a:rPr lang="en-US" sz="1380" dirty="0">
+              <a:t>Why does interoperability matter for AI-supported public health.</a:t>
+            </a:r>
+            <a:endParaRPr lang="en-US" sz="1220" dirty="0"/>
+          </a:p>
+          <a:p>
+            <a:pPr indent="0" marL="0">
+              <a:buNone/>
+            </a:pPr>
+            <a:r>
+              <a:rPr lang="en-US" sz="1220" dirty="0">
                 <a:solidFill>
                   <a:srgbClr val="17364A"/>
                 </a:solidFill>
@@ -12539,7 +12736,7 @@
               </a:rPr>
               <a:t>2.</a:t>
             </a:r>
-            <a:endParaRPr lang="en-US" sz="1380" dirty="0"/>
+            <a:endParaRPr lang="en-US" sz="1220" dirty="0"/>
           </a:p>
         </p:txBody>
       </p:sp>
@@ -12617,17 +12814,17 @@
         </p:nvSpPr>
         <p:spPr>
           <a:xfrm>
-            <a:off x="7799832" y="5001768"/>
-            <a:ext cx="3145536" cy="502920"/>
-          </a:xfrm>
-          <a:prstGeom prst="rect">
-            <a:avLst/>
-          </a:prstGeom>
-          <a:noFill/>
-          <a:ln/>
-        </p:spPr>
-        <p:txBody>
-          <a:bodyPr wrap="square" lIns="0" tIns="0" rIns="0" bIns="0" rtlCol="0" anchor="t">
+            <a:off x="7799832" y="4974336"/>
+            <a:ext cx="3145536" cy="576072"/>
+          </a:xfrm>
+          <a:prstGeom prst="rect">
+            <a:avLst/>
+          </a:prstGeom>
+          <a:noFill/>
+          <a:ln/>
+        </p:spPr>
+        <p:txBody>
+          <a:bodyPr wrap="square" lIns="254" tIns="254" rIns="254" bIns="254" rtlCol="0" anchor="t">
             <a:normAutofit/>
           </a:bodyPr>
           <a:lstStyle/>
@@ -12636,7 +12833,7 @@
               <a:buNone/>
             </a:pPr>
             <a:r>
-              <a:rPr lang="en-US" sz="1550" dirty="0">
+              <a:rPr lang="en-US" sz="1320" dirty="0">
                 <a:solidFill>
                   <a:srgbClr val="17364A"/>
                 </a:solidFill>
@@ -12644,9 +12841,9 @@
                 <a:ea typeface="Aptos" pitchFamily="34" charset="-122"/>
                 <a:cs typeface="Aptos" pitchFamily="34" charset="-120"/>
               </a:rPr>
-              <a:t>Use the assignment to test whether you can explain the concept, apply it to a realistic public health situation, and identify what would need review before the work moves forward.</a:t>
-            </a:r>
-            <a:endParaRPr lang="en-US" sz="1550" dirty="0"/>
+              <a:t>Use the assignment to test whether you can explain the concept, apply it to a realistic public health situation, and.</a:t>
+            </a:r>
+            <a:endParaRPr lang="en-US" sz="1320" dirty="0"/>
           </a:p>
         </p:txBody>
       </p:sp>
@@ -12947,49 +13144,58 @@
           <a:ln/>
         </p:spPr>
         <p:txBody>
-          <a:bodyPr wrap="square" lIns="635" tIns="635" rIns="635" bIns="635" rtlCol="0" anchor="t">
+          <a:bodyPr wrap="square" lIns="1016" tIns="1016" rIns="1016" bIns="1016" rtlCol="0" anchor="t">
             <a:normAutofit/>
           </a:bodyPr>
           <a:lstStyle/>
           <a:p>
+            <a:pPr indent="0" marL="0">
+              <a:buNone/>
+            </a:pPr>
             <a:r>
               <a:rPr lang="en-US" sz="2100" dirty="0">
                 <a:solidFill>
-                  <a:srgbClr val="17364A"/>
-                </a:solidFill>
-                <a:latin typeface="Aptos" pitchFamily="34" charset="0"/>
-                <a:ea typeface="Aptos" pitchFamily="34" charset="-122"/>
-                <a:cs typeface="Aptos" pitchFamily="34" charset="-120"/>
-              </a:rPr>
-              <a:t>HL7 FHIR resources and implementation guides: https://hl7.org/fhir/</a:t>
+                  <a:srgbClr val="003A63"/>
+                </a:solidFill>
+                <a:latin typeface="Aptos" pitchFamily="34" charset="0"/>
+                <a:ea typeface="Aptos" pitchFamily="34" charset="-122"/>
+                <a:cs typeface="Aptos" pitchFamily="34" charset="-120"/>
+              </a:rPr>
+              <a:t>• HL7 FHIR resources and implementation guides: https://hl7.org/fhir/</a:t>
             </a:r>
             <a:endParaRPr lang="en-US" sz="2100" dirty="0"/>
           </a:p>
           <a:p>
+            <a:pPr indent="0" marL="0">
+              <a:buNone/>
+            </a:pPr>
             <a:r>
               <a:rPr lang="en-US" sz="2100" dirty="0">
                 <a:solidFill>
-                  <a:srgbClr val="17364A"/>
-                </a:solidFill>
-                <a:latin typeface="Aptos" pitchFamily="34" charset="0"/>
-                <a:ea typeface="Aptos" pitchFamily="34" charset="-122"/>
-                <a:cs typeface="Aptos" pitchFamily="34" charset="-120"/>
-              </a:rPr>
-              <a:t>HL7 US Core Implementation Guide: https://build.fhir.org/ig/HL7/US-Core/</a:t>
+                  <a:srgbClr val="003A63"/>
+                </a:solidFill>
+                <a:latin typeface="Aptos" pitchFamily="34" charset="0"/>
+                <a:ea typeface="Aptos" pitchFamily="34" charset="-122"/>
+                <a:cs typeface="Aptos" pitchFamily="34" charset="-120"/>
+              </a:rPr>
+              <a:t>• HL7 US Core Implementation Guide: https://build.fhir.org/ig/HL7/US-Core/</a:t>
             </a:r>
             <a:endParaRPr lang="en-US" sz="2100" dirty="0"/>
           </a:p>
           <a:p>
+            <a:pPr indent="0" marL="0">
+              <a:buNone/>
+            </a:pPr>
             <a:r>
               <a:rPr lang="en-US" sz="2100" dirty="0">
                 <a:solidFill>
-                  <a:srgbClr val="17364A"/>
-                </a:solidFill>
-                <a:latin typeface="Aptos" pitchFamily="34" charset="0"/>
-                <a:ea typeface="Aptos" pitchFamily="34" charset="-122"/>
-                <a:cs typeface="Aptos" pitchFamily="34" charset="-120"/>
-              </a:rPr>
-              <a:t>ONC USCDI resources: https://isp.healthit.gov/united-states-core-data-interoperability-uscdi</a:t>
+                  <a:srgbClr val="003A63"/>
+                </a:solidFill>
+                <a:latin typeface="Aptos" pitchFamily="34" charset="0"/>
+                <a:ea typeface="Aptos" pitchFamily="34" charset="-122"/>
+                <a:cs typeface="Aptos" pitchFamily="34" charset="-120"/>
+              </a:rPr>
+              <a:t>• ONC USCDI resources: https://isp.healthit.gov/united-states-core-data-interoperability-uscdi</a:t>
             </a:r>
             <a:endParaRPr lang="en-US" sz="2100" dirty="0"/>
           </a:p>
@@ -13069,17 +13275,17 @@
         </p:nvSpPr>
         <p:spPr>
           <a:xfrm>
-            <a:off x="7799832" y="1828800"/>
-            <a:ext cx="3145536" cy="685800"/>
-          </a:xfrm>
-          <a:prstGeom prst="rect">
-            <a:avLst/>
-          </a:prstGeom>
-          <a:noFill/>
-          <a:ln/>
-        </p:spPr>
-        <p:txBody>
-          <a:bodyPr wrap="square" lIns="0" tIns="0" rIns="0" bIns="0" rtlCol="0" anchor="t">
+            <a:off x="7799832" y="1801368"/>
+            <a:ext cx="3145536" cy="758952"/>
+          </a:xfrm>
+          <a:prstGeom prst="rect">
+            <a:avLst/>
+          </a:prstGeom>
+          <a:noFill/>
+          <a:ln/>
+        </p:spPr>
+        <p:txBody>
+          <a:bodyPr wrap="square" lIns="254" tIns="254" rIns="254" bIns="254" rtlCol="0" anchor="t">
             <a:normAutofit/>
           </a:bodyPr>
           <a:lstStyle/>
@@ -13088,7 +13294,7 @@
               <a:buNone/>
             </a:pPr>
             <a:r>
-              <a:rPr lang="en-US" sz="1550" dirty="0">
+              <a:rPr lang="en-US" sz="1320" dirty="0">
                 <a:solidFill>
                   <a:srgbClr val="17364A"/>
                 </a:solidFill>
@@ -13098,7 +13304,7 @@
               </a:rPr>
               <a:t>HL7 FHIR resources and implementation guides: https://hl7.org/fhir/</a:t>
             </a:r>
-            <a:endParaRPr lang="en-US" sz="1550" dirty="0"/>
+            <a:endParaRPr lang="en-US" sz="1320" dirty="0"/>
           </a:p>
         </p:txBody>
       </p:sp>
@@ -13186,13 +13392,16 @@
           <a:ln/>
         </p:spPr>
         <p:txBody>
-          <a:bodyPr wrap="square" lIns="254" tIns="254" rIns="254" bIns="254" rtlCol="0" anchor="t">
+          <a:bodyPr wrap="square" lIns="508" tIns="508" rIns="508" bIns="508" rtlCol="0" anchor="t">
             <a:normAutofit/>
           </a:bodyPr>
           <a:lstStyle/>
           <a:p>
-            <a:r>
-              <a:rPr lang="en-US" sz="1380" dirty="0">
+            <a:pPr indent="0" marL="0">
+              <a:buNone/>
+            </a:pPr>
+            <a:r>
+              <a:rPr lang="en-US" sz="1220" dirty="0">
                 <a:solidFill>
                   <a:srgbClr val="17364A"/>
                 </a:solidFill>
@@ -13202,11 +13411,14 @@
               </a:rPr>
               <a:t>CDC Public Health Data Strategy:.</a:t>
             </a:r>
-            <a:endParaRPr lang="en-US" sz="1380" dirty="0"/>
-          </a:p>
-          <a:p>
-            <a:r>
-              <a:rPr lang="en-US" sz="1380" dirty="0">
+            <a:endParaRPr lang="en-US" sz="1220" dirty="0"/>
+          </a:p>
+          <a:p>
+            <a:pPr indent="0" marL="0">
+              <a:buNone/>
+            </a:pPr>
+            <a:r>
+              <a:rPr lang="en-US" sz="1220" dirty="0">
                 <a:solidFill>
                   <a:srgbClr val="17364A"/>
                 </a:solidFill>
@@ -13214,9 +13426,9 @@
                 <a:ea typeface="Aptos" pitchFamily="34" charset="-122"/>
                 <a:cs typeface="Aptos" pitchFamily="34" charset="-120"/>
               </a:rPr>
-              <a:t>Public health implementation guides for eCR, ELR, IIS, and syndromic surveillance</a:t>
-            </a:r>
-            <a:endParaRPr lang="en-US" sz="1380" dirty="0"/>
+              <a:t>Public health implementation guides for eCR, ELR, IIS, and.</a:t>
+            </a:r>
+            <a:endParaRPr lang="en-US" sz="1220" dirty="0"/>
           </a:p>
         </p:txBody>
       </p:sp>
@@ -13294,17 +13506,17 @@
         </p:nvSpPr>
         <p:spPr>
           <a:xfrm>
-            <a:off x="7799832" y="5001768"/>
-            <a:ext cx="3145536" cy="502920"/>
-          </a:xfrm>
-          <a:prstGeom prst="rect">
-            <a:avLst/>
-          </a:prstGeom>
-          <a:noFill/>
-          <a:ln/>
-        </p:spPr>
-        <p:txBody>
-          <a:bodyPr wrap="square" lIns="0" tIns="0" rIns="0" bIns="0" rtlCol="0" anchor="t">
+            <a:off x="7799832" y="4974336"/>
+            <a:ext cx="3145536" cy="576072"/>
+          </a:xfrm>
+          <a:prstGeom prst="rect">
+            <a:avLst/>
+          </a:prstGeom>
+          <a:noFill/>
+          <a:ln/>
+        </p:spPr>
+        <p:txBody>
+          <a:bodyPr wrap="square" lIns="254" tIns="254" rIns="254" bIns="254" rtlCol="0" anchor="t">
             <a:normAutofit/>
           </a:bodyPr>
           <a:lstStyle/>
@@ -13313,7 +13525,7 @@
               <a:buNone/>
             </a:pPr>
             <a:r>
-              <a:rPr lang="en-US" sz="1550" dirty="0">
+              <a:rPr lang="en-US" sz="1320" dirty="0">
                 <a:solidFill>
                   <a:srgbClr val="17364A"/>
                 </a:solidFill>
@@ -13321,9 +13533,9 @@
                 <a:ea typeface="Aptos" pitchFamily="34" charset="-122"/>
                 <a:cs typeface="Aptos" pitchFamily="34" charset="-120"/>
               </a:rPr>
-              <a:t>Connect the concept to public health purpose, responsible use, required safeguards, documentation, and the next action a department should take.</a:t>
-            </a:r>
-            <a:endParaRPr lang="en-US" sz="1550" dirty="0"/>
+              <a:t>Connect the concept to public health purpose, responsible use, required safeguards, documentation, and the next action a.</a:t>
+            </a:r>
+            <a:endParaRPr lang="en-US" sz="1320" dirty="0"/>
           </a:p>
         </p:txBody>
       </p:sp>
@@ -13624,63 +13836,75 @@
           <a:ln/>
         </p:spPr>
         <p:txBody>
-          <a:bodyPr wrap="square" lIns="635" tIns="635" rIns="635" bIns="635" rtlCol="0" anchor="t">
+          <a:bodyPr wrap="square" lIns="1016" tIns="1016" rIns="1016" bIns="1016" rtlCol="0" anchor="t">
             <a:normAutofit/>
           </a:bodyPr>
           <a:lstStyle/>
           <a:p>
+            <a:pPr indent="0" marL="0">
+              <a:buNone/>
+            </a:pPr>
             <a:r>
               <a:rPr lang="en-US" sz="1900" dirty="0">
                 <a:solidFill>
-                  <a:srgbClr val="17364A"/>
-                </a:solidFill>
-                <a:latin typeface="Aptos" pitchFamily="34" charset="0"/>
-                <a:ea typeface="Aptos" pitchFamily="34" charset="-122"/>
-                <a:cs typeface="Aptos" pitchFamily="34" charset="-120"/>
-              </a:rPr>
-              <a:t>Play 11: Build and Deploy AI Solutions - This lesson informs Play 11 by helping learners connect the lesson.</a:t>
+                  <a:srgbClr val="003A63"/>
+                </a:solidFill>
+                <a:latin typeface="Aptos" pitchFamily="34" charset="0"/>
+                <a:ea typeface="Aptos" pitchFamily="34" charset="-122"/>
+                <a:cs typeface="Aptos" pitchFamily="34" charset="-120"/>
+              </a:rPr>
+              <a:t>• Play 11: Build and Deploy AI Solutions - This lesson informs Play 11 by helping learners.</a:t>
             </a:r>
             <a:endParaRPr lang="en-US" sz="1900" dirty="0"/>
           </a:p>
           <a:p>
+            <a:pPr indent="0" marL="0">
+              <a:buNone/>
+            </a:pPr>
             <a:r>
               <a:rPr lang="en-US" sz="1900" dirty="0">
                 <a:solidFill>
-                  <a:srgbClr val="17364A"/>
-                </a:solidFill>
-                <a:latin typeface="Aptos" pitchFamily="34" charset="0"/>
-                <a:ea typeface="Aptos" pitchFamily="34" charset="-122"/>
-                <a:cs typeface="Aptos" pitchFamily="34" charset="-120"/>
-              </a:rPr>
-              <a:t>Play 2: Readiness Assessment - This lesson informs Play 2 by helping learners connect the lesson topic to.</a:t>
+                  <a:srgbClr val="003A63"/>
+                </a:solidFill>
+                <a:latin typeface="Aptos" pitchFamily="34" charset="0"/>
+                <a:ea typeface="Aptos" pitchFamily="34" charset="-122"/>
+                <a:cs typeface="Aptos" pitchFamily="34" charset="-120"/>
+              </a:rPr>
+              <a:t>• Play 2: Readiness Assessment - This lesson informs Play 2 by helping learners connect the.</a:t>
             </a:r>
             <a:endParaRPr lang="en-US" sz="1900" dirty="0"/>
           </a:p>
           <a:p>
+            <a:pPr indent="0" marL="0">
+              <a:buNone/>
+            </a:pPr>
             <a:r>
               <a:rPr lang="en-US" sz="1900" dirty="0">
                 <a:solidFill>
-                  <a:srgbClr val="17364A"/>
-                </a:solidFill>
-                <a:latin typeface="Aptos" pitchFamily="34" charset="0"/>
-                <a:ea typeface="Aptos" pitchFamily="34" charset="-122"/>
-                <a:cs typeface="Aptos" pitchFamily="34" charset="-120"/>
-              </a:rPr>
-              <a:t>Play 7: Prioritize Use Cases - This lesson informs Play 7 by helping learners connect the lesson topic to.</a:t>
+                  <a:srgbClr val="003A63"/>
+                </a:solidFill>
+                <a:latin typeface="Aptos" pitchFamily="34" charset="0"/>
+                <a:ea typeface="Aptos" pitchFamily="34" charset="-122"/>
+                <a:cs typeface="Aptos" pitchFamily="34" charset="-120"/>
+              </a:rPr>
+              <a:t>• Play 7: Prioritize Use Cases - This lesson informs Play 7 by helping learners connect the.</a:t>
             </a:r>
             <a:endParaRPr lang="en-US" sz="1900" dirty="0"/>
           </a:p>
           <a:p>
+            <a:pPr indent="0" marL="0">
+              <a:buNone/>
+            </a:pPr>
             <a:r>
               <a:rPr lang="en-US" sz="1900" dirty="0">
                 <a:solidFill>
-                  <a:srgbClr val="17364A"/>
-                </a:solidFill>
-                <a:latin typeface="Aptos" pitchFamily="34" charset="0"/>
-                <a:ea typeface="Aptos" pitchFamily="34" charset="-122"/>
-                <a:cs typeface="Aptos" pitchFamily="34" charset="-120"/>
-              </a:rPr>
-              <a:t>Play 1: Vision &amp; Guardrails - This lesson informs Play 1 by helping learners connect the lesson topic to.</a:t>
+                  <a:srgbClr val="003A63"/>
+                </a:solidFill>
+                <a:latin typeface="Aptos" pitchFamily="34" charset="0"/>
+                <a:ea typeface="Aptos" pitchFamily="34" charset="-122"/>
+                <a:cs typeface="Aptos" pitchFamily="34" charset="-120"/>
+              </a:rPr>
+              <a:t>• Play 1: Vision &amp; Guardrails - This lesson informs Play 1 by helping learners connect the.</a:t>
             </a:r>
             <a:endParaRPr lang="en-US" sz="1900" dirty="0"/>
           </a:p>
@@ -13760,17 +13984,17 @@
         </p:nvSpPr>
         <p:spPr>
           <a:xfrm>
-            <a:off x="8211312" y="1920240"/>
-            <a:ext cx="2734056" cy="1463040"/>
-          </a:xfrm>
-          <a:prstGeom prst="rect">
-            <a:avLst/>
-          </a:prstGeom>
-          <a:noFill/>
-          <a:ln/>
-        </p:spPr>
-        <p:txBody>
-          <a:bodyPr wrap="square" lIns="0" tIns="0" rIns="0" bIns="0" rtlCol="0" anchor="t">
+            <a:off x="8211312" y="1892808"/>
+            <a:ext cx="2734056" cy="1536192"/>
+          </a:xfrm>
+          <a:prstGeom prst="rect">
+            <a:avLst/>
+          </a:prstGeom>
+          <a:noFill/>
+          <a:ln/>
+        </p:spPr>
+        <p:txBody>
+          <a:bodyPr wrap="square" lIns="254" tIns="254" rIns="254" bIns="254" rtlCol="0" anchor="t">
             <a:normAutofit/>
           </a:bodyPr>
           <a:lstStyle/>
@@ -13779,7 +14003,7 @@
               <a:buNone/>
             </a:pPr>
             <a:r>
-              <a:rPr lang="en-US" sz="1550" dirty="0">
+              <a:rPr lang="en-US" sz="1320" dirty="0">
                 <a:solidFill>
                   <a:srgbClr val="17364A"/>
                 </a:solidFill>
@@ -13787,9 +14011,9 @@
                 <a:ea typeface="Aptos" pitchFamily="34" charset="-122"/>
                 <a:cs typeface="Aptos" pitchFamily="34" charset="-120"/>
               </a:rPr>
-              <a:t>Use the related plays to identify decisions, participants, timing, approvals, and documentation needed for responsible implementation.</a:t>
-            </a:r>
-            <a:endParaRPr lang="en-US" sz="1550" dirty="0"/>
+              <a:t>Use the related plays to identify decisions, participants, timing, approvals, and documentation needed for responsible.</a:t>
+            </a:r>
+            <a:endParaRPr lang="en-US" sz="1320" dirty="0"/>
           </a:p>
         </p:txBody>
       </p:sp>
@@ -13877,13 +14101,16 @@
           <a:ln/>
         </p:spPr>
         <p:txBody>
-          <a:bodyPr wrap="square" lIns="254" tIns="254" rIns="254" bIns="254" rtlCol="0" anchor="t">
+          <a:bodyPr wrap="square" lIns="508" tIns="508" rIns="508" bIns="508" rtlCol="0" anchor="t">
             <a:normAutofit/>
           </a:bodyPr>
           <a:lstStyle/>
           <a:p>
-            <a:r>
-              <a:rPr lang="en-US" sz="1380" dirty="0">
+            <a:pPr indent="0" marL="0">
+              <a:buNone/>
+            </a:pPr>
+            <a:r>
+              <a:rPr lang="en-US" sz="1220" dirty="0">
                 <a:solidFill>
                   <a:srgbClr val="17364A"/>
                 </a:solidFill>
@@ -13893,11 +14120,14 @@
               </a:rPr>
               <a:t>Locate the decision point in the playbook sequence.</a:t>
             </a:r>
-            <a:endParaRPr lang="en-US" sz="1380" dirty="0"/>
-          </a:p>
-          <a:p>
-            <a:r>
-              <a:rPr lang="en-US" sz="1380" dirty="0">
+            <a:endParaRPr lang="en-US" sz="1220" dirty="0"/>
+          </a:p>
+          <a:p>
+            <a:pPr indent="0" marL="0">
+              <a:buNone/>
+            </a:pPr>
+            <a:r>
+              <a:rPr lang="en-US" sz="1220" dirty="0">
                 <a:solidFill>
                   <a:srgbClr val="17364A"/>
                 </a:solidFill>
@@ -13907,11 +14137,14 @@
               </a:rPr>
               <a:t>Identify who should participate in the work.</a:t>
             </a:r>
-            <a:endParaRPr lang="en-US" sz="1380" dirty="0"/>
-          </a:p>
-          <a:p>
-            <a:r>
-              <a:rPr lang="en-US" sz="1380" dirty="0">
+            <a:endParaRPr lang="en-US" sz="1220" dirty="0"/>
+          </a:p>
+          <a:p>
+            <a:pPr indent="0" marL="0">
+              <a:buNone/>
+            </a:pPr>
+            <a:r>
+              <a:rPr lang="en-US" sz="1220" dirty="0">
                 <a:solidFill>
                   <a:srgbClr val="17364A"/>
                 </a:solidFill>
@@ -13921,7 +14154,7 @@
               </a:rPr>
               <a:t>Document the review, approval, or implementation step.</a:t>
             </a:r>
-            <a:endParaRPr lang="en-US" sz="1380" dirty="0"/>
+            <a:endParaRPr lang="en-US" sz="1220" dirty="0"/>
           </a:p>
         </p:txBody>
       </p:sp>
@@ -14222,63 +14455,75 @@
           <a:ln/>
         </p:spPr>
         <p:txBody>
-          <a:bodyPr wrap="square" lIns="635" tIns="635" rIns="635" bIns="635" rtlCol="0" anchor="t">
+          <a:bodyPr wrap="square" lIns="1016" tIns="1016" rIns="1016" bIns="1016" rtlCol="0" anchor="t">
             <a:normAutofit/>
           </a:bodyPr>
           <a:lstStyle/>
           <a:p>
+            <a:pPr indent="0" marL="0">
+              <a:buNone/>
+            </a:pPr>
             <a:r>
               <a:rPr lang="en-US" sz="1850" dirty="0">
                 <a:solidFill>
-                  <a:srgbClr val="17364A"/>
-                </a:solidFill>
-                <a:latin typeface="Aptos" pitchFamily="34" charset="0"/>
-                <a:ea typeface="Aptos" pitchFamily="34" charset="-122"/>
-                <a:cs typeface="Aptos" pitchFamily="34" charset="-120"/>
-              </a:rPr>
-              <a:t>Tool 4: AI Policy Landscape Scan (Worksheet) - Use AI Policy Landscape Scan to translate this lesson into a.</a:t>
+                  <a:srgbClr val="003A63"/>
+                </a:solidFill>
+                <a:latin typeface="Aptos" pitchFamily="34" charset="0"/>
+                <a:ea typeface="Aptos" pitchFamily="34" charset="-122"/>
+                <a:cs typeface="Aptos" pitchFamily="34" charset="-120"/>
+              </a:rPr>
+              <a:t>• Tool 4: AI Policy Landscape Scan (Worksheet) - Use AI Policy Landscape Scan to translate this.</a:t>
             </a:r>
             <a:endParaRPr lang="en-US" sz="1850" dirty="0"/>
           </a:p>
           <a:p>
+            <a:pPr indent="0" marL="0">
+              <a:buNone/>
+            </a:pPr>
             <a:r>
               <a:rPr lang="en-US" sz="1850" dirty="0">
                 <a:solidFill>
-                  <a:srgbClr val="17364A"/>
-                </a:solidFill>
-                <a:latin typeface="Aptos" pitchFamily="34" charset="0"/>
-                <a:ea typeface="Aptos" pitchFamily="34" charset="-122"/>
-                <a:cs typeface="Aptos" pitchFamily="34" charset="-120"/>
-              </a:rPr>
-              <a:t>Tool 5: AI Environmental and Resource Impact Review (Checklist) - Use AI Environmental and Resource Impact.</a:t>
+                  <a:srgbClr val="003A63"/>
+                </a:solidFill>
+                <a:latin typeface="Aptos" pitchFamily="34" charset="0"/>
+                <a:ea typeface="Aptos" pitchFamily="34" charset="-122"/>
+                <a:cs typeface="Aptos" pitchFamily="34" charset="-120"/>
+              </a:rPr>
+              <a:t>• Tool 5: AI Environmental and Resource Impact Review (Checklist) - Use AI Environmental and.</a:t>
             </a:r>
             <a:endParaRPr lang="en-US" sz="1850" dirty="0"/>
           </a:p>
           <a:p>
+            <a:pPr indent="0" marL="0">
+              <a:buNone/>
+            </a:pPr>
             <a:r>
               <a:rPr lang="en-US" sz="1850" dirty="0">
                 <a:solidFill>
-                  <a:srgbClr val="17364A"/>
-                </a:solidFill>
-                <a:latin typeface="Aptos" pitchFamily="34" charset="0"/>
-                <a:ea typeface="Aptos" pitchFamily="34" charset="-122"/>
-                <a:cs typeface="Aptos" pitchFamily="34" charset="-120"/>
-              </a:rPr>
-              <a:t>Tool 6: Human-Centered AI Decision Rule Checklist (Checklist) - Use Human-Centered AI Decision Rule.</a:t>
+                  <a:srgbClr val="003A63"/>
+                </a:solidFill>
+                <a:latin typeface="Aptos" pitchFamily="34" charset="0"/>
+                <a:ea typeface="Aptos" pitchFamily="34" charset="-122"/>
+                <a:cs typeface="Aptos" pitchFamily="34" charset="-120"/>
+              </a:rPr>
+              <a:t>• Tool 6: Human-Centered AI Decision Rule Checklist (Checklist) - Use Human-Centered AI Decision.</a:t>
             </a:r>
             <a:endParaRPr lang="en-US" sz="1850" dirty="0"/>
           </a:p>
           <a:p>
+            <a:pPr indent="0" marL="0">
+              <a:buNone/>
+            </a:pPr>
             <a:r>
               <a:rPr lang="en-US" sz="1850" dirty="0">
                 <a:solidFill>
-                  <a:srgbClr val="17364A"/>
-                </a:solidFill>
-                <a:latin typeface="Aptos" pitchFamily="34" charset="0"/>
-                <a:ea typeface="Aptos" pitchFamily="34" charset="-122"/>
-                <a:cs typeface="Aptos" pitchFamily="34" charset="-120"/>
-              </a:rPr>
-              <a:t>Tool 8: AI Project Charter (Planning) - Use AI Project Charter to translate this lesson into a documented.</a:t>
+                  <a:srgbClr val="003A63"/>
+                </a:solidFill>
+                <a:latin typeface="Aptos" pitchFamily="34" charset="0"/>
+                <a:ea typeface="Aptos" pitchFamily="34" charset="-122"/>
+                <a:cs typeface="Aptos" pitchFamily="34" charset="-120"/>
+              </a:rPr>
+              <a:t>• Tool 8: AI Project Charter (Planning) - Use AI Project Charter to translate this lesson into a.</a:t>
             </a:r>
             <a:endParaRPr lang="en-US" sz="1850" dirty="0"/>
           </a:p>
@@ -14358,17 +14603,17 @@
         </p:nvSpPr>
         <p:spPr>
           <a:xfrm>
-            <a:off x="8211312" y="1920240"/>
-            <a:ext cx="2734056" cy="1463040"/>
-          </a:xfrm>
-          <a:prstGeom prst="rect">
-            <a:avLst/>
-          </a:prstGeom>
-          <a:noFill/>
-          <a:ln/>
-        </p:spPr>
-        <p:txBody>
-          <a:bodyPr wrap="square" lIns="0" tIns="0" rIns="0" bIns="0" rtlCol="0" anchor="t">
+            <a:off x="8211312" y="1892808"/>
+            <a:ext cx="2734056" cy="1536192"/>
+          </a:xfrm>
+          <a:prstGeom prst="rect">
+            <a:avLst/>
+          </a:prstGeom>
+          <a:noFill/>
+          <a:ln/>
+        </p:spPr>
+        <p:txBody>
+          <a:bodyPr wrap="square" lIns="254" tIns="254" rIns="254" bIns="254" rtlCol="0" anchor="t">
             <a:normAutofit/>
           </a:bodyPr>
           <a:lstStyle/>
@@ -14377,7 +14622,7 @@
               <a:buNone/>
             </a:pPr>
             <a:r>
-              <a:rPr lang="en-US" sz="1550" dirty="0">
+              <a:rPr lang="en-US" sz="1320" dirty="0">
                 <a:solidFill>
                   <a:srgbClr val="17364A"/>
                 </a:solidFill>
@@ -14385,9 +14630,9 @@
                 <a:ea typeface="Aptos" pitchFamily="34" charset="-122"/>
                 <a:cs typeface="Aptos" pitchFamily="34" charset="-120"/>
               </a:rPr>
-              <a:t>Use linked tools when your department needs a structured worksheet, template, checklist, review process, or documentation artifact.</a:t>
-            </a:r>
-            <a:endParaRPr lang="en-US" sz="1550" dirty="0"/>
+              <a:t>Use linked tools when your department needs a structured worksheet, template, checklist, review process, or.</a:t>
+            </a:r>
+            <a:endParaRPr lang="en-US" sz="1320" dirty="0"/>
           </a:p>
         </p:txBody>
       </p:sp>
@@ -14475,13 +14720,16 @@
           <a:ln/>
         </p:spPr>
         <p:txBody>
-          <a:bodyPr wrap="square" lIns="254" tIns="254" rIns="254" bIns="254" rtlCol="0" anchor="t">
+          <a:bodyPr wrap="square" lIns="508" tIns="508" rIns="508" bIns="508" rtlCol="0" anchor="t">
             <a:normAutofit/>
           </a:bodyPr>
           <a:lstStyle/>
           <a:p>
-            <a:r>
-              <a:rPr lang="en-US" sz="1380" dirty="0">
+            <a:pPr indent="0" marL="0">
+              <a:buNone/>
+            </a:pPr>
+            <a:r>
+              <a:rPr lang="en-US" sz="1220" dirty="0">
                 <a:solidFill>
                   <a:srgbClr val="17364A"/>
                 </a:solidFill>
@@ -14491,11 +14739,14 @@
               </a:rPr>
               <a:t>Use a tool when no comparable local process exists.</a:t>
             </a:r>
-            <a:endParaRPr lang="en-US" sz="1380" dirty="0"/>
-          </a:p>
-          <a:p>
-            <a:r>
-              <a:rPr lang="en-US" sz="1380" dirty="0">
+            <a:endParaRPr lang="en-US" sz="1220" dirty="0"/>
+          </a:p>
+          <a:p>
+            <a:pPr indent="0" marL="0">
+              <a:buNone/>
+            </a:pPr>
+            <a:r>
+              <a:rPr lang="en-US" sz="1220" dirty="0">
                 <a:solidFill>
                   <a:srgbClr val="17364A"/>
                 </a:solidFill>
@@ -14503,13 +14754,16 @@
                 <a:ea typeface="Aptos" pitchFamily="34" charset="-122"/>
                 <a:cs typeface="Aptos" pitchFamily="34" charset="-120"/>
               </a:rPr>
-              <a:t>Adapt existing department templates when they already fit the purpose.</a:t>
-            </a:r>
-            <a:endParaRPr lang="en-US" sz="1380" dirty="0"/>
-          </a:p>
-          <a:p>
-            <a:r>
-              <a:rPr lang="en-US" sz="1380" dirty="0">
+              <a:t>Adapt existing department templates when they already fit the.</a:t>
+            </a:r>
+            <a:endParaRPr lang="en-US" sz="1220" dirty="0"/>
+          </a:p>
+          <a:p>
+            <a:pPr indent="0" marL="0">
+              <a:buNone/>
+            </a:pPr>
+            <a:r>
+              <a:rPr lang="en-US" sz="1220" dirty="0">
                 <a:solidFill>
                   <a:srgbClr val="17364A"/>
                 </a:solidFill>
@@ -14519,7 +14773,7 @@
               </a:rPr>
               <a:t>Save the completed artifact as evidence of the decision.</a:t>
             </a:r>
-            <a:endParaRPr lang="en-US" sz="1380" dirty="0"/>
+            <a:endParaRPr lang="en-US" sz="1220" dirty="0"/>
           </a:p>
         </p:txBody>
       </p:sp>
@@ -14820,49 +15074,58 @@
           <a:ln/>
         </p:spPr>
         <p:txBody>
-          <a:bodyPr wrap="square" lIns="635" tIns="635" rIns="635" bIns="635" rtlCol="0" anchor="t">
+          <a:bodyPr wrap="square" lIns="1016" tIns="1016" rIns="1016" bIns="1016" rtlCol="0" anchor="t">
             <a:normAutofit/>
           </a:bodyPr>
           <a:lstStyle/>
           <a:p>
+            <a:pPr indent="0" marL="0">
+              <a:buNone/>
+            </a:pPr>
             <a:r>
               <a:rPr lang="en-US" sz="2100" dirty="0">
                 <a:solidFill>
-                  <a:srgbClr val="17364A"/>
-                </a:solidFill>
-                <a:latin typeface="Aptos" pitchFamily="34" charset="0"/>
-                <a:ea typeface="Aptos" pitchFamily="34" charset="-122"/>
-                <a:cs typeface="Aptos" pitchFamily="34" charset="-120"/>
-              </a:rPr>
-              <a:t>Explain why interoperability is a technical foundation for public health AI.</a:t>
+                  <a:srgbClr val="003A63"/>
+                </a:solidFill>
+                <a:latin typeface="Aptos" pitchFamily="34" charset="0"/>
+                <a:ea typeface="Aptos" pitchFamily="34" charset="-122"/>
+                <a:cs typeface="Aptos" pitchFamily="34" charset="-120"/>
+              </a:rPr>
+              <a:t>• Explain why interoperability is a technical foundation for public health AI.</a:t>
             </a:r>
             <a:endParaRPr lang="en-US" sz="2100" dirty="0"/>
           </a:p>
           <a:p>
+            <a:pPr indent="0" marL="0">
+              <a:buNone/>
+            </a:pPr>
             <a:r>
               <a:rPr lang="en-US" sz="2100" dirty="0">
                 <a:solidFill>
-                  <a:srgbClr val="17364A"/>
-                </a:solidFill>
-                <a:latin typeface="Aptos" pitchFamily="34" charset="0"/>
-                <a:ea typeface="Aptos" pitchFamily="34" charset="-122"/>
-                <a:cs typeface="Aptos" pitchFamily="34" charset="-120"/>
-              </a:rPr>
-              <a:t>Distinguish among HL7 v2 messages, CDA documents, FHIR resources, and APIs.</a:t>
+                  <a:srgbClr val="003A63"/>
+                </a:solidFill>
+                <a:latin typeface="Aptos" pitchFamily="34" charset="0"/>
+                <a:ea typeface="Aptos" pitchFamily="34" charset="-122"/>
+                <a:cs typeface="Aptos" pitchFamily="34" charset="-120"/>
+              </a:rPr>
+              <a:t>• Distinguish among HL7 v2 messages, CDA documents, FHIR resources, and APIs.</a:t>
             </a:r>
             <a:endParaRPr lang="en-US" sz="2100" dirty="0"/>
           </a:p>
           <a:p>
+            <a:pPr indent="0" marL="0">
+              <a:buNone/>
+            </a:pPr>
             <a:r>
               <a:rPr lang="en-US" sz="2100" dirty="0">
                 <a:solidFill>
-                  <a:srgbClr val="17364A"/>
-                </a:solidFill>
-                <a:latin typeface="Aptos" pitchFamily="34" charset="0"/>
-                <a:ea typeface="Aptos" pitchFamily="34" charset="-122"/>
-                <a:cs typeface="Aptos" pitchFamily="34" charset="-120"/>
-              </a:rPr>
-              <a:t>Identify where interoperability standards appear in public health workflows.</a:t>
+                  <a:srgbClr val="003A63"/>
+                </a:solidFill>
+                <a:latin typeface="Aptos" pitchFamily="34" charset="0"/>
+                <a:ea typeface="Aptos" pitchFamily="34" charset="-122"/>
+                <a:cs typeface="Aptos" pitchFamily="34" charset="-120"/>
+              </a:rPr>
+              <a:t>• Identify where interoperability standards appear in public health workflows.</a:t>
             </a:r>
             <a:endParaRPr lang="en-US" sz="2100" dirty="0"/>
           </a:p>
@@ -14942,17 +15205,17 @@
         </p:nvSpPr>
         <p:spPr>
           <a:xfrm>
-            <a:off x="7799832" y="1828800"/>
-            <a:ext cx="3145536" cy="685800"/>
-          </a:xfrm>
-          <a:prstGeom prst="rect">
-            <a:avLst/>
-          </a:prstGeom>
-          <a:noFill/>
-          <a:ln/>
-        </p:spPr>
-        <p:txBody>
-          <a:bodyPr wrap="square" lIns="0" tIns="0" rIns="0" bIns="0" rtlCol="0" anchor="t">
+            <a:off x="7799832" y="1801368"/>
+            <a:ext cx="3145536" cy="758952"/>
+          </a:xfrm>
+          <a:prstGeom prst="rect">
+            <a:avLst/>
+          </a:prstGeom>
+          <a:noFill/>
+          <a:ln/>
+        </p:spPr>
+        <p:txBody>
+          <a:bodyPr wrap="square" lIns="254" tIns="254" rIns="254" bIns="254" rtlCol="0" anchor="t">
             <a:normAutofit/>
           </a:bodyPr>
           <a:lstStyle/>
@@ -14961,7 +15224,7 @@
               <a:buNone/>
             </a:pPr>
             <a:r>
-              <a:rPr lang="en-US" sz="1550" dirty="0">
+              <a:rPr lang="en-US" sz="1320" dirty="0">
                 <a:solidFill>
                   <a:srgbClr val="17364A"/>
                 </a:solidFill>
@@ -14971,7 +15234,7 @@
               </a:rPr>
               <a:t>Explain why interoperability is a technical foundation for public health AI.</a:t>
             </a:r>
-            <a:endParaRPr lang="en-US" sz="1550" dirty="0"/>
+            <a:endParaRPr lang="en-US" sz="1320" dirty="0"/>
           </a:p>
         </p:txBody>
       </p:sp>
@@ -15059,13 +15322,16 @@
           <a:ln/>
         </p:spPr>
         <p:txBody>
-          <a:bodyPr wrap="square" lIns="254" tIns="254" rIns="254" bIns="254" rtlCol="0" anchor="t">
+          <a:bodyPr wrap="square" lIns="508" tIns="508" rIns="508" bIns="508" rtlCol="0" anchor="t">
             <a:normAutofit/>
           </a:bodyPr>
           <a:lstStyle/>
           <a:p>
-            <a:r>
-              <a:rPr lang="en-US" sz="1380" dirty="0">
+            <a:pPr indent="0" marL="0">
+              <a:buNone/>
+            </a:pPr>
+            <a:r>
+              <a:rPr lang="en-US" sz="1220" dirty="0">
                 <a:solidFill>
                   <a:srgbClr val="17364A"/>
                 </a:solidFill>
@@ -15073,13 +15339,16 @@
                 <a:ea typeface="Aptos" pitchFamily="34" charset="-122"/>
                 <a:cs typeface="Aptos" pitchFamily="34" charset="-120"/>
               </a:rPr>
-              <a:t>Explain the purpose of implementation guides and terminology standards.</a:t>
-            </a:r>
-            <a:endParaRPr lang="en-US" sz="1380" dirty="0"/>
-          </a:p>
-          <a:p>
-            <a:r>
-              <a:rPr lang="en-US" sz="1380" dirty="0">
+              <a:t>Explain the purpose of implementation guides and terminology.</a:t>
+            </a:r>
+            <a:endParaRPr lang="en-US" sz="1220" dirty="0"/>
+          </a:p>
+          <a:p>
+            <a:pPr indent="0" marL="0">
+              <a:buNone/>
+            </a:pPr>
+            <a:r>
+              <a:rPr lang="en-US" sz="1220" dirty="0">
                 <a:solidFill>
                   <a:srgbClr val="17364A"/>
                 </a:solidFill>
@@ -15087,9 +15356,9 @@
                 <a:ea typeface="Aptos" pitchFamily="34" charset="-122"/>
                 <a:cs typeface="Aptos" pitchFamily="34" charset="-120"/>
               </a:rPr>
-              <a:t>Develop interoperability requirements and vendor questions for AI-supported workflows.</a:t>
-            </a:r>
-            <a:endParaRPr lang="en-US" sz="1380" dirty="0"/>
+              <a:t>Develop interoperability requirements and vendor questions for.</a:t>
+            </a:r>
+            <a:endParaRPr lang="en-US" sz="1220" dirty="0"/>
           </a:p>
         </p:txBody>
       </p:sp>
@@ -15167,17 +15436,17 @@
         </p:nvSpPr>
         <p:spPr>
           <a:xfrm>
-            <a:off x="7799832" y="5001768"/>
-            <a:ext cx="3145536" cy="502920"/>
-          </a:xfrm>
-          <a:prstGeom prst="rect">
-            <a:avLst/>
-          </a:prstGeom>
-          <a:noFill/>
-          <a:ln/>
-        </p:spPr>
-        <p:txBody>
-          <a:bodyPr wrap="square" lIns="0" tIns="0" rIns="0" bIns="0" rtlCol="0" anchor="t">
+            <a:off x="7799832" y="4974336"/>
+            <a:ext cx="3145536" cy="576072"/>
+          </a:xfrm>
+          <a:prstGeom prst="rect">
+            <a:avLst/>
+          </a:prstGeom>
+          <a:noFill/>
+          <a:ln/>
+        </p:spPr>
+        <p:txBody>
+          <a:bodyPr wrap="square" lIns="254" tIns="254" rIns="254" bIns="254" rtlCol="0" anchor="t">
             <a:normAutofit/>
           </a:bodyPr>
           <a:lstStyle/>
@@ -15186,7 +15455,7 @@
               <a:buNone/>
             </a:pPr>
             <a:r>
-              <a:rPr lang="en-US" sz="1550" dirty="0">
+              <a:rPr lang="en-US" sz="1320" dirty="0">
                 <a:solidFill>
                   <a:srgbClr val="17364A"/>
                 </a:solidFill>
@@ -15194,9 +15463,9 @@
                 <a:ea typeface="Aptos" pitchFamily="34" charset="-122"/>
                 <a:cs typeface="Aptos" pitchFamily="34" charset="-120"/>
               </a:rPr>
-              <a:t>Use the assignment to test whether you can explain the concept, apply it to a realistic public health situation, and identify what would need review before the work moves forward.</a:t>
-            </a:r>
-            <a:endParaRPr lang="en-US" sz="1550" dirty="0"/>
+              <a:t>Use the assignment to test whether you can explain the concept, apply it to a realistic public health situation, and.</a:t>
+            </a:r>
+            <a:endParaRPr lang="en-US" sz="1320" dirty="0"/>
           </a:p>
         </p:txBody>
       </p:sp>
@@ -15497,49 +15766,58 @@
           <a:ln/>
         </p:spPr>
         <p:txBody>
-          <a:bodyPr wrap="square" lIns="635" tIns="635" rIns="635" bIns="635" rtlCol="0" anchor="t">
+          <a:bodyPr wrap="square" lIns="1016" tIns="1016" rIns="1016" bIns="1016" rtlCol="0" anchor="t">
             <a:normAutofit/>
           </a:bodyPr>
           <a:lstStyle/>
           <a:p>
+            <a:pPr indent="0" marL="0">
+              <a:buNone/>
+            </a:pPr>
             <a:r>
               <a:rPr lang="en-US" sz="2100" dirty="0">
                 <a:solidFill>
-                  <a:srgbClr val="17364A"/>
-                </a:solidFill>
-                <a:latin typeface="Aptos" pitchFamily="34" charset="0"/>
-                <a:ea typeface="Aptos" pitchFamily="34" charset="-122"/>
-                <a:cs typeface="Aptos" pitchFamily="34" charset="-120"/>
-              </a:rPr>
-              <a:t>Public health AI depends on the ability of systems to exchange and interpret data.</a:t>
+                  <a:srgbClr val="003A63"/>
+                </a:solidFill>
+                <a:latin typeface="Aptos" pitchFamily="34" charset="0"/>
+                <a:ea typeface="Aptos" pitchFamily="34" charset="-122"/>
+                <a:cs typeface="Aptos" pitchFamily="34" charset="-120"/>
+              </a:rPr>
+              <a:t>• Public health AI depends on the ability of systems to exchange and interpret data.</a:t>
             </a:r>
             <a:endParaRPr lang="en-US" sz="2100" dirty="0"/>
           </a:p>
           <a:p>
+            <a:pPr indent="0" marL="0">
+              <a:buNone/>
+            </a:pPr>
             <a:r>
               <a:rPr lang="en-US" sz="2100" dirty="0">
                 <a:solidFill>
-                  <a:srgbClr val="17364A"/>
-                </a:solidFill>
-                <a:latin typeface="Aptos" pitchFamily="34" charset="0"/>
-                <a:ea typeface="Aptos" pitchFamily="34" charset="-122"/>
-                <a:cs typeface="Aptos" pitchFamily="34" charset="-120"/>
-              </a:rPr>
-              <a:t>Interoperability is the discipline that makes this exchange possible across EHRs, laboratories, HIEs,.</a:t>
+                  <a:srgbClr val="003A63"/>
+                </a:solidFill>
+                <a:latin typeface="Aptos" pitchFamily="34" charset="0"/>
+                <a:ea typeface="Aptos" pitchFamily="34" charset="-122"/>
+                <a:cs typeface="Aptos" pitchFamily="34" charset="-120"/>
+              </a:rPr>
+              <a:t>• Interoperability is the discipline that makes this exchange possible across EHRs,.</a:t>
             </a:r>
             <a:endParaRPr lang="en-US" sz="2100" dirty="0"/>
           </a:p>
           <a:p>
+            <a:pPr indent="0" marL="0">
+              <a:buNone/>
+            </a:pPr>
             <a:r>
               <a:rPr lang="en-US" sz="2100" dirty="0">
                 <a:solidFill>
-                  <a:srgbClr val="17364A"/>
-                </a:solidFill>
-                <a:latin typeface="Aptos" pitchFamily="34" charset="0"/>
-                <a:ea typeface="Aptos" pitchFamily="34" charset="-122"/>
-                <a:cs typeface="Aptos" pitchFamily="34" charset="-120"/>
-              </a:rPr>
-              <a:t>This module introduces the major standards that public health staff encounter, including HL7 v2, CDA,.</a:t>
+                  <a:srgbClr val="003A63"/>
+                </a:solidFill>
+                <a:latin typeface="Aptos" pitchFamily="34" charset="0"/>
+                <a:ea typeface="Aptos" pitchFamily="34" charset="-122"/>
+                <a:cs typeface="Aptos" pitchFamily="34" charset="-120"/>
+              </a:rPr>
+              <a:t>• This module introduces the major standards that public health staff encounter, including HL7.</a:t>
             </a:r>
             <a:endParaRPr lang="en-US" sz="2100" dirty="0"/>
           </a:p>
@@ -15619,17 +15897,17 @@
         </p:nvSpPr>
         <p:spPr>
           <a:xfrm>
-            <a:off x="7799832" y="1828800"/>
-            <a:ext cx="3145536" cy="685800"/>
-          </a:xfrm>
-          <a:prstGeom prst="rect">
-            <a:avLst/>
-          </a:prstGeom>
-          <a:noFill/>
-          <a:ln/>
-        </p:spPr>
-        <p:txBody>
-          <a:bodyPr wrap="square" lIns="0" tIns="0" rIns="0" bIns="0" rtlCol="0" anchor="t">
+            <a:off x="7799832" y="1801368"/>
+            <a:ext cx="3145536" cy="758952"/>
+          </a:xfrm>
+          <a:prstGeom prst="rect">
+            <a:avLst/>
+          </a:prstGeom>
+          <a:noFill/>
+          <a:ln/>
+        </p:spPr>
+        <p:txBody>
+          <a:bodyPr wrap="square" lIns="254" tIns="254" rIns="254" bIns="254" rtlCol="0" anchor="t">
             <a:normAutofit/>
           </a:bodyPr>
           <a:lstStyle/>
@@ -15638,7 +15916,7 @@
               <a:buNone/>
             </a:pPr>
             <a:r>
-              <a:rPr lang="en-US" sz="1550" dirty="0">
+              <a:rPr lang="en-US" sz="1320" dirty="0">
                 <a:solidFill>
                   <a:srgbClr val="17364A"/>
                 </a:solidFill>
@@ -15648,7 +15926,7 @@
               </a:rPr>
               <a:t>Public health AI depends on the ability of systems to exchange and interpret data.</a:t>
             </a:r>
-            <a:endParaRPr lang="en-US" sz="1550" dirty="0"/>
+            <a:endParaRPr lang="en-US" sz="1320" dirty="0"/>
           </a:p>
         </p:txBody>
       </p:sp>
@@ -15736,13 +16014,16 @@
           <a:ln/>
         </p:spPr>
         <p:txBody>
-          <a:bodyPr wrap="square" lIns="254" tIns="254" rIns="254" bIns="254" rtlCol="0" anchor="t">
+          <a:bodyPr wrap="square" lIns="508" tIns="508" rIns="508" bIns="508" rtlCol="0" anchor="t">
             <a:normAutofit/>
           </a:bodyPr>
           <a:lstStyle/>
           <a:p>
-            <a:r>
-              <a:rPr lang="en-US" sz="1380" dirty="0">
+            <a:pPr indent="0" marL="0">
+              <a:buNone/>
+            </a:pPr>
+            <a:r>
+              <a:rPr lang="en-US" sz="1220" dirty="0">
                 <a:solidFill>
                   <a:srgbClr val="17364A"/>
                 </a:solidFill>
@@ -15750,13 +16031,16 @@
                 <a:ea typeface="Aptos" pitchFamily="34" charset="-122"/>
                 <a:cs typeface="Aptos" pitchFamily="34" charset="-120"/>
               </a:rPr>
-              <a:t>Interoperability is the discipline that makes this exchange possible across EHRs,.</a:t>
-            </a:r>
-            <a:endParaRPr lang="en-US" sz="1380" dirty="0"/>
-          </a:p>
-          <a:p>
-            <a:r>
-              <a:rPr lang="en-US" sz="1380" dirty="0">
+              <a:t>Interoperability is the discipline that makes this exchange.</a:t>
+            </a:r>
+            <a:endParaRPr lang="en-US" sz="1220" dirty="0"/>
+          </a:p>
+          <a:p>
+            <a:pPr indent="0" marL="0">
+              <a:buNone/>
+            </a:pPr>
+            <a:r>
+              <a:rPr lang="en-US" sz="1220" dirty="0">
                 <a:solidFill>
                   <a:srgbClr val="17364A"/>
                 </a:solidFill>
@@ -15764,9 +16048,9 @@
                 <a:ea typeface="Aptos" pitchFamily="34" charset="-122"/>
                 <a:cs typeface="Aptos" pitchFamily="34" charset="-120"/>
               </a:rPr>
-              <a:t>This module introduces the major standards that public health staff encounter, including.</a:t>
-            </a:r>
-            <a:endParaRPr lang="en-US" sz="1380" dirty="0"/>
+              <a:t>This module introduces the major standards that public health.</a:t>
+            </a:r>
+            <a:endParaRPr lang="en-US" sz="1220" dirty="0"/>
           </a:p>
         </p:txBody>
       </p:sp>
@@ -15844,17 +16128,17 @@
         </p:nvSpPr>
         <p:spPr>
           <a:xfrm>
-            <a:off x="7799832" y="5001768"/>
-            <a:ext cx="3145536" cy="502920"/>
-          </a:xfrm>
-          <a:prstGeom prst="rect">
-            <a:avLst/>
-          </a:prstGeom>
-          <a:noFill/>
-          <a:ln/>
-        </p:spPr>
-        <p:txBody>
-          <a:bodyPr wrap="square" lIns="0" tIns="0" rIns="0" bIns="0" rtlCol="0" anchor="t">
+            <a:off x="7799832" y="4974336"/>
+            <a:ext cx="3145536" cy="576072"/>
+          </a:xfrm>
+          <a:prstGeom prst="rect">
+            <a:avLst/>
+          </a:prstGeom>
+          <a:noFill/>
+          <a:ln/>
+        </p:spPr>
+        <p:txBody>
+          <a:bodyPr wrap="square" lIns="254" tIns="254" rIns="254" bIns="254" rtlCol="0" anchor="t">
             <a:normAutofit/>
           </a:bodyPr>
           <a:lstStyle/>
@@ -15863,7 +16147,7 @@
               <a:buNone/>
             </a:pPr>
             <a:r>
-              <a:rPr lang="en-US" sz="1550" dirty="0">
+              <a:rPr lang="en-US" sz="1320" dirty="0">
                 <a:solidFill>
                   <a:srgbClr val="17364A"/>
                 </a:solidFill>
@@ -15871,9 +16155,9 @@
                 <a:ea typeface="Aptos" pitchFamily="34" charset="-122"/>
                 <a:cs typeface="Aptos" pitchFamily="34" charset="-120"/>
               </a:rPr>
-              <a:t>Connect the concept to public health purpose, responsible use, required safeguards, documentation, and the next action a department should take.</a:t>
-            </a:r>
-            <a:endParaRPr lang="en-US" sz="1550" dirty="0"/>
+              <a:t>Connect the concept to public health purpose, responsible use, required safeguards, documentation, and the next action a.</a:t>
+            </a:r>
+            <a:endParaRPr lang="en-US" sz="1320" dirty="0"/>
           </a:p>
         </p:txBody>
       </p:sp>
@@ -16174,49 +16458,58 @@
           <a:ln/>
         </p:spPr>
         <p:txBody>
-          <a:bodyPr wrap="square" lIns="635" tIns="635" rIns="635" bIns="635" rtlCol="0" anchor="t">
+          <a:bodyPr wrap="square" lIns="1016" tIns="1016" rIns="1016" bIns="1016" rtlCol="0" anchor="t">
             <a:normAutofit/>
           </a:bodyPr>
           <a:lstStyle/>
           <a:p>
+            <a:pPr indent="0" marL="0">
+              <a:buNone/>
+            </a:pPr>
             <a:r>
               <a:rPr lang="en-US" sz="2100" dirty="0">
                 <a:solidFill>
-                  <a:srgbClr val="17364A"/>
-                </a:solidFill>
-                <a:latin typeface="Aptos" pitchFamily="34" charset="0"/>
-                <a:ea typeface="Aptos" pitchFamily="34" charset="-122"/>
-                <a:cs typeface="Aptos" pitchFamily="34" charset="-120"/>
-              </a:rPr>
-              <a:t>This national-level module is intended for training and planning purposes.</a:t>
+                  <a:srgbClr val="003A63"/>
+                </a:solidFill>
+                <a:latin typeface="Aptos" pitchFamily="34" charset="0"/>
+                <a:ea typeface="Aptos" pitchFamily="34" charset="-122"/>
+                <a:cs typeface="Aptos" pitchFamily="34" charset="-120"/>
+              </a:rPr>
+              <a:t>• This national-level module is intended for training and planning purposes.</a:t>
             </a:r>
             <a:endParaRPr lang="en-US" sz="2100" dirty="0"/>
           </a:p>
           <a:p>
+            <a:pPr indent="0" marL="0">
+              <a:buNone/>
+            </a:pPr>
             <a:r>
               <a:rPr lang="en-US" sz="2100" dirty="0">
                 <a:solidFill>
-                  <a:srgbClr val="17364A"/>
-                </a:solidFill>
-                <a:latin typeface="Aptos" pitchFamily="34" charset="0"/>
-                <a:ea typeface="Aptos" pitchFamily="34" charset="-122"/>
-                <a:cs typeface="Aptos" pitchFamily="34" charset="-120"/>
-              </a:rPr>
-              <a:t>It does not replace legal, privacy, procurement, civil rights, records, or agency policy review.</a:t>
+                  <a:srgbClr val="003A63"/>
+                </a:solidFill>
+                <a:latin typeface="Aptos" pitchFamily="34" charset="0"/>
+                <a:ea typeface="Aptos" pitchFamily="34" charset="-122"/>
+                <a:cs typeface="Aptos" pitchFamily="34" charset="-120"/>
+              </a:rPr>
+              <a:t>• It does not replace legal, privacy, procurement, civil rights, records, or agency policy review.</a:t>
             </a:r>
             <a:endParaRPr lang="en-US" sz="2100" dirty="0"/>
           </a:p>
           <a:p>
+            <a:pPr indent="0" marL="0">
+              <a:buNone/>
+            </a:pPr>
             <a:r>
               <a:rPr lang="en-US" sz="2100" dirty="0">
                 <a:solidFill>
-                  <a:srgbClr val="17364A"/>
-                </a:solidFill>
-                <a:latin typeface="Aptos" pitchFamily="34" charset="0"/>
-                <a:ea typeface="Aptos" pitchFamily="34" charset="-122"/>
-                <a:cs typeface="Aptos" pitchFamily="34" charset="-120"/>
-              </a:rPr>
-              <a:t>Learners should confirm applicable requirements in their own jurisdiction and organization before.</a:t>
+                  <a:srgbClr val="003A63"/>
+                </a:solidFill>
+                <a:latin typeface="Aptos" pitchFamily="34" charset="0"/>
+                <a:ea typeface="Aptos" pitchFamily="34" charset="-122"/>
+                <a:cs typeface="Aptos" pitchFamily="34" charset="-120"/>
+              </a:rPr>
+              <a:t>• Learners should confirm applicable requirements in their own jurisdiction and organization.</a:t>
             </a:r>
             <a:endParaRPr lang="en-US" sz="2100" dirty="0"/>
           </a:p>
@@ -16296,17 +16589,17 @@
         </p:nvSpPr>
         <p:spPr>
           <a:xfrm>
-            <a:off x="7799832" y="1828800"/>
-            <a:ext cx="3145536" cy="685800"/>
-          </a:xfrm>
-          <a:prstGeom prst="rect">
-            <a:avLst/>
-          </a:prstGeom>
-          <a:noFill/>
-          <a:ln/>
-        </p:spPr>
-        <p:txBody>
-          <a:bodyPr wrap="square" lIns="0" tIns="0" rIns="0" bIns="0" rtlCol="0" anchor="t">
+            <a:off x="7799832" y="1801368"/>
+            <a:ext cx="3145536" cy="758952"/>
+          </a:xfrm>
+          <a:prstGeom prst="rect">
+            <a:avLst/>
+          </a:prstGeom>
+          <a:noFill/>
+          <a:ln/>
+        </p:spPr>
+        <p:txBody>
+          <a:bodyPr wrap="square" lIns="254" tIns="254" rIns="254" bIns="254" rtlCol="0" anchor="t">
             <a:normAutofit/>
           </a:bodyPr>
           <a:lstStyle/>
@@ -16315,7 +16608,7 @@
               <a:buNone/>
             </a:pPr>
             <a:r>
-              <a:rPr lang="en-US" sz="1550" dirty="0">
+              <a:rPr lang="en-US" sz="1320" dirty="0">
                 <a:solidFill>
                   <a:srgbClr val="17364A"/>
                 </a:solidFill>
@@ -16325,7 +16618,7 @@
               </a:rPr>
               <a:t>This national-level module is intended for training and planning purposes.</a:t>
             </a:r>
-            <a:endParaRPr lang="en-US" sz="1550" dirty="0"/>
+            <a:endParaRPr lang="en-US" sz="1320" dirty="0"/>
           </a:p>
         </p:txBody>
       </p:sp>
@@ -16413,13 +16706,16 @@
           <a:ln/>
         </p:spPr>
         <p:txBody>
-          <a:bodyPr wrap="square" lIns="254" tIns="254" rIns="254" bIns="254" rtlCol="0" anchor="t">
+          <a:bodyPr wrap="square" lIns="508" tIns="508" rIns="508" bIns="508" rtlCol="0" anchor="t">
             <a:normAutofit/>
           </a:bodyPr>
           <a:lstStyle/>
           <a:p>
-            <a:r>
-              <a:rPr lang="en-US" sz="1380" dirty="0">
+            <a:pPr indent="0" marL="0">
+              <a:buNone/>
+            </a:pPr>
+            <a:r>
+              <a:rPr lang="en-US" sz="1220" dirty="0">
                 <a:solidFill>
                   <a:srgbClr val="17364A"/>
                 </a:solidFill>
@@ -16427,13 +16723,16 @@
                 <a:ea typeface="Aptos" pitchFamily="34" charset="-122"/>
                 <a:cs typeface="Aptos" pitchFamily="34" charset="-120"/>
               </a:rPr>
-              <a:t>This national-level module is intended for training and planning purposes.</a:t>
-            </a:r>
-            <a:endParaRPr lang="en-US" sz="1380" dirty="0"/>
-          </a:p>
-          <a:p>
-            <a:r>
-              <a:rPr lang="en-US" sz="1380" dirty="0">
+              <a:t>This national-level module is intended for training and planning.</a:t>
+            </a:r>
+            <a:endParaRPr lang="en-US" sz="1220" dirty="0"/>
+          </a:p>
+          <a:p>
+            <a:pPr indent="0" marL="0">
+              <a:buNone/>
+            </a:pPr>
+            <a:r>
+              <a:rPr lang="en-US" sz="1220" dirty="0">
                 <a:solidFill>
                   <a:srgbClr val="17364A"/>
                 </a:solidFill>
@@ -16441,13 +16740,16 @@
                 <a:ea typeface="Aptos" pitchFamily="34" charset="-122"/>
                 <a:cs typeface="Aptos" pitchFamily="34" charset="-120"/>
               </a:rPr>
-              <a:t>It does not replace legal, privacy, procurement, civil rights, records, or agency policy.</a:t>
-            </a:r>
-            <a:endParaRPr lang="en-US" sz="1380" dirty="0"/>
-          </a:p>
-          <a:p>
-            <a:r>
-              <a:rPr lang="en-US" sz="1380" dirty="0">
+              <a:t>It does not replace legal, privacy, procurement, civil rights,.</a:t>
+            </a:r>
+            <a:endParaRPr lang="en-US" sz="1220" dirty="0"/>
+          </a:p>
+          <a:p>
+            <a:pPr indent="0" marL="0">
+              <a:buNone/>
+            </a:pPr>
+            <a:r>
+              <a:rPr lang="en-US" sz="1220" dirty="0">
                 <a:solidFill>
                   <a:srgbClr val="17364A"/>
                 </a:solidFill>
@@ -16455,9 +16757,9 @@
                 <a:ea typeface="Aptos" pitchFamily="34" charset="-122"/>
                 <a:cs typeface="Aptos" pitchFamily="34" charset="-120"/>
               </a:rPr>
-              <a:t>Learners should confirm applicable requirements in their own jurisdiction and organization.</a:t>
-            </a:r>
-            <a:endParaRPr lang="en-US" sz="1380" dirty="0"/>
+              <a:t>Learners should confirm applicable requirements in their own.</a:t>
+            </a:r>
+            <a:endParaRPr lang="en-US" sz="1220" dirty="0"/>
           </a:p>
         </p:txBody>
       </p:sp>
@@ -16535,17 +16837,17 @@
         </p:nvSpPr>
         <p:spPr>
           <a:xfrm>
-            <a:off x="7799832" y="5001768"/>
-            <a:ext cx="3145536" cy="502920"/>
-          </a:xfrm>
-          <a:prstGeom prst="rect">
-            <a:avLst/>
-          </a:prstGeom>
-          <a:noFill/>
-          <a:ln/>
-        </p:spPr>
-        <p:txBody>
-          <a:bodyPr wrap="square" lIns="0" tIns="0" rIns="0" bIns="0" rtlCol="0" anchor="t">
+            <a:off x="7799832" y="4974336"/>
+            <a:ext cx="3145536" cy="576072"/>
+          </a:xfrm>
+          <a:prstGeom prst="rect">
+            <a:avLst/>
+          </a:prstGeom>
+          <a:noFill/>
+          <a:ln/>
+        </p:spPr>
+        <p:txBody>
+          <a:bodyPr wrap="square" lIns="254" tIns="254" rIns="254" bIns="254" rtlCol="0" anchor="t">
             <a:normAutofit/>
           </a:bodyPr>
           <a:lstStyle/>
@@ -16554,7 +16856,7 @@
               <a:buNone/>
             </a:pPr>
             <a:r>
-              <a:rPr lang="en-US" sz="1550" dirty="0">
+              <a:rPr lang="en-US" sz="1320" dirty="0">
                 <a:solidFill>
                   <a:srgbClr val="17364A"/>
                 </a:solidFill>
@@ -16562,9 +16864,9 @@
                 <a:ea typeface="Aptos" pitchFamily="34" charset="-122"/>
                 <a:cs typeface="Aptos" pitchFamily="34" charset="-120"/>
               </a:rPr>
-              <a:t>Translate this concept into clear decision rights, review steps, documentation expectations, and escalation paths before an AI-supported workflow is approved.</a:t>
-            </a:r>
-            <a:endParaRPr lang="en-US" sz="1550" dirty="0"/>
+              <a:t>Translate this concept into clear decision rights, review steps, documentation expectations, and escalation paths before.</a:t>
+            </a:r>
+            <a:endParaRPr lang="en-US" sz="1320" dirty="0"/>
           </a:p>
         </p:txBody>
       </p:sp>
@@ -16865,49 +17167,58 @@
           <a:ln/>
         </p:spPr>
         <p:txBody>
-          <a:bodyPr wrap="square" lIns="635" tIns="635" rIns="635" bIns="635" rtlCol="0" anchor="t">
+          <a:bodyPr wrap="square" lIns="1016" tIns="1016" rIns="1016" bIns="1016" rtlCol="0" anchor="t">
             <a:normAutofit/>
           </a:bodyPr>
           <a:lstStyle/>
           <a:p>
+            <a:pPr indent="0" marL="0">
+              <a:buNone/>
+            </a:pPr>
             <a:r>
               <a:rPr lang="en-US" sz="2100" dirty="0">
                 <a:solidFill>
-                  <a:srgbClr val="17364A"/>
-                </a:solidFill>
-                <a:latin typeface="Aptos" pitchFamily="34" charset="0"/>
-                <a:ea typeface="Aptos" pitchFamily="34" charset="-122"/>
-                <a:cs typeface="Aptos" pitchFamily="34" charset="-120"/>
-              </a:rPr>
-              <a:t>Interoperability matters because AI tools cannot safely use data they cannot access, parse, or interpret.</a:t>
+                  <a:srgbClr val="003A63"/>
+                </a:solidFill>
+                <a:latin typeface="Aptos" pitchFamily="34" charset="0"/>
+                <a:ea typeface="Aptos" pitchFamily="34" charset="-122"/>
+                <a:cs typeface="Aptos" pitchFamily="34" charset="-120"/>
+              </a:rPr>
+              <a:t>• Interoperability matters because AI tools cannot safely use data they cannot access, parse, or.</a:t>
             </a:r>
             <a:endParaRPr lang="en-US" sz="2100" dirty="0"/>
           </a:p>
           <a:p>
+            <a:pPr indent="0" marL="0">
+              <a:buNone/>
+            </a:pPr>
             <a:r>
               <a:rPr lang="en-US" sz="2100" dirty="0">
                 <a:solidFill>
-                  <a:srgbClr val="17364A"/>
-                </a:solidFill>
-                <a:latin typeface="Aptos" pitchFamily="34" charset="0"/>
-                <a:ea typeface="Aptos" pitchFamily="34" charset="-122"/>
-                <a:cs typeface="Aptos" pitchFamily="34" charset="-120"/>
-              </a:rPr>
-              <a:t>A public health agency may receive data from hundreds or thousands of healthcare and laboratory partners.</a:t>
+                  <a:srgbClr val="003A63"/>
+                </a:solidFill>
+                <a:latin typeface="Aptos" pitchFamily="34" charset="0"/>
+                <a:ea typeface="Aptos" pitchFamily="34" charset="-122"/>
+                <a:cs typeface="Aptos" pitchFamily="34" charset="-120"/>
+              </a:rPr>
+              <a:t>• A public health agency may receive data from hundreds or thousands of healthcare and.</a:t>
             </a:r>
             <a:endParaRPr lang="en-US" sz="2100" dirty="0"/>
           </a:p>
           <a:p>
+            <a:pPr indent="0" marL="0">
+              <a:buNone/>
+            </a:pPr>
             <a:r>
               <a:rPr lang="en-US" sz="2100" dirty="0">
                 <a:solidFill>
-                  <a:srgbClr val="17364A"/>
-                </a:solidFill>
-                <a:latin typeface="Aptos" pitchFamily="34" charset="0"/>
-                <a:ea typeface="Aptos" pitchFamily="34" charset="-122"/>
-                <a:cs typeface="Aptos" pitchFamily="34" charset="-120"/>
-              </a:rPr>
-              <a:t>Without consistent standards, data exchange becomes a patchwork of custom interfaces, manual uploads,.</a:t>
+                  <a:srgbClr val="003A63"/>
+                </a:solidFill>
+                <a:latin typeface="Aptos" pitchFamily="34" charset="0"/>
+                <a:ea typeface="Aptos" pitchFamily="34" charset="-122"/>
+                <a:cs typeface="Aptos" pitchFamily="34" charset="-120"/>
+              </a:rPr>
+              <a:t>• Without consistent standards, data exchange becomes a patchwork of custom interfaces, manual.</a:t>
             </a:r>
             <a:endParaRPr lang="en-US" sz="2100" dirty="0"/>
           </a:p>
@@ -16987,17 +17298,17 @@
         </p:nvSpPr>
         <p:spPr>
           <a:xfrm>
-            <a:off x="7799832" y="1828800"/>
-            <a:ext cx="3145536" cy="685800"/>
-          </a:xfrm>
-          <a:prstGeom prst="rect">
-            <a:avLst/>
-          </a:prstGeom>
-          <a:noFill/>
-          <a:ln/>
-        </p:spPr>
-        <p:txBody>
-          <a:bodyPr wrap="square" lIns="0" tIns="0" rIns="0" bIns="0" rtlCol="0" anchor="t">
+            <a:off x="7799832" y="1801368"/>
+            <a:ext cx="3145536" cy="758952"/>
+          </a:xfrm>
+          <a:prstGeom prst="rect">
+            <a:avLst/>
+          </a:prstGeom>
+          <a:noFill/>
+          <a:ln/>
+        </p:spPr>
+        <p:txBody>
+          <a:bodyPr wrap="square" lIns="254" tIns="254" rIns="254" bIns="254" rtlCol="0" anchor="t">
             <a:normAutofit/>
           </a:bodyPr>
           <a:lstStyle/>
@@ -17006,7 +17317,7 @@
               <a:buNone/>
             </a:pPr>
             <a:r>
-              <a:rPr lang="en-US" sz="1550" dirty="0">
+              <a:rPr lang="en-US" sz="1320" dirty="0">
                 <a:solidFill>
                   <a:srgbClr val="17364A"/>
                 </a:solidFill>
@@ -17016,7 +17327,7 @@
               </a:rPr>
               <a:t>Interoperability matters because AI tools cannot safely use data they cannot access, parse, or interpret.</a:t>
             </a:r>
-            <a:endParaRPr lang="en-US" sz="1550" dirty="0"/>
+            <a:endParaRPr lang="en-US" sz="1320" dirty="0"/>
           </a:p>
         </p:txBody>
       </p:sp>
@@ -17104,13 +17415,16 @@
           <a:ln/>
         </p:spPr>
         <p:txBody>
-          <a:bodyPr wrap="square" lIns="254" tIns="254" rIns="254" bIns="254" rtlCol="0" anchor="t">
+          <a:bodyPr wrap="square" lIns="508" tIns="508" rIns="508" bIns="508" rtlCol="0" anchor="t">
             <a:normAutofit/>
           </a:bodyPr>
           <a:lstStyle/>
           <a:p>
-            <a:r>
-              <a:rPr lang="en-US" sz="1380" dirty="0">
+            <a:pPr indent="0" marL="0">
+              <a:buNone/>
+            </a:pPr>
+            <a:r>
+              <a:rPr lang="en-US" sz="1220" dirty="0">
                 <a:solidFill>
                   <a:srgbClr val="17364A"/>
                 </a:solidFill>
@@ -17118,13 +17432,16 @@
                 <a:ea typeface="Aptos" pitchFamily="34" charset="-122"/>
                 <a:cs typeface="Aptos" pitchFamily="34" charset="-120"/>
               </a:rPr>
-              <a:t>Without consistent standards, data exchange becomes a patchwork of custom interfaces,.</a:t>
-            </a:r>
-            <a:endParaRPr lang="en-US" sz="1380" dirty="0"/>
-          </a:p>
-          <a:p>
-            <a:r>
-              <a:rPr lang="en-US" sz="1380" dirty="0">
+              <a:t>Without consistent standards, data exchange becomes a patchwork of.</a:t>
+            </a:r>
+            <a:endParaRPr lang="en-US" sz="1220" dirty="0"/>
+          </a:p>
+          <a:p>
+            <a:pPr indent="0" marL="0">
+              <a:buNone/>
+            </a:pPr>
+            <a:r>
+              <a:rPr lang="en-US" sz="1220" dirty="0">
                 <a:solidFill>
                   <a:srgbClr val="17364A"/>
                 </a:solidFill>
@@ -17132,13 +17449,16 @@
                 <a:ea typeface="Aptos" pitchFamily="34" charset="-122"/>
                 <a:cs typeface="Aptos" pitchFamily="34" charset="-120"/>
               </a:rPr>
-              <a:t>AI tools built on top of that environment may appear sophisticated while depending on.</a:t>
-            </a:r>
-            <a:endParaRPr lang="en-US" sz="1380" dirty="0"/>
-          </a:p>
-          <a:p>
-            <a:r>
-              <a:rPr lang="en-US" sz="1380" dirty="0">
+              <a:t>AI tools built on top of that environment may appear sophisticated.</a:t>
+            </a:r>
+            <a:endParaRPr lang="en-US" sz="1220" dirty="0"/>
+          </a:p>
+          <a:p>
+            <a:pPr indent="0" marL="0">
+              <a:buNone/>
+            </a:pPr>
+            <a:r>
+              <a:rPr lang="en-US" sz="1220" dirty="0">
                 <a:solidFill>
                   <a:srgbClr val="17364A"/>
                 </a:solidFill>
@@ -17148,7 +17468,7 @@
               </a:rPr>
               <a:t>Standards also affect equity and efficiency.</a:t>
             </a:r>
-            <a:endParaRPr lang="en-US" sz="1380" dirty="0"/>
+            <a:endParaRPr lang="en-US" sz="1220" dirty="0"/>
           </a:p>
         </p:txBody>
       </p:sp>
@@ -17226,17 +17546,17 @@
         </p:nvSpPr>
         <p:spPr>
           <a:xfrm>
-            <a:off x="7799832" y="5001768"/>
-            <a:ext cx="3145536" cy="502920"/>
-          </a:xfrm>
-          <a:prstGeom prst="rect">
-            <a:avLst/>
-          </a:prstGeom>
-          <a:noFill/>
-          <a:ln/>
-        </p:spPr>
-        <p:txBody>
-          <a:bodyPr wrap="square" lIns="0" tIns="0" rIns="0" bIns="0" rtlCol="0" anchor="t">
+            <a:off x="7799832" y="4974336"/>
+            <a:ext cx="3145536" cy="576072"/>
+          </a:xfrm>
+          <a:prstGeom prst="rect">
+            <a:avLst/>
+          </a:prstGeom>
+          <a:noFill/>
+          <a:ln/>
+        </p:spPr>
+        <p:txBody>
+          <a:bodyPr wrap="square" lIns="254" tIns="254" rIns="254" bIns="254" rtlCol="0" anchor="t">
             <a:normAutofit/>
           </a:bodyPr>
           <a:lstStyle/>
@@ -17245,7 +17565,7 @@
               <a:buNone/>
             </a:pPr>
             <a:r>
-              <a:rPr lang="en-US" sz="1550" dirty="0">
+              <a:rPr lang="en-US" sz="1320" dirty="0">
                 <a:solidFill>
                   <a:srgbClr val="17364A"/>
                 </a:solidFill>
@@ -17253,9 +17573,9 @@
                 <a:ea typeface="Aptos" pitchFamily="34" charset="-122"/>
                 <a:cs typeface="Aptos" pitchFamily="34" charset="-120"/>
               </a:rPr>
-              <a:t>Connect the concept to public health purpose, responsible use, required safeguards, documentation, and the next action a department should take.</a:t>
-            </a:r>
-            <a:endParaRPr lang="en-US" sz="1550" dirty="0"/>
+              <a:t>Connect the concept to public health purpose, responsible use, required safeguards, documentation, and the next action a.</a:t>
+            </a:r>
+            <a:endParaRPr lang="en-US" sz="1320" dirty="0"/>
           </a:p>
         </p:txBody>
       </p:sp>
@@ -17556,49 +17876,58 @@
           <a:ln/>
         </p:spPr>
         <p:txBody>
-          <a:bodyPr wrap="square" lIns="635" tIns="635" rIns="635" bIns="635" rtlCol="0" anchor="t">
+          <a:bodyPr wrap="square" lIns="1016" tIns="1016" rIns="1016" bIns="1016" rtlCol="0" anchor="t">
             <a:normAutofit/>
           </a:bodyPr>
           <a:lstStyle/>
           <a:p>
+            <a:pPr indent="0" marL="0">
+              <a:buNone/>
+            </a:pPr>
             <a:r>
               <a:rPr lang="en-US" sz="2100" dirty="0">
                 <a:solidFill>
-                  <a:srgbClr val="17364A"/>
-                </a:solidFill>
-                <a:latin typeface="Aptos" pitchFamily="34" charset="0"/>
-                <a:ea typeface="Aptos" pitchFamily="34" charset="-122"/>
-                <a:cs typeface="Aptos" pitchFamily="34" charset="-120"/>
-              </a:rPr>
-              <a:t>HL7 v2.</a:t>
+                  <a:srgbClr val="003A63"/>
+                </a:solidFill>
+                <a:latin typeface="Aptos" pitchFamily="34" charset="0"/>
+                <a:ea typeface="Aptos" pitchFamily="34" charset="-122"/>
+                <a:cs typeface="Aptos" pitchFamily="34" charset="-120"/>
+              </a:rPr>
+              <a:t>• HL7 v2.</a:t>
             </a:r>
             <a:endParaRPr lang="en-US" sz="2100" dirty="0"/>
           </a:p>
           <a:p>
+            <a:pPr indent="0" marL="0">
+              <a:buNone/>
+            </a:pPr>
             <a:r>
               <a:rPr lang="en-US" sz="2100" dirty="0">
                 <a:solidFill>
-                  <a:srgbClr val="17364A"/>
-                </a:solidFill>
-                <a:latin typeface="Aptos" pitchFamily="34" charset="0"/>
-                <a:ea typeface="Aptos" pitchFamily="34" charset="-122"/>
-                <a:cs typeface="Aptos" pitchFamily="34" charset="-120"/>
-              </a:rPr>
-              <a:t>HL7 v2 is a widely used message-based standard in healthcare and public health.</a:t>
+                  <a:srgbClr val="003A63"/>
+                </a:solidFill>
+                <a:latin typeface="Aptos" pitchFamily="34" charset="0"/>
+                <a:ea typeface="Aptos" pitchFamily="34" charset="-122"/>
+                <a:cs typeface="Aptos" pitchFamily="34" charset="-120"/>
+              </a:rPr>
+              <a:t>• HL7 v2 is a widely used message-based standard in healthcare and public health.</a:t>
             </a:r>
             <a:endParaRPr lang="en-US" sz="2100" dirty="0"/>
           </a:p>
           <a:p>
+            <a:pPr indent="0" marL="0">
+              <a:buNone/>
+            </a:pPr>
             <a:r>
               <a:rPr lang="en-US" sz="2100" dirty="0">
                 <a:solidFill>
-                  <a:srgbClr val="17364A"/>
-                </a:solidFill>
-                <a:latin typeface="Aptos" pitchFamily="34" charset="0"/>
-                <a:ea typeface="Aptos" pitchFamily="34" charset="-122"/>
-                <a:cs typeface="Aptos" pitchFamily="34" charset="-120"/>
-              </a:rPr>
-              <a:t>It is common in laboratory reporting, immunization messaging, admission-discharge-transfer.</a:t>
+                  <a:srgbClr val="003A63"/>
+                </a:solidFill>
+                <a:latin typeface="Aptos" pitchFamily="34" charset="0"/>
+                <a:ea typeface="Aptos" pitchFamily="34" charset="-122"/>
+                <a:cs typeface="Aptos" pitchFamily="34" charset="-120"/>
+              </a:rPr>
+              <a:t>• It is common in laboratory reporting, immunization messaging, admission-discharge-transfer.</a:t>
             </a:r>
             <a:endParaRPr lang="en-US" sz="2100" dirty="0"/>
           </a:p>
@@ -17678,17 +18007,17 @@
         </p:nvSpPr>
         <p:spPr>
           <a:xfrm>
-            <a:off x="7799832" y="1828800"/>
-            <a:ext cx="3145536" cy="685800"/>
-          </a:xfrm>
-          <a:prstGeom prst="rect">
-            <a:avLst/>
-          </a:prstGeom>
-          <a:noFill/>
-          <a:ln/>
-        </p:spPr>
-        <p:txBody>
-          <a:bodyPr wrap="square" lIns="0" tIns="0" rIns="0" bIns="0" rtlCol="0" anchor="t">
+            <a:off x="7799832" y="1801368"/>
+            <a:ext cx="3145536" cy="758952"/>
+          </a:xfrm>
+          <a:prstGeom prst="rect">
+            <a:avLst/>
+          </a:prstGeom>
+          <a:noFill/>
+          <a:ln/>
+        </p:spPr>
+        <p:txBody>
+          <a:bodyPr wrap="square" lIns="254" tIns="254" rIns="254" bIns="254" rtlCol="0" anchor="t">
             <a:normAutofit/>
           </a:bodyPr>
           <a:lstStyle/>
@@ -17697,7 +18026,7 @@
               <a:buNone/>
             </a:pPr>
             <a:r>
-              <a:rPr lang="en-US" sz="1550" dirty="0">
+              <a:rPr lang="en-US" sz="1320" dirty="0">
                 <a:solidFill>
                   <a:srgbClr val="17364A"/>
                 </a:solidFill>
@@ -17707,7 +18036,7 @@
               </a:rPr>
               <a:t>HL7 v2.</a:t>
             </a:r>
-            <a:endParaRPr lang="en-US" sz="1550" dirty="0"/>
+            <a:endParaRPr lang="en-US" sz="1320" dirty="0"/>
           </a:p>
         </p:txBody>
       </p:sp>
@@ -17795,13 +18124,16 @@
           <a:ln/>
         </p:spPr>
         <p:txBody>
-          <a:bodyPr wrap="square" lIns="254" tIns="254" rIns="254" bIns="254" rtlCol="0" anchor="t">
+          <a:bodyPr wrap="square" lIns="508" tIns="508" rIns="508" bIns="508" rtlCol="0" anchor="t">
             <a:normAutofit/>
           </a:bodyPr>
           <a:lstStyle/>
           <a:p>
-            <a:r>
-              <a:rPr lang="en-US" sz="1380" dirty="0">
+            <a:pPr indent="0" marL="0">
+              <a:buNone/>
+            </a:pPr>
+            <a:r>
+              <a:rPr lang="en-US" sz="1220" dirty="0">
                 <a:solidFill>
                   <a:srgbClr val="17364A"/>
                 </a:solidFill>
@@ -17809,13 +18141,16 @@
                 <a:ea typeface="Aptos" pitchFamily="34" charset="-122"/>
                 <a:cs typeface="Aptos" pitchFamily="34" charset="-120"/>
               </a:rPr>
-              <a:t>It is common in laboratory reporting, immunization messaging, admission-discharge-transfer.</a:t>
-            </a:r>
-            <a:endParaRPr lang="en-US" sz="1380" dirty="0"/>
-          </a:p>
-          <a:p>
-            <a:r>
-              <a:rPr lang="en-US" sz="1380" dirty="0">
+              <a:t>It is common in laboratory reporting, immunization messaging,.</a:t>
+            </a:r>
+            <a:endParaRPr lang="en-US" sz="1220" dirty="0"/>
+          </a:p>
+          <a:p>
+            <a:pPr indent="0" marL="0">
+              <a:buNone/>
+            </a:pPr>
+            <a:r>
+              <a:rPr lang="en-US" sz="1220" dirty="0">
                 <a:solidFill>
                   <a:srgbClr val="17364A"/>
                 </a:solidFill>
@@ -17823,13 +18158,16 @@
                 <a:ea typeface="Aptos" pitchFamily="34" charset="-122"/>
                 <a:cs typeface="Aptos" pitchFamily="34" charset="-120"/>
               </a:rPr>
-              <a:t>HL7 v2 is mature and widely deployed, but messages can vary by implementation, making.</a:t>
-            </a:r>
-            <a:endParaRPr lang="en-US" sz="1380" dirty="0"/>
-          </a:p>
-          <a:p>
-            <a:r>
-              <a:rPr lang="en-US" sz="1380" dirty="0">
+              <a:t>HL7 v2 is mature and widely deployed, but messages can vary by.</a:t>
+            </a:r>
+            <a:endParaRPr lang="en-US" sz="1220" dirty="0"/>
+          </a:p>
+          <a:p>
+            <a:pPr indent="0" marL="0">
+              <a:buNone/>
+            </a:pPr>
+            <a:r>
+              <a:rPr lang="en-US" sz="1220" dirty="0">
                 <a:solidFill>
                   <a:srgbClr val="17364A"/>
                 </a:solidFill>
@@ -17839,7 +18177,7 @@
               </a:rPr>
               <a:t>CDA.</a:t>
             </a:r>
-            <a:endParaRPr lang="en-US" sz="1380" dirty="0"/>
+            <a:endParaRPr lang="en-US" sz="1220" dirty="0"/>
           </a:p>
         </p:txBody>
       </p:sp>
@@ -17917,17 +18255,17 @@
         </p:nvSpPr>
         <p:spPr>
           <a:xfrm>
-            <a:off x="7799832" y="5001768"/>
-            <a:ext cx="3145536" cy="502920"/>
-          </a:xfrm>
-          <a:prstGeom prst="rect">
-            <a:avLst/>
-          </a:prstGeom>
-          <a:noFill/>
-          <a:ln/>
-        </p:spPr>
-        <p:txBody>
-          <a:bodyPr wrap="square" lIns="0" tIns="0" rIns="0" bIns="0" rtlCol="0" anchor="t">
+            <a:off x="7799832" y="4974336"/>
+            <a:ext cx="3145536" cy="576072"/>
+          </a:xfrm>
+          <a:prstGeom prst="rect">
+            <a:avLst/>
+          </a:prstGeom>
+          <a:noFill/>
+          <a:ln/>
+        </p:spPr>
+        <p:txBody>
+          <a:bodyPr wrap="square" lIns="254" tIns="254" rIns="254" bIns="254" rtlCol="0" anchor="t">
             <a:normAutofit/>
           </a:bodyPr>
           <a:lstStyle/>
@@ -17936,7 +18274,7 @@
               <a:buNone/>
             </a:pPr>
             <a:r>
-              <a:rPr lang="en-US" sz="1550" dirty="0">
+              <a:rPr lang="en-US" sz="1320" dirty="0">
                 <a:solidFill>
                   <a:srgbClr val="17364A"/>
                 </a:solidFill>
@@ -17944,9 +18282,9 @@
                 <a:ea typeface="Aptos" pitchFamily="34" charset="-122"/>
                 <a:cs typeface="Aptos" pitchFamily="34" charset="-120"/>
               </a:rPr>
-              <a:t>Connect the concept to public health purpose, responsible use, required safeguards, documentation, and the next action a department should take.</a:t>
-            </a:r>
-            <a:endParaRPr lang="en-US" sz="1550" dirty="0"/>
+              <a:t>Connect the concept to public health purpose, responsible use, required safeguards, documentation, and the next action a.</a:t>
+            </a:r>
+            <a:endParaRPr lang="en-US" sz="1320" dirty="0"/>
           </a:p>
         </p:txBody>
       </p:sp>

--- a/downloads/presentations/modules/arc-220.pptx
+++ b/downloads/presentations/modules/arc-220.pptx
@@ -3510,11 +3510,11 @@
         <p:spPr>
           <a:xfrm>
             <a:off x="7635240" y="1325880"/>
-            <a:ext cx="3474720" cy="1325880"/>
+            <a:ext cx="3474720" cy="1207008"/>
           </a:xfrm>
           <a:prstGeom prst="roundRect">
             <a:avLst>
-              <a:gd name="adj" fmla="val 8276"/>
+              <a:gd name="adj" fmla="val 9091"/>
             </a:avLst>
           </a:prstGeom>
           <a:solidFill>
@@ -3576,7 +3576,7 @@
         <p:spPr>
           <a:xfrm>
             <a:off x="7799832" y="1801368"/>
-            <a:ext cx="3145536" cy="758952"/>
+            <a:ext cx="3145536" cy="640080"/>
           </a:xfrm>
           <a:prstGeom prst="rect">
             <a:avLst/>
@@ -3616,12 +3616,12 @@
         </p:nvSpPr>
         <p:spPr>
           <a:xfrm>
-            <a:off x="7635240" y="2788920"/>
-            <a:ext cx="3474720" cy="1536192"/>
+            <a:off x="7635240" y="2670048"/>
+            <a:ext cx="3474720" cy="1377086"/>
           </a:xfrm>
           <a:prstGeom prst="roundRect">
             <a:avLst>
-              <a:gd name="adj" fmla="val 7143"/>
+              <a:gd name="adj" fmla="val 7968"/>
             </a:avLst>
           </a:prstGeom>
           <a:solidFill>
@@ -3643,7 +3643,7 @@
         </p:nvSpPr>
         <p:spPr>
           <a:xfrm>
-            <a:off x="7799832" y="2935224"/>
+            <a:off x="7799832" y="2816352"/>
             <a:ext cx="3145536" cy="256032"/>
           </a:xfrm>
           <a:prstGeom prst="rect">
@@ -3682,8 +3682,8 @@
         </p:nvSpPr>
         <p:spPr>
           <a:xfrm>
-            <a:off x="7818120" y="3300984"/>
-            <a:ext cx="3090672" cy="877824"/>
+            <a:off x="7818120" y="3182112"/>
+            <a:ext cx="3090672" cy="718718"/>
           </a:xfrm>
           <a:prstGeom prst="rect">
             <a:avLst/>
@@ -3757,12 +3757,12 @@
         </p:nvSpPr>
         <p:spPr>
           <a:xfrm>
-            <a:off x="7635240" y="4498848"/>
-            <a:ext cx="3474720" cy="1143000"/>
+            <a:off x="7635240" y="4184294"/>
+            <a:ext cx="3474720" cy="1466698"/>
           </a:xfrm>
           <a:prstGeom prst="roundRect">
             <a:avLst>
-              <a:gd name="adj" fmla="val 9600"/>
+              <a:gd name="adj" fmla="val 7481"/>
             </a:avLst>
           </a:prstGeom>
           <a:solidFill>
@@ -3784,7 +3784,7 @@
         </p:nvSpPr>
         <p:spPr>
           <a:xfrm>
-            <a:off x="7799832" y="4645152"/>
+            <a:off x="7799832" y="4330598"/>
             <a:ext cx="3145536" cy="256032"/>
           </a:xfrm>
           <a:prstGeom prst="rect">
@@ -3823,8 +3823,8 @@
         </p:nvSpPr>
         <p:spPr>
           <a:xfrm>
-            <a:off x="7799832" y="4974336"/>
-            <a:ext cx="3145536" cy="576072"/>
+            <a:off x="7799832" y="4659782"/>
+            <a:ext cx="3145536" cy="899770"/>
           </a:xfrm>
           <a:prstGeom prst="rect">
             <a:avLst/>
@@ -3850,7 +3850,7 @@
                 <a:ea typeface="Aptos" pitchFamily="34" charset="-122"/>
                 <a:cs typeface="Aptos" pitchFamily="34" charset="-120"/>
               </a:rPr>
-              <a:t>Connect the concept to public health purpose, responsible use, required safeguards, documentation, and the next action a.</a:t>
+              <a:t>Connect the concept to public health purpose, responsible use, required safeguards, documentation, and the next action a department should take.</a:t>
             </a:r>
             <a:endParaRPr lang="en-US" sz="1320" dirty="0"/>
           </a:p>
@@ -4219,11 +4219,11 @@
         <p:spPr>
           <a:xfrm>
             <a:off x="7635240" y="1325880"/>
-            <a:ext cx="3474720" cy="1325880"/>
+            <a:ext cx="3474720" cy="1255471"/>
           </a:xfrm>
           <a:prstGeom prst="roundRect">
             <a:avLst>
-              <a:gd name="adj" fmla="val 8276"/>
+              <a:gd name="adj" fmla="val 8740"/>
             </a:avLst>
           </a:prstGeom>
           <a:solidFill>
@@ -4285,7 +4285,7 @@
         <p:spPr>
           <a:xfrm>
             <a:off x="7799832" y="1801368"/>
-            <a:ext cx="3145536" cy="758952"/>
+            <a:ext cx="3145536" cy="688543"/>
           </a:xfrm>
           <a:prstGeom prst="rect">
             <a:avLst/>
@@ -4325,12 +4325,12 @@
         </p:nvSpPr>
         <p:spPr>
           <a:xfrm>
-            <a:off x="7635240" y="2788920"/>
-            <a:ext cx="3474720" cy="1536192"/>
+            <a:off x="7635240" y="2718511"/>
+            <a:ext cx="3474720" cy="1328623"/>
           </a:xfrm>
           <a:prstGeom prst="roundRect">
             <a:avLst>
-              <a:gd name="adj" fmla="val 7143"/>
+              <a:gd name="adj" fmla="val 8259"/>
             </a:avLst>
           </a:prstGeom>
           <a:solidFill>
@@ -4352,7 +4352,7 @@
         </p:nvSpPr>
         <p:spPr>
           <a:xfrm>
-            <a:off x="7799832" y="2935224"/>
+            <a:off x="7799832" y="2864815"/>
             <a:ext cx="3145536" cy="256032"/>
           </a:xfrm>
           <a:prstGeom prst="rect">
@@ -4391,8 +4391,8 @@
         </p:nvSpPr>
         <p:spPr>
           <a:xfrm>
-            <a:off x="7818120" y="3300984"/>
-            <a:ext cx="3090672" cy="877824"/>
+            <a:off x="7818120" y="3230575"/>
+            <a:ext cx="3090672" cy="670255"/>
           </a:xfrm>
           <a:prstGeom prst="rect">
             <a:avLst/>
@@ -4466,12 +4466,12 @@
         </p:nvSpPr>
         <p:spPr>
           <a:xfrm>
-            <a:off x="7635240" y="4498848"/>
-            <a:ext cx="3474720" cy="1143000"/>
+            <a:off x="7635240" y="4184294"/>
+            <a:ext cx="3474720" cy="1466698"/>
           </a:xfrm>
           <a:prstGeom prst="roundRect">
             <a:avLst>
-              <a:gd name="adj" fmla="val 9600"/>
+              <a:gd name="adj" fmla="val 7481"/>
             </a:avLst>
           </a:prstGeom>
           <a:solidFill>
@@ -4493,7 +4493,7 @@
         </p:nvSpPr>
         <p:spPr>
           <a:xfrm>
-            <a:off x="7799832" y="4645152"/>
+            <a:off x="7799832" y="4330598"/>
             <a:ext cx="3145536" cy="256032"/>
           </a:xfrm>
           <a:prstGeom prst="rect">
@@ -4532,8 +4532,8 @@
         </p:nvSpPr>
         <p:spPr>
           <a:xfrm>
-            <a:off x="7799832" y="4974336"/>
-            <a:ext cx="3145536" cy="576072"/>
+            <a:off x="7799832" y="4659782"/>
+            <a:ext cx="3145536" cy="899770"/>
           </a:xfrm>
           <a:prstGeom prst="rect">
             <a:avLst/>
@@ -4559,7 +4559,7 @@
                 <a:ea typeface="Aptos" pitchFamily="34" charset="-122"/>
                 <a:cs typeface="Aptos" pitchFamily="34" charset="-120"/>
               </a:rPr>
-              <a:t>Connect the concept to public health purpose, responsible use, required safeguards, documentation, and the next action a.</a:t>
+              <a:t>Connect the concept to public health purpose, responsible use, required safeguards, documentation, and the next action a department should take.</a:t>
             </a:r>
             <a:endParaRPr lang="en-US" sz="1320" dirty="0"/>
           </a:p>
@@ -4928,11 +4928,11 @@
         <p:spPr>
           <a:xfrm>
             <a:off x="7635240" y="1325880"/>
-            <a:ext cx="3474720" cy="1325880"/>
+            <a:ext cx="3474720" cy="1255471"/>
           </a:xfrm>
           <a:prstGeom prst="roundRect">
             <a:avLst>
-              <a:gd name="adj" fmla="val 8276"/>
+              <a:gd name="adj" fmla="val 8740"/>
             </a:avLst>
           </a:prstGeom>
           <a:solidFill>
@@ -4994,7 +4994,7 @@
         <p:spPr>
           <a:xfrm>
             <a:off x="7799832" y="1801368"/>
-            <a:ext cx="3145536" cy="758952"/>
+            <a:ext cx="3145536" cy="688543"/>
           </a:xfrm>
           <a:prstGeom prst="rect">
             <a:avLst/>
@@ -5034,12 +5034,12 @@
         </p:nvSpPr>
         <p:spPr>
           <a:xfrm>
-            <a:off x="7635240" y="2788920"/>
-            <a:ext cx="3474720" cy="1536192"/>
+            <a:off x="7635240" y="2718511"/>
+            <a:ext cx="3474720" cy="1328623"/>
           </a:xfrm>
           <a:prstGeom prst="roundRect">
             <a:avLst>
-              <a:gd name="adj" fmla="val 7143"/>
+              <a:gd name="adj" fmla="val 8259"/>
             </a:avLst>
           </a:prstGeom>
           <a:solidFill>
@@ -5061,7 +5061,7 @@
         </p:nvSpPr>
         <p:spPr>
           <a:xfrm>
-            <a:off x="7799832" y="2935224"/>
+            <a:off x="7799832" y="2864815"/>
             <a:ext cx="3145536" cy="256032"/>
           </a:xfrm>
           <a:prstGeom prst="rect">
@@ -5100,8 +5100,8 @@
         </p:nvSpPr>
         <p:spPr>
           <a:xfrm>
-            <a:off x="7818120" y="3300984"/>
-            <a:ext cx="3090672" cy="877824"/>
+            <a:off x="7818120" y="3230575"/>
+            <a:ext cx="3090672" cy="670255"/>
           </a:xfrm>
           <a:prstGeom prst="rect">
             <a:avLst/>
@@ -5175,12 +5175,12 @@
         </p:nvSpPr>
         <p:spPr>
           <a:xfrm>
-            <a:off x="7635240" y="4498848"/>
-            <a:ext cx="3474720" cy="1143000"/>
+            <a:off x="7635240" y="4184294"/>
+            <a:ext cx="3474720" cy="1466698"/>
           </a:xfrm>
           <a:prstGeom prst="roundRect">
             <a:avLst>
-              <a:gd name="adj" fmla="val 9600"/>
+              <a:gd name="adj" fmla="val 7481"/>
             </a:avLst>
           </a:prstGeom>
           <a:solidFill>
@@ -5202,7 +5202,7 @@
         </p:nvSpPr>
         <p:spPr>
           <a:xfrm>
-            <a:off x="7799832" y="4645152"/>
+            <a:off x="7799832" y="4330598"/>
             <a:ext cx="3145536" cy="256032"/>
           </a:xfrm>
           <a:prstGeom prst="rect">
@@ -5241,8 +5241,8 @@
         </p:nvSpPr>
         <p:spPr>
           <a:xfrm>
-            <a:off x="7799832" y="4974336"/>
-            <a:ext cx="3145536" cy="576072"/>
+            <a:off x="7799832" y="4659782"/>
+            <a:ext cx="3145536" cy="899770"/>
           </a:xfrm>
           <a:prstGeom prst="rect">
             <a:avLst/>
@@ -5268,7 +5268,7 @@
                 <a:ea typeface="Aptos" pitchFamily="34" charset="-122"/>
                 <a:cs typeface="Aptos" pitchFamily="34" charset="-120"/>
               </a:rPr>
-              <a:t>Connect the concept to public health purpose, responsible use, required safeguards, documentation, and the next action a.</a:t>
+              <a:t>Connect the concept to public health purpose, responsible use, required safeguards, documentation, and the next action a department should take.</a:t>
             </a:r>
             <a:endParaRPr lang="en-US" sz="1320" dirty="0"/>
           </a:p>
@@ -5637,11 +5637,11 @@
         <p:spPr>
           <a:xfrm>
             <a:off x="7635240" y="1325880"/>
-            <a:ext cx="3474720" cy="1325880"/>
+            <a:ext cx="3474720" cy="1207008"/>
           </a:xfrm>
           <a:prstGeom prst="roundRect">
             <a:avLst>
-              <a:gd name="adj" fmla="val 8276"/>
+              <a:gd name="adj" fmla="val 9091"/>
             </a:avLst>
           </a:prstGeom>
           <a:solidFill>
@@ -5703,7 +5703,7 @@
         <p:spPr>
           <a:xfrm>
             <a:off x="7799832" y="1801368"/>
-            <a:ext cx="3145536" cy="758952"/>
+            <a:ext cx="3145536" cy="640080"/>
           </a:xfrm>
           <a:prstGeom prst="rect">
             <a:avLst/>
@@ -5743,7 +5743,7 @@
         </p:nvSpPr>
         <p:spPr>
           <a:xfrm>
-            <a:off x="7635240" y="2788920"/>
+            <a:off x="7635240" y="2670048"/>
             <a:ext cx="3474720" cy="1536192"/>
           </a:xfrm>
           <a:prstGeom prst="roundRect">
@@ -5770,8 +5770,8 @@
         </p:nvSpPr>
         <p:spPr>
           <a:xfrm>
-            <a:off x="7799832" y="2935224"/>
-            <a:ext cx="3145536" cy="256032"/>
+            <a:off x="7799832" y="2798064"/>
+            <a:ext cx="3145536" cy="237744"/>
           </a:xfrm>
           <a:prstGeom prst="rect">
             <a:avLst/>
@@ -5787,7 +5787,7 @@
               <a:buNone/>
             </a:pPr>
             <a:r>
-              <a:rPr lang="en-US" sz="1300" b="1" dirty="0">
+              <a:rPr lang="en-US" sz="1250" b="1" dirty="0">
                 <a:solidFill>
                   <a:srgbClr val="0068B7"/>
                 </a:solidFill>
@@ -5795,101 +5795,317 @@
                 <a:ea typeface="Aptos" pitchFamily="34" charset="-122"/>
                 <a:cs typeface="Aptos" pitchFamily="34" charset="-120"/>
               </a:rPr>
-              <a:t>Concept checkpoints</a:t>
-            </a:r>
-            <a:endParaRPr lang="en-US" sz="1300" dirty="0"/>
-          </a:p>
-        </p:txBody>
-      </p:sp>
-      <p:sp>
-        <p:nvSpPr>
-          <p:cNvPr id="15" name="Text 13"/>
-          <p:cNvSpPr/>
-          <p:nvPr/>
-        </p:nvSpPr>
-        <p:spPr>
-          <a:xfrm>
-            <a:off x="7818120" y="3300984"/>
-            <a:ext cx="3090672" cy="877824"/>
-          </a:xfrm>
-          <a:prstGeom prst="rect">
-            <a:avLst/>
-          </a:prstGeom>
-          <a:noFill/>
-          <a:ln/>
-        </p:spPr>
-        <p:txBody>
-          <a:bodyPr wrap="square" lIns="508" tIns="508" rIns="508" bIns="508" rtlCol="0" anchor="t">
+              <a:t>Risk control loop</a:t>
+            </a:r>
+            <a:endParaRPr lang="en-US" sz="1250" dirty="0"/>
+          </a:p>
+        </p:txBody>
+      </p:sp>
+      <p:sp>
+        <p:nvSpPr>
+          <p:cNvPr id="15" name="Shape 13"/>
+          <p:cNvSpPr/>
+          <p:nvPr/>
+        </p:nvSpPr>
+        <p:spPr>
+          <a:xfrm>
+            <a:off x="8763000" y="3351276"/>
+            <a:ext cx="164592" cy="0"/>
+          </a:xfrm>
+          <a:prstGeom prst="line">
+            <a:avLst/>
+          </a:prstGeom>
+          <a:noFill/>
+          <a:ln w="15240">
+            <a:solidFill>
+              <a:srgbClr val="8ABBD8"/>
+            </a:solidFill>
+            <a:prstDash val="solid"/>
+          </a:ln>
+        </p:spPr>
+      </p:sp>
+      <p:sp>
+        <p:nvSpPr>
+          <p:cNvPr id="16" name="Shape 14"/>
+          <p:cNvSpPr/>
+          <p:nvPr/>
+        </p:nvSpPr>
+        <p:spPr>
+          <a:xfrm>
+            <a:off x="7872984" y="3200400"/>
+            <a:ext cx="890016" cy="301752"/>
+          </a:xfrm>
+          <a:prstGeom prst="roundRect">
+            <a:avLst>
+              <a:gd name="adj" fmla="val 24242"/>
+            </a:avLst>
+          </a:prstGeom>
+          <a:solidFill>
+            <a:srgbClr val="0068B7"/>
+          </a:solidFill>
+          <a:ln w="12700">
+            <a:solidFill>
+              <a:srgbClr val="0068B7"/>
+            </a:solidFill>
+            <a:prstDash val="solid"/>
+          </a:ln>
+        </p:spPr>
+      </p:sp>
+      <p:sp>
+        <p:nvSpPr>
+          <p:cNvPr id="17" name="Text 15"/>
+          <p:cNvSpPr/>
+          <p:nvPr/>
+        </p:nvSpPr>
+        <p:spPr>
+          <a:xfrm>
+            <a:off x="7909560" y="3273552"/>
+            <a:ext cx="816864" cy="146304"/>
+          </a:xfrm>
+          <a:prstGeom prst="rect">
+            <a:avLst/>
+          </a:prstGeom>
+          <a:noFill/>
+          <a:ln/>
+        </p:spPr>
+        <p:txBody>
+          <a:bodyPr wrap="square" lIns="0" tIns="0" rIns="0" bIns="0" rtlCol="0" anchor="ctr">
             <a:normAutofit/>
           </a:bodyPr>
           <a:lstStyle/>
           <a:p>
-            <a:pPr indent="0" marL="0">
-              <a:buNone/>
-            </a:pPr>
-            <a:r>
-              <a:rPr lang="en-US" sz="1220" dirty="0">
-                <a:solidFill>
-                  <a:srgbClr val="17364A"/>
-                </a:solidFill>
-                <a:latin typeface="Aptos" pitchFamily="34" charset="0"/>
-                <a:ea typeface="Aptos" pitchFamily="34" charset="-122"/>
-                <a:cs typeface="Aptos" pitchFamily="34" charset="-120"/>
-              </a:rPr>
-              <a:t>Guardrails include conformance testing, test messages,.</a:t>
-            </a:r>
-            <a:endParaRPr lang="en-US" sz="1220" dirty="0"/>
-          </a:p>
-          <a:p>
-            <a:pPr indent="0" marL="0">
-              <a:buNone/>
-            </a:pPr>
-            <a:r>
-              <a:rPr lang="en-US" sz="1220" dirty="0">
-                <a:solidFill>
-                  <a:srgbClr val="17364A"/>
-                </a:solidFill>
-                <a:latin typeface="Aptos" pitchFamily="34" charset="0"/>
-                <a:ea typeface="Aptos" pitchFamily="34" charset="-122"/>
-                <a:cs typeface="Aptos" pitchFamily="34" charset="-120"/>
-              </a:rPr>
-              <a:t>Manual workarounds.</a:t>
-            </a:r>
-            <a:endParaRPr lang="en-US" sz="1220" dirty="0"/>
-          </a:p>
-          <a:p>
-            <a:pPr indent="0" marL="0">
-              <a:buNone/>
-            </a:pPr>
-            <a:r>
-              <a:rPr lang="en-US" sz="1220" dirty="0">
-                <a:solidFill>
-                  <a:srgbClr val="17364A"/>
-                </a:solidFill>
-                <a:latin typeface="Aptos" pitchFamily="34" charset="0"/>
-                <a:ea typeface="Aptos" pitchFamily="34" charset="-122"/>
-                <a:cs typeface="Aptos" pitchFamily="34" charset="-120"/>
-              </a:rPr>
-              <a:t>Weak interoperability can lead to copying and pasting sensitive.</a:t>
-            </a:r>
-            <a:endParaRPr lang="en-US" sz="1220" dirty="0"/>
-          </a:p>
-        </p:txBody>
-      </p:sp>
-      <p:sp>
-        <p:nvSpPr>
-          <p:cNvPr id="16" name="Shape 14"/>
-          <p:cNvSpPr/>
-          <p:nvPr/>
-        </p:nvSpPr>
-        <p:spPr>
-          <a:xfrm>
-            <a:off x="7635240" y="4498848"/>
-            <a:ext cx="3474720" cy="1143000"/>
+            <a:pPr algn="ctr" indent="0" marL="0">
+              <a:buNone/>
+            </a:pPr>
+            <a:r>
+              <a:rPr lang="en-US" sz="880" b="1" dirty="0">
+                <a:solidFill>
+                  <a:srgbClr val="FFFFFF"/>
+                </a:solidFill>
+                <a:latin typeface="Aptos" pitchFamily="34" charset="0"/>
+                <a:ea typeface="Aptos" pitchFamily="34" charset="-122"/>
+                <a:cs typeface="Aptos" pitchFamily="34" charset="-120"/>
+              </a:rPr>
+              <a:t>Identify</a:t>
+            </a:r>
+            <a:endParaRPr lang="en-US" sz="880" dirty="0"/>
+          </a:p>
+        </p:txBody>
+      </p:sp>
+      <p:sp>
+        <p:nvSpPr>
+          <p:cNvPr id="18" name="Shape 16"/>
+          <p:cNvSpPr/>
+          <p:nvPr/>
+        </p:nvSpPr>
+        <p:spPr>
+          <a:xfrm>
+            <a:off x="9817608" y="3351276"/>
+            <a:ext cx="164592" cy="0"/>
+          </a:xfrm>
+          <a:prstGeom prst="line">
+            <a:avLst/>
+          </a:prstGeom>
+          <a:noFill/>
+          <a:ln w="15240">
+            <a:solidFill>
+              <a:srgbClr val="8ABBD8"/>
+            </a:solidFill>
+            <a:prstDash val="solid"/>
+          </a:ln>
+        </p:spPr>
+      </p:sp>
+      <p:sp>
+        <p:nvSpPr>
+          <p:cNvPr id="19" name="Shape 17"/>
+          <p:cNvSpPr/>
+          <p:nvPr/>
+        </p:nvSpPr>
+        <p:spPr>
+          <a:xfrm>
+            <a:off x="8927592" y="3200400"/>
+            <a:ext cx="890016" cy="301752"/>
           </a:xfrm>
           <a:prstGeom prst="roundRect">
             <a:avLst>
-              <a:gd name="adj" fmla="val 9600"/>
+              <a:gd name="adj" fmla="val 24242"/>
+            </a:avLst>
+          </a:prstGeom>
+          <a:solidFill>
+            <a:srgbClr val="2F8A28"/>
+          </a:solidFill>
+          <a:ln w="12700">
+            <a:solidFill>
+              <a:srgbClr val="2F8A28"/>
+            </a:solidFill>
+            <a:prstDash val="solid"/>
+          </a:ln>
+        </p:spPr>
+      </p:sp>
+      <p:sp>
+        <p:nvSpPr>
+          <p:cNvPr id="20" name="Text 18"/>
+          <p:cNvSpPr/>
+          <p:nvPr/>
+        </p:nvSpPr>
+        <p:spPr>
+          <a:xfrm>
+            <a:off x="8964168" y="3273552"/>
+            <a:ext cx="816864" cy="146304"/>
+          </a:xfrm>
+          <a:prstGeom prst="rect">
+            <a:avLst/>
+          </a:prstGeom>
+          <a:noFill/>
+          <a:ln/>
+        </p:spPr>
+        <p:txBody>
+          <a:bodyPr wrap="square" lIns="0" tIns="0" rIns="0" bIns="0" rtlCol="0" anchor="ctr">
+            <a:normAutofit/>
+          </a:bodyPr>
+          <a:lstStyle/>
+          <a:p>
+            <a:pPr algn="ctr" indent="0" marL="0">
+              <a:buNone/>
+            </a:pPr>
+            <a:r>
+              <a:rPr lang="en-US" sz="880" b="1" dirty="0">
+                <a:solidFill>
+                  <a:srgbClr val="FFFFFF"/>
+                </a:solidFill>
+                <a:latin typeface="Aptos" pitchFamily="34" charset="0"/>
+                <a:ea typeface="Aptos" pitchFamily="34" charset="-122"/>
+                <a:cs typeface="Aptos" pitchFamily="34" charset="-120"/>
+              </a:rPr>
+              <a:t>Control</a:t>
+            </a:r>
+            <a:endParaRPr lang="en-US" sz="880" dirty="0"/>
+          </a:p>
+        </p:txBody>
+      </p:sp>
+      <p:sp>
+        <p:nvSpPr>
+          <p:cNvPr id="21" name="Shape 19"/>
+          <p:cNvSpPr/>
+          <p:nvPr/>
+        </p:nvSpPr>
+        <p:spPr>
+          <a:xfrm>
+            <a:off x="9982200" y="3200400"/>
+            <a:ext cx="890016" cy="301752"/>
+          </a:xfrm>
+          <a:prstGeom prst="roundRect">
+            <a:avLst>
+              <a:gd name="adj" fmla="val 24242"/>
+            </a:avLst>
+          </a:prstGeom>
+          <a:solidFill>
+            <a:srgbClr val="6A4CA3"/>
+          </a:solidFill>
+          <a:ln w="12700">
+            <a:solidFill>
+              <a:srgbClr val="6A4CA3"/>
+            </a:solidFill>
+            <a:prstDash val="solid"/>
+          </a:ln>
+        </p:spPr>
+      </p:sp>
+      <p:sp>
+        <p:nvSpPr>
+          <p:cNvPr id="22" name="Text 20"/>
+          <p:cNvSpPr/>
+          <p:nvPr/>
+        </p:nvSpPr>
+        <p:spPr>
+          <a:xfrm>
+            <a:off x="10018776" y="3273552"/>
+            <a:ext cx="816864" cy="146304"/>
+          </a:xfrm>
+          <a:prstGeom prst="rect">
+            <a:avLst/>
+          </a:prstGeom>
+          <a:noFill/>
+          <a:ln/>
+        </p:spPr>
+        <p:txBody>
+          <a:bodyPr wrap="square" lIns="0" tIns="0" rIns="0" bIns="0" rtlCol="0" anchor="ctr">
+            <a:normAutofit/>
+          </a:bodyPr>
+          <a:lstStyle/>
+          <a:p>
+            <a:pPr algn="ctr" indent="0" marL="0">
+              <a:buNone/>
+            </a:pPr>
+            <a:r>
+              <a:rPr lang="en-US" sz="880" b="1" dirty="0">
+                <a:solidFill>
+                  <a:srgbClr val="FFFFFF"/>
+                </a:solidFill>
+                <a:latin typeface="Aptos" pitchFamily="34" charset="0"/>
+                <a:ea typeface="Aptos" pitchFamily="34" charset="-122"/>
+                <a:cs typeface="Aptos" pitchFamily="34" charset="-120"/>
+              </a:rPr>
+              <a:t>Monitor</a:t>
+            </a:r>
+            <a:endParaRPr lang="en-US" sz="880" dirty="0"/>
+          </a:p>
+        </p:txBody>
+      </p:sp>
+      <p:sp>
+        <p:nvSpPr>
+          <p:cNvPr id="23" name="Text 21"/>
+          <p:cNvSpPr/>
+          <p:nvPr/>
+        </p:nvSpPr>
+        <p:spPr>
+          <a:xfrm>
+            <a:off x="7854696" y="3694176"/>
+            <a:ext cx="3035808" cy="365760"/>
+          </a:xfrm>
+          <a:prstGeom prst="rect">
+            <a:avLst/>
+          </a:prstGeom>
+          <a:noFill/>
+          <a:ln/>
+        </p:spPr>
+        <p:txBody>
+          <a:bodyPr wrap="square" lIns="254" tIns="254" rIns="254" bIns="254" rtlCol="0" anchor="t">
+            <a:normAutofit/>
+          </a:bodyPr>
+          <a:lstStyle/>
+          <a:p>
+            <a:pPr indent="0" marL="0">
+              <a:buNone/>
+            </a:pPr>
+            <a:r>
+              <a:rPr lang="en-US" sz="1120" dirty="0">
+                <a:solidFill>
+                  <a:srgbClr val="17364A"/>
+                </a:solidFill>
+                <a:latin typeface="Aptos" pitchFamily="34" charset="0"/>
+                <a:ea typeface="Aptos" pitchFamily="34" charset="-122"/>
+                <a:cs typeface="Aptos" pitchFamily="34" charset="-120"/>
+              </a:rPr>
+              <a:t>Responsible use depends on finding risks early, applying safeguards, and watching for drift or harm over time.</a:t>
+            </a:r>
+            <a:endParaRPr lang="en-US" sz="1120" dirty="0"/>
+          </a:p>
+        </p:txBody>
+      </p:sp>
+      <p:sp>
+        <p:nvSpPr>
+          <p:cNvPr id="24" name="Shape 22"/>
+          <p:cNvSpPr/>
+          <p:nvPr/>
+        </p:nvSpPr>
+        <p:spPr>
+          <a:xfrm>
+            <a:off x="7635240" y="4343400"/>
+            <a:ext cx="3474720" cy="1255471"/>
+          </a:xfrm>
+          <a:prstGeom prst="roundRect">
+            <a:avLst>
+              <a:gd name="adj" fmla="val 8740"/>
             </a:avLst>
           </a:prstGeom>
           <a:solidFill>
@@ -5905,13 +6121,13 @@
       </p:sp>
       <p:sp>
         <p:nvSpPr>
-          <p:cNvPr id="17" name="Text 15"/>
-          <p:cNvSpPr/>
-          <p:nvPr/>
-        </p:nvSpPr>
-        <p:spPr>
-          <a:xfrm>
-            <a:off x="7799832" y="4645152"/>
+          <p:cNvPr id="25" name="Text 23"/>
+          <p:cNvSpPr/>
+          <p:nvPr/>
+        </p:nvSpPr>
+        <p:spPr>
+          <a:xfrm>
+            <a:off x="7799832" y="4489704"/>
             <a:ext cx="3145536" cy="256032"/>
           </a:xfrm>
           <a:prstGeom prst="rect">
@@ -5944,14 +6160,14 @@
       </p:sp>
       <p:sp>
         <p:nvSpPr>
-          <p:cNvPr id="18" name="Text 16"/>
-          <p:cNvSpPr/>
-          <p:nvPr/>
-        </p:nvSpPr>
-        <p:spPr>
-          <a:xfrm>
-            <a:off x="7799832" y="4974336"/>
-            <a:ext cx="3145536" cy="576072"/>
+          <p:cNvPr id="26" name="Text 24"/>
+          <p:cNvSpPr/>
+          <p:nvPr/>
+        </p:nvSpPr>
+        <p:spPr>
+          <a:xfrm>
+            <a:off x="7799832" y="4818888"/>
+            <a:ext cx="3145536" cy="688543"/>
           </a:xfrm>
           <a:prstGeom prst="rect">
             <a:avLst/>
@@ -5977,7 +6193,7 @@
                 <a:ea typeface="Aptos" pitchFamily="34" charset="-122"/>
                 <a:cs typeface="Aptos" pitchFamily="34" charset="-120"/>
               </a:rPr>
-              <a:t>Identify what could go wrong, who could be affected, what safeguards are needed, and what evidence should be reviewed.</a:t>
+              <a:t>Identify what could go wrong, who could be affected, what safeguards are needed, and what evidence should be reviewed before use.</a:t>
             </a:r>
             <a:endParaRPr lang="en-US" sz="1320" dirty="0"/>
           </a:p>
@@ -6346,11 +6562,11 @@
         <p:spPr>
           <a:xfrm>
             <a:off x="7635240" y="1325880"/>
-            <a:ext cx="3474720" cy="1325880"/>
+            <a:ext cx="3474720" cy="1207008"/>
           </a:xfrm>
           <a:prstGeom prst="roundRect">
             <a:avLst>
-              <a:gd name="adj" fmla="val 8276"/>
+              <a:gd name="adj" fmla="val 9091"/>
             </a:avLst>
           </a:prstGeom>
           <a:solidFill>
@@ -6412,7 +6628,7 @@
         <p:spPr>
           <a:xfrm>
             <a:off x="7799832" y="1801368"/>
-            <a:ext cx="3145536" cy="758952"/>
+            <a:ext cx="3145536" cy="640080"/>
           </a:xfrm>
           <a:prstGeom prst="rect">
             <a:avLst/>
@@ -6452,7 +6668,7 @@
         </p:nvSpPr>
         <p:spPr>
           <a:xfrm>
-            <a:off x="7635240" y="2788920"/>
+            <a:off x="7635240" y="2670048"/>
             <a:ext cx="3474720" cy="1536192"/>
           </a:xfrm>
           <a:prstGeom prst="roundRect">
@@ -6479,8 +6695,8 @@
         </p:nvSpPr>
         <p:spPr>
           <a:xfrm>
-            <a:off x="7799832" y="2935224"/>
-            <a:ext cx="3145536" cy="256032"/>
+            <a:off x="7799832" y="2798064"/>
+            <a:ext cx="3145536" cy="237744"/>
           </a:xfrm>
           <a:prstGeom prst="rect">
             <a:avLst/>
@@ -6496,7 +6712,7 @@
               <a:buNone/>
             </a:pPr>
             <a:r>
-              <a:rPr lang="en-US" sz="1300" b="1" dirty="0">
+              <a:rPr lang="en-US" sz="1250" b="1" dirty="0">
                 <a:solidFill>
                   <a:srgbClr val="0068B7"/>
                 </a:solidFill>
@@ -6504,101 +6720,317 @@
                 <a:ea typeface="Aptos" pitchFamily="34" charset="-122"/>
                 <a:cs typeface="Aptos" pitchFamily="34" charset="-120"/>
               </a:rPr>
-              <a:t>Concept checkpoints</a:t>
-            </a:r>
-            <a:endParaRPr lang="en-US" sz="1300" dirty="0"/>
-          </a:p>
-        </p:txBody>
-      </p:sp>
-      <p:sp>
-        <p:nvSpPr>
-          <p:cNvPr id="15" name="Text 13"/>
-          <p:cNvSpPr/>
-          <p:nvPr/>
-        </p:nvSpPr>
-        <p:spPr>
-          <a:xfrm>
-            <a:off x="7818120" y="3300984"/>
-            <a:ext cx="3090672" cy="877824"/>
-          </a:xfrm>
-          <a:prstGeom prst="rect">
-            <a:avLst/>
-          </a:prstGeom>
-          <a:noFill/>
-          <a:ln/>
-        </p:spPr>
-        <p:txBody>
-          <a:bodyPr wrap="square" lIns="508" tIns="508" rIns="508" bIns="508" rtlCol="0" anchor="t">
+              <a:t>Risk control loop</a:t>
+            </a:r>
+            <a:endParaRPr lang="en-US" sz="1250" dirty="0"/>
+          </a:p>
+        </p:txBody>
+      </p:sp>
+      <p:sp>
+        <p:nvSpPr>
+          <p:cNvPr id="15" name="Shape 13"/>
+          <p:cNvSpPr/>
+          <p:nvPr/>
+        </p:nvSpPr>
+        <p:spPr>
+          <a:xfrm>
+            <a:off x="8763000" y="3351276"/>
+            <a:ext cx="164592" cy="0"/>
+          </a:xfrm>
+          <a:prstGeom prst="line">
+            <a:avLst/>
+          </a:prstGeom>
+          <a:noFill/>
+          <a:ln w="15240">
+            <a:solidFill>
+              <a:srgbClr val="8ABBD8"/>
+            </a:solidFill>
+            <a:prstDash val="solid"/>
+          </a:ln>
+        </p:spPr>
+      </p:sp>
+      <p:sp>
+        <p:nvSpPr>
+          <p:cNvPr id="16" name="Shape 14"/>
+          <p:cNvSpPr/>
+          <p:nvPr/>
+        </p:nvSpPr>
+        <p:spPr>
+          <a:xfrm>
+            <a:off x="7872984" y="3200400"/>
+            <a:ext cx="890016" cy="301752"/>
+          </a:xfrm>
+          <a:prstGeom prst="roundRect">
+            <a:avLst>
+              <a:gd name="adj" fmla="val 24242"/>
+            </a:avLst>
+          </a:prstGeom>
+          <a:solidFill>
+            <a:srgbClr val="0068B7"/>
+          </a:solidFill>
+          <a:ln w="12700">
+            <a:solidFill>
+              <a:srgbClr val="0068B7"/>
+            </a:solidFill>
+            <a:prstDash val="solid"/>
+          </a:ln>
+        </p:spPr>
+      </p:sp>
+      <p:sp>
+        <p:nvSpPr>
+          <p:cNvPr id="17" name="Text 15"/>
+          <p:cNvSpPr/>
+          <p:nvPr/>
+        </p:nvSpPr>
+        <p:spPr>
+          <a:xfrm>
+            <a:off x="7909560" y="3273552"/>
+            <a:ext cx="816864" cy="146304"/>
+          </a:xfrm>
+          <a:prstGeom prst="rect">
+            <a:avLst/>
+          </a:prstGeom>
+          <a:noFill/>
+          <a:ln/>
+        </p:spPr>
+        <p:txBody>
+          <a:bodyPr wrap="square" lIns="0" tIns="0" rIns="0" bIns="0" rtlCol="0" anchor="ctr">
             <a:normAutofit/>
           </a:bodyPr>
           <a:lstStyle/>
           <a:p>
-            <a:pPr indent="0" marL="0">
-              <a:buNone/>
-            </a:pPr>
-            <a:r>
-              <a:rPr lang="en-US" sz="1220" dirty="0">
-                <a:solidFill>
-                  <a:srgbClr val="17364A"/>
-                </a:solidFill>
-                <a:latin typeface="Aptos" pitchFamily="34" charset="0"/>
-                <a:ea typeface="Aptos" pitchFamily="34" charset="-122"/>
-                <a:cs typeface="Aptos" pitchFamily="34" charset="-120"/>
-              </a:rPr>
-              <a:t>Over-reliance on structured data.</a:t>
-            </a:r>
-            <a:endParaRPr lang="en-US" sz="1220" dirty="0"/>
-          </a:p>
-          <a:p>
-            <a:pPr indent="0" marL="0">
-              <a:buNone/>
-            </a:pPr>
-            <a:r>
-              <a:rPr lang="en-US" sz="1220" dirty="0">
-                <a:solidFill>
-                  <a:srgbClr val="17364A"/>
-                </a:solidFill>
-                <a:latin typeface="Aptos" pitchFamily="34" charset="0"/>
-                <a:ea typeface="Aptos" pitchFamily="34" charset="-122"/>
-                <a:cs typeface="Aptos" pitchFamily="34" charset="-120"/>
-              </a:rPr>
-              <a:t>Structured exchange may omit context found in notes or local fields.</a:t>
-            </a:r>
-            <a:endParaRPr lang="en-US" sz="1220" dirty="0"/>
-          </a:p>
-          <a:p>
-            <a:pPr indent="0" marL="0">
-              <a:buNone/>
-            </a:pPr>
-            <a:r>
-              <a:rPr lang="en-US" sz="1220" dirty="0">
-                <a:solidFill>
-                  <a:srgbClr val="17364A"/>
-                </a:solidFill>
-                <a:latin typeface="Aptos" pitchFamily="34" charset="0"/>
-                <a:ea typeface="Aptos" pitchFamily="34" charset="-122"/>
-                <a:cs typeface="Aptos" pitchFamily="34" charset="-120"/>
-              </a:rPr>
-              <a:t>Guardrails include source review, workflow validation, and.</a:t>
-            </a:r>
-            <a:endParaRPr lang="en-US" sz="1220" dirty="0"/>
-          </a:p>
-        </p:txBody>
-      </p:sp>
-      <p:sp>
-        <p:nvSpPr>
-          <p:cNvPr id="16" name="Shape 14"/>
-          <p:cNvSpPr/>
-          <p:nvPr/>
-        </p:nvSpPr>
-        <p:spPr>
-          <a:xfrm>
-            <a:off x="7635240" y="4498848"/>
-            <a:ext cx="3474720" cy="1143000"/>
+            <a:pPr algn="ctr" indent="0" marL="0">
+              <a:buNone/>
+            </a:pPr>
+            <a:r>
+              <a:rPr lang="en-US" sz="880" b="1" dirty="0">
+                <a:solidFill>
+                  <a:srgbClr val="FFFFFF"/>
+                </a:solidFill>
+                <a:latin typeface="Aptos" pitchFamily="34" charset="0"/>
+                <a:ea typeface="Aptos" pitchFamily="34" charset="-122"/>
+                <a:cs typeface="Aptos" pitchFamily="34" charset="-120"/>
+              </a:rPr>
+              <a:t>Identify</a:t>
+            </a:r>
+            <a:endParaRPr lang="en-US" sz="880" dirty="0"/>
+          </a:p>
+        </p:txBody>
+      </p:sp>
+      <p:sp>
+        <p:nvSpPr>
+          <p:cNvPr id="18" name="Shape 16"/>
+          <p:cNvSpPr/>
+          <p:nvPr/>
+        </p:nvSpPr>
+        <p:spPr>
+          <a:xfrm>
+            <a:off x="9817608" y="3351276"/>
+            <a:ext cx="164592" cy="0"/>
+          </a:xfrm>
+          <a:prstGeom prst="line">
+            <a:avLst/>
+          </a:prstGeom>
+          <a:noFill/>
+          <a:ln w="15240">
+            <a:solidFill>
+              <a:srgbClr val="8ABBD8"/>
+            </a:solidFill>
+            <a:prstDash val="solid"/>
+          </a:ln>
+        </p:spPr>
+      </p:sp>
+      <p:sp>
+        <p:nvSpPr>
+          <p:cNvPr id="19" name="Shape 17"/>
+          <p:cNvSpPr/>
+          <p:nvPr/>
+        </p:nvSpPr>
+        <p:spPr>
+          <a:xfrm>
+            <a:off x="8927592" y="3200400"/>
+            <a:ext cx="890016" cy="301752"/>
           </a:xfrm>
           <a:prstGeom prst="roundRect">
             <a:avLst>
-              <a:gd name="adj" fmla="val 9600"/>
+              <a:gd name="adj" fmla="val 24242"/>
+            </a:avLst>
+          </a:prstGeom>
+          <a:solidFill>
+            <a:srgbClr val="2F8A28"/>
+          </a:solidFill>
+          <a:ln w="12700">
+            <a:solidFill>
+              <a:srgbClr val="2F8A28"/>
+            </a:solidFill>
+            <a:prstDash val="solid"/>
+          </a:ln>
+        </p:spPr>
+      </p:sp>
+      <p:sp>
+        <p:nvSpPr>
+          <p:cNvPr id="20" name="Text 18"/>
+          <p:cNvSpPr/>
+          <p:nvPr/>
+        </p:nvSpPr>
+        <p:spPr>
+          <a:xfrm>
+            <a:off x="8964168" y="3273552"/>
+            <a:ext cx="816864" cy="146304"/>
+          </a:xfrm>
+          <a:prstGeom prst="rect">
+            <a:avLst/>
+          </a:prstGeom>
+          <a:noFill/>
+          <a:ln/>
+        </p:spPr>
+        <p:txBody>
+          <a:bodyPr wrap="square" lIns="0" tIns="0" rIns="0" bIns="0" rtlCol="0" anchor="ctr">
+            <a:normAutofit/>
+          </a:bodyPr>
+          <a:lstStyle/>
+          <a:p>
+            <a:pPr algn="ctr" indent="0" marL="0">
+              <a:buNone/>
+            </a:pPr>
+            <a:r>
+              <a:rPr lang="en-US" sz="880" b="1" dirty="0">
+                <a:solidFill>
+                  <a:srgbClr val="FFFFFF"/>
+                </a:solidFill>
+                <a:latin typeface="Aptos" pitchFamily="34" charset="0"/>
+                <a:ea typeface="Aptos" pitchFamily="34" charset="-122"/>
+                <a:cs typeface="Aptos" pitchFamily="34" charset="-120"/>
+              </a:rPr>
+              <a:t>Control</a:t>
+            </a:r>
+            <a:endParaRPr lang="en-US" sz="880" dirty="0"/>
+          </a:p>
+        </p:txBody>
+      </p:sp>
+      <p:sp>
+        <p:nvSpPr>
+          <p:cNvPr id="21" name="Shape 19"/>
+          <p:cNvSpPr/>
+          <p:nvPr/>
+        </p:nvSpPr>
+        <p:spPr>
+          <a:xfrm>
+            <a:off x="9982200" y="3200400"/>
+            <a:ext cx="890016" cy="301752"/>
+          </a:xfrm>
+          <a:prstGeom prst="roundRect">
+            <a:avLst>
+              <a:gd name="adj" fmla="val 24242"/>
+            </a:avLst>
+          </a:prstGeom>
+          <a:solidFill>
+            <a:srgbClr val="6A4CA3"/>
+          </a:solidFill>
+          <a:ln w="12700">
+            <a:solidFill>
+              <a:srgbClr val="6A4CA3"/>
+            </a:solidFill>
+            <a:prstDash val="solid"/>
+          </a:ln>
+        </p:spPr>
+      </p:sp>
+      <p:sp>
+        <p:nvSpPr>
+          <p:cNvPr id="22" name="Text 20"/>
+          <p:cNvSpPr/>
+          <p:nvPr/>
+        </p:nvSpPr>
+        <p:spPr>
+          <a:xfrm>
+            <a:off x="10018776" y="3273552"/>
+            <a:ext cx="816864" cy="146304"/>
+          </a:xfrm>
+          <a:prstGeom prst="rect">
+            <a:avLst/>
+          </a:prstGeom>
+          <a:noFill/>
+          <a:ln/>
+        </p:spPr>
+        <p:txBody>
+          <a:bodyPr wrap="square" lIns="0" tIns="0" rIns="0" bIns="0" rtlCol="0" anchor="ctr">
+            <a:normAutofit/>
+          </a:bodyPr>
+          <a:lstStyle/>
+          <a:p>
+            <a:pPr algn="ctr" indent="0" marL="0">
+              <a:buNone/>
+            </a:pPr>
+            <a:r>
+              <a:rPr lang="en-US" sz="880" b="1" dirty="0">
+                <a:solidFill>
+                  <a:srgbClr val="FFFFFF"/>
+                </a:solidFill>
+                <a:latin typeface="Aptos" pitchFamily="34" charset="0"/>
+                <a:ea typeface="Aptos" pitchFamily="34" charset="-122"/>
+                <a:cs typeface="Aptos" pitchFamily="34" charset="-120"/>
+              </a:rPr>
+              <a:t>Monitor</a:t>
+            </a:r>
+            <a:endParaRPr lang="en-US" sz="880" dirty="0"/>
+          </a:p>
+        </p:txBody>
+      </p:sp>
+      <p:sp>
+        <p:nvSpPr>
+          <p:cNvPr id="23" name="Text 21"/>
+          <p:cNvSpPr/>
+          <p:nvPr/>
+        </p:nvSpPr>
+        <p:spPr>
+          <a:xfrm>
+            <a:off x="7854696" y="3694176"/>
+            <a:ext cx="3035808" cy="365760"/>
+          </a:xfrm>
+          <a:prstGeom prst="rect">
+            <a:avLst/>
+          </a:prstGeom>
+          <a:noFill/>
+          <a:ln/>
+        </p:spPr>
+        <p:txBody>
+          <a:bodyPr wrap="square" lIns="254" tIns="254" rIns="254" bIns="254" rtlCol="0" anchor="t">
+            <a:normAutofit/>
+          </a:bodyPr>
+          <a:lstStyle/>
+          <a:p>
+            <a:pPr indent="0" marL="0">
+              <a:buNone/>
+            </a:pPr>
+            <a:r>
+              <a:rPr lang="en-US" sz="1120" dirty="0">
+                <a:solidFill>
+                  <a:srgbClr val="17364A"/>
+                </a:solidFill>
+                <a:latin typeface="Aptos" pitchFamily="34" charset="0"/>
+                <a:ea typeface="Aptos" pitchFamily="34" charset="-122"/>
+                <a:cs typeface="Aptos" pitchFamily="34" charset="-120"/>
+              </a:rPr>
+              <a:t>Responsible use depends on finding risks early, applying safeguards, and watching for drift or harm over time.</a:t>
+            </a:r>
+            <a:endParaRPr lang="en-US" sz="1120" dirty="0"/>
+          </a:p>
+        </p:txBody>
+      </p:sp>
+      <p:sp>
+        <p:nvSpPr>
+          <p:cNvPr id="24" name="Shape 22"/>
+          <p:cNvSpPr/>
+          <p:nvPr/>
+        </p:nvSpPr>
+        <p:spPr>
+          <a:xfrm>
+            <a:off x="7635240" y="4343400"/>
+            <a:ext cx="3474720" cy="1255471"/>
+          </a:xfrm>
+          <a:prstGeom prst="roundRect">
+            <a:avLst>
+              <a:gd name="adj" fmla="val 8740"/>
             </a:avLst>
           </a:prstGeom>
           <a:solidFill>
@@ -6614,13 +7046,13 @@
       </p:sp>
       <p:sp>
         <p:nvSpPr>
-          <p:cNvPr id="17" name="Text 15"/>
-          <p:cNvSpPr/>
-          <p:nvPr/>
-        </p:nvSpPr>
-        <p:spPr>
-          <a:xfrm>
-            <a:off x="7799832" y="4645152"/>
+          <p:cNvPr id="25" name="Text 23"/>
+          <p:cNvSpPr/>
+          <p:nvPr/>
+        </p:nvSpPr>
+        <p:spPr>
+          <a:xfrm>
+            <a:off x="7799832" y="4489704"/>
             <a:ext cx="3145536" cy="256032"/>
           </a:xfrm>
           <a:prstGeom prst="rect">
@@ -6653,14 +7085,14 @@
       </p:sp>
       <p:sp>
         <p:nvSpPr>
-          <p:cNvPr id="18" name="Text 16"/>
-          <p:cNvSpPr/>
-          <p:nvPr/>
-        </p:nvSpPr>
-        <p:spPr>
-          <a:xfrm>
-            <a:off x="7799832" y="4974336"/>
-            <a:ext cx="3145536" cy="576072"/>
+          <p:cNvPr id="26" name="Text 24"/>
+          <p:cNvSpPr/>
+          <p:nvPr/>
+        </p:nvSpPr>
+        <p:spPr>
+          <a:xfrm>
+            <a:off x="7799832" y="4818888"/>
+            <a:ext cx="3145536" cy="688543"/>
           </a:xfrm>
           <a:prstGeom prst="rect">
             <a:avLst/>
@@ -6686,7 +7118,7 @@
                 <a:ea typeface="Aptos" pitchFamily="34" charset="-122"/>
                 <a:cs typeface="Aptos" pitchFamily="34" charset="-120"/>
               </a:rPr>
-              <a:t>Identify what could go wrong, who could be affected, what safeguards are needed, and what evidence should be reviewed.</a:t>
+              <a:t>Identify what could go wrong, who could be affected, what safeguards are needed, and what evidence should be reviewed before use.</a:t>
             </a:r>
             <a:endParaRPr lang="en-US" sz="1320" dirty="0"/>
           </a:p>
@@ -7055,11 +7487,11 @@
         <p:spPr>
           <a:xfrm>
             <a:off x="7635240" y="1325880"/>
-            <a:ext cx="3474720" cy="1325880"/>
+            <a:ext cx="3474720" cy="1255471"/>
           </a:xfrm>
           <a:prstGeom prst="roundRect">
             <a:avLst>
-              <a:gd name="adj" fmla="val 8276"/>
+              <a:gd name="adj" fmla="val 8740"/>
             </a:avLst>
           </a:prstGeom>
           <a:solidFill>
@@ -7121,7 +7553,7 @@
         <p:spPr>
           <a:xfrm>
             <a:off x="7799832" y="1801368"/>
-            <a:ext cx="3145536" cy="758952"/>
+            <a:ext cx="3145536" cy="688543"/>
           </a:xfrm>
           <a:prstGeom prst="rect">
             <a:avLst/>
@@ -7161,12 +7593,12 @@
         </p:nvSpPr>
         <p:spPr>
           <a:xfrm>
-            <a:off x="7635240" y="2788920"/>
-            <a:ext cx="3474720" cy="1536192"/>
+            <a:off x="7635240" y="2718511"/>
+            <a:ext cx="3474720" cy="1328623"/>
           </a:xfrm>
           <a:prstGeom prst="roundRect">
             <a:avLst>
-              <a:gd name="adj" fmla="val 7143"/>
+              <a:gd name="adj" fmla="val 8259"/>
             </a:avLst>
           </a:prstGeom>
           <a:solidFill>
@@ -7188,7 +7620,7 @@
         </p:nvSpPr>
         <p:spPr>
           <a:xfrm>
-            <a:off x="7799832" y="2935224"/>
+            <a:off x="7799832" y="2864815"/>
             <a:ext cx="3145536" cy="256032"/>
           </a:xfrm>
           <a:prstGeom prst="rect">
@@ -7227,8 +7659,8 @@
         </p:nvSpPr>
         <p:spPr>
           <a:xfrm>
-            <a:off x="7818120" y="3300984"/>
-            <a:ext cx="3090672" cy="877824"/>
+            <a:off x="7818120" y="3230575"/>
+            <a:ext cx="3090672" cy="670255"/>
           </a:xfrm>
           <a:prstGeom prst="rect">
             <a:avLst/>
@@ -7302,12 +7734,12 @@
         </p:nvSpPr>
         <p:spPr>
           <a:xfrm>
-            <a:off x="7635240" y="4498848"/>
-            <a:ext cx="3474720" cy="1143000"/>
+            <a:off x="7635240" y="4184294"/>
+            <a:ext cx="3474720" cy="1466698"/>
           </a:xfrm>
           <a:prstGeom prst="roundRect">
             <a:avLst>
-              <a:gd name="adj" fmla="val 9600"/>
+              <a:gd name="adj" fmla="val 7481"/>
             </a:avLst>
           </a:prstGeom>
           <a:solidFill>
@@ -7329,7 +7761,7 @@
         </p:nvSpPr>
         <p:spPr>
           <a:xfrm>
-            <a:off x="7799832" y="4645152"/>
+            <a:off x="7799832" y="4330598"/>
             <a:ext cx="3145536" cy="256032"/>
           </a:xfrm>
           <a:prstGeom prst="rect">
@@ -7368,8 +7800,8 @@
         </p:nvSpPr>
         <p:spPr>
           <a:xfrm>
-            <a:off x="7799832" y="4974336"/>
-            <a:ext cx="3145536" cy="576072"/>
+            <a:off x="7799832" y="4659782"/>
+            <a:ext cx="3145536" cy="899770"/>
           </a:xfrm>
           <a:prstGeom prst="rect">
             <a:avLst/>
@@ -7395,7 +7827,7 @@
                 <a:ea typeface="Aptos" pitchFamily="34" charset="-122"/>
                 <a:cs typeface="Aptos" pitchFamily="34" charset="-120"/>
               </a:rPr>
-              <a:t>Use the concept to clarify workflow changes, dependencies, staffing, procurement requirements, training needs, and.</a:t>
+              <a:t>Use the concept to clarify workflow changes, dependencies, staffing, procurement requirements, training needs, and implementation checkpoints.</a:t>
             </a:r>
             <a:endParaRPr lang="en-US" sz="1320" dirty="0"/>
           </a:p>
@@ -7764,11 +8196,11 @@
         <p:spPr>
           <a:xfrm>
             <a:off x="7635240" y="1325880"/>
-            <a:ext cx="3474720" cy="1325880"/>
+            <a:ext cx="3474720" cy="1207008"/>
           </a:xfrm>
           <a:prstGeom prst="roundRect">
             <a:avLst>
-              <a:gd name="adj" fmla="val 8276"/>
+              <a:gd name="adj" fmla="val 9091"/>
             </a:avLst>
           </a:prstGeom>
           <a:solidFill>
@@ -7830,7 +8262,7 @@
         <p:spPr>
           <a:xfrm>
             <a:off x="7799832" y="1801368"/>
-            <a:ext cx="3145536" cy="758952"/>
+            <a:ext cx="3145536" cy="640080"/>
           </a:xfrm>
           <a:prstGeom prst="rect">
             <a:avLst/>
@@ -7870,12 +8302,12 @@
         </p:nvSpPr>
         <p:spPr>
           <a:xfrm>
-            <a:off x="7635240" y="2788920"/>
-            <a:ext cx="3474720" cy="1536192"/>
+            <a:off x="7635240" y="2670048"/>
+            <a:ext cx="3474720" cy="1377086"/>
           </a:xfrm>
           <a:prstGeom prst="roundRect">
             <a:avLst>
-              <a:gd name="adj" fmla="val 7143"/>
+              <a:gd name="adj" fmla="val 7968"/>
             </a:avLst>
           </a:prstGeom>
           <a:solidFill>
@@ -7897,7 +8329,7 @@
         </p:nvSpPr>
         <p:spPr>
           <a:xfrm>
-            <a:off x="7799832" y="2935224"/>
+            <a:off x="7799832" y="2816352"/>
             <a:ext cx="3145536" cy="256032"/>
           </a:xfrm>
           <a:prstGeom prst="rect">
@@ -7936,8 +8368,8 @@
         </p:nvSpPr>
         <p:spPr>
           <a:xfrm>
-            <a:off x="7818120" y="3300984"/>
-            <a:ext cx="3090672" cy="877824"/>
+            <a:off x="7818120" y="3182112"/>
+            <a:ext cx="3090672" cy="718718"/>
           </a:xfrm>
           <a:prstGeom prst="rect">
             <a:avLst/>
@@ -8011,12 +8443,12 @@
         </p:nvSpPr>
         <p:spPr>
           <a:xfrm>
-            <a:off x="7635240" y="4498848"/>
-            <a:ext cx="3474720" cy="1143000"/>
+            <a:off x="7635240" y="4184294"/>
+            <a:ext cx="3474720" cy="1466698"/>
           </a:xfrm>
           <a:prstGeom prst="roundRect">
             <a:avLst>
-              <a:gd name="adj" fmla="val 9600"/>
+              <a:gd name="adj" fmla="val 7481"/>
             </a:avLst>
           </a:prstGeom>
           <a:solidFill>
@@ -8038,7 +8470,7 @@
         </p:nvSpPr>
         <p:spPr>
           <a:xfrm>
-            <a:off x="7799832" y="4645152"/>
+            <a:off x="7799832" y="4330598"/>
             <a:ext cx="3145536" cy="256032"/>
           </a:xfrm>
           <a:prstGeom prst="rect">
@@ -8077,8 +8509,8 @@
         </p:nvSpPr>
         <p:spPr>
           <a:xfrm>
-            <a:off x="7799832" y="4974336"/>
-            <a:ext cx="3145536" cy="576072"/>
+            <a:off x="7799832" y="4659782"/>
+            <a:ext cx="3145536" cy="899770"/>
           </a:xfrm>
           <a:prstGeom prst="rect">
             <a:avLst/>
@@ -8104,7 +8536,7 @@
                 <a:ea typeface="Aptos" pitchFamily="34" charset="-122"/>
                 <a:cs typeface="Aptos" pitchFamily="34" charset="-120"/>
               </a:rPr>
-              <a:t>Connect the concept to public health purpose, responsible use, required safeguards, documentation, and the next action a.</a:t>
+              <a:t>Connect the concept to public health purpose, responsible use, required safeguards, documentation, and the next action a department should take.</a:t>
             </a:r>
             <a:endParaRPr lang="en-US" sz="1320" dirty="0"/>
           </a:p>
@@ -8456,11 +8888,11 @@
         <p:spPr>
           <a:xfrm>
             <a:off x="7635240" y="1325880"/>
-            <a:ext cx="3474720" cy="1325880"/>
+            <a:ext cx="3474720" cy="1207008"/>
           </a:xfrm>
           <a:prstGeom prst="roundRect">
             <a:avLst>
-              <a:gd name="adj" fmla="val 8276"/>
+              <a:gd name="adj" fmla="val 9091"/>
             </a:avLst>
           </a:prstGeom>
           <a:solidFill>
@@ -8522,7 +8954,7 @@
         <p:spPr>
           <a:xfrm>
             <a:off x="7799832" y="1801368"/>
-            <a:ext cx="3145536" cy="758952"/>
+            <a:ext cx="3145536" cy="640080"/>
           </a:xfrm>
           <a:prstGeom prst="rect">
             <a:avLst/>
@@ -8562,12 +8994,12 @@
         </p:nvSpPr>
         <p:spPr>
           <a:xfrm>
-            <a:off x="7635240" y="2788920"/>
-            <a:ext cx="3474720" cy="1536192"/>
+            <a:off x="7635240" y="2670048"/>
+            <a:ext cx="3474720" cy="1377086"/>
           </a:xfrm>
           <a:prstGeom prst="roundRect">
             <a:avLst>
-              <a:gd name="adj" fmla="val 7143"/>
+              <a:gd name="adj" fmla="val 7968"/>
             </a:avLst>
           </a:prstGeom>
           <a:solidFill>
@@ -8589,7 +9021,7 @@
         </p:nvSpPr>
         <p:spPr>
           <a:xfrm>
-            <a:off x="7799832" y="2935224"/>
+            <a:off x="7799832" y="2816352"/>
             <a:ext cx="3145536" cy="256032"/>
           </a:xfrm>
           <a:prstGeom prst="rect">
@@ -8628,8 +9060,8 @@
         </p:nvSpPr>
         <p:spPr>
           <a:xfrm>
-            <a:off x="7818120" y="3300984"/>
-            <a:ext cx="3090672" cy="877824"/>
+            <a:off x="7818120" y="3182112"/>
+            <a:ext cx="3090672" cy="718718"/>
           </a:xfrm>
           <a:prstGeom prst="rect">
             <a:avLst/>
@@ -8686,12 +9118,12 @@
         </p:nvSpPr>
         <p:spPr>
           <a:xfrm>
-            <a:off x="7635240" y="4498848"/>
-            <a:ext cx="3474720" cy="1143000"/>
+            <a:off x="7635240" y="4184294"/>
+            <a:ext cx="3474720" cy="1466698"/>
           </a:xfrm>
           <a:prstGeom prst="roundRect">
             <a:avLst>
-              <a:gd name="adj" fmla="val 9600"/>
+              <a:gd name="adj" fmla="val 7481"/>
             </a:avLst>
           </a:prstGeom>
           <a:solidFill>
@@ -8713,7 +9145,7 @@
         </p:nvSpPr>
         <p:spPr>
           <a:xfrm>
-            <a:off x="7799832" y="4645152"/>
+            <a:off x="7799832" y="4330598"/>
             <a:ext cx="3145536" cy="256032"/>
           </a:xfrm>
           <a:prstGeom prst="rect">
@@ -8752,8 +9184,8 @@
         </p:nvSpPr>
         <p:spPr>
           <a:xfrm>
-            <a:off x="7799832" y="4974336"/>
-            <a:ext cx="3145536" cy="576072"/>
+            <a:off x="7799832" y="4659782"/>
+            <a:ext cx="3145536" cy="899770"/>
           </a:xfrm>
           <a:prstGeom prst="rect">
             <a:avLst/>
@@ -8779,7 +9211,7 @@
                 <a:ea typeface="Aptos" pitchFamily="34" charset="-122"/>
                 <a:cs typeface="Aptos" pitchFamily="34" charset="-120"/>
               </a:rPr>
-              <a:t>Connect the concept to public health purpose, responsible use, required safeguards, documentation, and the next action a.</a:t>
+              <a:t>Connect the concept to public health purpose, responsible use, required safeguards, documentation, and the next action a department should take.</a:t>
             </a:r>
             <a:endParaRPr lang="en-US" sz="1320" dirty="0"/>
           </a:p>
@@ -9148,11 +9580,11 @@
         <p:spPr>
           <a:xfrm>
             <a:off x="7635240" y="1325880"/>
-            <a:ext cx="3474720" cy="1325880"/>
+            <a:ext cx="3474720" cy="1207008"/>
           </a:xfrm>
           <a:prstGeom prst="roundRect">
             <a:avLst>
-              <a:gd name="adj" fmla="val 8276"/>
+              <a:gd name="adj" fmla="val 9091"/>
             </a:avLst>
           </a:prstGeom>
           <a:solidFill>
@@ -9214,7 +9646,7 @@
         <p:spPr>
           <a:xfrm>
             <a:off x="7799832" y="1801368"/>
-            <a:ext cx="3145536" cy="758952"/>
+            <a:ext cx="3145536" cy="640080"/>
           </a:xfrm>
           <a:prstGeom prst="rect">
             <a:avLst/>
@@ -9254,12 +9686,12 @@
         </p:nvSpPr>
         <p:spPr>
           <a:xfrm>
-            <a:off x="7635240" y="2788920"/>
-            <a:ext cx="3474720" cy="1536192"/>
+            <a:off x="7635240" y="2670048"/>
+            <a:ext cx="3474720" cy="1377086"/>
           </a:xfrm>
           <a:prstGeom prst="roundRect">
             <a:avLst>
-              <a:gd name="adj" fmla="val 7143"/>
+              <a:gd name="adj" fmla="val 7968"/>
             </a:avLst>
           </a:prstGeom>
           <a:solidFill>
@@ -9281,7 +9713,7 @@
         </p:nvSpPr>
         <p:spPr>
           <a:xfrm>
-            <a:off x="7799832" y="2935224"/>
+            <a:off x="7799832" y="2816352"/>
             <a:ext cx="3145536" cy="256032"/>
           </a:xfrm>
           <a:prstGeom prst="rect">
@@ -9320,8 +9752,8 @@
         </p:nvSpPr>
         <p:spPr>
           <a:xfrm>
-            <a:off x="7818120" y="3300984"/>
-            <a:ext cx="3090672" cy="877824"/>
+            <a:off x="7818120" y="3182112"/>
+            <a:ext cx="3090672" cy="718718"/>
           </a:xfrm>
           <a:prstGeom prst="rect">
             <a:avLst/>
@@ -9378,12 +9810,12 @@
         </p:nvSpPr>
         <p:spPr>
           <a:xfrm>
-            <a:off x="7635240" y="4498848"/>
-            <a:ext cx="3474720" cy="1143000"/>
+            <a:off x="7635240" y="4184294"/>
+            <a:ext cx="3474720" cy="1466698"/>
           </a:xfrm>
           <a:prstGeom prst="roundRect">
             <a:avLst>
-              <a:gd name="adj" fmla="val 9600"/>
+              <a:gd name="adj" fmla="val 7481"/>
             </a:avLst>
           </a:prstGeom>
           <a:solidFill>
@@ -9405,7 +9837,7 @@
         </p:nvSpPr>
         <p:spPr>
           <a:xfrm>
-            <a:off x="7799832" y="4645152"/>
+            <a:off x="7799832" y="4330598"/>
             <a:ext cx="3145536" cy="256032"/>
           </a:xfrm>
           <a:prstGeom prst="rect">
@@ -9444,8 +9876,8 @@
         </p:nvSpPr>
         <p:spPr>
           <a:xfrm>
-            <a:off x="7799832" y="4974336"/>
-            <a:ext cx="3145536" cy="576072"/>
+            <a:off x="7799832" y="4659782"/>
+            <a:ext cx="3145536" cy="899770"/>
           </a:xfrm>
           <a:prstGeom prst="rect">
             <a:avLst/>
@@ -9471,7 +9903,7 @@
                 <a:ea typeface="Aptos" pitchFamily="34" charset="-122"/>
                 <a:cs typeface="Aptos" pitchFamily="34" charset="-120"/>
               </a:rPr>
-              <a:t>Use the assignment to test whether you can explain the concept, apply it to a realistic public health situation, and.</a:t>
+              <a:t>Use the assignment to test whether you can explain the concept, apply it to a realistic public health situation, and identify what would need review before the work moves forward.</a:t>
             </a:r>
             <a:endParaRPr lang="en-US" sz="1320" dirty="0"/>
           </a:p>
@@ -9840,11 +10272,11 @@
         <p:spPr>
           <a:xfrm>
             <a:off x="7635240" y="1325880"/>
-            <a:ext cx="3474720" cy="1325880"/>
+            <a:ext cx="3474720" cy="1207008"/>
           </a:xfrm>
           <a:prstGeom prst="roundRect">
             <a:avLst>
-              <a:gd name="adj" fmla="val 8276"/>
+              <a:gd name="adj" fmla="val 9091"/>
             </a:avLst>
           </a:prstGeom>
           <a:solidFill>
@@ -9906,7 +10338,7 @@
         <p:spPr>
           <a:xfrm>
             <a:off x="7799832" y="1801368"/>
-            <a:ext cx="3145536" cy="758952"/>
+            <a:ext cx="3145536" cy="640080"/>
           </a:xfrm>
           <a:prstGeom prst="rect">
             <a:avLst/>
@@ -9946,12 +10378,12 @@
         </p:nvSpPr>
         <p:spPr>
           <a:xfrm>
-            <a:off x="7635240" y="2788920"/>
-            <a:ext cx="3474720" cy="1536192"/>
+            <a:off x="7635240" y="2670048"/>
+            <a:ext cx="3474720" cy="1377086"/>
           </a:xfrm>
           <a:prstGeom prst="roundRect">
             <a:avLst>
-              <a:gd name="adj" fmla="val 7143"/>
+              <a:gd name="adj" fmla="val 7968"/>
             </a:avLst>
           </a:prstGeom>
           <a:solidFill>
@@ -9973,7 +10405,7 @@
         </p:nvSpPr>
         <p:spPr>
           <a:xfrm>
-            <a:off x="7799832" y="2935224"/>
+            <a:off x="7799832" y="2816352"/>
             <a:ext cx="3145536" cy="256032"/>
           </a:xfrm>
           <a:prstGeom prst="rect">
@@ -10012,8 +10444,8 @@
         </p:nvSpPr>
         <p:spPr>
           <a:xfrm>
-            <a:off x="7818120" y="3300984"/>
-            <a:ext cx="3090672" cy="877824"/>
+            <a:off x="7818120" y="3182112"/>
+            <a:ext cx="3090672" cy="718718"/>
           </a:xfrm>
           <a:prstGeom prst="rect">
             <a:avLst/>
@@ -10087,12 +10519,12 @@
         </p:nvSpPr>
         <p:spPr>
           <a:xfrm>
-            <a:off x="7635240" y="4498848"/>
-            <a:ext cx="3474720" cy="1143000"/>
+            <a:off x="7635240" y="4184294"/>
+            <a:ext cx="3474720" cy="1466698"/>
           </a:xfrm>
           <a:prstGeom prst="roundRect">
             <a:avLst>
-              <a:gd name="adj" fmla="val 9600"/>
+              <a:gd name="adj" fmla="val 7481"/>
             </a:avLst>
           </a:prstGeom>
           <a:solidFill>
@@ -10114,7 +10546,7 @@
         </p:nvSpPr>
         <p:spPr>
           <a:xfrm>
-            <a:off x="7799832" y="4645152"/>
+            <a:off x="7799832" y="4330598"/>
             <a:ext cx="3145536" cy="256032"/>
           </a:xfrm>
           <a:prstGeom prst="rect">
@@ -10153,8 +10585,8 @@
         </p:nvSpPr>
         <p:spPr>
           <a:xfrm>
-            <a:off x="7799832" y="4974336"/>
-            <a:ext cx="3145536" cy="576072"/>
+            <a:off x="7799832" y="4659782"/>
+            <a:ext cx="3145536" cy="899770"/>
           </a:xfrm>
           <a:prstGeom prst="rect">
             <a:avLst/>
@@ -10180,7 +10612,7 @@
                 <a:ea typeface="Aptos" pitchFamily="34" charset="-122"/>
                 <a:cs typeface="Aptos" pitchFamily="34" charset="-120"/>
               </a:rPr>
-              <a:t>Connect the concept to public health purpose, responsible use, required safeguards, documentation, and the next action a.</a:t>
+              <a:t>Connect the concept to public health purpose, responsible use, required safeguards, documentation, and the next action a department should take.</a:t>
             </a:r>
             <a:endParaRPr lang="en-US" sz="1320" dirty="0"/>
           </a:p>
@@ -11117,11 +11549,11 @@
         <p:spPr>
           <a:xfrm>
             <a:off x="7635240" y="1325880"/>
-            <a:ext cx="3474720" cy="1325880"/>
+            <a:ext cx="3474720" cy="1207008"/>
           </a:xfrm>
           <a:prstGeom prst="roundRect">
             <a:avLst>
-              <a:gd name="adj" fmla="val 8276"/>
+              <a:gd name="adj" fmla="val 9091"/>
             </a:avLst>
           </a:prstGeom>
           <a:solidFill>
@@ -11183,7 +11615,7 @@
         <p:spPr>
           <a:xfrm>
             <a:off x="7799832" y="1801368"/>
-            <a:ext cx="3145536" cy="758952"/>
+            <a:ext cx="3145536" cy="640080"/>
           </a:xfrm>
           <a:prstGeom prst="rect">
             <a:avLst/>
@@ -11223,12 +11655,12 @@
         </p:nvSpPr>
         <p:spPr>
           <a:xfrm>
-            <a:off x="7635240" y="2788920"/>
-            <a:ext cx="3474720" cy="1536192"/>
+            <a:off x="7635240" y="2670048"/>
+            <a:ext cx="3474720" cy="1377086"/>
           </a:xfrm>
           <a:prstGeom prst="roundRect">
             <a:avLst>
-              <a:gd name="adj" fmla="val 7143"/>
+              <a:gd name="adj" fmla="val 7968"/>
             </a:avLst>
           </a:prstGeom>
           <a:solidFill>
@@ -11250,7 +11682,7 @@
         </p:nvSpPr>
         <p:spPr>
           <a:xfrm>
-            <a:off x="7799832" y="2935224"/>
+            <a:off x="7799832" y="2816352"/>
             <a:ext cx="3145536" cy="256032"/>
           </a:xfrm>
           <a:prstGeom prst="rect">
@@ -11289,8 +11721,8 @@
         </p:nvSpPr>
         <p:spPr>
           <a:xfrm>
-            <a:off x="7818120" y="3300984"/>
-            <a:ext cx="3090672" cy="877824"/>
+            <a:off x="7818120" y="3182112"/>
+            <a:ext cx="3090672" cy="718718"/>
           </a:xfrm>
           <a:prstGeom prst="rect">
             <a:avLst/>
@@ -11330,12 +11762,12 @@
         </p:nvSpPr>
         <p:spPr>
           <a:xfrm>
-            <a:off x="7635240" y="4498848"/>
-            <a:ext cx="3474720" cy="1143000"/>
+            <a:off x="7635240" y="4184294"/>
+            <a:ext cx="3474720" cy="1466698"/>
           </a:xfrm>
           <a:prstGeom prst="roundRect">
             <a:avLst>
-              <a:gd name="adj" fmla="val 9600"/>
+              <a:gd name="adj" fmla="val 7481"/>
             </a:avLst>
           </a:prstGeom>
           <a:solidFill>
@@ -11357,7 +11789,7 @@
         </p:nvSpPr>
         <p:spPr>
           <a:xfrm>
-            <a:off x="7799832" y="4645152"/>
+            <a:off x="7799832" y="4330598"/>
             <a:ext cx="3145536" cy="256032"/>
           </a:xfrm>
           <a:prstGeom prst="rect">
@@ -11396,8 +11828,8 @@
         </p:nvSpPr>
         <p:spPr>
           <a:xfrm>
-            <a:off x="7799832" y="4974336"/>
-            <a:ext cx="3145536" cy="576072"/>
+            <a:off x="7799832" y="4659782"/>
+            <a:ext cx="3145536" cy="899770"/>
           </a:xfrm>
           <a:prstGeom prst="rect">
             <a:avLst/>
@@ -11423,7 +11855,7 @@
                 <a:ea typeface="Aptos" pitchFamily="34" charset="-122"/>
                 <a:cs typeface="Aptos" pitchFamily="34" charset="-120"/>
               </a:rPr>
-              <a:t>Connect the concept to public health purpose, responsible use, required safeguards, documentation, and the next action a.</a:t>
+              <a:t>Connect the concept to public health purpose, responsible use, required safeguards, documentation, and the next action a department should take.</a:t>
             </a:r>
             <a:endParaRPr lang="en-US" sz="1320" dirty="0"/>
           </a:p>
@@ -11792,11 +12224,11 @@
         <p:spPr>
           <a:xfrm>
             <a:off x="7635240" y="1325880"/>
-            <a:ext cx="3474720" cy="1325880"/>
+            <a:ext cx="3474720" cy="1207008"/>
           </a:xfrm>
           <a:prstGeom prst="roundRect">
             <a:avLst>
-              <a:gd name="adj" fmla="val 8276"/>
+              <a:gd name="adj" fmla="val 9091"/>
             </a:avLst>
           </a:prstGeom>
           <a:solidFill>
@@ -11858,7 +12290,7 @@
         <p:spPr>
           <a:xfrm>
             <a:off x="7799832" y="1801368"/>
-            <a:ext cx="3145536" cy="758952"/>
+            <a:ext cx="3145536" cy="640080"/>
           </a:xfrm>
           <a:prstGeom prst="rect">
             <a:avLst/>
@@ -11898,12 +12330,12 @@
         </p:nvSpPr>
         <p:spPr>
           <a:xfrm>
-            <a:off x="7635240" y="2788920"/>
-            <a:ext cx="3474720" cy="1536192"/>
+            <a:off x="7635240" y="2670048"/>
+            <a:ext cx="3474720" cy="1377086"/>
           </a:xfrm>
           <a:prstGeom prst="roundRect">
             <a:avLst>
-              <a:gd name="adj" fmla="val 7143"/>
+              <a:gd name="adj" fmla="val 7968"/>
             </a:avLst>
           </a:prstGeom>
           <a:solidFill>
@@ -11925,7 +12357,7 @@
         </p:nvSpPr>
         <p:spPr>
           <a:xfrm>
-            <a:off x="7799832" y="2935224"/>
+            <a:off x="7799832" y="2816352"/>
             <a:ext cx="3145536" cy="256032"/>
           </a:xfrm>
           <a:prstGeom prst="rect">
@@ -11964,8 +12396,8 @@
         </p:nvSpPr>
         <p:spPr>
           <a:xfrm>
-            <a:off x="7818120" y="3300984"/>
-            <a:ext cx="3090672" cy="877824"/>
+            <a:off x="7818120" y="3182112"/>
+            <a:ext cx="3090672" cy="718718"/>
           </a:xfrm>
           <a:prstGeom prst="rect">
             <a:avLst/>
@@ -12039,12 +12471,12 @@
         </p:nvSpPr>
         <p:spPr>
           <a:xfrm>
-            <a:off x="7635240" y="4498848"/>
-            <a:ext cx="3474720" cy="1143000"/>
+            <a:off x="7635240" y="4184294"/>
+            <a:ext cx="3474720" cy="1466698"/>
           </a:xfrm>
           <a:prstGeom prst="roundRect">
             <a:avLst>
-              <a:gd name="adj" fmla="val 9600"/>
+              <a:gd name="adj" fmla="val 7481"/>
             </a:avLst>
           </a:prstGeom>
           <a:solidFill>
@@ -12066,7 +12498,7 @@
         </p:nvSpPr>
         <p:spPr>
           <a:xfrm>
-            <a:off x="7799832" y="4645152"/>
+            <a:off x="7799832" y="4330598"/>
             <a:ext cx="3145536" cy="256032"/>
           </a:xfrm>
           <a:prstGeom prst="rect">
@@ -12105,8 +12537,8 @@
         </p:nvSpPr>
         <p:spPr>
           <a:xfrm>
-            <a:off x="7799832" y="4974336"/>
-            <a:ext cx="3145536" cy="576072"/>
+            <a:off x="7799832" y="4659782"/>
+            <a:ext cx="3145536" cy="899770"/>
           </a:xfrm>
           <a:prstGeom prst="rect">
             <a:avLst/>
@@ -12132,7 +12564,7 @@
                 <a:ea typeface="Aptos" pitchFamily="34" charset="-122"/>
                 <a:cs typeface="Aptos" pitchFamily="34" charset="-120"/>
               </a:rPr>
-              <a:t>Use the assignment to test whether you can explain the concept, apply it to a realistic public health situation, and.</a:t>
+              <a:t>Use the assignment to test whether you can explain the concept, apply it to a realistic public health situation, and identify what would need review before the work moves forward.</a:t>
             </a:r>
             <a:endParaRPr lang="en-US" sz="1320" dirty="0"/>
           </a:p>
@@ -12501,11 +12933,11 @@
         <p:spPr>
           <a:xfrm>
             <a:off x="7635240" y="1325880"/>
-            <a:ext cx="3474720" cy="1325880"/>
+            <a:ext cx="3474720" cy="1207008"/>
           </a:xfrm>
           <a:prstGeom prst="roundRect">
             <a:avLst>
-              <a:gd name="adj" fmla="val 8276"/>
+              <a:gd name="adj" fmla="val 9091"/>
             </a:avLst>
           </a:prstGeom>
           <a:solidFill>
@@ -12567,7 +12999,7 @@
         <p:spPr>
           <a:xfrm>
             <a:off x="7799832" y="1801368"/>
-            <a:ext cx="3145536" cy="758952"/>
+            <a:ext cx="3145536" cy="640080"/>
           </a:xfrm>
           <a:prstGeom prst="rect">
             <a:avLst/>
@@ -12607,12 +13039,12 @@
         </p:nvSpPr>
         <p:spPr>
           <a:xfrm>
-            <a:off x="7635240" y="2788920"/>
-            <a:ext cx="3474720" cy="1536192"/>
+            <a:off x="7635240" y="2670048"/>
+            <a:ext cx="3474720" cy="1377086"/>
           </a:xfrm>
           <a:prstGeom prst="roundRect">
             <a:avLst>
-              <a:gd name="adj" fmla="val 7143"/>
+              <a:gd name="adj" fmla="val 7968"/>
             </a:avLst>
           </a:prstGeom>
           <a:solidFill>
@@ -12634,7 +13066,7 @@
         </p:nvSpPr>
         <p:spPr>
           <a:xfrm>
-            <a:off x="7799832" y="2935224"/>
+            <a:off x="7799832" y="2816352"/>
             <a:ext cx="3145536" cy="256032"/>
           </a:xfrm>
           <a:prstGeom prst="rect">
@@ -12673,8 +13105,8 @@
         </p:nvSpPr>
         <p:spPr>
           <a:xfrm>
-            <a:off x="7818120" y="3300984"/>
-            <a:ext cx="3090672" cy="877824"/>
+            <a:off x="7818120" y="3182112"/>
+            <a:ext cx="3090672" cy="718718"/>
           </a:xfrm>
           <a:prstGeom prst="rect">
             <a:avLst/>
@@ -12748,12 +13180,12 @@
         </p:nvSpPr>
         <p:spPr>
           <a:xfrm>
-            <a:off x="7635240" y="4498848"/>
-            <a:ext cx="3474720" cy="1143000"/>
+            <a:off x="7635240" y="4184294"/>
+            <a:ext cx="3474720" cy="1466698"/>
           </a:xfrm>
           <a:prstGeom prst="roundRect">
             <a:avLst>
-              <a:gd name="adj" fmla="val 9600"/>
+              <a:gd name="adj" fmla="val 7481"/>
             </a:avLst>
           </a:prstGeom>
           <a:solidFill>
@@ -12775,7 +13207,7 @@
         </p:nvSpPr>
         <p:spPr>
           <a:xfrm>
-            <a:off x="7799832" y="4645152"/>
+            <a:off x="7799832" y="4330598"/>
             <a:ext cx="3145536" cy="256032"/>
           </a:xfrm>
           <a:prstGeom prst="rect">
@@ -12814,8 +13246,8 @@
         </p:nvSpPr>
         <p:spPr>
           <a:xfrm>
-            <a:off x="7799832" y="4974336"/>
-            <a:ext cx="3145536" cy="576072"/>
+            <a:off x="7799832" y="4659782"/>
+            <a:ext cx="3145536" cy="899770"/>
           </a:xfrm>
           <a:prstGeom prst="rect">
             <a:avLst/>
@@ -12841,7 +13273,7 @@
                 <a:ea typeface="Aptos" pitchFamily="34" charset="-122"/>
                 <a:cs typeface="Aptos" pitchFamily="34" charset="-120"/>
               </a:rPr>
-              <a:t>Use the assignment to test whether you can explain the concept, apply it to a realistic public health situation, and.</a:t>
+              <a:t>Use the assignment to test whether you can explain the concept, apply it to a realistic public health situation, and identify what would need review before the work moves forward.</a:t>
             </a:r>
             <a:endParaRPr lang="en-US" sz="1320" dirty="0"/>
           </a:p>
@@ -13210,11 +13642,11 @@
         <p:spPr>
           <a:xfrm>
             <a:off x="7635240" y="1325880"/>
-            <a:ext cx="3474720" cy="1325880"/>
+            <a:ext cx="3474720" cy="1207008"/>
           </a:xfrm>
           <a:prstGeom prst="roundRect">
             <a:avLst>
-              <a:gd name="adj" fmla="val 8276"/>
+              <a:gd name="adj" fmla="val 9091"/>
             </a:avLst>
           </a:prstGeom>
           <a:solidFill>
@@ -13276,7 +13708,7 @@
         <p:spPr>
           <a:xfrm>
             <a:off x="7799832" y="1801368"/>
-            <a:ext cx="3145536" cy="758952"/>
+            <a:ext cx="3145536" cy="640080"/>
           </a:xfrm>
           <a:prstGeom prst="rect">
             <a:avLst/>
@@ -13316,12 +13748,12 @@
         </p:nvSpPr>
         <p:spPr>
           <a:xfrm>
-            <a:off x="7635240" y="2788920"/>
-            <a:ext cx="3474720" cy="1536192"/>
+            <a:off x="7635240" y="2670048"/>
+            <a:ext cx="3474720" cy="1377086"/>
           </a:xfrm>
           <a:prstGeom prst="roundRect">
             <a:avLst>
-              <a:gd name="adj" fmla="val 7143"/>
+              <a:gd name="adj" fmla="val 7968"/>
             </a:avLst>
           </a:prstGeom>
           <a:solidFill>
@@ -13343,7 +13775,7 @@
         </p:nvSpPr>
         <p:spPr>
           <a:xfrm>
-            <a:off x="7799832" y="2935224"/>
+            <a:off x="7799832" y="2816352"/>
             <a:ext cx="3145536" cy="256032"/>
           </a:xfrm>
           <a:prstGeom prst="rect">
@@ -13382,8 +13814,8 @@
         </p:nvSpPr>
         <p:spPr>
           <a:xfrm>
-            <a:off x="7818120" y="3300984"/>
-            <a:ext cx="3090672" cy="877824"/>
+            <a:off x="7818120" y="3182112"/>
+            <a:ext cx="3090672" cy="718718"/>
           </a:xfrm>
           <a:prstGeom prst="rect">
             <a:avLst/>
@@ -13440,12 +13872,12 @@
         </p:nvSpPr>
         <p:spPr>
           <a:xfrm>
-            <a:off x="7635240" y="4498848"/>
-            <a:ext cx="3474720" cy="1143000"/>
+            <a:off x="7635240" y="4184294"/>
+            <a:ext cx="3474720" cy="1466698"/>
           </a:xfrm>
           <a:prstGeom prst="roundRect">
             <a:avLst>
-              <a:gd name="adj" fmla="val 9600"/>
+              <a:gd name="adj" fmla="val 7481"/>
             </a:avLst>
           </a:prstGeom>
           <a:solidFill>
@@ -13467,7 +13899,7 @@
         </p:nvSpPr>
         <p:spPr>
           <a:xfrm>
-            <a:off x="7799832" y="4645152"/>
+            <a:off x="7799832" y="4330598"/>
             <a:ext cx="3145536" cy="256032"/>
           </a:xfrm>
           <a:prstGeom prst="rect">
@@ -13506,8 +13938,8 @@
         </p:nvSpPr>
         <p:spPr>
           <a:xfrm>
-            <a:off x="7799832" y="4974336"/>
-            <a:ext cx="3145536" cy="576072"/>
+            <a:off x="7799832" y="4659782"/>
+            <a:ext cx="3145536" cy="899770"/>
           </a:xfrm>
           <a:prstGeom prst="rect">
             <a:avLst/>
@@ -13533,7 +13965,7 @@
                 <a:ea typeface="Aptos" pitchFamily="34" charset="-122"/>
                 <a:cs typeface="Aptos" pitchFamily="34" charset="-120"/>
               </a:rPr>
-              <a:t>Connect the concept to public health purpose, responsible use, required safeguards, documentation, and the next action a.</a:t>
+              <a:t>Connect the concept to public health purpose, responsible use, required safeguards, documentation, and the next action a department should take.</a:t>
             </a:r>
             <a:endParaRPr lang="en-US" sz="1320" dirty="0"/>
           </a:p>
@@ -14011,7 +14443,7 @@
                 <a:ea typeface="Aptos" pitchFamily="34" charset="-122"/>
                 <a:cs typeface="Aptos" pitchFamily="34" charset="-120"/>
               </a:rPr>
-              <a:t>Use the related plays to identify decisions, participants, timing, approvals, and documentation needed for responsible.</a:t>
+              <a:t>Use the related plays to identify decisions, participants, timing, approvals, and documentation needed for responsible implementation.</a:t>
             </a:r>
             <a:endParaRPr lang="en-US" sz="1320" dirty="0"/>
           </a:p>
@@ -14630,7 +15062,7 @@
                 <a:ea typeface="Aptos" pitchFamily="34" charset="-122"/>
                 <a:cs typeface="Aptos" pitchFamily="34" charset="-120"/>
               </a:rPr>
-              <a:t>Use linked tools when your department needs a structured worksheet, template, checklist, review process, or.</a:t>
+              <a:t>Use linked tools when your department needs a structured worksheet, template, checklist, review process, or documentation artifact.</a:t>
             </a:r>
             <a:endParaRPr lang="en-US" sz="1320" dirty="0"/>
           </a:p>
@@ -15140,11 +15572,11 @@
         <p:spPr>
           <a:xfrm>
             <a:off x="7635240" y="1325880"/>
-            <a:ext cx="3474720" cy="1325880"/>
+            <a:ext cx="3474720" cy="1207008"/>
           </a:xfrm>
           <a:prstGeom prst="roundRect">
             <a:avLst>
-              <a:gd name="adj" fmla="val 8276"/>
+              <a:gd name="adj" fmla="val 9091"/>
             </a:avLst>
           </a:prstGeom>
           <a:solidFill>
@@ -15206,7 +15638,7 @@
         <p:spPr>
           <a:xfrm>
             <a:off x="7799832" y="1801368"/>
-            <a:ext cx="3145536" cy="758952"/>
+            <a:ext cx="3145536" cy="640080"/>
           </a:xfrm>
           <a:prstGeom prst="rect">
             <a:avLst/>
@@ -15246,12 +15678,12 @@
         </p:nvSpPr>
         <p:spPr>
           <a:xfrm>
-            <a:off x="7635240" y="2788920"/>
-            <a:ext cx="3474720" cy="1536192"/>
+            <a:off x="7635240" y="2670048"/>
+            <a:ext cx="3474720" cy="1377086"/>
           </a:xfrm>
           <a:prstGeom prst="roundRect">
             <a:avLst>
-              <a:gd name="adj" fmla="val 7143"/>
+              <a:gd name="adj" fmla="val 7968"/>
             </a:avLst>
           </a:prstGeom>
           <a:solidFill>
@@ -15273,7 +15705,7 @@
         </p:nvSpPr>
         <p:spPr>
           <a:xfrm>
-            <a:off x="7799832" y="2935224"/>
+            <a:off x="7799832" y="2816352"/>
             <a:ext cx="3145536" cy="256032"/>
           </a:xfrm>
           <a:prstGeom prst="rect">
@@ -15312,8 +15744,8 @@
         </p:nvSpPr>
         <p:spPr>
           <a:xfrm>
-            <a:off x="7818120" y="3300984"/>
-            <a:ext cx="3090672" cy="877824"/>
+            <a:off x="7818120" y="3182112"/>
+            <a:ext cx="3090672" cy="718718"/>
           </a:xfrm>
           <a:prstGeom prst="rect">
             <a:avLst/>
@@ -15370,12 +15802,12 @@
         </p:nvSpPr>
         <p:spPr>
           <a:xfrm>
-            <a:off x="7635240" y="4498848"/>
-            <a:ext cx="3474720" cy="1143000"/>
+            <a:off x="7635240" y="4184294"/>
+            <a:ext cx="3474720" cy="1466698"/>
           </a:xfrm>
           <a:prstGeom prst="roundRect">
             <a:avLst>
-              <a:gd name="adj" fmla="val 9600"/>
+              <a:gd name="adj" fmla="val 7481"/>
             </a:avLst>
           </a:prstGeom>
           <a:solidFill>
@@ -15397,7 +15829,7 @@
         </p:nvSpPr>
         <p:spPr>
           <a:xfrm>
-            <a:off x="7799832" y="4645152"/>
+            <a:off x="7799832" y="4330598"/>
             <a:ext cx="3145536" cy="256032"/>
           </a:xfrm>
           <a:prstGeom prst="rect">
@@ -15436,8 +15868,8 @@
         </p:nvSpPr>
         <p:spPr>
           <a:xfrm>
-            <a:off x="7799832" y="4974336"/>
-            <a:ext cx="3145536" cy="576072"/>
+            <a:off x="7799832" y="4659782"/>
+            <a:ext cx="3145536" cy="899770"/>
           </a:xfrm>
           <a:prstGeom prst="rect">
             <a:avLst/>
@@ -15463,7 +15895,7 @@
                 <a:ea typeface="Aptos" pitchFamily="34" charset="-122"/>
                 <a:cs typeface="Aptos" pitchFamily="34" charset="-120"/>
               </a:rPr>
-              <a:t>Use the assignment to test whether you can explain the concept, apply it to a realistic public health situation, and.</a:t>
+              <a:t>Use the assignment to test whether you can explain the concept, apply it to a realistic public health situation, and identify what would need review before the work moves forward.</a:t>
             </a:r>
             <a:endParaRPr lang="en-US" sz="1320" dirty="0"/>
           </a:p>
@@ -15832,11 +16264,11 @@
         <p:spPr>
           <a:xfrm>
             <a:off x="7635240" y="1325880"/>
-            <a:ext cx="3474720" cy="1325880"/>
+            <a:ext cx="3474720" cy="1207008"/>
           </a:xfrm>
           <a:prstGeom prst="roundRect">
             <a:avLst>
-              <a:gd name="adj" fmla="val 8276"/>
+              <a:gd name="adj" fmla="val 9091"/>
             </a:avLst>
           </a:prstGeom>
           <a:solidFill>
@@ -15898,7 +16330,7 @@
         <p:spPr>
           <a:xfrm>
             <a:off x="7799832" y="1801368"/>
-            <a:ext cx="3145536" cy="758952"/>
+            <a:ext cx="3145536" cy="640080"/>
           </a:xfrm>
           <a:prstGeom prst="rect">
             <a:avLst/>
@@ -15938,12 +16370,12 @@
         </p:nvSpPr>
         <p:spPr>
           <a:xfrm>
-            <a:off x="7635240" y="2788920"/>
-            <a:ext cx="3474720" cy="1536192"/>
+            <a:off x="7635240" y="2670048"/>
+            <a:ext cx="3474720" cy="1377086"/>
           </a:xfrm>
           <a:prstGeom prst="roundRect">
             <a:avLst>
-              <a:gd name="adj" fmla="val 7143"/>
+              <a:gd name="adj" fmla="val 7968"/>
             </a:avLst>
           </a:prstGeom>
           <a:solidFill>
@@ -15965,7 +16397,7 @@
         </p:nvSpPr>
         <p:spPr>
           <a:xfrm>
-            <a:off x="7799832" y="2935224"/>
+            <a:off x="7799832" y="2816352"/>
             <a:ext cx="3145536" cy="256032"/>
           </a:xfrm>
           <a:prstGeom prst="rect">
@@ -16004,8 +16436,8 @@
         </p:nvSpPr>
         <p:spPr>
           <a:xfrm>
-            <a:off x="7818120" y="3300984"/>
-            <a:ext cx="3090672" cy="877824"/>
+            <a:off x="7818120" y="3182112"/>
+            <a:ext cx="3090672" cy="718718"/>
           </a:xfrm>
           <a:prstGeom prst="rect">
             <a:avLst/>
@@ -16062,12 +16494,12 @@
         </p:nvSpPr>
         <p:spPr>
           <a:xfrm>
-            <a:off x="7635240" y="4498848"/>
-            <a:ext cx="3474720" cy="1143000"/>
+            <a:off x="7635240" y="4184294"/>
+            <a:ext cx="3474720" cy="1466698"/>
           </a:xfrm>
           <a:prstGeom prst="roundRect">
             <a:avLst>
-              <a:gd name="adj" fmla="val 9600"/>
+              <a:gd name="adj" fmla="val 7481"/>
             </a:avLst>
           </a:prstGeom>
           <a:solidFill>
@@ -16089,7 +16521,7 @@
         </p:nvSpPr>
         <p:spPr>
           <a:xfrm>
-            <a:off x="7799832" y="4645152"/>
+            <a:off x="7799832" y="4330598"/>
             <a:ext cx="3145536" cy="256032"/>
           </a:xfrm>
           <a:prstGeom prst="rect">
@@ -16128,8 +16560,8 @@
         </p:nvSpPr>
         <p:spPr>
           <a:xfrm>
-            <a:off x="7799832" y="4974336"/>
-            <a:ext cx="3145536" cy="576072"/>
+            <a:off x="7799832" y="4659782"/>
+            <a:ext cx="3145536" cy="899770"/>
           </a:xfrm>
           <a:prstGeom prst="rect">
             <a:avLst/>
@@ -16155,7 +16587,7 @@
                 <a:ea typeface="Aptos" pitchFamily="34" charset="-122"/>
                 <a:cs typeface="Aptos" pitchFamily="34" charset="-120"/>
               </a:rPr>
-              <a:t>Connect the concept to public health purpose, responsible use, required safeguards, documentation, and the next action a.</a:t>
+              <a:t>Connect the concept to public health purpose, responsible use, required safeguards, documentation, and the next action a department should take.</a:t>
             </a:r>
             <a:endParaRPr lang="en-US" sz="1320" dirty="0"/>
           </a:p>
@@ -16524,11 +16956,11 @@
         <p:spPr>
           <a:xfrm>
             <a:off x="7635240" y="1325880"/>
-            <a:ext cx="3474720" cy="1325880"/>
+            <a:ext cx="3474720" cy="1207008"/>
           </a:xfrm>
           <a:prstGeom prst="roundRect">
             <a:avLst>
-              <a:gd name="adj" fmla="val 8276"/>
+              <a:gd name="adj" fmla="val 9091"/>
             </a:avLst>
           </a:prstGeom>
           <a:solidFill>
@@ -16590,7 +17022,7 @@
         <p:spPr>
           <a:xfrm>
             <a:off x="7799832" y="1801368"/>
-            <a:ext cx="3145536" cy="758952"/>
+            <a:ext cx="3145536" cy="640080"/>
           </a:xfrm>
           <a:prstGeom prst="rect">
             <a:avLst/>
@@ -16630,12 +17062,12 @@
         </p:nvSpPr>
         <p:spPr>
           <a:xfrm>
-            <a:off x="7635240" y="2788920"/>
-            <a:ext cx="3474720" cy="1536192"/>
+            <a:off x="7635240" y="2670048"/>
+            <a:ext cx="3474720" cy="1377086"/>
           </a:xfrm>
           <a:prstGeom prst="roundRect">
             <a:avLst>
-              <a:gd name="adj" fmla="val 7143"/>
+              <a:gd name="adj" fmla="val 7968"/>
             </a:avLst>
           </a:prstGeom>
           <a:solidFill>
@@ -16657,8 +17089,8 @@
         </p:nvSpPr>
         <p:spPr>
           <a:xfrm>
-            <a:off x="7799832" y="2935224"/>
-            <a:ext cx="3145536" cy="256032"/>
+            <a:off x="7799832" y="2798064"/>
+            <a:ext cx="3145536" cy="237744"/>
           </a:xfrm>
           <a:prstGeom prst="rect">
             <a:avLst/>
@@ -16674,7 +17106,7 @@
               <a:buNone/>
             </a:pPr>
             <a:r>
-              <a:rPr lang="en-US" sz="1300" b="1" dirty="0">
+              <a:rPr lang="en-US" sz="1250" b="1" dirty="0">
                 <a:solidFill>
                   <a:srgbClr val="0068B7"/>
                 </a:solidFill>
@@ -16682,101 +17114,317 @@
                 <a:ea typeface="Aptos" pitchFamily="34" charset="-122"/>
                 <a:cs typeface="Aptos" pitchFamily="34" charset="-120"/>
               </a:rPr>
-              <a:t>Concept checkpoints</a:t>
-            </a:r>
-            <a:endParaRPr lang="en-US" sz="1300" dirty="0"/>
-          </a:p>
-        </p:txBody>
-      </p:sp>
-      <p:sp>
-        <p:nvSpPr>
-          <p:cNvPr id="15" name="Text 13"/>
-          <p:cNvSpPr/>
-          <p:nvPr/>
-        </p:nvSpPr>
-        <p:spPr>
-          <a:xfrm>
-            <a:off x="7818120" y="3300984"/>
-            <a:ext cx="3090672" cy="877824"/>
-          </a:xfrm>
-          <a:prstGeom prst="rect">
-            <a:avLst/>
-          </a:prstGeom>
-          <a:noFill/>
-          <a:ln/>
-        </p:spPr>
-        <p:txBody>
-          <a:bodyPr wrap="square" lIns="508" tIns="508" rIns="508" bIns="508" rtlCol="0" anchor="t">
+              <a:t>Governance pathway</a:t>
+            </a:r>
+            <a:endParaRPr lang="en-US" sz="1250" dirty="0"/>
+          </a:p>
+        </p:txBody>
+      </p:sp>
+      <p:sp>
+        <p:nvSpPr>
+          <p:cNvPr id="15" name="Shape 13"/>
+          <p:cNvSpPr/>
+          <p:nvPr/>
+        </p:nvSpPr>
+        <p:spPr>
+          <a:xfrm>
+            <a:off x="8763000" y="3351276"/>
+            <a:ext cx="164592" cy="0"/>
+          </a:xfrm>
+          <a:prstGeom prst="line">
+            <a:avLst/>
+          </a:prstGeom>
+          <a:noFill/>
+          <a:ln w="15240">
+            <a:solidFill>
+              <a:srgbClr val="8ABBD8"/>
+            </a:solidFill>
+            <a:prstDash val="solid"/>
+          </a:ln>
+        </p:spPr>
+      </p:sp>
+      <p:sp>
+        <p:nvSpPr>
+          <p:cNvPr id="16" name="Shape 14"/>
+          <p:cNvSpPr/>
+          <p:nvPr/>
+        </p:nvSpPr>
+        <p:spPr>
+          <a:xfrm>
+            <a:off x="7872984" y="3200400"/>
+            <a:ext cx="890016" cy="301752"/>
+          </a:xfrm>
+          <a:prstGeom prst="roundRect">
+            <a:avLst>
+              <a:gd name="adj" fmla="val 24242"/>
+            </a:avLst>
+          </a:prstGeom>
+          <a:solidFill>
+            <a:srgbClr val="0068B7"/>
+          </a:solidFill>
+          <a:ln w="12700">
+            <a:solidFill>
+              <a:srgbClr val="0068B7"/>
+            </a:solidFill>
+            <a:prstDash val="solid"/>
+          </a:ln>
+        </p:spPr>
+      </p:sp>
+      <p:sp>
+        <p:nvSpPr>
+          <p:cNvPr id="17" name="Text 15"/>
+          <p:cNvSpPr/>
+          <p:nvPr/>
+        </p:nvSpPr>
+        <p:spPr>
+          <a:xfrm>
+            <a:off x="7909560" y="3273552"/>
+            <a:ext cx="816864" cy="146304"/>
+          </a:xfrm>
+          <a:prstGeom prst="rect">
+            <a:avLst/>
+          </a:prstGeom>
+          <a:noFill/>
+          <a:ln/>
+        </p:spPr>
+        <p:txBody>
+          <a:bodyPr wrap="square" lIns="0" tIns="0" rIns="0" bIns="0" rtlCol="0" anchor="ctr">
             <a:normAutofit/>
           </a:bodyPr>
           <a:lstStyle/>
           <a:p>
-            <a:pPr indent="0" marL="0">
-              <a:buNone/>
-            </a:pPr>
-            <a:r>
-              <a:rPr lang="en-US" sz="1220" dirty="0">
-                <a:solidFill>
-                  <a:srgbClr val="17364A"/>
-                </a:solidFill>
-                <a:latin typeface="Aptos" pitchFamily="34" charset="0"/>
-                <a:ea typeface="Aptos" pitchFamily="34" charset="-122"/>
-                <a:cs typeface="Aptos" pitchFamily="34" charset="-120"/>
-              </a:rPr>
-              <a:t>This national-level module is intended for training and planning.</a:t>
-            </a:r>
-            <a:endParaRPr lang="en-US" sz="1220" dirty="0"/>
-          </a:p>
-          <a:p>
-            <a:pPr indent="0" marL="0">
-              <a:buNone/>
-            </a:pPr>
-            <a:r>
-              <a:rPr lang="en-US" sz="1220" dirty="0">
-                <a:solidFill>
-                  <a:srgbClr val="17364A"/>
-                </a:solidFill>
-                <a:latin typeface="Aptos" pitchFamily="34" charset="0"/>
-                <a:ea typeface="Aptos" pitchFamily="34" charset="-122"/>
-                <a:cs typeface="Aptos" pitchFamily="34" charset="-120"/>
-              </a:rPr>
-              <a:t>It does not replace legal, privacy, procurement, civil rights,.</a:t>
-            </a:r>
-            <a:endParaRPr lang="en-US" sz="1220" dirty="0"/>
-          </a:p>
-          <a:p>
-            <a:pPr indent="0" marL="0">
-              <a:buNone/>
-            </a:pPr>
-            <a:r>
-              <a:rPr lang="en-US" sz="1220" dirty="0">
-                <a:solidFill>
-                  <a:srgbClr val="17364A"/>
-                </a:solidFill>
-                <a:latin typeface="Aptos" pitchFamily="34" charset="0"/>
-                <a:ea typeface="Aptos" pitchFamily="34" charset="-122"/>
-                <a:cs typeface="Aptos" pitchFamily="34" charset="-120"/>
-              </a:rPr>
-              <a:t>Learners should confirm applicable requirements in their own.</a:t>
-            </a:r>
-            <a:endParaRPr lang="en-US" sz="1220" dirty="0"/>
-          </a:p>
-        </p:txBody>
-      </p:sp>
-      <p:sp>
-        <p:nvSpPr>
-          <p:cNvPr id="16" name="Shape 14"/>
-          <p:cNvSpPr/>
-          <p:nvPr/>
-        </p:nvSpPr>
-        <p:spPr>
-          <a:xfrm>
-            <a:off x="7635240" y="4498848"/>
-            <a:ext cx="3474720" cy="1143000"/>
+            <a:pPr algn="ctr" indent="0" marL="0">
+              <a:buNone/>
+            </a:pPr>
+            <a:r>
+              <a:rPr lang="en-US" sz="880" b="1" dirty="0">
+                <a:solidFill>
+                  <a:srgbClr val="FFFFFF"/>
+                </a:solidFill>
+                <a:latin typeface="Aptos" pitchFamily="34" charset="0"/>
+                <a:ea typeface="Aptos" pitchFamily="34" charset="-122"/>
+                <a:cs typeface="Aptos" pitchFamily="34" charset="-120"/>
+              </a:rPr>
+              <a:t>Submit</a:t>
+            </a:r>
+            <a:endParaRPr lang="en-US" sz="880" dirty="0"/>
+          </a:p>
+        </p:txBody>
+      </p:sp>
+      <p:sp>
+        <p:nvSpPr>
+          <p:cNvPr id="18" name="Shape 16"/>
+          <p:cNvSpPr/>
+          <p:nvPr/>
+        </p:nvSpPr>
+        <p:spPr>
+          <a:xfrm>
+            <a:off x="9817608" y="3351276"/>
+            <a:ext cx="164592" cy="0"/>
+          </a:xfrm>
+          <a:prstGeom prst="line">
+            <a:avLst/>
+          </a:prstGeom>
+          <a:noFill/>
+          <a:ln w="15240">
+            <a:solidFill>
+              <a:srgbClr val="8ABBD8"/>
+            </a:solidFill>
+            <a:prstDash val="solid"/>
+          </a:ln>
+        </p:spPr>
+      </p:sp>
+      <p:sp>
+        <p:nvSpPr>
+          <p:cNvPr id="19" name="Shape 17"/>
+          <p:cNvSpPr/>
+          <p:nvPr/>
+        </p:nvSpPr>
+        <p:spPr>
+          <a:xfrm>
+            <a:off x="8927592" y="3200400"/>
+            <a:ext cx="890016" cy="301752"/>
           </a:xfrm>
           <a:prstGeom prst="roundRect">
             <a:avLst>
-              <a:gd name="adj" fmla="val 9600"/>
+              <a:gd name="adj" fmla="val 24242"/>
+            </a:avLst>
+          </a:prstGeom>
+          <a:solidFill>
+            <a:srgbClr val="2F8A28"/>
+          </a:solidFill>
+          <a:ln w="12700">
+            <a:solidFill>
+              <a:srgbClr val="2F8A28"/>
+            </a:solidFill>
+            <a:prstDash val="solid"/>
+          </a:ln>
+        </p:spPr>
+      </p:sp>
+      <p:sp>
+        <p:nvSpPr>
+          <p:cNvPr id="20" name="Text 18"/>
+          <p:cNvSpPr/>
+          <p:nvPr/>
+        </p:nvSpPr>
+        <p:spPr>
+          <a:xfrm>
+            <a:off x="8964168" y="3273552"/>
+            <a:ext cx="816864" cy="146304"/>
+          </a:xfrm>
+          <a:prstGeom prst="rect">
+            <a:avLst/>
+          </a:prstGeom>
+          <a:noFill/>
+          <a:ln/>
+        </p:spPr>
+        <p:txBody>
+          <a:bodyPr wrap="square" lIns="0" tIns="0" rIns="0" bIns="0" rtlCol="0" anchor="ctr">
+            <a:normAutofit/>
+          </a:bodyPr>
+          <a:lstStyle/>
+          <a:p>
+            <a:pPr algn="ctr" indent="0" marL="0">
+              <a:buNone/>
+            </a:pPr>
+            <a:r>
+              <a:rPr lang="en-US" sz="880" b="1" dirty="0">
+                <a:solidFill>
+                  <a:srgbClr val="FFFFFF"/>
+                </a:solidFill>
+                <a:latin typeface="Aptos" pitchFamily="34" charset="0"/>
+                <a:ea typeface="Aptos" pitchFamily="34" charset="-122"/>
+                <a:cs typeface="Aptos" pitchFamily="34" charset="-120"/>
+              </a:rPr>
+              <a:t>Review</a:t>
+            </a:r>
+            <a:endParaRPr lang="en-US" sz="880" dirty="0"/>
+          </a:p>
+        </p:txBody>
+      </p:sp>
+      <p:sp>
+        <p:nvSpPr>
+          <p:cNvPr id="21" name="Shape 19"/>
+          <p:cNvSpPr/>
+          <p:nvPr/>
+        </p:nvSpPr>
+        <p:spPr>
+          <a:xfrm>
+            <a:off x="9982200" y="3200400"/>
+            <a:ext cx="890016" cy="301752"/>
+          </a:xfrm>
+          <a:prstGeom prst="roundRect">
+            <a:avLst>
+              <a:gd name="adj" fmla="val 24242"/>
+            </a:avLst>
+          </a:prstGeom>
+          <a:solidFill>
+            <a:srgbClr val="6A4CA3"/>
+          </a:solidFill>
+          <a:ln w="12700">
+            <a:solidFill>
+              <a:srgbClr val="6A4CA3"/>
+            </a:solidFill>
+            <a:prstDash val="solid"/>
+          </a:ln>
+        </p:spPr>
+      </p:sp>
+      <p:sp>
+        <p:nvSpPr>
+          <p:cNvPr id="22" name="Text 20"/>
+          <p:cNvSpPr/>
+          <p:nvPr/>
+        </p:nvSpPr>
+        <p:spPr>
+          <a:xfrm>
+            <a:off x="10018776" y="3273552"/>
+            <a:ext cx="816864" cy="146304"/>
+          </a:xfrm>
+          <a:prstGeom prst="rect">
+            <a:avLst/>
+          </a:prstGeom>
+          <a:noFill/>
+          <a:ln/>
+        </p:spPr>
+        <p:txBody>
+          <a:bodyPr wrap="square" lIns="0" tIns="0" rIns="0" bIns="0" rtlCol="0" anchor="ctr">
+            <a:normAutofit/>
+          </a:bodyPr>
+          <a:lstStyle/>
+          <a:p>
+            <a:pPr algn="ctr" indent="0" marL="0">
+              <a:buNone/>
+            </a:pPr>
+            <a:r>
+              <a:rPr lang="en-US" sz="880" b="1" dirty="0">
+                <a:solidFill>
+                  <a:srgbClr val="FFFFFF"/>
+                </a:solidFill>
+                <a:latin typeface="Aptos" pitchFamily="34" charset="0"/>
+                <a:ea typeface="Aptos" pitchFamily="34" charset="-122"/>
+                <a:cs typeface="Aptos" pitchFamily="34" charset="-120"/>
+              </a:rPr>
+              <a:t>Oversee</a:t>
+            </a:r>
+            <a:endParaRPr lang="en-US" sz="880" dirty="0"/>
+          </a:p>
+        </p:txBody>
+      </p:sp>
+      <p:sp>
+        <p:nvSpPr>
+          <p:cNvPr id="23" name="Text 21"/>
+          <p:cNvSpPr/>
+          <p:nvPr/>
+        </p:nvSpPr>
+        <p:spPr>
+          <a:xfrm>
+            <a:off x="7854696" y="3694176"/>
+            <a:ext cx="3035808" cy="206654"/>
+          </a:xfrm>
+          <a:prstGeom prst="rect">
+            <a:avLst/>
+          </a:prstGeom>
+          <a:noFill/>
+          <a:ln/>
+        </p:spPr>
+        <p:txBody>
+          <a:bodyPr wrap="square" lIns="254" tIns="254" rIns="254" bIns="254" rtlCol="0" anchor="t">
+            <a:normAutofit/>
+          </a:bodyPr>
+          <a:lstStyle/>
+          <a:p>
+            <a:pPr indent="0" marL="0">
+              <a:buNone/>
+            </a:pPr>
+            <a:r>
+              <a:rPr lang="en-US" sz="1120" dirty="0">
+                <a:solidFill>
+                  <a:srgbClr val="17364A"/>
+                </a:solidFill>
+                <a:latin typeface="Aptos" pitchFamily="34" charset="0"/>
+                <a:ea typeface="Aptos" pitchFamily="34" charset="-122"/>
+                <a:cs typeface="Aptos" pitchFamily="34" charset="-120"/>
+              </a:rPr>
+              <a:t>A proposed AI use should move through documented review before it becomes an operational workflow.</a:t>
+            </a:r>
+            <a:endParaRPr lang="en-US" sz="1120" dirty="0"/>
+          </a:p>
+        </p:txBody>
+      </p:sp>
+      <p:sp>
+        <p:nvSpPr>
+          <p:cNvPr id="24" name="Shape 22"/>
+          <p:cNvSpPr/>
+          <p:nvPr/>
+        </p:nvSpPr>
+        <p:spPr>
+          <a:xfrm>
+            <a:off x="7635240" y="4184294"/>
+            <a:ext cx="3474720" cy="1466698"/>
+          </a:xfrm>
+          <a:prstGeom prst="roundRect">
+            <a:avLst>
+              <a:gd name="adj" fmla="val 7481"/>
             </a:avLst>
           </a:prstGeom>
           <a:solidFill>
@@ -16792,13 +17440,13 @@
       </p:sp>
       <p:sp>
         <p:nvSpPr>
-          <p:cNvPr id="17" name="Text 15"/>
-          <p:cNvSpPr/>
-          <p:nvPr/>
-        </p:nvSpPr>
-        <p:spPr>
-          <a:xfrm>
-            <a:off x="7799832" y="4645152"/>
+          <p:cNvPr id="25" name="Text 23"/>
+          <p:cNvSpPr/>
+          <p:nvPr/>
+        </p:nvSpPr>
+        <p:spPr>
+          <a:xfrm>
+            <a:off x="7799832" y="4330598"/>
             <a:ext cx="3145536" cy="256032"/>
           </a:xfrm>
           <a:prstGeom prst="rect">
@@ -16831,14 +17479,14 @@
       </p:sp>
       <p:sp>
         <p:nvSpPr>
-          <p:cNvPr id="18" name="Text 16"/>
-          <p:cNvSpPr/>
-          <p:nvPr/>
-        </p:nvSpPr>
-        <p:spPr>
-          <a:xfrm>
-            <a:off x="7799832" y="4974336"/>
-            <a:ext cx="3145536" cy="576072"/>
+          <p:cNvPr id="26" name="Text 24"/>
+          <p:cNvSpPr/>
+          <p:nvPr/>
+        </p:nvSpPr>
+        <p:spPr>
+          <a:xfrm>
+            <a:off x="7799832" y="4659782"/>
+            <a:ext cx="3145536" cy="899770"/>
           </a:xfrm>
           <a:prstGeom prst="rect">
             <a:avLst/>
@@ -16864,7 +17512,7 @@
                 <a:ea typeface="Aptos" pitchFamily="34" charset="-122"/>
                 <a:cs typeface="Aptos" pitchFamily="34" charset="-120"/>
               </a:rPr>
-              <a:t>Translate this concept into clear decision rights, review steps, documentation expectations, and escalation paths before.</a:t>
+              <a:t>Translate this concept into clear decision rights, review steps, documentation expectations, and escalation paths before an AI-supported workflow is approved.</a:t>
             </a:r>
             <a:endParaRPr lang="en-US" sz="1320" dirty="0"/>
           </a:p>
@@ -17233,11 +17881,11 @@
         <p:spPr>
           <a:xfrm>
             <a:off x="7635240" y="1325880"/>
-            <a:ext cx="3474720" cy="1325880"/>
+            <a:ext cx="3474720" cy="1255471"/>
           </a:xfrm>
           <a:prstGeom prst="roundRect">
             <a:avLst>
-              <a:gd name="adj" fmla="val 8276"/>
+              <a:gd name="adj" fmla="val 8740"/>
             </a:avLst>
           </a:prstGeom>
           <a:solidFill>
@@ -17299,7 +17947,7 @@
         <p:spPr>
           <a:xfrm>
             <a:off x="7799832" y="1801368"/>
-            <a:ext cx="3145536" cy="758952"/>
+            <a:ext cx="3145536" cy="688543"/>
           </a:xfrm>
           <a:prstGeom prst="rect">
             <a:avLst/>
@@ -17339,12 +17987,12 @@
         </p:nvSpPr>
         <p:spPr>
           <a:xfrm>
-            <a:off x="7635240" y="2788920"/>
-            <a:ext cx="3474720" cy="1536192"/>
+            <a:off x="7635240" y="2718511"/>
+            <a:ext cx="3474720" cy="1328623"/>
           </a:xfrm>
           <a:prstGeom prst="roundRect">
             <a:avLst>
-              <a:gd name="adj" fmla="val 7143"/>
+              <a:gd name="adj" fmla="val 8259"/>
             </a:avLst>
           </a:prstGeom>
           <a:solidFill>
@@ -17366,7 +18014,7 @@
         </p:nvSpPr>
         <p:spPr>
           <a:xfrm>
-            <a:off x="7799832" y="2935224"/>
+            <a:off x="7799832" y="2864815"/>
             <a:ext cx="3145536" cy="256032"/>
           </a:xfrm>
           <a:prstGeom prst="rect">
@@ -17405,8 +18053,8 @@
         </p:nvSpPr>
         <p:spPr>
           <a:xfrm>
-            <a:off x="7818120" y="3300984"/>
-            <a:ext cx="3090672" cy="877824"/>
+            <a:off x="7818120" y="3230575"/>
+            <a:ext cx="3090672" cy="670255"/>
           </a:xfrm>
           <a:prstGeom prst="rect">
             <a:avLst/>
@@ -17480,12 +18128,12 @@
         </p:nvSpPr>
         <p:spPr>
           <a:xfrm>
-            <a:off x="7635240" y="4498848"/>
-            <a:ext cx="3474720" cy="1143000"/>
+            <a:off x="7635240" y="4184294"/>
+            <a:ext cx="3474720" cy="1466698"/>
           </a:xfrm>
           <a:prstGeom prst="roundRect">
             <a:avLst>
-              <a:gd name="adj" fmla="val 9600"/>
+              <a:gd name="adj" fmla="val 7481"/>
             </a:avLst>
           </a:prstGeom>
           <a:solidFill>
@@ -17507,7 +18155,7 @@
         </p:nvSpPr>
         <p:spPr>
           <a:xfrm>
-            <a:off x="7799832" y="4645152"/>
+            <a:off x="7799832" y="4330598"/>
             <a:ext cx="3145536" cy="256032"/>
           </a:xfrm>
           <a:prstGeom prst="rect">
@@ -17546,8 +18194,8 @@
         </p:nvSpPr>
         <p:spPr>
           <a:xfrm>
-            <a:off x="7799832" y="4974336"/>
-            <a:ext cx="3145536" cy="576072"/>
+            <a:off x="7799832" y="4659782"/>
+            <a:ext cx="3145536" cy="899770"/>
           </a:xfrm>
           <a:prstGeom prst="rect">
             <a:avLst/>
@@ -17573,7 +18221,7 @@
                 <a:ea typeface="Aptos" pitchFamily="34" charset="-122"/>
                 <a:cs typeface="Aptos" pitchFamily="34" charset="-120"/>
               </a:rPr>
-              <a:t>Connect the concept to public health purpose, responsible use, required safeguards, documentation, and the next action a.</a:t>
+              <a:t>Connect the concept to public health purpose, responsible use, required safeguards, documentation, and the next action a department should take.</a:t>
             </a:r>
             <a:endParaRPr lang="en-US" sz="1320" dirty="0"/>
           </a:p>
@@ -17942,11 +18590,11 @@
         <p:spPr>
           <a:xfrm>
             <a:off x="7635240" y="1325880"/>
-            <a:ext cx="3474720" cy="1325880"/>
+            <a:ext cx="3474720" cy="1207008"/>
           </a:xfrm>
           <a:prstGeom prst="roundRect">
             <a:avLst>
-              <a:gd name="adj" fmla="val 8276"/>
+              <a:gd name="adj" fmla="val 9091"/>
             </a:avLst>
           </a:prstGeom>
           <a:solidFill>
@@ -18008,7 +18656,7 @@
         <p:spPr>
           <a:xfrm>
             <a:off x="7799832" y="1801368"/>
-            <a:ext cx="3145536" cy="758952"/>
+            <a:ext cx="3145536" cy="640080"/>
           </a:xfrm>
           <a:prstGeom prst="rect">
             <a:avLst/>
@@ -18048,12 +18696,12 @@
         </p:nvSpPr>
         <p:spPr>
           <a:xfrm>
-            <a:off x="7635240" y="2788920"/>
-            <a:ext cx="3474720" cy="1536192"/>
+            <a:off x="7635240" y="2670048"/>
+            <a:ext cx="3474720" cy="1377086"/>
           </a:xfrm>
           <a:prstGeom prst="roundRect">
             <a:avLst>
-              <a:gd name="adj" fmla="val 7143"/>
+              <a:gd name="adj" fmla="val 7968"/>
             </a:avLst>
           </a:prstGeom>
           <a:solidFill>
@@ -18075,7 +18723,7 @@
         </p:nvSpPr>
         <p:spPr>
           <a:xfrm>
-            <a:off x="7799832" y="2935224"/>
+            <a:off x="7799832" y="2816352"/>
             <a:ext cx="3145536" cy="256032"/>
           </a:xfrm>
           <a:prstGeom prst="rect">
@@ -18114,8 +18762,8 @@
         </p:nvSpPr>
         <p:spPr>
           <a:xfrm>
-            <a:off x="7818120" y="3300984"/>
-            <a:ext cx="3090672" cy="877824"/>
+            <a:off x="7818120" y="3182112"/>
+            <a:ext cx="3090672" cy="718718"/>
           </a:xfrm>
           <a:prstGeom prst="rect">
             <a:avLst/>
@@ -18189,12 +18837,12 @@
         </p:nvSpPr>
         <p:spPr>
           <a:xfrm>
-            <a:off x="7635240" y="4498848"/>
-            <a:ext cx="3474720" cy="1143000"/>
+            <a:off x="7635240" y="4184294"/>
+            <a:ext cx="3474720" cy="1466698"/>
           </a:xfrm>
           <a:prstGeom prst="roundRect">
             <a:avLst>
-              <a:gd name="adj" fmla="val 9600"/>
+              <a:gd name="adj" fmla="val 7481"/>
             </a:avLst>
           </a:prstGeom>
           <a:solidFill>
@@ -18216,7 +18864,7 @@
         </p:nvSpPr>
         <p:spPr>
           <a:xfrm>
-            <a:off x="7799832" y="4645152"/>
+            <a:off x="7799832" y="4330598"/>
             <a:ext cx="3145536" cy="256032"/>
           </a:xfrm>
           <a:prstGeom prst="rect">
@@ -18255,8 +18903,8 @@
         </p:nvSpPr>
         <p:spPr>
           <a:xfrm>
-            <a:off x="7799832" y="4974336"/>
-            <a:ext cx="3145536" cy="576072"/>
+            <a:off x="7799832" y="4659782"/>
+            <a:ext cx="3145536" cy="899770"/>
           </a:xfrm>
           <a:prstGeom prst="rect">
             <a:avLst/>
@@ -18282,7 +18930,7 @@
                 <a:ea typeface="Aptos" pitchFamily="34" charset="-122"/>
                 <a:cs typeface="Aptos" pitchFamily="34" charset="-120"/>
               </a:rPr>
-              <a:t>Connect the concept to public health purpose, responsible use, required safeguards, documentation, and the next action a.</a:t>
+              <a:t>Connect the concept to public health purpose, responsible use, required safeguards, documentation, and the next action a department should take.</a:t>
             </a:r>
             <a:endParaRPr lang="en-US" sz="1320" dirty="0"/>
           </a:p>

--- a/downloads/presentations/modules/arc-220.pptx
+++ b/downloads/presentations/modules/arc-220.pptx
@@ -3434,8 +3434,8 @@
         </p:nvSpPr>
         <p:spPr>
           <a:xfrm>
-            <a:off x="868680" y="1508760"/>
-            <a:ext cx="6309360" cy="4160520"/>
+            <a:off x="822960" y="1463040"/>
+            <a:ext cx="6565392" cy="4343400"/>
           </a:xfrm>
           <a:prstGeom prst="rect">
             <a:avLst/>
@@ -3453,7 +3453,7 @@
               <a:buNone/>
             </a:pPr>
             <a:r>
-              <a:rPr lang="en-US" sz="2100" dirty="0">
+              <a:rPr lang="en-US" sz="1920" dirty="0">
                 <a:solidFill>
                   <a:srgbClr val="003A63"/>
                 </a:solidFill>
@@ -3463,14 +3463,14 @@
               </a:rPr>
               <a:t>• API.</a:t>
             </a:r>
-            <a:endParaRPr lang="en-US" sz="2100" dirty="0"/>
-          </a:p>
-          <a:p>
-            <a:pPr indent="0" marL="0">
-              <a:buNone/>
-            </a:pPr>
-            <a:r>
-              <a:rPr lang="en-US" sz="2100" dirty="0">
+            <a:endParaRPr lang="en-US" sz="1920" dirty="0"/>
+          </a:p>
+          <a:p>
+            <a:pPr indent="0" marL="0">
+              <a:buNone/>
+            </a:pPr>
+            <a:r>
+              <a:rPr lang="en-US" sz="1920" dirty="0">
                 <a:solidFill>
                   <a:srgbClr val="003A63"/>
                 </a:solidFill>
@@ -3480,14 +3480,14 @@
               </a:rPr>
               <a:t>• An API allows one system to request data or services from another system.</a:t>
             </a:r>
-            <a:endParaRPr lang="en-US" sz="2100" dirty="0"/>
-          </a:p>
-          <a:p>
-            <a:pPr indent="0" marL="0">
-              <a:buNone/>
-            </a:pPr>
-            <a:r>
-              <a:rPr lang="en-US" sz="2100" dirty="0">
+            <a:endParaRPr lang="en-US" sz="1920" dirty="0"/>
+          </a:p>
+          <a:p>
+            <a:pPr indent="0" marL="0">
+              <a:buNone/>
+            </a:pPr>
+            <a:r>
+              <a:rPr lang="en-US" sz="1920" dirty="0">
                 <a:solidFill>
                   <a:srgbClr val="003A63"/>
                 </a:solidFill>
@@ -3495,9 +3495,9 @@
                 <a:ea typeface="Aptos" pitchFamily="34" charset="-122"/>
                 <a:cs typeface="Aptos" pitchFamily="34" charset="-120"/>
               </a:rPr>
-              <a:t>• In AI workflows, APIs may support retrieval, task creation, status updates, or integration.</a:t>
-            </a:r>
-            <a:endParaRPr lang="en-US" sz="2100" dirty="0"/>
+              <a:t>• In AI workflows, APIs may support retrieval, task creation, status updates,.</a:t>
+            </a:r>
+            <a:endParaRPr lang="en-US" sz="1920" dirty="0"/>
           </a:p>
         </p:txBody>
       </p:sp>
@@ -3509,12 +3509,12 @@
         </p:nvSpPr>
         <p:spPr>
           <a:xfrm>
-            <a:off x="7635240" y="1325880"/>
-            <a:ext cx="3474720" cy="1207008"/>
+            <a:off x="7543800" y="1325880"/>
+            <a:ext cx="3611880" cy="1261872"/>
           </a:xfrm>
           <a:prstGeom prst="roundRect">
             <a:avLst>
-              <a:gd name="adj" fmla="val 9091"/>
+              <a:gd name="adj" fmla="val 8696"/>
             </a:avLst>
           </a:prstGeom>
           <a:solidFill>
@@ -3536,8 +3536,8 @@
         </p:nvSpPr>
         <p:spPr>
           <a:xfrm>
-            <a:off x="7799832" y="1472184"/>
-            <a:ext cx="3145536" cy="256032"/>
+            <a:off x="7708392" y="1453896"/>
+            <a:ext cx="3282696" cy="228600"/>
           </a:xfrm>
           <a:prstGeom prst="rect">
             <a:avLst/>
@@ -3553,7 +3553,7 @@
               <a:buNone/>
             </a:pPr>
             <a:r>
-              <a:rPr lang="en-US" sz="1300" b="1" dirty="0">
+              <a:rPr lang="en-US" sz="1220" b="1" dirty="0">
                 <a:solidFill>
                   <a:srgbClr val="0068B7"/>
                 </a:solidFill>
@@ -3563,7 +3563,7 @@
               </a:rPr>
               <a:t>Core concept</a:t>
             </a:r>
-            <a:endParaRPr lang="en-US" sz="1300" dirty="0"/>
+            <a:endParaRPr lang="en-US" sz="1220" dirty="0"/>
           </a:p>
         </p:txBody>
       </p:sp>
@@ -3575,8 +3575,8 @@
         </p:nvSpPr>
         <p:spPr>
           <a:xfrm>
-            <a:off x="7799832" y="1801368"/>
-            <a:ext cx="3145536" cy="640080"/>
+            <a:off x="7708392" y="1764792"/>
+            <a:ext cx="3282696" cy="749808"/>
           </a:xfrm>
           <a:prstGeom prst="rect">
             <a:avLst/>
@@ -3594,7 +3594,7 @@
               <a:buNone/>
             </a:pPr>
             <a:r>
-              <a:rPr lang="en-US" sz="1320" dirty="0">
+              <a:rPr lang="en-US" sz="1220" dirty="0">
                 <a:solidFill>
                   <a:srgbClr val="17364A"/>
                 </a:solidFill>
@@ -3604,7 +3604,7 @@
               </a:rPr>
               <a:t>API.</a:t>
             </a:r>
-            <a:endParaRPr lang="en-US" sz="1320" dirty="0"/>
+            <a:endParaRPr lang="en-US" sz="1220" dirty="0"/>
           </a:p>
         </p:txBody>
       </p:sp>
@@ -3616,12 +3616,12 @@
         </p:nvSpPr>
         <p:spPr>
           <a:xfrm>
-            <a:off x="7635240" y="2670048"/>
-            <a:ext cx="3474720" cy="1377086"/>
+            <a:off x="7543800" y="2724912"/>
+            <a:ext cx="3611880" cy="1527048"/>
           </a:xfrm>
           <a:prstGeom prst="roundRect">
             <a:avLst>
-              <a:gd name="adj" fmla="val 7968"/>
+              <a:gd name="adj" fmla="val 7186"/>
             </a:avLst>
           </a:prstGeom>
           <a:solidFill>
@@ -3643,8 +3643,8 @@
         </p:nvSpPr>
         <p:spPr>
           <a:xfrm>
-            <a:off x="7799832" y="2816352"/>
-            <a:ext cx="3145536" cy="256032"/>
+            <a:off x="7708392" y="2852928"/>
+            <a:ext cx="3282696" cy="228600"/>
           </a:xfrm>
           <a:prstGeom prst="rect">
             <a:avLst/>
@@ -3660,7 +3660,7 @@
               <a:buNone/>
             </a:pPr>
             <a:r>
-              <a:rPr lang="en-US" sz="1300" b="1" dirty="0">
+              <a:rPr lang="en-US" sz="1220" b="1" dirty="0">
                 <a:solidFill>
                   <a:srgbClr val="0068B7"/>
                 </a:solidFill>
@@ -3670,7 +3670,7 @@
               </a:rPr>
               <a:t>Concept checkpoints</a:t>
             </a:r>
-            <a:endParaRPr lang="en-US" sz="1300" dirty="0"/>
+            <a:endParaRPr lang="en-US" sz="1220" dirty="0"/>
           </a:p>
         </p:txBody>
       </p:sp>
@@ -3682,8 +3682,8 @@
         </p:nvSpPr>
         <p:spPr>
           <a:xfrm>
-            <a:off x="7818120" y="3182112"/>
-            <a:ext cx="3090672" cy="718718"/>
+            <a:off x="7726680" y="3182112"/>
+            <a:ext cx="3227832" cy="960120"/>
           </a:xfrm>
           <a:prstGeom prst="rect">
             <a:avLst/>
@@ -3701,7 +3701,7 @@
               <a:buNone/>
             </a:pPr>
             <a:r>
-              <a:rPr lang="en-US" sz="1220" dirty="0">
+              <a:rPr lang="en-US" sz="1140" dirty="0">
                 <a:solidFill>
                   <a:srgbClr val="17364A"/>
                 </a:solidFill>
@@ -3709,16 +3709,16 @@
                 <a:ea typeface="Aptos" pitchFamily="34" charset="-122"/>
                 <a:cs typeface="Aptos" pitchFamily="34" charset="-120"/>
               </a:rPr>
-              <a:t>In AI workflows, APIs may support retrieval, task creation, status.</a:t>
-            </a:r>
-            <a:endParaRPr lang="en-US" sz="1220" dirty="0"/>
-          </a:p>
-          <a:p>
-            <a:pPr indent="0" marL="0">
-              <a:buNone/>
-            </a:pPr>
-            <a:r>
-              <a:rPr lang="en-US" sz="1220" dirty="0">
+              <a:t>In AI workflows, APIs may support retrieval, task.</a:t>
+            </a:r>
+            <a:endParaRPr lang="en-US" sz="1140" dirty="0"/>
+          </a:p>
+          <a:p>
+            <a:pPr indent="0" marL="0">
+              <a:buNone/>
+            </a:pPr>
+            <a:r>
+              <a:rPr lang="en-US" sz="1140" dirty="0">
                 <a:solidFill>
                   <a:srgbClr val="17364A"/>
                 </a:solidFill>
@@ -3726,16 +3726,16 @@
                 <a:ea typeface="Aptos" pitchFamily="34" charset="-122"/>
                 <a:cs typeface="Aptos" pitchFamily="34" charset="-120"/>
               </a:rPr>
-              <a:t>API access must be governed by permissions, authentication, rate.</a:t>
-            </a:r>
-            <a:endParaRPr lang="en-US" sz="1220" dirty="0"/>
-          </a:p>
-          <a:p>
-            <a:pPr indent="0" marL="0">
-              <a:buNone/>
-            </a:pPr>
-            <a:r>
-              <a:rPr lang="en-US" sz="1220" dirty="0">
+              <a:t>API access must be governed by permissions,.</a:t>
+            </a:r>
+            <a:endParaRPr lang="en-US" sz="1140" dirty="0"/>
+          </a:p>
+          <a:p>
+            <a:pPr indent="0" marL="0">
+              <a:buNone/>
+            </a:pPr>
+            <a:r>
+              <a:rPr lang="en-US" sz="1140" dirty="0">
                 <a:solidFill>
                   <a:srgbClr val="17364A"/>
                 </a:solidFill>
@@ -3745,7 +3745,7 @@
               </a:rPr>
               <a:t>Implementation guide.</a:t>
             </a:r>
-            <a:endParaRPr lang="en-US" sz="1220" dirty="0"/>
+            <a:endParaRPr lang="en-US" sz="1140" dirty="0"/>
           </a:p>
         </p:txBody>
       </p:sp>
@@ -3757,12 +3757,12 @@
         </p:nvSpPr>
         <p:spPr>
           <a:xfrm>
-            <a:off x="7635240" y="4184294"/>
-            <a:ext cx="3474720" cy="1466698"/>
+            <a:off x="7543800" y="4389120"/>
+            <a:ext cx="3611880" cy="1261872"/>
           </a:xfrm>
           <a:prstGeom prst="roundRect">
             <a:avLst>
-              <a:gd name="adj" fmla="val 7481"/>
+              <a:gd name="adj" fmla="val 8696"/>
             </a:avLst>
           </a:prstGeom>
           <a:solidFill>
@@ -3784,8 +3784,8 @@
         </p:nvSpPr>
         <p:spPr>
           <a:xfrm>
-            <a:off x="7799832" y="4330598"/>
-            <a:ext cx="3145536" cy="256032"/>
+            <a:off x="7708392" y="4517136"/>
+            <a:ext cx="3282696" cy="228600"/>
           </a:xfrm>
           <a:prstGeom prst="rect">
             <a:avLst/>
@@ -3801,7 +3801,7 @@
               <a:buNone/>
             </a:pPr>
             <a:r>
-              <a:rPr lang="en-US" sz="1300" b="1" dirty="0">
+              <a:rPr lang="en-US" sz="1220" b="1" dirty="0">
                 <a:solidFill>
                   <a:srgbClr val="0068B7"/>
                 </a:solidFill>
@@ -3811,7 +3811,7 @@
               </a:rPr>
               <a:t>Apply it</a:t>
             </a:r>
-            <a:endParaRPr lang="en-US" sz="1300" dirty="0"/>
+            <a:endParaRPr lang="en-US" sz="1220" dirty="0"/>
           </a:p>
         </p:txBody>
       </p:sp>
@@ -3823,8 +3823,8 @@
         </p:nvSpPr>
         <p:spPr>
           <a:xfrm>
-            <a:off x="7799832" y="4659782"/>
-            <a:ext cx="3145536" cy="899770"/>
+            <a:off x="7708392" y="4828032"/>
+            <a:ext cx="3282696" cy="749808"/>
           </a:xfrm>
           <a:prstGeom prst="rect">
             <a:avLst/>
@@ -3842,7 +3842,7 @@
               <a:buNone/>
             </a:pPr>
             <a:r>
-              <a:rPr lang="en-US" sz="1320" dirty="0">
+              <a:rPr lang="en-US" sz="1220" dirty="0">
                 <a:solidFill>
                   <a:srgbClr val="17364A"/>
                 </a:solidFill>
@@ -3850,9 +3850,9 @@
                 <a:ea typeface="Aptos" pitchFamily="34" charset="-122"/>
                 <a:cs typeface="Aptos" pitchFamily="34" charset="-120"/>
               </a:rPr>
-              <a:t>Connect the concept to public health purpose, responsible use, required safeguards, documentation, and the next action a department should take.</a:t>
-            </a:r>
-            <a:endParaRPr lang="en-US" sz="1320" dirty="0"/>
+              <a:t>Connect the concept to public health purpose, responsible use, required.</a:t>
+            </a:r>
+            <a:endParaRPr lang="en-US" sz="1220" dirty="0"/>
           </a:p>
         </p:txBody>
       </p:sp>
@@ -4143,8 +4143,8 @@
         </p:nvSpPr>
         <p:spPr>
           <a:xfrm>
-            <a:off x="868680" y="1508760"/>
-            <a:ext cx="6309360" cy="4160520"/>
+            <a:off x="822960" y="1463040"/>
+            <a:ext cx="6565392" cy="4343400"/>
           </a:xfrm>
           <a:prstGeom prst="rect">
             <a:avLst/>
@@ -4162,7 +4162,7 @@
               <a:buNone/>
             </a:pPr>
             <a:r>
-              <a:rPr lang="en-US" sz="2100" dirty="0">
+              <a:rPr lang="en-US" sz="1920" dirty="0">
                 <a:solidFill>
                   <a:srgbClr val="003A63"/>
                 </a:solidFill>
@@ -4170,16 +4170,16 @@
                 <a:ea typeface="Aptos" pitchFamily="34" charset="-122"/>
                 <a:cs typeface="Aptos" pitchFamily="34" charset="-120"/>
               </a:rPr>
-              <a:t>• An immunization information system may receive HL7 v2 VXU messages from providers and.</a:t>
-            </a:r>
-            <a:endParaRPr lang="en-US" sz="2100" dirty="0"/>
-          </a:p>
-          <a:p>
-            <a:pPr indent="0" marL="0">
-              <a:buNone/>
-            </a:pPr>
-            <a:r>
-              <a:rPr lang="en-US" sz="2100" dirty="0">
+              <a:t>• An immunization information system may receive HL7 v2 VXU messages from.</a:t>
+            </a:r>
+            <a:endParaRPr lang="en-US" sz="1920" dirty="0"/>
+          </a:p>
+          <a:p>
+            <a:pPr indent="0" marL="0">
+              <a:buNone/>
+            </a:pPr>
+            <a:r>
+              <a:rPr lang="en-US" sz="1920" dirty="0">
                 <a:solidFill>
                   <a:srgbClr val="003A63"/>
                 </a:solidFill>
@@ -4187,16 +4187,16 @@
                 <a:ea typeface="Aptos" pitchFamily="34" charset="-122"/>
                 <a:cs typeface="Aptos" pitchFamily="34" charset="-120"/>
               </a:rPr>
-              <a:t>• If an AI tool is used to identify vaccination gaps or generate reminder lists, it depends on.</a:t>
-            </a:r>
-            <a:endParaRPr lang="en-US" sz="2100" dirty="0"/>
-          </a:p>
-          <a:p>
-            <a:pPr indent="0" marL="0">
-              <a:buNone/>
-            </a:pPr>
-            <a:r>
-              <a:rPr lang="en-US" sz="2100" dirty="0">
+              <a:t>• If an AI tool is used to identify vaccination gaps or generate reminder.</a:t>
+            </a:r>
+            <a:endParaRPr lang="en-US" sz="1920" dirty="0"/>
+          </a:p>
+          <a:p>
+            <a:pPr indent="0" marL="0">
+              <a:buNone/>
+            </a:pPr>
+            <a:r>
+              <a:rPr lang="en-US" sz="1920" dirty="0">
                 <a:solidFill>
                   <a:srgbClr val="003A63"/>
                 </a:solidFill>
@@ -4204,9 +4204,9 @@
                 <a:ea typeface="Aptos" pitchFamily="34" charset="-122"/>
                 <a:cs typeface="Aptos" pitchFamily="34" charset="-120"/>
               </a:rPr>
-              <a:t>• Interoperability failures can look like epidemiologic gaps even when the problem is actually.</a:t>
-            </a:r>
-            <a:endParaRPr lang="en-US" sz="2100" dirty="0"/>
+              <a:t>• Interoperability failures can look like epidemiologic gaps even when the.</a:t>
+            </a:r>
+            <a:endParaRPr lang="en-US" sz="1920" dirty="0"/>
           </a:p>
         </p:txBody>
       </p:sp>
@@ -4218,12 +4218,12 @@
         </p:nvSpPr>
         <p:spPr>
           <a:xfrm>
-            <a:off x="7635240" y="1325880"/>
-            <a:ext cx="3474720" cy="1255471"/>
+            <a:off x="7543800" y="1325880"/>
+            <a:ext cx="3611880" cy="1261872"/>
           </a:xfrm>
           <a:prstGeom prst="roundRect">
             <a:avLst>
-              <a:gd name="adj" fmla="val 8740"/>
+              <a:gd name="adj" fmla="val 8696"/>
             </a:avLst>
           </a:prstGeom>
           <a:solidFill>
@@ -4245,8 +4245,8 @@
         </p:nvSpPr>
         <p:spPr>
           <a:xfrm>
-            <a:off x="7799832" y="1472184"/>
-            <a:ext cx="3145536" cy="256032"/>
+            <a:off x="7708392" y="1453896"/>
+            <a:ext cx="3282696" cy="228600"/>
           </a:xfrm>
           <a:prstGeom prst="rect">
             <a:avLst/>
@@ -4262,7 +4262,7 @@
               <a:buNone/>
             </a:pPr>
             <a:r>
-              <a:rPr lang="en-US" sz="1300" b="1" dirty="0">
+              <a:rPr lang="en-US" sz="1220" b="1" dirty="0">
                 <a:solidFill>
                   <a:srgbClr val="0068B7"/>
                 </a:solidFill>
@@ -4272,7 +4272,7 @@
               </a:rPr>
               <a:t>Core concept</a:t>
             </a:r>
-            <a:endParaRPr lang="en-US" sz="1300" dirty="0"/>
+            <a:endParaRPr lang="en-US" sz="1220" dirty="0"/>
           </a:p>
         </p:txBody>
       </p:sp>
@@ -4284,8 +4284,8 @@
         </p:nvSpPr>
         <p:spPr>
           <a:xfrm>
-            <a:off x="7799832" y="1801368"/>
-            <a:ext cx="3145536" cy="688543"/>
+            <a:off x="7708392" y="1764792"/>
+            <a:ext cx="3282696" cy="749808"/>
           </a:xfrm>
           <a:prstGeom prst="rect">
             <a:avLst/>
@@ -4303,7 +4303,7 @@
               <a:buNone/>
             </a:pPr>
             <a:r>
-              <a:rPr lang="en-US" sz="1320" dirty="0">
+              <a:rPr lang="en-US" sz="1220" dirty="0">
                 <a:solidFill>
                   <a:srgbClr val="17364A"/>
                 </a:solidFill>
@@ -4311,9 +4311,9 @@
                 <a:ea typeface="Aptos" pitchFamily="34" charset="-122"/>
                 <a:cs typeface="Aptos" pitchFamily="34" charset="-120"/>
               </a:rPr>
-              <a:t>An immunization information system may receive HL7 v2 VXU messages from providers and pharmacies.</a:t>
-            </a:r>
-            <a:endParaRPr lang="en-US" sz="1320" dirty="0"/>
+              <a:t>An immunization information system may receive HL7 v2 VXU messages from.</a:t>
+            </a:r>
+            <a:endParaRPr lang="en-US" sz="1220" dirty="0"/>
           </a:p>
         </p:txBody>
       </p:sp>
@@ -4325,12 +4325,12 @@
         </p:nvSpPr>
         <p:spPr>
           <a:xfrm>
-            <a:off x="7635240" y="2718511"/>
-            <a:ext cx="3474720" cy="1328623"/>
+            <a:off x="7543800" y="2724912"/>
+            <a:ext cx="3611880" cy="1527048"/>
           </a:xfrm>
           <a:prstGeom prst="roundRect">
             <a:avLst>
-              <a:gd name="adj" fmla="val 8259"/>
+              <a:gd name="adj" fmla="val 7186"/>
             </a:avLst>
           </a:prstGeom>
           <a:solidFill>
@@ -4352,8 +4352,8 @@
         </p:nvSpPr>
         <p:spPr>
           <a:xfrm>
-            <a:off x="7799832" y="2864815"/>
-            <a:ext cx="3145536" cy="256032"/>
+            <a:off x="7708392" y="2852928"/>
+            <a:ext cx="3282696" cy="228600"/>
           </a:xfrm>
           <a:prstGeom prst="rect">
             <a:avLst/>
@@ -4369,7 +4369,7 @@
               <a:buNone/>
             </a:pPr>
             <a:r>
-              <a:rPr lang="en-US" sz="1300" b="1" dirty="0">
+              <a:rPr lang="en-US" sz="1220" b="1" dirty="0">
                 <a:solidFill>
                   <a:srgbClr val="0068B7"/>
                 </a:solidFill>
@@ -4379,7 +4379,7 @@
               </a:rPr>
               <a:t>Concept checkpoints</a:t>
             </a:r>
-            <a:endParaRPr lang="en-US" sz="1300" dirty="0"/>
+            <a:endParaRPr lang="en-US" sz="1220" dirty="0"/>
           </a:p>
         </p:txBody>
       </p:sp>
@@ -4391,8 +4391,8 @@
         </p:nvSpPr>
         <p:spPr>
           <a:xfrm>
-            <a:off x="7818120" y="3230575"/>
-            <a:ext cx="3090672" cy="670255"/>
+            <a:off x="7726680" y="3182112"/>
+            <a:ext cx="3227832" cy="960120"/>
           </a:xfrm>
           <a:prstGeom prst="rect">
             <a:avLst/>
@@ -4410,7 +4410,7 @@
               <a:buNone/>
             </a:pPr>
             <a:r>
-              <a:rPr lang="en-US" sz="1220" dirty="0">
+              <a:rPr lang="en-US" sz="1140" dirty="0">
                 <a:solidFill>
                   <a:srgbClr val="17364A"/>
                 </a:solidFill>
@@ -4418,16 +4418,16 @@
                 <a:ea typeface="Aptos" pitchFamily="34" charset="-122"/>
                 <a:cs typeface="Aptos" pitchFamily="34" charset="-120"/>
               </a:rPr>
-              <a:t>If an AI tool is used to identify vaccination gaps or generate.</a:t>
-            </a:r>
-            <a:endParaRPr lang="en-US" sz="1220" dirty="0"/>
-          </a:p>
-          <a:p>
-            <a:pPr indent="0" marL="0">
-              <a:buNone/>
-            </a:pPr>
-            <a:r>
-              <a:rPr lang="en-US" sz="1220" dirty="0">
+              <a:t>If an AI tool is used to identify vaccination gaps.</a:t>
+            </a:r>
+            <a:endParaRPr lang="en-US" sz="1140" dirty="0"/>
+          </a:p>
+          <a:p>
+            <a:pPr indent="0" marL="0">
+              <a:buNone/>
+            </a:pPr>
+            <a:r>
+              <a:rPr lang="en-US" sz="1140" dirty="0">
                 <a:solidFill>
                   <a:srgbClr val="17364A"/>
                 </a:solidFill>
@@ -4435,16 +4435,16 @@
                 <a:ea typeface="Aptos" pitchFamily="34" charset="-122"/>
                 <a:cs typeface="Aptos" pitchFamily="34" charset="-120"/>
               </a:rPr>
-              <a:t>Interoperability failures can look like epidemiologic gaps even.</a:t>
-            </a:r>
-            <a:endParaRPr lang="en-US" sz="1220" dirty="0"/>
-          </a:p>
-          <a:p>
-            <a:pPr indent="0" marL="0">
-              <a:buNone/>
-            </a:pPr>
-            <a:r>
-              <a:rPr lang="en-US" sz="1220" dirty="0">
+              <a:t>Interoperability failures can look like.</a:t>
+            </a:r>
+            <a:endParaRPr lang="en-US" sz="1140" dirty="0"/>
+          </a:p>
+          <a:p>
+            <a:pPr indent="0" marL="0">
+              <a:buNone/>
+            </a:pPr>
+            <a:r>
+              <a:rPr lang="en-US" sz="1140" dirty="0">
                 <a:solidFill>
                   <a:srgbClr val="17364A"/>
                 </a:solidFill>
@@ -4452,9 +4452,9 @@
                 <a:ea typeface="Aptos" pitchFamily="34" charset="-122"/>
                 <a:cs typeface="Aptos" pitchFamily="34" charset="-120"/>
               </a:rPr>
-              <a:t>A public health agency exploring AI-supported case summaries from.</a:t>
-            </a:r>
-            <a:endParaRPr lang="en-US" sz="1220" dirty="0"/>
+              <a:t>A public health agency exploring AI-supported case.</a:t>
+            </a:r>
+            <a:endParaRPr lang="en-US" sz="1140" dirty="0"/>
           </a:p>
         </p:txBody>
       </p:sp>
@@ -4466,12 +4466,12 @@
         </p:nvSpPr>
         <p:spPr>
           <a:xfrm>
-            <a:off x="7635240" y="4184294"/>
-            <a:ext cx="3474720" cy="1466698"/>
+            <a:off x="7543800" y="4389120"/>
+            <a:ext cx="3611880" cy="1261872"/>
           </a:xfrm>
           <a:prstGeom prst="roundRect">
             <a:avLst>
-              <a:gd name="adj" fmla="val 7481"/>
+              <a:gd name="adj" fmla="val 8696"/>
             </a:avLst>
           </a:prstGeom>
           <a:solidFill>
@@ -4493,8 +4493,8 @@
         </p:nvSpPr>
         <p:spPr>
           <a:xfrm>
-            <a:off x="7799832" y="4330598"/>
-            <a:ext cx="3145536" cy="256032"/>
+            <a:off x="7708392" y="4517136"/>
+            <a:ext cx="3282696" cy="228600"/>
           </a:xfrm>
           <a:prstGeom prst="rect">
             <a:avLst/>
@@ -4510,7 +4510,7 @@
               <a:buNone/>
             </a:pPr>
             <a:r>
-              <a:rPr lang="en-US" sz="1300" b="1" dirty="0">
+              <a:rPr lang="en-US" sz="1220" b="1" dirty="0">
                 <a:solidFill>
                   <a:srgbClr val="0068B7"/>
                 </a:solidFill>
@@ -4520,7 +4520,7 @@
               </a:rPr>
               <a:t>Apply it</a:t>
             </a:r>
-            <a:endParaRPr lang="en-US" sz="1300" dirty="0"/>
+            <a:endParaRPr lang="en-US" sz="1220" dirty="0"/>
           </a:p>
         </p:txBody>
       </p:sp>
@@ -4532,8 +4532,8 @@
         </p:nvSpPr>
         <p:spPr>
           <a:xfrm>
-            <a:off x="7799832" y="4659782"/>
-            <a:ext cx="3145536" cy="899770"/>
+            <a:off x="7708392" y="4828032"/>
+            <a:ext cx="3282696" cy="749808"/>
           </a:xfrm>
           <a:prstGeom prst="rect">
             <a:avLst/>
@@ -4551,7 +4551,7 @@
               <a:buNone/>
             </a:pPr>
             <a:r>
-              <a:rPr lang="en-US" sz="1320" dirty="0">
+              <a:rPr lang="en-US" sz="1220" dirty="0">
                 <a:solidFill>
                   <a:srgbClr val="17364A"/>
                 </a:solidFill>
@@ -4559,9 +4559,9 @@
                 <a:ea typeface="Aptos" pitchFamily="34" charset="-122"/>
                 <a:cs typeface="Aptos" pitchFamily="34" charset="-120"/>
               </a:rPr>
-              <a:t>Connect the concept to public health purpose, responsible use, required safeguards, documentation, and the next action a department should take.</a:t>
-            </a:r>
-            <a:endParaRPr lang="en-US" sz="1320" dirty="0"/>
+              <a:t>Connect the concept to public health purpose, responsible use, required.</a:t>
+            </a:r>
+            <a:endParaRPr lang="en-US" sz="1220" dirty="0"/>
           </a:p>
         </p:txBody>
       </p:sp>
@@ -4852,8 +4852,8 @@
         </p:nvSpPr>
         <p:spPr>
           <a:xfrm>
-            <a:off x="868680" y="1508760"/>
-            <a:ext cx="6309360" cy="4160520"/>
+            <a:off x="822960" y="1463040"/>
+            <a:ext cx="6565392" cy="4343400"/>
           </a:xfrm>
           <a:prstGeom prst="rect">
             <a:avLst/>
@@ -4871,7 +4871,7 @@
               <a:buNone/>
             </a:pPr>
             <a:r>
-              <a:rPr lang="en-US" sz="2100" dirty="0">
+              <a:rPr lang="en-US" sz="1920" dirty="0">
                 <a:solidFill>
                   <a:srgbClr val="003A63"/>
                 </a:solidFill>
@@ -4879,16 +4879,16 @@
                 <a:ea typeface="Aptos" pitchFamily="34" charset="-122"/>
                 <a:cs typeface="Aptos" pitchFamily="34" charset="-120"/>
               </a:rPr>
-              <a:t>• Interoperability review starts by identifying the sending system, receiving system, exchange.</a:t>
-            </a:r>
-            <a:endParaRPr lang="en-US" sz="2100" dirty="0"/>
-          </a:p>
-          <a:p>
-            <a:pPr indent="0" marL="0">
-              <a:buNone/>
-            </a:pPr>
-            <a:r>
-              <a:rPr lang="en-US" sz="2100" dirty="0">
+              <a:t>• Interoperability review starts by identifying the sending system, receiving.</a:t>
+            </a:r>
+            <a:endParaRPr lang="en-US" sz="1920" dirty="0"/>
+          </a:p>
+          <a:p>
+            <a:pPr indent="0" marL="0">
+              <a:buNone/>
+            </a:pPr>
+            <a:r>
+              <a:rPr lang="en-US" sz="1920" dirty="0">
                 <a:solidFill>
                   <a:srgbClr val="003A63"/>
                 </a:solidFill>
@@ -4896,16 +4896,16 @@
                 <a:ea typeface="Aptos" pitchFamily="34" charset="-122"/>
                 <a:cs typeface="Aptos" pitchFamily="34" charset="-120"/>
               </a:rPr>
-              <a:t>• Staff should ask whether the workflow uses messages, documents, resources, files, or manual.</a:t>
-            </a:r>
-            <a:endParaRPr lang="en-US" sz="2100" dirty="0"/>
-          </a:p>
-          <a:p>
-            <a:pPr indent="0" marL="0">
-              <a:buNone/>
-            </a:pPr>
-            <a:r>
-              <a:rPr lang="en-US" sz="2100" dirty="0">
+              <a:t>• Staff should ask whether the workflow uses messages, documents, resources,.</a:t>
+            </a:r>
+            <a:endParaRPr lang="en-US" sz="1920" dirty="0"/>
+          </a:p>
+          <a:p>
+            <a:pPr indent="0" marL="0">
+              <a:buNone/>
+            </a:pPr>
+            <a:r>
+              <a:rPr lang="en-US" sz="1920" dirty="0">
                 <a:solidFill>
                   <a:srgbClr val="003A63"/>
                 </a:solidFill>
@@ -4913,9 +4913,9 @@
                 <a:ea typeface="Aptos" pitchFamily="34" charset="-122"/>
                 <a:cs typeface="Aptos" pitchFamily="34" charset="-120"/>
               </a:rPr>
-              <a:t>• They should also identify required terminology systems, such as LOINC, SNOMED CT, CVX,.</a:t>
-            </a:r>
-            <a:endParaRPr lang="en-US" sz="2100" dirty="0"/>
+              <a:t>• They should also identify required terminology systems, such as LOINC,.</a:t>
+            </a:r>
+            <a:endParaRPr lang="en-US" sz="1920" dirty="0"/>
           </a:p>
         </p:txBody>
       </p:sp>
@@ -4927,12 +4927,12 @@
         </p:nvSpPr>
         <p:spPr>
           <a:xfrm>
-            <a:off x="7635240" y="1325880"/>
-            <a:ext cx="3474720" cy="1255471"/>
+            <a:off x="7543800" y="1325880"/>
+            <a:ext cx="3611880" cy="1261872"/>
           </a:xfrm>
           <a:prstGeom prst="roundRect">
             <a:avLst>
-              <a:gd name="adj" fmla="val 8740"/>
+              <a:gd name="adj" fmla="val 8696"/>
             </a:avLst>
           </a:prstGeom>
           <a:solidFill>
@@ -4954,8 +4954,8 @@
         </p:nvSpPr>
         <p:spPr>
           <a:xfrm>
-            <a:off x="7799832" y="1472184"/>
-            <a:ext cx="3145536" cy="256032"/>
+            <a:off x="7708392" y="1453896"/>
+            <a:ext cx="3282696" cy="228600"/>
           </a:xfrm>
           <a:prstGeom prst="rect">
             <a:avLst/>
@@ -4971,7 +4971,7 @@
               <a:buNone/>
             </a:pPr>
             <a:r>
-              <a:rPr lang="en-US" sz="1300" b="1" dirty="0">
+              <a:rPr lang="en-US" sz="1220" b="1" dirty="0">
                 <a:solidFill>
                   <a:srgbClr val="0068B7"/>
                 </a:solidFill>
@@ -4981,7 +4981,7 @@
               </a:rPr>
               <a:t>Core concept</a:t>
             </a:r>
-            <a:endParaRPr lang="en-US" sz="1300" dirty="0"/>
+            <a:endParaRPr lang="en-US" sz="1220" dirty="0"/>
           </a:p>
         </p:txBody>
       </p:sp>
@@ -4993,8 +4993,8 @@
         </p:nvSpPr>
         <p:spPr>
           <a:xfrm>
-            <a:off x="7799832" y="1801368"/>
-            <a:ext cx="3145536" cy="688543"/>
+            <a:off x="7708392" y="1764792"/>
+            <a:ext cx="3282696" cy="749808"/>
           </a:xfrm>
           <a:prstGeom prst="rect">
             <a:avLst/>
@@ -5012,7 +5012,7 @@
               <a:buNone/>
             </a:pPr>
             <a:r>
-              <a:rPr lang="en-US" sz="1320" dirty="0">
+              <a:rPr lang="en-US" sz="1220" dirty="0">
                 <a:solidFill>
                   <a:srgbClr val="17364A"/>
                 </a:solidFill>
@@ -5020,9 +5020,9 @@
                 <a:ea typeface="Aptos" pitchFamily="34" charset="-122"/>
                 <a:cs typeface="Aptos" pitchFamily="34" charset="-120"/>
               </a:rPr>
-              <a:t>Interoperability review starts by identifying the sending system, receiving system, exchange standard,.</a:t>
-            </a:r>
-            <a:endParaRPr lang="en-US" sz="1320" dirty="0"/>
+              <a:t>Interoperability review starts by identifying the sending system, receiving.</a:t>
+            </a:r>
+            <a:endParaRPr lang="en-US" sz="1220" dirty="0"/>
           </a:p>
         </p:txBody>
       </p:sp>
@@ -5034,12 +5034,12 @@
         </p:nvSpPr>
         <p:spPr>
           <a:xfrm>
-            <a:off x="7635240" y="2718511"/>
-            <a:ext cx="3474720" cy="1328623"/>
+            <a:off x="7543800" y="2724912"/>
+            <a:ext cx="3611880" cy="1527048"/>
           </a:xfrm>
           <a:prstGeom prst="roundRect">
             <a:avLst>
-              <a:gd name="adj" fmla="val 8259"/>
+              <a:gd name="adj" fmla="val 7186"/>
             </a:avLst>
           </a:prstGeom>
           <a:solidFill>
@@ -5061,8 +5061,8 @@
         </p:nvSpPr>
         <p:spPr>
           <a:xfrm>
-            <a:off x="7799832" y="2864815"/>
-            <a:ext cx="3145536" cy="256032"/>
+            <a:off x="7708392" y="2852928"/>
+            <a:ext cx="3282696" cy="228600"/>
           </a:xfrm>
           <a:prstGeom prst="rect">
             <a:avLst/>
@@ -5078,7 +5078,7 @@
               <a:buNone/>
             </a:pPr>
             <a:r>
-              <a:rPr lang="en-US" sz="1300" b="1" dirty="0">
+              <a:rPr lang="en-US" sz="1220" b="1" dirty="0">
                 <a:solidFill>
                   <a:srgbClr val="0068B7"/>
                 </a:solidFill>
@@ -5088,7 +5088,7 @@
               </a:rPr>
               <a:t>Concept checkpoints</a:t>
             </a:r>
-            <a:endParaRPr lang="en-US" sz="1300" dirty="0"/>
+            <a:endParaRPr lang="en-US" sz="1220" dirty="0"/>
           </a:p>
         </p:txBody>
       </p:sp>
@@ -5100,8 +5100,8 @@
         </p:nvSpPr>
         <p:spPr>
           <a:xfrm>
-            <a:off x="7818120" y="3230575"/>
-            <a:ext cx="3090672" cy="670255"/>
+            <a:off x="7726680" y="3182112"/>
+            <a:ext cx="3227832" cy="960120"/>
           </a:xfrm>
           <a:prstGeom prst="rect">
             <a:avLst/>
@@ -5119,7 +5119,7 @@
               <a:buNone/>
             </a:pPr>
             <a:r>
-              <a:rPr lang="en-US" sz="1220" dirty="0">
+              <a:rPr lang="en-US" sz="1140" dirty="0">
                 <a:solidFill>
                   <a:srgbClr val="17364A"/>
                 </a:solidFill>
@@ -5127,16 +5127,16 @@
                 <a:ea typeface="Aptos" pitchFamily="34" charset="-122"/>
                 <a:cs typeface="Aptos" pitchFamily="34" charset="-120"/>
               </a:rPr>
-              <a:t>Interoperability review starts by identifying the sending system,.</a:t>
-            </a:r>
-            <a:endParaRPr lang="en-US" sz="1220" dirty="0"/>
-          </a:p>
-          <a:p>
-            <a:pPr indent="0" marL="0">
-              <a:buNone/>
-            </a:pPr>
-            <a:r>
-              <a:rPr lang="en-US" sz="1220" dirty="0">
+              <a:t>Interoperability review starts by identifying the.</a:t>
+            </a:r>
+            <a:endParaRPr lang="en-US" sz="1140" dirty="0"/>
+          </a:p>
+          <a:p>
+            <a:pPr indent="0" marL="0">
+              <a:buNone/>
+            </a:pPr>
+            <a:r>
+              <a:rPr lang="en-US" sz="1140" dirty="0">
                 <a:solidFill>
                   <a:srgbClr val="17364A"/>
                 </a:solidFill>
@@ -5144,16 +5144,16 @@
                 <a:ea typeface="Aptos" pitchFamily="34" charset="-122"/>
                 <a:cs typeface="Aptos" pitchFamily="34" charset="-120"/>
               </a:rPr>
-              <a:t>They should also identify required terminology systems, such as.</a:t>
-            </a:r>
-            <a:endParaRPr lang="en-US" sz="1220" dirty="0"/>
-          </a:p>
-          <a:p>
-            <a:pPr indent="0" marL="0">
-              <a:buNone/>
-            </a:pPr>
-            <a:r>
-              <a:rPr lang="en-US" sz="1220" dirty="0">
+              <a:t>They should also identify required terminology.</a:t>
+            </a:r>
+            <a:endParaRPr lang="en-US" sz="1140" dirty="0"/>
+          </a:p>
+          <a:p>
+            <a:pPr indent="0" marL="0">
+              <a:buNone/>
+            </a:pPr>
+            <a:r>
+              <a:rPr lang="en-US" sz="1140" dirty="0">
                 <a:solidFill>
                   <a:srgbClr val="17364A"/>
                 </a:solidFill>
@@ -5163,7 +5163,7 @@
               </a:rPr>
               <a:t>Validation is a central part of interoperability.</a:t>
             </a:r>
-            <a:endParaRPr lang="en-US" sz="1220" dirty="0"/>
+            <a:endParaRPr lang="en-US" sz="1140" dirty="0"/>
           </a:p>
         </p:txBody>
       </p:sp>
@@ -5175,12 +5175,12 @@
         </p:nvSpPr>
         <p:spPr>
           <a:xfrm>
-            <a:off x="7635240" y="4184294"/>
-            <a:ext cx="3474720" cy="1466698"/>
+            <a:off x="7543800" y="4389120"/>
+            <a:ext cx="3611880" cy="1261872"/>
           </a:xfrm>
           <a:prstGeom prst="roundRect">
             <a:avLst>
-              <a:gd name="adj" fmla="val 7481"/>
+              <a:gd name="adj" fmla="val 8696"/>
             </a:avLst>
           </a:prstGeom>
           <a:solidFill>
@@ -5202,8 +5202,8 @@
         </p:nvSpPr>
         <p:spPr>
           <a:xfrm>
-            <a:off x="7799832" y="4330598"/>
-            <a:ext cx="3145536" cy="256032"/>
+            <a:off x="7708392" y="4517136"/>
+            <a:ext cx="3282696" cy="228600"/>
           </a:xfrm>
           <a:prstGeom prst="rect">
             <a:avLst/>
@@ -5219,7 +5219,7 @@
               <a:buNone/>
             </a:pPr>
             <a:r>
-              <a:rPr lang="en-US" sz="1300" b="1" dirty="0">
+              <a:rPr lang="en-US" sz="1220" b="1" dirty="0">
                 <a:solidFill>
                   <a:srgbClr val="0068B7"/>
                 </a:solidFill>
@@ -5229,7 +5229,7 @@
               </a:rPr>
               <a:t>Apply it</a:t>
             </a:r>
-            <a:endParaRPr lang="en-US" sz="1300" dirty="0"/>
+            <a:endParaRPr lang="en-US" sz="1220" dirty="0"/>
           </a:p>
         </p:txBody>
       </p:sp>
@@ -5241,8 +5241,8 @@
         </p:nvSpPr>
         <p:spPr>
           <a:xfrm>
-            <a:off x="7799832" y="4659782"/>
-            <a:ext cx="3145536" cy="899770"/>
+            <a:off x="7708392" y="4828032"/>
+            <a:ext cx="3282696" cy="749808"/>
           </a:xfrm>
           <a:prstGeom prst="rect">
             <a:avLst/>
@@ -5260,7 +5260,7 @@
               <a:buNone/>
             </a:pPr>
             <a:r>
-              <a:rPr lang="en-US" sz="1320" dirty="0">
+              <a:rPr lang="en-US" sz="1220" dirty="0">
                 <a:solidFill>
                   <a:srgbClr val="17364A"/>
                 </a:solidFill>
@@ -5268,9 +5268,9 @@
                 <a:ea typeface="Aptos" pitchFamily="34" charset="-122"/>
                 <a:cs typeface="Aptos" pitchFamily="34" charset="-120"/>
               </a:rPr>
-              <a:t>Connect the concept to public health purpose, responsible use, required safeguards, documentation, and the next action a department should take.</a:t>
-            </a:r>
-            <a:endParaRPr lang="en-US" sz="1320" dirty="0"/>
+              <a:t>Connect the concept to public health purpose, responsible use, required.</a:t>
+            </a:r>
+            <a:endParaRPr lang="en-US" sz="1220" dirty="0"/>
           </a:p>
         </p:txBody>
       </p:sp>
@@ -5561,8 +5561,8 @@
         </p:nvSpPr>
         <p:spPr>
           <a:xfrm>
-            <a:off x="868680" y="1508760"/>
-            <a:ext cx="6309360" cy="4160520"/>
+            <a:off x="822960" y="1463040"/>
+            <a:ext cx="6565392" cy="4343400"/>
           </a:xfrm>
           <a:prstGeom prst="rect">
             <a:avLst/>
@@ -5580,7 +5580,7 @@
               <a:buNone/>
             </a:pPr>
             <a:r>
-              <a:rPr lang="en-US" sz="2100" dirty="0">
+              <a:rPr lang="en-US" sz="1920" dirty="0">
                 <a:solidFill>
                   <a:srgbClr val="003A63"/>
                 </a:solidFill>
@@ -5590,14 +5590,14 @@
               </a:rPr>
               <a:t>• Vague standards claims.</a:t>
             </a:r>
-            <a:endParaRPr lang="en-US" sz="2100" dirty="0"/>
-          </a:p>
-          <a:p>
-            <a:pPr indent="0" marL="0">
-              <a:buNone/>
-            </a:pPr>
-            <a:r>
-              <a:rPr lang="en-US" sz="2100" dirty="0">
+            <a:endParaRPr lang="en-US" sz="1920" dirty="0"/>
+          </a:p>
+          <a:p>
+            <a:pPr indent="0" marL="0">
+              <a:buNone/>
+            </a:pPr>
+            <a:r>
+              <a:rPr lang="en-US" sz="1920" dirty="0">
                 <a:solidFill>
                   <a:srgbClr val="003A63"/>
                 </a:solidFill>
@@ -5605,16 +5605,16 @@
                 <a:ea typeface="Aptos" pitchFamily="34" charset="-122"/>
                 <a:cs typeface="Aptos" pitchFamily="34" charset="-120"/>
               </a:rPr>
-              <a:t>• Vendors may claim standards support without demonstrating required profiles, data elements, or.</a:t>
-            </a:r>
-            <a:endParaRPr lang="en-US" sz="2100" dirty="0"/>
-          </a:p>
-          <a:p>
-            <a:pPr indent="0" marL="0">
-              <a:buNone/>
-            </a:pPr>
-            <a:r>
-              <a:rPr lang="en-US" sz="2100" dirty="0">
+              <a:t>• Vendors may claim standards support without demonstrating required profiles,.</a:t>
+            </a:r>
+            <a:endParaRPr lang="en-US" sz="1920" dirty="0"/>
+          </a:p>
+          <a:p>
+            <a:pPr indent="0" marL="0">
+              <a:buNone/>
+            </a:pPr>
+            <a:r>
+              <a:rPr lang="en-US" sz="1920" dirty="0">
                 <a:solidFill>
                   <a:srgbClr val="003A63"/>
                 </a:solidFill>
@@ -5622,9 +5622,9 @@
                 <a:ea typeface="Aptos" pitchFamily="34" charset="-122"/>
                 <a:cs typeface="Aptos" pitchFamily="34" charset="-120"/>
               </a:rPr>
-              <a:t>• Guardrails include conformance testing, test messages, implementation guide references, and.</a:t>
-            </a:r>
-            <a:endParaRPr lang="en-US" sz="2100" dirty="0"/>
+              <a:t>• Guardrails include conformance testing, test messages, implementation guide.</a:t>
+            </a:r>
+            <a:endParaRPr lang="en-US" sz="1920" dirty="0"/>
           </a:p>
         </p:txBody>
       </p:sp>
@@ -5636,12 +5636,12 @@
         </p:nvSpPr>
         <p:spPr>
           <a:xfrm>
-            <a:off x="7635240" y="1325880"/>
-            <a:ext cx="3474720" cy="1207008"/>
+            <a:off x="7543800" y="1325880"/>
+            <a:ext cx="3611880" cy="1261872"/>
           </a:xfrm>
           <a:prstGeom prst="roundRect">
             <a:avLst>
-              <a:gd name="adj" fmla="val 9091"/>
+              <a:gd name="adj" fmla="val 8696"/>
             </a:avLst>
           </a:prstGeom>
           <a:solidFill>
@@ -5663,8 +5663,8 @@
         </p:nvSpPr>
         <p:spPr>
           <a:xfrm>
-            <a:off x="7799832" y="1472184"/>
-            <a:ext cx="3145536" cy="256032"/>
+            <a:off x="7708392" y="1453896"/>
+            <a:ext cx="3282696" cy="228600"/>
           </a:xfrm>
           <a:prstGeom prst="rect">
             <a:avLst/>
@@ -5680,7 +5680,7 @@
               <a:buNone/>
             </a:pPr>
             <a:r>
-              <a:rPr lang="en-US" sz="1300" b="1" dirty="0">
+              <a:rPr lang="en-US" sz="1220" b="1" dirty="0">
                 <a:solidFill>
                   <a:srgbClr val="0068B7"/>
                 </a:solidFill>
@@ -5690,7 +5690,7 @@
               </a:rPr>
               <a:t>Risk check</a:t>
             </a:r>
-            <a:endParaRPr lang="en-US" sz="1300" dirty="0"/>
+            <a:endParaRPr lang="en-US" sz="1220" dirty="0"/>
           </a:p>
         </p:txBody>
       </p:sp>
@@ -5702,8 +5702,8 @@
         </p:nvSpPr>
         <p:spPr>
           <a:xfrm>
-            <a:off x="7799832" y="1801368"/>
-            <a:ext cx="3145536" cy="640080"/>
+            <a:off x="7708392" y="1764792"/>
+            <a:ext cx="3282696" cy="749808"/>
           </a:xfrm>
           <a:prstGeom prst="rect">
             <a:avLst/>
@@ -5721,7 +5721,7 @@
               <a:buNone/>
             </a:pPr>
             <a:r>
-              <a:rPr lang="en-US" sz="1320" dirty="0">
+              <a:rPr lang="en-US" sz="1220" dirty="0">
                 <a:solidFill>
                   <a:srgbClr val="17364A"/>
                 </a:solidFill>
@@ -5731,7 +5731,7 @@
               </a:rPr>
               <a:t>Vague standards claims.</a:t>
             </a:r>
-            <a:endParaRPr lang="en-US" sz="1320" dirty="0"/>
+            <a:endParaRPr lang="en-US" sz="1220" dirty="0"/>
           </a:p>
         </p:txBody>
       </p:sp>
@@ -5743,12 +5743,12 @@
         </p:nvSpPr>
         <p:spPr>
           <a:xfrm>
-            <a:off x="7635240" y="2670048"/>
-            <a:ext cx="3474720" cy="1536192"/>
+            <a:off x="7543800" y="2724912"/>
+            <a:ext cx="3611880" cy="1527048"/>
           </a:xfrm>
           <a:prstGeom prst="roundRect">
             <a:avLst>
-              <a:gd name="adj" fmla="val 7143"/>
+              <a:gd name="adj" fmla="val 7186"/>
             </a:avLst>
           </a:prstGeom>
           <a:solidFill>
@@ -5770,24 +5770,26 @@
         </p:nvSpPr>
         <p:spPr>
           <a:xfrm>
-            <a:off x="7799832" y="2798064"/>
-            <a:ext cx="3145536" cy="237744"/>
-          </a:xfrm>
-          <a:prstGeom prst="rect">
-            <a:avLst/>
-          </a:prstGeom>
-          <a:noFill/>
-          <a:ln/>
-        </p:spPr>
-        <p:txBody>
-          <a:bodyPr wrap="square" lIns="0" tIns="0" rIns="0" bIns="0" rtlCol="0" anchor="ctr"/>
-          <a:lstStyle/>
-          <a:p>
-            <a:pPr indent="0" marL="0">
-              <a:buNone/>
-            </a:pPr>
-            <a:r>
-              <a:rPr lang="en-US" sz="1250" b="1" dirty="0">
+            <a:off x="7708392" y="2852928"/>
+            <a:ext cx="3282696" cy="219456"/>
+          </a:xfrm>
+          <a:prstGeom prst="rect">
+            <a:avLst/>
+          </a:prstGeom>
+          <a:noFill/>
+          <a:ln/>
+        </p:spPr>
+        <p:txBody>
+          <a:bodyPr wrap="square" lIns="0" tIns="0" rIns="0" bIns="0" rtlCol="0" anchor="ctr">
+            <a:normAutofit/>
+          </a:bodyPr>
+          <a:lstStyle/>
+          <a:p>
+            <a:pPr indent="0" marL="0">
+              <a:buNone/>
+            </a:pPr>
+            <a:r>
+              <a:rPr lang="en-US" sz="1160" b="1" dirty="0">
                 <a:solidFill>
                   <a:srgbClr val="0068B7"/>
                 </a:solidFill>
@@ -5797,7 +5799,7 @@
               </a:rPr>
               <a:t>Risk control loop</a:t>
             </a:r>
-            <a:endParaRPr lang="en-US" sz="1250" dirty="0"/>
+            <a:endParaRPr lang="en-US" sz="1160" dirty="0"/>
           </a:p>
         </p:txBody>
       </p:sp>
@@ -5809,7 +5811,7 @@
         </p:nvSpPr>
         <p:spPr>
           <a:xfrm>
-            <a:off x="8763000" y="3351276"/>
+            <a:off x="8717280" y="3406140"/>
             <a:ext cx="164592" cy="0"/>
           </a:xfrm>
           <a:prstGeom prst="line">
@@ -5832,8 +5834,8 @@
         </p:nvSpPr>
         <p:spPr>
           <a:xfrm>
-            <a:off x="7872984" y="3200400"/>
-            <a:ext cx="890016" cy="301752"/>
+            <a:off x="7781544" y="3255264"/>
+            <a:ext cx="935736" cy="301752"/>
           </a:xfrm>
           <a:prstGeom prst="roundRect">
             <a:avLst>
@@ -5859,8 +5861,8 @@
         </p:nvSpPr>
         <p:spPr>
           <a:xfrm>
-            <a:off x="7909560" y="3273552"/>
-            <a:ext cx="816864" cy="146304"/>
+            <a:off x="7818120" y="3328416"/>
+            <a:ext cx="862584" cy="146304"/>
           </a:xfrm>
           <a:prstGeom prst="rect">
             <a:avLst/>
@@ -5900,7 +5902,7 @@
         </p:nvSpPr>
         <p:spPr>
           <a:xfrm>
-            <a:off x="9817608" y="3351276"/>
+            <a:off x="9817608" y="3406140"/>
             <a:ext cx="164592" cy="0"/>
           </a:xfrm>
           <a:prstGeom prst="line">
@@ -5923,8 +5925,8 @@
         </p:nvSpPr>
         <p:spPr>
           <a:xfrm>
-            <a:off x="8927592" y="3200400"/>
-            <a:ext cx="890016" cy="301752"/>
+            <a:off x="8881872" y="3255264"/>
+            <a:ext cx="935736" cy="301752"/>
           </a:xfrm>
           <a:prstGeom prst="roundRect">
             <a:avLst>
@@ -5950,8 +5952,8 @@
         </p:nvSpPr>
         <p:spPr>
           <a:xfrm>
-            <a:off x="8964168" y="3273552"/>
-            <a:ext cx="816864" cy="146304"/>
+            <a:off x="8918448" y="3328416"/>
+            <a:ext cx="862584" cy="146304"/>
           </a:xfrm>
           <a:prstGeom prst="rect">
             <a:avLst/>
@@ -5991,8 +5993,8 @@
         </p:nvSpPr>
         <p:spPr>
           <a:xfrm>
-            <a:off x="9982200" y="3200400"/>
-            <a:ext cx="890016" cy="301752"/>
+            <a:off x="9982200" y="3255264"/>
+            <a:ext cx="935736" cy="301752"/>
           </a:xfrm>
           <a:prstGeom prst="roundRect">
             <a:avLst>
@@ -6018,8 +6020,8 @@
         </p:nvSpPr>
         <p:spPr>
           <a:xfrm>
-            <a:off x="10018776" y="3273552"/>
-            <a:ext cx="816864" cy="146304"/>
+            <a:off x="10018776" y="3328416"/>
+            <a:ext cx="862584" cy="146304"/>
           </a:xfrm>
           <a:prstGeom prst="rect">
             <a:avLst/>
@@ -6059,8 +6061,8 @@
         </p:nvSpPr>
         <p:spPr>
           <a:xfrm>
-            <a:off x="7854696" y="3694176"/>
-            <a:ext cx="3035808" cy="365760"/>
+            <a:off x="7763256" y="3749040"/>
+            <a:ext cx="3172968" cy="356616"/>
           </a:xfrm>
           <a:prstGeom prst="rect">
             <a:avLst/>
@@ -6078,7 +6080,7 @@
               <a:buNone/>
             </a:pPr>
             <a:r>
-              <a:rPr lang="en-US" sz="1120" dirty="0">
+              <a:rPr lang="en-US" sz="1040" dirty="0">
                 <a:solidFill>
                   <a:srgbClr val="17364A"/>
                 </a:solidFill>
@@ -6086,9 +6088,9 @@
                 <a:ea typeface="Aptos" pitchFamily="34" charset="-122"/>
                 <a:cs typeface="Aptos" pitchFamily="34" charset="-120"/>
               </a:rPr>
-              <a:t>Responsible use depends on finding risks early, applying safeguards, and watching for drift or harm over time.</a:t>
-            </a:r>
-            <a:endParaRPr lang="en-US" sz="1120" dirty="0"/>
+              <a:t>Responsible use depends on finding risks early, applying safeguards,.</a:t>
+            </a:r>
+            <a:endParaRPr lang="en-US" sz="1040" dirty="0"/>
           </a:p>
         </p:txBody>
       </p:sp>
@@ -6100,12 +6102,12 @@
         </p:nvSpPr>
         <p:spPr>
           <a:xfrm>
-            <a:off x="7635240" y="4343400"/>
-            <a:ext cx="3474720" cy="1255471"/>
+            <a:off x="7543800" y="4389120"/>
+            <a:ext cx="3611880" cy="1261872"/>
           </a:xfrm>
           <a:prstGeom prst="roundRect">
             <a:avLst>
-              <a:gd name="adj" fmla="val 8740"/>
+              <a:gd name="adj" fmla="val 8696"/>
             </a:avLst>
           </a:prstGeom>
           <a:solidFill>
@@ -6127,8 +6129,8 @@
         </p:nvSpPr>
         <p:spPr>
           <a:xfrm>
-            <a:off x="7799832" y="4489704"/>
-            <a:ext cx="3145536" cy="256032"/>
+            <a:off x="7708392" y="4517136"/>
+            <a:ext cx="3282696" cy="228600"/>
           </a:xfrm>
           <a:prstGeom prst="rect">
             <a:avLst/>
@@ -6144,7 +6146,7 @@
               <a:buNone/>
             </a:pPr>
             <a:r>
-              <a:rPr lang="en-US" sz="1300" b="1" dirty="0">
+              <a:rPr lang="en-US" sz="1220" b="1" dirty="0">
                 <a:solidFill>
                   <a:srgbClr val="0068B7"/>
                 </a:solidFill>
@@ -6154,7 +6156,7 @@
               </a:rPr>
               <a:t>Safeguard to plan</a:t>
             </a:r>
-            <a:endParaRPr lang="en-US" sz="1300" dirty="0"/>
+            <a:endParaRPr lang="en-US" sz="1220" dirty="0"/>
           </a:p>
         </p:txBody>
       </p:sp>
@@ -6166,8 +6168,8 @@
         </p:nvSpPr>
         <p:spPr>
           <a:xfrm>
-            <a:off x="7799832" y="4818888"/>
-            <a:ext cx="3145536" cy="688543"/>
+            <a:off x="7708392" y="4828032"/>
+            <a:ext cx="3282696" cy="749808"/>
           </a:xfrm>
           <a:prstGeom prst="rect">
             <a:avLst/>
@@ -6185,7 +6187,7 @@
               <a:buNone/>
             </a:pPr>
             <a:r>
-              <a:rPr lang="en-US" sz="1320" dirty="0">
+              <a:rPr lang="en-US" sz="1220" dirty="0">
                 <a:solidFill>
                   <a:srgbClr val="17364A"/>
                 </a:solidFill>
@@ -6193,9 +6195,9 @@
                 <a:ea typeface="Aptos" pitchFamily="34" charset="-122"/>
                 <a:cs typeface="Aptos" pitchFamily="34" charset="-120"/>
               </a:rPr>
-              <a:t>Identify what could go wrong, who could be affected, what safeguards are needed, and what evidence should be reviewed before use.</a:t>
-            </a:r>
-            <a:endParaRPr lang="en-US" sz="1320" dirty="0"/>
+              <a:t>Identify what could go wrong, who could be affected, what safeguards are needed,.</a:t>
+            </a:r>
+            <a:endParaRPr lang="en-US" sz="1220" dirty="0"/>
           </a:p>
         </p:txBody>
       </p:sp>
@@ -6486,8 +6488,8 @@
         </p:nvSpPr>
         <p:spPr>
           <a:xfrm>
-            <a:off x="868680" y="1508760"/>
-            <a:ext cx="6309360" cy="4160520"/>
+            <a:off x="822960" y="1463040"/>
+            <a:ext cx="6565392" cy="4343400"/>
           </a:xfrm>
           <a:prstGeom prst="rect">
             <a:avLst/>
@@ -6505,7 +6507,7 @@
               <a:buNone/>
             </a:pPr>
             <a:r>
-              <a:rPr lang="en-US" sz="2100" dirty="0">
+              <a:rPr lang="en-US" sz="1920" dirty="0">
                 <a:solidFill>
                   <a:srgbClr val="003A63"/>
                 </a:solidFill>
@@ -6515,14 +6517,14 @@
               </a:rPr>
               <a:t>• Over-reliance on structured data.</a:t>
             </a:r>
-            <a:endParaRPr lang="en-US" sz="2100" dirty="0"/>
-          </a:p>
-          <a:p>
-            <a:pPr indent="0" marL="0">
-              <a:buNone/>
-            </a:pPr>
-            <a:r>
-              <a:rPr lang="en-US" sz="2100" dirty="0">
+            <a:endParaRPr lang="en-US" sz="1920" dirty="0"/>
+          </a:p>
+          <a:p>
+            <a:pPr indent="0" marL="0">
+              <a:buNone/>
+            </a:pPr>
+            <a:r>
+              <a:rPr lang="en-US" sz="1920" dirty="0">
                 <a:solidFill>
                   <a:srgbClr val="003A63"/>
                 </a:solidFill>
@@ -6532,14 +6534,14 @@
               </a:rPr>
               <a:t>• Structured exchange may omit context found in notes or local fields.</a:t>
             </a:r>
-            <a:endParaRPr lang="en-US" sz="2100" dirty="0"/>
-          </a:p>
-          <a:p>
-            <a:pPr indent="0" marL="0">
-              <a:buNone/>
-            </a:pPr>
-            <a:r>
-              <a:rPr lang="en-US" sz="2100" dirty="0">
+            <a:endParaRPr lang="en-US" sz="1920" dirty="0"/>
+          </a:p>
+          <a:p>
+            <a:pPr indent="0" marL="0">
+              <a:buNone/>
+            </a:pPr>
+            <a:r>
+              <a:rPr lang="en-US" sz="1920" dirty="0">
                 <a:solidFill>
                   <a:srgbClr val="003A63"/>
                 </a:solidFill>
@@ -6547,9 +6549,9 @@
                 <a:ea typeface="Aptos" pitchFamily="34" charset="-122"/>
                 <a:cs typeface="Aptos" pitchFamily="34" charset="-120"/>
               </a:rPr>
-              <a:t>• Guardrails include source review, workflow validation, and documentation of known data gaps.</a:t>
-            </a:r>
-            <a:endParaRPr lang="en-US" sz="2100" dirty="0"/>
+              <a:t>• Guardrails include source review, workflow validation, and documentation of.</a:t>
+            </a:r>
+            <a:endParaRPr lang="en-US" sz="1920" dirty="0"/>
           </a:p>
         </p:txBody>
       </p:sp>
@@ -6561,12 +6563,12 @@
         </p:nvSpPr>
         <p:spPr>
           <a:xfrm>
-            <a:off x="7635240" y="1325880"/>
-            <a:ext cx="3474720" cy="1207008"/>
+            <a:off x="7543800" y="1325880"/>
+            <a:ext cx="3611880" cy="1261872"/>
           </a:xfrm>
           <a:prstGeom prst="roundRect">
             <a:avLst>
-              <a:gd name="adj" fmla="val 9091"/>
+              <a:gd name="adj" fmla="val 8696"/>
             </a:avLst>
           </a:prstGeom>
           <a:solidFill>
@@ -6588,8 +6590,8 @@
         </p:nvSpPr>
         <p:spPr>
           <a:xfrm>
-            <a:off x="7799832" y="1472184"/>
-            <a:ext cx="3145536" cy="256032"/>
+            <a:off x="7708392" y="1453896"/>
+            <a:ext cx="3282696" cy="228600"/>
           </a:xfrm>
           <a:prstGeom prst="rect">
             <a:avLst/>
@@ -6605,7 +6607,7 @@
               <a:buNone/>
             </a:pPr>
             <a:r>
-              <a:rPr lang="en-US" sz="1300" b="1" dirty="0">
+              <a:rPr lang="en-US" sz="1220" b="1" dirty="0">
                 <a:solidFill>
                   <a:srgbClr val="0068B7"/>
                 </a:solidFill>
@@ -6615,7 +6617,7 @@
               </a:rPr>
               <a:t>Risk check</a:t>
             </a:r>
-            <a:endParaRPr lang="en-US" sz="1300" dirty="0"/>
+            <a:endParaRPr lang="en-US" sz="1220" dirty="0"/>
           </a:p>
         </p:txBody>
       </p:sp>
@@ -6627,8 +6629,8 @@
         </p:nvSpPr>
         <p:spPr>
           <a:xfrm>
-            <a:off x="7799832" y="1801368"/>
-            <a:ext cx="3145536" cy="640080"/>
+            <a:off x="7708392" y="1764792"/>
+            <a:ext cx="3282696" cy="749808"/>
           </a:xfrm>
           <a:prstGeom prst="rect">
             <a:avLst/>
@@ -6646,7 +6648,7 @@
               <a:buNone/>
             </a:pPr>
             <a:r>
-              <a:rPr lang="en-US" sz="1320" dirty="0">
+              <a:rPr lang="en-US" sz="1220" dirty="0">
                 <a:solidFill>
                   <a:srgbClr val="17364A"/>
                 </a:solidFill>
@@ -6656,7 +6658,7 @@
               </a:rPr>
               <a:t>Over-reliance on structured data.</a:t>
             </a:r>
-            <a:endParaRPr lang="en-US" sz="1320" dirty="0"/>
+            <a:endParaRPr lang="en-US" sz="1220" dirty="0"/>
           </a:p>
         </p:txBody>
       </p:sp>
@@ -6668,12 +6670,12 @@
         </p:nvSpPr>
         <p:spPr>
           <a:xfrm>
-            <a:off x="7635240" y="2670048"/>
-            <a:ext cx="3474720" cy="1536192"/>
+            <a:off x="7543800" y="2724912"/>
+            <a:ext cx="3611880" cy="1527048"/>
           </a:xfrm>
           <a:prstGeom prst="roundRect">
             <a:avLst>
-              <a:gd name="adj" fmla="val 7143"/>
+              <a:gd name="adj" fmla="val 7186"/>
             </a:avLst>
           </a:prstGeom>
           <a:solidFill>
@@ -6695,24 +6697,26 @@
         </p:nvSpPr>
         <p:spPr>
           <a:xfrm>
-            <a:off x="7799832" y="2798064"/>
-            <a:ext cx="3145536" cy="237744"/>
-          </a:xfrm>
-          <a:prstGeom prst="rect">
-            <a:avLst/>
-          </a:prstGeom>
-          <a:noFill/>
-          <a:ln/>
-        </p:spPr>
-        <p:txBody>
-          <a:bodyPr wrap="square" lIns="0" tIns="0" rIns="0" bIns="0" rtlCol="0" anchor="ctr"/>
-          <a:lstStyle/>
-          <a:p>
-            <a:pPr indent="0" marL="0">
-              <a:buNone/>
-            </a:pPr>
-            <a:r>
-              <a:rPr lang="en-US" sz="1250" b="1" dirty="0">
+            <a:off x="7708392" y="2852928"/>
+            <a:ext cx="3282696" cy="219456"/>
+          </a:xfrm>
+          <a:prstGeom prst="rect">
+            <a:avLst/>
+          </a:prstGeom>
+          <a:noFill/>
+          <a:ln/>
+        </p:spPr>
+        <p:txBody>
+          <a:bodyPr wrap="square" lIns="0" tIns="0" rIns="0" bIns="0" rtlCol="0" anchor="ctr">
+            <a:normAutofit/>
+          </a:bodyPr>
+          <a:lstStyle/>
+          <a:p>
+            <a:pPr indent="0" marL="0">
+              <a:buNone/>
+            </a:pPr>
+            <a:r>
+              <a:rPr lang="en-US" sz="1160" b="1" dirty="0">
                 <a:solidFill>
                   <a:srgbClr val="0068B7"/>
                 </a:solidFill>
@@ -6722,7 +6726,7 @@
               </a:rPr>
               <a:t>Risk control loop</a:t>
             </a:r>
-            <a:endParaRPr lang="en-US" sz="1250" dirty="0"/>
+            <a:endParaRPr lang="en-US" sz="1160" dirty="0"/>
           </a:p>
         </p:txBody>
       </p:sp>
@@ -6734,7 +6738,7 @@
         </p:nvSpPr>
         <p:spPr>
           <a:xfrm>
-            <a:off x="8763000" y="3351276"/>
+            <a:off x="8717280" y="3406140"/>
             <a:ext cx="164592" cy="0"/>
           </a:xfrm>
           <a:prstGeom prst="line">
@@ -6757,8 +6761,8 @@
         </p:nvSpPr>
         <p:spPr>
           <a:xfrm>
-            <a:off x="7872984" y="3200400"/>
-            <a:ext cx="890016" cy="301752"/>
+            <a:off x="7781544" y="3255264"/>
+            <a:ext cx="935736" cy="301752"/>
           </a:xfrm>
           <a:prstGeom prst="roundRect">
             <a:avLst>
@@ -6784,8 +6788,8 @@
         </p:nvSpPr>
         <p:spPr>
           <a:xfrm>
-            <a:off x="7909560" y="3273552"/>
-            <a:ext cx="816864" cy="146304"/>
+            <a:off x="7818120" y="3328416"/>
+            <a:ext cx="862584" cy="146304"/>
           </a:xfrm>
           <a:prstGeom prst="rect">
             <a:avLst/>
@@ -6825,7 +6829,7 @@
         </p:nvSpPr>
         <p:spPr>
           <a:xfrm>
-            <a:off x="9817608" y="3351276"/>
+            <a:off x="9817608" y="3406140"/>
             <a:ext cx="164592" cy="0"/>
           </a:xfrm>
           <a:prstGeom prst="line">
@@ -6848,8 +6852,8 @@
         </p:nvSpPr>
         <p:spPr>
           <a:xfrm>
-            <a:off x="8927592" y="3200400"/>
-            <a:ext cx="890016" cy="301752"/>
+            <a:off x="8881872" y="3255264"/>
+            <a:ext cx="935736" cy="301752"/>
           </a:xfrm>
           <a:prstGeom prst="roundRect">
             <a:avLst>
@@ -6875,8 +6879,8 @@
         </p:nvSpPr>
         <p:spPr>
           <a:xfrm>
-            <a:off x="8964168" y="3273552"/>
-            <a:ext cx="816864" cy="146304"/>
+            <a:off x="8918448" y="3328416"/>
+            <a:ext cx="862584" cy="146304"/>
           </a:xfrm>
           <a:prstGeom prst="rect">
             <a:avLst/>
@@ -6916,8 +6920,8 @@
         </p:nvSpPr>
         <p:spPr>
           <a:xfrm>
-            <a:off x="9982200" y="3200400"/>
-            <a:ext cx="890016" cy="301752"/>
+            <a:off x="9982200" y="3255264"/>
+            <a:ext cx="935736" cy="301752"/>
           </a:xfrm>
           <a:prstGeom prst="roundRect">
             <a:avLst>
@@ -6943,8 +6947,8 @@
         </p:nvSpPr>
         <p:spPr>
           <a:xfrm>
-            <a:off x="10018776" y="3273552"/>
-            <a:ext cx="816864" cy="146304"/>
+            <a:off x="10018776" y="3328416"/>
+            <a:ext cx="862584" cy="146304"/>
           </a:xfrm>
           <a:prstGeom prst="rect">
             <a:avLst/>
@@ -6984,8 +6988,8 @@
         </p:nvSpPr>
         <p:spPr>
           <a:xfrm>
-            <a:off x="7854696" y="3694176"/>
-            <a:ext cx="3035808" cy="365760"/>
+            <a:off x="7763256" y="3749040"/>
+            <a:ext cx="3172968" cy="356616"/>
           </a:xfrm>
           <a:prstGeom prst="rect">
             <a:avLst/>
@@ -7003,7 +7007,7 @@
               <a:buNone/>
             </a:pPr>
             <a:r>
-              <a:rPr lang="en-US" sz="1120" dirty="0">
+              <a:rPr lang="en-US" sz="1040" dirty="0">
                 <a:solidFill>
                   <a:srgbClr val="17364A"/>
                 </a:solidFill>
@@ -7011,9 +7015,9 @@
                 <a:ea typeface="Aptos" pitchFamily="34" charset="-122"/>
                 <a:cs typeface="Aptos" pitchFamily="34" charset="-120"/>
               </a:rPr>
-              <a:t>Responsible use depends on finding risks early, applying safeguards, and watching for drift or harm over time.</a:t>
-            </a:r>
-            <a:endParaRPr lang="en-US" sz="1120" dirty="0"/>
+              <a:t>Responsible use depends on finding risks early, applying safeguards,.</a:t>
+            </a:r>
+            <a:endParaRPr lang="en-US" sz="1040" dirty="0"/>
           </a:p>
         </p:txBody>
       </p:sp>
@@ -7025,12 +7029,12 @@
         </p:nvSpPr>
         <p:spPr>
           <a:xfrm>
-            <a:off x="7635240" y="4343400"/>
-            <a:ext cx="3474720" cy="1255471"/>
+            <a:off x="7543800" y="4389120"/>
+            <a:ext cx="3611880" cy="1261872"/>
           </a:xfrm>
           <a:prstGeom prst="roundRect">
             <a:avLst>
-              <a:gd name="adj" fmla="val 8740"/>
+              <a:gd name="adj" fmla="val 8696"/>
             </a:avLst>
           </a:prstGeom>
           <a:solidFill>
@@ -7052,8 +7056,8 @@
         </p:nvSpPr>
         <p:spPr>
           <a:xfrm>
-            <a:off x="7799832" y="4489704"/>
-            <a:ext cx="3145536" cy="256032"/>
+            <a:off x="7708392" y="4517136"/>
+            <a:ext cx="3282696" cy="228600"/>
           </a:xfrm>
           <a:prstGeom prst="rect">
             <a:avLst/>
@@ -7069,7 +7073,7 @@
               <a:buNone/>
             </a:pPr>
             <a:r>
-              <a:rPr lang="en-US" sz="1300" b="1" dirty="0">
+              <a:rPr lang="en-US" sz="1220" b="1" dirty="0">
                 <a:solidFill>
                   <a:srgbClr val="0068B7"/>
                 </a:solidFill>
@@ -7079,7 +7083,7 @@
               </a:rPr>
               <a:t>Safeguard to plan</a:t>
             </a:r>
-            <a:endParaRPr lang="en-US" sz="1300" dirty="0"/>
+            <a:endParaRPr lang="en-US" sz="1220" dirty="0"/>
           </a:p>
         </p:txBody>
       </p:sp>
@@ -7091,8 +7095,8 @@
         </p:nvSpPr>
         <p:spPr>
           <a:xfrm>
-            <a:off x="7799832" y="4818888"/>
-            <a:ext cx="3145536" cy="688543"/>
+            <a:off x="7708392" y="4828032"/>
+            <a:ext cx="3282696" cy="749808"/>
           </a:xfrm>
           <a:prstGeom prst="rect">
             <a:avLst/>
@@ -7110,7 +7114,7 @@
               <a:buNone/>
             </a:pPr>
             <a:r>
-              <a:rPr lang="en-US" sz="1320" dirty="0">
+              <a:rPr lang="en-US" sz="1220" dirty="0">
                 <a:solidFill>
                   <a:srgbClr val="17364A"/>
                 </a:solidFill>
@@ -7118,9 +7122,9 @@
                 <a:ea typeface="Aptos" pitchFamily="34" charset="-122"/>
                 <a:cs typeface="Aptos" pitchFamily="34" charset="-120"/>
               </a:rPr>
-              <a:t>Identify what could go wrong, who could be affected, what safeguards are needed, and what evidence should be reviewed before use.</a:t>
-            </a:r>
-            <a:endParaRPr lang="en-US" sz="1320" dirty="0"/>
+              <a:t>Identify what could go wrong, who could be affected, what safeguards are needed,.</a:t>
+            </a:r>
+            <a:endParaRPr lang="en-US" sz="1220" dirty="0"/>
           </a:p>
         </p:txBody>
       </p:sp>
@@ -7411,8 +7415,8 @@
         </p:nvSpPr>
         <p:spPr>
           <a:xfrm>
-            <a:off x="868680" y="1508760"/>
-            <a:ext cx="6309360" cy="4160520"/>
+            <a:off x="822960" y="1463040"/>
+            <a:ext cx="6565392" cy="4343400"/>
           </a:xfrm>
           <a:prstGeom prst="rect">
             <a:avLst/>
@@ -7430,7 +7434,7 @@
               <a:buNone/>
             </a:pPr>
             <a:r>
-              <a:rPr lang="en-US" sz="2100" dirty="0">
+              <a:rPr lang="en-US" sz="1920" dirty="0">
                 <a:solidFill>
                   <a:srgbClr val="003A63"/>
                 </a:solidFill>
@@ -7438,16 +7442,16 @@
                 <a:ea typeface="Aptos" pitchFamily="34" charset="-122"/>
                 <a:cs typeface="Aptos" pitchFamily="34" charset="-120"/>
               </a:rPr>
-              <a:t>• Generative AI may summarize structured and narrative data received through interoperable.</a:t>
-            </a:r>
-            <a:endParaRPr lang="en-US" sz="2100" dirty="0"/>
-          </a:p>
-          <a:p>
-            <a:pPr indent="0" marL="0">
-              <a:buNone/>
-            </a:pPr>
-            <a:r>
-              <a:rPr lang="en-US" sz="2100" dirty="0">
+              <a:t>• Generative AI may summarize structured and narrative data received through.</a:t>
+            </a:r>
+            <a:endParaRPr lang="en-US" sz="1920" dirty="0"/>
+          </a:p>
+          <a:p>
+            <a:pPr indent="0" marL="0">
+              <a:buNone/>
+            </a:pPr>
+            <a:r>
+              <a:rPr lang="en-US" sz="1920" dirty="0">
                 <a:solidFill>
                   <a:srgbClr val="003A63"/>
                 </a:solidFill>
@@ -7455,16 +7459,16 @@
                 <a:ea typeface="Aptos" pitchFamily="34" charset="-122"/>
                 <a:cs typeface="Aptos" pitchFamily="34" charset="-120"/>
               </a:rPr>
-              <a:t>• Predictive analytics may depend on standardized fields and terminology, so interoperability.</a:t>
-            </a:r>
-            <a:endParaRPr lang="en-US" sz="2100" dirty="0"/>
-          </a:p>
-          <a:p>
-            <a:pPr indent="0" marL="0">
-              <a:buNone/>
-            </a:pPr>
-            <a:r>
-              <a:rPr lang="en-US" sz="2100" dirty="0">
+              <a:t>• Predictive analytics may depend on standardized fields and terminology, so.</a:t>
+            </a:r>
+            <a:endParaRPr lang="en-US" sz="1920" dirty="0"/>
+          </a:p>
+          <a:p>
+            <a:pPr indent="0" marL="0">
+              <a:buNone/>
+            </a:pPr>
+            <a:r>
+              <a:rPr lang="en-US" sz="1920" dirty="0">
                 <a:solidFill>
                   <a:srgbClr val="003A63"/>
                 </a:solidFill>
@@ -7472,9 +7476,9 @@
                 <a:ea typeface="Aptos" pitchFamily="34" charset="-122"/>
                 <a:cs typeface="Aptos" pitchFamily="34" charset="-120"/>
               </a:rPr>
-              <a:t>• RAG tools may retrieve implementation guides or agency protocols, but document governance is.</a:t>
-            </a:r>
-            <a:endParaRPr lang="en-US" sz="2100" dirty="0"/>
+              <a:t>• RAG tools may retrieve implementation guides or agency protocols, but.</a:t>
+            </a:r>
+            <a:endParaRPr lang="en-US" sz="1920" dirty="0"/>
           </a:p>
         </p:txBody>
       </p:sp>
@@ -7486,12 +7490,12 @@
         </p:nvSpPr>
         <p:spPr>
           <a:xfrm>
-            <a:off x="7635240" y="1325880"/>
-            <a:ext cx="3474720" cy="1255471"/>
+            <a:off x="7543800" y="1325880"/>
+            <a:ext cx="3611880" cy="1261872"/>
           </a:xfrm>
           <a:prstGeom prst="roundRect">
             <a:avLst>
-              <a:gd name="adj" fmla="val 8740"/>
+              <a:gd name="adj" fmla="val 8696"/>
             </a:avLst>
           </a:prstGeom>
           <a:solidFill>
@@ -7513,8 +7517,8 @@
         </p:nvSpPr>
         <p:spPr>
           <a:xfrm>
-            <a:off x="7799832" y="1472184"/>
-            <a:ext cx="3145536" cy="256032"/>
+            <a:off x="7708392" y="1453896"/>
+            <a:ext cx="3282696" cy="228600"/>
           </a:xfrm>
           <a:prstGeom prst="rect">
             <a:avLst/>
@@ -7530,7 +7534,7 @@
               <a:buNone/>
             </a:pPr>
             <a:r>
-              <a:rPr lang="en-US" sz="1300" b="1" dirty="0">
+              <a:rPr lang="en-US" sz="1220" b="1" dirty="0">
                 <a:solidFill>
                   <a:srgbClr val="0068B7"/>
                 </a:solidFill>
@@ -7540,7 +7544,7 @@
               </a:rPr>
               <a:t>Implementation cue</a:t>
             </a:r>
-            <a:endParaRPr lang="en-US" sz="1300" dirty="0"/>
+            <a:endParaRPr lang="en-US" sz="1220" dirty="0"/>
           </a:p>
         </p:txBody>
       </p:sp>
@@ -7552,8 +7556,8 @@
         </p:nvSpPr>
         <p:spPr>
           <a:xfrm>
-            <a:off x="7799832" y="1801368"/>
-            <a:ext cx="3145536" cy="688543"/>
+            <a:off x="7708392" y="1764792"/>
+            <a:ext cx="3282696" cy="749808"/>
           </a:xfrm>
           <a:prstGeom prst="rect">
             <a:avLst/>
@@ -7571,7 +7575,7 @@
               <a:buNone/>
             </a:pPr>
             <a:r>
-              <a:rPr lang="en-US" sz="1320" dirty="0">
+              <a:rPr lang="en-US" sz="1220" dirty="0">
                 <a:solidFill>
                   <a:srgbClr val="17364A"/>
                 </a:solidFill>
@@ -7579,9 +7583,9 @@
                 <a:ea typeface="Aptos" pitchFamily="34" charset="-122"/>
                 <a:cs typeface="Aptos" pitchFamily="34" charset="-120"/>
               </a:rPr>
-              <a:t>Generative AI may summarize structured and narrative data received through interoperable exchange, but.</a:t>
-            </a:r>
-            <a:endParaRPr lang="en-US" sz="1320" dirty="0"/>
+              <a:t>Generative AI may summarize structured and narrative data received through.</a:t>
+            </a:r>
+            <a:endParaRPr lang="en-US" sz="1220" dirty="0"/>
           </a:p>
         </p:txBody>
       </p:sp>
@@ -7593,12 +7597,12 @@
         </p:nvSpPr>
         <p:spPr>
           <a:xfrm>
-            <a:off x="7635240" y="2718511"/>
-            <a:ext cx="3474720" cy="1328623"/>
+            <a:off x="7543800" y="2724912"/>
+            <a:ext cx="3611880" cy="1527048"/>
           </a:xfrm>
           <a:prstGeom prst="roundRect">
             <a:avLst>
-              <a:gd name="adj" fmla="val 8259"/>
+              <a:gd name="adj" fmla="val 7186"/>
             </a:avLst>
           </a:prstGeom>
           <a:solidFill>
@@ -7620,8 +7624,8 @@
         </p:nvSpPr>
         <p:spPr>
           <a:xfrm>
-            <a:off x="7799832" y="2864815"/>
-            <a:ext cx="3145536" cy="256032"/>
+            <a:off x="7708392" y="2852928"/>
+            <a:ext cx="3282696" cy="228600"/>
           </a:xfrm>
           <a:prstGeom prst="rect">
             <a:avLst/>
@@ -7637,7 +7641,7 @@
               <a:buNone/>
             </a:pPr>
             <a:r>
-              <a:rPr lang="en-US" sz="1300" b="1" dirty="0">
+              <a:rPr lang="en-US" sz="1220" b="1" dirty="0">
                 <a:solidFill>
                   <a:srgbClr val="0068B7"/>
                 </a:solidFill>
@@ -7647,7 +7651,7 @@
               </a:rPr>
               <a:t>Concept checkpoints</a:t>
             </a:r>
-            <a:endParaRPr lang="en-US" sz="1300" dirty="0"/>
+            <a:endParaRPr lang="en-US" sz="1220" dirty="0"/>
           </a:p>
         </p:txBody>
       </p:sp>
@@ -7659,8 +7663,8 @@
         </p:nvSpPr>
         <p:spPr>
           <a:xfrm>
-            <a:off x="7818120" y="3230575"/>
-            <a:ext cx="3090672" cy="670255"/>
+            <a:off x="7726680" y="3182112"/>
+            <a:ext cx="3227832" cy="960120"/>
           </a:xfrm>
           <a:prstGeom prst="rect">
             <a:avLst/>
@@ -7678,7 +7682,7 @@
               <a:buNone/>
             </a:pPr>
             <a:r>
-              <a:rPr lang="en-US" sz="1220" dirty="0">
+              <a:rPr lang="en-US" sz="1140" dirty="0">
                 <a:solidFill>
                   <a:srgbClr val="17364A"/>
                 </a:solidFill>
@@ -7686,16 +7690,16 @@
                 <a:ea typeface="Aptos" pitchFamily="34" charset="-122"/>
                 <a:cs typeface="Aptos" pitchFamily="34" charset="-120"/>
               </a:rPr>
-              <a:t>Generative AI may summarize structured and narrative data received.</a:t>
-            </a:r>
-            <a:endParaRPr lang="en-US" sz="1220" dirty="0"/>
-          </a:p>
-          <a:p>
-            <a:pPr indent="0" marL="0">
-              <a:buNone/>
-            </a:pPr>
-            <a:r>
-              <a:rPr lang="en-US" sz="1220" dirty="0">
+              <a:t>Generative AI may summarize structured and.</a:t>
+            </a:r>
+            <a:endParaRPr lang="en-US" sz="1140" dirty="0"/>
+          </a:p>
+          <a:p>
+            <a:pPr indent="0" marL="0">
+              <a:buNone/>
+            </a:pPr>
+            <a:r>
+              <a:rPr lang="en-US" sz="1140" dirty="0">
                 <a:solidFill>
                   <a:srgbClr val="17364A"/>
                 </a:solidFill>
@@ -7703,16 +7707,16 @@
                 <a:ea typeface="Aptos" pitchFamily="34" charset="-122"/>
                 <a:cs typeface="Aptos" pitchFamily="34" charset="-120"/>
               </a:rPr>
-              <a:t>Predictive analytics may depend on standardized fields and.</a:t>
-            </a:r>
-            <a:endParaRPr lang="en-US" sz="1220" dirty="0"/>
-          </a:p>
-          <a:p>
-            <a:pPr indent="0" marL="0">
-              <a:buNone/>
-            </a:pPr>
-            <a:r>
-              <a:rPr lang="en-US" sz="1220" dirty="0">
+              <a:t>Predictive analytics may depend on standardized.</a:t>
+            </a:r>
+            <a:endParaRPr lang="en-US" sz="1140" dirty="0"/>
+          </a:p>
+          <a:p>
+            <a:pPr indent="0" marL="0">
+              <a:buNone/>
+            </a:pPr>
+            <a:r>
+              <a:rPr lang="en-US" sz="1140" dirty="0">
                 <a:solidFill>
                   <a:srgbClr val="17364A"/>
                 </a:solidFill>
@@ -7720,9 +7724,9 @@
                 <a:ea typeface="Aptos" pitchFamily="34" charset="-122"/>
                 <a:cs typeface="Aptos" pitchFamily="34" charset="-120"/>
               </a:rPr>
-              <a:t>RAG tools may retrieve implementation guides or agency protocols,.</a:t>
-            </a:r>
-            <a:endParaRPr lang="en-US" sz="1220" dirty="0"/>
+              <a:t>RAG tools may retrieve implementation guides or.</a:t>
+            </a:r>
+            <a:endParaRPr lang="en-US" sz="1140" dirty="0"/>
           </a:p>
         </p:txBody>
       </p:sp>
@@ -7734,12 +7738,12 @@
         </p:nvSpPr>
         <p:spPr>
           <a:xfrm>
-            <a:off x="7635240" y="4184294"/>
-            <a:ext cx="3474720" cy="1466698"/>
+            <a:off x="7543800" y="4389120"/>
+            <a:ext cx="3611880" cy="1261872"/>
           </a:xfrm>
           <a:prstGeom prst="roundRect">
             <a:avLst>
-              <a:gd name="adj" fmla="val 7481"/>
+              <a:gd name="adj" fmla="val 8696"/>
             </a:avLst>
           </a:prstGeom>
           <a:solidFill>
@@ -7761,8 +7765,8 @@
         </p:nvSpPr>
         <p:spPr>
           <a:xfrm>
-            <a:off x="7799832" y="4330598"/>
-            <a:ext cx="3145536" cy="256032"/>
+            <a:off x="7708392" y="4517136"/>
+            <a:ext cx="3282696" cy="228600"/>
           </a:xfrm>
           <a:prstGeom prst="rect">
             <a:avLst/>
@@ -7778,7 +7782,7 @@
               <a:buNone/>
             </a:pPr>
             <a:r>
-              <a:rPr lang="en-US" sz="1300" b="1" dirty="0">
+              <a:rPr lang="en-US" sz="1220" b="1" dirty="0">
                 <a:solidFill>
                   <a:srgbClr val="0068B7"/>
                 </a:solidFill>
@@ -7788,7 +7792,7 @@
               </a:rPr>
               <a:t>Next action</a:t>
             </a:r>
-            <a:endParaRPr lang="en-US" sz="1300" dirty="0"/>
+            <a:endParaRPr lang="en-US" sz="1220" dirty="0"/>
           </a:p>
         </p:txBody>
       </p:sp>
@@ -7800,8 +7804,8 @@
         </p:nvSpPr>
         <p:spPr>
           <a:xfrm>
-            <a:off x="7799832" y="4659782"/>
-            <a:ext cx="3145536" cy="899770"/>
+            <a:off x="7708392" y="4828032"/>
+            <a:ext cx="3282696" cy="749808"/>
           </a:xfrm>
           <a:prstGeom prst="rect">
             <a:avLst/>
@@ -7819,7 +7823,7 @@
               <a:buNone/>
             </a:pPr>
             <a:r>
-              <a:rPr lang="en-US" sz="1320" dirty="0">
+              <a:rPr lang="en-US" sz="1220" dirty="0">
                 <a:solidFill>
                   <a:srgbClr val="17364A"/>
                 </a:solidFill>
@@ -7827,9 +7831,9 @@
                 <a:ea typeface="Aptos" pitchFamily="34" charset="-122"/>
                 <a:cs typeface="Aptos" pitchFamily="34" charset="-120"/>
               </a:rPr>
-              <a:t>Use the concept to clarify workflow changes, dependencies, staffing, procurement requirements, training needs, and implementation checkpoints.</a:t>
-            </a:r>
-            <a:endParaRPr lang="en-US" sz="1320" dirty="0"/>
+              <a:t>Use the concept to clarify workflow changes, dependencies, staffing, procurement.</a:t>
+            </a:r>
+            <a:endParaRPr lang="en-US" sz="1220" dirty="0"/>
           </a:p>
         </p:txBody>
       </p:sp>
@@ -8120,8 +8124,8 @@
         </p:nvSpPr>
         <p:spPr>
           <a:xfrm>
-            <a:off x="868680" y="1508760"/>
-            <a:ext cx="6309360" cy="4160520"/>
+            <a:off x="822960" y="1463040"/>
+            <a:ext cx="6565392" cy="4343400"/>
           </a:xfrm>
           <a:prstGeom prst="rect">
             <a:avLst/>
@@ -8139,7 +8143,7 @@
               <a:buNone/>
             </a:pPr>
             <a:r>
-              <a:rPr lang="en-US" sz="2100" dirty="0">
+              <a:rPr lang="en-US" sz="1920" dirty="0">
                 <a:solidFill>
                   <a:srgbClr val="003A63"/>
                 </a:solidFill>
@@ -8149,14 +8153,14 @@
               </a:rPr>
               <a:t>• Which standards are used in your agency’s major data exchange workflows?</a:t>
             </a:r>
-            <a:endParaRPr lang="en-US" sz="2100" dirty="0"/>
-          </a:p>
-          <a:p>
-            <a:pPr indent="0" marL="0">
-              <a:buNone/>
-            </a:pPr>
-            <a:r>
-              <a:rPr lang="en-US" sz="2100" dirty="0">
+            <a:endParaRPr lang="en-US" sz="1920" dirty="0"/>
+          </a:p>
+          <a:p>
+            <a:pPr indent="0" marL="0">
+              <a:buNone/>
+            </a:pPr>
+            <a:r>
+              <a:rPr lang="en-US" sz="1920" dirty="0">
                 <a:solidFill>
                   <a:srgbClr val="003A63"/>
                 </a:solidFill>
@@ -8166,14 +8170,14 @@
               </a:rPr>
               <a:t>• Which workflows still depend on manual uploads or copy-paste processes?</a:t>
             </a:r>
-            <a:endParaRPr lang="en-US" sz="2100" dirty="0"/>
-          </a:p>
-          <a:p>
-            <a:pPr indent="0" marL="0">
-              <a:buNone/>
-            </a:pPr>
-            <a:r>
-              <a:rPr lang="en-US" sz="2100" dirty="0">
+            <a:endParaRPr lang="en-US" sz="1920" dirty="0"/>
+          </a:p>
+          <a:p>
+            <a:pPr indent="0" marL="0">
+              <a:buNone/>
+            </a:pPr>
+            <a:r>
+              <a:rPr lang="en-US" sz="1920" dirty="0">
                 <a:solidFill>
                   <a:srgbClr val="003A63"/>
                 </a:solidFill>
@@ -8183,7 +8187,7 @@
               </a:rPr>
               <a:t>• What vendor claims would need to be tested before implementation?</a:t>
             </a:r>
-            <a:endParaRPr lang="en-US" sz="2100" dirty="0"/>
+            <a:endParaRPr lang="en-US" sz="1920" dirty="0"/>
           </a:p>
         </p:txBody>
       </p:sp>
@@ -8195,12 +8199,12 @@
         </p:nvSpPr>
         <p:spPr>
           <a:xfrm>
-            <a:off x="7635240" y="1325880"/>
-            <a:ext cx="3474720" cy="1207008"/>
+            <a:off x="7543800" y="1325880"/>
+            <a:ext cx="3611880" cy="1261872"/>
           </a:xfrm>
           <a:prstGeom prst="roundRect">
             <a:avLst>
-              <a:gd name="adj" fmla="val 9091"/>
+              <a:gd name="adj" fmla="val 8696"/>
             </a:avLst>
           </a:prstGeom>
           <a:solidFill>
@@ -8222,8 +8226,8 @@
         </p:nvSpPr>
         <p:spPr>
           <a:xfrm>
-            <a:off x="7799832" y="1472184"/>
-            <a:ext cx="3145536" cy="256032"/>
+            <a:off x="7708392" y="1453896"/>
+            <a:ext cx="3282696" cy="228600"/>
           </a:xfrm>
           <a:prstGeom prst="rect">
             <a:avLst/>
@@ -8239,7 +8243,7 @@
               <a:buNone/>
             </a:pPr>
             <a:r>
-              <a:rPr lang="en-US" sz="1300" b="1" dirty="0">
+              <a:rPr lang="en-US" sz="1220" b="1" dirty="0">
                 <a:solidFill>
                   <a:srgbClr val="0068B7"/>
                 </a:solidFill>
@@ -8249,7 +8253,7 @@
               </a:rPr>
               <a:t>Core concept</a:t>
             </a:r>
-            <a:endParaRPr lang="en-US" sz="1300" dirty="0"/>
+            <a:endParaRPr lang="en-US" sz="1220" dirty="0"/>
           </a:p>
         </p:txBody>
       </p:sp>
@@ -8261,8 +8265,8 @@
         </p:nvSpPr>
         <p:spPr>
           <a:xfrm>
-            <a:off x="7799832" y="1801368"/>
-            <a:ext cx="3145536" cy="640080"/>
+            <a:off x="7708392" y="1764792"/>
+            <a:ext cx="3282696" cy="749808"/>
           </a:xfrm>
           <a:prstGeom prst="rect">
             <a:avLst/>
@@ -8280,7 +8284,7 @@
               <a:buNone/>
             </a:pPr>
             <a:r>
-              <a:rPr lang="en-US" sz="1320" dirty="0">
+              <a:rPr lang="en-US" sz="1220" dirty="0">
                 <a:solidFill>
                   <a:srgbClr val="17364A"/>
                 </a:solidFill>
@@ -8290,7 +8294,7 @@
               </a:rPr>
               <a:t>Which standards are used in your agency’s major data exchange workflows?</a:t>
             </a:r>
-            <a:endParaRPr lang="en-US" sz="1320" dirty="0"/>
+            <a:endParaRPr lang="en-US" sz="1220" dirty="0"/>
           </a:p>
         </p:txBody>
       </p:sp>
@@ -8302,12 +8306,12 @@
         </p:nvSpPr>
         <p:spPr>
           <a:xfrm>
-            <a:off x="7635240" y="2670048"/>
-            <a:ext cx="3474720" cy="1377086"/>
+            <a:off x="7543800" y="2724912"/>
+            <a:ext cx="3611880" cy="1527048"/>
           </a:xfrm>
           <a:prstGeom prst="roundRect">
             <a:avLst>
-              <a:gd name="adj" fmla="val 7968"/>
+              <a:gd name="adj" fmla="val 7186"/>
             </a:avLst>
           </a:prstGeom>
           <a:solidFill>
@@ -8329,8 +8333,8 @@
         </p:nvSpPr>
         <p:spPr>
           <a:xfrm>
-            <a:off x="7799832" y="2816352"/>
-            <a:ext cx="3145536" cy="256032"/>
+            <a:off x="7708392" y="2852928"/>
+            <a:ext cx="3282696" cy="228600"/>
           </a:xfrm>
           <a:prstGeom prst="rect">
             <a:avLst/>
@@ -8346,7 +8350,7 @@
               <a:buNone/>
             </a:pPr>
             <a:r>
-              <a:rPr lang="en-US" sz="1300" b="1" dirty="0">
+              <a:rPr lang="en-US" sz="1220" b="1" dirty="0">
                 <a:solidFill>
                   <a:srgbClr val="0068B7"/>
                 </a:solidFill>
@@ -8356,7 +8360,7 @@
               </a:rPr>
               <a:t>Concept checkpoints</a:t>
             </a:r>
-            <a:endParaRPr lang="en-US" sz="1300" dirty="0"/>
+            <a:endParaRPr lang="en-US" sz="1220" dirty="0"/>
           </a:p>
         </p:txBody>
       </p:sp>
@@ -8368,8 +8372,8 @@
         </p:nvSpPr>
         <p:spPr>
           <a:xfrm>
-            <a:off x="7818120" y="3182112"/>
-            <a:ext cx="3090672" cy="718718"/>
+            <a:off x="7726680" y="3182112"/>
+            <a:ext cx="3227832" cy="960120"/>
           </a:xfrm>
           <a:prstGeom prst="rect">
             <a:avLst/>
@@ -8387,7 +8391,7 @@
               <a:buNone/>
             </a:pPr>
             <a:r>
-              <a:rPr lang="en-US" sz="1220" dirty="0">
+              <a:rPr lang="en-US" sz="1140" dirty="0">
                 <a:solidFill>
                   <a:srgbClr val="17364A"/>
                 </a:solidFill>
@@ -8395,16 +8399,16 @@
                 <a:ea typeface="Aptos" pitchFamily="34" charset="-122"/>
                 <a:cs typeface="Aptos" pitchFamily="34" charset="-120"/>
               </a:rPr>
-              <a:t>Which standards are used in your agency’s major data exchange.</a:t>
-            </a:r>
-            <a:endParaRPr lang="en-US" sz="1220" dirty="0"/>
-          </a:p>
-          <a:p>
-            <a:pPr indent="0" marL="0">
-              <a:buNone/>
-            </a:pPr>
-            <a:r>
-              <a:rPr lang="en-US" sz="1220" dirty="0">
+              <a:t>Which standards are used in your agency’s major.</a:t>
+            </a:r>
+            <a:endParaRPr lang="en-US" sz="1140" dirty="0"/>
+          </a:p>
+          <a:p>
+            <a:pPr indent="0" marL="0">
+              <a:buNone/>
+            </a:pPr>
+            <a:r>
+              <a:rPr lang="en-US" sz="1140" dirty="0">
                 <a:solidFill>
                   <a:srgbClr val="17364A"/>
                 </a:solidFill>
@@ -8412,16 +8416,16 @@
                 <a:ea typeface="Aptos" pitchFamily="34" charset="-122"/>
                 <a:cs typeface="Aptos" pitchFamily="34" charset="-120"/>
               </a:rPr>
-              <a:t>Which workflows still depend on manual uploads or copy-paste.</a:t>
-            </a:r>
-            <a:endParaRPr lang="en-US" sz="1220" dirty="0"/>
-          </a:p>
-          <a:p>
-            <a:pPr indent="0" marL="0">
-              <a:buNone/>
-            </a:pPr>
-            <a:r>
-              <a:rPr lang="en-US" sz="1220" dirty="0">
+              <a:t>Which workflows still depend on manual uploads or.</a:t>
+            </a:r>
+            <a:endParaRPr lang="en-US" sz="1140" dirty="0"/>
+          </a:p>
+          <a:p>
+            <a:pPr indent="0" marL="0">
+              <a:buNone/>
+            </a:pPr>
+            <a:r>
+              <a:rPr lang="en-US" sz="1140" dirty="0">
                 <a:solidFill>
                   <a:srgbClr val="17364A"/>
                 </a:solidFill>
@@ -8429,9 +8433,9 @@
                 <a:ea typeface="Aptos" pitchFamily="34" charset="-122"/>
                 <a:cs typeface="Aptos" pitchFamily="34" charset="-120"/>
               </a:rPr>
-              <a:t>What vendor claims would need to be tested before implementation?</a:t>
-            </a:r>
-            <a:endParaRPr lang="en-US" sz="1220" dirty="0"/>
+              <a:t>What vendor claims would need to be tested before.</a:t>
+            </a:r>
+            <a:endParaRPr lang="en-US" sz="1140" dirty="0"/>
           </a:p>
         </p:txBody>
       </p:sp>
@@ -8443,12 +8447,12 @@
         </p:nvSpPr>
         <p:spPr>
           <a:xfrm>
-            <a:off x="7635240" y="4184294"/>
-            <a:ext cx="3474720" cy="1466698"/>
+            <a:off x="7543800" y="4389120"/>
+            <a:ext cx="3611880" cy="1261872"/>
           </a:xfrm>
           <a:prstGeom prst="roundRect">
             <a:avLst>
-              <a:gd name="adj" fmla="val 7481"/>
+              <a:gd name="adj" fmla="val 8696"/>
             </a:avLst>
           </a:prstGeom>
           <a:solidFill>
@@ -8470,8 +8474,8 @@
         </p:nvSpPr>
         <p:spPr>
           <a:xfrm>
-            <a:off x="7799832" y="4330598"/>
-            <a:ext cx="3145536" cy="256032"/>
+            <a:off x="7708392" y="4517136"/>
+            <a:ext cx="3282696" cy="228600"/>
           </a:xfrm>
           <a:prstGeom prst="rect">
             <a:avLst/>
@@ -8487,7 +8491,7 @@
               <a:buNone/>
             </a:pPr>
             <a:r>
-              <a:rPr lang="en-US" sz="1300" b="1" dirty="0">
+              <a:rPr lang="en-US" sz="1220" b="1" dirty="0">
                 <a:solidFill>
                   <a:srgbClr val="0068B7"/>
                 </a:solidFill>
@@ -8497,7 +8501,7 @@
               </a:rPr>
               <a:t>Apply it</a:t>
             </a:r>
-            <a:endParaRPr lang="en-US" sz="1300" dirty="0"/>
+            <a:endParaRPr lang="en-US" sz="1220" dirty="0"/>
           </a:p>
         </p:txBody>
       </p:sp>
@@ -8509,8 +8513,8 @@
         </p:nvSpPr>
         <p:spPr>
           <a:xfrm>
-            <a:off x="7799832" y="4659782"/>
-            <a:ext cx="3145536" cy="899770"/>
+            <a:off x="7708392" y="4828032"/>
+            <a:ext cx="3282696" cy="749808"/>
           </a:xfrm>
           <a:prstGeom prst="rect">
             <a:avLst/>
@@ -8528,7 +8532,7 @@
               <a:buNone/>
             </a:pPr>
             <a:r>
-              <a:rPr lang="en-US" sz="1320" dirty="0">
+              <a:rPr lang="en-US" sz="1220" dirty="0">
                 <a:solidFill>
                   <a:srgbClr val="17364A"/>
                 </a:solidFill>
@@ -8536,9 +8540,9 @@
                 <a:ea typeface="Aptos" pitchFamily="34" charset="-122"/>
                 <a:cs typeface="Aptos" pitchFamily="34" charset="-120"/>
               </a:rPr>
-              <a:t>Connect the concept to public health purpose, responsible use, required safeguards, documentation, and the next action a department should take.</a:t>
-            </a:r>
-            <a:endParaRPr lang="en-US" sz="1320" dirty="0"/>
+              <a:t>Connect the concept to public health purpose, responsible use, required.</a:t>
+            </a:r>
+            <a:endParaRPr lang="en-US" sz="1220" dirty="0"/>
           </a:p>
         </p:txBody>
       </p:sp>
@@ -8829,8 +8833,8 @@
         </p:nvSpPr>
         <p:spPr>
           <a:xfrm>
-            <a:off x="868680" y="1508760"/>
-            <a:ext cx="6309360" cy="4160520"/>
+            <a:off x="822960" y="1463040"/>
+            <a:ext cx="6565392" cy="4343400"/>
           </a:xfrm>
           <a:prstGeom prst="rect">
             <a:avLst/>
@@ -8848,7 +8852,7 @@
               <a:buNone/>
             </a:pPr>
             <a:r>
-              <a:rPr lang="en-US" sz="2100" dirty="0">
+              <a:rPr lang="en-US" sz="1920" dirty="0">
                 <a:solidFill>
                   <a:srgbClr val="003A63"/>
                 </a:solidFill>
@@ -8858,14 +8862,14 @@
               </a:rPr>
               <a:t>• Which terminology standards are required for the workflow?</a:t>
             </a:r>
-            <a:endParaRPr lang="en-US" sz="2100" dirty="0"/>
-          </a:p>
-          <a:p>
-            <a:pPr indent="0" marL="0">
-              <a:buNone/>
-            </a:pPr>
-            <a:r>
-              <a:rPr lang="en-US" sz="2100" dirty="0">
+            <a:endParaRPr lang="en-US" sz="1920" dirty="0"/>
+          </a:p>
+          <a:p>
+            <a:pPr indent="0" marL="0">
+              <a:buNone/>
+            </a:pPr>
+            <a:r>
+              <a:rPr lang="en-US" sz="1920" dirty="0">
                 <a:solidFill>
                   <a:srgbClr val="003A63"/>
                 </a:solidFill>
@@ -8875,7 +8879,7 @@
               </a:rPr>
               <a:t>• How would interoperability gaps affect AI outputs or equity?</a:t>
             </a:r>
-            <a:endParaRPr lang="en-US" sz="2100" dirty="0"/>
+            <a:endParaRPr lang="en-US" sz="1920" dirty="0"/>
           </a:p>
         </p:txBody>
       </p:sp>
@@ -8887,12 +8891,12 @@
         </p:nvSpPr>
         <p:spPr>
           <a:xfrm>
-            <a:off x="7635240" y="1325880"/>
-            <a:ext cx="3474720" cy="1207008"/>
+            <a:off x="7543800" y="1325880"/>
+            <a:ext cx="3611880" cy="1261872"/>
           </a:xfrm>
           <a:prstGeom prst="roundRect">
             <a:avLst>
-              <a:gd name="adj" fmla="val 9091"/>
+              <a:gd name="adj" fmla="val 8696"/>
             </a:avLst>
           </a:prstGeom>
           <a:solidFill>
@@ -8914,8 +8918,8 @@
         </p:nvSpPr>
         <p:spPr>
           <a:xfrm>
-            <a:off x="7799832" y="1472184"/>
-            <a:ext cx="3145536" cy="256032"/>
+            <a:off x="7708392" y="1453896"/>
+            <a:ext cx="3282696" cy="228600"/>
           </a:xfrm>
           <a:prstGeom prst="rect">
             <a:avLst/>
@@ -8931,7 +8935,7 @@
               <a:buNone/>
             </a:pPr>
             <a:r>
-              <a:rPr lang="en-US" sz="1300" b="1" dirty="0">
+              <a:rPr lang="en-US" sz="1220" b="1" dirty="0">
                 <a:solidFill>
                   <a:srgbClr val="0068B7"/>
                 </a:solidFill>
@@ -8941,7 +8945,7 @@
               </a:rPr>
               <a:t>Core concept</a:t>
             </a:r>
-            <a:endParaRPr lang="en-US" sz="1300" dirty="0"/>
+            <a:endParaRPr lang="en-US" sz="1220" dirty="0"/>
           </a:p>
         </p:txBody>
       </p:sp>
@@ -8953,8 +8957,8 @@
         </p:nvSpPr>
         <p:spPr>
           <a:xfrm>
-            <a:off x="7799832" y="1801368"/>
-            <a:ext cx="3145536" cy="640080"/>
+            <a:off x="7708392" y="1764792"/>
+            <a:ext cx="3282696" cy="749808"/>
           </a:xfrm>
           <a:prstGeom prst="rect">
             <a:avLst/>
@@ -8972,7 +8976,7 @@
               <a:buNone/>
             </a:pPr>
             <a:r>
-              <a:rPr lang="en-US" sz="1320" dirty="0">
+              <a:rPr lang="en-US" sz="1220" dirty="0">
                 <a:solidFill>
                   <a:srgbClr val="17364A"/>
                 </a:solidFill>
@@ -8982,7 +8986,7 @@
               </a:rPr>
               <a:t>Which terminology standards are required for the workflow?</a:t>
             </a:r>
-            <a:endParaRPr lang="en-US" sz="1320" dirty="0"/>
+            <a:endParaRPr lang="en-US" sz="1220" dirty="0"/>
           </a:p>
         </p:txBody>
       </p:sp>
@@ -8994,12 +8998,12 @@
         </p:nvSpPr>
         <p:spPr>
           <a:xfrm>
-            <a:off x="7635240" y="2670048"/>
-            <a:ext cx="3474720" cy="1377086"/>
+            <a:off x="7543800" y="2724912"/>
+            <a:ext cx="3611880" cy="1527048"/>
           </a:xfrm>
           <a:prstGeom prst="roundRect">
             <a:avLst>
-              <a:gd name="adj" fmla="val 7968"/>
+              <a:gd name="adj" fmla="val 7186"/>
             </a:avLst>
           </a:prstGeom>
           <a:solidFill>
@@ -9021,8 +9025,8 @@
         </p:nvSpPr>
         <p:spPr>
           <a:xfrm>
-            <a:off x="7799832" y="2816352"/>
-            <a:ext cx="3145536" cy="256032"/>
+            <a:off x="7708392" y="2852928"/>
+            <a:ext cx="3282696" cy="228600"/>
           </a:xfrm>
           <a:prstGeom prst="rect">
             <a:avLst/>
@@ -9038,7 +9042,7 @@
               <a:buNone/>
             </a:pPr>
             <a:r>
-              <a:rPr lang="en-US" sz="1300" b="1" dirty="0">
+              <a:rPr lang="en-US" sz="1220" b="1" dirty="0">
                 <a:solidFill>
                   <a:srgbClr val="0068B7"/>
                 </a:solidFill>
@@ -9048,7 +9052,7 @@
               </a:rPr>
               <a:t>Concept checkpoints</a:t>
             </a:r>
-            <a:endParaRPr lang="en-US" sz="1300" dirty="0"/>
+            <a:endParaRPr lang="en-US" sz="1220" dirty="0"/>
           </a:p>
         </p:txBody>
       </p:sp>
@@ -9060,8 +9064,8 @@
         </p:nvSpPr>
         <p:spPr>
           <a:xfrm>
-            <a:off x="7818120" y="3182112"/>
-            <a:ext cx="3090672" cy="718718"/>
+            <a:off x="7726680" y="3182112"/>
+            <a:ext cx="3227832" cy="960120"/>
           </a:xfrm>
           <a:prstGeom prst="rect">
             <a:avLst/>
@@ -9079,7 +9083,7 @@
               <a:buNone/>
             </a:pPr>
             <a:r>
-              <a:rPr lang="en-US" sz="1220" dirty="0">
+              <a:rPr lang="en-US" sz="1140" dirty="0">
                 <a:solidFill>
                   <a:srgbClr val="17364A"/>
                 </a:solidFill>
@@ -9087,16 +9091,16 @@
                 <a:ea typeface="Aptos" pitchFamily="34" charset="-122"/>
                 <a:cs typeface="Aptos" pitchFamily="34" charset="-120"/>
               </a:rPr>
-              <a:t>Which terminology standards are required for the workflow?</a:t>
-            </a:r>
-            <a:endParaRPr lang="en-US" sz="1220" dirty="0"/>
-          </a:p>
-          <a:p>
-            <a:pPr indent="0" marL="0">
-              <a:buNone/>
-            </a:pPr>
-            <a:r>
-              <a:rPr lang="en-US" sz="1220" dirty="0">
+              <a:t>Which terminology standards are required for the.</a:t>
+            </a:r>
+            <a:endParaRPr lang="en-US" sz="1140" dirty="0"/>
+          </a:p>
+          <a:p>
+            <a:pPr indent="0" marL="0">
+              <a:buNone/>
+            </a:pPr>
+            <a:r>
+              <a:rPr lang="en-US" sz="1140" dirty="0">
                 <a:solidFill>
                   <a:srgbClr val="17364A"/>
                 </a:solidFill>
@@ -9104,9 +9108,9 @@
                 <a:ea typeface="Aptos" pitchFamily="34" charset="-122"/>
                 <a:cs typeface="Aptos" pitchFamily="34" charset="-120"/>
               </a:rPr>
-              <a:t>How would interoperability gaps affect AI outputs or equity?</a:t>
-            </a:r>
-            <a:endParaRPr lang="en-US" sz="1220" dirty="0"/>
+              <a:t>How would interoperability gaps affect AI outputs.</a:t>
+            </a:r>
+            <a:endParaRPr lang="en-US" sz="1140" dirty="0"/>
           </a:p>
         </p:txBody>
       </p:sp>
@@ -9118,12 +9122,12 @@
         </p:nvSpPr>
         <p:spPr>
           <a:xfrm>
-            <a:off x="7635240" y="4184294"/>
-            <a:ext cx="3474720" cy="1466698"/>
+            <a:off x="7543800" y="4389120"/>
+            <a:ext cx="3611880" cy="1261872"/>
           </a:xfrm>
           <a:prstGeom prst="roundRect">
             <a:avLst>
-              <a:gd name="adj" fmla="val 7481"/>
+              <a:gd name="adj" fmla="val 8696"/>
             </a:avLst>
           </a:prstGeom>
           <a:solidFill>
@@ -9145,8 +9149,8 @@
         </p:nvSpPr>
         <p:spPr>
           <a:xfrm>
-            <a:off x="7799832" y="4330598"/>
-            <a:ext cx="3145536" cy="256032"/>
+            <a:off x="7708392" y="4517136"/>
+            <a:ext cx="3282696" cy="228600"/>
           </a:xfrm>
           <a:prstGeom prst="rect">
             <a:avLst/>
@@ -9162,7 +9166,7 @@
               <a:buNone/>
             </a:pPr>
             <a:r>
-              <a:rPr lang="en-US" sz="1300" b="1" dirty="0">
+              <a:rPr lang="en-US" sz="1220" b="1" dirty="0">
                 <a:solidFill>
                   <a:srgbClr val="0068B7"/>
                 </a:solidFill>
@@ -9172,7 +9176,7 @@
               </a:rPr>
               <a:t>Apply it</a:t>
             </a:r>
-            <a:endParaRPr lang="en-US" sz="1300" dirty="0"/>
+            <a:endParaRPr lang="en-US" sz="1220" dirty="0"/>
           </a:p>
         </p:txBody>
       </p:sp>
@@ -9184,8 +9188,8 @@
         </p:nvSpPr>
         <p:spPr>
           <a:xfrm>
-            <a:off x="7799832" y="4659782"/>
-            <a:ext cx="3145536" cy="899770"/>
+            <a:off x="7708392" y="4828032"/>
+            <a:ext cx="3282696" cy="749808"/>
           </a:xfrm>
           <a:prstGeom prst="rect">
             <a:avLst/>
@@ -9203,7 +9207,7 @@
               <a:buNone/>
             </a:pPr>
             <a:r>
-              <a:rPr lang="en-US" sz="1320" dirty="0">
+              <a:rPr lang="en-US" sz="1220" dirty="0">
                 <a:solidFill>
                   <a:srgbClr val="17364A"/>
                 </a:solidFill>
@@ -9211,9 +9215,9 @@
                 <a:ea typeface="Aptos" pitchFamily="34" charset="-122"/>
                 <a:cs typeface="Aptos" pitchFamily="34" charset="-120"/>
               </a:rPr>
-              <a:t>Connect the concept to public health purpose, responsible use, required safeguards, documentation, and the next action a department should take.</a:t>
-            </a:r>
-            <a:endParaRPr lang="en-US" sz="1320" dirty="0"/>
+              <a:t>Connect the concept to public health purpose, responsible use, required.</a:t>
+            </a:r>
+            <a:endParaRPr lang="en-US" sz="1220" dirty="0"/>
           </a:p>
         </p:txBody>
       </p:sp>
@@ -9504,8 +9508,8 @@
         </p:nvSpPr>
         <p:spPr>
           <a:xfrm>
-            <a:off x="868680" y="1508760"/>
-            <a:ext cx="6309360" cy="4160520"/>
+            <a:off x="822960" y="1463040"/>
+            <a:ext cx="6565392" cy="4343400"/>
           </a:xfrm>
           <a:prstGeom prst="rect">
             <a:avLst/>
@@ -9523,7 +9527,7 @@
               <a:buNone/>
             </a:pPr>
             <a:r>
-              <a:rPr lang="en-US" sz="2100" dirty="0">
+              <a:rPr lang="en-US" sz="1920" dirty="0">
                 <a:solidFill>
                   <a:srgbClr val="003A63"/>
                 </a:solidFill>
@@ -9531,16 +9535,16 @@
                 <a:ea typeface="Aptos" pitchFamily="34" charset="-122"/>
                 <a:cs typeface="Aptos" pitchFamily="34" charset="-120"/>
               </a:rPr>
-              <a:t>• Create an interoperability review checklist for one proposed AI-supported workflow.</a:t>
-            </a:r>
-            <a:endParaRPr lang="en-US" sz="2100" dirty="0"/>
-          </a:p>
-          <a:p>
-            <a:pPr indent="0" marL="0">
-              <a:buNone/>
-            </a:pPr>
-            <a:r>
-              <a:rPr lang="en-US" sz="2100" dirty="0">
+              <a:t>• Create an interoperability review checklist for one proposed AI-supported.</a:t>
+            </a:r>
+            <a:endParaRPr lang="en-US" sz="1920" dirty="0"/>
+          </a:p>
+          <a:p>
+            <a:pPr indent="0" marL="0">
+              <a:buNone/>
+            </a:pPr>
+            <a:r>
+              <a:rPr lang="en-US" sz="1920" dirty="0">
                 <a:solidFill>
                   <a:srgbClr val="003A63"/>
                 </a:solidFill>
@@ -9548,16 +9552,16 @@
                 <a:ea typeface="Aptos" pitchFamily="34" charset="-122"/>
                 <a:cs typeface="Aptos" pitchFamily="34" charset="-120"/>
               </a:rPr>
-              <a:t>• Identify the sending and receiving systems, exchange standard, required data elements,.</a:t>
-            </a:r>
-            <a:endParaRPr lang="en-US" sz="2100" dirty="0"/>
-          </a:p>
-          <a:p>
-            <a:pPr indent="0" marL="0">
-              <a:buNone/>
-            </a:pPr>
-            <a:r>
-              <a:rPr lang="en-US" sz="2100" dirty="0">
+              <a:t>• Identify the sending and receiving systems, exchange standard, required data.</a:t>
+            </a:r>
+            <a:endParaRPr lang="en-US" sz="1920" dirty="0"/>
+          </a:p>
+          <a:p>
+            <a:pPr indent="0" marL="0">
+              <a:buNone/>
+            </a:pPr>
+            <a:r>
+              <a:rPr lang="en-US" sz="1920" dirty="0">
                 <a:solidFill>
                   <a:srgbClr val="003A63"/>
                 </a:solidFill>
@@ -9565,9 +9569,9 @@
                 <a:ea typeface="Aptos" pitchFamily="34" charset="-122"/>
                 <a:cs typeface="Aptos" pitchFamily="34" charset="-120"/>
               </a:rPr>
-              <a:t>• Include at least one test scenario that would show whether the exchange supports the public.</a:t>
-            </a:r>
-            <a:endParaRPr lang="en-US" sz="2100" dirty="0"/>
+              <a:t>• Include at least one test scenario that would show whether the exchange.</a:t>
+            </a:r>
+            <a:endParaRPr lang="en-US" sz="1920" dirty="0"/>
           </a:p>
         </p:txBody>
       </p:sp>
@@ -9579,12 +9583,12 @@
         </p:nvSpPr>
         <p:spPr>
           <a:xfrm>
-            <a:off x="7635240" y="1325880"/>
-            <a:ext cx="3474720" cy="1207008"/>
+            <a:off x="7543800" y="1325880"/>
+            <a:ext cx="3611880" cy="1261872"/>
           </a:xfrm>
           <a:prstGeom prst="roundRect">
             <a:avLst>
-              <a:gd name="adj" fmla="val 9091"/>
+              <a:gd name="adj" fmla="val 8696"/>
             </a:avLst>
           </a:prstGeom>
           <a:solidFill>
@@ -9606,8 +9610,8 @@
         </p:nvSpPr>
         <p:spPr>
           <a:xfrm>
-            <a:off x="7799832" y="1472184"/>
-            <a:ext cx="3145536" cy="256032"/>
+            <a:off x="7708392" y="1453896"/>
+            <a:ext cx="3282696" cy="228600"/>
           </a:xfrm>
           <a:prstGeom prst="rect">
             <a:avLst/>
@@ -9623,7 +9627,7 @@
               <a:buNone/>
             </a:pPr>
             <a:r>
-              <a:rPr lang="en-US" sz="1300" b="1" dirty="0">
+              <a:rPr lang="en-US" sz="1220" b="1" dirty="0">
                 <a:solidFill>
                   <a:srgbClr val="0068B7"/>
                 </a:solidFill>
@@ -9633,7 +9637,7 @@
               </a:rPr>
               <a:t>Practice focus</a:t>
             </a:r>
-            <a:endParaRPr lang="en-US" sz="1300" dirty="0"/>
+            <a:endParaRPr lang="en-US" sz="1220" dirty="0"/>
           </a:p>
         </p:txBody>
       </p:sp>
@@ -9645,8 +9649,8 @@
         </p:nvSpPr>
         <p:spPr>
           <a:xfrm>
-            <a:off x="7799832" y="1801368"/>
-            <a:ext cx="3145536" cy="640080"/>
+            <a:off x="7708392" y="1764792"/>
+            <a:ext cx="3282696" cy="749808"/>
           </a:xfrm>
           <a:prstGeom prst="rect">
             <a:avLst/>
@@ -9664,7 +9668,7 @@
               <a:buNone/>
             </a:pPr>
             <a:r>
-              <a:rPr lang="en-US" sz="1320" dirty="0">
+              <a:rPr lang="en-US" sz="1220" dirty="0">
                 <a:solidFill>
                   <a:srgbClr val="17364A"/>
                 </a:solidFill>
@@ -9672,9 +9676,9 @@
                 <a:ea typeface="Aptos" pitchFamily="34" charset="-122"/>
                 <a:cs typeface="Aptos" pitchFamily="34" charset="-120"/>
               </a:rPr>
-              <a:t>Create an interoperability review checklist for one proposed AI-supported workflow.</a:t>
-            </a:r>
-            <a:endParaRPr lang="en-US" sz="1320" dirty="0"/>
+              <a:t>Create an interoperability review checklist for one proposed AI-supported.</a:t>
+            </a:r>
+            <a:endParaRPr lang="en-US" sz="1220" dirty="0"/>
           </a:p>
         </p:txBody>
       </p:sp>
@@ -9686,12 +9690,12 @@
         </p:nvSpPr>
         <p:spPr>
           <a:xfrm>
-            <a:off x="7635240" y="2670048"/>
-            <a:ext cx="3474720" cy="1377086"/>
+            <a:off x="7543800" y="2724912"/>
+            <a:ext cx="3611880" cy="1527048"/>
           </a:xfrm>
           <a:prstGeom prst="roundRect">
             <a:avLst>
-              <a:gd name="adj" fmla="val 7968"/>
+              <a:gd name="adj" fmla="val 7186"/>
             </a:avLst>
           </a:prstGeom>
           <a:solidFill>
@@ -9713,8 +9717,8 @@
         </p:nvSpPr>
         <p:spPr>
           <a:xfrm>
-            <a:off x="7799832" y="2816352"/>
-            <a:ext cx="3145536" cy="256032"/>
+            <a:off x="7708392" y="2852928"/>
+            <a:ext cx="3282696" cy="228600"/>
           </a:xfrm>
           <a:prstGeom prst="rect">
             <a:avLst/>
@@ -9730,7 +9734,7 @@
               <a:buNone/>
             </a:pPr>
             <a:r>
-              <a:rPr lang="en-US" sz="1300" b="1" dirty="0">
+              <a:rPr lang="en-US" sz="1220" b="1" dirty="0">
                 <a:solidFill>
                   <a:srgbClr val="0068B7"/>
                 </a:solidFill>
@@ -9740,7 +9744,7 @@
               </a:rPr>
               <a:t>Concept checkpoints</a:t>
             </a:r>
-            <a:endParaRPr lang="en-US" sz="1300" dirty="0"/>
+            <a:endParaRPr lang="en-US" sz="1220" dirty="0"/>
           </a:p>
         </p:txBody>
       </p:sp>
@@ -9752,8 +9756,8 @@
         </p:nvSpPr>
         <p:spPr>
           <a:xfrm>
-            <a:off x="7818120" y="3182112"/>
-            <a:ext cx="3090672" cy="718718"/>
+            <a:off x="7726680" y="3182112"/>
+            <a:ext cx="3227832" cy="960120"/>
           </a:xfrm>
           <a:prstGeom prst="rect">
             <a:avLst/>
@@ -9771,7 +9775,7 @@
               <a:buNone/>
             </a:pPr>
             <a:r>
-              <a:rPr lang="en-US" sz="1220" dirty="0">
+              <a:rPr lang="en-US" sz="1140" dirty="0">
                 <a:solidFill>
                   <a:srgbClr val="17364A"/>
                 </a:solidFill>
@@ -9779,16 +9783,16 @@
                 <a:ea typeface="Aptos" pitchFamily="34" charset="-122"/>
                 <a:cs typeface="Aptos" pitchFamily="34" charset="-120"/>
               </a:rPr>
-              <a:t>Identify the sending and receiving systems, exchange standard,.</a:t>
-            </a:r>
-            <a:endParaRPr lang="en-US" sz="1220" dirty="0"/>
-          </a:p>
-          <a:p>
-            <a:pPr indent="0" marL="0">
-              <a:buNone/>
-            </a:pPr>
-            <a:r>
-              <a:rPr lang="en-US" sz="1220" dirty="0">
+              <a:t>Identify the sending and receiving systems,.</a:t>
+            </a:r>
+            <a:endParaRPr lang="en-US" sz="1140" dirty="0"/>
+          </a:p>
+          <a:p>
+            <a:pPr indent="0" marL="0">
+              <a:buNone/>
+            </a:pPr>
+            <a:r>
+              <a:rPr lang="en-US" sz="1140" dirty="0">
                 <a:solidFill>
                   <a:srgbClr val="17364A"/>
                 </a:solidFill>
@@ -9796,9 +9800,9 @@
                 <a:ea typeface="Aptos" pitchFamily="34" charset="-122"/>
                 <a:cs typeface="Aptos" pitchFamily="34" charset="-120"/>
               </a:rPr>
-              <a:t>Include at least one test scenario that would show whether the.</a:t>
-            </a:r>
-            <a:endParaRPr lang="en-US" sz="1220" dirty="0"/>
+              <a:t>Include at least one test scenario that would show.</a:t>
+            </a:r>
+            <a:endParaRPr lang="en-US" sz="1140" dirty="0"/>
           </a:p>
         </p:txBody>
       </p:sp>
@@ -9810,12 +9814,12 @@
         </p:nvSpPr>
         <p:spPr>
           <a:xfrm>
-            <a:off x="7635240" y="4184294"/>
-            <a:ext cx="3474720" cy="1466698"/>
+            <a:off x="7543800" y="4389120"/>
+            <a:ext cx="3611880" cy="1261872"/>
           </a:xfrm>
           <a:prstGeom prst="roundRect">
             <a:avLst>
-              <a:gd name="adj" fmla="val 7481"/>
+              <a:gd name="adj" fmla="val 8696"/>
             </a:avLst>
           </a:prstGeom>
           <a:solidFill>
@@ -9837,8 +9841,8 @@
         </p:nvSpPr>
         <p:spPr>
           <a:xfrm>
-            <a:off x="7799832" y="4330598"/>
-            <a:ext cx="3145536" cy="256032"/>
+            <a:off x="7708392" y="4517136"/>
+            <a:ext cx="3282696" cy="228600"/>
           </a:xfrm>
           <a:prstGeom prst="rect">
             <a:avLst/>
@@ -9854,7 +9858,7 @@
               <a:buNone/>
             </a:pPr>
             <a:r>
-              <a:rPr lang="en-US" sz="1300" b="1" dirty="0">
+              <a:rPr lang="en-US" sz="1220" b="1" dirty="0">
                 <a:solidFill>
                   <a:srgbClr val="0068B7"/>
                 </a:solidFill>
@@ -9864,7 +9868,7 @@
               </a:rPr>
               <a:t>What to produce</a:t>
             </a:r>
-            <a:endParaRPr lang="en-US" sz="1300" dirty="0"/>
+            <a:endParaRPr lang="en-US" sz="1220" dirty="0"/>
           </a:p>
         </p:txBody>
       </p:sp>
@@ -9876,8 +9880,8 @@
         </p:nvSpPr>
         <p:spPr>
           <a:xfrm>
-            <a:off x="7799832" y="4659782"/>
-            <a:ext cx="3145536" cy="899770"/>
+            <a:off x="7708392" y="4828032"/>
+            <a:ext cx="3282696" cy="749808"/>
           </a:xfrm>
           <a:prstGeom prst="rect">
             <a:avLst/>
@@ -9895,7 +9899,7 @@
               <a:buNone/>
             </a:pPr>
             <a:r>
-              <a:rPr lang="en-US" sz="1320" dirty="0">
+              <a:rPr lang="en-US" sz="1220" dirty="0">
                 <a:solidFill>
                   <a:srgbClr val="17364A"/>
                 </a:solidFill>
@@ -9903,9 +9907,9 @@
                 <a:ea typeface="Aptos" pitchFamily="34" charset="-122"/>
                 <a:cs typeface="Aptos" pitchFamily="34" charset="-120"/>
               </a:rPr>
-              <a:t>Use the assignment to test whether you can explain the concept, apply it to a realistic public health situation, and identify what would need review before the work moves forward.</a:t>
-            </a:r>
-            <a:endParaRPr lang="en-US" sz="1320" dirty="0"/>
+              <a:t>Use the assignment to test whether you can explain the concept, apply it to a.</a:t>
+            </a:r>
+            <a:endParaRPr lang="en-US" sz="1220" dirty="0"/>
           </a:p>
         </p:txBody>
       </p:sp>
@@ -10196,8 +10200,8 @@
         </p:nvSpPr>
         <p:spPr>
           <a:xfrm>
-            <a:off x="868680" y="1508760"/>
-            <a:ext cx="6309360" cy="4160520"/>
+            <a:off x="822960" y="1463040"/>
+            <a:ext cx="6565392" cy="4343400"/>
           </a:xfrm>
           <a:prstGeom prst="rect">
             <a:avLst/>
@@ -10215,7 +10219,7 @@
               <a:buNone/>
             </a:pPr>
             <a:r>
-              <a:rPr lang="en-US" sz="2100" dirty="0">
+              <a:rPr lang="en-US" sz="1920" dirty="0">
                 <a:solidFill>
                   <a:srgbClr val="003A63"/>
                 </a:solidFill>
@@ -10225,14 +10229,14 @@
               </a:rPr>
               <a:t>• Interoperability checklist</a:t>
             </a:r>
-            <a:endParaRPr lang="en-US" sz="2100" dirty="0"/>
-          </a:p>
-          <a:p>
-            <a:pPr indent="0" marL="0">
-              <a:buNone/>
-            </a:pPr>
-            <a:r>
-              <a:rPr lang="en-US" sz="2100" dirty="0">
+            <a:endParaRPr lang="en-US" sz="1920" dirty="0"/>
+          </a:p>
+          <a:p>
+            <a:pPr indent="0" marL="0">
+              <a:buNone/>
+            </a:pPr>
+            <a:r>
+              <a:rPr lang="en-US" sz="1920" dirty="0">
                 <a:solidFill>
                   <a:srgbClr val="003A63"/>
                 </a:solidFill>
@@ -10242,14 +10246,14 @@
               </a:rPr>
               <a:t>• Data exchange diagram</a:t>
             </a:r>
-            <a:endParaRPr lang="en-US" sz="2100" dirty="0"/>
-          </a:p>
-          <a:p>
-            <a:pPr indent="0" marL="0">
-              <a:buNone/>
-            </a:pPr>
-            <a:r>
-              <a:rPr lang="en-US" sz="2100" dirty="0">
+            <a:endParaRPr lang="en-US" sz="1920" dirty="0"/>
+          </a:p>
+          <a:p>
+            <a:pPr indent="0" marL="0">
+              <a:buNone/>
+            </a:pPr>
+            <a:r>
+              <a:rPr lang="en-US" sz="1920" dirty="0">
                 <a:solidFill>
                   <a:srgbClr val="003A63"/>
                 </a:solidFill>
@@ -10259,7 +10263,7 @@
               </a:rPr>
               <a:t>• Vendor questions</a:t>
             </a:r>
-            <a:endParaRPr lang="en-US" sz="2100" dirty="0"/>
+            <a:endParaRPr lang="en-US" sz="1920" dirty="0"/>
           </a:p>
         </p:txBody>
       </p:sp>
@@ -10271,12 +10275,12 @@
         </p:nvSpPr>
         <p:spPr>
           <a:xfrm>
-            <a:off x="7635240" y="1325880"/>
-            <a:ext cx="3474720" cy="1207008"/>
+            <a:off x="7543800" y="1325880"/>
+            <a:ext cx="3611880" cy="1261872"/>
           </a:xfrm>
           <a:prstGeom prst="roundRect">
             <a:avLst>
-              <a:gd name="adj" fmla="val 9091"/>
+              <a:gd name="adj" fmla="val 8696"/>
             </a:avLst>
           </a:prstGeom>
           <a:solidFill>
@@ -10298,8 +10302,8 @@
         </p:nvSpPr>
         <p:spPr>
           <a:xfrm>
-            <a:off x="7799832" y="1472184"/>
-            <a:ext cx="3145536" cy="256032"/>
+            <a:off x="7708392" y="1453896"/>
+            <a:ext cx="3282696" cy="228600"/>
           </a:xfrm>
           <a:prstGeom prst="rect">
             <a:avLst/>
@@ -10315,7 +10319,7 @@
               <a:buNone/>
             </a:pPr>
             <a:r>
-              <a:rPr lang="en-US" sz="1300" b="1" dirty="0">
+              <a:rPr lang="en-US" sz="1220" b="1" dirty="0">
                 <a:solidFill>
                   <a:srgbClr val="0068B7"/>
                 </a:solidFill>
@@ -10325,7 +10329,7 @@
               </a:rPr>
               <a:t>Core concept</a:t>
             </a:r>
-            <a:endParaRPr lang="en-US" sz="1300" dirty="0"/>
+            <a:endParaRPr lang="en-US" sz="1220" dirty="0"/>
           </a:p>
         </p:txBody>
       </p:sp>
@@ -10337,8 +10341,8 @@
         </p:nvSpPr>
         <p:spPr>
           <a:xfrm>
-            <a:off x="7799832" y="1801368"/>
-            <a:ext cx="3145536" cy="640080"/>
+            <a:off x="7708392" y="1764792"/>
+            <a:ext cx="3282696" cy="749808"/>
           </a:xfrm>
           <a:prstGeom prst="rect">
             <a:avLst/>
@@ -10356,7 +10360,7 @@
               <a:buNone/>
             </a:pPr>
             <a:r>
-              <a:rPr lang="en-US" sz="1320" dirty="0">
+              <a:rPr lang="en-US" sz="1220" dirty="0">
                 <a:solidFill>
                   <a:srgbClr val="17364A"/>
                 </a:solidFill>
@@ -10366,7 +10370,7 @@
               </a:rPr>
               <a:t>Interoperability checklist</a:t>
             </a:r>
-            <a:endParaRPr lang="en-US" sz="1320" dirty="0"/>
+            <a:endParaRPr lang="en-US" sz="1220" dirty="0"/>
           </a:p>
         </p:txBody>
       </p:sp>
@@ -10378,12 +10382,12 @@
         </p:nvSpPr>
         <p:spPr>
           <a:xfrm>
-            <a:off x="7635240" y="2670048"/>
-            <a:ext cx="3474720" cy="1377086"/>
+            <a:off x="7543800" y="2724912"/>
+            <a:ext cx="3611880" cy="1527048"/>
           </a:xfrm>
           <a:prstGeom prst="roundRect">
             <a:avLst>
-              <a:gd name="adj" fmla="val 7968"/>
+              <a:gd name="adj" fmla="val 7186"/>
             </a:avLst>
           </a:prstGeom>
           <a:solidFill>
@@ -10405,8 +10409,8 @@
         </p:nvSpPr>
         <p:spPr>
           <a:xfrm>
-            <a:off x="7799832" y="2816352"/>
-            <a:ext cx="3145536" cy="256032"/>
+            <a:off x="7708392" y="2852928"/>
+            <a:ext cx="3282696" cy="228600"/>
           </a:xfrm>
           <a:prstGeom prst="rect">
             <a:avLst/>
@@ -10422,7 +10426,7 @@
               <a:buNone/>
             </a:pPr>
             <a:r>
-              <a:rPr lang="en-US" sz="1300" b="1" dirty="0">
+              <a:rPr lang="en-US" sz="1220" b="1" dirty="0">
                 <a:solidFill>
                   <a:srgbClr val="0068B7"/>
                 </a:solidFill>
@@ -10432,7 +10436,7 @@
               </a:rPr>
               <a:t>Concept checkpoints</a:t>
             </a:r>
-            <a:endParaRPr lang="en-US" sz="1300" dirty="0"/>
+            <a:endParaRPr lang="en-US" sz="1220" dirty="0"/>
           </a:p>
         </p:txBody>
       </p:sp>
@@ -10444,8 +10448,8 @@
         </p:nvSpPr>
         <p:spPr>
           <a:xfrm>
-            <a:off x="7818120" y="3182112"/>
-            <a:ext cx="3090672" cy="718718"/>
+            <a:off x="7726680" y="3182112"/>
+            <a:ext cx="3227832" cy="960120"/>
           </a:xfrm>
           <a:prstGeom prst="rect">
             <a:avLst/>
@@ -10463,7 +10467,7 @@
               <a:buNone/>
             </a:pPr>
             <a:r>
-              <a:rPr lang="en-US" sz="1220" dirty="0">
+              <a:rPr lang="en-US" sz="1140" dirty="0">
                 <a:solidFill>
                   <a:srgbClr val="17364A"/>
                 </a:solidFill>
@@ -10473,14 +10477,14 @@
               </a:rPr>
               <a:t>Interoperability checklist</a:t>
             </a:r>
-            <a:endParaRPr lang="en-US" sz="1220" dirty="0"/>
-          </a:p>
-          <a:p>
-            <a:pPr indent="0" marL="0">
-              <a:buNone/>
-            </a:pPr>
-            <a:r>
-              <a:rPr lang="en-US" sz="1220" dirty="0">
+            <a:endParaRPr lang="en-US" sz="1140" dirty="0"/>
+          </a:p>
+          <a:p>
+            <a:pPr indent="0" marL="0">
+              <a:buNone/>
+            </a:pPr>
+            <a:r>
+              <a:rPr lang="en-US" sz="1140" dirty="0">
                 <a:solidFill>
                   <a:srgbClr val="17364A"/>
                 </a:solidFill>
@@ -10490,14 +10494,14 @@
               </a:rPr>
               <a:t>Data exchange diagram</a:t>
             </a:r>
-            <a:endParaRPr lang="en-US" sz="1220" dirty="0"/>
-          </a:p>
-          <a:p>
-            <a:pPr indent="0" marL="0">
-              <a:buNone/>
-            </a:pPr>
-            <a:r>
-              <a:rPr lang="en-US" sz="1220" dirty="0">
+            <a:endParaRPr lang="en-US" sz="1140" dirty="0"/>
+          </a:p>
+          <a:p>
+            <a:pPr indent="0" marL="0">
+              <a:buNone/>
+            </a:pPr>
+            <a:r>
+              <a:rPr lang="en-US" sz="1140" dirty="0">
                 <a:solidFill>
                   <a:srgbClr val="17364A"/>
                 </a:solidFill>
@@ -10507,7 +10511,7 @@
               </a:rPr>
               <a:t>Vendor questions</a:t>
             </a:r>
-            <a:endParaRPr lang="en-US" sz="1220" dirty="0"/>
+            <a:endParaRPr lang="en-US" sz="1140" dirty="0"/>
           </a:p>
         </p:txBody>
       </p:sp>
@@ -10519,12 +10523,12 @@
         </p:nvSpPr>
         <p:spPr>
           <a:xfrm>
-            <a:off x="7635240" y="4184294"/>
-            <a:ext cx="3474720" cy="1466698"/>
+            <a:off x="7543800" y="4389120"/>
+            <a:ext cx="3611880" cy="1261872"/>
           </a:xfrm>
           <a:prstGeom prst="roundRect">
             <a:avLst>
-              <a:gd name="adj" fmla="val 7481"/>
+              <a:gd name="adj" fmla="val 8696"/>
             </a:avLst>
           </a:prstGeom>
           <a:solidFill>
@@ -10546,8 +10550,8 @@
         </p:nvSpPr>
         <p:spPr>
           <a:xfrm>
-            <a:off x="7799832" y="4330598"/>
-            <a:ext cx="3145536" cy="256032"/>
+            <a:off x="7708392" y="4517136"/>
+            <a:ext cx="3282696" cy="228600"/>
           </a:xfrm>
           <a:prstGeom prst="rect">
             <a:avLst/>
@@ -10563,7 +10567,7 @@
               <a:buNone/>
             </a:pPr>
             <a:r>
-              <a:rPr lang="en-US" sz="1300" b="1" dirty="0">
+              <a:rPr lang="en-US" sz="1220" b="1" dirty="0">
                 <a:solidFill>
                   <a:srgbClr val="0068B7"/>
                 </a:solidFill>
@@ -10573,7 +10577,7 @@
               </a:rPr>
               <a:t>Apply it</a:t>
             </a:r>
-            <a:endParaRPr lang="en-US" sz="1300" dirty="0"/>
+            <a:endParaRPr lang="en-US" sz="1220" dirty="0"/>
           </a:p>
         </p:txBody>
       </p:sp>
@@ -10585,8 +10589,8 @@
         </p:nvSpPr>
         <p:spPr>
           <a:xfrm>
-            <a:off x="7799832" y="4659782"/>
-            <a:ext cx="3145536" cy="899770"/>
+            <a:off x="7708392" y="4828032"/>
+            <a:ext cx="3282696" cy="749808"/>
           </a:xfrm>
           <a:prstGeom prst="rect">
             <a:avLst/>
@@ -10604,7 +10608,7 @@
               <a:buNone/>
             </a:pPr>
             <a:r>
-              <a:rPr lang="en-US" sz="1320" dirty="0">
+              <a:rPr lang="en-US" sz="1220" dirty="0">
                 <a:solidFill>
                   <a:srgbClr val="17364A"/>
                 </a:solidFill>
@@ -10612,9 +10616,9 @@
                 <a:ea typeface="Aptos" pitchFamily="34" charset="-122"/>
                 <a:cs typeface="Aptos" pitchFamily="34" charset="-120"/>
               </a:rPr>
-              <a:t>Connect the concept to public health purpose, responsible use, required safeguards, documentation, and the next action a department should take.</a:t>
-            </a:r>
-            <a:endParaRPr lang="en-US" sz="1320" dirty="0"/>
+              <a:t>Connect the concept to public health purpose, responsible use, required.</a:t>
+            </a:r>
+            <a:endParaRPr lang="en-US" sz="1220" dirty="0"/>
           </a:p>
         </p:txBody>
       </p:sp>
@@ -10932,7 +10936,7 @@
                 <a:ea typeface="Aptos" pitchFamily="34" charset="-122"/>
                 <a:cs typeface="Aptos" pitchFamily="34" charset="-120"/>
               </a:rPr>
-              <a:t>• Public health AI depends on the ability of systems to exchange and interpret data.</a:t>
+              <a:t>• Public health AI depends on the ability of systems to exchange and interpret.</a:t>
             </a:r>
             <a:endParaRPr lang="en-US" sz="2100" dirty="0"/>
           </a:p>
@@ -10949,7 +10953,7 @@
                 <a:ea typeface="Aptos" pitchFamily="34" charset="-122"/>
                 <a:cs typeface="Aptos" pitchFamily="34" charset="-120"/>
               </a:rPr>
-              <a:t>• Interoperability is the discipline that makes this exchange possible across EHRs,.</a:t>
+              <a:t>• Interoperability is the discipline that makes this exchange possible across.</a:t>
             </a:r>
             <a:endParaRPr lang="en-US" sz="2100" dirty="0"/>
           </a:p>
@@ -10966,7 +10970,7 @@
                 <a:ea typeface="Aptos" pitchFamily="34" charset="-122"/>
                 <a:cs typeface="Aptos" pitchFamily="34" charset="-120"/>
               </a:rPr>
-              <a:t>• This module introduces the major standards that public health staff encounter, including HL7.</a:t>
+              <a:t>• This module introduces the major standards that public health staff.</a:t>
             </a:r>
             <a:endParaRPr lang="en-US" sz="2100" dirty="0"/>
           </a:p>
@@ -11007,8 +11011,8 @@
         </p:nvSpPr>
         <p:spPr>
           <a:xfrm>
-            <a:off x="8074152" y="1563624"/>
-            <a:ext cx="2825496" cy="256032"/>
+            <a:off x="8074152" y="1545336"/>
+            <a:ext cx="2825496" cy="228600"/>
           </a:xfrm>
           <a:prstGeom prst="rect">
             <a:avLst/>
@@ -11024,7 +11028,7 @@
               <a:buNone/>
             </a:pPr>
             <a:r>
-              <a:rPr lang="en-US" sz="1300" b="1" dirty="0">
+              <a:rPr lang="en-US" sz="1220" b="1" dirty="0">
                 <a:solidFill>
                   <a:srgbClr val="0068B7"/>
                 </a:solidFill>
@@ -11034,7 +11038,7 @@
               </a:rPr>
               <a:t>Module details</a:t>
             </a:r>
-            <a:endParaRPr lang="en-US" sz="1300" dirty="0"/>
+            <a:endParaRPr lang="en-US" sz="1220" dirty="0"/>
           </a:p>
         </p:txBody>
       </p:sp>
@@ -11046,8 +11050,8 @@
         </p:nvSpPr>
         <p:spPr>
           <a:xfrm>
-            <a:off x="8074152" y="1892808"/>
-            <a:ext cx="2825496" cy="1353312"/>
+            <a:off x="8074152" y="1856232"/>
+            <a:ext cx="2825496" cy="1408176"/>
           </a:xfrm>
           <a:prstGeom prst="rect">
             <a:avLst/>
@@ -11065,7 +11069,7 @@
               <a:buNone/>
             </a:pPr>
             <a:r>
-              <a:rPr lang="en-US" sz="1320" dirty="0">
+              <a:rPr lang="en-US" sz="1220" dirty="0">
                 <a:solidFill>
                   <a:srgbClr val="17364A"/>
                 </a:solidFill>
@@ -11073,9 +11077,9 @@
                 <a:ea typeface="Aptos" pitchFamily="34" charset="-122"/>
                 <a:cs typeface="Aptos" pitchFamily="34" charset="-120"/>
               </a:rPr>
-              <a:t>Level: applied/foundational Primary track: Technical Architecture Track Appears in tracks: technical-architecture</a:t>
-            </a:r>
-            <a:endParaRPr lang="en-US" sz="1320" dirty="0"/>
+              <a:t>Level: applied/foundational Primary track: Technical Architecture Track Appears.</a:t>
+            </a:r>
+            <a:endParaRPr lang="en-US" sz="1220" dirty="0"/>
           </a:p>
         </p:txBody>
       </p:sp>
@@ -11114,8 +11118,8 @@
         </p:nvSpPr>
         <p:spPr>
           <a:xfrm>
-            <a:off x="8074152" y="3822192"/>
-            <a:ext cx="2825496" cy="256032"/>
+            <a:off x="8074152" y="3803904"/>
+            <a:ext cx="2825496" cy="228600"/>
           </a:xfrm>
           <a:prstGeom prst="rect">
             <a:avLst/>
@@ -11131,7 +11135,7 @@
               <a:buNone/>
             </a:pPr>
             <a:r>
-              <a:rPr lang="en-US" sz="1300" b="1" dirty="0">
+              <a:rPr lang="en-US" sz="1220" b="1" dirty="0">
                 <a:solidFill>
                   <a:srgbClr val="0068B7"/>
                 </a:solidFill>
@@ -11141,7 +11145,7 @@
               </a:rPr>
               <a:t>Learning sequence</a:t>
             </a:r>
-            <a:endParaRPr lang="en-US" sz="1300" dirty="0"/>
+            <a:endParaRPr lang="en-US" sz="1220" dirty="0"/>
           </a:p>
         </p:txBody>
       </p:sp>
@@ -11153,8 +11157,8 @@
         </p:nvSpPr>
         <p:spPr>
           <a:xfrm>
-            <a:off x="8092440" y="4187952"/>
-            <a:ext cx="2770632" cy="1033272"/>
+            <a:off x="8092440" y="4133088"/>
+            <a:ext cx="2770632" cy="1124712"/>
           </a:xfrm>
           <a:prstGeom prst="rect">
             <a:avLst/>
@@ -11172,7 +11176,7 @@
               <a:buNone/>
             </a:pPr>
             <a:r>
-              <a:rPr lang="en-US" sz="1220" dirty="0">
+              <a:rPr lang="en-US" sz="1140" dirty="0">
                 <a:solidFill>
                   <a:srgbClr val="17364A"/>
                 </a:solidFill>
@@ -11182,14 +11186,14 @@
               </a:rPr>
               <a:t>Read the module for shared vocabulary and context.</a:t>
             </a:r>
-            <a:endParaRPr lang="en-US" sz="1220" dirty="0"/>
-          </a:p>
-          <a:p>
-            <a:pPr indent="0" marL="0">
-              <a:buNone/>
-            </a:pPr>
-            <a:r>
-              <a:rPr lang="en-US" sz="1220" dirty="0">
+            <a:endParaRPr lang="en-US" sz="1140" dirty="0"/>
+          </a:p>
+          <a:p>
+            <a:pPr indent="0" marL="0">
+              <a:buNone/>
+            </a:pPr>
+            <a:r>
+              <a:rPr lang="en-US" sz="1140" dirty="0">
                 <a:solidFill>
                   <a:srgbClr val="17364A"/>
                 </a:solidFill>
@@ -11197,16 +11201,16 @@
                 <a:ea typeface="Aptos" pitchFamily="34" charset="-122"/>
                 <a:cs typeface="Aptos" pitchFamily="34" charset="-120"/>
               </a:rPr>
-              <a:t>Complete the practical exercise to apply the concept.</a:t>
-            </a:r>
-            <a:endParaRPr lang="en-US" sz="1220" dirty="0"/>
-          </a:p>
-          <a:p>
-            <a:pPr indent="0" marL="0">
-              <a:buNone/>
-            </a:pPr>
-            <a:r>
-              <a:rPr lang="en-US" sz="1220" dirty="0">
+              <a:t>Complete the practical exercise to apply the.</a:t>
+            </a:r>
+            <a:endParaRPr lang="en-US" sz="1140" dirty="0"/>
+          </a:p>
+          <a:p>
+            <a:pPr indent="0" marL="0">
+              <a:buNone/>
+            </a:pPr>
+            <a:r>
+              <a:rPr lang="en-US" sz="1140" dirty="0">
                 <a:solidFill>
                   <a:srgbClr val="17364A"/>
                 </a:solidFill>
@@ -11216,7 +11220,7 @@
               </a:rPr>
               <a:t>Use the notes and references for deeper review.</a:t>
             </a:r>
-            <a:endParaRPr lang="en-US" sz="1220" dirty="0"/>
+            <a:endParaRPr lang="en-US" sz="1140" dirty="0"/>
           </a:p>
         </p:txBody>
       </p:sp>
@@ -11507,8 +11511,8 @@
         </p:nvSpPr>
         <p:spPr>
           <a:xfrm>
-            <a:off x="868680" y="1508760"/>
-            <a:ext cx="6309360" cy="4160520"/>
+            <a:off x="822960" y="1463040"/>
+            <a:ext cx="6565392" cy="4343400"/>
           </a:xfrm>
           <a:prstGeom prst="rect">
             <a:avLst/>
@@ -11526,7 +11530,7 @@
               <a:buNone/>
             </a:pPr>
             <a:r>
-              <a:rPr lang="en-US" sz="2100" dirty="0">
+              <a:rPr lang="en-US" sz="1920" dirty="0">
                 <a:solidFill>
                   <a:srgbClr val="003A63"/>
                 </a:solidFill>
@@ -11536,7 +11540,7 @@
               </a:rPr>
               <a:t>• Test scenario and acceptance criteria</a:t>
             </a:r>
-            <a:endParaRPr lang="en-US" sz="2100" dirty="0"/>
+            <a:endParaRPr lang="en-US" sz="1920" dirty="0"/>
           </a:p>
         </p:txBody>
       </p:sp>
@@ -11548,12 +11552,12 @@
         </p:nvSpPr>
         <p:spPr>
           <a:xfrm>
-            <a:off x="7635240" y="1325880"/>
-            <a:ext cx="3474720" cy="1207008"/>
+            <a:off x="7543800" y="1325880"/>
+            <a:ext cx="3611880" cy="1261872"/>
           </a:xfrm>
           <a:prstGeom prst="roundRect">
             <a:avLst>
-              <a:gd name="adj" fmla="val 9091"/>
+              <a:gd name="adj" fmla="val 8696"/>
             </a:avLst>
           </a:prstGeom>
           <a:solidFill>
@@ -11575,8 +11579,8 @@
         </p:nvSpPr>
         <p:spPr>
           <a:xfrm>
-            <a:off x="7799832" y="1472184"/>
-            <a:ext cx="3145536" cy="256032"/>
+            <a:off x="7708392" y="1453896"/>
+            <a:ext cx="3282696" cy="228600"/>
           </a:xfrm>
           <a:prstGeom prst="rect">
             <a:avLst/>
@@ -11592,7 +11596,7 @@
               <a:buNone/>
             </a:pPr>
             <a:r>
-              <a:rPr lang="en-US" sz="1300" b="1" dirty="0">
+              <a:rPr lang="en-US" sz="1220" b="1" dirty="0">
                 <a:solidFill>
                   <a:srgbClr val="0068B7"/>
                 </a:solidFill>
@@ -11602,7 +11606,7 @@
               </a:rPr>
               <a:t>Core concept</a:t>
             </a:r>
-            <a:endParaRPr lang="en-US" sz="1300" dirty="0"/>
+            <a:endParaRPr lang="en-US" sz="1220" dirty="0"/>
           </a:p>
         </p:txBody>
       </p:sp>
@@ -11614,8 +11618,8 @@
         </p:nvSpPr>
         <p:spPr>
           <a:xfrm>
-            <a:off x="7799832" y="1801368"/>
-            <a:ext cx="3145536" cy="640080"/>
+            <a:off x="7708392" y="1764792"/>
+            <a:ext cx="3282696" cy="749808"/>
           </a:xfrm>
           <a:prstGeom prst="rect">
             <a:avLst/>
@@ -11633,7 +11637,7 @@
               <a:buNone/>
             </a:pPr>
             <a:r>
-              <a:rPr lang="en-US" sz="1320" dirty="0">
+              <a:rPr lang="en-US" sz="1220" dirty="0">
                 <a:solidFill>
                   <a:srgbClr val="17364A"/>
                 </a:solidFill>
@@ -11643,7 +11647,7 @@
               </a:rPr>
               <a:t>Test scenario and acceptance criteria</a:t>
             </a:r>
-            <a:endParaRPr lang="en-US" sz="1320" dirty="0"/>
+            <a:endParaRPr lang="en-US" sz="1220" dirty="0"/>
           </a:p>
         </p:txBody>
       </p:sp>
@@ -11655,12 +11659,12 @@
         </p:nvSpPr>
         <p:spPr>
           <a:xfrm>
-            <a:off x="7635240" y="2670048"/>
-            <a:ext cx="3474720" cy="1377086"/>
+            <a:off x="7543800" y="2724912"/>
+            <a:ext cx="3611880" cy="1527048"/>
           </a:xfrm>
           <a:prstGeom prst="roundRect">
             <a:avLst>
-              <a:gd name="adj" fmla="val 7968"/>
+              <a:gd name="adj" fmla="val 7186"/>
             </a:avLst>
           </a:prstGeom>
           <a:solidFill>
@@ -11682,8 +11686,8 @@
         </p:nvSpPr>
         <p:spPr>
           <a:xfrm>
-            <a:off x="7799832" y="2816352"/>
-            <a:ext cx="3145536" cy="256032"/>
+            <a:off x="7708392" y="2852928"/>
+            <a:ext cx="3282696" cy="228600"/>
           </a:xfrm>
           <a:prstGeom prst="rect">
             <a:avLst/>
@@ -11699,7 +11703,7 @@
               <a:buNone/>
             </a:pPr>
             <a:r>
-              <a:rPr lang="en-US" sz="1300" b="1" dirty="0">
+              <a:rPr lang="en-US" sz="1220" b="1" dirty="0">
                 <a:solidFill>
                   <a:srgbClr val="0068B7"/>
                 </a:solidFill>
@@ -11709,7 +11713,7 @@
               </a:rPr>
               <a:t>Concept checkpoints</a:t>
             </a:r>
-            <a:endParaRPr lang="en-US" sz="1300" dirty="0"/>
+            <a:endParaRPr lang="en-US" sz="1220" dirty="0"/>
           </a:p>
         </p:txBody>
       </p:sp>
@@ -11721,8 +11725,8 @@
         </p:nvSpPr>
         <p:spPr>
           <a:xfrm>
-            <a:off x="7818120" y="3182112"/>
-            <a:ext cx="3090672" cy="718718"/>
+            <a:off x="7726680" y="3182112"/>
+            <a:ext cx="3227832" cy="960120"/>
           </a:xfrm>
           <a:prstGeom prst="rect">
             <a:avLst/>
@@ -11740,7 +11744,7 @@
               <a:buNone/>
             </a:pPr>
             <a:r>
-              <a:rPr lang="en-US" sz="1220" dirty="0">
+              <a:rPr lang="en-US" sz="1140" dirty="0">
                 <a:solidFill>
                   <a:srgbClr val="17364A"/>
                 </a:solidFill>
@@ -11750,7 +11754,7 @@
               </a:rPr>
               <a:t>Test scenario and acceptance criteria</a:t>
             </a:r>
-            <a:endParaRPr lang="en-US" sz="1220" dirty="0"/>
+            <a:endParaRPr lang="en-US" sz="1140" dirty="0"/>
           </a:p>
         </p:txBody>
       </p:sp>
@@ -11762,12 +11766,12 @@
         </p:nvSpPr>
         <p:spPr>
           <a:xfrm>
-            <a:off x="7635240" y="4184294"/>
-            <a:ext cx="3474720" cy="1466698"/>
+            <a:off x="7543800" y="4389120"/>
+            <a:ext cx="3611880" cy="1261872"/>
           </a:xfrm>
           <a:prstGeom prst="roundRect">
             <a:avLst>
-              <a:gd name="adj" fmla="val 7481"/>
+              <a:gd name="adj" fmla="val 8696"/>
             </a:avLst>
           </a:prstGeom>
           <a:solidFill>
@@ -11789,8 +11793,8 @@
         </p:nvSpPr>
         <p:spPr>
           <a:xfrm>
-            <a:off x="7799832" y="4330598"/>
-            <a:ext cx="3145536" cy="256032"/>
+            <a:off x="7708392" y="4517136"/>
+            <a:ext cx="3282696" cy="228600"/>
           </a:xfrm>
           <a:prstGeom prst="rect">
             <a:avLst/>
@@ -11806,7 +11810,7 @@
               <a:buNone/>
             </a:pPr>
             <a:r>
-              <a:rPr lang="en-US" sz="1300" b="1" dirty="0">
+              <a:rPr lang="en-US" sz="1220" b="1" dirty="0">
                 <a:solidFill>
                   <a:srgbClr val="0068B7"/>
                 </a:solidFill>
@@ -11816,7 +11820,7 @@
               </a:rPr>
               <a:t>Apply it</a:t>
             </a:r>
-            <a:endParaRPr lang="en-US" sz="1300" dirty="0"/>
+            <a:endParaRPr lang="en-US" sz="1220" dirty="0"/>
           </a:p>
         </p:txBody>
       </p:sp>
@@ -11828,8 +11832,8 @@
         </p:nvSpPr>
         <p:spPr>
           <a:xfrm>
-            <a:off x="7799832" y="4659782"/>
-            <a:ext cx="3145536" cy="899770"/>
+            <a:off x="7708392" y="4828032"/>
+            <a:ext cx="3282696" cy="749808"/>
           </a:xfrm>
           <a:prstGeom prst="rect">
             <a:avLst/>
@@ -11847,7 +11851,7 @@
               <a:buNone/>
             </a:pPr>
             <a:r>
-              <a:rPr lang="en-US" sz="1320" dirty="0">
+              <a:rPr lang="en-US" sz="1220" dirty="0">
                 <a:solidFill>
                   <a:srgbClr val="17364A"/>
                 </a:solidFill>
@@ -11855,9 +11859,9 @@
                 <a:ea typeface="Aptos" pitchFamily="34" charset="-122"/>
                 <a:cs typeface="Aptos" pitchFamily="34" charset="-120"/>
               </a:rPr>
-              <a:t>Connect the concept to public health purpose, responsible use, required safeguards, documentation, and the next action a department should take.</a:t>
-            </a:r>
-            <a:endParaRPr lang="en-US" sz="1320" dirty="0"/>
+              <a:t>Connect the concept to public health purpose, responsible use, required.</a:t>
+            </a:r>
+            <a:endParaRPr lang="en-US" sz="1220" dirty="0"/>
           </a:p>
         </p:txBody>
       </p:sp>
@@ -12148,8 +12152,8 @@
         </p:nvSpPr>
         <p:spPr>
           <a:xfrm>
-            <a:off x="868680" y="1508760"/>
-            <a:ext cx="6309360" cy="4160520"/>
+            <a:off x="822960" y="1463040"/>
+            <a:ext cx="6565392" cy="4343400"/>
           </a:xfrm>
           <a:prstGeom prst="rect">
             <a:avLst/>
@@ -12167,7 +12171,7 @@
               <a:buNone/>
             </a:pPr>
             <a:r>
-              <a:rPr lang="en-US" sz="2100" dirty="0">
+              <a:rPr lang="en-US" sz="1920" dirty="0">
                 <a:solidFill>
                   <a:srgbClr val="003A63"/>
                 </a:solidFill>
@@ -12177,14 +12181,14 @@
               </a:rPr>
               <a:t>• Interoperability checklist</a:t>
             </a:r>
-            <a:endParaRPr lang="en-US" sz="2100" dirty="0"/>
-          </a:p>
-          <a:p>
-            <a:pPr indent="0" marL="0">
-              <a:buNone/>
-            </a:pPr>
-            <a:r>
-              <a:rPr lang="en-US" sz="2100" dirty="0">
+            <a:endParaRPr lang="en-US" sz="1920" dirty="0"/>
+          </a:p>
+          <a:p>
+            <a:pPr indent="0" marL="0">
+              <a:buNone/>
+            </a:pPr>
+            <a:r>
+              <a:rPr lang="en-US" sz="1920" dirty="0">
                 <a:solidFill>
                   <a:srgbClr val="003A63"/>
                 </a:solidFill>
@@ -12194,14 +12198,14 @@
               </a:rPr>
               <a:t>• Data exchange diagram</a:t>
             </a:r>
-            <a:endParaRPr lang="en-US" sz="2100" dirty="0"/>
-          </a:p>
-          <a:p>
-            <a:pPr indent="0" marL="0">
-              <a:buNone/>
-            </a:pPr>
-            <a:r>
-              <a:rPr lang="en-US" sz="2100" dirty="0">
+            <a:endParaRPr lang="en-US" sz="1920" dirty="0"/>
+          </a:p>
+          <a:p>
+            <a:pPr indent="0" marL="0">
+              <a:buNone/>
+            </a:pPr>
+            <a:r>
+              <a:rPr lang="en-US" sz="1920" dirty="0">
                 <a:solidFill>
                   <a:srgbClr val="003A63"/>
                 </a:solidFill>
@@ -12211,7 +12215,7 @@
               </a:rPr>
               <a:t>• Vendor questions</a:t>
             </a:r>
-            <a:endParaRPr lang="en-US" sz="2100" dirty="0"/>
+            <a:endParaRPr lang="en-US" sz="1920" dirty="0"/>
           </a:p>
         </p:txBody>
       </p:sp>
@@ -12223,12 +12227,12 @@
         </p:nvSpPr>
         <p:spPr>
           <a:xfrm>
-            <a:off x="7635240" y="1325880"/>
-            <a:ext cx="3474720" cy="1207008"/>
+            <a:off x="7543800" y="1325880"/>
+            <a:ext cx="3611880" cy="1261872"/>
           </a:xfrm>
           <a:prstGeom prst="roundRect">
             <a:avLst>
-              <a:gd name="adj" fmla="val 9091"/>
+              <a:gd name="adj" fmla="val 8696"/>
             </a:avLst>
           </a:prstGeom>
           <a:solidFill>
@@ -12250,8 +12254,8 @@
         </p:nvSpPr>
         <p:spPr>
           <a:xfrm>
-            <a:off x="7799832" y="1472184"/>
-            <a:ext cx="3145536" cy="256032"/>
+            <a:off x="7708392" y="1453896"/>
+            <a:ext cx="3282696" cy="228600"/>
           </a:xfrm>
           <a:prstGeom prst="rect">
             <a:avLst/>
@@ -12267,7 +12271,7 @@
               <a:buNone/>
             </a:pPr>
             <a:r>
-              <a:rPr lang="en-US" sz="1300" b="1" dirty="0">
+              <a:rPr lang="en-US" sz="1220" b="1" dirty="0">
                 <a:solidFill>
                   <a:srgbClr val="0068B7"/>
                 </a:solidFill>
@@ -12277,7 +12281,7 @@
               </a:rPr>
               <a:t>Practice focus</a:t>
             </a:r>
-            <a:endParaRPr lang="en-US" sz="1300" dirty="0"/>
+            <a:endParaRPr lang="en-US" sz="1220" dirty="0"/>
           </a:p>
         </p:txBody>
       </p:sp>
@@ -12289,8 +12293,8 @@
         </p:nvSpPr>
         <p:spPr>
           <a:xfrm>
-            <a:off x="7799832" y="1801368"/>
-            <a:ext cx="3145536" cy="640080"/>
+            <a:off x="7708392" y="1764792"/>
+            <a:ext cx="3282696" cy="749808"/>
           </a:xfrm>
           <a:prstGeom prst="rect">
             <a:avLst/>
@@ -12308,7 +12312,7 @@
               <a:buNone/>
             </a:pPr>
             <a:r>
-              <a:rPr lang="en-US" sz="1320" dirty="0">
+              <a:rPr lang="en-US" sz="1220" dirty="0">
                 <a:solidFill>
                   <a:srgbClr val="17364A"/>
                 </a:solidFill>
@@ -12318,7 +12322,7 @@
               </a:rPr>
               <a:t>Interoperability checklist</a:t>
             </a:r>
-            <a:endParaRPr lang="en-US" sz="1320" dirty="0"/>
+            <a:endParaRPr lang="en-US" sz="1220" dirty="0"/>
           </a:p>
         </p:txBody>
       </p:sp>
@@ -12330,12 +12334,12 @@
         </p:nvSpPr>
         <p:spPr>
           <a:xfrm>
-            <a:off x="7635240" y="2670048"/>
-            <a:ext cx="3474720" cy="1377086"/>
+            <a:off x="7543800" y="2724912"/>
+            <a:ext cx="3611880" cy="1527048"/>
           </a:xfrm>
           <a:prstGeom prst="roundRect">
             <a:avLst>
-              <a:gd name="adj" fmla="val 7968"/>
+              <a:gd name="adj" fmla="val 7186"/>
             </a:avLst>
           </a:prstGeom>
           <a:solidFill>
@@ -12357,8 +12361,8 @@
         </p:nvSpPr>
         <p:spPr>
           <a:xfrm>
-            <a:off x="7799832" y="2816352"/>
-            <a:ext cx="3145536" cy="256032"/>
+            <a:off x="7708392" y="2852928"/>
+            <a:ext cx="3282696" cy="228600"/>
           </a:xfrm>
           <a:prstGeom prst="rect">
             <a:avLst/>
@@ -12374,7 +12378,7 @@
               <a:buNone/>
             </a:pPr>
             <a:r>
-              <a:rPr lang="en-US" sz="1300" b="1" dirty="0">
+              <a:rPr lang="en-US" sz="1220" b="1" dirty="0">
                 <a:solidFill>
                   <a:srgbClr val="0068B7"/>
                 </a:solidFill>
@@ -12384,7 +12388,7 @@
               </a:rPr>
               <a:t>Concept checkpoints</a:t>
             </a:r>
-            <a:endParaRPr lang="en-US" sz="1300" dirty="0"/>
+            <a:endParaRPr lang="en-US" sz="1220" dirty="0"/>
           </a:p>
         </p:txBody>
       </p:sp>
@@ -12396,8 +12400,8 @@
         </p:nvSpPr>
         <p:spPr>
           <a:xfrm>
-            <a:off x="7818120" y="3182112"/>
-            <a:ext cx="3090672" cy="718718"/>
+            <a:off x="7726680" y="3182112"/>
+            <a:ext cx="3227832" cy="960120"/>
           </a:xfrm>
           <a:prstGeom prst="rect">
             <a:avLst/>
@@ -12415,7 +12419,7 @@
               <a:buNone/>
             </a:pPr>
             <a:r>
-              <a:rPr lang="en-US" sz="1220" dirty="0">
+              <a:rPr lang="en-US" sz="1140" dirty="0">
                 <a:solidFill>
                   <a:srgbClr val="17364A"/>
                 </a:solidFill>
@@ -12425,14 +12429,14 @@
               </a:rPr>
               <a:t>Interoperability checklist</a:t>
             </a:r>
-            <a:endParaRPr lang="en-US" sz="1220" dirty="0"/>
-          </a:p>
-          <a:p>
-            <a:pPr indent="0" marL="0">
-              <a:buNone/>
-            </a:pPr>
-            <a:r>
-              <a:rPr lang="en-US" sz="1220" dirty="0">
+            <a:endParaRPr lang="en-US" sz="1140" dirty="0"/>
+          </a:p>
+          <a:p>
+            <a:pPr indent="0" marL="0">
+              <a:buNone/>
+            </a:pPr>
+            <a:r>
+              <a:rPr lang="en-US" sz="1140" dirty="0">
                 <a:solidFill>
                   <a:srgbClr val="17364A"/>
                 </a:solidFill>
@@ -12442,14 +12446,14 @@
               </a:rPr>
               <a:t>Data exchange diagram</a:t>
             </a:r>
-            <a:endParaRPr lang="en-US" sz="1220" dirty="0"/>
-          </a:p>
-          <a:p>
-            <a:pPr indent="0" marL="0">
-              <a:buNone/>
-            </a:pPr>
-            <a:r>
-              <a:rPr lang="en-US" sz="1220" dirty="0">
+            <a:endParaRPr lang="en-US" sz="1140" dirty="0"/>
+          </a:p>
+          <a:p>
+            <a:pPr indent="0" marL="0">
+              <a:buNone/>
+            </a:pPr>
+            <a:r>
+              <a:rPr lang="en-US" sz="1140" dirty="0">
                 <a:solidFill>
                   <a:srgbClr val="17364A"/>
                 </a:solidFill>
@@ -12459,7 +12463,7 @@
               </a:rPr>
               <a:t>Vendor questions</a:t>
             </a:r>
-            <a:endParaRPr lang="en-US" sz="1220" dirty="0"/>
+            <a:endParaRPr lang="en-US" sz="1140" dirty="0"/>
           </a:p>
         </p:txBody>
       </p:sp>
@@ -12471,12 +12475,12 @@
         </p:nvSpPr>
         <p:spPr>
           <a:xfrm>
-            <a:off x="7635240" y="4184294"/>
-            <a:ext cx="3474720" cy="1466698"/>
+            <a:off x="7543800" y="4389120"/>
+            <a:ext cx="3611880" cy="1261872"/>
           </a:xfrm>
           <a:prstGeom prst="roundRect">
             <a:avLst>
-              <a:gd name="adj" fmla="val 7481"/>
+              <a:gd name="adj" fmla="val 8696"/>
             </a:avLst>
           </a:prstGeom>
           <a:solidFill>
@@ -12498,8 +12502,8 @@
         </p:nvSpPr>
         <p:spPr>
           <a:xfrm>
-            <a:off x="7799832" y="4330598"/>
-            <a:ext cx="3145536" cy="256032"/>
+            <a:off x="7708392" y="4517136"/>
+            <a:ext cx="3282696" cy="228600"/>
           </a:xfrm>
           <a:prstGeom prst="rect">
             <a:avLst/>
@@ -12515,7 +12519,7 @@
               <a:buNone/>
             </a:pPr>
             <a:r>
-              <a:rPr lang="en-US" sz="1300" b="1" dirty="0">
+              <a:rPr lang="en-US" sz="1220" b="1" dirty="0">
                 <a:solidFill>
                   <a:srgbClr val="0068B7"/>
                 </a:solidFill>
@@ -12525,7 +12529,7 @@
               </a:rPr>
               <a:t>What to produce</a:t>
             </a:r>
-            <a:endParaRPr lang="en-US" sz="1300" dirty="0"/>
+            <a:endParaRPr lang="en-US" sz="1220" dirty="0"/>
           </a:p>
         </p:txBody>
       </p:sp>
@@ -12537,8 +12541,8 @@
         </p:nvSpPr>
         <p:spPr>
           <a:xfrm>
-            <a:off x="7799832" y="4659782"/>
-            <a:ext cx="3145536" cy="899770"/>
+            <a:off x="7708392" y="4828032"/>
+            <a:ext cx="3282696" cy="749808"/>
           </a:xfrm>
           <a:prstGeom prst="rect">
             <a:avLst/>
@@ -12556,7 +12560,7 @@
               <a:buNone/>
             </a:pPr>
             <a:r>
-              <a:rPr lang="en-US" sz="1320" dirty="0">
+              <a:rPr lang="en-US" sz="1220" dirty="0">
                 <a:solidFill>
                   <a:srgbClr val="17364A"/>
                 </a:solidFill>
@@ -12564,9 +12568,9 @@
                 <a:ea typeface="Aptos" pitchFamily="34" charset="-122"/>
                 <a:cs typeface="Aptos" pitchFamily="34" charset="-120"/>
               </a:rPr>
-              <a:t>Use the assignment to test whether you can explain the concept, apply it to a realistic public health situation, and identify what would need review before the work moves forward.</a:t>
-            </a:r>
-            <a:endParaRPr lang="en-US" sz="1320" dirty="0"/>
+              <a:t>Use the assignment to test whether you can explain the concept, apply it to a.</a:t>
+            </a:r>
+            <a:endParaRPr lang="en-US" sz="1220" dirty="0"/>
           </a:p>
         </p:txBody>
       </p:sp>
@@ -12857,8 +12861,8 @@
         </p:nvSpPr>
         <p:spPr>
           <a:xfrm>
-            <a:off x="868680" y="1508760"/>
-            <a:ext cx="6309360" cy="4160520"/>
+            <a:off x="822960" y="1463040"/>
+            <a:ext cx="6565392" cy="4343400"/>
           </a:xfrm>
           <a:prstGeom prst="rect">
             <a:avLst/>
@@ -12876,7 +12880,7 @@
               <a:buNone/>
             </a:pPr>
             <a:r>
-              <a:rPr lang="en-US" sz="2100" dirty="0">
+              <a:rPr lang="en-US" sz="1920" dirty="0">
                 <a:solidFill>
                   <a:srgbClr val="003A63"/>
                 </a:solidFill>
@@ -12886,14 +12890,14 @@
               </a:rPr>
               <a:t>• 1. Why does interoperability matter for AI-supported public health workflows?</a:t>
             </a:r>
-            <a:endParaRPr lang="en-US" sz="2100" dirty="0"/>
-          </a:p>
-          <a:p>
-            <a:pPr indent="0" marL="0">
-              <a:buNone/>
-            </a:pPr>
-            <a:r>
-              <a:rPr lang="en-US" sz="2100" dirty="0">
+            <a:endParaRPr lang="en-US" sz="1920" dirty="0"/>
+          </a:p>
+          <a:p>
+            <a:pPr indent="0" marL="0">
+              <a:buNone/>
+            </a:pPr>
+            <a:r>
+              <a:rPr lang="en-US" sz="1920" dirty="0">
                 <a:solidFill>
                   <a:srgbClr val="003A63"/>
                 </a:solidFill>
@@ -12903,14 +12907,14 @@
               </a:rPr>
               <a:t>• 2. What is FHIR commonly used for?</a:t>
             </a:r>
-            <a:endParaRPr lang="en-US" sz="2100" dirty="0"/>
-          </a:p>
-          <a:p>
-            <a:pPr indent="0" marL="0">
-              <a:buNone/>
-            </a:pPr>
-            <a:r>
-              <a:rPr lang="en-US" sz="2100" dirty="0">
+            <a:endParaRPr lang="en-US" sz="1920" dirty="0"/>
+          </a:p>
+          <a:p>
+            <a:pPr indent="0" marL="0">
+              <a:buNone/>
+            </a:pPr>
+            <a:r>
+              <a:rPr lang="en-US" sz="1920" dirty="0">
                 <a:solidFill>
                   <a:srgbClr val="003A63"/>
                 </a:solidFill>
@@ -12920,7 +12924,7 @@
               </a:rPr>
               <a:t>• 3. What is an implementation guide?</a:t>
             </a:r>
-            <a:endParaRPr lang="en-US" sz="2100" dirty="0"/>
+            <a:endParaRPr lang="en-US" sz="1920" dirty="0"/>
           </a:p>
         </p:txBody>
       </p:sp>
@@ -12932,12 +12936,12 @@
         </p:nvSpPr>
         <p:spPr>
           <a:xfrm>
-            <a:off x="7635240" y="1325880"/>
-            <a:ext cx="3474720" cy="1207008"/>
+            <a:off x="7543800" y="1325880"/>
+            <a:ext cx="3611880" cy="1261872"/>
           </a:xfrm>
           <a:prstGeom prst="roundRect">
             <a:avLst>
-              <a:gd name="adj" fmla="val 9091"/>
+              <a:gd name="adj" fmla="val 8696"/>
             </a:avLst>
           </a:prstGeom>
           <a:solidFill>
@@ -12959,8 +12963,8 @@
         </p:nvSpPr>
         <p:spPr>
           <a:xfrm>
-            <a:off x="7799832" y="1472184"/>
-            <a:ext cx="3145536" cy="256032"/>
+            <a:off x="7708392" y="1453896"/>
+            <a:ext cx="3282696" cy="228600"/>
           </a:xfrm>
           <a:prstGeom prst="rect">
             <a:avLst/>
@@ -12976,7 +12980,7 @@
               <a:buNone/>
             </a:pPr>
             <a:r>
-              <a:rPr lang="en-US" sz="1300" b="1" dirty="0">
+              <a:rPr lang="en-US" sz="1220" b="1" dirty="0">
                 <a:solidFill>
                   <a:srgbClr val="0068B7"/>
                 </a:solidFill>
@@ -12986,7 +12990,7 @@
               </a:rPr>
               <a:t>Practice focus</a:t>
             </a:r>
-            <a:endParaRPr lang="en-US" sz="1300" dirty="0"/>
+            <a:endParaRPr lang="en-US" sz="1220" dirty="0"/>
           </a:p>
         </p:txBody>
       </p:sp>
@@ -12998,8 +13002,8 @@
         </p:nvSpPr>
         <p:spPr>
           <a:xfrm>
-            <a:off x="7799832" y="1801368"/>
-            <a:ext cx="3145536" cy="640080"/>
+            <a:off x="7708392" y="1764792"/>
+            <a:ext cx="3282696" cy="749808"/>
           </a:xfrm>
           <a:prstGeom prst="rect">
             <a:avLst/>
@@ -13017,7 +13021,7 @@
               <a:buNone/>
             </a:pPr>
             <a:r>
-              <a:rPr lang="en-US" sz="1320" dirty="0">
+              <a:rPr lang="en-US" sz="1220" dirty="0">
                 <a:solidFill>
                   <a:srgbClr val="17364A"/>
                 </a:solidFill>
@@ -13027,7 +13031,7 @@
               </a:rPr>
               <a:t>1. Why does interoperability matter for AI-supported public health workflows?</a:t>
             </a:r>
-            <a:endParaRPr lang="en-US" sz="1320" dirty="0"/>
+            <a:endParaRPr lang="en-US" sz="1220" dirty="0"/>
           </a:p>
         </p:txBody>
       </p:sp>
@@ -13039,12 +13043,12 @@
         </p:nvSpPr>
         <p:spPr>
           <a:xfrm>
-            <a:off x="7635240" y="2670048"/>
-            <a:ext cx="3474720" cy="1377086"/>
+            <a:off x="7543800" y="2724912"/>
+            <a:ext cx="3611880" cy="1527048"/>
           </a:xfrm>
           <a:prstGeom prst="roundRect">
             <a:avLst>
-              <a:gd name="adj" fmla="val 7968"/>
+              <a:gd name="adj" fmla="val 7186"/>
             </a:avLst>
           </a:prstGeom>
           <a:solidFill>
@@ -13066,8 +13070,8 @@
         </p:nvSpPr>
         <p:spPr>
           <a:xfrm>
-            <a:off x="7799832" y="2816352"/>
-            <a:ext cx="3145536" cy="256032"/>
+            <a:off x="7708392" y="2852928"/>
+            <a:ext cx="3282696" cy="228600"/>
           </a:xfrm>
           <a:prstGeom prst="rect">
             <a:avLst/>
@@ -13083,7 +13087,7 @@
               <a:buNone/>
             </a:pPr>
             <a:r>
-              <a:rPr lang="en-US" sz="1300" b="1" dirty="0">
+              <a:rPr lang="en-US" sz="1220" b="1" dirty="0">
                 <a:solidFill>
                   <a:srgbClr val="0068B7"/>
                 </a:solidFill>
@@ -13093,7 +13097,7 @@
               </a:rPr>
               <a:t>Concept checkpoints</a:t>
             </a:r>
-            <a:endParaRPr lang="en-US" sz="1300" dirty="0"/>
+            <a:endParaRPr lang="en-US" sz="1220" dirty="0"/>
           </a:p>
         </p:txBody>
       </p:sp>
@@ -13105,8 +13109,8 @@
         </p:nvSpPr>
         <p:spPr>
           <a:xfrm>
-            <a:off x="7818120" y="3182112"/>
-            <a:ext cx="3090672" cy="718718"/>
+            <a:off x="7726680" y="3182112"/>
+            <a:ext cx="3227832" cy="960120"/>
           </a:xfrm>
           <a:prstGeom prst="rect">
             <a:avLst/>
@@ -13124,7 +13128,7 @@
               <a:buNone/>
             </a:pPr>
             <a:r>
-              <a:rPr lang="en-US" sz="1220" dirty="0">
+              <a:rPr lang="en-US" sz="1140" dirty="0">
                 <a:solidFill>
                   <a:srgbClr val="17364A"/>
                 </a:solidFill>
@@ -13134,14 +13138,14 @@
               </a:rPr>
               <a:t>1.</a:t>
             </a:r>
-            <a:endParaRPr lang="en-US" sz="1220" dirty="0"/>
-          </a:p>
-          <a:p>
-            <a:pPr indent="0" marL="0">
-              <a:buNone/>
-            </a:pPr>
-            <a:r>
-              <a:rPr lang="en-US" sz="1220" dirty="0">
+            <a:endParaRPr lang="en-US" sz="1140" dirty="0"/>
+          </a:p>
+          <a:p>
+            <a:pPr indent="0" marL="0">
+              <a:buNone/>
+            </a:pPr>
+            <a:r>
+              <a:rPr lang="en-US" sz="1140" dirty="0">
                 <a:solidFill>
                   <a:srgbClr val="17364A"/>
                 </a:solidFill>
@@ -13149,16 +13153,16 @@
                 <a:ea typeface="Aptos" pitchFamily="34" charset="-122"/>
                 <a:cs typeface="Aptos" pitchFamily="34" charset="-120"/>
               </a:rPr>
-              <a:t>Why does interoperability matter for AI-supported public health.</a:t>
-            </a:r>
-            <a:endParaRPr lang="en-US" sz="1220" dirty="0"/>
-          </a:p>
-          <a:p>
-            <a:pPr indent="0" marL="0">
-              <a:buNone/>
-            </a:pPr>
-            <a:r>
-              <a:rPr lang="en-US" sz="1220" dirty="0">
+              <a:t>Why does interoperability matter for AI-supported.</a:t>
+            </a:r>
+            <a:endParaRPr lang="en-US" sz="1140" dirty="0"/>
+          </a:p>
+          <a:p>
+            <a:pPr indent="0" marL="0">
+              <a:buNone/>
+            </a:pPr>
+            <a:r>
+              <a:rPr lang="en-US" sz="1140" dirty="0">
                 <a:solidFill>
                   <a:srgbClr val="17364A"/>
                 </a:solidFill>
@@ -13168,7 +13172,7 @@
               </a:rPr>
               <a:t>2.</a:t>
             </a:r>
-            <a:endParaRPr lang="en-US" sz="1220" dirty="0"/>
+            <a:endParaRPr lang="en-US" sz="1140" dirty="0"/>
           </a:p>
         </p:txBody>
       </p:sp>
@@ -13180,12 +13184,12 @@
         </p:nvSpPr>
         <p:spPr>
           <a:xfrm>
-            <a:off x="7635240" y="4184294"/>
-            <a:ext cx="3474720" cy="1466698"/>
+            <a:off x="7543800" y="4389120"/>
+            <a:ext cx="3611880" cy="1261872"/>
           </a:xfrm>
           <a:prstGeom prst="roundRect">
             <a:avLst>
-              <a:gd name="adj" fmla="val 7481"/>
+              <a:gd name="adj" fmla="val 8696"/>
             </a:avLst>
           </a:prstGeom>
           <a:solidFill>
@@ -13207,8 +13211,8 @@
         </p:nvSpPr>
         <p:spPr>
           <a:xfrm>
-            <a:off x="7799832" y="4330598"/>
-            <a:ext cx="3145536" cy="256032"/>
+            <a:off x="7708392" y="4517136"/>
+            <a:ext cx="3282696" cy="228600"/>
           </a:xfrm>
           <a:prstGeom prst="rect">
             <a:avLst/>
@@ -13224,7 +13228,7 @@
               <a:buNone/>
             </a:pPr>
             <a:r>
-              <a:rPr lang="en-US" sz="1300" b="1" dirty="0">
+              <a:rPr lang="en-US" sz="1220" b="1" dirty="0">
                 <a:solidFill>
                   <a:srgbClr val="0068B7"/>
                 </a:solidFill>
@@ -13234,7 +13238,7 @@
               </a:rPr>
               <a:t>What to produce</a:t>
             </a:r>
-            <a:endParaRPr lang="en-US" sz="1300" dirty="0"/>
+            <a:endParaRPr lang="en-US" sz="1220" dirty="0"/>
           </a:p>
         </p:txBody>
       </p:sp>
@@ -13246,8 +13250,8 @@
         </p:nvSpPr>
         <p:spPr>
           <a:xfrm>
-            <a:off x="7799832" y="4659782"/>
-            <a:ext cx="3145536" cy="899770"/>
+            <a:off x="7708392" y="4828032"/>
+            <a:ext cx="3282696" cy="749808"/>
           </a:xfrm>
           <a:prstGeom prst="rect">
             <a:avLst/>
@@ -13265,7 +13269,7 @@
               <a:buNone/>
             </a:pPr>
             <a:r>
-              <a:rPr lang="en-US" sz="1320" dirty="0">
+              <a:rPr lang="en-US" sz="1220" dirty="0">
                 <a:solidFill>
                   <a:srgbClr val="17364A"/>
                 </a:solidFill>
@@ -13273,9 +13277,9 @@
                 <a:ea typeface="Aptos" pitchFamily="34" charset="-122"/>
                 <a:cs typeface="Aptos" pitchFamily="34" charset="-120"/>
               </a:rPr>
-              <a:t>Use the assignment to test whether you can explain the concept, apply it to a realistic public health situation, and identify what would need review before the work moves forward.</a:t>
-            </a:r>
-            <a:endParaRPr lang="en-US" sz="1320" dirty="0"/>
+              <a:t>Use the assignment to test whether you can explain the concept, apply it to a.</a:t>
+            </a:r>
+            <a:endParaRPr lang="en-US" sz="1220" dirty="0"/>
           </a:p>
         </p:txBody>
       </p:sp>
@@ -13566,8 +13570,8 @@
         </p:nvSpPr>
         <p:spPr>
           <a:xfrm>
-            <a:off x="868680" y="1508760"/>
-            <a:ext cx="6309360" cy="4160520"/>
+            <a:off x="822960" y="1463040"/>
+            <a:ext cx="6565392" cy="4343400"/>
           </a:xfrm>
           <a:prstGeom prst="rect">
             <a:avLst/>
@@ -13585,7 +13589,7 @@
               <a:buNone/>
             </a:pPr>
             <a:r>
-              <a:rPr lang="en-US" sz="2100" dirty="0">
+              <a:rPr lang="en-US" sz="1920" dirty="0">
                 <a:solidFill>
                   <a:srgbClr val="003A63"/>
                 </a:solidFill>
@@ -13595,14 +13599,14 @@
               </a:rPr>
               <a:t>• HL7 FHIR resources and implementation guides: https://hl7.org/fhir/</a:t>
             </a:r>
-            <a:endParaRPr lang="en-US" sz="2100" dirty="0"/>
-          </a:p>
-          <a:p>
-            <a:pPr indent="0" marL="0">
-              <a:buNone/>
-            </a:pPr>
-            <a:r>
-              <a:rPr lang="en-US" sz="2100" dirty="0">
+            <a:endParaRPr lang="en-US" sz="1920" dirty="0"/>
+          </a:p>
+          <a:p>
+            <a:pPr indent="0" marL="0">
+              <a:buNone/>
+            </a:pPr>
+            <a:r>
+              <a:rPr lang="en-US" sz="1920" dirty="0">
                 <a:solidFill>
                   <a:srgbClr val="003A63"/>
                 </a:solidFill>
@@ -13612,14 +13616,14 @@
               </a:rPr>
               <a:t>• HL7 US Core Implementation Guide: https://build.fhir.org/ig/HL7/US-Core/</a:t>
             </a:r>
-            <a:endParaRPr lang="en-US" sz="2100" dirty="0"/>
-          </a:p>
-          <a:p>
-            <a:pPr indent="0" marL="0">
-              <a:buNone/>
-            </a:pPr>
-            <a:r>
-              <a:rPr lang="en-US" sz="2100" dirty="0">
+            <a:endParaRPr lang="en-US" sz="1920" dirty="0"/>
+          </a:p>
+          <a:p>
+            <a:pPr indent="0" marL="0">
+              <a:buNone/>
+            </a:pPr>
+            <a:r>
+              <a:rPr lang="en-US" sz="1920" dirty="0">
                 <a:solidFill>
                   <a:srgbClr val="003A63"/>
                 </a:solidFill>
@@ -13627,9 +13631,9 @@
                 <a:ea typeface="Aptos" pitchFamily="34" charset="-122"/>
                 <a:cs typeface="Aptos" pitchFamily="34" charset="-120"/>
               </a:rPr>
-              <a:t>• ONC USCDI resources: https://isp.healthit.gov/united-states-core-data-interoperability-uscdi</a:t>
-            </a:r>
-            <a:endParaRPr lang="en-US" sz="2100" dirty="0"/>
+              <a:t>• ONC USCDI resources:.</a:t>
+            </a:r>
+            <a:endParaRPr lang="en-US" sz="1920" dirty="0"/>
           </a:p>
         </p:txBody>
       </p:sp>
@@ -13641,12 +13645,12 @@
         </p:nvSpPr>
         <p:spPr>
           <a:xfrm>
-            <a:off x="7635240" y="1325880"/>
-            <a:ext cx="3474720" cy="1207008"/>
+            <a:off x="7543800" y="1325880"/>
+            <a:ext cx="3611880" cy="1261872"/>
           </a:xfrm>
           <a:prstGeom prst="roundRect">
             <a:avLst>
-              <a:gd name="adj" fmla="val 9091"/>
+              <a:gd name="adj" fmla="val 8696"/>
             </a:avLst>
           </a:prstGeom>
           <a:solidFill>
@@ -13668,8 +13672,8 @@
         </p:nvSpPr>
         <p:spPr>
           <a:xfrm>
-            <a:off x="7799832" y="1472184"/>
-            <a:ext cx="3145536" cy="256032"/>
+            <a:off x="7708392" y="1453896"/>
+            <a:ext cx="3282696" cy="228600"/>
           </a:xfrm>
           <a:prstGeom prst="rect">
             <a:avLst/>
@@ -13685,7 +13689,7 @@
               <a:buNone/>
             </a:pPr>
             <a:r>
-              <a:rPr lang="en-US" sz="1300" b="1" dirty="0">
+              <a:rPr lang="en-US" sz="1220" b="1" dirty="0">
                 <a:solidFill>
                   <a:srgbClr val="0068B7"/>
                 </a:solidFill>
@@ -13695,7 +13699,7 @@
               </a:rPr>
               <a:t>Core concept</a:t>
             </a:r>
-            <a:endParaRPr lang="en-US" sz="1300" dirty="0"/>
+            <a:endParaRPr lang="en-US" sz="1220" dirty="0"/>
           </a:p>
         </p:txBody>
       </p:sp>
@@ -13707,8 +13711,8 @@
         </p:nvSpPr>
         <p:spPr>
           <a:xfrm>
-            <a:off x="7799832" y="1801368"/>
-            <a:ext cx="3145536" cy="640080"/>
+            <a:off x="7708392" y="1764792"/>
+            <a:ext cx="3282696" cy="749808"/>
           </a:xfrm>
           <a:prstGeom prst="rect">
             <a:avLst/>
@@ -13726,7 +13730,7 @@
               <a:buNone/>
             </a:pPr>
             <a:r>
-              <a:rPr lang="en-US" sz="1320" dirty="0">
+              <a:rPr lang="en-US" sz="1220" dirty="0">
                 <a:solidFill>
                   <a:srgbClr val="17364A"/>
                 </a:solidFill>
@@ -13736,7 +13740,7 @@
               </a:rPr>
               <a:t>HL7 FHIR resources and implementation guides: https://hl7.org/fhir/</a:t>
             </a:r>
-            <a:endParaRPr lang="en-US" sz="1320" dirty="0"/>
+            <a:endParaRPr lang="en-US" sz="1220" dirty="0"/>
           </a:p>
         </p:txBody>
       </p:sp>
@@ -13748,12 +13752,12 @@
         </p:nvSpPr>
         <p:spPr>
           <a:xfrm>
-            <a:off x="7635240" y="2670048"/>
-            <a:ext cx="3474720" cy="1377086"/>
+            <a:off x="7543800" y="2724912"/>
+            <a:ext cx="3611880" cy="1527048"/>
           </a:xfrm>
           <a:prstGeom prst="roundRect">
             <a:avLst>
-              <a:gd name="adj" fmla="val 7968"/>
+              <a:gd name="adj" fmla="val 7186"/>
             </a:avLst>
           </a:prstGeom>
           <a:solidFill>
@@ -13775,8 +13779,8 @@
         </p:nvSpPr>
         <p:spPr>
           <a:xfrm>
-            <a:off x="7799832" y="2816352"/>
-            <a:ext cx="3145536" cy="256032"/>
+            <a:off x="7708392" y="2852928"/>
+            <a:ext cx="3282696" cy="228600"/>
           </a:xfrm>
           <a:prstGeom prst="rect">
             <a:avLst/>
@@ -13792,7 +13796,7 @@
               <a:buNone/>
             </a:pPr>
             <a:r>
-              <a:rPr lang="en-US" sz="1300" b="1" dirty="0">
+              <a:rPr lang="en-US" sz="1220" b="1" dirty="0">
                 <a:solidFill>
                   <a:srgbClr val="0068B7"/>
                 </a:solidFill>
@@ -13802,7 +13806,7 @@
               </a:rPr>
               <a:t>Concept checkpoints</a:t>
             </a:r>
-            <a:endParaRPr lang="en-US" sz="1300" dirty="0"/>
+            <a:endParaRPr lang="en-US" sz="1220" dirty="0"/>
           </a:p>
         </p:txBody>
       </p:sp>
@@ -13814,8 +13818,8 @@
         </p:nvSpPr>
         <p:spPr>
           <a:xfrm>
-            <a:off x="7818120" y="3182112"/>
-            <a:ext cx="3090672" cy="718718"/>
+            <a:off x="7726680" y="3182112"/>
+            <a:ext cx="3227832" cy="960120"/>
           </a:xfrm>
           <a:prstGeom prst="rect">
             <a:avLst/>
@@ -13833,7 +13837,7 @@
               <a:buNone/>
             </a:pPr>
             <a:r>
-              <a:rPr lang="en-US" sz="1220" dirty="0">
+              <a:rPr lang="en-US" sz="1140" dirty="0">
                 <a:solidFill>
                   <a:srgbClr val="17364A"/>
                 </a:solidFill>
@@ -13843,14 +13847,14 @@
               </a:rPr>
               <a:t>CDC Public Health Data Strategy:.</a:t>
             </a:r>
-            <a:endParaRPr lang="en-US" sz="1220" dirty="0"/>
-          </a:p>
-          <a:p>
-            <a:pPr indent="0" marL="0">
-              <a:buNone/>
-            </a:pPr>
-            <a:r>
-              <a:rPr lang="en-US" sz="1220" dirty="0">
+            <a:endParaRPr lang="en-US" sz="1140" dirty="0"/>
+          </a:p>
+          <a:p>
+            <a:pPr indent="0" marL="0">
+              <a:buNone/>
+            </a:pPr>
+            <a:r>
+              <a:rPr lang="en-US" sz="1140" dirty="0">
                 <a:solidFill>
                   <a:srgbClr val="17364A"/>
                 </a:solidFill>
@@ -13858,9 +13862,9 @@
                 <a:ea typeface="Aptos" pitchFamily="34" charset="-122"/>
                 <a:cs typeface="Aptos" pitchFamily="34" charset="-120"/>
               </a:rPr>
-              <a:t>Public health implementation guides for eCR, ELR, IIS, and.</a:t>
-            </a:r>
-            <a:endParaRPr lang="en-US" sz="1220" dirty="0"/>
+              <a:t>Public health implementation guides for eCR, ELR,.</a:t>
+            </a:r>
+            <a:endParaRPr lang="en-US" sz="1140" dirty="0"/>
           </a:p>
         </p:txBody>
       </p:sp>
@@ -13872,12 +13876,12 @@
         </p:nvSpPr>
         <p:spPr>
           <a:xfrm>
-            <a:off x="7635240" y="4184294"/>
-            <a:ext cx="3474720" cy="1466698"/>
+            <a:off x="7543800" y="4389120"/>
+            <a:ext cx="3611880" cy="1261872"/>
           </a:xfrm>
           <a:prstGeom prst="roundRect">
             <a:avLst>
-              <a:gd name="adj" fmla="val 7481"/>
+              <a:gd name="adj" fmla="val 8696"/>
             </a:avLst>
           </a:prstGeom>
           <a:solidFill>
@@ -13899,8 +13903,8 @@
         </p:nvSpPr>
         <p:spPr>
           <a:xfrm>
-            <a:off x="7799832" y="4330598"/>
-            <a:ext cx="3145536" cy="256032"/>
+            <a:off x="7708392" y="4517136"/>
+            <a:ext cx="3282696" cy="228600"/>
           </a:xfrm>
           <a:prstGeom prst="rect">
             <a:avLst/>
@@ -13916,7 +13920,7 @@
               <a:buNone/>
             </a:pPr>
             <a:r>
-              <a:rPr lang="en-US" sz="1300" b="1" dirty="0">
+              <a:rPr lang="en-US" sz="1220" b="1" dirty="0">
                 <a:solidFill>
                   <a:srgbClr val="0068B7"/>
                 </a:solidFill>
@@ -13926,7 +13930,7 @@
               </a:rPr>
               <a:t>Apply it</a:t>
             </a:r>
-            <a:endParaRPr lang="en-US" sz="1300" dirty="0"/>
+            <a:endParaRPr lang="en-US" sz="1220" dirty="0"/>
           </a:p>
         </p:txBody>
       </p:sp>
@@ -13938,8 +13942,8 @@
         </p:nvSpPr>
         <p:spPr>
           <a:xfrm>
-            <a:off x="7799832" y="4659782"/>
-            <a:ext cx="3145536" cy="899770"/>
+            <a:off x="7708392" y="4828032"/>
+            <a:ext cx="3282696" cy="749808"/>
           </a:xfrm>
           <a:prstGeom prst="rect">
             <a:avLst/>
@@ -13957,7 +13961,7 @@
               <a:buNone/>
             </a:pPr>
             <a:r>
-              <a:rPr lang="en-US" sz="1320" dirty="0">
+              <a:rPr lang="en-US" sz="1220" dirty="0">
                 <a:solidFill>
                   <a:srgbClr val="17364A"/>
                 </a:solidFill>
@@ -13965,9 +13969,9 @@
                 <a:ea typeface="Aptos" pitchFamily="34" charset="-122"/>
                 <a:cs typeface="Aptos" pitchFamily="34" charset="-120"/>
               </a:rPr>
-              <a:t>Connect the concept to public health purpose, responsible use, required safeguards, documentation, and the next action a department should take.</a:t>
-            </a:r>
-            <a:endParaRPr lang="en-US" sz="1320" dirty="0"/>
+              <a:t>Connect the concept to public health purpose, responsible use, required.</a:t>
+            </a:r>
+            <a:endParaRPr lang="en-US" sz="1220" dirty="0"/>
           </a:p>
         </p:txBody>
       </p:sp>
@@ -14285,7 +14289,7 @@
                 <a:ea typeface="Aptos" pitchFamily="34" charset="-122"/>
                 <a:cs typeface="Aptos" pitchFamily="34" charset="-120"/>
               </a:rPr>
-              <a:t>• Play 11: Build and Deploy AI Solutions - This lesson informs Play 11 by helping learners.</a:t>
+              <a:t>• Play 11: Build and Deploy AI Solutions - This lesson informs Play 11 by.</a:t>
             </a:r>
             <a:endParaRPr lang="en-US" sz="1900" dirty="0"/>
           </a:p>
@@ -14302,7 +14306,7 @@
                 <a:ea typeface="Aptos" pitchFamily="34" charset="-122"/>
                 <a:cs typeface="Aptos" pitchFamily="34" charset="-120"/>
               </a:rPr>
-              <a:t>• Play 2: Readiness Assessment - This lesson informs Play 2 by helping learners connect the.</a:t>
+              <a:t>• Play 2: Readiness Assessment - This lesson informs Play 2 by helping.</a:t>
             </a:r>
             <a:endParaRPr lang="en-US" sz="1900" dirty="0"/>
           </a:p>
@@ -14319,7 +14323,7 @@
                 <a:ea typeface="Aptos" pitchFamily="34" charset="-122"/>
                 <a:cs typeface="Aptos" pitchFamily="34" charset="-120"/>
               </a:rPr>
-              <a:t>• Play 7: Prioritize Use Cases - This lesson informs Play 7 by helping learners connect the.</a:t>
+              <a:t>• Play 7: Prioritize Use Cases - This lesson informs Play 7 by helping.</a:t>
             </a:r>
             <a:endParaRPr lang="en-US" sz="1900" dirty="0"/>
           </a:p>
@@ -14336,7 +14340,7 @@
                 <a:ea typeface="Aptos" pitchFamily="34" charset="-122"/>
                 <a:cs typeface="Aptos" pitchFamily="34" charset="-120"/>
               </a:rPr>
-              <a:t>• Play 1: Vision &amp; Guardrails - This lesson informs Play 1 by helping learners connect the.</a:t>
+              <a:t>• Play 1: Vision &amp; Guardrails - This lesson informs Play 1 by helping learners.</a:t>
             </a:r>
             <a:endParaRPr lang="en-US" sz="1900" dirty="0"/>
           </a:p>
@@ -14377,8 +14381,8 @@
         </p:nvSpPr>
         <p:spPr>
           <a:xfrm>
-            <a:off x="8211312" y="1563624"/>
-            <a:ext cx="2734056" cy="256032"/>
+            <a:off x="8211312" y="1545336"/>
+            <a:ext cx="2734056" cy="228600"/>
           </a:xfrm>
           <a:prstGeom prst="rect">
             <a:avLst/>
@@ -14394,7 +14398,7 @@
               <a:buNone/>
             </a:pPr>
             <a:r>
-              <a:rPr lang="en-US" sz="1300" b="1" dirty="0">
+              <a:rPr lang="en-US" sz="1220" b="1" dirty="0">
                 <a:solidFill>
                   <a:srgbClr val="0068B7"/>
                 </a:solidFill>
@@ -14404,7 +14408,7 @@
               </a:rPr>
               <a:t>Apply the lesson</a:t>
             </a:r>
-            <a:endParaRPr lang="en-US" sz="1300" dirty="0"/>
+            <a:endParaRPr lang="en-US" sz="1220" dirty="0"/>
           </a:p>
         </p:txBody>
       </p:sp>
@@ -14416,8 +14420,8 @@
         </p:nvSpPr>
         <p:spPr>
           <a:xfrm>
-            <a:off x="8211312" y="1892808"/>
-            <a:ext cx="2734056" cy="1536192"/>
+            <a:off x="8211312" y="1856232"/>
+            <a:ext cx="2734056" cy="1591056"/>
           </a:xfrm>
           <a:prstGeom prst="rect">
             <a:avLst/>
@@ -14435,7 +14439,7 @@
               <a:buNone/>
             </a:pPr>
             <a:r>
-              <a:rPr lang="en-US" sz="1320" dirty="0">
+              <a:rPr lang="en-US" sz="1220" dirty="0">
                 <a:solidFill>
                   <a:srgbClr val="17364A"/>
                 </a:solidFill>
@@ -14443,9 +14447,9 @@
                 <a:ea typeface="Aptos" pitchFamily="34" charset="-122"/>
                 <a:cs typeface="Aptos" pitchFamily="34" charset="-120"/>
               </a:rPr>
-              <a:t>Use the related plays to identify decisions, participants, timing, approvals, and documentation needed for responsible implementation.</a:t>
-            </a:r>
-            <a:endParaRPr lang="en-US" sz="1320" dirty="0"/>
+              <a:t>Use the related plays to identify decisions, participants, timing, approvals,.</a:t>
+            </a:r>
+            <a:endParaRPr lang="en-US" sz="1220" dirty="0"/>
           </a:p>
         </p:txBody>
       </p:sp>
@@ -14484,8 +14488,8 @@
         </p:nvSpPr>
         <p:spPr>
           <a:xfrm>
-            <a:off x="8211312" y="3941064"/>
-            <a:ext cx="2734056" cy="256032"/>
+            <a:off x="8211312" y="3922776"/>
+            <a:ext cx="2734056" cy="228600"/>
           </a:xfrm>
           <a:prstGeom prst="rect">
             <a:avLst/>
@@ -14501,7 +14505,7 @@
               <a:buNone/>
             </a:pPr>
             <a:r>
-              <a:rPr lang="en-US" sz="1300" b="1" dirty="0">
+              <a:rPr lang="en-US" sz="1220" b="1" dirty="0">
                 <a:solidFill>
                   <a:srgbClr val="0068B7"/>
                 </a:solidFill>
@@ -14511,7 +14515,7 @@
               </a:rPr>
               <a:t>Use the play links to</a:t>
             </a:r>
-            <a:endParaRPr lang="en-US" sz="1300" dirty="0"/>
+            <a:endParaRPr lang="en-US" sz="1220" dirty="0"/>
           </a:p>
         </p:txBody>
       </p:sp>
@@ -14523,8 +14527,8 @@
         </p:nvSpPr>
         <p:spPr>
           <a:xfrm>
-            <a:off x="8229600" y="4306824"/>
-            <a:ext cx="2679192" cy="941832"/>
+            <a:off x="8229600" y="4251960"/>
+            <a:ext cx="2679192" cy="1033272"/>
           </a:xfrm>
           <a:prstGeom prst="rect">
             <a:avLst/>
@@ -14542,7 +14546,7 @@
               <a:buNone/>
             </a:pPr>
             <a:r>
-              <a:rPr lang="en-US" sz="1220" dirty="0">
+              <a:rPr lang="en-US" sz="1140" dirty="0">
                 <a:solidFill>
                   <a:srgbClr val="17364A"/>
                 </a:solidFill>
@@ -14552,14 +14556,14 @@
               </a:rPr>
               <a:t>Locate the decision point in the playbook sequence.</a:t>
             </a:r>
-            <a:endParaRPr lang="en-US" sz="1220" dirty="0"/>
-          </a:p>
-          <a:p>
-            <a:pPr indent="0" marL="0">
-              <a:buNone/>
-            </a:pPr>
-            <a:r>
-              <a:rPr lang="en-US" sz="1220" dirty="0">
+            <a:endParaRPr lang="en-US" sz="1140" dirty="0"/>
+          </a:p>
+          <a:p>
+            <a:pPr indent="0" marL="0">
+              <a:buNone/>
+            </a:pPr>
+            <a:r>
+              <a:rPr lang="en-US" sz="1140" dirty="0">
                 <a:solidFill>
                   <a:srgbClr val="17364A"/>
                 </a:solidFill>
@@ -14569,14 +14573,14 @@
               </a:rPr>
               <a:t>Identify who should participate in the work.</a:t>
             </a:r>
-            <a:endParaRPr lang="en-US" sz="1220" dirty="0"/>
-          </a:p>
-          <a:p>
-            <a:pPr indent="0" marL="0">
-              <a:buNone/>
-            </a:pPr>
-            <a:r>
-              <a:rPr lang="en-US" sz="1220" dirty="0">
+            <a:endParaRPr lang="en-US" sz="1140" dirty="0"/>
+          </a:p>
+          <a:p>
+            <a:pPr indent="0" marL="0">
+              <a:buNone/>
+            </a:pPr>
+            <a:r>
+              <a:rPr lang="en-US" sz="1140" dirty="0">
                 <a:solidFill>
                   <a:srgbClr val="17364A"/>
                 </a:solidFill>
@@ -14584,9 +14588,9 @@
                 <a:ea typeface="Aptos" pitchFamily="34" charset="-122"/>
                 <a:cs typeface="Aptos" pitchFamily="34" charset="-120"/>
               </a:rPr>
-              <a:t>Document the review, approval, or implementation step.</a:t>
-            </a:r>
-            <a:endParaRPr lang="en-US" sz="1220" dirty="0"/>
+              <a:t>Document the review, approval, or implementation.</a:t>
+            </a:r>
+            <a:endParaRPr lang="en-US" sz="1140" dirty="0"/>
           </a:p>
         </p:txBody>
       </p:sp>
@@ -14904,7 +14908,7 @@
                 <a:ea typeface="Aptos" pitchFamily="34" charset="-122"/>
                 <a:cs typeface="Aptos" pitchFamily="34" charset="-120"/>
               </a:rPr>
-              <a:t>• Tool 4: AI Policy Landscape Scan (Worksheet) - Use AI Policy Landscape Scan to translate this.</a:t>
+              <a:t>• Tool 4: AI Policy Landscape Scan (Worksheet) - Use AI Policy Landscape Scan.</a:t>
             </a:r>
             <a:endParaRPr lang="en-US" sz="1850" dirty="0"/>
           </a:p>
@@ -14921,7 +14925,7 @@
                 <a:ea typeface="Aptos" pitchFamily="34" charset="-122"/>
                 <a:cs typeface="Aptos" pitchFamily="34" charset="-120"/>
               </a:rPr>
-              <a:t>• Tool 5: AI Environmental and Resource Impact Review (Checklist) - Use AI Environmental and.</a:t>
+              <a:t>• Tool 5: AI Environmental and Resource Impact Review (Checklist) - Use AI.</a:t>
             </a:r>
             <a:endParaRPr lang="en-US" sz="1850" dirty="0"/>
           </a:p>
@@ -14938,7 +14942,7 @@
                 <a:ea typeface="Aptos" pitchFamily="34" charset="-122"/>
                 <a:cs typeface="Aptos" pitchFamily="34" charset="-120"/>
               </a:rPr>
-              <a:t>• Tool 6: Human-Centered AI Decision Rule Checklist (Checklist) - Use Human-Centered AI Decision.</a:t>
+              <a:t>• Tool 6: Human-Centered AI Decision Rule Checklist (Checklist) - Use.</a:t>
             </a:r>
             <a:endParaRPr lang="en-US" sz="1850" dirty="0"/>
           </a:p>
@@ -14955,7 +14959,7 @@
                 <a:ea typeface="Aptos" pitchFamily="34" charset="-122"/>
                 <a:cs typeface="Aptos" pitchFamily="34" charset="-120"/>
               </a:rPr>
-              <a:t>• Tool 8: AI Project Charter (Planning) - Use AI Project Charter to translate this lesson into a.</a:t>
+              <a:t>• Tool 8: AI Project Charter (Planning) - Use AI Project Charter to translate.</a:t>
             </a:r>
             <a:endParaRPr lang="en-US" sz="1850" dirty="0"/>
           </a:p>
@@ -14996,8 +15000,8 @@
         </p:nvSpPr>
         <p:spPr>
           <a:xfrm>
-            <a:off x="8211312" y="1563624"/>
-            <a:ext cx="2734056" cy="256032"/>
+            <a:off x="8211312" y="1545336"/>
+            <a:ext cx="2734056" cy="228600"/>
           </a:xfrm>
           <a:prstGeom prst="rect">
             <a:avLst/>
@@ -15013,7 +15017,7 @@
               <a:buNone/>
             </a:pPr>
             <a:r>
-              <a:rPr lang="en-US" sz="1300" b="1" dirty="0">
+              <a:rPr lang="en-US" sz="1220" b="1" dirty="0">
                 <a:solidFill>
                   <a:srgbClr val="0068B7"/>
                 </a:solidFill>
@@ -15023,7 +15027,7 @@
               </a:rPr>
               <a:t>Use the tools</a:t>
             </a:r>
-            <a:endParaRPr lang="en-US" sz="1300" dirty="0"/>
+            <a:endParaRPr lang="en-US" sz="1220" dirty="0"/>
           </a:p>
         </p:txBody>
       </p:sp>
@@ -15035,8 +15039,8 @@
         </p:nvSpPr>
         <p:spPr>
           <a:xfrm>
-            <a:off x="8211312" y="1892808"/>
-            <a:ext cx="2734056" cy="1536192"/>
+            <a:off x="8211312" y="1856232"/>
+            <a:ext cx="2734056" cy="1591056"/>
           </a:xfrm>
           <a:prstGeom prst="rect">
             <a:avLst/>
@@ -15054,7 +15058,7 @@
               <a:buNone/>
             </a:pPr>
             <a:r>
-              <a:rPr lang="en-US" sz="1320" dirty="0">
+              <a:rPr lang="en-US" sz="1220" dirty="0">
                 <a:solidFill>
                   <a:srgbClr val="17364A"/>
                 </a:solidFill>
@@ -15062,9 +15066,9 @@
                 <a:ea typeface="Aptos" pitchFamily="34" charset="-122"/>
                 <a:cs typeface="Aptos" pitchFamily="34" charset="-120"/>
               </a:rPr>
-              <a:t>Use linked tools when your department needs a structured worksheet, template, checklist, review process, or documentation artifact.</a:t>
-            </a:r>
-            <a:endParaRPr lang="en-US" sz="1320" dirty="0"/>
+              <a:t>Use linked tools when your department needs a structured worksheet, template,.</a:t>
+            </a:r>
+            <a:endParaRPr lang="en-US" sz="1220" dirty="0"/>
           </a:p>
         </p:txBody>
       </p:sp>
@@ -15103,8 +15107,8 @@
         </p:nvSpPr>
         <p:spPr>
           <a:xfrm>
-            <a:off x="8211312" y="3941064"/>
-            <a:ext cx="2734056" cy="256032"/>
+            <a:off x="8211312" y="3922776"/>
+            <a:ext cx="2734056" cy="228600"/>
           </a:xfrm>
           <a:prstGeom prst="rect">
             <a:avLst/>
@@ -15120,7 +15124,7 @@
               <a:buNone/>
             </a:pPr>
             <a:r>
-              <a:rPr lang="en-US" sz="1300" b="1" dirty="0">
+              <a:rPr lang="en-US" sz="1220" b="1" dirty="0">
                 <a:solidFill>
                   <a:srgbClr val="0068B7"/>
                 </a:solidFill>
@@ -15130,7 +15134,7 @@
               </a:rPr>
               <a:t>Tool selection cues</a:t>
             </a:r>
-            <a:endParaRPr lang="en-US" sz="1300" dirty="0"/>
+            <a:endParaRPr lang="en-US" sz="1220" dirty="0"/>
           </a:p>
         </p:txBody>
       </p:sp>
@@ -15142,8 +15146,8 @@
         </p:nvSpPr>
         <p:spPr>
           <a:xfrm>
-            <a:off x="8229600" y="4306824"/>
-            <a:ext cx="2679192" cy="941832"/>
+            <a:off x="8229600" y="4251960"/>
+            <a:ext cx="2679192" cy="1033272"/>
           </a:xfrm>
           <a:prstGeom prst="rect">
             <a:avLst/>
@@ -15161,7 +15165,7 @@
               <a:buNone/>
             </a:pPr>
             <a:r>
-              <a:rPr lang="en-US" sz="1220" dirty="0">
+              <a:rPr lang="en-US" sz="1140" dirty="0">
                 <a:solidFill>
                   <a:srgbClr val="17364A"/>
                 </a:solidFill>
@@ -15171,14 +15175,14 @@
               </a:rPr>
               <a:t>Use a tool when no comparable local process exists.</a:t>
             </a:r>
-            <a:endParaRPr lang="en-US" sz="1220" dirty="0"/>
-          </a:p>
-          <a:p>
-            <a:pPr indent="0" marL="0">
-              <a:buNone/>
-            </a:pPr>
-            <a:r>
-              <a:rPr lang="en-US" sz="1220" dirty="0">
+            <a:endParaRPr lang="en-US" sz="1140" dirty="0"/>
+          </a:p>
+          <a:p>
+            <a:pPr indent="0" marL="0">
+              <a:buNone/>
+            </a:pPr>
+            <a:r>
+              <a:rPr lang="en-US" sz="1140" dirty="0">
                 <a:solidFill>
                   <a:srgbClr val="17364A"/>
                 </a:solidFill>
@@ -15186,16 +15190,16 @@
                 <a:ea typeface="Aptos" pitchFamily="34" charset="-122"/>
                 <a:cs typeface="Aptos" pitchFamily="34" charset="-120"/>
               </a:rPr>
-              <a:t>Adapt existing department templates when they already fit the.</a:t>
-            </a:r>
-            <a:endParaRPr lang="en-US" sz="1220" dirty="0"/>
-          </a:p>
-          <a:p>
-            <a:pPr indent="0" marL="0">
-              <a:buNone/>
-            </a:pPr>
-            <a:r>
-              <a:rPr lang="en-US" sz="1220" dirty="0">
+              <a:t>Adapt existing department templates when they.</a:t>
+            </a:r>
+            <a:endParaRPr lang="en-US" sz="1140" dirty="0"/>
+          </a:p>
+          <a:p>
+            <a:pPr indent="0" marL="0">
+              <a:buNone/>
+            </a:pPr>
+            <a:r>
+              <a:rPr lang="en-US" sz="1140" dirty="0">
                 <a:solidFill>
                   <a:srgbClr val="17364A"/>
                 </a:solidFill>
@@ -15203,9 +15207,9 @@
                 <a:ea typeface="Aptos" pitchFamily="34" charset="-122"/>
                 <a:cs typeface="Aptos" pitchFamily="34" charset="-120"/>
               </a:rPr>
-              <a:t>Save the completed artifact as evidence of the decision.</a:t>
-            </a:r>
-            <a:endParaRPr lang="en-US" sz="1220" dirty="0"/>
+              <a:t>Save the completed artifact as evidence of the.</a:t>
+            </a:r>
+            <a:endParaRPr lang="en-US" sz="1140" dirty="0"/>
           </a:p>
         </p:txBody>
       </p:sp>
@@ -15496,8 +15500,8 @@
         </p:nvSpPr>
         <p:spPr>
           <a:xfrm>
-            <a:off x="868680" y="1508760"/>
-            <a:ext cx="6309360" cy="4160520"/>
+            <a:off x="822960" y="1463040"/>
+            <a:ext cx="6565392" cy="4343400"/>
           </a:xfrm>
           <a:prstGeom prst="rect">
             <a:avLst/>
@@ -15515,7 +15519,7 @@
               <a:buNone/>
             </a:pPr>
             <a:r>
-              <a:rPr lang="en-US" sz="2100" dirty="0">
+              <a:rPr lang="en-US" sz="1920" dirty="0">
                 <a:solidFill>
                   <a:srgbClr val="003A63"/>
                 </a:solidFill>
@@ -15525,14 +15529,14 @@
               </a:rPr>
               <a:t>• Explain why interoperability is a technical foundation for public health AI.</a:t>
             </a:r>
-            <a:endParaRPr lang="en-US" sz="2100" dirty="0"/>
-          </a:p>
-          <a:p>
-            <a:pPr indent="0" marL="0">
-              <a:buNone/>
-            </a:pPr>
-            <a:r>
-              <a:rPr lang="en-US" sz="2100" dirty="0">
+            <a:endParaRPr lang="en-US" sz="1920" dirty="0"/>
+          </a:p>
+          <a:p>
+            <a:pPr indent="0" marL="0">
+              <a:buNone/>
+            </a:pPr>
+            <a:r>
+              <a:rPr lang="en-US" sz="1920" dirty="0">
                 <a:solidFill>
                   <a:srgbClr val="003A63"/>
                 </a:solidFill>
@@ -15542,14 +15546,14 @@
               </a:rPr>
               <a:t>• Distinguish among HL7 v2 messages, CDA documents, FHIR resources, and APIs.</a:t>
             </a:r>
-            <a:endParaRPr lang="en-US" sz="2100" dirty="0"/>
-          </a:p>
-          <a:p>
-            <a:pPr indent="0" marL="0">
-              <a:buNone/>
-            </a:pPr>
-            <a:r>
-              <a:rPr lang="en-US" sz="2100" dirty="0">
+            <a:endParaRPr lang="en-US" sz="1920" dirty="0"/>
+          </a:p>
+          <a:p>
+            <a:pPr indent="0" marL="0">
+              <a:buNone/>
+            </a:pPr>
+            <a:r>
+              <a:rPr lang="en-US" sz="1920" dirty="0">
                 <a:solidFill>
                   <a:srgbClr val="003A63"/>
                 </a:solidFill>
@@ -15559,7 +15563,7 @@
               </a:rPr>
               <a:t>• Identify where interoperability standards appear in public health workflows.</a:t>
             </a:r>
-            <a:endParaRPr lang="en-US" sz="2100" dirty="0"/>
+            <a:endParaRPr lang="en-US" sz="1920" dirty="0"/>
           </a:p>
         </p:txBody>
       </p:sp>
@@ -15571,12 +15575,12 @@
         </p:nvSpPr>
         <p:spPr>
           <a:xfrm>
-            <a:off x="7635240" y="1325880"/>
-            <a:ext cx="3474720" cy="1207008"/>
+            <a:off x="7543800" y="1325880"/>
+            <a:ext cx="3611880" cy="1261872"/>
           </a:xfrm>
           <a:prstGeom prst="roundRect">
             <a:avLst>
-              <a:gd name="adj" fmla="val 9091"/>
+              <a:gd name="adj" fmla="val 8696"/>
             </a:avLst>
           </a:prstGeom>
           <a:solidFill>
@@ -15598,8 +15602,8 @@
         </p:nvSpPr>
         <p:spPr>
           <a:xfrm>
-            <a:off x="7799832" y="1472184"/>
-            <a:ext cx="3145536" cy="256032"/>
+            <a:off x="7708392" y="1453896"/>
+            <a:ext cx="3282696" cy="228600"/>
           </a:xfrm>
           <a:prstGeom prst="rect">
             <a:avLst/>
@@ -15615,7 +15619,7 @@
               <a:buNone/>
             </a:pPr>
             <a:r>
-              <a:rPr lang="en-US" sz="1300" b="1" dirty="0">
+              <a:rPr lang="en-US" sz="1220" b="1" dirty="0">
                 <a:solidFill>
                   <a:srgbClr val="0068B7"/>
                 </a:solidFill>
@@ -15625,7 +15629,7 @@
               </a:rPr>
               <a:t>Practice focus</a:t>
             </a:r>
-            <a:endParaRPr lang="en-US" sz="1300" dirty="0"/>
+            <a:endParaRPr lang="en-US" sz="1220" dirty="0"/>
           </a:p>
         </p:txBody>
       </p:sp>
@@ -15637,8 +15641,8 @@
         </p:nvSpPr>
         <p:spPr>
           <a:xfrm>
-            <a:off x="7799832" y="1801368"/>
-            <a:ext cx="3145536" cy="640080"/>
+            <a:off x="7708392" y="1764792"/>
+            <a:ext cx="3282696" cy="749808"/>
           </a:xfrm>
           <a:prstGeom prst="rect">
             <a:avLst/>
@@ -15656,7 +15660,7 @@
               <a:buNone/>
             </a:pPr>
             <a:r>
-              <a:rPr lang="en-US" sz="1320" dirty="0">
+              <a:rPr lang="en-US" sz="1220" dirty="0">
                 <a:solidFill>
                   <a:srgbClr val="17364A"/>
                 </a:solidFill>
@@ -15666,7 +15670,7 @@
               </a:rPr>
               <a:t>Explain why interoperability is a technical foundation for public health AI.</a:t>
             </a:r>
-            <a:endParaRPr lang="en-US" sz="1320" dirty="0"/>
+            <a:endParaRPr lang="en-US" sz="1220" dirty="0"/>
           </a:p>
         </p:txBody>
       </p:sp>
@@ -15678,12 +15682,12 @@
         </p:nvSpPr>
         <p:spPr>
           <a:xfrm>
-            <a:off x="7635240" y="2670048"/>
-            <a:ext cx="3474720" cy="1377086"/>
+            <a:off x="7543800" y="2724912"/>
+            <a:ext cx="3611880" cy="1527048"/>
           </a:xfrm>
           <a:prstGeom prst="roundRect">
             <a:avLst>
-              <a:gd name="adj" fmla="val 7968"/>
+              <a:gd name="adj" fmla="val 7186"/>
             </a:avLst>
           </a:prstGeom>
           <a:solidFill>
@@ -15705,8 +15709,8 @@
         </p:nvSpPr>
         <p:spPr>
           <a:xfrm>
-            <a:off x="7799832" y="2816352"/>
-            <a:ext cx="3145536" cy="256032"/>
+            <a:off x="7708392" y="2852928"/>
+            <a:ext cx="3282696" cy="228600"/>
           </a:xfrm>
           <a:prstGeom prst="rect">
             <a:avLst/>
@@ -15722,7 +15726,7 @@
               <a:buNone/>
             </a:pPr>
             <a:r>
-              <a:rPr lang="en-US" sz="1300" b="1" dirty="0">
+              <a:rPr lang="en-US" sz="1220" b="1" dirty="0">
                 <a:solidFill>
                   <a:srgbClr val="0068B7"/>
                 </a:solidFill>
@@ -15732,7 +15736,7 @@
               </a:rPr>
               <a:t>Concept checkpoints</a:t>
             </a:r>
-            <a:endParaRPr lang="en-US" sz="1300" dirty="0"/>
+            <a:endParaRPr lang="en-US" sz="1220" dirty="0"/>
           </a:p>
         </p:txBody>
       </p:sp>
@@ -15744,8 +15748,8 @@
         </p:nvSpPr>
         <p:spPr>
           <a:xfrm>
-            <a:off x="7818120" y="3182112"/>
-            <a:ext cx="3090672" cy="718718"/>
+            <a:off x="7726680" y="3182112"/>
+            <a:ext cx="3227832" cy="960120"/>
           </a:xfrm>
           <a:prstGeom prst="rect">
             <a:avLst/>
@@ -15763,7 +15767,7 @@
               <a:buNone/>
             </a:pPr>
             <a:r>
-              <a:rPr lang="en-US" sz="1220" dirty="0">
+              <a:rPr lang="en-US" sz="1140" dirty="0">
                 <a:solidFill>
                   <a:srgbClr val="17364A"/>
                 </a:solidFill>
@@ -15771,16 +15775,16 @@
                 <a:ea typeface="Aptos" pitchFamily="34" charset="-122"/>
                 <a:cs typeface="Aptos" pitchFamily="34" charset="-120"/>
               </a:rPr>
-              <a:t>Explain the purpose of implementation guides and terminology.</a:t>
-            </a:r>
-            <a:endParaRPr lang="en-US" sz="1220" dirty="0"/>
-          </a:p>
-          <a:p>
-            <a:pPr indent="0" marL="0">
-              <a:buNone/>
-            </a:pPr>
-            <a:r>
-              <a:rPr lang="en-US" sz="1220" dirty="0">
+              <a:t>Explain the purpose of implementation guides and.</a:t>
+            </a:r>
+            <a:endParaRPr lang="en-US" sz="1140" dirty="0"/>
+          </a:p>
+          <a:p>
+            <a:pPr indent="0" marL="0">
+              <a:buNone/>
+            </a:pPr>
+            <a:r>
+              <a:rPr lang="en-US" sz="1140" dirty="0">
                 <a:solidFill>
                   <a:srgbClr val="17364A"/>
                 </a:solidFill>
@@ -15788,9 +15792,9 @@
                 <a:ea typeface="Aptos" pitchFamily="34" charset="-122"/>
                 <a:cs typeface="Aptos" pitchFamily="34" charset="-120"/>
               </a:rPr>
-              <a:t>Develop interoperability requirements and vendor questions for.</a:t>
-            </a:r>
-            <a:endParaRPr lang="en-US" sz="1220" dirty="0"/>
+              <a:t>Develop interoperability requirements and vendor.</a:t>
+            </a:r>
+            <a:endParaRPr lang="en-US" sz="1140" dirty="0"/>
           </a:p>
         </p:txBody>
       </p:sp>
@@ -15802,12 +15806,12 @@
         </p:nvSpPr>
         <p:spPr>
           <a:xfrm>
-            <a:off x="7635240" y="4184294"/>
-            <a:ext cx="3474720" cy="1466698"/>
+            <a:off x="7543800" y="4389120"/>
+            <a:ext cx="3611880" cy="1261872"/>
           </a:xfrm>
           <a:prstGeom prst="roundRect">
             <a:avLst>
-              <a:gd name="adj" fmla="val 7481"/>
+              <a:gd name="adj" fmla="val 8696"/>
             </a:avLst>
           </a:prstGeom>
           <a:solidFill>
@@ -15829,8 +15833,8 @@
         </p:nvSpPr>
         <p:spPr>
           <a:xfrm>
-            <a:off x="7799832" y="4330598"/>
-            <a:ext cx="3145536" cy="256032"/>
+            <a:off x="7708392" y="4517136"/>
+            <a:ext cx="3282696" cy="228600"/>
           </a:xfrm>
           <a:prstGeom prst="rect">
             <a:avLst/>
@@ -15846,7 +15850,7 @@
               <a:buNone/>
             </a:pPr>
             <a:r>
-              <a:rPr lang="en-US" sz="1300" b="1" dirty="0">
+              <a:rPr lang="en-US" sz="1220" b="1" dirty="0">
                 <a:solidFill>
                   <a:srgbClr val="0068B7"/>
                 </a:solidFill>
@@ -15856,7 +15860,7 @@
               </a:rPr>
               <a:t>What to produce</a:t>
             </a:r>
-            <a:endParaRPr lang="en-US" sz="1300" dirty="0"/>
+            <a:endParaRPr lang="en-US" sz="1220" dirty="0"/>
           </a:p>
         </p:txBody>
       </p:sp>
@@ -15868,8 +15872,8 @@
         </p:nvSpPr>
         <p:spPr>
           <a:xfrm>
-            <a:off x="7799832" y="4659782"/>
-            <a:ext cx="3145536" cy="899770"/>
+            <a:off x="7708392" y="4828032"/>
+            <a:ext cx="3282696" cy="749808"/>
           </a:xfrm>
           <a:prstGeom prst="rect">
             <a:avLst/>
@@ -15887,7 +15891,7 @@
               <a:buNone/>
             </a:pPr>
             <a:r>
-              <a:rPr lang="en-US" sz="1320" dirty="0">
+              <a:rPr lang="en-US" sz="1220" dirty="0">
                 <a:solidFill>
                   <a:srgbClr val="17364A"/>
                 </a:solidFill>
@@ -15895,9 +15899,9 @@
                 <a:ea typeface="Aptos" pitchFamily="34" charset="-122"/>
                 <a:cs typeface="Aptos" pitchFamily="34" charset="-120"/>
               </a:rPr>
-              <a:t>Use the assignment to test whether you can explain the concept, apply it to a realistic public health situation, and identify what would need review before the work moves forward.</a:t>
-            </a:r>
-            <a:endParaRPr lang="en-US" sz="1320" dirty="0"/>
+              <a:t>Use the assignment to test whether you can explain the concept, apply it to a.</a:t>
+            </a:r>
+            <a:endParaRPr lang="en-US" sz="1220" dirty="0"/>
           </a:p>
         </p:txBody>
       </p:sp>
@@ -16188,8 +16192,8 @@
         </p:nvSpPr>
         <p:spPr>
           <a:xfrm>
-            <a:off x="868680" y="1508760"/>
-            <a:ext cx="6309360" cy="4160520"/>
+            <a:off x="822960" y="1463040"/>
+            <a:ext cx="6565392" cy="4343400"/>
           </a:xfrm>
           <a:prstGeom prst="rect">
             <a:avLst/>
@@ -16207,7 +16211,7 @@
               <a:buNone/>
             </a:pPr>
             <a:r>
-              <a:rPr lang="en-US" sz="2100" dirty="0">
+              <a:rPr lang="en-US" sz="1920" dirty="0">
                 <a:solidFill>
                   <a:srgbClr val="003A63"/>
                 </a:solidFill>
@@ -16215,16 +16219,16 @@
                 <a:ea typeface="Aptos" pitchFamily="34" charset="-122"/>
                 <a:cs typeface="Aptos" pitchFamily="34" charset="-120"/>
               </a:rPr>
-              <a:t>• Public health AI depends on the ability of systems to exchange and interpret data.</a:t>
-            </a:r>
-            <a:endParaRPr lang="en-US" sz="2100" dirty="0"/>
-          </a:p>
-          <a:p>
-            <a:pPr indent="0" marL="0">
-              <a:buNone/>
-            </a:pPr>
-            <a:r>
-              <a:rPr lang="en-US" sz="2100" dirty="0">
+              <a:t>• Public health AI depends on the ability of systems to exchange and interpret.</a:t>
+            </a:r>
+            <a:endParaRPr lang="en-US" sz="1920" dirty="0"/>
+          </a:p>
+          <a:p>
+            <a:pPr indent="0" marL="0">
+              <a:buNone/>
+            </a:pPr>
+            <a:r>
+              <a:rPr lang="en-US" sz="1920" dirty="0">
                 <a:solidFill>
                   <a:srgbClr val="003A63"/>
                 </a:solidFill>
@@ -16232,16 +16236,16 @@
                 <a:ea typeface="Aptos" pitchFamily="34" charset="-122"/>
                 <a:cs typeface="Aptos" pitchFamily="34" charset="-120"/>
               </a:rPr>
-              <a:t>• Interoperability is the discipline that makes this exchange possible across EHRs,.</a:t>
-            </a:r>
-            <a:endParaRPr lang="en-US" sz="2100" dirty="0"/>
-          </a:p>
-          <a:p>
-            <a:pPr indent="0" marL="0">
-              <a:buNone/>
-            </a:pPr>
-            <a:r>
-              <a:rPr lang="en-US" sz="2100" dirty="0">
+              <a:t>• Interoperability is the discipline that makes this exchange possible across.</a:t>
+            </a:r>
+            <a:endParaRPr lang="en-US" sz="1920" dirty="0"/>
+          </a:p>
+          <a:p>
+            <a:pPr indent="0" marL="0">
+              <a:buNone/>
+            </a:pPr>
+            <a:r>
+              <a:rPr lang="en-US" sz="1920" dirty="0">
                 <a:solidFill>
                   <a:srgbClr val="003A63"/>
                 </a:solidFill>
@@ -16249,9 +16253,9 @@
                 <a:ea typeface="Aptos" pitchFamily="34" charset="-122"/>
                 <a:cs typeface="Aptos" pitchFamily="34" charset="-120"/>
               </a:rPr>
-              <a:t>• This module introduces the major standards that public health staff encounter, including HL7.</a:t>
-            </a:r>
-            <a:endParaRPr lang="en-US" sz="2100" dirty="0"/>
+              <a:t>• This module introduces the major standards that public health staff.</a:t>
+            </a:r>
+            <a:endParaRPr lang="en-US" sz="1920" dirty="0"/>
           </a:p>
         </p:txBody>
       </p:sp>
@@ -16263,12 +16267,12 @@
         </p:nvSpPr>
         <p:spPr>
           <a:xfrm>
-            <a:off x="7635240" y="1325880"/>
-            <a:ext cx="3474720" cy="1207008"/>
+            <a:off x="7543800" y="1325880"/>
+            <a:ext cx="3611880" cy="1261872"/>
           </a:xfrm>
           <a:prstGeom prst="roundRect">
             <a:avLst>
-              <a:gd name="adj" fmla="val 9091"/>
+              <a:gd name="adj" fmla="val 8696"/>
             </a:avLst>
           </a:prstGeom>
           <a:solidFill>
@@ -16290,8 +16294,8 @@
         </p:nvSpPr>
         <p:spPr>
           <a:xfrm>
-            <a:off x="7799832" y="1472184"/>
-            <a:ext cx="3145536" cy="256032"/>
+            <a:off x="7708392" y="1453896"/>
+            <a:ext cx="3282696" cy="228600"/>
           </a:xfrm>
           <a:prstGeom prst="rect">
             <a:avLst/>
@@ -16307,7 +16311,7 @@
               <a:buNone/>
             </a:pPr>
             <a:r>
-              <a:rPr lang="en-US" sz="1300" b="1" dirty="0">
+              <a:rPr lang="en-US" sz="1220" b="1" dirty="0">
                 <a:solidFill>
                   <a:srgbClr val="0068B7"/>
                 </a:solidFill>
@@ -16317,7 +16321,7 @@
               </a:rPr>
               <a:t>Core concept</a:t>
             </a:r>
-            <a:endParaRPr lang="en-US" sz="1300" dirty="0"/>
+            <a:endParaRPr lang="en-US" sz="1220" dirty="0"/>
           </a:p>
         </p:txBody>
       </p:sp>
@@ -16329,8 +16333,8 @@
         </p:nvSpPr>
         <p:spPr>
           <a:xfrm>
-            <a:off x="7799832" y="1801368"/>
-            <a:ext cx="3145536" cy="640080"/>
+            <a:off x="7708392" y="1764792"/>
+            <a:ext cx="3282696" cy="749808"/>
           </a:xfrm>
           <a:prstGeom prst="rect">
             <a:avLst/>
@@ -16348,7 +16352,7 @@
               <a:buNone/>
             </a:pPr>
             <a:r>
-              <a:rPr lang="en-US" sz="1320" dirty="0">
+              <a:rPr lang="en-US" sz="1220" dirty="0">
                 <a:solidFill>
                   <a:srgbClr val="17364A"/>
                 </a:solidFill>
@@ -16358,7 +16362,7 @@
               </a:rPr>
               <a:t>Public health AI depends on the ability of systems to exchange and interpret data.</a:t>
             </a:r>
-            <a:endParaRPr lang="en-US" sz="1320" dirty="0"/>
+            <a:endParaRPr lang="en-US" sz="1220" dirty="0"/>
           </a:p>
         </p:txBody>
       </p:sp>
@@ -16370,12 +16374,12 @@
         </p:nvSpPr>
         <p:spPr>
           <a:xfrm>
-            <a:off x="7635240" y="2670048"/>
-            <a:ext cx="3474720" cy="1377086"/>
+            <a:off x="7543800" y="2724912"/>
+            <a:ext cx="3611880" cy="1527048"/>
           </a:xfrm>
           <a:prstGeom prst="roundRect">
             <a:avLst>
-              <a:gd name="adj" fmla="val 7968"/>
+              <a:gd name="adj" fmla="val 7186"/>
             </a:avLst>
           </a:prstGeom>
           <a:solidFill>
@@ -16397,8 +16401,8 @@
         </p:nvSpPr>
         <p:spPr>
           <a:xfrm>
-            <a:off x="7799832" y="2816352"/>
-            <a:ext cx="3145536" cy="256032"/>
+            <a:off x="7708392" y="2852928"/>
+            <a:ext cx="3282696" cy="228600"/>
           </a:xfrm>
           <a:prstGeom prst="rect">
             <a:avLst/>
@@ -16414,7 +16418,7 @@
               <a:buNone/>
             </a:pPr>
             <a:r>
-              <a:rPr lang="en-US" sz="1300" b="1" dirty="0">
+              <a:rPr lang="en-US" sz="1220" b="1" dirty="0">
                 <a:solidFill>
                   <a:srgbClr val="0068B7"/>
                 </a:solidFill>
@@ -16424,7 +16428,7 @@
               </a:rPr>
               <a:t>Concept checkpoints</a:t>
             </a:r>
-            <a:endParaRPr lang="en-US" sz="1300" dirty="0"/>
+            <a:endParaRPr lang="en-US" sz="1220" dirty="0"/>
           </a:p>
         </p:txBody>
       </p:sp>
@@ -16436,8 +16440,8 @@
         </p:nvSpPr>
         <p:spPr>
           <a:xfrm>
-            <a:off x="7818120" y="3182112"/>
-            <a:ext cx="3090672" cy="718718"/>
+            <a:off x="7726680" y="3182112"/>
+            <a:ext cx="3227832" cy="960120"/>
           </a:xfrm>
           <a:prstGeom prst="rect">
             <a:avLst/>
@@ -16455,7 +16459,7 @@
               <a:buNone/>
             </a:pPr>
             <a:r>
-              <a:rPr lang="en-US" sz="1220" dirty="0">
+              <a:rPr lang="en-US" sz="1140" dirty="0">
                 <a:solidFill>
                   <a:srgbClr val="17364A"/>
                 </a:solidFill>
@@ -16463,16 +16467,16 @@
                 <a:ea typeface="Aptos" pitchFamily="34" charset="-122"/>
                 <a:cs typeface="Aptos" pitchFamily="34" charset="-120"/>
               </a:rPr>
-              <a:t>Interoperability is the discipline that makes this exchange.</a:t>
-            </a:r>
-            <a:endParaRPr lang="en-US" sz="1220" dirty="0"/>
-          </a:p>
-          <a:p>
-            <a:pPr indent="0" marL="0">
-              <a:buNone/>
-            </a:pPr>
-            <a:r>
-              <a:rPr lang="en-US" sz="1220" dirty="0">
+              <a:t>Interoperability is the discipline that makes this.</a:t>
+            </a:r>
+            <a:endParaRPr lang="en-US" sz="1140" dirty="0"/>
+          </a:p>
+          <a:p>
+            <a:pPr indent="0" marL="0">
+              <a:buNone/>
+            </a:pPr>
+            <a:r>
+              <a:rPr lang="en-US" sz="1140" dirty="0">
                 <a:solidFill>
                   <a:srgbClr val="17364A"/>
                 </a:solidFill>
@@ -16480,9 +16484,9 @@
                 <a:ea typeface="Aptos" pitchFamily="34" charset="-122"/>
                 <a:cs typeface="Aptos" pitchFamily="34" charset="-120"/>
               </a:rPr>
-              <a:t>This module introduces the major standards that public health.</a:t>
-            </a:r>
-            <a:endParaRPr lang="en-US" sz="1220" dirty="0"/>
+              <a:t>This module introduces the major standards that.</a:t>
+            </a:r>
+            <a:endParaRPr lang="en-US" sz="1140" dirty="0"/>
           </a:p>
         </p:txBody>
       </p:sp>
@@ -16494,12 +16498,12 @@
         </p:nvSpPr>
         <p:spPr>
           <a:xfrm>
-            <a:off x="7635240" y="4184294"/>
-            <a:ext cx="3474720" cy="1466698"/>
+            <a:off x="7543800" y="4389120"/>
+            <a:ext cx="3611880" cy="1261872"/>
           </a:xfrm>
           <a:prstGeom prst="roundRect">
             <a:avLst>
-              <a:gd name="adj" fmla="val 7481"/>
+              <a:gd name="adj" fmla="val 8696"/>
             </a:avLst>
           </a:prstGeom>
           <a:solidFill>
@@ -16521,8 +16525,8 @@
         </p:nvSpPr>
         <p:spPr>
           <a:xfrm>
-            <a:off x="7799832" y="4330598"/>
-            <a:ext cx="3145536" cy="256032"/>
+            <a:off x="7708392" y="4517136"/>
+            <a:ext cx="3282696" cy="228600"/>
           </a:xfrm>
           <a:prstGeom prst="rect">
             <a:avLst/>
@@ -16538,7 +16542,7 @@
               <a:buNone/>
             </a:pPr>
             <a:r>
-              <a:rPr lang="en-US" sz="1300" b="1" dirty="0">
+              <a:rPr lang="en-US" sz="1220" b="1" dirty="0">
                 <a:solidFill>
                   <a:srgbClr val="0068B7"/>
                 </a:solidFill>
@@ -16548,7 +16552,7 @@
               </a:rPr>
               <a:t>Apply it</a:t>
             </a:r>
-            <a:endParaRPr lang="en-US" sz="1300" dirty="0"/>
+            <a:endParaRPr lang="en-US" sz="1220" dirty="0"/>
           </a:p>
         </p:txBody>
       </p:sp>
@@ -16560,8 +16564,8 @@
         </p:nvSpPr>
         <p:spPr>
           <a:xfrm>
-            <a:off x="7799832" y="4659782"/>
-            <a:ext cx="3145536" cy="899770"/>
+            <a:off x="7708392" y="4828032"/>
+            <a:ext cx="3282696" cy="749808"/>
           </a:xfrm>
           <a:prstGeom prst="rect">
             <a:avLst/>
@@ -16579,7 +16583,7 @@
               <a:buNone/>
             </a:pPr>
             <a:r>
-              <a:rPr lang="en-US" sz="1320" dirty="0">
+              <a:rPr lang="en-US" sz="1220" dirty="0">
                 <a:solidFill>
                   <a:srgbClr val="17364A"/>
                 </a:solidFill>
@@ -16587,9 +16591,9 @@
                 <a:ea typeface="Aptos" pitchFamily="34" charset="-122"/>
                 <a:cs typeface="Aptos" pitchFamily="34" charset="-120"/>
               </a:rPr>
-              <a:t>Connect the concept to public health purpose, responsible use, required safeguards, documentation, and the next action a department should take.</a:t>
-            </a:r>
-            <a:endParaRPr lang="en-US" sz="1320" dirty="0"/>
+              <a:t>Connect the concept to public health purpose, responsible use, required.</a:t>
+            </a:r>
+            <a:endParaRPr lang="en-US" sz="1220" dirty="0"/>
           </a:p>
         </p:txBody>
       </p:sp>
@@ -16880,8 +16884,8 @@
         </p:nvSpPr>
         <p:spPr>
           <a:xfrm>
-            <a:off x="868680" y="1508760"/>
-            <a:ext cx="6309360" cy="4160520"/>
+            <a:off x="822960" y="1463040"/>
+            <a:ext cx="6565392" cy="4343400"/>
           </a:xfrm>
           <a:prstGeom prst="rect">
             <a:avLst/>
@@ -16899,7 +16903,7 @@
               <a:buNone/>
             </a:pPr>
             <a:r>
-              <a:rPr lang="en-US" sz="2100" dirty="0">
+              <a:rPr lang="en-US" sz="1920" dirty="0">
                 <a:solidFill>
                   <a:srgbClr val="003A63"/>
                 </a:solidFill>
@@ -16909,14 +16913,14 @@
               </a:rPr>
               <a:t>• This national-level module is intended for training and planning purposes.</a:t>
             </a:r>
-            <a:endParaRPr lang="en-US" sz="2100" dirty="0"/>
-          </a:p>
-          <a:p>
-            <a:pPr indent="0" marL="0">
-              <a:buNone/>
-            </a:pPr>
-            <a:r>
-              <a:rPr lang="en-US" sz="2100" dirty="0">
+            <a:endParaRPr lang="en-US" sz="1920" dirty="0"/>
+          </a:p>
+          <a:p>
+            <a:pPr indent="0" marL="0">
+              <a:buNone/>
+            </a:pPr>
+            <a:r>
+              <a:rPr lang="en-US" sz="1920" dirty="0">
                 <a:solidFill>
                   <a:srgbClr val="003A63"/>
                 </a:solidFill>
@@ -16924,16 +16928,16 @@
                 <a:ea typeface="Aptos" pitchFamily="34" charset="-122"/>
                 <a:cs typeface="Aptos" pitchFamily="34" charset="-120"/>
               </a:rPr>
-              <a:t>• It does not replace legal, privacy, procurement, civil rights, records, or agency policy review.</a:t>
-            </a:r>
-            <a:endParaRPr lang="en-US" sz="2100" dirty="0"/>
-          </a:p>
-          <a:p>
-            <a:pPr indent="0" marL="0">
-              <a:buNone/>
-            </a:pPr>
-            <a:r>
-              <a:rPr lang="en-US" sz="2100" dirty="0">
+              <a:t>• It does not replace legal, privacy, procurement, civil rights, records, or.</a:t>
+            </a:r>
+            <a:endParaRPr lang="en-US" sz="1920" dirty="0"/>
+          </a:p>
+          <a:p>
+            <a:pPr indent="0" marL="0">
+              <a:buNone/>
+            </a:pPr>
+            <a:r>
+              <a:rPr lang="en-US" sz="1920" dirty="0">
                 <a:solidFill>
                   <a:srgbClr val="003A63"/>
                 </a:solidFill>
@@ -16941,9 +16945,9 @@
                 <a:ea typeface="Aptos" pitchFamily="34" charset="-122"/>
                 <a:cs typeface="Aptos" pitchFamily="34" charset="-120"/>
               </a:rPr>
-              <a:t>• Learners should confirm applicable requirements in their own jurisdiction and organization.</a:t>
-            </a:r>
-            <a:endParaRPr lang="en-US" sz="2100" dirty="0"/>
+              <a:t>• Learners should confirm applicable requirements in their own jurisdiction.</a:t>
+            </a:r>
+            <a:endParaRPr lang="en-US" sz="1920" dirty="0"/>
           </a:p>
         </p:txBody>
       </p:sp>
@@ -16955,12 +16959,12 @@
         </p:nvSpPr>
         <p:spPr>
           <a:xfrm>
-            <a:off x="7635240" y="1325880"/>
-            <a:ext cx="3474720" cy="1207008"/>
+            <a:off x="7543800" y="1325880"/>
+            <a:ext cx="3611880" cy="1261872"/>
           </a:xfrm>
           <a:prstGeom prst="roundRect">
             <a:avLst>
-              <a:gd name="adj" fmla="val 9091"/>
+              <a:gd name="adj" fmla="val 8696"/>
             </a:avLst>
           </a:prstGeom>
           <a:solidFill>
@@ -16982,8 +16986,8 @@
         </p:nvSpPr>
         <p:spPr>
           <a:xfrm>
-            <a:off x="7799832" y="1472184"/>
-            <a:ext cx="3145536" cy="256032"/>
+            <a:off x="7708392" y="1453896"/>
+            <a:ext cx="3282696" cy="228600"/>
           </a:xfrm>
           <a:prstGeom prst="rect">
             <a:avLst/>
@@ -16999,7 +17003,7 @@
               <a:buNone/>
             </a:pPr>
             <a:r>
-              <a:rPr lang="en-US" sz="1300" b="1" dirty="0">
+              <a:rPr lang="en-US" sz="1220" b="1" dirty="0">
                 <a:solidFill>
                   <a:srgbClr val="0068B7"/>
                 </a:solidFill>
@@ -17009,7 +17013,7 @@
               </a:rPr>
               <a:t>Governance lens</a:t>
             </a:r>
-            <a:endParaRPr lang="en-US" sz="1300" dirty="0"/>
+            <a:endParaRPr lang="en-US" sz="1220" dirty="0"/>
           </a:p>
         </p:txBody>
       </p:sp>
@@ -17021,8 +17025,8 @@
         </p:nvSpPr>
         <p:spPr>
           <a:xfrm>
-            <a:off x="7799832" y="1801368"/>
-            <a:ext cx="3145536" cy="640080"/>
+            <a:off x="7708392" y="1764792"/>
+            <a:ext cx="3282696" cy="749808"/>
           </a:xfrm>
           <a:prstGeom prst="rect">
             <a:avLst/>
@@ -17040,7 +17044,7 @@
               <a:buNone/>
             </a:pPr>
             <a:r>
-              <a:rPr lang="en-US" sz="1320" dirty="0">
+              <a:rPr lang="en-US" sz="1220" dirty="0">
                 <a:solidFill>
                   <a:srgbClr val="17364A"/>
                 </a:solidFill>
@@ -17050,7 +17054,7 @@
               </a:rPr>
               <a:t>This national-level module is intended for training and planning purposes.</a:t>
             </a:r>
-            <a:endParaRPr lang="en-US" sz="1320" dirty="0"/>
+            <a:endParaRPr lang="en-US" sz="1220" dirty="0"/>
           </a:p>
         </p:txBody>
       </p:sp>
@@ -17062,12 +17066,12 @@
         </p:nvSpPr>
         <p:spPr>
           <a:xfrm>
-            <a:off x="7635240" y="2670048"/>
-            <a:ext cx="3474720" cy="1377086"/>
+            <a:off x="7543800" y="2724912"/>
+            <a:ext cx="3611880" cy="1527048"/>
           </a:xfrm>
           <a:prstGeom prst="roundRect">
             <a:avLst>
-              <a:gd name="adj" fmla="val 7968"/>
+              <a:gd name="adj" fmla="val 7186"/>
             </a:avLst>
           </a:prstGeom>
           <a:solidFill>
@@ -17089,24 +17093,26 @@
         </p:nvSpPr>
         <p:spPr>
           <a:xfrm>
-            <a:off x="7799832" y="2798064"/>
-            <a:ext cx="3145536" cy="237744"/>
-          </a:xfrm>
-          <a:prstGeom prst="rect">
-            <a:avLst/>
-          </a:prstGeom>
-          <a:noFill/>
-          <a:ln/>
-        </p:spPr>
-        <p:txBody>
-          <a:bodyPr wrap="square" lIns="0" tIns="0" rIns="0" bIns="0" rtlCol="0" anchor="ctr"/>
-          <a:lstStyle/>
-          <a:p>
-            <a:pPr indent="0" marL="0">
-              <a:buNone/>
-            </a:pPr>
-            <a:r>
-              <a:rPr lang="en-US" sz="1250" b="1" dirty="0">
+            <a:off x="7708392" y="2852928"/>
+            <a:ext cx="3282696" cy="219456"/>
+          </a:xfrm>
+          <a:prstGeom prst="rect">
+            <a:avLst/>
+          </a:prstGeom>
+          <a:noFill/>
+          <a:ln/>
+        </p:spPr>
+        <p:txBody>
+          <a:bodyPr wrap="square" lIns="0" tIns="0" rIns="0" bIns="0" rtlCol="0" anchor="ctr">
+            <a:normAutofit/>
+          </a:bodyPr>
+          <a:lstStyle/>
+          <a:p>
+            <a:pPr indent="0" marL="0">
+              <a:buNone/>
+            </a:pPr>
+            <a:r>
+              <a:rPr lang="en-US" sz="1160" b="1" dirty="0">
                 <a:solidFill>
                   <a:srgbClr val="0068B7"/>
                 </a:solidFill>
@@ -17116,7 +17122,7 @@
               </a:rPr>
               <a:t>Governance pathway</a:t>
             </a:r>
-            <a:endParaRPr lang="en-US" sz="1250" dirty="0"/>
+            <a:endParaRPr lang="en-US" sz="1160" dirty="0"/>
           </a:p>
         </p:txBody>
       </p:sp>
@@ -17128,7 +17134,7 @@
         </p:nvSpPr>
         <p:spPr>
           <a:xfrm>
-            <a:off x="8763000" y="3351276"/>
+            <a:off x="8717280" y="3406140"/>
             <a:ext cx="164592" cy="0"/>
           </a:xfrm>
           <a:prstGeom prst="line">
@@ -17151,8 +17157,8 @@
         </p:nvSpPr>
         <p:spPr>
           <a:xfrm>
-            <a:off x="7872984" y="3200400"/>
-            <a:ext cx="890016" cy="301752"/>
+            <a:off x="7781544" y="3255264"/>
+            <a:ext cx="935736" cy="301752"/>
           </a:xfrm>
           <a:prstGeom prst="roundRect">
             <a:avLst>
@@ -17178,8 +17184,8 @@
         </p:nvSpPr>
         <p:spPr>
           <a:xfrm>
-            <a:off x="7909560" y="3273552"/>
-            <a:ext cx="816864" cy="146304"/>
+            <a:off x="7818120" y="3328416"/>
+            <a:ext cx="862584" cy="146304"/>
           </a:xfrm>
           <a:prstGeom prst="rect">
             <a:avLst/>
@@ -17219,7 +17225,7 @@
         </p:nvSpPr>
         <p:spPr>
           <a:xfrm>
-            <a:off x="9817608" y="3351276"/>
+            <a:off x="9817608" y="3406140"/>
             <a:ext cx="164592" cy="0"/>
           </a:xfrm>
           <a:prstGeom prst="line">
@@ -17242,8 +17248,8 @@
         </p:nvSpPr>
         <p:spPr>
           <a:xfrm>
-            <a:off x="8927592" y="3200400"/>
-            <a:ext cx="890016" cy="301752"/>
+            <a:off x="8881872" y="3255264"/>
+            <a:ext cx="935736" cy="301752"/>
           </a:xfrm>
           <a:prstGeom prst="roundRect">
             <a:avLst>
@@ -17269,8 +17275,8 @@
         </p:nvSpPr>
         <p:spPr>
           <a:xfrm>
-            <a:off x="8964168" y="3273552"/>
-            <a:ext cx="816864" cy="146304"/>
+            <a:off x="8918448" y="3328416"/>
+            <a:ext cx="862584" cy="146304"/>
           </a:xfrm>
           <a:prstGeom prst="rect">
             <a:avLst/>
@@ -17310,8 +17316,8 @@
         </p:nvSpPr>
         <p:spPr>
           <a:xfrm>
-            <a:off x="9982200" y="3200400"/>
-            <a:ext cx="890016" cy="301752"/>
+            <a:off x="9982200" y="3255264"/>
+            <a:ext cx="935736" cy="301752"/>
           </a:xfrm>
           <a:prstGeom prst="roundRect">
             <a:avLst>
@@ -17337,8 +17343,8 @@
         </p:nvSpPr>
         <p:spPr>
           <a:xfrm>
-            <a:off x="10018776" y="3273552"/>
-            <a:ext cx="816864" cy="146304"/>
+            <a:off x="10018776" y="3328416"/>
+            <a:ext cx="862584" cy="146304"/>
           </a:xfrm>
           <a:prstGeom prst="rect">
             <a:avLst/>
@@ -17378,8 +17384,8 @@
         </p:nvSpPr>
         <p:spPr>
           <a:xfrm>
-            <a:off x="7854696" y="3694176"/>
-            <a:ext cx="3035808" cy="206654"/>
+            <a:off x="7763256" y="3749040"/>
+            <a:ext cx="3172968" cy="356616"/>
           </a:xfrm>
           <a:prstGeom prst="rect">
             <a:avLst/>
@@ -17397,7 +17403,7 @@
               <a:buNone/>
             </a:pPr>
             <a:r>
-              <a:rPr lang="en-US" sz="1120" dirty="0">
+              <a:rPr lang="en-US" sz="1040" dirty="0">
                 <a:solidFill>
                   <a:srgbClr val="17364A"/>
                 </a:solidFill>
@@ -17405,9 +17411,9 @@
                 <a:ea typeface="Aptos" pitchFamily="34" charset="-122"/>
                 <a:cs typeface="Aptos" pitchFamily="34" charset="-120"/>
               </a:rPr>
-              <a:t>A proposed AI use should move through documented review before it becomes an operational workflow.</a:t>
-            </a:r>
-            <a:endParaRPr lang="en-US" sz="1120" dirty="0"/>
+              <a:t>A proposed AI use should move through documented review before it.</a:t>
+            </a:r>
+            <a:endParaRPr lang="en-US" sz="1040" dirty="0"/>
           </a:p>
         </p:txBody>
       </p:sp>
@@ -17419,12 +17425,12 @@
         </p:nvSpPr>
         <p:spPr>
           <a:xfrm>
-            <a:off x="7635240" y="4184294"/>
-            <a:ext cx="3474720" cy="1466698"/>
+            <a:off x="7543800" y="4389120"/>
+            <a:ext cx="3611880" cy="1261872"/>
           </a:xfrm>
           <a:prstGeom prst="roundRect">
             <a:avLst>
-              <a:gd name="adj" fmla="val 7481"/>
+              <a:gd name="adj" fmla="val 8696"/>
             </a:avLst>
           </a:prstGeom>
           <a:solidFill>
@@ -17446,8 +17452,8 @@
         </p:nvSpPr>
         <p:spPr>
           <a:xfrm>
-            <a:off x="7799832" y="4330598"/>
-            <a:ext cx="3145536" cy="256032"/>
+            <a:off x="7708392" y="4517136"/>
+            <a:ext cx="3282696" cy="228600"/>
           </a:xfrm>
           <a:prstGeom prst="rect">
             <a:avLst/>
@@ -17463,7 +17469,7 @@
               <a:buNone/>
             </a:pPr>
             <a:r>
-              <a:rPr lang="en-US" sz="1300" b="1" dirty="0">
+              <a:rPr lang="en-US" sz="1220" b="1" dirty="0">
                 <a:solidFill>
                   <a:srgbClr val="0068B7"/>
                 </a:solidFill>
@@ -17473,7 +17479,7 @@
               </a:rPr>
               <a:t>What to document</a:t>
             </a:r>
-            <a:endParaRPr lang="en-US" sz="1300" dirty="0"/>
+            <a:endParaRPr lang="en-US" sz="1220" dirty="0"/>
           </a:p>
         </p:txBody>
       </p:sp>
@@ -17485,8 +17491,8 @@
         </p:nvSpPr>
         <p:spPr>
           <a:xfrm>
-            <a:off x="7799832" y="4659782"/>
-            <a:ext cx="3145536" cy="899770"/>
+            <a:off x="7708392" y="4828032"/>
+            <a:ext cx="3282696" cy="749808"/>
           </a:xfrm>
           <a:prstGeom prst="rect">
             <a:avLst/>
@@ -17504,7 +17510,7 @@
               <a:buNone/>
             </a:pPr>
             <a:r>
-              <a:rPr lang="en-US" sz="1320" dirty="0">
+              <a:rPr lang="en-US" sz="1220" dirty="0">
                 <a:solidFill>
                   <a:srgbClr val="17364A"/>
                 </a:solidFill>
@@ -17512,9 +17518,9 @@
                 <a:ea typeface="Aptos" pitchFamily="34" charset="-122"/>
                 <a:cs typeface="Aptos" pitchFamily="34" charset="-120"/>
               </a:rPr>
-              <a:t>Translate this concept into clear decision rights, review steps, documentation expectations, and escalation paths before an AI-supported workflow is approved.</a:t>
-            </a:r>
-            <a:endParaRPr lang="en-US" sz="1320" dirty="0"/>
+              <a:t>Translate this concept into clear decision rights, review steps, documentation.</a:t>
+            </a:r>
+            <a:endParaRPr lang="en-US" sz="1220" dirty="0"/>
           </a:p>
         </p:txBody>
       </p:sp>
@@ -17805,8 +17811,8 @@
         </p:nvSpPr>
         <p:spPr>
           <a:xfrm>
-            <a:off x="868680" y="1508760"/>
-            <a:ext cx="6309360" cy="4160520"/>
+            <a:off x="822960" y="1463040"/>
+            <a:ext cx="6565392" cy="4343400"/>
           </a:xfrm>
           <a:prstGeom prst="rect">
             <a:avLst/>
@@ -17824,7 +17830,7 @@
               <a:buNone/>
             </a:pPr>
             <a:r>
-              <a:rPr lang="en-US" sz="2100" dirty="0">
+              <a:rPr lang="en-US" sz="1920" dirty="0">
                 <a:solidFill>
                   <a:srgbClr val="003A63"/>
                 </a:solidFill>
@@ -17832,16 +17838,16 @@
                 <a:ea typeface="Aptos" pitchFamily="34" charset="-122"/>
                 <a:cs typeface="Aptos" pitchFamily="34" charset="-120"/>
               </a:rPr>
-              <a:t>• Interoperability matters because AI tools cannot safely use data they cannot access, parse, or.</a:t>
-            </a:r>
-            <a:endParaRPr lang="en-US" sz="2100" dirty="0"/>
-          </a:p>
-          <a:p>
-            <a:pPr indent="0" marL="0">
-              <a:buNone/>
-            </a:pPr>
-            <a:r>
-              <a:rPr lang="en-US" sz="2100" dirty="0">
+              <a:t>• Interoperability matters because AI tools cannot safely use data they cannot.</a:t>
+            </a:r>
+            <a:endParaRPr lang="en-US" sz="1920" dirty="0"/>
+          </a:p>
+          <a:p>
+            <a:pPr indent="0" marL="0">
+              <a:buNone/>
+            </a:pPr>
+            <a:r>
+              <a:rPr lang="en-US" sz="1920" dirty="0">
                 <a:solidFill>
                   <a:srgbClr val="003A63"/>
                 </a:solidFill>
@@ -17849,16 +17855,16 @@
                 <a:ea typeface="Aptos" pitchFamily="34" charset="-122"/>
                 <a:cs typeface="Aptos" pitchFamily="34" charset="-120"/>
               </a:rPr>
-              <a:t>• A public health agency may receive data from hundreds or thousands of healthcare and.</a:t>
-            </a:r>
-            <a:endParaRPr lang="en-US" sz="2100" dirty="0"/>
-          </a:p>
-          <a:p>
-            <a:pPr indent="0" marL="0">
-              <a:buNone/>
-            </a:pPr>
-            <a:r>
-              <a:rPr lang="en-US" sz="2100" dirty="0">
+              <a:t>• A public health agency may receive data from hundreds or thousands of.</a:t>
+            </a:r>
+            <a:endParaRPr lang="en-US" sz="1920" dirty="0"/>
+          </a:p>
+          <a:p>
+            <a:pPr indent="0" marL="0">
+              <a:buNone/>
+            </a:pPr>
+            <a:r>
+              <a:rPr lang="en-US" sz="1920" dirty="0">
                 <a:solidFill>
                   <a:srgbClr val="003A63"/>
                 </a:solidFill>
@@ -17866,9 +17872,9 @@
                 <a:ea typeface="Aptos" pitchFamily="34" charset="-122"/>
                 <a:cs typeface="Aptos" pitchFamily="34" charset="-120"/>
               </a:rPr>
-              <a:t>• Without consistent standards, data exchange becomes a patchwork of custom interfaces, manual.</a:t>
-            </a:r>
-            <a:endParaRPr lang="en-US" sz="2100" dirty="0"/>
+              <a:t>• Without consistent standards, data exchange becomes a patchwork of custom.</a:t>
+            </a:r>
+            <a:endParaRPr lang="en-US" sz="1920" dirty="0"/>
           </a:p>
         </p:txBody>
       </p:sp>
@@ -17880,12 +17886,12 @@
         </p:nvSpPr>
         <p:spPr>
           <a:xfrm>
-            <a:off x="7635240" y="1325880"/>
-            <a:ext cx="3474720" cy="1255471"/>
+            <a:off x="7543800" y="1325880"/>
+            <a:ext cx="3611880" cy="1261872"/>
           </a:xfrm>
           <a:prstGeom prst="roundRect">
             <a:avLst>
-              <a:gd name="adj" fmla="val 8740"/>
+              <a:gd name="adj" fmla="val 8696"/>
             </a:avLst>
           </a:prstGeom>
           <a:solidFill>
@@ -17907,8 +17913,8 @@
         </p:nvSpPr>
         <p:spPr>
           <a:xfrm>
-            <a:off x="7799832" y="1472184"/>
-            <a:ext cx="3145536" cy="256032"/>
+            <a:off x="7708392" y="1453896"/>
+            <a:ext cx="3282696" cy="228600"/>
           </a:xfrm>
           <a:prstGeom prst="rect">
             <a:avLst/>
@@ -17924,7 +17930,7 @@
               <a:buNone/>
             </a:pPr>
             <a:r>
-              <a:rPr lang="en-US" sz="1300" b="1" dirty="0">
+              <a:rPr lang="en-US" sz="1220" b="1" dirty="0">
                 <a:solidFill>
                   <a:srgbClr val="0068B7"/>
                 </a:solidFill>
@@ -17934,7 +17940,7 @@
               </a:rPr>
               <a:t>Core concept</a:t>
             </a:r>
-            <a:endParaRPr lang="en-US" sz="1300" dirty="0"/>
+            <a:endParaRPr lang="en-US" sz="1220" dirty="0"/>
           </a:p>
         </p:txBody>
       </p:sp>
@@ -17946,8 +17952,8 @@
         </p:nvSpPr>
         <p:spPr>
           <a:xfrm>
-            <a:off x="7799832" y="1801368"/>
-            <a:ext cx="3145536" cy="688543"/>
+            <a:off x="7708392" y="1764792"/>
+            <a:ext cx="3282696" cy="749808"/>
           </a:xfrm>
           <a:prstGeom prst="rect">
             <a:avLst/>
@@ -17965,7 +17971,7 @@
               <a:buNone/>
             </a:pPr>
             <a:r>
-              <a:rPr lang="en-US" sz="1320" dirty="0">
+              <a:rPr lang="en-US" sz="1220" dirty="0">
                 <a:solidFill>
                   <a:srgbClr val="17364A"/>
                 </a:solidFill>
@@ -17973,9 +17979,9 @@
                 <a:ea typeface="Aptos" pitchFamily="34" charset="-122"/>
                 <a:cs typeface="Aptos" pitchFamily="34" charset="-120"/>
               </a:rPr>
-              <a:t>Interoperability matters because AI tools cannot safely use data they cannot access, parse, or interpret.</a:t>
-            </a:r>
-            <a:endParaRPr lang="en-US" sz="1320" dirty="0"/>
+              <a:t>Interoperability matters because AI tools cannot safely use data they cannot.</a:t>
+            </a:r>
+            <a:endParaRPr lang="en-US" sz="1220" dirty="0"/>
           </a:p>
         </p:txBody>
       </p:sp>
@@ -17987,12 +17993,12 @@
         </p:nvSpPr>
         <p:spPr>
           <a:xfrm>
-            <a:off x="7635240" y="2718511"/>
-            <a:ext cx="3474720" cy="1328623"/>
+            <a:off x="7543800" y="2724912"/>
+            <a:ext cx="3611880" cy="1527048"/>
           </a:xfrm>
           <a:prstGeom prst="roundRect">
             <a:avLst>
-              <a:gd name="adj" fmla="val 8259"/>
+              <a:gd name="adj" fmla="val 7186"/>
             </a:avLst>
           </a:prstGeom>
           <a:solidFill>
@@ -18014,8 +18020,8 @@
         </p:nvSpPr>
         <p:spPr>
           <a:xfrm>
-            <a:off x="7799832" y="2864815"/>
-            <a:ext cx="3145536" cy="256032"/>
+            <a:off x="7708392" y="2852928"/>
+            <a:ext cx="3282696" cy="228600"/>
           </a:xfrm>
           <a:prstGeom prst="rect">
             <a:avLst/>
@@ -18031,7 +18037,7 @@
               <a:buNone/>
             </a:pPr>
             <a:r>
-              <a:rPr lang="en-US" sz="1300" b="1" dirty="0">
+              <a:rPr lang="en-US" sz="1220" b="1" dirty="0">
                 <a:solidFill>
                   <a:srgbClr val="0068B7"/>
                 </a:solidFill>
@@ -18041,7 +18047,7 @@
               </a:rPr>
               <a:t>Concept checkpoints</a:t>
             </a:r>
-            <a:endParaRPr lang="en-US" sz="1300" dirty="0"/>
+            <a:endParaRPr lang="en-US" sz="1220" dirty="0"/>
           </a:p>
         </p:txBody>
       </p:sp>
@@ -18053,8 +18059,8 @@
         </p:nvSpPr>
         <p:spPr>
           <a:xfrm>
-            <a:off x="7818120" y="3230575"/>
-            <a:ext cx="3090672" cy="670255"/>
+            <a:off x="7726680" y="3182112"/>
+            <a:ext cx="3227832" cy="960120"/>
           </a:xfrm>
           <a:prstGeom prst="rect">
             <a:avLst/>
@@ -18072,7 +18078,7 @@
               <a:buNone/>
             </a:pPr>
             <a:r>
-              <a:rPr lang="en-US" sz="1220" dirty="0">
+              <a:rPr lang="en-US" sz="1140" dirty="0">
                 <a:solidFill>
                   <a:srgbClr val="17364A"/>
                 </a:solidFill>
@@ -18080,16 +18086,16 @@
                 <a:ea typeface="Aptos" pitchFamily="34" charset="-122"/>
                 <a:cs typeface="Aptos" pitchFamily="34" charset="-120"/>
               </a:rPr>
-              <a:t>Without consistent standards, data exchange becomes a patchwork of.</a:t>
-            </a:r>
-            <a:endParaRPr lang="en-US" sz="1220" dirty="0"/>
-          </a:p>
-          <a:p>
-            <a:pPr indent="0" marL="0">
-              <a:buNone/>
-            </a:pPr>
-            <a:r>
-              <a:rPr lang="en-US" sz="1220" dirty="0">
+              <a:t>Without consistent standards, data exchange.</a:t>
+            </a:r>
+            <a:endParaRPr lang="en-US" sz="1140" dirty="0"/>
+          </a:p>
+          <a:p>
+            <a:pPr indent="0" marL="0">
+              <a:buNone/>
+            </a:pPr>
+            <a:r>
+              <a:rPr lang="en-US" sz="1140" dirty="0">
                 <a:solidFill>
                   <a:srgbClr val="17364A"/>
                 </a:solidFill>
@@ -18097,16 +18103,16 @@
                 <a:ea typeface="Aptos" pitchFamily="34" charset="-122"/>
                 <a:cs typeface="Aptos" pitchFamily="34" charset="-120"/>
               </a:rPr>
-              <a:t>AI tools built on top of that environment may appear sophisticated.</a:t>
-            </a:r>
-            <a:endParaRPr lang="en-US" sz="1220" dirty="0"/>
-          </a:p>
-          <a:p>
-            <a:pPr indent="0" marL="0">
-              <a:buNone/>
-            </a:pPr>
-            <a:r>
-              <a:rPr lang="en-US" sz="1220" dirty="0">
+              <a:t>AI tools built on top of that environment may.</a:t>
+            </a:r>
+            <a:endParaRPr lang="en-US" sz="1140" dirty="0"/>
+          </a:p>
+          <a:p>
+            <a:pPr indent="0" marL="0">
+              <a:buNone/>
+            </a:pPr>
+            <a:r>
+              <a:rPr lang="en-US" sz="1140" dirty="0">
                 <a:solidFill>
                   <a:srgbClr val="17364A"/>
                 </a:solidFill>
@@ -18116,7 +18122,7 @@
               </a:rPr>
               <a:t>Standards also affect equity and efficiency.</a:t>
             </a:r>
-            <a:endParaRPr lang="en-US" sz="1220" dirty="0"/>
+            <a:endParaRPr lang="en-US" sz="1140" dirty="0"/>
           </a:p>
         </p:txBody>
       </p:sp>
@@ -18128,12 +18134,12 @@
         </p:nvSpPr>
         <p:spPr>
           <a:xfrm>
-            <a:off x="7635240" y="4184294"/>
-            <a:ext cx="3474720" cy="1466698"/>
+            <a:off x="7543800" y="4389120"/>
+            <a:ext cx="3611880" cy="1261872"/>
           </a:xfrm>
           <a:prstGeom prst="roundRect">
             <a:avLst>
-              <a:gd name="adj" fmla="val 7481"/>
+              <a:gd name="adj" fmla="val 8696"/>
             </a:avLst>
           </a:prstGeom>
           <a:solidFill>
@@ -18155,8 +18161,8 @@
         </p:nvSpPr>
         <p:spPr>
           <a:xfrm>
-            <a:off x="7799832" y="4330598"/>
-            <a:ext cx="3145536" cy="256032"/>
+            <a:off x="7708392" y="4517136"/>
+            <a:ext cx="3282696" cy="228600"/>
           </a:xfrm>
           <a:prstGeom prst="rect">
             <a:avLst/>
@@ -18172,7 +18178,7 @@
               <a:buNone/>
             </a:pPr>
             <a:r>
-              <a:rPr lang="en-US" sz="1300" b="1" dirty="0">
+              <a:rPr lang="en-US" sz="1220" b="1" dirty="0">
                 <a:solidFill>
                   <a:srgbClr val="0068B7"/>
                 </a:solidFill>
@@ -18182,7 +18188,7 @@
               </a:rPr>
               <a:t>Apply it</a:t>
             </a:r>
-            <a:endParaRPr lang="en-US" sz="1300" dirty="0"/>
+            <a:endParaRPr lang="en-US" sz="1220" dirty="0"/>
           </a:p>
         </p:txBody>
       </p:sp>
@@ -18194,8 +18200,8 @@
         </p:nvSpPr>
         <p:spPr>
           <a:xfrm>
-            <a:off x="7799832" y="4659782"/>
-            <a:ext cx="3145536" cy="899770"/>
+            <a:off x="7708392" y="4828032"/>
+            <a:ext cx="3282696" cy="749808"/>
           </a:xfrm>
           <a:prstGeom prst="rect">
             <a:avLst/>
@@ -18213,7 +18219,7 @@
               <a:buNone/>
             </a:pPr>
             <a:r>
-              <a:rPr lang="en-US" sz="1320" dirty="0">
+              <a:rPr lang="en-US" sz="1220" dirty="0">
                 <a:solidFill>
                   <a:srgbClr val="17364A"/>
                 </a:solidFill>
@@ -18221,9 +18227,9 @@
                 <a:ea typeface="Aptos" pitchFamily="34" charset="-122"/>
                 <a:cs typeface="Aptos" pitchFamily="34" charset="-120"/>
               </a:rPr>
-              <a:t>Connect the concept to public health purpose, responsible use, required safeguards, documentation, and the next action a department should take.</a:t>
-            </a:r>
-            <a:endParaRPr lang="en-US" sz="1320" dirty="0"/>
+              <a:t>Connect the concept to public health purpose, responsible use, required.</a:t>
+            </a:r>
+            <a:endParaRPr lang="en-US" sz="1220" dirty="0"/>
           </a:p>
         </p:txBody>
       </p:sp>
@@ -18514,8 +18520,8 @@
         </p:nvSpPr>
         <p:spPr>
           <a:xfrm>
-            <a:off x="868680" y="1508760"/>
-            <a:ext cx="6309360" cy="4160520"/>
+            <a:off x="822960" y="1463040"/>
+            <a:ext cx="6565392" cy="4343400"/>
           </a:xfrm>
           <a:prstGeom prst="rect">
             <a:avLst/>
@@ -18533,7 +18539,7 @@
               <a:buNone/>
             </a:pPr>
             <a:r>
-              <a:rPr lang="en-US" sz="2100" dirty="0">
+              <a:rPr lang="en-US" sz="1920" dirty="0">
                 <a:solidFill>
                   <a:srgbClr val="003A63"/>
                 </a:solidFill>
@@ -18543,14 +18549,14 @@
               </a:rPr>
               <a:t>• HL7 v2.</a:t>
             </a:r>
-            <a:endParaRPr lang="en-US" sz="2100" dirty="0"/>
-          </a:p>
-          <a:p>
-            <a:pPr indent="0" marL="0">
-              <a:buNone/>
-            </a:pPr>
-            <a:r>
-              <a:rPr lang="en-US" sz="2100" dirty="0">
+            <a:endParaRPr lang="en-US" sz="1920" dirty="0"/>
+          </a:p>
+          <a:p>
+            <a:pPr indent="0" marL="0">
+              <a:buNone/>
+            </a:pPr>
+            <a:r>
+              <a:rPr lang="en-US" sz="1920" dirty="0">
                 <a:solidFill>
                   <a:srgbClr val="003A63"/>
                 </a:solidFill>
@@ -18558,16 +18564,16 @@
                 <a:ea typeface="Aptos" pitchFamily="34" charset="-122"/>
                 <a:cs typeface="Aptos" pitchFamily="34" charset="-120"/>
               </a:rPr>
-              <a:t>• HL7 v2 is a widely used message-based standard in healthcare and public health.</a:t>
-            </a:r>
-            <a:endParaRPr lang="en-US" sz="2100" dirty="0"/>
-          </a:p>
-          <a:p>
-            <a:pPr indent="0" marL="0">
-              <a:buNone/>
-            </a:pPr>
-            <a:r>
-              <a:rPr lang="en-US" sz="2100" dirty="0">
+              <a:t>• HL7 v2 is a widely used message-based standard in healthcare and public.</a:t>
+            </a:r>
+            <a:endParaRPr lang="en-US" sz="1920" dirty="0"/>
+          </a:p>
+          <a:p>
+            <a:pPr indent="0" marL="0">
+              <a:buNone/>
+            </a:pPr>
+            <a:r>
+              <a:rPr lang="en-US" sz="1920" dirty="0">
                 <a:solidFill>
                   <a:srgbClr val="003A63"/>
                 </a:solidFill>
@@ -18575,9 +18581,9 @@
                 <a:ea typeface="Aptos" pitchFamily="34" charset="-122"/>
                 <a:cs typeface="Aptos" pitchFamily="34" charset="-120"/>
               </a:rPr>
-              <a:t>• It is common in laboratory reporting, immunization messaging, admission-discharge-transfer.</a:t>
-            </a:r>
-            <a:endParaRPr lang="en-US" sz="2100" dirty="0"/>
+              <a:t>• It is common in laboratory reporting, immunization messaging,.</a:t>
+            </a:r>
+            <a:endParaRPr lang="en-US" sz="1920" dirty="0"/>
           </a:p>
         </p:txBody>
       </p:sp>
@@ -18589,12 +18595,12 @@
         </p:nvSpPr>
         <p:spPr>
           <a:xfrm>
-            <a:off x="7635240" y="1325880"/>
-            <a:ext cx="3474720" cy="1207008"/>
+            <a:off x="7543800" y="1325880"/>
+            <a:ext cx="3611880" cy="1261872"/>
           </a:xfrm>
           <a:prstGeom prst="roundRect">
             <a:avLst>
-              <a:gd name="adj" fmla="val 9091"/>
+              <a:gd name="adj" fmla="val 8696"/>
             </a:avLst>
           </a:prstGeom>
           <a:solidFill>
@@ -18616,8 +18622,8 @@
         </p:nvSpPr>
         <p:spPr>
           <a:xfrm>
-            <a:off x="7799832" y="1472184"/>
-            <a:ext cx="3145536" cy="256032"/>
+            <a:off x="7708392" y="1453896"/>
+            <a:ext cx="3282696" cy="228600"/>
           </a:xfrm>
           <a:prstGeom prst="rect">
             <a:avLst/>
@@ -18633,7 +18639,7 @@
               <a:buNone/>
             </a:pPr>
             <a:r>
-              <a:rPr lang="en-US" sz="1300" b="1" dirty="0">
+              <a:rPr lang="en-US" sz="1220" b="1" dirty="0">
                 <a:solidFill>
                   <a:srgbClr val="0068B7"/>
                 </a:solidFill>
@@ -18643,7 +18649,7 @@
               </a:rPr>
               <a:t>Core concept</a:t>
             </a:r>
-            <a:endParaRPr lang="en-US" sz="1300" dirty="0"/>
+            <a:endParaRPr lang="en-US" sz="1220" dirty="0"/>
           </a:p>
         </p:txBody>
       </p:sp>
@@ -18655,8 +18661,8 @@
         </p:nvSpPr>
         <p:spPr>
           <a:xfrm>
-            <a:off x="7799832" y="1801368"/>
-            <a:ext cx="3145536" cy="640080"/>
+            <a:off x="7708392" y="1764792"/>
+            <a:ext cx="3282696" cy="749808"/>
           </a:xfrm>
           <a:prstGeom prst="rect">
             <a:avLst/>
@@ -18674,7 +18680,7 @@
               <a:buNone/>
             </a:pPr>
             <a:r>
-              <a:rPr lang="en-US" sz="1320" dirty="0">
+              <a:rPr lang="en-US" sz="1220" dirty="0">
                 <a:solidFill>
                   <a:srgbClr val="17364A"/>
                 </a:solidFill>
@@ -18684,7 +18690,7 @@
               </a:rPr>
               <a:t>HL7 v2.</a:t>
             </a:r>
-            <a:endParaRPr lang="en-US" sz="1320" dirty="0"/>
+            <a:endParaRPr lang="en-US" sz="1220" dirty="0"/>
           </a:p>
         </p:txBody>
       </p:sp>
@@ -18696,12 +18702,12 @@
         </p:nvSpPr>
         <p:spPr>
           <a:xfrm>
-            <a:off x="7635240" y="2670048"/>
-            <a:ext cx="3474720" cy="1377086"/>
+            <a:off x="7543800" y="2724912"/>
+            <a:ext cx="3611880" cy="1527048"/>
           </a:xfrm>
           <a:prstGeom prst="roundRect">
             <a:avLst>
-              <a:gd name="adj" fmla="val 7968"/>
+              <a:gd name="adj" fmla="val 7186"/>
             </a:avLst>
           </a:prstGeom>
           <a:solidFill>
@@ -18723,8 +18729,8 @@
         </p:nvSpPr>
         <p:spPr>
           <a:xfrm>
-            <a:off x="7799832" y="2816352"/>
-            <a:ext cx="3145536" cy="256032"/>
+            <a:off x="7708392" y="2852928"/>
+            <a:ext cx="3282696" cy="228600"/>
           </a:xfrm>
           <a:prstGeom prst="rect">
             <a:avLst/>
@@ -18740,7 +18746,7 @@
               <a:buNone/>
             </a:pPr>
             <a:r>
-              <a:rPr lang="en-US" sz="1300" b="1" dirty="0">
+              <a:rPr lang="en-US" sz="1220" b="1" dirty="0">
                 <a:solidFill>
                   <a:srgbClr val="0068B7"/>
                 </a:solidFill>
@@ -18750,7 +18756,7 @@
               </a:rPr>
               <a:t>Concept checkpoints</a:t>
             </a:r>
-            <a:endParaRPr lang="en-US" sz="1300" dirty="0"/>
+            <a:endParaRPr lang="en-US" sz="1220" dirty="0"/>
           </a:p>
         </p:txBody>
       </p:sp>
@@ -18762,8 +18768,8 @@
         </p:nvSpPr>
         <p:spPr>
           <a:xfrm>
-            <a:off x="7818120" y="3182112"/>
-            <a:ext cx="3090672" cy="718718"/>
+            <a:off x="7726680" y="3182112"/>
+            <a:ext cx="3227832" cy="960120"/>
           </a:xfrm>
           <a:prstGeom prst="rect">
             <a:avLst/>
@@ -18781,7 +18787,7 @@
               <a:buNone/>
             </a:pPr>
             <a:r>
-              <a:rPr lang="en-US" sz="1220" dirty="0">
+              <a:rPr lang="en-US" sz="1140" dirty="0">
                 <a:solidFill>
                   <a:srgbClr val="17364A"/>
                 </a:solidFill>
@@ -18789,16 +18795,16 @@
                 <a:ea typeface="Aptos" pitchFamily="34" charset="-122"/>
                 <a:cs typeface="Aptos" pitchFamily="34" charset="-120"/>
               </a:rPr>
-              <a:t>It is common in laboratory reporting, immunization messaging,.</a:t>
-            </a:r>
-            <a:endParaRPr lang="en-US" sz="1220" dirty="0"/>
-          </a:p>
-          <a:p>
-            <a:pPr indent="0" marL="0">
-              <a:buNone/>
-            </a:pPr>
-            <a:r>
-              <a:rPr lang="en-US" sz="1220" dirty="0">
+              <a:t>It is common in laboratory reporting, immunization.</a:t>
+            </a:r>
+            <a:endParaRPr lang="en-US" sz="1140" dirty="0"/>
+          </a:p>
+          <a:p>
+            <a:pPr indent="0" marL="0">
+              <a:buNone/>
+            </a:pPr>
+            <a:r>
+              <a:rPr lang="en-US" sz="1140" dirty="0">
                 <a:solidFill>
                   <a:srgbClr val="17364A"/>
                 </a:solidFill>
@@ -18806,16 +18812,16 @@
                 <a:ea typeface="Aptos" pitchFamily="34" charset="-122"/>
                 <a:cs typeface="Aptos" pitchFamily="34" charset="-120"/>
               </a:rPr>
-              <a:t>HL7 v2 is mature and widely deployed, but messages can vary by.</a:t>
-            </a:r>
-            <a:endParaRPr lang="en-US" sz="1220" dirty="0"/>
-          </a:p>
-          <a:p>
-            <a:pPr indent="0" marL="0">
-              <a:buNone/>
-            </a:pPr>
-            <a:r>
-              <a:rPr lang="en-US" sz="1220" dirty="0">
+              <a:t>HL7 v2 is mature and widely deployed, but messages.</a:t>
+            </a:r>
+            <a:endParaRPr lang="en-US" sz="1140" dirty="0"/>
+          </a:p>
+          <a:p>
+            <a:pPr indent="0" marL="0">
+              <a:buNone/>
+            </a:pPr>
+            <a:r>
+              <a:rPr lang="en-US" sz="1140" dirty="0">
                 <a:solidFill>
                   <a:srgbClr val="17364A"/>
                 </a:solidFill>
@@ -18825,7 +18831,7 @@
               </a:rPr>
               <a:t>CDA.</a:t>
             </a:r>
-            <a:endParaRPr lang="en-US" sz="1220" dirty="0"/>
+            <a:endParaRPr lang="en-US" sz="1140" dirty="0"/>
           </a:p>
         </p:txBody>
       </p:sp>
@@ -18837,12 +18843,12 @@
         </p:nvSpPr>
         <p:spPr>
           <a:xfrm>
-            <a:off x="7635240" y="4184294"/>
-            <a:ext cx="3474720" cy="1466698"/>
+            <a:off x="7543800" y="4389120"/>
+            <a:ext cx="3611880" cy="1261872"/>
           </a:xfrm>
           <a:prstGeom prst="roundRect">
             <a:avLst>
-              <a:gd name="adj" fmla="val 7481"/>
+              <a:gd name="adj" fmla="val 8696"/>
             </a:avLst>
           </a:prstGeom>
           <a:solidFill>
@@ -18864,8 +18870,8 @@
         </p:nvSpPr>
         <p:spPr>
           <a:xfrm>
-            <a:off x="7799832" y="4330598"/>
-            <a:ext cx="3145536" cy="256032"/>
+            <a:off x="7708392" y="4517136"/>
+            <a:ext cx="3282696" cy="228600"/>
           </a:xfrm>
           <a:prstGeom prst="rect">
             <a:avLst/>
@@ -18881,7 +18887,7 @@
               <a:buNone/>
             </a:pPr>
             <a:r>
-              <a:rPr lang="en-US" sz="1300" b="1" dirty="0">
+              <a:rPr lang="en-US" sz="1220" b="1" dirty="0">
                 <a:solidFill>
                   <a:srgbClr val="0068B7"/>
                 </a:solidFill>
@@ -18891,7 +18897,7 @@
               </a:rPr>
               <a:t>Apply it</a:t>
             </a:r>
-            <a:endParaRPr lang="en-US" sz="1300" dirty="0"/>
+            <a:endParaRPr lang="en-US" sz="1220" dirty="0"/>
           </a:p>
         </p:txBody>
       </p:sp>
@@ -18903,8 +18909,8 @@
         </p:nvSpPr>
         <p:spPr>
           <a:xfrm>
-            <a:off x="7799832" y="4659782"/>
-            <a:ext cx="3145536" cy="899770"/>
+            <a:off x="7708392" y="4828032"/>
+            <a:ext cx="3282696" cy="749808"/>
           </a:xfrm>
           <a:prstGeom prst="rect">
             <a:avLst/>
@@ -18922,7 +18928,7 @@
               <a:buNone/>
             </a:pPr>
             <a:r>
-              <a:rPr lang="en-US" sz="1320" dirty="0">
+              <a:rPr lang="en-US" sz="1220" dirty="0">
                 <a:solidFill>
                   <a:srgbClr val="17364A"/>
                 </a:solidFill>
@@ -18930,9 +18936,9 @@
                 <a:ea typeface="Aptos" pitchFamily="34" charset="-122"/>
                 <a:cs typeface="Aptos" pitchFamily="34" charset="-120"/>
               </a:rPr>
-              <a:t>Connect the concept to public health purpose, responsible use, required safeguards, documentation, and the next action a department should take.</a:t>
-            </a:r>
-            <a:endParaRPr lang="en-US" sz="1320" dirty="0"/>
+              <a:t>Connect the concept to public health purpose, responsible use, required.</a:t>
+            </a:r>
+            <a:endParaRPr lang="en-US" sz="1220" dirty="0"/>
           </a:p>
         </p:txBody>
       </p:sp>

--- a/downloads/presentations/modules/arc-220.pptx
+++ b/downloads/presentations/modules/arc-220.pptx
@@ -12888,7 +12888,7 @@
                 <a:ea typeface="Aptos" pitchFamily="34" charset="-122"/>
                 <a:cs typeface="Aptos" pitchFamily="34" charset="-120"/>
               </a:rPr>
-              <a:t>• 1. Why does interoperability matter for AI-supported public health workflows?</a:t>
+              <a:t>1. Why does interoperability matter for AI-supported public health workflows?</a:t>
             </a:r>
             <a:endParaRPr lang="en-US" sz="1920" dirty="0"/>
           </a:p>
@@ -12905,7 +12905,7 @@
                 <a:ea typeface="Aptos" pitchFamily="34" charset="-122"/>
                 <a:cs typeface="Aptos" pitchFamily="34" charset="-120"/>
               </a:rPr>
-              <a:t>• 2. What is FHIR commonly used for?</a:t>
+              <a:t>2. What is FHIR commonly used for?</a:t>
             </a:r>
             <a:endParaRPr lang="en-US" sz="1920" dirty="0"/>
           </a:p>
@@ -12922,7 +12922,7 @@
                 <a:ea typeface="Aptos" pitchFamily="34" charset="-122"/>
                 <a:cs typeface="Aptos" pitchFamily="34" charset="-120"/>
               </a:rPr>
-              <a:t>• 3. What is an implementation guide?</a:t>
+              <a:t>3. What is an implementation guide?</a:t>
             </a:r>
             <a:endParaRPr lang="en-US" sz="1920" dirty="0"/>
           </a:p>
@@ -13029,7 +13029,7 @@
                 <a:ea typeface="Aptos" pitchFamily="34" charset="-122"/>
                 <a:cs typeface="Aptos" pitchFamily="34" charset="-120"/>
               </a:rPr>
-              <a:t>1. Why does interoperability matter for AI-supported public health workflows?</a:t>
+              <a:t>Why does interoperability matter for AI-supported public health workflows?</a:t>
             </a:r>
             <a:endParaRPr lang="en-US" sz="1220" dirty="0"/>
           </a:p>
@@ -13136,41 +13136,7 @@
                 <a:ea typeface="Aptos" pitchFamily="34" charset="-122"/>
                 <a:cs typeface="Aptos" pitchFamily="34" charset="-120"/>
               </a:rPr>
-              <a:t>1.</a:t>
-            </a:r>
-            <a:endParaRPr lang="en-US" sz="1140" dirty="0"/>
-          </a:p>
-          <a:p>
-            <a:pPr indent="0" marL="0">
-              <a:buNone/>
-            </a:pPr>
-            <a:r>
-              <a:rPr lang="en-US" sz="1140" dirty="0">
-                <a:solidFill>
-                  <a:srgbClr val="17364A"/>
-                </a:solidFill>
-                <a:latin typeface="Aptos" pitchFamily="34" charset="0"/>
-                <a:ea typeface="Aptos" pitchFamily="34" charset="-122"/>
-                <a:cs typeface="Aptos" pitchFamily="34" charset="-120"/>
-              </a:rPr>
               <a:t>Why does interoperability matter for AI-supported.</a:t>
-            </a:r>
-            <a:endParaRPr lang="en-US" sz="1140" dirty="0"/>
-          </a:p>
-          <a:p>
-            <a:pPr indent="0" marL="0">
-              <a:buNone/>
-            </a:pPr>
-            <a:r>
-              <a:rPr lang="en-US" sz="1140" dirty="0">
-                <a:solidFill>
-                  <a:srgbClr val="17364A"/>
-                </a:solidFill>
-                <a:latin typeface="Aptos" pitchFamily="34" charset="0"/>
-                <a:ea typeface="Aptos" pitchFamily="34" charset="-122"/>
-                <a:cs typeface="Aptos" pitchFamily="34" charset="-120"/>
-              </a:rPr>
-              <a:t>2.</a:t>
             </a:r>
             <a:endParaRPr lang="en-US" sz="1140" dirty="0"/>
           </a:p>
